--- a/outputs/pptx/productive_finance_policy_styled_draft.pptx
+++ b/outputs/pptx/productive_finance_policy_styled_draft.pptx
@@ -9368,7 +9368,7 @@
               </a:spcAft>
             </a:pPr>
             <a:r>
-              <a:rPr sz="2400">
+              <a:rPr sz="2800">
                 <a:solidFill>
                   <a:srgbClr val="FF0000"/>
                 </a:solidFill>
@@ -9384,7 +9384,7 @@
               </a:spcAft>
             </a:pPr>
             <a:r>
-              <a:rPr sz="2400">
+              <a:rPr sz="2800">
                 <a:solidFill>
                   <a:srgbClr val="FF0000"/>
                 </a:solidFill>
@@ -9400,7 +9400,7 @@
               </a:spcAft>
             </a:pPr>
             <a:r>
-              <a:rPr sz="2400">
+              <a:rPr sz="2800">
                 <a:solidFill>
                   <a:srgbClr val="FF0000"/>
                 </a:solidFill>
@@ -9748,7 +9748,7 @@
             <a:r>
               <a:rPr sz="5400" b="1">
                 <a:solidFill>
-                  <a:srgbClr val="FF0000"/>
+                  <a:srgbClr val="181C23"/>
                 </a:solidFill>
                 <a:latin typeface="맑은 고딕"/>
               </a:rPr>
@@ -9919,7 +9919,7 @@
         <p:spPr>
           <a:xfrm>
             <a:off x="713232" y="2795320"/>
-            <a:ext cx="9875520" cy="2651760"/>
+            <a:ext cx="6766560" cy="2651760"/>
           </a:xfrm>
           <a:prstGeom prst="rect">
             <a:avLst/>
@@ -9938,7 +9938,7 @@
               </a:spcAft>
             </a:pPr>
             <a:r>
-              <a:rPr sz="2400">
+              <a:rPr sz="2000">
                 <a:solidFill>
                   <a:srgbClr val="FF0000"/>
                 </a:solidFill>
@@ -9954,7 +9954,7 @@
               </a:spcAft>
             </a:pPr>
             <a:r>
-              <a:rPr sz="2400">
+              <a:rPr sz="2000">
                 <a:solidFill>
                   <a:srgbClr val="FF0000"/>
                 </a:solidFill>
@@ -9970,7 +9970,7 @@
               </a:spcAft>
             </a:pPr>
             <a:r>
-              <a:rPr sz="2400">
+              <a:rPr sz="2000">
                 <a:solidFill>
                   <a:srgbClr val="FF0000"/>
                 </a:solidFill>
@@ -9989,8 +9989,8 @@
         </p:nvSpPr>
         <p:spPr>
           <a:xfrm>
-            <a:off x="8778240" y="4389120"/>
-            <a:ext cx="2377440" cy="1097280"/>
+            <a:off x="8458200" y="4389120"/>
+            <a:ext cx="2560320" cy="1097280"/>
           </a:xfrm>
           <a:prstGeom prst="rect">
             <a:avLst/>
@@ -10024,23 +10024,13 @@
           <a:p>
             <a:pPr algn="ctr"/>
             <a:r>
-              <a:rPr sz="1600">
+              <a:rPr sz="1300">
                 <a:solidFill>
                   <a:srgbClr val="566070"/>
                 </a:solidFill>
                 <a:latin typeface="맑은 고딕"/>
               </a:rPr>
-              <a:t>[수동 삽입 필요]</a:t>
-            </a:r>
-            <a:br/>
-            <a:r>
-              <a:rPr sz="1600">
-                <a:solidFill>
-                  <a:srgbClr val="566070"/>
-                </a:solidFill>
-                <a:latin typeface="맑은 고딕"/>
-              </a:rPr>
-              <a:t>Manual visual placeholder; choose asset during later Piti/PPT work.</a:t>
+              <a:t>[수동 삽입]</a:t>
             </a:r>
           </a:p>
         </p:txBody>
@@ -10149,7 +10139,7 @@
         <p:spPr>
           <a:xfrm>
             <a:off x="572414" y="411480"/>
-            <a:ext cx="10972800" cy="685800"/>
+            <a:ext cx="6720840" cy="685800"/>
           </a:xfrm>
           <a:prstGeom prst="rect">
             <a:avLst/>
@@ -10183,7 +10173,7 @@
         <p:spPr>
           <a:xfrm>
             <a:off x="572414" y="1208836"/>
-            <a:ext cx="11193170" cy="1302105"/>
+            <a:ext cx="6720840" cy="1302105"/>
           </a:xfrm>
           <a:prstGeom prst="rect">
             <a:avLst/>
@@ -10202,7 +10192,7 @@
               </a:spcAft>
             </a:pPr>
             <a:r>
-              <a:rPr sz="2400">
+              <a:rPr sz="2000">
                 <a:solidFill>
                   <a:srgbClr val="FF0000"/>
                 </a:solidFill>
@@ -10218,7 +10208,7 @@
               </a:spcAft>
             </a:pPr>
             <a:r>
-              <a:rPr sz="2400">
+              <a:rPr sz="2000">
                 <a:solidFill>
                   <a:srgbClr val="FF0000"/>
                 </a:solidFill>
@@ -10234,7 +10224,7 @@
               </a:spcAft>
             </a:pPr>
             <a:r>
-              <a:rPr sz="2400">
+              <a:rPr sz="2000">
                 <a:solidFill>
                   <a:srgbClr val="FF0000"/>
                 </a:solidFill>
@@ -10253,8 +10243,8 @@
         </p:nvSpPr>
         <p:spPr>
           <a:xfrm>
-            <a:off x="8183879" y="1417320"/>
-            <a:ext cx="3291840" cy="4251960"/>
+            <a:off x="8001000" y="1572768"/>
+            <a:ext cx="3337560" cy="3611880"/>
           </a:xfrm>
           <a:prstGeom prst="rect">
             <a:avLst/>
@@ -10288,23 +10278,13 @@
           <a:p>
             <a:pPr algn="ctr"/>
             <a:r>
-              <a:rPr sz="1600">
+              <a:rPr sz="1300">
                 <a:solidFill>
                   <a:srgbClr val="566070"/>
                 </a:solidFill>
                 <a:latin typeface="맑은 고딕"/>
               </a:rPr>
-              <a:t>[수동 삽입 필요]</a:t>
-            </a:r>
-            <a:br/>
-            <a:r>
-              <a:rPr sz="1600">
-                <a:solidFill>
-                  <a:srgbClr val="566070"/>
-                </a:solidFill>
-                <a:latin typeface="맑은 고딕"/>
-              </a:rPr>
-              <a:t>Manual visual placeholder; choose asset during later Piti/PPT work.</a:t>
+              <a:t>[수동 삽입]</a:t>
             </a:r>
           </a:p>
         </p:txBody>
@@ -10511,7 +10491,7 @@
               </a:spcAft>
             </a:pPr>
             <a:r>
-              <a:rPr sz="2400">
+              <a:rPr sz="2800">
                 <a:solidFill>
                   <a:srgbClr val="FF0000"/>
                 </a:solidFill>
@@ -10527,7 +10507,7 @@
               </a:spcAft>
             </a:pPr>
             <a:r>
-              <a:rPr sz="2400">
+              <a:rPr sz="2800">
                 <a:solidFill>
                   <a:srgbClr val="FF0000"/>
                 </a:solidFill>
@@ -10543,7 +10523,7 @@
               </a:spcAft>
             </a:pPr>
             <a:r>
-              <a:rPr sz="2400">
+              <a:rPr sz="2800">
                 <a:solidFill>
                   <a:srgbClr val="FF0000"/>
                 </a:solidFill>
@@ -11338,7 +11318,7 @@
               </a:spcAft>
             </a:pPr>
             <a:r>
-              <a:rPr sz="2400">
+              <a:rPr sz="2800">
                 <a:solidFill>
                   <a:srgbClr val="FF0000"/>
                 </a:solidFill>
@@ -11354,7 +11334,7 @@
               </a:spcAft>
             </a:pPr>
             <a:r>
-              <a:rPr sz="2400">
+              <a:rPr sz="2800">
                 <a:solidFill>
                   <a:srgbClr val="FF0000"/>
                 </a:solidFill>
@@ -11370,7 +11350,7 @@
               </a:spcAft>
             </a:pPr>
             <a:r>
-              <a:rPr sz="2400">
+              <a:rPr sz="2800">
                 <a:solidFill>
                   <a:srgbClr val="FF0000"/>
                 </a:solidFill>
@@ -11501,7 +11481,7 @@
             <a:r>
               <a:rPr sz="5400" b="1">
                 <a:solidFill>
-                  <a:srgbClr val="FF0000"/>
+                  <a:srgbClr val="181C23"/>
                 </a:solidFill>
                 <a:latin typeface="맑은 고딕"/>
               </a:rPr>
@@ -11672,7 +11652,7 @@
         <p:spPr>
           <a:xfrm>
             <a:off x="713232" y="2795320"/>
-            <a:ext cx="9875520" cy="2651760"/>
+            <a:ext cx="6766560" cy="2651760"/>
           </a:xfrm>
           <a:prstGeom prst="rect">
             <a:avLst/>
@@ -11691,7 +11671,7 @@
               </a:spcAft>
             </a:pPr>
             <a:r>
-              <a:rPr sz="2400">
+              <a:rPr sz="2000">
                 <a:solidFill>
                   <a:srgbClr val="FF0000"/>
                 </a:solidFill>
@@ -11707,7 +11687,7 @@
               </a:spcAft>
             </a:pPr>
             <a:r>
-              <a:rPr sz="2400">
+              <a:rPr sz="2000">
                 <a:solidFill>
                   <a:srgbClr val="FF0000"/>
                 </a:solidFill>
@@ -11723,7 +11703,7 @@
               </a:spcAft>
             </a:pPr>
             <a:r>
-              <a:rPr sz="2400">
+              <a:rPr sz="2000">
                 <a:solidFill>
                   <a:srgbClr val="FF0000"/>
                 </a:solidFill>
@@ -11742,8 +11722,8 @@
         </p:nvSpPr>
         <p:spPr>
           <a:xfrm>
-            <a:off x="8778240" y="4389120"/>
-            <a:ext cx="2377440" cy="1097280"/>
+            <a:off x="8458200" y="4389120"/>
+            <a:ext cx="2560320" cy="1097280"/>
           </a:xfrm>
           <a:prstGeom prst="rect">
             <a:avLst/>
@@ -11777,23 +11757,13 @@
           <a:p>
             <a:pPr algn="ctr"/>
             <a:r>
-              <a:rPr sz="1600">
+              <a:rPr sz="1300">
                 <a:solidFill>
                   <a:srgbClr val="566070"/>
                 </a:solidFill>
                 <a:latin typeface="맑은 고딕"/>
               </a:rPr>
-              <a:t>[수동 삽입 필요]</a:t>
-            </a:r>
-            <a:br/>
-            <a:r>
-              <a:rPr sz="1600">
-                <a:solidFill>
-                  <a:srgbClr val="566070"/>
-                </a:solidFill>
-                <a:latin typeface="맑은 고딕"/>
-              </a:rPr>
-              <a:t>Manual visual placeholder; choose asset during later Piti/PPT work.</a:t>
+              <a:t>[수동 삽입]</a:t>
             </a:r>
           </a:p>
         </p:txBody>
@@ -11902,7 +11872,7 @@
         <p:spPr>
           <a:xfrm>
             <a:off x="572414" y="411480"/>
-            <a:ext cx="10972800" cy="685800"/>
+            <a:ext cx="6720840" cy="685800"/>
           </a:xfrm>
           <a:prstGeom prst="rect">
             <a:avLst/>
@@ -11936,7 +11906,7 @@
         <p:spPr>
           <a:xfrm>
             <a:off x="572414" y="1208836"/>
-            <a:ext cx="11193170" cy="1302105"/>
+            <a:ext cx="6720840" cy="1302105"/>
           </a:xfrm>
           <a:prstGeom prst="rect">
             <a:avLst/>
@@ -11955,7 +11925,7 @@
               </a:spcAft>
             </a:pPr>
             <a:r>
-              <a:rPr sz="2400">
+              <a:rPr sz="2000">
                 <a:solidFill>
                   <a:srgbClr val="FF0000"/>
                 </a:solidFill>
@@ -11971,7 +11941,7 @@
               </a:spcAft>
             </a:pPr>
             <a:r>
-              <a:rPr sz="2400">
+              <a:rPr sz="2000">
                 <a:solidFill>
                   <a:srgbClr val="FF0000"/>
                 </a:solidFill>
@@ -11987,7 +11957,7 @@
               </a:spcAft>
             </a:pPr>
             <a:r>
-              <a:rPr sz="2400">
+              <a:rPr sz="2000">
                 <a:solidFill>
                   <a:srgbClr val="FF0000"/>
                 </a:solidFill>
@@ -12006,8 +11976,8 @@
         </p:nvSpPr>
         <p:spPr>
           <a:xfrm>
-            <a:off x="8183879" y="1417320"/>
-            <a:ext cx="3291840" cy="4251960"/>
+            <a:off x="8001000" y="1572768"/>
+            <a:ext cx="3337560" cy="3611880"/>
           </a:xfrm>
           <a:prstGeom prst="rect">
             <a:avLst/>
@@ -12041,23 +12011,13 @@
           <a:p>
             <a:pPr algn="ctr"/>
             <a:r>
-              <a:rPr sz="1600">
+              <a:rPr sz="1300">
                 <a:solidFill>
                   <a:srgbClr val="566070"/>
                 </a:solidFill>
                 <a:latin typeface="맑은 고딕"/>
               </a:rPr>
-              <a:t>[수동 삽입 필요]</a:t>
-            </a:r>
-            <a:br/>
-            <a:r>
-              <a:rPr sz="1600">
-                <a:solidFill>
-                  <a:srgbClr val="566070"/>
-                </a:solidFill>
-                <a:latin typeface="맑은 고딕"/>
-              </a:rPr>
-              <a:t>Manual visual placeholder; choose asset during later Piti/PPT work.</a:t>
+              <a:t>[수동 삽입]</a:t>
             </a:r>
           </a:p>
         </p:txBody>
@@ -12533,7 +12493,7 @@
               </a:spcAft>
             </a:pPr>
             <a:r>
-              <a:rPr sz="2400">
+              <a:rPr sz="2800">
                 <a:solidFill>
                   <a:srgbClr val="FF0000"/>
                 </a:solidFill>
@@ -12549,7 +12509,7 @@
               </a:spcAft>
             </a:pPr>
             <a:r>
-              <a:rPr sz="2400">
+              <a:rPr sz="2800">
                 <a:solidFill>
                   <a:srgbClr val="FF0000"/>
                 </a:solidFill>
@@ -12565,7 +12525,7 @@
               </a:spcAft>
             </a:pPr>
             <a:r>
-              <a:rPr sz="2400">
+              <a:rPr sz="2800">
                 <a:solidFill>
                   <a:srgbClr val="FF0000"/>
                 </a:solidFill>
@@ -13064,7 +13024,7 @@
         <p:spPr>
           <a:xfrm>
             <a:off x="572414" y="411480"/>
-            <a:ext cx="10972800" cy="685800"/>
+            <a:ext cx="6720840" cy="685800"/>
           </a:xfrm>
           <a:prstGeom prst="rect">
             <a:avLst/>
@@ -13098,7 +13058,7 @@
         <p:spPr>
           <a:xfrm>
             <a:off x="572414" y="1208836"/>
-            <a:ext cx="11193170" cy="1302105"/>
+            <a:ext cx="6720840" cy="1302105"/>
           </a:xfrm>
           <a:prstGeom prst="rect">
             <a:avLst/>
@@ -13117,7 +13077,7 @@
               </a:spcAft>
             </a:pPr>
             <a:r>
-              <a:rPr sz="2400">
+              <a:rPr sz="2000">
                 <a:solidFill>
                   <a:srgbClr val="FF0000"/>
                 </a:solidFill>
@@ -13133,7 +13093,7 @@
               </a:spcAft>
             </a:pPr>
             <a:r>
-              <a:rPr sz="2400">
+              <a:rPr sz="2000">
                 <a:solidFill>
                   <a:srgbClr val="FF0000"/>
                 </a:solidFill>
@@ -13149,7 +13109,7 @@
               </a:spcAft>
             </a:pPr>
             <a:r>
-              <a:rPr sz="2400">
+              <a:rPr sz="2000">
                 <a:solidFill>
                   <a:srgbClr val="FF0000"/>
                 </a:solidFill>
@@ -13168,8 +13128,8 @@
         </p:nvSpPr>
         <p:spPr>
           <a:xfrm>
-            <a:off x="8183879" y="1417320"/>
-            <a:ext cx="3291840" cy="4251960"/>
+            <a:off x="8001000" y="1572768"/>
+            <a:ext cx="3337560" cy="3611880"/>
           </a:xfrm>
           <a:prstGeom prst="rect">
             <a:avLst/>
@@ -13203,23 +13163,13 @@
           <a:p>
             <a:pPr algn="ctr"/>
             <a:r>
-              <a:rPr sz="1600">
+              <a:rPr sz="1300">
                 <a:solidFill>
                   <a:srgbClr val="566070"/>
                 </a:solidFill>
                 <a:latin typeface="맑은 고딕"/>
               </a:rPr>
-              <a:t>[수동 삽입 필요]</a:t>
-            </a:r>
-            <a:br/>
-            <a:r>
-              <a:rPr sz="1600">
-                <a:solidFill>
-                  <a:srgbClr val="566070"/>
-                </a:solidFill>
-                <a:latin typeface="맑은 고딕"/>
-              </a:rPr>
-              <a:t>Manual visual placeholder; choose asset during later Piti/PPT work.</a:t>
+              <a:t>[수동 삽입]</a:t>
             </a:r>
           </a:p>
         </p:txBody>
@@ -13382,7 +13332,7 @@
               </a:spcAft>
             </a:pPr>
             <a:r>
-              <a:rPr sz="2400">
+              <a:rPr sz="2800">
                 <a:solidFill>
                   <a:srgbClr val="FF0000"/>
                 </a:solidFill>
@@ -13398,7 +13348,7 @@
               </a:spcAft>
             </a:pPr>
             <a:r>
-              <a:rPr sz="2400">
+              <a:rPr sz="2800">
                 <a:solidFill>
                   <a:srgbClr val="FF0000"/>
                 </a:solidFill>
@@ -13414,7 +13364,7 @@
               </a:spcAft>
             </a:pPr>
             <a:r>
-              <a:rPr sz="2400">
+              <a:rPr sz="2800">
                 <a:solidFill>
                   <a:srgbClr val="FF0000"/>
                 </a:solidFill>
@@ -13583,7 +13533,7 @@
               </a:spcAft>
             </a:pPr>
             <a:r>
-              <a:rPr sz="2400">
+              <a:rPr sz="2800">
                 <a:solidFill>
                   <a:srgbClr val="FF0000"/>
                 </a:solidFill>
@@ -13599,7 +13549,7 @@
               </a:spcAft>
             </a:pPr>
             <a:r>
-              <a:rPr sz="2400">
+              <a:rPr sz="2800">
                 <a:solidFill>
                   <a:srgbClr val="FF0000"/>
                 </a:solidFill>
@@ -13615,7 +13565,7 @@
               </a:spcAft>
             </a:pPr>
             <a:r>
-              <a:rPr sz="2400">
+              <a:rPr sz="2800">
                 <a:solidFill>
                   <a:srgbClr val="FF0000"/>
                 </a:solidFill>
@@ -13746,7 +13696,7 @@
             <a:r>
               <a:rPr sz="5400" b="1">
                 <a:solidFill>
-                  <a:srgbClr val="FF0000"/>
+                  <a:srgbClr val="181C23"/>
                 </a:solidFill>
                 <a:latin typeface="맑은 고딕"/>
               </a:rPr>
@@ -13883,7 +13833,7 @@
         <p:spPr>
           <a:xfrm>
             <a:off x="572414" y="411480"/>
-            <a:ext cx="10972800" cy="685800"/>
+            <a:ext cx="6720840" cy="685800"/>
           </a:xfrm>
           <a:prstGeom prst="rect">
             <a:avLst/>
@@ -13917,7 +13867,7 @@
         <p:spPr>
           <a:xfrm>
             <a:off x="572414" y="1208836"/>
-            <a:ext cx="11193170" cy="1302105"/>
+            <a:ext cx="6720840" cy="1302105"/>
           </a:xfrm>
           <a:prstGeom prst="rect">
             <a:avLst/>
@@ -13936,7 +13886,7 @@
               </a:spcAft>
             </a:pPr>
             <a:r>
-              <a:rPr sz="2400">
+              <a:rPr sz="2000">
                 <a:solidFill>
                   <a:srgbClr val="FF0000"/>
                 </a:solidFill>
@@ -13952,7 +13902,7 @@
               </a:spcAft>
             </a:pPr>
             <a:r>
-              <a:rPr sz="2400">
+              <a:rPr sz="2000">
                 <a:solidFill>
                   <a:srgbClr val="FF0000"/>
                 </a:solidFill>
@@ -13968,7 +13918,7 @@
               </a:spcAft>
             </a:pPr>
             <a:r>
-              <a:rPr sz="2400">
+              <a:rPr sz="2000">
                 <a:solidFill>
                   <a:srgbClr val="FF0000"/>
                 </a:solidFill>
@@ -13987,8 +13937,8 @@
         </p:nvSpPr>
         <p:spPr>
           <a:xfrm>
-            <a:off x="8183879" y="1417320"/>
-            <a:ext cx="3291840" cy="4251960"/>
+            <a:off x="8001000" y="1572768"/>
+            <a:ext cx="3337560" cy="3611880"/>
           </a:xfrm>
           <a:prstGeom prst="rect">
             <a:avLst/>
@@ -14022,23 +13972,13 @@
           <a:p>
             <a:pPr algn="ctr"/>
             <a:r>
-              <a:rPr sz="1600">
+              <a:rPr sz="1300">
                 <a:solidFill>
                   <a:srgbClr val="566070"/>
                 </a:solidFill>
                 <a:latin typeface="맑은 고딕"/>
               </a:rPr>
-              <a:t>[수동 삽입 필요]</a:t>
-            </a:r>
-            <a:br/>
-            <a:r>
-              <a:rPr sz="1600">
-                <a:solidFill>
-                  <a:srgbClr val="566070"/>
-                </a:solidFill>
-                <a:latin typeface="맑은 고딕"/>
-              </a:rPr>
-              <a:t>Manual visual placeholder; choose asset during later Piti/PPT work.</a:t>
+              <a:t>[수동 삽입]</a:t>
             </a:r>
           </a:p>
         </p:txBody>
@@ -14181,7 +14121,7 @@
         <p:spPr>
           <a:xfrm>
             <a:off x="572414" y="1162202"/>
-            <a:ext cx="11193170" cy="1828800"/>
+            <a:ext cx="11193170" cy="1645920"/>
           </a:xfrm>
           <a:prstGeom prst="rect">
             <a:avLst/>
@@ -14215,23 +14155,13 @@
           <a:p>
             <a:pPr algn="ctr"/>
             <a:r>
-              <a:rPr sz="1600">
+              <a:rPr sz="1300">
                 <a:solidFill>
                   <a:srgbClr val="566070"/>
                 </a:solidFill>
                 <a:latin typeface="맑은 고딕"/>
               </a:rPr>
               <a:t>[차트 후보]</a:t>
-            </a:r>
-            <a:br/>
-            <a:r>
-              <a:rPr sz="1600">
-                <a:solidFill>
-                  <a:srgbClr val="566070"/>
-                </a:solidFill>
-                <a:latin typeface="맑은 고딕"/>
-              </a:rPr>
-              <a:t>Chart or simple number card candidate; no chart is rendered yet.</a:t>
             </a:r>
           </a:p>
         </p:txBody>
@@ -14264,7 +14194,7 @@
               </a:spcAft>
             </a:pPr>
             <a:r>
-              <a:rPr sz="2400">
+              <a:rPr sz="2000">
                 <a:solidFill>
                   <a:srgbClr val="FF0000"/>
                 </a:solidFill>
@@ -14280,7 +14210,7 @@
               </a:spcAft>
             </a:pPr>
             <a:r>
-              <a:rPr sz="2400">
+              <a:rPr sz="2000">
                 <a:solidFill>
                   <a:srgbClr val="FF0000"/>
                 </a:solidFill>
@@ -14296,7 +14226,7 @@
               </a:spcAft>
             </a:pPr>
             <a:r>
-              <a:rPr sz="2400">
+              <a:rPr sz="2000">
                 <a:solidFill>
                   <a:srgbClr val="FF0000"/>
                 </a:solidFill>

--- a/outputs/pptx/productive_finance_policy_styled_draft.pptx
+++ b/outputs/pptx/productive_finance_policy_styled_draft.pptx
@@ -568,6 +568,47 @@
               <a:t>]</a:t>
             </a:r>
           </a:p>
+          <a:p>
+            <a:r>
+              <a:t>manual_placeholder_hidden: True</a:t>
+            </a:r>
+          </a:p>
+          <a:p/>
+          <a:p>
+            <a:r>
+              <a:t>screen_body_lines:</a:t>
+            </a:r>
+          </a:p>
+          <a:p>
+            <a:r>
+              <a:t>[</a:t>
+            </a:r>
+          </a:p>
+          <a:p>
+            <a:r>
+              <a:t>  "금융은 안전하게 돈을 빌려주는 산업인가",</a:t>
+            </a:r>
+          </a:p>
+          <a:p>
+            <a:r>
+              <a:t>  "아니면 성장 위험을 나눠지는 산업인가"</a:t>
+            </a:r>
+          </a:p>
+          <a:p>
+            <a:r>
+              <a:t>]</a:t>
+            </a:r>
+          </a:p>
+          <a:p>
+            <a:r>
+              <a:t>overflow_body_lines:</a:t>
+            </a:r>
+          </a:p>
+          <a:p>
+            <a:r>
+              <a:t>[]</a:t>
+            </a:r>
+          </a:p>
           <a:p/>
           <a:p>
             <a:r>
@@ -778,6 +819,52 @@
               <a:t>]</a:t>
             </a:r>
           </a:p>
+          <a:p>
+            <a:r>
+              <a:t>manual_placeholder_hidden: False</a:t>
+            </a:r>
+          </a:p>
+          <a:p/>
+          <a:p>
+            <a:r>
+              <a:t>screen_body_lines:</a:t>
+            </a:r>
+          </a:p>
+          <a:p>
+            <a:r>
+              <a:t>[</a:t>
+            </a:r>
+          </a:p>
+          <a:p>
+            <a:r>
+              <a:t>  "정책금융의 명분은 민간이 감당하기 어려운 초기 위험을 나눠지는 것이다.",</a:t>
+            </a:r>
+          </a:p>
+          <a:p>
+            <a:r>
+              <a:t>  "하지만 정책자금이 늘 좋은 결과를 만든다고 단정할 수는 없다.",</a:t>
+            </a:r>
+          </a:p>
+          <a:p>
+            <a:r>
+              <a:t>  "정책금융은 성장의 마중물일 수도, 손실의 통로일 수도 있다."</a:t>
+            </a:r>
+          </a:p>
+          <a:p>
+            <a:r>
+              <a:t>]</a:t>
+            </a:r>
+          </a:p>
+          <a:p>
+            <a:r>
+              <a:t>overflow_body_lines:</a:t>
+            </a:r>
+          </a:p>
+          <a:p>
+            <a:r>
+              <a:t>[]</a:t>
+            </a:r>
+          </a:p>
           <a:p/>
           <a:p>
             <a:r>
@@ -1013,6 +1100,62 @@
               <a:t>]</a:t>
             </a:r>
           </a:p>
+          <a:p>
+            <a:r>
+              <a:t>manual_placeholder_hidden: False</a:t>
+            </a:r>
+          </a:p>
+          <a:p/>
+          <a:p>
+            <a:r>
+              <a:t>screen_body_lines:</a:t>
+            </a:r>
+          </a:p>
+          <a:p>
+            <a:r>
+              <a:t>[</a:t>
+            </a:r>
+          </a:p>
+          <a:p>
+            <a:r>
+              <a:t>  "은행은 예금자의 돈을 지켜야 한다.",</a:t>
+            </a:r>
+          </a:p>
+          <a:p>
+            <a:r>
+              <a:t>  "기업은 긴 투자금을 원한다.",</a:t>
+            </a:r>
+          </a:p>
+          <a:p>
+            <a:r>
+              <a:t>  "국가는 전략산업을 키우고 싶다."</a:t>
+            </a:r>
+          </a:p>
+          <a:p>
+            <a:r>
+              <a:t>]</a:t>
+            </a:r>
+          </a:p>
+          <a:p>
+            <a:r>
+              <a:t>overflow_body_lines:</a:t>
+            </a:r>
+          </a:p>
+          <a:p>
+            <a:r>
+              <a:t>[</a:t>
+            </a:r>
+          </a:p>
+          <a:p>
+            <a:r>
+              <a:t>  "세 이해관계가 한 지점에서 충돌한다."</a:t>
+            </a:r>
+          </a:p>
+          <a:p>
+            <a:r>
+              <a:t>]</a:t>
+            </a:r>
+          </a:p>
           <a:p/>
           <a:p>
             <a:r>
@@ -1233,6 +1376,32 @@
               <a:t>]</a:t>
             </a:r>
           </a:p>
+          <a:p>
+            <a:r>
+              <a:t>manual_placeholder_hidden: True</a:t>
+            </a:r>
+          </a:p>
+          <a:p/>
+          <a:p>
+            <a:r>
+              <a:t>screen_body_lines:</a:t>
+            </a:r>
+          </a:p>
+          <a:p>
+            <a:r>
+              <a:t>[]</a:t>
+            </a:r>
+          </a:p>
+          <a:p>
+            <a:r>
+              <a:t>overflow_body_lines:</a:t>
+            </a:r>
+          </a:p>
+          <a:p>
+            <a:r>
+              <a:t>[]</a:t>
+            </a:r>
+          </a:p>
           <a:p/>
           <a:p>
             <a:r>
@@ -1443,6 +1612,52 @@
               <a:t>]</a:t>
             </a:r>
           </a:p>
+          <a:p>
+            <a:r>
+              <a:t>manual_placeholder_hidden: True</a:t>
+            </a:r>
+          </a:p>
+          <a:p/>
+          <a:p>
+            <a:r>
+              <a:t>screen_body_lines:</a:t>
+            </a:r>
+          </a:p>
+          <a:p>
+            <a:r>
+              <a:t>[</a:t>
+            </a:r>
+          </a:p>
+          <a:p>
+            <a:r>
+              <a:t>  "국민성장펀드는 민관합동 150조 원 규모로 첨단전략산업 생태계를 지원하겠다는 정책 틀이다.",</a:t>
+            </a:r>
+          </a:p>
+          <a:p>
+            <a:r>
+              <a:t>  "국민참여형 펀드는 일반 국민 자금도 일부 모아 자펀드에 투자하는 구조로 설계됐다.",</a:t>
+            </a:r>
+          </a:p>
+          <a:p>
+            <a:r>
+              <a:t>  "그래서 이름은 성장 이야기지만, 실제 방송에서는 투자자 리스크와 정책 책임을 함께 봐야 한다."</a:t>
+            </a:r>
+          </a:p>
+          <a:p>
+            <a:r>
+              <a:t>]</a:t>
+            </a:r>
+          </a:p>
+          <a:p>
+            <a:r>
+              <a:t>overflow_body_lines:</a:t>
+            </a:r>
+          </a:p>
+          <a:p>
+            <a:r>
+              <a:t>[]</a:t>
+            </a:r>
+          </a:p>
           <a:p/>
           <a:p>
             <a:r>
@@ -1688,6 +1903,52 @@
               <a:t>]</a:t>
             </a:r>
           </a:p>
+          <a:p>
+            <a:r>
+              <a:t>manual_placeholder_hidden: True</a:t>
+            </a:r>
+          </a:p>
+          <a:p/>
+          <a:p>
+            <a:r>
+              <a:t>screen_body_lines:</a:t>
+            </a:r>
+          </a:p>
+          <a:p>
+            <a:r>
+              <a:t>[</a:t>
+            </a:r>
+          </a:p>
+          <a:p>
+            <a:r>
+              <a:t>  "국민참여형 펀드 자료는 재정이 각 자펀드에서 20% 범위의 손실을 우선 부담하는 구조를 설명한다.",</a:t>
+            </a:r>
+          </a:p>
+          <a:p>
+            <a:r>
+              <a:t>  "이 장치는 투자자의 위험을 낮추려는 설계지만, 원금 손실 가능성이 사라진다는 뜻은 아니다.",</a:t>
+            </a:r>
+          </a:p>
+          <a:p>
+            <a:r>
+              <a:t>  "손실을 누가, 어떤 순서로, 어디까지 부담하는지가 핵심 질문이다."</a:t>
+            </a:r>
+          </a:p>
+          <a:p>
+            <a:r>
+              <a:t>]</a:t>
+            </a:r>
+          </a:p>
+          <a:p>
+            <a:r>
+              <a:t>overflow_body_lines:</a:t>
+            </a:r>
+          </a:p>
+          <a:p>
+            <a:r>
+              <a:t>[]</a:t>
+            </a:r>
+          </a:p>
           <a:p/>
           <a:p>
             <a:r>
@@ -1923,6 +2184,52 @@
               <a:t>]</a:t>
             </a:r>
           </a:p>
+          <a:p>
+            <a:r>
+              <a:t>manual_placeholder_hidden: True</a:t>
+            </a:r>
+          </a:p>
+          <a:p/>
+          <a:p>
+            <a:r>
+              <a:t>screen_body_lines:</a:t>
+            </a:r>
+          </a:p>
+          <a:p>
+            <a:r>
+              <a:t>[</a:t>
+            </a:r>
+          </a:p>
+          <a:p>
+            <a:r>
+              <a:t>  "정책금융의 어려움은 “돈을 넣을 것인가”보다 “손실이 나면 누가 먼저 감당할 것인가”다.",</a:t>
+            </a:r>
+          </a:p>
+          <a:p>
+            <a:r>
+              <a:t>  "공식자료는 후순위 재정 보강을 설명하지만, 반대 관점은 손실 보전과 관제상품화 논란을 제기한다.",</a:t>
+            </a:r>
+          </a:p>
+          <a:p>
+            <a:r>
+              <a:t>  "이 둘을 같이 봐야 정책금융 논쟁이 단순 찬반으로 흐르지 않는다."</a:t>
+            </a:r>
+          </a:p>
+          <a:p>
+            <a:r>
+              <a:t>]</a:t>
+            </a:r>
+          </a:p>
+          <a:p>
+            <a:r>
+              <a:t>overflow_body_lines:</a:t>
+            </a:r>
+          </a:p>
+          <a:p>
+            <a:r>
+              <a:t>[]</a:t>
+            </a:r>
+          </a:p>
           <a:p/>
           <a:p>
             <a:r>
@@ -2168,6 +2475,52 @@
               <a:t>]</a:t>
             </a:r>
           </a:p>
+          <a:p>
+            <a:r>
+              <a:t>manual_placeholder_hidden: False</a:t>
+            </a:r>
+          </a:p>
+          <a:p/>
+          <a:p>
+            <a:r>
+              <a:t>screen_body_lines:</a:t>
+            </a:r>
+          </a:p>
+          <a:p>
+            <a:r>
+              <a:t>[</a:t>
+            </a:r>
+          </a:p>
+          <a:p>
+            <a:r>
+              <a:t>  "공식자료는 AI, 반도체, 이차전지 등 첨단전략산업을 넓은 지원 대상으로 제시한다.",</a:t>
+            </a:r>
+          </a:p>
+          <a:p>
+            <a:r>
+              <a:t>  "하지만 방송에서는 이것이 특정 기업 성공 보장이나 특정 상품 추천처럼 들리면 안 된다.",</a:t>
+            </a:r>
+          </a:p>
+          <a:p>
+            <a:r>
+              <a:t>  "성장산업 지원과 특정 기업 밀어주기는 구분해서 다뤄야 한다."</a:t>
+            </a:r>
+          </a:p>
+          <a:p>
+            <a:r>
+              <a:t>]</a:t>
+            </a:r>
+          </a:p>
+          <a:p>
+            <a:r>
+              <a:t>overflow_body_lines:</a:t>
+            </a:r>
+          </a:p>
+          <a:p>
+            <a:r>
+              <a:t>[]</a:t>
+            </a:r>
+          </a:p>
           <a:p/>
           <a:p>
             <a:r>
@@ -2413,6 +2766,52 @@
               <a:t>]</a:t>
             </a:r>
           </a:p>
+          <a:p>
+            <a:r>
+              <a:t>manual_placeholder_hidden: False</a:t>
+            </a:r>
+          </a:p>
+          <a:p/>
+          <a:p>
+            <a:r>
+              <a:t>screen_body_lines:</a:t>
+            </a:r>
+          </a:p>
+          <a:p>
+            <a:r>
+              <a:t>[</a:t>
+            </a:r>
+          </a:p>
+          <a:p>
+            <a:r>
+              <a:t>  "반대쪽 질문도 있다. 재정이 위험을 먼저 떠안으면 민간은 얼마나 책임 있게 투자할까.",</a:t>
+            </a:r>
+          </a:p>
+          <a:p>
+            <a:r>
+              <a:t>  "또 은행과 금융회사는 건전성 규제, 위험가중자산, 예금자 보호 논리 안에서 움직인다.",</a:t>
+            </a:r>
+          </a:p>
+          <a:p>
+            <a:r>
+              <a:t>  "그래서 아무도 위험을 안 지는 문제와, 누군가에게 위험을 떠넘기는 문제를 동시에 봐야 한다."</a:t>
+            </a:r>
+          </a:p>
+          <a:p>
+            <a:r>
+              <a:t>]</a:t>
+            </a:r>
+          </a:p>
+          <a:p>
+            <a:r>
+              <a:t>overflow_body_lines:</a:t>
+            </a:r>
+          </a:p>
+          <a:p>
+            <a:r>
+              <a:t>[]</a:t>
+            </a:r>
+          </a:p>
           <a:p/>
           <a:p>
             <a:r>
@@ -2658,6 +3057,52 @@
               <a:t>]</a:t>
             </a:r>
           </a:p>
+          <a:p>
+            <a:r>
+              <a:t>manual_placeholder_hidden: False</a:t>
+            </a:r>
+          </a:p>
+          <a:p/>
+          <a:p>
+            <a:r>
+              <a:t>screen_body_lines:</a:t>
+            </a:r>
+          </a:p>
+          <a:p>
+            <a:r>
+              <a:t>[</a:t>
+            </a:r>
+          </a:p>
+          <a:p>
+            <a:r>
+              <a:t>  "성장의 과실을 함께 나누자는 말은 듣기 좋다.",</a:t>
+            </a:r>
+          </a:p>
+          <a:p>
+            <a:r>
+              <a:t>  "하지만 위험도 함께 나눠야 한다면, 손실이 발생했을 때 재정·운용사·투자자·금융권의 책임선이 중요해진다.",</a:t>
+            </a:r>
+          </a:p>
+          <a:p>
+            <a:r>
+              <a:t>  "국민성장펀드 이야기는 결국 수익보다 위험 배분의 설계로 읽어야 한다."</a:t>
+            </a:r>
+          </a:p>
+          <a:p>
+            <a:r>
+              <a:t>]</a:t>
+            </a:r>
+          </a:p>
+          <a:p>
+            <a:r>
+              <a:t>overflow_body_lines:</a:t>
+            </a:r>
+          </a:p>
+          <a:p>
+            <a:r>
+              <a:t>[]</a:t>
+            </a:r>
+          </a:p>
           <a:p/>
           <a:p>
             <a:r>
@@ -2903,6 +3348,32 @@
               <a:t>]</a:t>
             </a:r>
           </a:p>
+          <a:p>
+            <a:r>
+              <a:t>manual_placeholder_hidden: True</a:t>
+            </a:r>
+          </a:p>
+          <a:p/>
+          <a:p>
+            <a:r>
+              <a:t>screen_body_lines:</a:t>
+            </a:r>
+          </a:p>
+          <a:p>
+            <a:r>
+              <a:t>[]</a:t>
+            </a:r>
+          </a:p>
+          <a:p>
+            <a:r>
+              <a:t>overflow_body_lines:</a:t>
+            </a:r>
+          </a:p>
+          <a:p>
+            <a:r>
+              <a:t>[]</a:t>
+            </a:r>
+          </a:p>
           <a:p/>
           <a:p>
             <a:r>
@@ -3113,6 +3584,52 @@
               <a:t>]</a:t>
             </a:r>
           </a:p>
+          <a:p>
+            <a:r>
+              <a:t>manual_placeholder_hidden: True</a:t>
+            </a:r>
+          </a:p>
+          <a:p/>
+          <a:p>
+            <a:r>
+              <a:t>screen_body_lines:</a:t>
+            </a:r>
+          </a:p>
+          <a:p>
+            <a:r>
+              <a:t>[</a:t>
+            </a:r>
+          </a:p>
+          <a:p>
+            <a:r>
+              <a:t>  "“담보 및 단기수익 중심 금융 경쟁은 앞서가기 어렵다”는 문제 제기가 나왔다.",</a:t>
+            </a:r>
+          </a:p>
+          <a:p>
+            <a:r>
+              <a:t>  "금융위원회 공식자료는 국민성장펀드가 5년간 150조 원, 2026년 30조 원 규모로 첨단산업 생태계에 자금을 공급하는 틀이라고 설명한다.",</a:t>
+            </a:r>
+          </a:p>
+          <a:p>
+            <a:r>
+              <a:t>  "다만 이 발언과 정책 숫자가 곧 정책 성공을 뜻하는 것은 아니다."</a:t>
+            </a:r>
+          </a:p>
+          <a:p>
+            <a:r>
+              <a:t>]</a:t>
+            </a:r>
+          </a:p>
+          <a:p>
+            <a:r>
+              <a:t>overflow_body_lines:</a:t>
+            </a:r>
+          </a:p>
+          <a:p>
+            <a:r>
+              <a:t>[]</a:t>
+            </a:r>
+          </a:p>
           <a:p/>
           <a:p>
             <a:r>
@@ -3348,6 +3865,52 @@
               <a:t>]</a:t>
             </a:r>
           </a:p>
+          <a:p>
+            <a:r>
+              <a:t>manual_placeholder_hidden: True</a:t>
+            </a:r>
+          </a:p>
+          <a:p/>
+          <a:p>
+            <a:r>
+              <a:t>screen_body_lines:</a:t>
+            </a:r>
+          </a:p>
+          <a:p>
+            <a:r>
+              <a:t>[</a:t>
+            </a:r>
+          </a:p>
+          <a:p>
+            <a:r>
+              <a:t>  "금융권에 성장산업 투자를 요구하면 곧바로 건전성 문제가 따라온다.",</a:t>
+            </a:r>
+          </a:p>
+          <a:p>
+            <a:r>
+              <a:t>  "위험가중자산이 커지면 자본 부담도 커질 수 있고, 예금자 보호 논리와도 충돌할 수 있다.",</a:t>
+            </a:r>
+          </a:p>
+          <a:p>
+            <a:r>
+              <a:t>  "따라서 생산적 금융은 구호가 아니라 자본규제와 위험분담 설계의 문제다."</a:t>
+            </a:r>
+          </a:p>
+          <a:p>
+            <a:r>
+              <a:t>]</a:t>
+            </a:r>
+          </a:p>
+          <a:p>
+            <a:r>
+              <a:t>overflow_body_lines:</a:t>
+            </a:r>
+          </a:p>
+          <a:p>
+            <a:r>
+              <a:t>[]</a:t>
+            </a:r>
+          </a:p>
           <a:p/>
           <a:p>
             <a:r>
@@ -3583,6 +4146,52 @@
               <a:t>]</a:t>
             </a:r>
           </a:p>
+          <a:p>
+            <a:r>
+              <a:t>manual_placeholder_hidden: False</a:t>
+            </a:r>
+          </a:p>
+          <a:p/>
+          <a:p>
+            <a:r>
+              <a:t>screen_body_lines:</a:t>
+            </a:r>
+          </a:p>
+          <a:p>
+            <a:r>
+              <a:t>[</a:t>
+            </a:r>
+          </a:p>
+          <a:p>
+            <a:r>
+              <a:t>  "이 주제는 곧바로 특정 산업·기업·펀드 투자 판단처럼 보일 수 있다.",</a:t>
+            </a:r>
+          </a:p>
+          <a:p>
+            <a:r>
+              <a:t>  "그래서 수익률, 주가, 매수·매도, 유망종목식 표현은 피해야 한다.",</a:t>
+            </a:r>
+          </a:p>
+          <a:p>
+            <a:r>
+              <a:t>  "핵심은 투자 추천이 아니라 위험을 누가 나누느냐는 제도 설계다."</a:t>
+            </a:r>
+          </a:p>
+          <a:p>
+            <a:r>
+              <a:t>]</a:t>
+            </a:r>
+          </a:p>
+          <a:p>
+            <a:r>
+              <a:t>overflow_body_lines:</a:t>
+            </a:r>
+          </a:p>
+          <a:p>
+            <a:r>
+              <a:t>[]</a:t>
+            </a:r>
+          </a:p>
           <a:p/>
           <a:p>
             <a:r>
@@ -3793,6 +4402,52 @@
               <a:t>]</a:t>
             </a:r>
           </a:p>
+          <a:p>
+            <a:r>
+              <a:t>manual_placeholder_hidden: True</a:t>
+            </a:r>
+          </a:p>
+          <a:p/>
+          <a:p>
+            <a:r>
+              <a:t>screen_body_lines:</a:t>
+            </a:r>
+          </a:p>
+          <a:p>
+            <a:r>
+              <a:t>[</a:t>
+            </a:r>
+          </a:p>
+          <a:p>
+            <a:r>
+              <a:t>  "생산적 금융의 질문은 “정부 정책이 맞다/틀리다”가 아니다.",</a:t>
+            </a:r>
+          </a:p>
+          <a:p>
+            <a:r>
+              <a:t>  "좋은 위험을 고르는 능력, 손실을 나누는 규칙, 금융권 건전성을 함께 설계할 수 있느냐는 질문이다.",</a:t>
+            </a:r>
+          </a:p>
+          <a:p>
+            <a:r>
+              <a:t>  "국민성장펀드는 그 질문을 보여주는 한 사례일 뿐, 성공을 단정할 수는 없다."</a:t>
+            </a:r>
+          </a:p>
+          <a:p>
+            <a:r>
+              <a:t>]</a:t>
+            </a:r>
+          </a:p>
+          <a:p>
+            <a:r>
+              <a:t>overflow_body_lines:</a:t>
+            </a:r>
+          </a:p>
+          <a:p>
+            <a:r>
+              <a:t>[]</a:t>
+            </a:r>
+          </a:p>
           <a:p/>
           <a:p>
             <a:r>
@@ -4038,6 +4693,52 @@
               <a:t>]</a:t>
             </a:r>
           </a:p>
+          <a:p>
+            <a:r>
+              <a:t>manual_placeholder_hidden: False</a:t>
+            </a:r>
+          </a:p>
+          <a:p/>
+          <a:p>
+            <a:r>
+              <a:t>screen_body_lines:</a:t>
+            </a:r>
+          </a:p>
+          <a:p>
+            <a:r>
+              <a:t>[</a:t>
+            </a:r>
+          </a:p>
+          <a:p>
+            <a:r>
+              <a:t>  "방송 전 숫자 체크리스트: 150조 원 전체 규모, 2026년 30조 원 운용, 국민참여형 6000억 원, 재정 1200억 원, 손실 우선 부담 20% 범위.",</a:t>
+            </a:r>
+          </a:p>
+          <a:p>
+            <a:r>
+              <a:t>  "정책 효과가 아니라 구조를 설명하는 숫자로만 사용한다.",</a:t>
+            </a:r>
+          </a:p>
+          <a:p>
+            <a:r>
+              <a:t>  "추가로 정책금융 실패 사례와 은행 건전성 자료를 더 확인하면 완성도가 올라간다."</a:t>
+            </a:r>
+          </a:p>
+          <a:p>
+            <a:r>
+              <a:t>]</a:t>
+            </a:r>
+          </a:p>
+          <a:p>
+            <a:r>
+              <a:t>overflow_body_lines:</a:t>
+            </a:r>
+          </a:p>
+          <a:p>
+            <a:r>
+              <a:t>[]</a:t>
+            </a:r>
+          </a:p>
           <a:p/>
           <a:p>
             <a:r>
@@ -4319,6 +5020,47 @@
               <a:t>]</a:t>
             </a:r>
           </a:p>
+          <a:p>
+            <a:r>
+              <a:t>manual_placeholder_hidden: False</a:t>
+            </a:r>
+          </a:p>
+          <a:p/>
+          <a:p>
+            <a:r>
+              <a:t>screen_body_lines:</a:t>
+            </a:r>
+          </a:p>
+          <a:p>
+            <a:r>
+              <a:t>[</a:t>
+            </a:r>
+          </a:p>
+          <a:p>
+            <a:r>
+              <a:t>  "방송 전 꼭 채워야 할 자료: 금융위/산은 공식 원문, 국민참여형 펀드 손실분담 구조, AI·반도체 장기 투자 규모, 관치금융/정책금융 실패 반론, 은행 건전성·위험가중자산 자료.",</a:t>
+            </a:r>
+          </a:p>
+          <a:p>
+            <a:r>
+              <a:t>  "지금 evidence pack은 enriched dry run에는 충분하지만, 방송용 완성본에는 추가 counterpoint가 필요하다."</a:t>
+            </a:r>
+          </a:p>
+          <a:p>
+            <a:r>
+              <a:t>]</a:t>
+            </a:r>
+          </a:p>
+          <a:p>
+            <a:r>
+              <a:t>overflow_body_lines:</a:t>
+            </a:r>
+          </a:p>
+          <a:p>
+            <a:r>
+              <a:t>[]</a:t>
+            </a:r>
+          </a:p>
           <a:p/>
           <a:p>
             <a:r>
@@ -4615,6 +5357,52 @@
               <a:t>]</a:t>
             </a:r>
           </a:p>
+          <a:p>
+            <a:r>
+              <a:t>manual_placeholder_hidden: True</a:t>
+            </a:r>
+          </a:p>
+          <a:p/>
+          <a:p>
+            <a:r>
+              <a:t>screen_body_lines:</a:t>
+            </a:r>
+          </a:p>
+          <a:p>
+            <a:r>
+              <a:t>[</a:t>
+            </a:r>
+          </a:p>
+          <a:p>
+            <a:r>
+              <a:t>  "돈을 빌려줄 때 가장 쉬운 질문은 “담보가 있나?”다.",</a:t>
+            </a:r>
+          </a:p>
+          <a:p>
+            <a:r>
+              <a:t>  "은행은 자본규제와 위험가중자산을 고려해야 하므로, 위험한 자산을 무한정 늘릴 수 없다.",</a:t>
+            </a:r>
+          </a:p>
+          <a:p>
+            <a:r>
+              <a:t>  "그래서 장기 위험자본 논의는 은행의 본능을 비난하는 문제가 아니라 금융 시스템의 설계 문제에 가깝다."</a:t>
+            </a:r>
+          </a:p>
+          <a:p>
+            <a:r>
+              <a:t>]</a:t>
+            </a:r>
+          </a:p>
+          <a:p>
+            <a:r>
+              <a:t>overflow_body_lines:</a:t>
+            </a:r>
+          </a:p>
+          <a:p>
+            <a:r>
+              <a:t>[]</a:t>
+            </a:r>
+          </a:p>
           <a:p/>
           <a:p>
             <a:r>
@@ -4850,6 +5638,52 @@
               <a:t>]</a:t>
             </a:r>
           </a:p>
+          <a:p>
+            <a:r>
+              <a:t>manual_placeholder_hidden: False</a:t>
+            </a:r>
+          </a:p>
+          <a:p/>
+          <a:p>
+            <a:r>
+              <a:t>screen_body_lines:</a:t>
+            </a:r>
+          </a:p>
+          <a:p>
+            <a:r>
+              <a:t>[</a:t>
+            </a:r>
+          </a:p>
+          <a:p>
+            <a:r>
+              <a:t>  "AI와 반도체는 소프트웨어 개발비만의 문제가 아니라 설비, 전력, 공정, 인력, 공급망이 함께 필요한 산업이다.",</a:t>
+            </a:r>
+          </a:p>
+          <a:p>
+            <a:r>
+              <a:t>  "정책자료는 국민성장펀드가 AI·반도체 같은 첨단전략산업에 장기 자금을 공급하려는 틀이라고 설명한다.",</a:t>
+            </a:r>
+          </a:p>
+          <a:p>
+            <a:r>
+              <a:t>  "그래서 이 이야기는 “대출을 늘리자”보다 “누가 긴 위험을 나눌 것인가”에 가깝다."</a:t>
+            </a:r>
+          </a:p>
+          <a:p>
+            <a:r>
+              <a:t>]</a:t>
+            </a:r>
+          </a:p>
+          <a:p>
+            <a:r>
+              <a:t>overflow_body_lines:</a:t>
+            </a:r>
+          </a:p>
+          <a:p>
+            <a:r>
+              <a:t>[]</a:t>
+            </a:r>
+          </a:p>
           <a:p/>
           <a:p>
             <a:r>
@@ -5095,6 +5929,52 @@
               <a:t>]</a:t>
             </a:r>
           </a:p>
+          <a:p>
+            <a:r>
+              <a:t>manual_placeholder_hidden: False</a:t>
+            </a:r>
+          </a:p>
+          <a:p/>
+          <a:p>
+            <a:r>
+              <a:t>screen_body_lines:</a:t>
+            </a:r>
+          </a:p>
+          <a:p>
+            <a:r>
+              <a:t>[</a:t>
+            </a:r>
+          </a:p>
+          <a:p>
+            <a:r>
+              <a:t>  "너무 안전하면 성장산업이 돈을 못 받는다.",</a:t>
+            </a:r>
+          </a:p>
+          <a:p>
+            <a:r>
+              <a:t>  "너무 위험하면 결국 손실을 누가 떠안느냐는 문제가 생긴다.",</a:t>
+            </a:r>
+          </a:p>
+          <a:p>
+            <a:r>
+              <a:t>  "이 사이의 균형이 정책금융 논쟁의 본론이다."</a:t>
+            </a:r>
+          </a:p>
+          <a:p>
+            <a:r>
+              <a:t>]</a:t>
+            </a:r>
+          </a:p>
+          <a:p>
+            <a:r>
+              <a:t>overflow_body_lines:</a:t>
+            </a:r>
+          </a:p>
+          <a:p>
+            <a:r>
+              <a:t>[]</a:t>
+            </a:r>
+          </a:p>
           <a:p/>
           <a:p>
             <a:r>
@@ -5305,6 +6185,32 @@
               <a:t>]</a:t>
             </a:r>
           </a:p>
+          <a:p>
+            <a:r>
+              <a:t>manual_placeholder_hidden: True</a:t>
+            </a:r>
+          </a:p>
+          <a:p/>
+          <a:p>
+            <a:r>
+              <a:t>screen_body_lines:</a:t>
+            </a:r>
+          </a:p>
+          <a:p>
+            <a:r>
+              <a:t>[]</a:t>
+            </a:r>
+          </a:p>
+          <a:p>
+            <a:r>
+              <a:t>overflow_body_lines:</a:t>
+            </a:r>
+          </a:p>
+          <a:p>
+            <a:r>
+              <a:t>[]</a:t>
+            </a:r>
+          </a:p>
           <a:p/>
           <a:p>
             <a:r>
@@ -5515,6 +6421,52 @@
               <a:t>]</a:t>
             </a:r>
           </a:p>
+          <a:p>
+            <a:r>
+              <a:t>manual_placeholder_hidden: True</a:t>
+            </a:r>
+          </a:p>
+          <a:p/>
+          <a:p>
+            <a:r>
+              <a:t>screen_body_lines:</a:t>
+            </a:r>
+          </a:p>
+          <a:p>
+            <a:r>
+              <a:t>[</a:t>
+            </a:r>
+          </a:p>
+          <a:p>
+            <a:r>
+              <a:t>  "AI는 모델만으로 돌아가지 않는다.",</a:t>
+            </a:r>
+          </a:p>
+          <a:p>
+            <a:r>
+              <a:t>  "반도체, 전력망, 데이터센터, 장비, 소재가 함께 필요하다.",</a:t>
+            </a:r>
+          </a:p>
+          <a:p>
+            <a:r>
+              <a:t>  "공식자료가 “인내자본”을 말하는 이유도 이 산업이 긴 회수 기간과 대규모 선투자를 요구하기 때문이다."</a:t>
+            </a:r>
+          </a:p>
+          <a:p>
+            <a:r>
+              <a:t>]</a:t>
+            </a:r>
+          </a:p>
+          <a:p>
+            <a:r>
+              <a:t>overflow_body_lines:</a:t>
+            </a:r>
+          </a:p>
+          <a:p>
+            <a:r>
+              <a:t>[]</a:t>
+            </a:r>
+          </a:p>
           <a:p/>
           <a:p>
             <a:r>
@@ -5750,6 +6702,52 @@
               <a:t>]</a:t>
             </a:r>
           </a:p>
+          <a:p>
+            <a:r>
+              <a:t>manual_placeholder_hidden: False</a:t>
+            </a:r>
+          </a:p>
+          <a:p/>
+          <a:p>
+            <a:r>
+              <a:t>screen_body_lines:</a:t>
+            </a:r>
+          </a:p>
+          <a:p>
+            <a:r>
+              <a:t>[</a:t>
+            </a:r>
+          </a:p>
+          <a:p>
+            <a:r>
+              <a:t>  "첨단산업 투자는 회수 기간이 길고 실패 가능성도 크다.",</a:t>
+            </a:r>
+          </a:p>
+          <a:p>
+            <a:r>
+              <a:t>  "정부는 국민성장펀드를 통해 장기 자금을 공급하겠다고 설명하지만, 그 자체가 수익을 보장한다는 말은 아니다.",</a:t>
+            </a:r>
+          </a:p>
+          <a:p>
+            <a:r>
+              <a:t>  "여기서 “장기 위험자본”이라는 말은 가능성과 손실 가능성을 함께 본다는 뜻이다."</a:t>
+            </a:r>
+          </a:p>
+          <a:p>
+            <a:r>
+              <a:t>]</a:t>
+            </a:r>
+          </a:p>
+          <a:p>
+            <a:r>
+              <a:t>overflow_body_lines:</a:t>
+            </a:r>
+          </a:p>
+          <a:p>
+            <a:r>
+              <a:t>[]</a:t>
+            </a:r>
+          </a:p>
           <a:p/>
           <a:p>
             <a:r>
@@ -5983,6 +6981,52 @@
           <a:p>
             <a:r>
               <a:t>]</a:t>
+            </a:r>
+          </a:p>
+          <a:p>
+            <a:r>
+              <a:t>manual_placeholder_hidden: False</a:t>
+            </a:r>
+          </a:p>
+          <a:p/>
+          <a:p>
+            <a:r>
+              <a:t>screen_body_lines:</a:t>
+            </a:r>
+          </a:p>
+          <a:p>
+            <a:r>
+              <a:t>[</a:t>
+            </a:r>
+          </a:p>
+          <a:p>
+            <a:r>
+              <a:t>  "공장, 토지, 건물은 담보로 잡기 쉽다.",</a:t>
+            </a:r>
+          </a:p>
+          <a:p>
+            <a:r>
+              <a:t>  "하지만 초기 기술, 인력, 데이터, 공정 노하우는 평가하기 어렵다.",</a:t>
+            </a:r>
+          </a:p>
+          <a:p>
+            <a:r>
+              <a:t>  "위험가중자산과 자본규제가 있는 은행 입장에서는 이런 불확실성이 비용이 된다."</a:t>
+            </a:r>
+          </a:p>
+          <a:p>
+            <a:r>
+              <a:t>]</a:t>
+            </a:r>
+          </a:p>
+          <a:p>
+            <a:r>
+              <a:t>overflow_body_lines:</a:t>
+            </a:r>
+          </a:p>
+          <a:p>
+            <a:r>
+              <a:t>[]</a:t>
             </a:r>
           </a:p>
           <a:p/>
@@ -9129,8 +10173,8 @@
         </p:nvSpPr>
         <p:spPr>
           <a:xfrm>
-            <a:off x="856792" y="1122883"/>
-            <a:ext cx="10478109" cy="2387498"/>
+            <a:off x="685800" y="438912"/>
+            <a:ext cx="10789920" cy="685800"/>
           </a:xfrm>
           <a:prstGeom prst="rect">
             <a:avLst/>
@@ -9144,7 +10188,7 @@
           <a:lstStyle/>
           <a:p>
             <a:r>
-              <a:rPr sz="3800" b="1">
+              <a:rPr sz="2800" b="1" u="none">
                 <a:solidFill>
                   <a:srgbClr val="FF0000"/>
                 </a:solidFill>
@@ -9163,8 +10207,8 @@
         </p:nvSpPr>
         <p:spPr>
           <a:xfrm>
-            <a:off x="948232" y="3043123"/>
-            <a:ext cx="9875520" cy="914400"/>
+            <a:off x="685800" y="1444752"/>
+            <a:ext cx="9875520" cy="1280160"/>
           </a:xfrm>
           <a:prstGeom prst="rect">
             <a:avLst/>
@@ -9183,9 +10227,9 @@
               </a:spcAft>
             </a:pPr>
             <a:r>
-              <a:rPr sz="2800">
+              <a:rPr sz="2800" b="0" u="none">
                 <a:solidFill>
-                  <a:srgbClr val="FF0000"/>
+                  <a:srgbClr val="000000"/>
                 </a:solidFill>
                 <a:latin typeface="맑은 고딕"/>
               </a:rPr>
@@ -9199,9 +10243,9 @@
               </a:spcAft>
             </a:pPr>
             <a:r>
-              <a:rPr sz="2800">
+              <a:rPr sz="2800" b="0" u="none">
                 <a:solidFill>
-                  <a:srgbClr val="FF0000"/>
+                  <a:srgbClr val="000000"/>
                 </a:solidFill>
                 <a:latin typeface="맑은 고딕"/>
               </a:rPr>
@@ -9233,7 +10277,7 @@
           <a:lstStyle/>
           <a:p>
             <a:r>
-              <a:rPr sz="800" b="0">
+              <a:rPr sz="800" b="0" u="none">
                 <a:solidFill>
                   <a:srgbClr val="566070"/>
                 </a:solidFill>
@@ -9268,7 +10312,7 @@
           <a:p>
             <a:pPr algn="r"/>
             <a:r>
-              <a:rPr sz="800" b="0">
+              <a:rPr sz="800" b="0" u="none">
                 <a:solidFill>
                   <a:srgbClr val="566070"/>
                 </a:solidFill>
@@ -9329,7 +10373,7 @@
           <a:p>
             <a:pPr algn="ctr"/>
             <a:r>
-              <a:rPr sz="3200" b="1">
+              <a:rPr sz="2800" b="1" u="none">
                 <a:solidFill>
                   <a:srgbClr val="FF0000"/>
                 </a:solidFill>
@@ -9368,9 +10412,9 @@
               </a:spcAft>
             </a:pPr>
             <a:r>
-              <a:rPr sz="2800">
+              <a:rPr sz="2800" b="0" u="none">
                 <a:solidFill>
-                  <a:srgbClr val="FF0000"/>
+                  <a:srgbClr val="000000"/>
                 </a:solidFill>
                 <a:latin typeface="맑은 고딕"/>
               </a:rPr>
@@ -9384,9 +10428,9 @@
               </a:spcAft>
             </a:pPr>
             <a:r>
-              <a:rPr sz="2800">
+              <a:rPr sz="2800" b="0" u="none">
                 <a:solidFill>
-                  <a:srgbClr val="FF0000"/>
+                  <a:srgbClr val="000000"/>
                 </a:solidFill>
                 <a:latin typeface="맑은 고딕"/>
               </a:rPr>
@@ -9400,9 +10444,9 @@
               </a:spcAft>
             </a:pPr>
             <a:r>
-              <a:rPr sz="2800">
+              <a:rPr sz="2800" b="0" u="none">
                 <a:solidFill>
-                  <a:srgbClr val="FF0000"/>
+                  <a:srgbClr val="000000"/>
                 </a:solidFill>
                 <a:latin typeface="맑은 고딕"/>
               </a:rPr>
@@ -9434,7 +10478,7 @@
           <a:lstStyle/>
           <a:p>
             <a:r>
-              <a:rPr sz="800" b="0">
+              <a:rPr sz="800" b="0" u="none">
                 <a:solidFill>
                   <a:srgbClr val="566070"/>
                 </a:solidFill>
@@ -9469,7 +10513,7 @@
           <a:p>
             <a:pPr algn="r"/>
             <a:r>
-              <a:rPr sz="800" b="0">
+              <a:rPr sz="800" b="0" u="none">
                 <a:solidFill>
                   <a:srgbClr val="566070"/>
                 </a:solidFill>
@@ -9530,7 +10574,7 @@
           <a:p>
             <a:pPr algn="ctr"/>
             <a:r>
-              <a:rPr sz="3200" b="1">
+              <a:rPr sz="2800" b="1" u="none">
                 <a:solidFill>
                   <a:srgbClr val="FF0000"/>
                 </a:solidFill>
@@ -9569,9 +10613,9 @@
               </a:spcAft>
             </a:pPr>
             <a:r>
-              <a:rPr sz="2400">
+              <a:rPr sz="2800" b="0" u="none">
                 <a:solidFill>
-                  <a:srgbClr val="FF0000"/>
+                  <a:srgbClr val="000000"/>
                 </a:solidFill>
                 <a:latin typeface="맑은 고딕"/>
               </a:rPr>
@@ -9585,9 +10629,9 @@
               </a:spcAft>
             </a:pPr>
             <a:r>
-              <a:rPr sz="2400">
+              <a:rPr sz="2800" b="0" u="none">
                 <a:solidFill>
-                  <a:srgbClr val="FF0000"/>
+                  <a:srgbClr val="000000"/>
                 </a:solidFill>
                 <a:latin typeface="맑은 고딕"/>
               </a:rPr>
@@ -9601,29 +10645,13 @@
               </a:spcAft>
             </a:pPr>
             <a:r>
-              <a:rPr sz="2400">
+              <a:rPr sz="2800" b="0" u="none">
                 <a:solidFill>
-                  <a:srgbClr val="FF0000"/>
+                  <a:srgbClr val="000000"/>
                 </a:solidFill>
                 <a:latin typeface="맑은 고딕"/>
               </a:rPr>
               <a:t>국가는 전략산업을 키우고 싶다.</a:t>
-            </a:r>
-          </a:p>
-          <a:p>
-            <a:pPr>
-              <a:spcAft>
-                <a:spcPts val="800"/>
-              </a:spcAft>
-            </a:pPr>
-            <a:r>
-              <a:rPr sz="2400">
-                <a:solidFill>
-                  <a:srgbClr val="FF0000"/>
-                </a:solidFill>
-                <a:latin typeface="맑은 고딕"/>
-              </a:rPr>
-              <a:t>세 이해관계가 한 지점에서 충돌한다.</a:t>
             </a:r>
           </a:p>
         </p:txBody>
@@ -9651,7 +10679,7 @@
           <a:lstStyle/>
           <a:p>
             <a:r>
-              <a:rPr sz="800" b="0">
+              <a:rPr sz="800" b="0" u="none">
                 <a:solidFill>
                   <a:srgbClr val="566070"/>
                 </a:solidFill>
@@ -9686,7 +10714,7 @@
           <a:p>
             <a:pPr algn="r"/>
             <a:r>
-              <a:rPr sz="800" b="0">
+              <a:rPr sz="800" b="0" u="none">
                 <a:solidFill>
                   <a:srgbClr val="566070"/>
                 </a:solidFill>
@@ -9746,7 +10774,7 @@
           <a:lstStyle/>
           <a:p>
             <a:r>
-              <a:rPr sz="5400" b="1">
+              <a:rPr sz="5400" b="1" u="none">
                 <a:solidFill>
                   <a:srgbClr val="181C23"/>
                 </a:solidFill>
@@ -9804,7 +10832,7 @@
           <a:lstStyle/>
           <a:p>
             <a:r>
-              <a:rPr sz="800" b="0">
+              <a:rPr sz="800" b="0" u="none">
                 <a:solidFill>
                   <a:srgbClr val="566070"/>
                 </a:solidFill>
@@ -9839,7 +10867,7 @@
           <a:p>
             <a:pPr algn="r"/>
             <a:r>
-              <a:rPr sz="800" b="0">
+              <a:rPr sz="800" b="0" u="none">
                 <a:solidFill>
                   <a:srgbClr val="566070"/>
                 </a:solidFill>
@@ -9899,7 +10927,7 @@
           <a:lstStyle/>
           <a:p>
             <a:r>
-              <a:rPr sz="2800" b="1">
+              <a:rPr sz="2800" b="1" u="none">
                 <a:solidFill>
                   <a:srgbClr val="FF0000"/>
                 </a:solidFill>
@@ -9919,7 +10947,7 @@
         <p:spPr>
           <a:xfrm>
             <a:off x="713232" y="2795320"/>
-            <a:ext cx="6766560" cy="2651760"/>
+            <a:ext cx="9875520" cy="2651760"/>
           </a:xfrm>
           <a:prstGeom prst="rect">
             <a:avLst/>
@@ -9938,9 +10966,9 @@
               </a:spcAft>
             </a:pPr>
             <a:r>
-              <a:rPr sz="2000">
+              <a:rPr sz="2800" b="0" u="none">
                 <a:solidFill>
-                  <a:srgbClr val="FF0000"/>
+                  <a:srgbClr val="000000"/>
                 </a:solidFill>
                 <a:latin typeface="맑은 고딕"/>
               </a:rPr>
@@ -9954,9 +10982,9 @@
               </a:spcAft>
             </a:pPr>
             <a:r>
-              <a:rPr sz="2000">
+              <a:rPr sz="2800" b="0" u="none">
                 <a:solidFill>
-                  <a:srgbClr val="FF0000"/>
+                  <a:srgbClr val="000000"/>
                 </a:solidFill>
                 <a:latin typeface="맑은 고딕"/>
               </a:rPr>
@@ -9970,9 +10998,9 @@
               </a:spcAft>
             </a:pPr>
             <a:r>
-              <a:rPr sz="2000">
+              <a:rPr sz="2800" b="0" u="none">
                 <a:solidFill>
-                  <a:srgbClr val="FF0000"/>
+                  <a:srgbClr val="000000"/>
                 </a:solidFill>
                 <a:latin typeface="맑은 고딕"/>
               </a:rPr>
@@ -9983,61 +11011,7 @@
       </p:sp>
       <p:sp>
         <p:nvSpPr>
-          <p:cNvPr id="4" name="Rectangle 3"/>
-          <p:cNvSpPr/>
-          <p:nvPr/>
-        </p:nvSpPr>
-        <p:spPr>
-          <a:xfrm>
-            <a:off x="8458200" y="4389120"/>
-            <a:ext cx="2560320" cy="1097280"/>
-          </a:xfrm>
-          <a:prstGeom prst="rect">
-            <a:avLst/>
-          </a:prstGeom>
-          <a:solidFill>
-            <a:srgbClr val="F5F5F5"/>
-          </a:solidFill>
-          <a:ln w="12700">
-            <a:solidFill>
-              <a:srgbClr val="BEBEBE"/>
-            </a:solidFill>
-          </a:ln>
-        </p:spPr>
-        <p:style>
-          <a:lnRef idx="1">
-            <a:schemeClr val="accent1"/>
-          </a:lnRef>
-          <a:fillRef idx="3">
-            <a:schemeClr val="accent1"/>
-          </a:fillRef>
-          <a:effectRef idx="2">
-            <a:schemeClr val="accent1"/>
-          </a:effectRef>
-          <a:fontRef idx="minor">
-            <a:schemeClr val="lt1"/>
-          </a:fontRef>
-        </p:style>
-        <p:txBody>
-          <a:bodyPr rtlCol="0" anchor="ctr" wrap="square"/>
-          <a:lstStyle/>
-          <a:p>
-            <a:pPr algn="ctr"/>
-            <a:r>
-              <a:rPr sz="1300">
-                <a:solidFill>
-                  <a:srgbClr val="566070"/>
-                </a:solidFill>
-                <a:latin typeface="맑은 고딕"/>
-              </a:rPr>
-              <a:t>[수동 삽입]</a:t>
-            </a:r>
-          </a:p>
-        </p:txBody>
-      </p:sp>
-      <p:sp>
-        <p:nvSpPr>
-          <p:cNvPr id="5" name="TextBox 4"/>
+          <p:cNvPr id="4" name="TextBox 3"/>
           <p:cNvSpPr txBox="1"/>
           <p:nvPr/>
         </p:nvSpPr>
@@ -10058,7 +11032,7 @@
           <a:lstStyle/>
           <a:p>
             <a:r>
-              <a:rPr sz="800" b="0">
+              <a:rPr sz="800" b="0" u="none">
                 <a:solidFill>
                   <a:srgbClr val="566070"/>
                 </a:solidFill>
@@ -10071,7 +11045,7 @@
       </p:sp>
       <p:sp>
         <p:nvSpPr>
-          <p:cNvPr id="6" name="TextBox 5"/>
+          <p:cNvPr id="5" name="TextBox 4"/>
           <p:cNvSpPr txBox="1"/>
           <p:nvPr/>
         </p:nvSpPr>
@@ -10093,7 +11067,7 @@
           <a:p>
             <a:pPr algn="r"/>
             <a:r>
-              <a:rPr sz="800" b="0">
+              <a:rPr sz="800" b="0" u="none">
                 <a:solidFill>
                   <a:srgbClr val="566070"/>
                 </a:solidFill>
@@ -10139,7 +11113,7 @@
         <p:spPr>
           <a:xfrm>
             <a:off x="572414" y="411480"/>
-            <a:ext cx="6720840" cy="685800"/>
+            <a:ext cx="10972800" cy="685800"/>
           </a:xfrm>
           <a:prstGeom prst="rect">
             <a:avLst/>
@@ -10153,7 +11127,7 @@
           <a:lstStyle/>
           <a:p>
             <a:r>
-              <a:rPr sz="2800" b="1">
+              <a:rPr sz="2800" b="1" u="none">
                 <a:solidFill>
                   <a:srgbClr val="FF0000"/>
                 </a:solidFill>
@@ -10173,7 +11147,7 @@
         <p:spPr>
           <a:xfrm>
             <a:off x="572414" y="1208836"/>
-            <a:ext cx="6720840" cy="1302105"/>
+            <a:ext cx="11193170" cy="1302105"/>
           </a:xfrm>
           <a:prstGeom prst="rect">
             <a:avLst/>
@@ -10192,9 +11166,9 @@
               </a:spcAft>
             </a:pPr>
             <a:r>
-              <a:rPr sz="2000">
+              <a:rPr sz="2800" b="0" u="none">
                 <a:solidFill>
-                  <a:srgbClr val="FF0000"/>
+                  <a:srgbClr val="000000"/>
                 </a:solidFill>
                 <a:latin typeface="맑은 고딕"/>
               </a:rPr>
@@ -10208,9 +11182,9 @@
               </a:spcAft>
             </a:pPr>
             <a:r>
-              <a:rPr sz="2000">
+              <a:rPr sz="2800" b="0" u="none">
                 <a:solidFill>
-                  <a:srgbClr val="FF0000"/>
+                  <a:srgbClr val="000000"/>
                 </a:solidFill>
                 <a:latin typeface="맑은 고딕"/>
               </a:rPr>
@@ -10224,9 +11198,9 @@
               </a:spcAft>
             </a:pPr>
             <a:r>
-              <a:rPr sz="2000">
+              <a:rPr sz="2800" b="0" u="none">
                 <a:solidFill>
-                  <a:srgbClr val="FF0000"/>
+                  <a:srgbClr val="000000"/>
                 </a:solidFill>
                 <a:latin typeface="맑은 고딕"/>
               </a:rPr>
@@ -10237,61 +11211,7 @@
       </p:sp>
       <p:sp>
         <p:nvSpPr>
-          <p:cNvPr id="4" name="Rectangle 3"/>
-          <p:cNvSpPr/>
-          <p:nvPr/>
-        </p:nvSpPr>
-        <p:spPr>
-          <a:xfrm>
-            <a:off x="8001000" y="1572768"/>
-            <a:ext cx="3337560" cy="3611880"/>
-          </a:xfrm>
-          <a:prstGeom prst="rect">
-            <a:avLst/>
-          </a:prstGeom>
-          <a:solidFill>
-            <a:srgbClr val="F5F5F5"/>
-          </a:solidFill>
-          <a:ln w="12700">
-            <a:solidFill>
-              <a:srgbClr val="BEBEBE"/>
-            </a:solidFill>
-          </a:ln>
-        </p:spPr>
-        <p:style>
-          <a:lnRef idx="1">
-            <a:schemeClr val="accent1"/>
-          </a:lnRef>
-          <a:fillRef idx="3">
-            <a:schemeClr val="accent1"/>
-          </a:fillRef>
-          <a:effectRef idx="2">
-            <a:schemeClr val="accent1"/>
-          </a:effectRef>
-          <a:fontRef idx="minor">
-            <a:schemeClr val="lt1"/>
-          </a:fontRef>
-        </p:style>
-        <p:txBody>
-          <a:bodyPr rtlCol="0" anchor="ctr" wrap="square"/>
-          <a:lstStyle/>
-          <a:p>
-            <a:pPr algn="ctr"/>
-            <a:r>
-              <a:rPr sz="1300">
-                <a:solidFill>
-                  <a:srgbClr val="566070"/>
-                </a:solidFill>
-                <a:latin typeface="맑은 고딕"/>
-              </a:rPr>
-              <a:t>[수동 삽입]</a:t>
-            </a:r>
-          </a:p>
-        </p:txBody>
-      </p:sp>
-      <p:sp>
-        <p:nvSpPr>
-          <p:cNvPr id="5" name="TextBox 4"/>
+          <p:cNvPr id="4" name="TextBox 3"/>
           <p:cNvSpPr txBox="1"/>
           <p:nvPr/>
         </p:nvSpPr>
@@ -10312,7 +11232,7 @@
           <a:lstStyle/>
           <a:p>
             <a:r>
-              <a:rPr sz="800" b="0">
+              <a:rPr sz="800" b="0" u="none">
                 <a:solidFill>
                   <a:srgbClr val="566070"/>
                 </a:solidFill>
@@ -10325,7 +11245,7 @@
       </p:sp>
       <p:sp>
         <p:nvSpPr>
-          <p:cNvPr id="6" name="TextBox 5"/>
+          <p:cNvPr id="5" name="TextBox 4"/>
           <p:cNvSpPr txBox="1"/>
           <p:nvPr/>
         </p:nvSpPr>
@@ -10347,7 +11267,7 @@
           <a:p>
             <a:pPr algn="r"/>
             <a:r>
-              <a:rPr sz="800" b="0">
+              <a:rPr sz="800" b="0" u="none">
                 <a:solidFill>
                   <a:srgbClr val="566070"/>
                 </a:solidFill>
@@ -10452,7 +11372,7 @@
           <a:lstStyle/>
           <a:p>
             <a:r>
-              <a:rPr sz="2800" b="1">
+              <a:rPr sz="2800" b="1" u="none">
                 <a:solidFill>
                   <a:srgbClr val="FF0000"/>
                 </a:solidFill>
@@ -10491,9 +11411,9 @@
               </a:spcAft>
             </a:pPr>
             <a:r>
-              <a:rPr sz="2800">
+              <a:rPr sz="2800" b="0" u="none">
                 <a:solidFill>
-                  <a:srgbClr val="FF0000"/>
+                  <a:srgbClr val="000000"/>
                 </a:solidFill>
                 <a:latin typeface="맑은 고딕"/>
               </a:rPr>
@@ -10507,9 +11427,9 @@
               </a:spcAft>
             </a:pPr>
             <a:r>
-              <a:rPr sz="2800">
+              <a:rPr sz="2800" b="0" u="none">
                 <a:solidFill>
-                  <a:srgbClr val="FF0000"/>
+                  <a:srgbClr val="000000"/>
                 </a:solidFill>
                 <a:latin typeface="맑은 고딕"/>
               </a:rPr>
@@ -10523,9 +11443,9 @@
               </a:spcAft>
             </a:pPr>
             <a:r>
-              <a:rPr sz="2800">
+              <a:rPr sz="2800" b="0" u="none">
                 <a:solidFill>
-                  <a:srgbClr val="FF0000"/>
+                  <a:srgbClr val="000000"/>
                 </a:solidFill>
                 <a:latin typeface="맑은 고딕"/>
               </a:rPr>
@@ -10557,7 +11477,7 @@
           <a:lstStyle/>
           <a:p>
             <a:r>
-              <a:rPr sz="800" b="0">
+              <a:rPr sz="800" b="0" u="none">
                 <a:solidFill>
                   <a:srgbClr val="566070"/>
                 </a:solidFill>
@@ -10592,7 +11512,7 @@
           <a:p>
             <a:pPr algn="r"/>
             <a:r>
-              <a:rPr sz="800" b="0">
+              <a:rPr sz="800" b="0" u="none">
                 <a:solidFill>
                   <a:srgbClr val="566070"/>
                 </a:solidFill>
@@ -10652,7 +11572,7 @@
           <a:lstStyle/>
           <a:p>
             <a:r>
-              <a:rPr sz="2700" b="1">
+              <a:rPr sz="2800" b="1" u="none">
                 <a:solidFill>
                   <a:srgbClr val="FF0000"/>
                 </a:solidFill>
@@ -10781,9 +11701,9 @@
               </a:spcAft>
             </a:pPr>
             <a:r>
-              <a:rPr sz="2800">
+              <a:rPr sz="2800" b="0" u="none">
                 <a:solidFill>
-                  <a:srgbClr val="FF0000"/>
+                  <a:srgbClr val="000000"/>
                 </a:solidFill>
                 <a:latin typeface="맑은 고딕"/>
               </a:rPr>
@@ -10797,9 +11717,9 @@
               </a:spcAft>
             </a:pPr>
             <a:r>
-              <a:rPr sz="2800">
+              <a:rPr sz="2800" b="0" u="none">
                 <a:solidFill>
-                  <a:srgbClr val="FF0000"/>
+                  <a:srgbClr val="000000"/>
                 </a:solidFill>
                 <a:latin typeface="맑은 고딕"/>
               </a:rPr>
@@ -10836,9 +11756,9 @@
               </a:spcAft>
             </a:pPr>
             <a:r>
-              <a:rPr sz="2800">
+              <a:rPr sz="2800" b="0" u="none">
                 <a:solidFill>
-                  <a:srgbClr val="FF0000"/>
+                  <a:srgbClr val="000000"/>
                 </a:solidFill>
                 <a:latin typeface="맑은 고딕"/>
               </a:rPr>
@@ -10870,7 +11790,7 @@
           <a:lstStyle/>
           <a:p>
             <a:r>
-              <a:rPr sz="800" b="0">
+              <a:rPr sz="800" b="0" u="none">
                 <a:solidFill>
                   <a:srgbClr val="566070"/>
                 </a:solidFill>
@@ -10905,7 +11825,7 @@
           <a:p>
             <a:pPr algn="r"/>
             <a:r>
-              <a:rPr sz="800" b="0">
+              <a:rPr sz="800" b="0" u="none">
                 <a:solidFill>
                   <a:srgbClr val="566070"/>
                 </a:solidFill>
@@ -10965,7 +11885,7 @@
           <a:lstStyle/>
           <a:p>
             <a:r>
-              <a:rPr sz="2700" b="1">
+              <a:rPr sz="2800" b="1" u="none">
                 <a:solidFill>
                   <a:srgbClr val="FF0000"/>
                 </a:solidFill>
@@ -11094,9 +12014,9 @@
               </a:spcAft>
             </a:pPr>
             <a:r>
-              <a:rPr sz="2800">
+              <a:rPr sz="2800" b="0" u="none">
                 <a:solidFill>
-                  <a:srgbClr val="FF0000"/>
+                  <a:srgbClr val="000000"/>
                 </a:solidFill>
                 <a:latin typeface="맑은 고딕"/>
               </a:rPr>
@@ -11110,9 +12030,9 @@
               </a:spcAft>
             </a:pPr>
             <a:r>
-              <a:rPr sz="2800">
+              <a:rPr sz="2800" b="0" u="none">
                 <a:solidFill>
-                  <a:srgbClr val="FF0000"/>
+                  <a:srgbClr val="000000"/>
                 </a:solidFill>
                 <a:latin typeface="맑은 고딕"/>
               </a:rPr>
@@ -11149,9 +12069,9 @@
               </a:spcAft>
             </a:pPr>
             <a:r>
-              <a:rPr sz="2800">
+              <a:rPr sz="2800" b="0" u="none">
                 <a:solidFill>
-                  <a:srgbClr val="FF0000"/>
+                  <a:srgbClr val="000000"/>
                 </a:solidFill>
                 <a:latin typeface="맑은 고딕"/>
               </a:rPr>
@@ -11183,7 +12103,7 @@
           <a:lstStyle/>
           <a:p>
             <a:r>
-              <a:rPr sz="800" b="0">
+              <a:rPr sz="800" b="0" u="none">
                 <a:solidFill>
                   <a:srgbClr val="566070"/>
                 </a:solidFill>
@@ -11218,7 +12138,7 @@
           <a:p>
             <a:pPr algn="r"/>
             <a:r>
-              <a:rPr sz="800" b="0">
+              <a:rPr sz="800" b="0" u="none">
                 <a:solidFill>
                   <a:srgbClr val="566070"/>
                 </a:solidFill>
@@ -11279,7 +12199,7 @@
           <a:p>
             <a:pPr algn="ctr"/>
             <a:r>
-              <a:rPr sz="3200" b="1">
+              <a:rPr sz="2800" b="1" u="none">
                 <a:solidFill>
                   <a:srgbClr val="FF0000"/>
                 </a:solidFill>
@@ -11318,9 +12238,9 @@
               </a:spcAft>
             </a:pPr>
             <a:r>
-              <a:rPr sz="2800">
+              <a:rPr sz="2800" b="0" u="none">
                 <a:solidFill>
-                  <a:srgbClr val="FF0000"/>
+                  <a:srgbClr val="000000"/>
                 </a:solidFill>
                 <a:latin typeface="맑은 고딕"/>
               </a:rPr>
@@ -11334,9 +12254,9 @@
               </a:spcAft>
             </a:pPr>
             <a:r>
-              <a:rPr sz="2800">
+              <a:rPr sz="2800" b="0" u="none">
                 <a:solidFill>
-                  <a:srgbClr val="FF0000"/>
+                  <a:srgbClr val="000000"/>
                 </a:solidFill>
                 <a:latin typeface="맑은 고딕"/>
               </a:rPr>
@@ -11350,9 +12270,9 @@
               </a:spcAft>
             </a:pPr>
             <a:r>
-              <a:rPr sz="2800">
+              <a:rPr sz="2800" b="0" u="none">
                 <a:solidFill>
-                  <a:srgbClr val="FF0000"/>
+                  <a:srgbClr val="000000"/>
                 </a:solidFill>
                 <a:latin typeface="맑은 고딕"/>
               </a:rPr>
@@ -11384,7 +12304,7 @@
           <a:lstStyle/>
           <a:p>
             <a:r>
-              <a:rPr sz="800" b="0">
+              <a:rPr sz="800" b="0" u="none">
                 <a:solidFill>
                   <a:srgbClr val="566070"/>
                 </a:solidFill>
@@ -11419,7 +12339,7 @@
           <a:p>
             <a:pPr algn="r"/>
             <a:r>
-              <a:rPr sz="800" b="0">
+              <a:rPr sz="800" b="0" u="none">
                 <a:solidFill>
                   <a:srgbClr val="566070"/>
                 </a:solidFill>
@@ -11479,7 +12399,7 @@
           <a:lstStyle/>
           <a:p>
             <a:r>
-              <a:rPr sz="5400" b="1">
+              <a:rPr sz="5400" b="1" u="none">
                 <a:solidFill>
                   <a:srgbClr val="181C23"/>
                 </a:solidFill>
@@ -11537,7 +12457,7 @@
           <a:lstStyle/>
           <a:p>
             <a:r>
-              <a:rPr sz="800" b="0">
+              <a:rPr sz="800" b="0" u="none">
                 <a:solidFill>
                   <a:srgbClr val="566070"/>
                 </a:solidFill>
@@ -11572,7 +12492,7 @@
           <a:p>
             <a:pPr algn="r"/>
             <a:r>
-              <a:rPr sz="800" b="0">
+              <a:rPr sz="800" b="0" u="none">
                 <a:solidFill>
                   <a:srgbClr val="566070"/>
                 </a:solidFill>
@@ -11632,7 +12552,7 @@
           <a:lstStyle/>
           <a:p>
             <a:r>
-              <a:rPr sz="2800" b="1">
+              <a:rPr sz="2800" b="1" u="none">
                 <a:solidFill>
                   <a:srgbClr val="FF0000"/>
                 </a:solidFill>
@@ -11652,7 +12572,7 @@
         <p:spPr>
           <a:xfrm>
             <a:off x="713232" y="2795320"/>
-            <a:ext cx="6766560" cy="2651760"/>
+            <a:ext cx="9875520" cy="2651760"/>
           </a:xfrm>
           <a:prstGeom prst="rect">
             <a:avLst/>
@@ -11671,9 +12591,9 @@
               </a:spcAft>
             </a:pPr>
             <a:r>
-              <a:rPr sz="2000">
+              <a:rPr sz="2800" b="0" u="none">
                 <a:solidFill>
-                  <a:srgbClr val="FF0000"/>
+                  <a:srgbClr val="000000"/>
                 </a:solidFill>
                 <a:latin typeface="맑은 고딕"/>
               </a:rPr>
@@ -11687,9 +12607,9 @@
               </a:spcAft>
             </a:pPr>
             <a:r>
-              <a:rPr sz="2000">
+              <a:rPr sz="2800" b="0" u="none">
                 <a:solidFill>
-                  <a:srgbClr val="FF0000"/>
+                  <a:srgbClr val="000000"/>
                 </a:solidFill>
                 <a:latin typeface="맑은 고딕"/>
               </a:rPr>
@@ -11703,9 +12623,9 @@
               </a:spcAft>
             </a:pPr>
             <a:r>
-              <a:rPr sz="2000">
+              <a:rPr sz="2800" b="0" u="none">
                 <a:solidFill>
-                  <a:srgbClr val="FF0000"/>
+                  <a:srgbClr val="000000"/>
                 </a:solidFill>
                 <a:latin typeface="맑은 고딕"/>
               </a:rPr>
@@ -11716,61 +12636,7 @@
       </p:sp>
       <p:sp>
         <p:nvSpPr>
-          <p:cNvPr id="4" name="Rectangle 3"/>
-          <p:cNvSpPr/>
-          <p:nvPr/>
-        </p:nvSpPr>
-        <p:spPr>
-          <a:xfrm>
-            <a:off x="8458200" y="4389120"/>
-            <a:ext cx="2560320" cy="1097280"/>
-          </a:xfrm>
-          <a:prstGeom prst="rect">
-            <a:avLst/>
-          </a:prstGeom>
-          <a:solidFill>
-            <a:srgbClr val="F5F5F5"/>
-          </a:solidFill>
-          <a:ln w="12700">
-            <a:solidFill>
-              <a:srgbClr val="BEBEBE"/>
-            </a:solidFill>
-          </a:ln>
-        </p:spPr>
-        <p:style>
-          <a:lnRef idx="1">
-            <a:schemeClr val="accent1"/>
-          </a:lnRef>
-          <a:fillRef idx="3">
-            <a:schemeClr val="accent1"/>
-          </a:fillRef>
-          <a:effectRef idx="2">
-            <a:schemeClr val="accent1"/>
-          </a:effectRef>
-          <a:fontRef idx="minor">
-            <a:schemeClr val="lt1"/>
-          </a:fontRef>
-        </p:style>
-        <p:txBody>
-          <a:bodyPr rtlCol="0" anchor="ctr" wrap="square"/>
-          <a:lstStyle/>
-          <a:p>
-            <a:pPr algn="ctr"/>
-            <a:r>
-              <a:rPr sz="1300">
-                <a:solidFill>
-                  <a:srgbClr val="566070"/>
-                </a:solidFill>
-                <a:latin typeface="맑은 고딕"/>
-              </a:rPr>
-              <a:t>[수동 삽입]</a:t>
-            </a:r>
-          </a:p>
-        </p:txBody>
-      </p:sp>
-      <p:sp>
-        <p:nvSpPr>
-          <p:cNvPr id="5" name="TextBox 4"/>
+          <p:cNvPr id="4" name="TextBox 3"/>
           <p:cNvSpPr txBox="1"/>
           <p:nvPr/>
         </p:nvSpPr>
@@ -11791,7 +12657,7 @@
           <a:lstStyle/>
           <a:p>
             <a:r>
-              <a:rPr sz="800" b="0">
+              <a:rPr sz="800" b="0" u="none">
                 <a:solidFill>
                   <a:srgbClr val="566070"/>
                 </a:solidFill>
@@ -11804,7 +12670,7 @@
       </p:sp>
       <p:sp>
         <p:nvSpPr>
-          <p:cNvPr id="6" name="TextBox 5"/>
+          <p:cNvPr id="5" name="TextBox 4"/>
           <p:cNvSpPr txBox="1"/>
           <p:nvPr/>
         </p:nvSpPr>
@@ -11826,7 +12692,7 @@
           <a:p>
             <a:pPr algn="r"/>
             <a:r>
-              <a:rPr sz="800" b="0">
+              <a:rPr sz="800" b="0" u="none">
                 <a:solidFill>
                   <a:srgbClr val="566070"/>
                 </a:solidFill>
@@ -11872,7 +12738,7 @@
         <p:spPr>
           <a:xfrm>
             <a:off x="572414" y="411480"/>
-            <a:ext cx="6720840" cy="685800"/>
+            <a:ext cx="10972800" cy="685800"/>
           </a:xfrm>
           <a:prstGeom prst="rect">
             <a:avLst/>
@@ -11886,7 +12752,7 @@
           <a:lstStyle/>
           <a:p>
             <a:r>
-              <a:rPr sz="2800" b="1">
+              <a:rPr sz="2800" b="1" u="none">
                 <a:solidFill>
                   <a:srgbClr val="FF0000"/>
                 </a:solidFill>
@@ -11906,7 +12772,7 @@
         <p:spPr>
           <a:xfrm>
             <a:off x="572414" y="1208836"/>
-            <a:ext cx="6720840" cy="1302105"/>
+            <a:ext cx="11193170" cy="1302105"/>
           </a:xfrm>
           <a:prstGeom prst="rect">
             <a:avLst/>
@@ -11925,9 +12791,9 @@
               </a:spcAft>
             </a:pPr>
             <a:r>
-              <a:rPr sz="2000">
+              <a:rPr sz="2800" b="0" u="none">
                 <a:solidFill>
-                  <a:srgbClr val="FF0000"/>
+                  <a:srgbClr val="000000"/>
                 </a:solidFill>
                 <a:latin typeface="맑은 고딕"/>
               </a:rPr>
@@ -11941,9 +12807,9 @@
               </a:spcAft>
             </a:pPr>
             <a:r>
-              <a:rPr sz="2000">
+              <a:rPr sz="2800" b="0" u="none">
                 <a:solidFill>
-                  <a:srgbClr val="FF0000"/>
+                  <a:srgbClr val="000000"/>
                 </a:solidFill>
                 <a:latin typeface="맑은 고딕"/>
               </a:rPr>
@@ -11957,9 +12823,9 @@
               </a:spcAft>
             </a:pPr>
             <a:r>
-              <a:rPr sz="2000">
+              <a:rPr sz="2800" b="0" u="none">
                 <a:solidFill>
-                  <a:srgbClr val="FF0000"/>
+                  <a:srgbClr val="000000"/>
                 </a:solidFill>
                 <a:latin typeface="맑은 고딕"/>
               </a:rPr>
@@ -11970,61 +12836,7 @@
       </p:sp>
       <p:sp>
         <p:nvSpPr>
-          <p:cNvPr id="4" name="Rectangle 3"/>
-          <p:cNvSpPr/>
-          <p:nvPr/>
-        </p:nvSpPr>
-        <p:spPr>
-          <a:xfrm>
-            <a:off x="8001000" y="1572768"/>
-            <a:ext cx="3337560" cy="3611880"/>
-          </a:xfrm>
-          <a:prstGeom prst="rect">
-            <a:avLst/>
-          </a:prstGeom>
-          <a:solidFill>
-            <a:srgbClr val="F5F5F5"/>
-          </a:solidFill>
-          <a:ln w="12700">
-            <a:solidFill>
-              <a:srgbClr val="BEBEBE"/>
-            </a:solidFill>
-          </a:ln>
-        </p:spPr>
-        <p:style>
-          <a:lnRef idx="1">
-            <a:schemeClr val="accent1"/>
-          </a:lnRef>
-          <a:fillRef idx="3">
-            <a:schemeClr val="accent1"/>
-          </a:fillRef>
-          <a:effectRef idx="2">
-            <a:schemeClr val="accent1"/>
-          </a:effectRef>
-          <a:fontRef idx="minor">
-            <a:schemeClr val="lt1"/>
-          </a:fontRef>
-        </p:style>
-        <p:txBody>
-          <a:bodyPr rtlCol="0" anchor="ctr" wrap="square"/>
-          <a:lstStyle/>
-          <a:p>
-            <a:pPr algn="ctr"/>
-            <a:r>
-              <a:rPr sz="1300">
-                <a:solidFill>
-                  <a:srgbClr val="566070"/>
-                </a:solidFill>
-                <a:latin typeface="맑은 고딕"/>
-              </a:rPr>
-              <a:t>[수동 삽입]</a:t>
-            </a:r>
-          </a:p>
-        </p:txBody>
-      </p:sp>
-      <p:sp>
-        <p:nvSpPr>
-          <p:cNvPr id="5" name="TextBox 4"/>
+          <p:cNvPr id="4" name="TextBox 3"/>
           <p:cNvSpPr txBox="1"/>
           <p:nvPr/>
         </p:nvSpPr>
@@ -12045,7 +12857,7 @@
           <a:lstStyle/>
           <a:p>
             <a:r>
-              <a:rPr sz="800" b="0">
+              <a:rPr sz="800" b="0" u="none">
                 <a:solidFill>
                   <a:srgbClr val="566070"/>
                 </a:solidFill>
@@ -12058,7 +12870,7 @@
       </p:sp>
       <p:sp>
         <p:nvSpPr>
-          <p:cNvPr id="6" name="TextBox 5"/>
+          <p:cNvPr id="5" name="TextBox 4"/>
           <p:cNvSpPr txBox="1"/>
           <p:nvPr/>
         </p:nvSpPr>
@@ -12080,7 +12892,7 @@
           <a:p>
             <a:pPr algn="r"/>
             <a:r>
-              <a:rPr sz="800" b="0">
+              <a:rPr sz="800" b="0" u="none">
                 <a:solidFill>
                   <a:srgbClr val="566070"/>
                 </a:solidFill>
@@ -12140,7 +12952,7 @@
           <a:lstStyle/>
           <a:p>
             <a:r>
-              <a:rPr sz="2700" b="1">
+              <a:rPr sz="2800" b="1" u="none">
                 <a:solidFill>
                   <a:srgbClr val="FF0000"/>
                 </a:solidFill>
@@ -12269,9 +13081,9 @@
               </a:spcAft>
             </a:pPr>
             <a:r>
-              <a:rPr sz="2800">
+              <a:rPr sz="2800" b="0" u="none">
                 <a:solidFill>
-                  <a:srgbClr val="FF0000"/>
+                  <a:srgbClr val="000000"/>
                 </a:solidFill>
                 <a:latin typeface="맑은 고딕"/>
               </a:rPr>
@@ -12285,9 +13097,9 @@
               </a:spcAft>
             </a:pPr>
             <a:r>
-              <a:rPr sz="2800">
+              <a:rPr sz="2800" b="0" u="none">
                 <a:solidFill>
-                  <a:srgbClr val="FF0000"/>
+                  <a:srgbClr val="000000"/>
                 </a:solidFill>
                 <a:latin typeface="맑은 고딕"/>
               </a:rPr>
@@ -12324,9 +13136,9 @@
               </a:spcAft>
             </a:pPr>
             <a:r>
-              <a:rPr sz="2800">
+              <a:rPr sz="2800" b="0" u="none">
                 <a:solidFill>
-                  <a:srgbClr val="FF0000"/>
+                  <a:srgbClr val="000000"/>
                 </a:solidFill>
                 <a:latin typeface="맑은 고딕"/>
               </a:rPr>
@@ -12358,7 +13170,7 @@
           <a:lstStyle/>
           <a:p>
             <a:r>
-              <a:rPr sz="800" b="0">
+              <a:rPr sz="800" b="0" u="none">
                 <a:solidFill>
                   <a:srgbClr val="566070"/>
                 </a:solidFill>
@@ -12393,7 +13205,7 @@
           <a:p>
             <a:pPr algn="r"/>
             <a:r>
-              <a:rPr sz="800" b="0">
+              <a:rPr sz="800" b="0" u="none">
                 <a:solidFill>
                   <a:srgbClr val="566070"/>
                 </a:solidFill>
@@ -12454,7 +13266,7 @@
           <a:p>
             <a:pPr algn="ctr"/>
             <a:r>
-              <a:rPr sz="3200" b="1">
+              <a:rPr sz="2800" b="1" u="none">
                 <a:solidFill>
                   <a:srgbClr val="FF0000"/>
                 </a:solidFill>
@@ -12493,9 +13305,9 @@
               </a:spcAft>
             </a:pPr>
             <a:r>
-              <a:rPr sz="2800">
+              <a:rPr sz="2800" b="0" u="none">
                 <a:solidFill>
-                  <a:srgbClr val="FF0000"/>
+                  <a:srgbClr val="000000"/>
                 </a:solidFill>
                 <a:latin typeface="맑은 고딕"/>
               </a:rPr>
@@ -12509,9 +13321,9 @@
               </a:spcAft>
             </a:pPr>
             <a:r>
-              <a:rPr sz="2800">
+              <a:rPr sz="2800" b="0" u="none">
                 <a:solidFill>
-                  <a:srgbClr val="FF0000"/>
+                  <a:srgbClr val="000000"/>
                 </a:solidFill>
                 <a:latin typeface="맑은 고딕"/>
               </a:rPr>
@@ -12525,9 +13337,9 @@
               </a:spcAft>
             </a:pPr>
             <a:r>
-              <a:rPr sz="2800">
+              <a:rPr sz="2800" b="0" u="none">
                 <a:solidFill>
-                  <a:srgbClr val="FF0000"/>
+                  <a:srgbClr val="000000"/>
                 </a:solidFill>
                 <a:latin typeface="맑은 고딕"/>
               </a:rPr>
@@ -12559,7 +13371,7 @@
           <a:lstStyle/>
           <a:p>
             <a:r>
-              <a:rPr sz="800" b="0">
+              <a:rPr sz="800" b="0" u="none">
                 <a:solidFill>
                   <a:srgbClr val="566070"/>
                 </a:solidFill>
@@ -12594,7 +13406,7 @@
           <a:p>
             <a:pPr algn="r"/>
             <a:r>
-              <a:rPr sz="800" b="0">
+              <a:rPr sz="800" b="0" u="none">
                 <a:solidFill>
                   <a:srgbClr val="566070"/>
                 </a:solidFill>
@@ -12654,7 +13466,7 @@
           <a:lstStyle/>
           <a:p>
             <a:r>
-              <a:rPr sz="2800" b="1">
+              <a:rPr sz="2800" b="1" u="none">
                 <a:solidFill>
                   <a:srgbClr val="BF6F24"/>
                 </a:solidFill>
@@ -12693,9 +13505,9 @@
               </a:spcAft>
             </a:pPr>
             <a:r>
-              <a:rPr sz="2400">
+              <a:rPr sz="2400" b="0" u="none">
                 <a:solidFill>
-                  <a:srgbClr val="181C23"/>
+                  <a:srgbClr val="000000"/>
                 </a:solidFill>
                 <a:latin typeface="맑은 고딕"/>
               </a:rPr>
@@ -12709,9 +13521,9 @@
               </a:spcAft>
             </a:pPr>
             <a:r>
-              <a:rPr sz="2400">
+              <a:rPr sz="2400" b="0" u="none">
                 <a:solidFill>
-                  <a:srgbClr val="181C23"/>
+                  <a:srgbClr val="000000"/>
                 </a:solidFill>
                 <a:latin typeface="맑은 고딕"/>
               </a:rPr>
@@ -12725,9 +13537,9 @@
               </a:spcAft>
             </a:pPr>
             <a:r>
-              <a:rPr sz="2400">
+              <a:rPr sz="2400" b="0" u="none">
                 <a:solidFill>
-                  <a:srgbClr val="181C23"/>
+                  <a:srgbClr val="000000"/>
                 </a:solidFill>
                 <a:latin typeface="맑은 고딕"/>
               </a:rPr>
@@ -12759,7 +13571,7 @@
           <a:lstStyle/>
           <a:p>
             <a:r>
-              <a:rPr sz="800" b="0">
+              <a:rPr sz="800" b="0" u="none">
                 <a:solidFill>
                   <a:srgbClr val="566070"/>
                 </a:solidFill>
@@ -12794,7 +13606,7 @@
           <a:p>
             <a:pPr algn="r"/>
             <a:r>
-              <a:rPr sz="800" b="0">
+              <a:rPr sz="800" b="0" u="none">
                 <a:solidFill>
                   <a:srgbClr val="566070"/>
                 </a:solidFill>
@@ -12854,7 +13666,7 @@
           <a:lstStyle/>
           <a:p>
             <a:r>
-              <a:rPr sz="2800" b="1">
+              <a:rPr sz="2800" b="1" u="none">
                 <a:solidFill>
                   <a:srgbClr val="BF6F24"/>
                 </a:solidFill>
@@ -12893,9 +13705,9 @@
               </a:spcAft>
             </a:pPr>
             <a:r>
-              <a:rPr sz="2000">
+              <a:rPr sz="2400" b="0" u="none">
                 <a:solidFill>
-                  <a:srgbClr val="181C23"/>
+                  <a:srgbClr val="000000"/>
                 </a:solidFill>
                 <a:latin typeface="맑은 고딕"/>
               </a:rPr>
@@ -12909,9 +13721,9 @@
               </a:spcAft>
             </a:pPr>
             <a:r>
-              <a:rPr sz="2000">
+              <a:rPr sz="2400" b="0" u="none">
                 <a:solidFill>
-                  <a:srgbClr val="181C23"/>
+                  <a:srgbClr val="000000"/>
                 </a:solidFill>
                 <a:latin typeface="맑은 고딕"/>
               </a:rPr>
@@ -12943,7 +13755,7 @@
           <a:lstStyle/>
           <a:p>
             <a:r>
-              <a:rPr sz="800" b="0">
+              <a:rPr sz="800" b="0" u="none">
                 <a:solidFill>
                   <a:srgbClr val="566070"/>
                 </a:solidFill>
@@ -12978,7 +13790,7 @@
           <a:p>
             <a:pPr algn="r"/>
             <a:r>
-              <a:rPr sz="800" b="0">
+              <a:rPr sz="800" b="0" u="none">
                 <a:solidFill>
                   <a:srgbClr val="566070"/>
                 </a:solidFill>
@@ -13024,7 +13836,7 @@
         <p:spPr>
           <a:xfrm>
             <a:off x="572414" y="411480"/>
-            <a:ext cx="6720840" cy="685800"/>
+            <a:ext cx="10972800" cy="685800"/>
           </a:xfrm>
           <a:prstGeom prst="rect">
             <a:avLst/>
@@ -13038,7 +13850,7 @@
           <a:lstStyle/>
           <a:p>
             <a:r>
-              <a:rPr sz="2800" b="1">
+              <a:rPr sz="2800" b="1" u="none">
                 <a:solidFill>
                   <a:srgbClr val="FF0000"/>
                 </a:solidFill>
@@ -13058,7 +13870,7 @@
         <p:spPr>
           <a:xfrm>
             <a:off x="572414" y="1208836"/>
-            <a:ext cx="6720840" cy="1302105"/>
+            <a:ext cx="11193170" cy="1302105"/>
           </a:xfrm>
           <a:prstGeom prst="rect">
             <a:avLst/>
@@ -13077,9 +13889,9 @@
               </a:spcAft>
             </a:pPr>
             <a:r>
-              <a:rPr sz="2000">
+              <a:rPr sz="2800" b="0" u="none">
                 <a:solidFill>
-                  <a:srgbClr val="FF0000"/>
+                  <a:srgbClr val="000000"/>
                 </a:solidFill>
                 <a:latin typeface="맑은 고딕"/>
               </a:rPr>
@@ -13093,9 +13905,9 @@
               </a:spcAft>
             </a:pPr>
             <a:r>
-              <a:rPr sz="2000">
+              <a:rPr sz="2800" b="0" u="none">
                 <a:solidFill>
-                  <a:srgbClr val="FF0000"/>
+                  <a:srgbClr val="000000"/>
                 </a:solidFill>
                 <a:latin typeface="맑은 고딕"/>
               </a:rPr>
@@ -13109,9 +13921,9 @@
               </a:spcAft>
             </a:pPr>
             <a:r>
-              <a:rPr sz="2000">
+              <a:rPr sz="2800" b="0" u="none">
                 <a:solidFill>
-                  <a:srgbClr val="FF0000"/>
+                  <a:srgbClr val="000000"/>
                 </a:solidFill>
                 <a:latin typeface="맑은 고딕"/>
               </a:rPr>
@@ -13122,61 +13934,7 @@
       </p:sp>
       <p:sp>
         <p:nvSpPr>
-          <p:cNvPr id="4" name="Rectangle 3"/>
-          <p:cNvSpPr/>
-          <p:nvPr/>
-        </p:nvSpPr>
-        <p:spPr>
-          <a:xfrm>
-            <a:off x="8001000" y="1572768"/>
-            <a:ext cx="3337560" cy="3611880"/>
-          </a:xfrm>
-          <a:prstGeom prst="rect">
-            <a:avLst/>
-          </a:prstGeom>
-          <a:solidFill>
-            <a:srgbClr val="F5F5F5"/>
-          </a:solidFill>
-          <a:ln w="12700">
-            <a:solidFill>
-              <a:srgbClr val="BEBEBE"/>
-            </a:solidFill>
-          </a:ln>
-        </p:spPr>
-        <p:style>
-          <a:lnRef idx="1">
-            <a:schemeClr val="accent1"/>
-          </a:lnRef>
-          <a:fillRef idx="3">
-            <a:schemeClr val="accent1"/>
-          </a:fillRef>
-          <a:effectRef idx="2">
-            <a:schemeClr val="accent1"/>
-          </a:effectRef>
-          <a:fontRef idx="minor">
-            <a:schemeClr val="lt1"/>
-          </a:fontRef>
-        </p:style>
-        <p:txBody>
-          <a:bodyPr rtlCol="0" anchor="ctr" wrap="square"/>
-          <a:lstStyle/>
-          <a:p>
-            <a:pPr algn="ctr"/>
-            <a:r>
-              <a:rPr sz="1300">
-                <a:solidFill>
-                  <a:srgbClr val="566070"/>
-                </a:solidFill>
-                <a:latin typeface="맑은 고딕"/>
-              </a:rPr>
-              <a:t>[수동 삽입]</a:t>
-            </a:r>
-          </a:p>
-        </p:txBody>
-      </p:sp>
-      <p:sp>
-        <p:nvSpPr>
-          <p:cNvPr id="5" name="TextBox 4"/>
+          <p:cNvPr id="4" name="TextBox 3"/>
           <p:cNvSpPr txBox="1"/>
           <p:nvPr/>
         </p:nvSpPr>
@@ -13197,7 +13955,7 @@
           <a:lstStyle/>
           <a:p>
             <a:r>
-              <a:rPr sz="800" b="0">
+              <a:rPr sz="800" b="0" u="none">
                 <a:solidFill>
                   <a:srgbClr val="566070"/>
                 </a:solidFill>
@@ -13210,7 +13968,7 @@
       </p:sp>
       <p:sp>
         <p:nvSpPr>
-          <p:cNvPr id="6" name="TextBox 5"/>
+          <p:cNvPr id="5" name="TextBox 4"/>
           <p:cNvSpPr txBox="1"/>
           <p:nvPr/>
         </p:nvSpPr>
@@ -13232,7 +13990,7 @@
           <a:p>
             <a:pPr algn="r"/>
             <a:r>
-              <a:rPr sz="800" b="0">
+              <a:rPr sz="800" b="0" u="none">
                 <a:solidFill>
                   <a:srgbClr val="566070"/>
                 </a:solidFill>
@@ -13293,7 +14051,7 @@
           <a:p>
             <a:pPr algn="ctr"/>
             <a:r>
-              <a:rPr sz="3200" b="1">
+              <a:rPr sz="2800" b="1" u="none">
                 <a:solidFill>
                   <a:srgbClr val="FF0000"/>
                 </a:solidFill>
@@ -13332,9 +14090,9 @@
               </a:spcAft>
             </a:pPr>
             <a:r>
-              <a:rPr sz="2800">
+              <a:rPr sz="2800" b="0" u="none">
                 <a:solidFill>
-                  <a:srgbClr val="FF0000"/>
+                  <a:srgbClr val="000000"/>
                 </a:solidFill>
                 <a:latin typeface="맑은 고딕"/>
               </a:rPr>
@@ -13348,9 +14106,9 @@
               </a:spcAft>
             </a:pPr>
             <a:r>
-              <a:rPr sz="2800">
+              <a:rPr sz="2800" b="0" u="none">
                 <a:solidFill>
-                  <a:srgbClr val="FF0000"/>
+                  <a:srgbClr val="000000"/>
                 </a:solidFill>
                 <a:latin typeface="맑은 고딕"/>
               </a:rPr>
@@ -13364,9 +14122,9 @@
               </a:spcAft>
             </a:pPr>
             <a:r>
-              <a:rPr sz="2800">
+              <a:rPr sz="2800" b="0" u="none">
                 <a:solidFill>
-                  <a:srgbClr val="FF0000"/>
+                  <a:srgbClr val="000000"/>
                 </a:solidFill>
                 <a:latin typeface="맑은 고딕"/>
               </a:rPr>
@@ -13398,7 +14156,7 @@
           <a:lstStyle/>
           <a:p>
             <a:r>
-              <a:rPr sz="800" b="0">
+              <a:rPr sz="800" b="0" u="none">
                 <a:solidFill>
                   <a:srgbClr val="566070"/>
                 </a:solidFill>
@@ -13433,7 +14191,7 @@
           <a:p>
             <a:pPr algn="r"/>
             <a:r>
-              <a:rPr sz="800" b="0">
+              <a:rPr sz="800" b="0" u="none">
                 <a:solidFill>
                   <a:srgbClr val="566070"/>
                 </a:solidFill>
@@ -13494,7 +14252,7 @@
           <a:p>
             <a:pPr algn="ctr"/>
             <a:r>
-              <a:rPr sz="3200" b="1">
+              <a:rPr sz="2800" b="1" u="none">
                 <a:solidFill>
                   <a:srgbClr val="FF0000"/>
                 </a:solidFill>
@@ -13533,9 +14291,9 @@
               </a:spcAft>
             </a:pPr>
             <a:r>
-              <a:rPr sz="2800">
+              <a:rPr sz="2800" b="0" u="none">
                 <a:solidFill>
-                  <a:srgbClr val="FF0000"/>
+                  <a:srgbClr val="000000"/>
                 </a:solidFill>
                 <a:latin typeface="맑은 고딕"/>
               </a:rPr>
@@ -13549,9 +14307,9 @@
               </a:spcAft>
             </a:pPr>
             <a:r>
-              <a:rPr sz="2800">
+              <a:rPr sz="2800" b="0" u="none">
                 <a:solidFill>
-                  <a:srgbClr val="FF0000"/>
+                  <a:srgbClr val="000000"/>
                 </a:solidFill>
                 <a:latin typeface="맑은 고딕"/>
               </a:rPr>
@@ -13565,9 +14323,9 @@
               </a:spcAft>
             </a:pPr>
             <a:r>
-              <a:rPr sz="2800">
+              <a:rPr sz="2800" b="0" u="none">
                 <a:solidFill>
-                  <a:srgbClr val="FF0000"/>
+                  <a:srgbClr val="000000"/>
                 </a:solidFill>
                 <a:latin typeface="맑은 고딕"/>
               </a:rPr>
@@ -13599,7 +14357,7 @@
           <a:lstStyle/>
           <a:p>
             <a:r>
-              <a:rPr sz="800" b="0">
+              <a:rPr sz="800" b="0" u="none">
                 <a:solidFill>
                   <a:srgbClr val="566070"/>
                 </a:solidFill>
@@ -13634,7 +14392,7 @@
           <a:p>
             <a:pPr algn="r"/>
             <a:r>
-              <a:rPr sz="800" b="0">
+              <a:rPr sz="800" b="0" u="none">
                 <a:solidFill>
                   <a:srgbClr val="566070"/>
                 </a:solidFill>
@@ -13694,7 +14452,7 @@
           <a:lstStyle/>
           <a:p>
             <a:r>
-              <a:rPr sz="5400" b="1">
+              <a:rPr sz="5400" b="1" u="none">
                 <a:solidFill>
                   <a:srgbClr val="181C23"/>
                 </a:solidFill>
@@ -13752,7 +14510,7 @@
           <a:lstStyle/>
           <a:p>
             <a:r>
-              <a:rPr sz="800" b="0">
+              <a:rPr sz="800" b="0" u="none">
                 <a:solidFill>
                   <a:srgbClr val="566070"/>
                 </a:solidFill>
@@ -13787,7 +14545,7 @@
           <a:p>
             <a:pPr algn="r"/>
             <a:r>
-              <a:rPr sz="800" b="0">
+              <a:rPr sz="800" b="0" u="none">
                 <a:solidFill>
                   <a:srgbClr val="566070"/>
                 </a:solidFill>
@@ -13833,7 +14591,7 @@
         <p:spPr>
           <a:xfrm>
             <a:off x="572414" y="411480"/>
-            <a:ext cx="6720840" cy="685800"/>
+            <a:ext cx="10972800" cy="685800"/>
           </a:xfrm>
           <a:prstGeom prst="rect">
             <a:avLst/>
@@ -13847,7 +14605,7 @@
           <a:lstStyle/>
           <a:p>
             <a:r>
-              <a:rPr sz="2800" b="1">
+              <a:rPr sz="2800" b="1" u="none">
                 <a:solidFill>
                   <a:srgbClr val="FF0000"/>
                 </a:solidFill>
@@ -13867,7 +14625,7 @@
         <p:spPr>
           <a:xfrm>
             <a:off x="572414" y="1208836"/>
-            <a:ext cx="6720840" cy="1302105"/>
+            <a:ext cx="11193170" cy="1302105"/>
           </a:xfrm>
           <a:prstGeom prst="rect">
             <a:avLst/>
@@ -13886,9 +14644,9 @@
               </a:spcAft>
             </a:pPr>
             <a:r>
-              <a:rPr sz="2000">
+              <a:rPr sz="2800" b="0" u="none">
                 <a:solidFill>
-                  <a:srgbClr val="FF0000"/>
+                  <a:srgbClr val="000000"/>
                 </a:solidFill>
                 <a:latin typeface="맑은 고딕"/>
               </a:rPr>
@@ -13902,9 +14660,9 @@
               </a:spcAft>
             </a:pPr>
             <a:r>
-              <a:rPr sz="2000">
+              <a:rPr sz="2800" b="0" u="none">
                 <a:solidFill>
-                  <a:srgbClr val="FF0000"/>
+                  <a:srgbClr val="000000"/>
                 </a:solidFill>
                 <a:latin typeface="맑은 고딕"/>
               </a:rPr>
@@ -13918,9 +14676,9 @@
               </a:spcAft>
             </a:pPr>
             <a:r>
-              <a:rPr sz="2000">
+              <a:rPr sz="2800" b="0" u="none">
                 <a:solidFill>
-                  <a:srgbClr val="FF0000"/>
+                  <a:srgbClr val="000000"/>
                 </a:solidFill>
                 <a:latin typeface="맑은 고딕"/>
               </a:rPr>
@@ -13931,61 +14689,7 @@
       </p:sp>
       <p:sp>
         <p:nvSpPr>
-          <p:cNvPr id="4" name="Rectangle 3"/>
-          <p:cNvSpPr/>
-          <p:nvPr/>
-        </p:nvSpPr>
-        <p:spPr>
-          <a:xfrm>
-            <a:off x="8001000" y="1572768"/>
-            <a:ext cx="3337560" cy="3611880"/>
-          </a:xfrm>
-          <a:prstGeom prst="rect">
-            <a:avLst/>
-          </a:prstGeom>
-          <a:solidFill>
-            <a:srgbClr val="F5F5F5"/>
-          </a:solidFill>
-          <a:ln w="12700">
-            <a:solidFill>
-              <a:srgbClr val="BEBEBE"/>
-            </a:solidFill>
-          </a:ln>
-        </p:spPr>
-        <p:style>
-          <a:lnRef idx="1">
-            <a:schemeClr val="accent1"/>
-          </a:lnRef>
-          <a:fillRef idx="3">
-            <a:schemeClr val="accent1"/>
-          </a:fillRef>
-          <a:effectRef idx="2">
-            <a:schemeClr val="accent1"/>
-          </a:effectRef>
-          <a:fontRef idx="minor">
-            <a:schemeClr val="lt1"/>
-          </a:fontRef>
-        </p:style>
-        <p:txBody>
-          <a:bodyPr rtlCol="0" anchor="ctr" wrap="square"/>
-          <a:lstStyle/>
-          <a:p>
-            <a:pPr algn="ctr"/>
-            <a:r>
-              <a:rPr sz="1300">
-                <a:solidFill>
-                  <a:srgbClr val="566070"/>
-                </a:solidFill>
-                <a:latin typeface="맑은 고딕"/>
-              </a:rPr>
-              <a:t>[수동 삽입]</a:t>
-            </a:r>
-          </a:p>
-        </p:txBody>
-      </p:sp>
-      <p:sp>
-        <p:nvSpPr>
-          <p:cNvPr id="5" name="TextBox 4"/>
+          <p:cNvPr id="4" name="TextBox 3"/>
           <p:cNvSpPr txBox="1"/>
           <p:nvPr/>
         </p:nvSpPr>
@@ -14006,7 +14710,7 @@
           <a:lstStyle/>
           <a:p>
             <a:r>
-              <a:rPr sz="800" b="0">
+              <a:rPr sz="800" b="0" u="none">
                 <a:solidFill>
                   <a:srgbClr val="566070"/>
                 </a:solidFill>
@@ -14019,7 +14723,7 @@
       </p:sp>
       <p:sp>
         <p:nvSpPr>
-          <p:cNvPr id="6" name="TextBox 5"/>
+          <p:cNvPr id="5" name="TextBox 4"/>
           <p:cNvSpPr txBox="1"/>
           <p:nvPr/>
         </p:nvSpPr>
@@ -14041,7 +14745,7 @@
           <a:p>
             <a:pPr algn="r"/>
             <a:r>
-              <a:rPr sz="800" b="0">
+              <a:rPr sz="800" b="0" u="none">
                 <a:solidFill>
                   <a:srgbClr val="566070"/>
                 </a:solidFill>
@@ -14086,8 +14790,8 @@
         </p:nvSpPr>
         <p:spPr>
           <a:xfrm>
-            <a:off x="572414" y="411480"/>
-            <a:ext cx="10972800" cy="777240"/>
+            <a:off x="868680" y="502920"/>
+            <a:ext cx="10698480" cy="594360"/>
           </a:xfrm>
           <a:prstGeom prst="rect">
             <a:avLst/>
@@ -14100,10 +14804,11 @@
           </a:bodyPr>
           <a:lstStyle/>
           <a:p>
-            <a:r>
-              <a:rPr sz="2800" b="1">
+            <a:pPr algn="ctr"/>
+            <a:r>
+              <a:rPr sz="2800" b="1" u="sng">
                 <a:solidFill>
-                  <a:srgbClr val="FF0000"/>
+                  <a:srgbClr val="000000"/>
                 </a:solidFill>
                 <a:latin typeface="맑은 고딕"/>
               </a:rPr>
@@ -14120,18 +14825,18 @@
         </p:nvSpPr>
         <p:spPr>
           <a:xfrm>
-            <a:off x="572414" y="1162202"/>
-            <a:ext cx="11193170" cy="1645920"/>
+            <a:off x="914400" y="1234440"/>
+            <a:ext cx="10378440" cy="4434840"/>
           </a:xfrm>
           <a:prstGeom prst="rect">
             <a:avLst/>
           </a:prstGeom>
           <a:solidFill>
-            <a:srgbClr val="F5F5F5"/>
+            <a:srgbClr val="FFFFFF"/>
           </a:solidFill>
-          <a:ln w="12700">
+          <a:ln w="15240">
             <a:solidFill>
-              <a:srgbClr val="BEBEBE"/>
+              <a:srgbClr val="D2D8E0"/>
             </a:solidFill>
           </a:ln>
         </p:spPr>
@@ -14150,19 +14855,10 @@
           </a:fontRef>
         </p:style>
         <p:txBody>
-          <a:bodyPr rtlCol="0" anchor="ctr" wrap="square"/>
+          <a:bodyPr rtlCol="0" anchor="ctr"/>
           <a:lstStyle/>
           <a:p>
             <a:pPr algn="ctr"/>
-            <a:r>
-              <a:rPr sz="1300">
-                <a:solidFill>
-                  <a:srgbClr val="566070"/>
-                </a:solidFill>
-                <a:latin typeface="맑은 고딕"/>
-              </a:rPr>
-              <a:t>[차트 후보]</a:t>
-            </a:r>
           </a:p>
         </p:txBody>
       </p:sp>
@@ -14174,8 +14870,8 @@
         </p:nvSpPr>
         <p:spPr>
           <a:xfrm>
-            <a:off x="572414" y="3311042"/>
-            <a:ext cx="10058400" cy="1234440"/>
+            <a:off x="1234440" y="1828800"/>
+            <a:ext cx="9692640" cy="2880360"/>
           </a:xfrm>
           <a:prstGeom prst="rect">
             <a:avLst/>
@@ -14194,9 +14890,9 @@
               </a:spcAft>
             </a:pPr>
             <a:r>
-              <a:rPr sz="2000">
+              <a:rPr sz="1800" b="1" u="none">
                 <a:solidFill>
-                  <a:srgbClr val="FF0000"/>
+                  <a:srgbClr val="373737"/>
                 </a:solidFill>
                 <a:latin typeface="맑은 고딕"/>
               </a:rPr>
@@ -14210,9 +14906,9 @@
               </a:spcAft>
             </a:pPr>
             <a:r>
-              <a:rPr sz="2000">
+              <a:rPr sz="1800" b="1" u="none">
                 <a:solidFill>
-                  <a:srgbClr val="FF0000"/>
+                  <a:srgbClr val="373737"/>
                 </a:solidFill>
                 <a:latin typeface="맑은 고딕"/>
               </a:rPr>
@@ -14226,9 +14922,9 @@
               </a:spcAft>
             </a:pPr>
             <a:r>
-              <a:rPr sz="2000">
+              <a:rPr sz="1800" b="1" u="none">
                 <a:solidFill>
-                  <a:srgbClr val="FF0000"/>
+                  <a:srgbClr val="373737"/>
                 </a:solidFill>
                 <a:latin typeface="맑은 고딕"/>
               </a:rPr>
@@ -14240,6 +14936,41 @@
       <p:sp>
         <p:nvSpPr>
           <p:cNvPr id="5" name="TextBox 4"/>
+          <p:cNvSpPr txBox="1"/>
+          <p:nvPr/>
+        </p:nvSpPr>
+        <p:spPr>
+          <a:xfrm>
+            <a:off x="6126480" y="5806440"/>
+            <a:ext cx="5257800" cy="347472"/>
+          </a:xfrm>
+          <a:prstGeom prst="rect">
+            <a:avLst/>
+          </a:prstGeom>
+          <a:noFill/>
+        </p:spPr>
+        <p:txBody>
+          <a:bodyPr wrap="square">
+            <a:spAutoFit/>
+          </a:bodyPr>
+          <a:lstStyle/>
+          <a:p>
+            <a:pPr algn="r"/>
+            <a:r>
+              <a:rPr sz="2000" b="0" u="sng">
+                <a:solidFill>
+                  <a:srgbClr val="000000"/>
+                </a:solidFill>
+                <a:latin typeface="맑은 고딕"/>
+              </a:rPr>
+              <a:t>(출처: www.korea.kr; speaker notes 참조)</a:t>
+            </a:r>
+          </a:p>
+        </p:txBody>
+      </p:sp>
+      <p:sp>
+        <p:nvSpPr>
+          <p:cNvPr id="6" name="TextBox 5"/>
           <p:cNvSpPr txBox="1"/>
           <p:nvPr/>
         </p:nvSpPr>
@@ -14260,7 +14991,7 @@
           <a:lstStyle/>
           <a:p>
             <a:r>
-              <a:rPr sz="800" b="0">
+              <a:rPr sz="800" b="0" u="none">
                 <a:solidFill>
                   <a:srgbClr val="566070"/>
                 </a:solidFill>
@@ -14273,7 +15004,7 @@
       </p:sp>
       <p:sp>
         <p:nvSpPr>
-          <p:cNvPr id="6" name="TextBox 5"/>
+          <p:cNvPr id="7" name="TextBox 6"/>
           <p:cNvSpPr txBox="1"/>
           <p:nvPr/>
         </p:nvSpPr>
@@ -14295,7 +15026,7 @@
           <a:p>
             <a:pPr algn="r"/>
             <a:r>
-              <a:rPr sz="800" b="0">
+              <a:rPr sz="800" b="0" u="none">
                 <a:solidFill>
                   <a:srgbClr val="566070"/>
                 </a:solidFill>
@@ -14355,7 +15086,7 @@
           <a:lstStyle/>
           <a:p>
             <a:r>
-              <a:rPr sz="2700" b="1">
+              <a:rPr sz="2800" b="1" u="none">
                 <a:solidFill>
                   <a:srgbClr val="FF0000"/>
                 </a:solidFill>
@@ -14484,9 +15215,9 @@
               </a:spcAft>
             </a:pPr>
             <a:r>
-              <a:rPr sz="2800">
+              <a:rPr sz="2800" b="0" u="none">
                 <a:solidFill>
-                  <a:srgbClr val="FF0000"/>
+                  <a:srgbClr val="000000"/>
                 </a:solidFill>
                 <a:latin typeface="맑은 고딕"/>
               </a:rPr>
@@ -14500,9 +15231,9 @@
               </a:spcAft>
             </a:pPr>
             <a:r>
-              <a:rPr sz="2800">
+              <a:rPr sz="2800" b="0" u="none">
                 <a:solidFill>
-                  <a:srgbClr val="FF0000"/>
+                  <a:srgbClr val="000000"/>
                 </a:solidFill>
                 <a:latin typeface="맑은 고딕"/>
               </a:rPr>
@@ -14539,9 +15270,9 @@
               </a:spcAft>
             </a:pPr>
             <a:r>
-              <a:rPr sz="2800">
+              <a:rPr sz="2800" b="0" u="none">
                 <a:solidFill>
-                  <a:srgbClr val="FF0000"/>
+                  <a:srgbClr val="000000"/>
                 </a:solidFill>
                 <a:latin typeface="맑은 고딕"/>
               </a:rPr>
@@ -14573,7 +15304,7 @@
           <a:lstStyle/>
           <a:p>
             <a:r>
-              <a:rPr sz="800" b="0">
+              <a:rPr sz="800" b="0" u="none">
                 <a:solidFill>
                   <a:srgbClr val="566070"/>
                 </a:solidFill>
@@ -14608,7 +15339,7 @@
           <a:p>
             <a:pPr algn="r"/>
             <a:r>
-              <a:rPr sz="800" b="0">
+              <a:rPr sz="800" b="0" u="none">
                 <a:solidFill>
                   <a:srgbClr val="566070"/>
                 </a:solidFill>

--- a/outputs/pptx/productive_finance_policy_styled_draft.pptx
+++ b/outputs/pptx/productive_finance_policy_styled_draft.pptx
@@ -10173,8 +10173,8 @@
         </p:nvSpPr>
         <p:spPr>
           <a:xfrm>
-            <a:off x="685800" y="438912"/>
-            <a:ext cx="10789920" cy="685800"/>
+            <a:off x="856792" y="1122883"/>
+            <a:ext cx="10478109" cy="2387498"/>
           </a:xfrm>
           <a:prstGeom prst="rect">
             <a:avLst/>
@@ -10188,137 +10188,13 @@
           <a:lstStyle/>
           <a:p>
             <a:r>
-              <a:rPr sz="2800" b="1" u="none">
-                <a:solidFill>
-                  <a:srgbClr val="FF0000"/>
-                </a:solidFill>
-                <a:latin typeface="맑은 고딕"/>
-              </a:rPr>
-              <a:t>생산적 금융과 정책자금 전환</a:t>
-            </a:r>
-          </a:p>
-        </p:txBody>
-      </p:sp>
-      <p:sp>
-        <p:nvSpPr>
-          <p:cNvPr id="3" name="TextBox 2"/>
-          <p:cNvSpPr txBox="1"/>
-          <p:nvPr/>
-        </p:nvSpPr>
-        <p:spPr>
-          <a:xfrm>
-            <a:off x="685800" y="1444752"/>
-            <a:ext cx="9875520" cy="1280160"/>
-          </a:xfrm>
-          <a:prstGeom prst="rect">
-            <a:avLst/>
-          </a:prstGeom>
-          <a:noFill/>
-        </p:spPr>
-        <p:txBody>
-          <a:bodyPr wrap="square">
-            <a:spAutoFit/>
-          </a:bodyPr>
-          <a:lstStyle/>
-          <a:p>
-            <a:pPr>
-              <a:spcAft>
-                <a:spcPts val="800"/>
-              </a:spcAft>
-            </a:pPr>
-            <a:r>
-              <a:rPr sz="2800" b="0" u="none">
+              <a:rPr sz="5400" b="1" u="none">
                 <a:solidFill>
                   <a:srgbClr val="000000"/>
                 </a:solidFill>
                 <a:latin typeface="맑은 고딕"/>
               </a:rPr>
-              <a:t>금융은 안전하게 돈을 빌려주는 산업인가</a:t>
-            </a:r>
-          </a:p>
-          <a:p>
-            <a:pPr>
-              <a:spcAft>
-                <a:spcPts val="800"/>
-              </a:spcAft>
-            </a:pPr>
-            <a:r>
-              <a:rPr sz="2800" b="0" u="none">
-                <a:solidFill>
-                  <a:srgbClr val="000000"/>
-                </a:solidFill>
-                <a:latin typeface="맑은 고딕"/>
-              </a:rPr>
-              <a:t>아니면 성장 위험을 나눠지는 산업인가</a:t>
-            </a:r>
-          </a:p>
-        </p:txBody>
-      </p:sp>
-      <p:sp>
-        <p:nvSpPr>
-          <p:cNvPr id="4" name="TextBox 3"/>
-          <p:cNvSpPr txBox="1"/>
-          <p:nvPr/>
-        </p:nvSpPr>
-        <p:spPr>
-          <a:xfrm>
-            <a:off x="411480" y="6510528"/>
-            <a:ext cx="9875520" cy="201168"/>
-          </a:xfrm>
-          <a:prstGeom prst="rect">
-            <a:avLst/>
-          </a:prstGeom>
-          <a:noFill/>
-        </p:spPr>
-        <p:txBody>
-          <a:bodyPr wrap="square">
-            <a:spAutoFit/>
-          </a:bodyPr>
-          <a:lstStyle/>
-          <a:p>
-            <a:r>
-              <a:rPr sz="800" b="0" u="none">
-                <a:solidFill>
-                  <a:srgbClr val="566070"/>
-                </a:solidFill>
-                <a:latin typeface="맑은 고딕"/>
-              </a:rPr>
-              <a:t>draft skeleton</a:t>
-            </a:r>
-          </a:p>
-        </p:txBody>
-      </p:sp>
-      <p:sp>
-        <p:nvSpPr>
-          <p:cNvPr id="5" name="TextBox 4"/>
-          <p:cNvSpPr txBox="1"/>
-          <p:nvPr/>
-        </p:nvSpPr>
-        <p:spPr>
-          <a:xfrm>
-            <a:off x="10607040" y="6510528"/>
-            <a:ext cx="1143000" cy="201168"/>
-          </a:xfrm>
-          <a:prstGeom prst="rect">
-            <a:avLst/>
-          </a:prstGeom>
-          <a:noFill/>
-        </p:spPr>
-        <p:txBody>
-          <a:bodyPr wrap="square">
-            <a:spAutoFit/>
-          </a:bodyPr>
-          <a:lstStyle/>
-          <a:p>
-            <a:pPr algn="r"/>
-            <a:r>
-              <a:rPr sz="800" b="0" u="none">
-                <a:solidFill>
-                  <a:srgbClr val="566070"/>
-                </a:solidFill>
-                <a:latin typeface="맑은 고딕"/>
-              </a:rPr>
-              <a:t>01</a:t>
+              <a:t>생산적 금융과 정책자금 전환</a:t>
             </a:r>
           </a:p>
         </p:txBody>
@@ -10357,8 +10233,8 @@
         </p:nvSpPr>
         <p:spPr>
           <a:xfrm>
-            <a:off x="914400" y="1234440"/>
-            <a:ext cx="10332720" cy="1280160"/>
+            <a:off x="572414" y="356616"/>
+            <a:ext cx="11192256" cy="521207"/>
           </a:xfrm>
           <a:prstGeom prst="rect">
             <a:avLst/>
@@ -10371,7 +10247,6 @@
           </a:bodyPr>
           <a:lstStyle/>
           <a:p>
-            <a:pPr algn="ctr"/>
             <a:r>
               <a:rPr sz="2800" b="1" u="none">
                 <a:solidFill>
@@ -10392,8 +10267,8 @@
         </p:nvSpPr>
         <p:spPr>
           <a:xfrm>
-            <a:off x="1417320" y="2926080"/>
-            <a:ext cx="9326880" cy="2011680"/>
+            <a:off x="713232" y="2103120"/>
+            <a:ext cx="10652760" cy="2926080"/>
           </a:xfrm>
           <a:prstGeom prst="rect">
             <a:avLst/>
@@ -10451,75 +10326,6 @@
                 <a:latin typeface="맑은 고딕"/>
               </a:rPr>
               <a:t>정책금융은 성장의 마중물일 수도, 손실의 통로일 수도 있다.</a:t>
-            </a:r>
-          </a:p>
-        </p:txBody>
-      </p:sp>
-      <p:sp>
-        <p:nvSpPr>
-          <p:cNvPr id="4" name="TextBox 3"/>
-          <p:cNvSpPr txBox="1"/>
-          <p:nvPr/>
-        </p:nvSpPr>
-        <p:spPr>
-          <a:xfrm>
-            <a:off x="411480" y="6510528"/>
-            <a:ext cx="9875520" cy="201168"/>
-          </a:xfrm>
-          <a:prstGeom prst="rect">
-            <a:avLst/>
-          </a:prstGeom>
-          <a:noFill/>
-        </p:spPr>
-        <p:txBody>
-          <a:bodyPr wrap="square">
-            <a:spAutoFit/>
-          </a:bodyPr>
-          <a:lstStyle/>
-          <a:p>
-            <a:r>
-              <a:rPr sz="800" b="0" u="none">
-                <a:solidFill>
-                  <a:srgbClr val="566070"/>
-                </a:solidFill>
-                <a:latin typeface="맑은 고딕"/>
-              </a:rPr>
-              <a:t>needs_fact_check | before_broadcast</a:t>
-            </a:r>
-          </a:p>
-        </p:txBody>
-      </p:sp>
-      <p:sp>
-        <p:nvSpPr>
-          <p:cNvPr id="5" name="TextBox 4"/>
-          <p:cNvSpPr txBox="1"/>
-          <p:nvPr/>
-        </p:nvSpPr>
-        <p:spPr>
-          <a:xfrm>
-            <a:off x="10607040" y="6510528"/>
-            <a:ext cx="1143000" cy="201168"/>
-          </a:xfrm>
-          <a:prstGeom prst="rect">
-            <a:avLst/>
-          </a:prstGeom>
-          <a:noFill/>
-        </p:spPr>
-        <p:txBody>
-          <a:bodyPr wrap="square">
-            <a:spAutoFit/>
-          </a:bodyPr>
-          <a:lstStyle/>
-          <a:p>
-            <a:pPr algn="r"/>
-            <a:r>
-              <a:rPr sz="800" b="0" u="none">
-                <a:solidFill>
-                  <a:srgbClr val="566070"/>
-                </a:solidFill>
-                <a:latin typeface="맑은 고딕"/>
-              </a:rPr>
-              <a:t>10</a:t>
             </a:r>
           </a:p>
         </p:txBody>
@@ -10558,8 +10364,8 @@
         </p:nvSpPr>
         <p:spPr>
           <a:xfrm>
-            <a:off x="914400" y="1234440"/>
-            <a:ext cx="10332720" cy="1280160"/>
+            <a:off x="572414" y="356616"/>
+            <a:ext cx="11192256" cy="521207"/>
           </a:xfrm>
           <a:prstGeom prst="rect">
             <a:avLst/>
@@ -10572,7 +10378,6 @@
           </a:bodyPr>
           <a:lstStyle/>
           <a:p>
-            <a:pPr algn="ctr"/>
             <a:r>
               <a:rPr sz="2800" b="1" u="none">
                 <a:solidFill>
@@ -10593,8 +10398,8 @@
         </p:nvSpPr>
         <p:spPr>
           <a:xfrm>
-            <a:off x="1417320" y="2926080"/>
-            <a:ext cx="9326880" cy="2011680"/>
+            <a:off x="713232" y="2103120"/>
+            <a:ext cx="10652760" cy="2926080"/>
           </a:xfrm>
           <a:prstGeom prst="rect">
             <a:avLst/>
@@ -10652,75 +10457,6 @@
                 <a:latin typeface="맑은 고딕"/>
               </a:rPr>
               <a:t>국가는 전략산업을 키우고 싶다.</a:t>
-            </a:r>
-          </a:p>
-        </p:txBody>
-      </p:sp>
-      <p:sp>
-        <p:nvSpPr>
-          <p:cNvPr id="4" name="TextBox 3"/>
-          <p:cNvSpPr txBox="1"/>
-          <p:nvPr/>
-        </p:nvSpPr>
-        <p:spPr>
-          <a:xfrm>
-            <a:off x="411480" y="6510528"/>
-            <a:ext cx="9875520" cy="201168"/>
-          </a:xfrm>
-          <a:prstGeom prst="rect">
-            <a:avLst/>
-          </a:prstGeom>
-          <a:noFill/>
-        </p:spPr>
-        <p:txBody>
-          <a:bodyPr wrap="square">
-            <a:spAutoFit/>
-          </a:bodyPr>
-          <a:lstStyle/>
-          <a:p>
-            <a:r>
-              <a:rPr sz="800" b="0" u="none">
-                <a:solidFill>
-                  <a:srgbClr val="566070"/>
-                </a:solidFill>
-                <a:latin typeface="맑은 고딕"/>
-              </a:rPr>
-              <a:t>draft skeleton</a:t>
-            </a:r>
-          </a:p>
-        </p:txBody>
-      </p:sp>
-      <p:sp>
-        <p:nvSpPr>
-          <p:cNvPr id="5" name="TextBox 4"/>
-          <p:cNvSpPr txBox="1"/>
-          <p:nvPr/>
-        </p:nvSpPr>
-        <p:spPr>
-          <a:xfrm>
-            <a:off x="10607040" y="6510528"/>
-            <a:ext cx="1143000" cy="201168"/>
-          </a:xfrm>
-          <a:prstGeom prst="rect">
-            <a:avLst/>
-          </a:prstGeom>
-          <a:noFill/>
-        </p:spPr>
-        <p:txBody>
-          <a:bodyPr wrap="square">
-            <a:spAutoFit/>
-          </a:bodyPr>
-          <a:lstStyle/>
-          <a:p>
-            <a:pPr algn="r"/>
-            <a:r>
-              <a:rPr sz="800" b="0" u="none">
-                <a:solidFill>
-                  <a:srgbClr val="566070"/>
-                </a:solidFill>
-                <a:latin typeface="맑은 고딕"/>
-              </a:rPr>
-              <a:t>11</a:t>
             </a:r>
           </a:p>
         </p:txBody>
@@ -10785,99 +10521,6 @@
           </a:p>
         </p:txBody>
       </p:sp>
-      <p:sp>
-        <p:nvSpPr>
-          <p:cNvPr id="3" name="TextBox 2"/>
-          <p:cNvSpPr txBox="1"/>
-          <p:nvPr/>
-        </p:nvSpPr>
-        <p:spPr>
-          <a:xfrm>
-            <a:off x="843991" y="2508199"/>
-            <a:ext cx="9875520" cy="914400"/>
-          </a:xfrm>
-          <a:prstGeom prst="rect">
-            <a:avLst/>
-          </a:prstGeom>
-          <a:noFill/>
-        </p:spPr>
-        <p:txBody>
-          <a:bodyPr wrap="square">
-            <a:spAutoFit/>
-          </a:bodyPr>
-          <a:lstStyle/>
-          <a:p/>
-        </p:txBody>
-      </p:sp>
-      <p:sp>
-        <p:nvSpPr>
-          <p:cNvPr id="4" name="TextBox 3"/>
-          <p:cNvSpPr txBox="1"/>
-          <p:nvPr/>
-        </p:nvSpPr>
-        <p:spPr>
-          <a:xfrm>
-            <a:off x="411480" y="6510528"/>
-            <a:ext cx="9875520" cy="201168"/>
-          </a:xfrm>
-          <a:prstGeom prst="rect">
-            <a:avLst/>
-          </a:prstGeom>
-          <a:noFill/>
-        </p:spPr>
-        <p:txBody>
-          <a:bodyPr wrap="square">
-            <a:spAutoFit/>
-          </a:bodyPr>
-          <a:lstStyle/>
-          <a:p>
-            <a:r>
-              <a:rPr sz="800" b="0" u="none">
-                <a:solidFill>
-                  <a:srgbClr val="566070"/>
-                </a:solidFill>
-                <a:latin typeface="맑은 고딕"/>
-              </a:rPr>
-              <a:t>draft skeleton</a:t>
-            </a:r>
-          </a:p>
-        </p:txBody>
-      </p:sp>
-      <p:sp>
-        <p:nvSpPr>
-          <p:cNvPr id="5" name="TextBox 4"/>
-          <p:cNvSpPr txBox="1"/>
-          <p:nvPr/>
-        </p:nvSpPr>
-        <p:spPr>
-          <a:xfrm>
-            <a:off x="10607040" y="6510528"/>
-            <a:ext cx="1143000" cy="201168"/>
-          </a:xfrm>
-          <a:prstGeom prst="rect">
-            <a:avLst/>
-          </a:prstGeom>
-          <a:noFill/>
-        </p:spPr>
-        <p:txBody>
-          <a:bodyPr wrap="square">
-            <a:spAutoFit/>
-          </a:bodyPr>
-          <a:lstStyle/>
-          <a:p>
-            <a:pPr algn="r"/>
-            <a:r>
-              <a:rPr sz="800" b="0" u="none">
-                <a:solidFill>
-                  <a:srgbClr val="566070"/>
-                </a:solidFill>
-                <a:latin typeface="맑은 고딕"/>
-              </a:rPr>
-              <a:t>12</a:t>
-            </a:r>
-          </a:p>
-        </p:txBody>
-      </p:sp>
     </p:spTree>
   </p:cSld>
   <p:clrMapOvr>
@@ -10912,8 +10555,8 @@
         </p:nvSpPr>
         <p:spPr>
           <a:xfrm>
-            <a:off x="6372453" y="1952243"/>
-            <a:ext cx="3709720" cy="523036"/>
+            <a:off x="572414" y="356616"/>
+            <a:ext cx="11192256" cy="521207"/>
           </a:xfrm>
           <a:prstGeom prst="rect">
             <a:avLst/>
@@ -10946,7 +10589,7 @@
         </p:nvSpPr>
         <p:spPr>
           <a:xfrm>
-            <a:off x="713232" y="2795320"/>
+            <a:off x="713232" y="1874519"/>
             <a:ext cx="9875520" cy="2651760"/>
           </a:xfrm>
           <a:prstGeom prst="rect">
@@ -11005,75 +10648,6 @@
                 <a:latin typeface="맑은 고딕"/>
               </a:rPr>
               <a:t>그래서 이름은 성장 이야기지만, 실제 방송에서는 투자자 리스크와 정책 책임을 함께 봐야 한다.</a:t>
-            </a:r>
-          </a:p>
-        </p:txBody>
-      </p:sp>
-      <p:sp>
-        <p:nvSpPr>
-          <p:cNvPr id="4" name="TextBox 3"/>
-          <p:cNvSpPr txBox="1"/>
-          <p:nvPr/>
-        </p:nvSpPr>
-        <p:spPr>
-          <a:xfrm>
-            <a:off x="411480" y="6510528"/>
-            <a:ext cx="9875520" cy="201168"/>
-          </a:xfrm>
-          <a:prstGeom prst="rect">
-            <a:avLst/>
-          </a:prstGeom>
-          <a:noFill/>
-        </p:spPr>
-        <p:txBody>
-          <a:bodyPr wrap="square">
-            <a:spAutoFit/>
-          </a:bodyPr>
-          <a:lstStyle/>
-          <a:p>
-            <a:r>
-              <a:rPr sz="800" b="0" u="none">
-                <a:solidFill>
-                  <a:srgbClr val="566070"/>
-                </a:solidFill>
-                <a:latin typeface="맑은 고딕"/>
-              </a:rPr>
-              <a:t>needs_fact_check | before_broadcast</a:t>
-            </a:r>
-          </a:p>
-        </p:txBody>
-      </p:sp>
-      <p:sp>
-        <p:nvSpPr>
-          <p:cNvPr id="5" name="TextBox 4"/>
-          <p:cNvSpPr txBox="1"/>
-          <p:nvPr/>
-        </p:nvSpPr>
-        <p:spPr>
-          <a:xfrm>
-            <a:off x="10607040" y="6510528"/>
-            <a:ext cx="1143000" cy="201168"/>
-          </a:xfrm>
-          <a:prstGeom prst="rect">
-            <a:avLst/>
-          </a:prstGeom>
-          <a:noFill/>
-        </p:spPr>
-        <p:txBody>
-          <a:bodyPr wrap="square">
-            <a:spAutoFit/>
-          </a:bodyPr>
-          <a:lstStyle/>
-          <a:p>
-            <a:pPr algn="r"/>
-            <a:r>
-              <a:rPr sz="800" b="0" u="none">
-                <a:solidFill>
-                  <a:srgbClr val="566070"/>
-                </a:solidFill>
-                <a:latin typeface="맑은 고딕"/>
-              </a:rPr>
-              <a:t>13</a:t>
             </a:r>
           </a:p>
         </p:txBody>
@@ -11112,8 +10686,8 @@
         </p:nvSpPr>
         <p:spPr>
           <a:xfrm>
-            <a:off x="572414" y="411480"/>
-            <a:ext cx="10972800" cy="685800"/>
+            <a:off x="572414" y="356616"/>
+            <a:ext cx="11192256" cy="521207"/>
           </a:xfrm>
           <a:prstGeom prst="rect">
             <a:avLst/>
@@ -11146,7 +10720,7 @@
         </p:nvSpPr>
         <p:spPr>
           <a:xfrm>
-            <a:off x="572414" y="1208836"/>
+            <a:off x="572414" y="1874519"/>
             <a:ext cx="11193170" cy="1302105"/>
           </a:xfrm>
           <a:prstGeom prst="rect">
@@ -11205,75 +10779,6 @@
                 <a:latin typeface="맑은 고딕"/>
               </a:rPr>
               <a:t>손실을 누가, 어떤 순서로, 어디까지 부담하는지가 핵심 질문이다.</a:t>
-            </a:r>
-          </a:p>
-        </p:txBody>
-      </p:sp>
-      <p:sp>
-        <p:nvSpPr>
-          <p:cNvPr id="4" name="TextBox 3"/>
-          <p:cNvSpPr txBox="1"/>
-          <p:nvPr/>
-        </p:nvSpPr>
-        <p:spPr>
-          <a:xfrm>
-            <a:off x="411480" y="6510528"/>
-            <a:ext cx="9875520" cy="201168"/>
-          </a:xfrm>
-          <a:prstGeom prst="rect">
-            <a:avLst/>
-          </a:prstGeom>
-          <a:noFill/>
-        </p:spPr>
-        <p:txBody>
-          <a:bodyPr wrap="square">
-            <a:spAutoFit/>
-          </a:bodyPr>
-          <a:lstStyle/>
-          <a:p>
-            <a:r>
-              <a:rPr sz="800" b="0" u="none">
-                <a:solidFill>
-                  <a:srgbClr val="566070"/>
-                </a:solidFill>
-                <a:latin typeface="맑은 고딕"/>
-              </a:rPr>
-              <a:t>needs_fact_check | before_broadcast</a:t>
-            </a:r>
-          </a:p>
-        </p:txBody>
-      </p:sp>
-      <p:sp>
-        <p:nvSpPr>
-          <p:cNvPr id="5" name="TextBox 4"/>
-          <p:cNvSpPr txBox="1"/>
-          <p:nvPr/>
-        </p:nvSpPr>
-        <p:spPr>
-          <a:xfrm>
-            <a:off x="10607040" y="6510528"/>
-            <a:ext cx="1143000" cy="201168"/>
-          </a:xfrm>
-          <a:prstGeom prst="rect">
-            <a:avLst/>
-          </a:prstGeom>
-          <a:noFill/>
-        </p:spPr>
-        <p:txBody>
-          <a:bodyPr wrap="square">
-            <a:spAutoFit/>
-          </a:bodyPr>
-          <a:lstStyle/>
-          <a:p>
-            <a:pPr algn="r"/>
-            <a:r>
-              <a:rPr sz="800" b="0" u="none">
-                <a:solidFill>
-                  <a:srgbClr val="566070"/>
-                </a:solidFill>
-                <a:latin typeface="맑은 고딕"/>
-              </a:rPr>
-              <a:t>14</a:t>
             </a:r>
           </a:p>
         </p:txBody>
@@ -11357,8 +10862,8 @@
         </p:nvSpPr>
         <p:spPr>
           <a:xfrm>
-            <a:off x="572414" y="940003"/>
-            <a:ext cx="7295083" cy="868680"/>
+            <a:off x="572414" y="356616"/>
+            <a:ext cx="11192256" cy="521207"/>
           </a:xfrm>
           <a:prstGeom prst="rect">
             <a:avLst/>
@@ -11391,7 +10896,7 @@
         </p:nvSpPr>
         <p:spPr>
           <a:xfrm>
-            <a:off x="572414" y="2174443"/>
+            <a:off x="572414" y="1874519"/>
             <a:ext cx="7295083" cy="2468880"/>
           </a:xfrm>
           <a:prstGeom prst="rect">
@@ -11450,75 +10955,6 @@
                 <a:latin typeface="맑은 고딕"/>
               </a:rPr>
               <a:t>이 둘을 같이 봐야 정책금융 논쟁이 단순 찬반으로 흐르지 않는다.</a:t>
-            </a:r>
-          </a:p>
-        </p:txBody>
-      </p:sp>
-      <p:sp>
-        <p:nvSpPr>
-          <p:cNvPr id="5" name="TextBox 4"/>
-          <p:cNvSpPr txBox="1"/>
-          <p:nvPr/>
-        </p:nvSpPr>
-        <p:spPr>
-          <a:xfrm>
-            <a:off x="411480" y="6510528"/>
-            <a:ext cx="9875520" cy="201168"/>
-          </a:xfrm>
-          <a:prstGeom prst="rect">
-            <a:avLst/>
-          </a:prstGeom>
-          <a:noFill/>
-        </p:spPr>
-        <p:txBody>
-          <a:bodyPr wrap="square">
-            <a:spAutoFit/>
-          </a:bodyPr>
-          <a:lstStyle/>
-          <a:p>
-            <a:r>
-              <a:rPr sz="800" b="0" u="none">
-                <a:solidFill>
-                  <a:srgbClr val="566070"/>
-                </a:solidFill>
-                <a:latin typeface="맑은 고딕"/>
-              </a:rPr>
-              <a:t>needs_fact_check | before_broadcast</a:t>
-            </a:r>
-          </a:p>
-        </p:txBody>
-      </p:sp>
-      <p:sp>
-        <p:nvSpPr>
-          <p:cNvPr id="6" name="TextBox 5"/>
-          <p:cNvSpPr txBox="1"/>
-          <p:nvPr/>
-        </p:nvSpPr>
-        <p:spPr>
-          <a:xfrm>
-            <a:off x="10607040" y="6510528"/>
-            <a:ext cx="1143000" cy="201168"/>
-          </a:xfrm>
-          <a:prstGeom prst="rect">
-            <a:avLst/>
-          </a:prstGeom>
-          <a:noFill/>
-        </p:spPr>
-        <p:txBody>
-          <a:bodyPr wrap="square">
-            <a:spAutoFit/>
-          </a:bodyPr>
-          <a:lstStyle/>
-          <a:p>
-            <a:pPr algn="r"/>
-            <a:r>
-              <a:rPr sz="800" b="0" u="none">
-                <a:solidFill>
-                  <a:srgbClr val="566070"/>
-                </a:solidFill>
-                <a:latin typeface="맑은 고딕"/>
-              </a:rPr>
-              <a:t>15</a:t>
             </a:r>
           </a:p>
         </p:txBody>
@@ -11557,8 +10993,8 @@
         </p:nvSpPr>
         <p:spPr>
           <a:xfrm>
-            <a:off x="594360" y="502920"/>
-            <a:ext cx="10972800" cy="777240"/>
+            <a:off x="572414" y="356616"/>
+            <a:ext cx="11192256" cy="521207"/>
           </a:xfrm>
           <a:prstGeom prst="rect">
             <a:avLst/>
@@ -11591,7 +11027,7 @@
         </p:nvSpPr>
         <p:spPr>
           <a:xfrm>
-            <a:off x="731520" y="1600200"/>
+            <a:off x="731520" y="1417320"/>
             <a:ext cx="5257800" cy="4069080"/>
           </a:xfrm>
           <a:prstGeom prst="rect">
@@ -11636,7 +11072,7 @@
         </p:nvSpPr>
         <p:spPr>
           <a:xfrm>
-            <a:off x="6172200" y="1600200"/>
+            <a:off x="6172200" y="1417320"/>
             <a:ext cx="5257800" cy="4069080"/>
           </a:xfrm>
           <a:prstGeom prst="rect">
@@ -11681,7 +11117,7 @@
         </p:nvSpPr>
         <p:spPr>
           <a:xfrm>
-            <a:off x="960120" y="1874519"/>
+            <a:off x="960120" y="1691640"/>
             <a:ext cx="4800600" cy="3383280"/>
           </a:xfrm>
           <a:prstGeom prst="rect">
@@ -11736,7 +11172,7 @@
         </p:nvSpPr>
         <p:spPr>
           <a:xfrm>
-            <a:off x="6400800" y="1874519"/>
+            <a:off x="6400800" y="1691640"/>
             <a:ext cx="4800600" cy="3383280"/>
           </a:xfrm>
           <a:prstGeom prst="rect">
@@ -11763,75 +11199,6 @@
                 <a:latin typeface="맑은 고딕"/>
               </a:rPr>
               <a:t>성장산업 지원과 특정 기업 밀어주기는 구분해서 다뤄야 한다.</a:t>
-            </a:r>
-          </a:p>
-        </p:txBody>
-      </p:sp>
-      <p:sp>
-        <p:nvSpPr>
-          <p:cNvPr id="7" name="TextBox 6"/>
-          <p:cNvSpPr txBox="1"/>
-          <p:nvPr/>
-        </p:nvSpPr>
-        <p:spPr>
-          <a:xfrm>
-            <a:off x="411480" y="6510528"/>
-            <a:ext cx="9875520" cy="201168"/>
-          </a:xfrm>
-          <a:prstGeom prst="rect">
-            <a:avLst/>
-          </a:prstGeom>
-          <a:noFill/>
-        </p:spPr>
-        <p:txBody>
-          <a:bodyPr wrap="square">
-            <a:spAutoFit/>
-          </a:bodyPr>
-          <a:lstStyle/>
-          <a:p>
-            <a:r>
-              <a:rPr sz="800" b="0" u="none">
-                <a:solidFill>
-                  <a:srgbClr val="566070"/>
-                </a:solidFill>
-                <a:latin typeface="맑은 고딕"/>
-              </a:rPr>
-              <a:t>needs_fact_check | before_broadcast</a:t>
-            </a:r>
-          </a:p>
-        </p:txBody>
-      </p:sp>
-      <p:sp>
-        <p:nvSpPr>
-          <p:cNvPr id="8" name="TextBox 7"/>
-          <p:cNvSpPr txBox="1"/>
-          <p:nvPr/>
-        </p:nvSpPr>
-        <p:spPr>
-          <a:xfrm>
-            <a:off x="10607040" y="6510528"/>
-            <a:ext cx="1143000" cy="201168"/>
-          </a:xfrm>
-          <a:prstGeom prst="rect">
-            <a:avLst/>
-          </a:prstGeom>
-          <a:noFill/>
-        </p:spPr>
-        <p:txBody>
-          <a:bodyPr wrap="square">
-            <a:spAutoFit/>
-          </a:bodyPr>
-          <a:lstStyle/>
-          <a:p>
-            <a:pPr algn="r"/>
-            <a:r>
-              <a:rPr sz="800" b="0" u="none">
-                <a:solidFill>
-                  <a:srgbClr val="566070"/>
-                </a:solidFill>
-                <a:latin typeface="맑은 고딕"/>
-              </a:rPr>
-              <a:t>16</a:t>
             </a:r>
           </a:p>
         </p:txBody>
@@ -11870,8 +11237,8 @@
         </p:nvSpPr>
         <p:spPr>
           <a:xfrm>
-            <a:off x="594360" y="502920"/>
-            <a:ext cx="10972800" cy="777240"/>
+            <a:off x="572414" y="356616"/>
+            <a:ext cx="11192256" cy="521207"/>
           </a:xfrm>
           <a:prstGeom prst="rect">
             <a:avLst/>
@@ -11904,7 +11271,7 @@
         </p:nvSpPr>
         <p:spPr>
           <a:xfrm>
-            <a:off x="731520" y="1600200"/>
+            <a:off x="731520" y="1417320"/>
             <a:ext cx="5257800" cy="4069080"/>
           </a:xfrm>
           <a:prstGeom prst="rect">
@@ -11949,7 +11316,7 @@
         </p:nvSpPr>
         <p:spPr>
           <a:xfrm>
-            <a:off x="6172200" y="1600200"/>
+            <a:off x="6172200" y="1417320"/>
             <a:ext cx="5257800" cy="4069080"/>
           </a:xfrm>
           <a:prstGeom prst="rect">
@@ -11994,7 +11361,7 @@
         </p:nvSpPr>
         <p:spPr>
           <a:xfrm>
-            <a:off x="960120" y="1874519"/>
+            <a:off x="960120" y="1691640"/>
             <a:ext cx="4800600" cy="3383280"/>
           </a:xfrm>
           <a:prstGeom prst="rect">
@@ -12049,7 +11416,7 @@
         </p:nvSpPr>
         <p:spPr>
           <a:xfrm>
-            <a:off x="6400800" y="1874519"/>
+            <a:off x="6400800" y="1691640"/>
             <a:ext cx="4800600" cy="3383280"/>
           </a:xfrm>
           <a:prstGeom prst="rect">
@@ -12076,75 +11443,6 @@
                 <a:latin typeface="맑은 고딕"/>
               </a:rPr>
               <a:t>그래서 아무도 위험을 안 지는 문제와, 누군가에게 위험을 떠넘기는 문제를 동시에 봐야 한다.</a:t>
-            </a:r>
-          </a:p>
-        </p:txBody>
-      </p:sp>
-      <p:sp>
-        <p:nvSpPr>
-          <p:cNvPr id="7" name="TextBox 6"/>
-          <p:cNvSpPr txBox="1"/>
-          <p:nvPr/>
-        </p:nvSpPr>
-        <p:spPr>
-          <a:xfrm>
-            <a:off x="411480" y="6510528"/>
-            <a:ext cx="9875520" cy="201168"/>
-          </a:xfrm>
-          <a:prstGeom prst="rect">
-            <a:avLst/>
-          </a:prstGeom>
-          <a:noFill/>
-        </p:spPr>
-        <p:txBody>
-          <a:bodyPr wrap="square">
-            <a:spAutoFit/>
-          </a:bodyPr>
-          <a:lstStyle/>
-          <a:p>
-            <a:r>
-              <a:rPr sz="800" b="0" u="none">
-                <a:solidFill>
-                  <a:srgbClr val="566070"/>
-                </a:solidFill>
-                <a:latin typeface="맑은 고딕"/>
-              </a:rPr>
-              <a:t>needs_fact_check | before_broadcast</a:t>
-            </a:r>
-          </a:p>
-        </p:txBody>
-      </p:sp>
-      <p:sp>
-        <p:nvSpPr>
-          <p:cNvPr id="8" name="TextBox 7"/>
-          <p:cNvSpPr txBox="1"/>
-          <p:nvPr/>
-        </p:nvSpPr>
-        <p:spPr>
-          <a:xfrm>
-            <a:off x="10607040" y="6510528"/>
-            <a:ext cx="1143000" cy="201168"/>
-          </a:xfrm>
-          <a:prstGeom prst="rect">
-            <a:avLst/>
-          </a:prstGeom>
-          <a:noFill/>
-        </p:spPr>
-        <p:txBody>
-          <a:bodyPr wrap="square">
-            <a:spAutoFit/>
-          </a:bodyPr>
-          <a:lstStyle/>
-          <a:p>
-            <a:pPr algn="r"/>
-            <a:r>
-              <a:rPr sz="800" b="0" u="none">
-                <a:solidFill>
-                  <a:srgbClr val="566070"/>
-                </a:solidFill>
-                <a:latin typeface="맑은 고딕"/>
-              </a:rPr>
-              <a:t>17</a:t>
             </a:r>
           </a:p>
         </p:txBody>
@@ -12183,8 +11481,8 @@
         </p:nvSpPr>
         <p:spPr>
           <a:xfrm>
-            <a:off x="914400" y="1234440"/>
-            <a:ext cx="10332720" cy="1280160"/>
+            <a:off x="572414" y="356616"/>
+            <a:ext cx="11192256" cy="521207"/>
           </a:xfrm>
           <a:prstGeom prst="rect">
             <a:avLst/>
@@ -12197,7 +11495,6 @@
           </a:bodyPr>
           <a:lstStyle/>
           <a:p>
-            <a:pPr algn="ctr"/>
             <a:r>
               <a:rPr sz="2800" b="1" u="none">
                 <a:solidFill>
@@ -12218,8 +11515,8 @@
         </p:nvSpPr>
         <p:spPr>
           <a:xfrm>
-            <a:off x="1417320" y="2926080"/>
-            <a:ext cx="9326880" cy="2011680"/>
+            <a:off x="713232" y="2103120"/>
+            <a:ext cx="10652760" cy="2926080"/>
           </a:xfrm>
           <a:prstGeom prst="rect">
             <a:avLst/>
@@ -12277,75 +11574,6 @@
                 <a:latin typeface="맑은 고딕"/>
               </a:rPr>
               <a:t>국민성장펀드 이야기는 결국 수익보다 위험 배분의 설계로 읽어야 한다.</a:t>
-            </a:r>
-          </a:p>
-        </p:txBody>
-      </p:sp>
-      <p:sp>
-        <p:nvSpPr>
-          <p:cNvPr id="4" name="TextBox 3"/>
-          <p:cNvSpPr txBox="1"/>
-          <p:nvPr/>
-        </p:nvSpPr>
-        <p:spPr>
-          <a:xfrm>
-            <a:off x="411480" y="6510528"/>
-            <a:ext cx="9875520" cy="201168"/>
-          </a:xfrm>
-          <a:prstGeom prst="rect">
-            <a:avLst/>
-          </a:prstGeom>
-          <a:noFill/>
-        </p:spPr>
-        <p:txBody>
-          <a:bodyPr wrap="square">
-            <a:spAutoFit/>
-          </a:bodyPr>
-          <a:lstStyle/>
-          <a:p>
-            <a:r>
-              <a:rPr sz="800" b="0" u="none">
-                <a:solidFill>
-                  <a:srgbClr val="566070"/>
-                </a:solidFill>
-                <a:latin typeface="맑은 고딕"/>
-              </a:rPr>
-              <a:t>needs_fact_check | before_broadcast</a:t>
-            </a:r>
-          </a:p>
-        </p:txBody>
-      </p:sp>
-      <p:sp>
-        <p:nvSpPr>
-          <p:cNvPr id="5" name="TextBox 4"/>
-          <p:cNvSpPr txBox="1"/>
-          <p:nvPr/>
-        </p:nvSpPr>
-        <p:spPr>
-          <a:xfrm>
-            <a:off x="10607040" y="6510528"/>
-            <a:ext cx="1143000" cy="201168"/>
-          </a:xfrm>
-          <a:prstGeom prst="rect">
-            <a:avLst/>
-          </a:prstGeom>
-          <a:noFill/>
-        </p:spPr>
-        <p:txBody>
-          <a:bodyPr wrap="square">
-            <a:spAutoFit/>
-          </a:bodyPr>
-          <a:lstStyle/>
-          <a:p>
-            <a:pPr algn="r"/>
-            <a:r>
-              <a:rPr sz="800" b="0" u="none">
-                <a:solidFill>
-                  <a:srgbClr val="566070"/>
-                </a:solidFill>
-                <a:latin typeface="맑은 고딕"/>
-              </a:rPr>
-              <a:t>18</a:t>
             </a:r>
           </a:p>
         </p:txBody>
@@ -12410,99 +11638,6 @@
           </a:p>
         </p:txBody>
       </p:sp>
-      <p:sp>
-        <p:nvSpPr>
-          <p:cNvPr id="3" name="TextBox 2"/>
-          <p:cNvSpPr txBox="1"/>
-          <p:nvPr/>
-        </p:nvSpPr>
-        <p:spPr>
-          <a:xfrm>
-            <a:off x="843991" y="2508199"/>
-            <a:ext cx="9875520" cy="914400"/>
-          </a:xfrm>
-          <a:prstGeom prst="rect">
-            <a:avLst/>
-          </a:prstGeom>
-          <a:noFill/>
-        </p:spPr>
-        <p:txBody>
-          <a:bodyPr wrap="square">
-            <a:spAutoFit/>
-          </a:bodyPr>
-          <a:lstStyle/>
-          <a:p/>
-        </p:txBody>
-      </p:sp>
-      <p:sp>
-        <p:nvSpPr>
-          <p:cNvPr id="4" name="TextBox 3"/>
-          <p:cNvSpPr txBox="1"/>
-          <p:nvPr/>
-        </p:nvSpPr>
-        <p:spPr>
-          <a:xfrm>
-            <a:off x="411480" y="6510528"/>
-            <a:ext cx="9875520" cy="201168"/>
-          </a:xfrm>
-          <a:prstGeom prst="rect">
-            <a:avLst/>
-          </a:prstGeom>
-          <a:noFill/>
-        </p:spPr>
-        <p:txBody>
-          <a:bodyPr wrap="square">
-            <a:spAutoFit/>
-          </a:bodyPr>
-          <a:lstStyle/>
-          <a:p>
-            <a:r>
-              <a:rPr sz="800" b="0" u="none">
-                <a:solidFill>
-                  <a:srgbClr val="566070"/>
-                </a:solidFill>
-                <a:latin typeface="맑은 고딕"/>
-              </a:rPr>
-              <a:t>draft skeleton</a:t>
-            </a:r>
-          </a:p>
-        </p:txBody>
-      </p:sp>
-      <p:sp>
-        <p:nvSpPr>
-          <p:cNvPr id="5" name="TextBox 4"/>
-          <p:cNvSpPr txBox="1"/>
-          <p:nvPr/>
-        </p:nvSpPr>
-        <p:spPr>
-          <a:xfrm>
-            <a:off x="10607040" y="6510528"/>
-            <a:ext cx="1143000" cy="201168"/>
-          </a:xfrm>
-          <a:prstGeom prst="rect">
-            <a:avLst/>
-          </a:prstGeom>
-          <a:noFill/>
-        </p:spPr>
-        <p:txBody>
-          <a:bodyPr wrap="square">
-            <a:spAutoFit/>
-          </a:bodyPr>
-          <a:lstStyle/>
-          <a:p>
-            <a:pPr algn="r"/>
-            <a:r>
-              <a:rPr sz="800" b="0" u="none">
-                <a:solidFill>
-                  <a:srgbClr val="566070"/>
-                </a:solidFill>
-                <a:latin typeface="맑은 고딕"/>
-              </a:rPr>
-              <a:t>19</a:t>
-            </a:r>
-          </a:p>
-        </p:txBody>
-      </p:sp>
     </p:spTree>
   </p:cSld>
   <p:clrMapOvr>
@@ -12537,8 +11672,8 @@
         </p:nvSpPr>
         <p:spPr>
           <a:xfrm>
-            <a:off x="6372453" y="1952243"/>
-            <a:ext cx="3709720" cy="523036"/>
+            <a:off x="572414" y="356616"/>
+            <a:ext cx="11192256" cy="521207"/>
           </a:xfrm>
           <a:prstGeom prst="rect">
             <a:avLst/>
@@ -12571,7 +11706,7 @@
         </p:nvSpPr>
         <p:spPr>
           <a:xfrm>
-            <a:off x="713232" y="2795320"/>
+            <a:off x="713232" y="1874519"/>
             <a:ext cx="9875520" cy="2651760"/>
           </a:xfrm>
           <a:prstGeom prst="rect">
@@ -12630,75 +11765,6 @@
                 <a:latin typeface="맑은 고딕"/>
               </a:rPr>
               <a:t>다만 이 발언과 정책 숫자가 곧 정책 성공을 뜻하는 것은 아니다.</a:t>
-            </a:r>
-          </a:p>
-        </p:txBody>
-      </p:sp>
-      <p:sp>
-        <p:nvSpPr>
-          <p:cNvPr id="4" name="TextBox 3"/>
-          <p:cNvSpPr txBox="1"/>
-          <p:nvPr/>
-        </p:nvSpPr>
-        <p:spPr>
-          <a:xfrm>
-            <a:off x="411480" y="6510528"/>
-            <a:ext cx="9875520" cy="201168"/>
-          </a:xfrm>
-          <a:prstGeom prst="rect">
-            <a:avLst/>
-          </a:prstGeom>
-          <a:noFill/>
-        </p:spPr>
-        <p:txBody>
-          <a:bodyPr wrap="square">
-            <a:spAutoFit/>
-          </a:bodyPr>
-          <a:lstStyle/>
-          <a:p>
-            <a:r>
-              <a:rPr sz="800" b="0" u="none">
-                <a:solidFill>
-                  <a:srgbClr val="566070"/>
-                </a:solidFill>
-                <a:latin typeface="맑은 고딕"/>
-              </a:rPr>
-              <a:t>needs_fact_check | before_broadcast</a:t>
-            </a:r>
-          </a:p>
-        </p:txBody>
-      </p:sp>
-      <p:sp>
-        <p:nvSpPr>
-          <p:cNvPr id="5" name="TextBox 4"/>
-          <p:cNvSpPr txBox="1"/>
-          <p:nvPr/>
-        </p:nvSpPr>
-        <p:spPr>
-          <a:xfrm>
-            <a:off x="10607040" y="6510528"/>
-            <a:ext cx="1143000" cy="201168"/>
-          </a:xfrm>
-          <a:prstGeom prst="rect">
-            <a:avLst/>
-          </a:prstGeom>
-          <a:noFill/>
-        </p:spPr>
-        <p:txBody>
-          <a:bodyPr wrap="square">
-            <a:spAutoFit/>
-          </a:bodyPr>
-          <a:lstStyle/>
-          <a:p>
-            <a:pPr algn="r"/>
-            <a:r>
-              <a:rPr sz="800" b="0" u="none">
-                <a:solidFill>
-                  <a:srgbClr val="566070"/>
-                </a:solidFill>
-                <a:latin typeface="맑은 고딕"/>
-              </a:rPr>
-              <a:t>02</a:t>
             </a:r>
           </a:p>
         </p:txBody>
@@ -12737,8 +11803,8 @@
         </p:nvSpPr>
         <p:spPr>
           <a:xfrm>
-            <a:off x="572414" y="411480"/>
-            <a:ext cx="10972800" cy="685800"/>
+            <a:off x="572414" y="356616"/>
+            <a:ext cx="11192256" cy="521207"/>
           </a:xfrm>
           <a:prstGeom prst="rect">
             <a:avLst/>
@@ -12771,7 +11837,7 @@
         </p:nvSpPr>
         <p:spPr>
           <a:xfrm>
-            <a:off x="572414" y="1208836"/>
+            <a:off x="572414" y="1874519"/>
             <a:ext cx="11193170" cy="1302105"/>
           </a:xfrm>
           <a:prstGeom prst="rect">
@@ -12830,75 +11896,6 @@
                 <a:latin typeface="맑은 고딕"/>
               </a:rPr>
               <a:t>따라서 생산적 금융은 구호가 아니라 자본규제와 위험분담 설계의 문제다.</a:t>
-            </a:r>
-          </a:p>
-        </p:txBody>
-      </p:sp>
-      <p:sp>
-        <p:nvSpPr>
-          <p:cNvPr id="4" name="TextBox 3"/>
-          <p:cNvSpPr txBox="1"/>
-          <p:nvPr/>
-        </p:nvSpPr>
-        <p:spPr>
-          <a:xfrm>
-            <a:off x="411480" y="6510528"/>
-            <a:ext cx="9875520" cy="201168"/>
-          </a:xfrm>
-          <a:prstGeom prst="rect">
-            <a:avLst/>
-          </a:prstGeom>
-          <a:noFill/>
-        </p:spPr>
-        <p:txBody>
-          <a:bodyPr wrap="square">
-            <a:spAutoFit/>
-          </a:bodyPr>
-          <a:lstStyle/>
-          <a:p>
-            <a:r>
-              <a:rPr sz="800" b="0" u="none">
-                <a:solidFill>
-                  <a:srgbClr val="566070"/>
-                </a:solidFill>
-                <a:latin typeface="맑은 고딕"/>
-              </a:rPr>
-              <a:t>needs_fact_check | before_broadcast</a:t>
-            </a:r>
-          </a:p>
-        </p:txBody>
-      </p:sp>
-      <p:sp>
-        <p:nvSpPr>
-          <p:cNvPr id="5" name="TextBox 4"/>
-          <p:cNvSpPr txBox="1"/>
-          <p:nvPr/>
-        </p:nvSpPr>
-        <p:spPr>
-          <a:xfrm>
-            <a:off x="10607040" y="6510528"/>
-            <a:ext cx="1143000" cy="201168"/>
-          </a:xfrm>
-          <a:prstGeom prst="rect">
-            <a:avLst/>
-          </a:prstGeom>
-          <a:noFill/>
-        </p:spPr>
-        <p:txBody>
-          <a:bodyPr wrap="square">
-            <a:spAutoFit/>
-          </a:bodyPr>
-          <a:lstStyle/>
-          <a:p>
-            <a:pPr algn="r"/>
-            <a:r>
-              <a:rPr sz="800" b="0" u="none">
-                <a:solidFill>
-                  <a:srgbClr val="566070"/>
-                </a:solidFill>
-                <a:latin typeface="맑은 고딕"/>
-              </a:rPr>
-              <a:t>20</a:t>
             </a:r>
           </a:p>
         </p:txBody>
@@ -12937,8 +11934,8 @@
         </p:nvSpPr>
         <p:spPr>
           <a:xfrm>
-            <a:off x="594360" y="502920"/>
-            <a:ext cx="10972800" cy="777240"/>
+            <a:off x="572414" y="356616"/>
+            <a:ext cx="11192256" cy="521207"/>
           </a:xfrm>
           <a:prstGeom prst="rect">
             <a:avLst/>
@@ -12971,7 +11968,7 @@
         </p:nvSpPr>
         <p:spPr>
           <a:xfrm>
-            <a:off x="731520" y="1600200"/>
+            <a:off x="731520" y="1417320"/>
             <a:ext cx="5257800" cy="4069080"/>
           </a:xfrm>
           <a:prstGeom prst="rect">
@@ -13016,7 +12013,7 @@
         </p:nvSpPr>
         <p:spPr>
           <a:xfrm>
-            <a:off x="6172200" y="1600200"/>
+            <a:off x="6172200" y="1417320"/>
             <a:ext cx="5257800" cy="4069080"/>
           </a:xfrm>
           <a:prstGeom prst="rect">
@@ -13061,7 +12058,7 @@
         </p:nvSpPr>
         <p:spPr>
           <a:xfrm>
-            <a:off x="960120" y="1874519"/>
+            <a:off x="960120" y="1691640"/>
             <a:ext cx="4800600" cy="3383280"/>
           </a:xfrm>
           <a:prstGeom prst="rect">
@@ -13116,7 +12113,7 @@
         </p:nvSpPr>
         <p:spPr>
           <a:xfrm>
-            <a:off x="6400800" y="1874519"/>
+            <a:off x="6400800" y="1691640"/>
             <a:ext cx="4800600" cy="3383280"/>
           </a:xfrm>
           <a:prstGeom prst="rect">
@@ -13143,75 +12140,6 @@
                 <a:latin typeface="맑은 고딕"/>
               </a:rPr>
               <a:t>핵심은 투자 추천이 아니라 위험을 누가 나누느냐는 제도 설계다.</a:t>
-            </a:r>
-          </a:p>
-        </p:txBody>
-      </p:sp>
-      <p:sp>
-        <p:nvSpPr>
-          <p:cNvPr id="7" name="TextBox 6"/>
-          <p:cNvSpPr txBox="1"/>
-          <p:nvPr/>
-        </p:nvSpPr>
-        <p:spPr>
-          <a:xfrm>
-            <a:off x="411480" y="6510528"/>
-            <a:ext cx="9875520" cy="201168"/>
-          </a:xfrm>
-          <a:prstGeom prst="rect">
-            <a:avLst/>
-          </a:prstGeom>
-          <a:noFill/>
-        </p:spPr>
-        <p:txBody>
-          <a:bodyPr wrap="square">
-            <a:spAutoFit/>
-          </a:bodyPr>
-          <a:lstStyle/>
-          <a:p>
-            <a:r>
-              <a:rPr sz="800" b="0" u="none">
-                <a:solidFill>
-                  <a:srgbClr val="566070"/>
-                </a:solidFill>
-                <a:latin typeface="맑은 고딕"/>
-              </a:rPr>
-              <a:t>draft skeleton</a:t>
-            </a:r>
-          </a:p>
-        </p:txBody>
-      </p:sp>
-      <p:sp>
-        <p:nvSpPr>
-          <p:cNvPr id="8" name="TextBox 7"/>
-          <p:cNvSpPr txBox="1"/>
-          <p:nvPr/>
-        </p:nvSpPr>
-        <p:spPr>
-          <a:xfrm>
-            <a:off x="10607040" y="6510528"/>
-            <a:ext cx="1143000" cy="201168"/>
-          </a:xfrm>
-          <a:prstGeom prst="rect">
-            <a:avLst/>
-          </a:prstGeom>
-          <a:noFill/>
-        </p:spPr>
-        <p:txBody>
-          <a:bodyPr wrap="square">
-            <a:spAutoFit/>
-          </a:bodyPr>
-          <a:lstStyle/>
-          <a:p>
-            <a:pPr algn="r"/>
-            <a:r>
-              <a:rPr sz="800" b="0" u="none">
-                <a:solidFill>
-                  <a:srgbClr val="566070"/>
-                </a:solidFill>
-                <a:latin typeface="맑은 고딕"/>
-              </a:rPr>
-              <a:t>22</a:t>
             </a:r>
           </a:p>
         </p:txBody>
@@ -13250,8 +12178,8 @@
         </p:nvSpPr>
         <p:spPr>
           <a:xfrm>
-            <a:off x="914400" y="1234440"/>
-            <a:ext cx="10332720" cy="1280160"/>
+            <a:off x="572414" y="356616"/>
+            <a:ext cx="11192256" cy="521207"/>
           </a:xfrm>
           <a:prstGeom prst="rect">
             <a:avLst/>
@@ -13264,7 +12192,6 @@
           </a:bodyPr>
           <a:lstStyle/>
           <a:p>
-            <a:pPr algn="ctr"/>
             <a:r>
               <a:rPr sz="2800" b="1" u="none">
                 <a:solidFill>
@@ -13285,8 +12212,8 @@
         </p:nvSpPr>
         <p:spPr>
           <a:xfrm>
-            <a:off x="1417320" y="2926080"/>
-            <a:ext cx="9326880" cy="2011680"/>
+            <a:off x="713232" y="2103120"/>
+            <a:ext cx="10652760" cy="2926080"/>
           </a:xfrm>
           <a:prstGeom prst="rect">
             <a:avLst/>
@@ -13344,75 +12271,6 @@
                 <a:latin typeface="맑은 고딕"/>
               </a:rPr>
               <a:t>국민성장펀드는 그 질문을 보여주는 한 사례일 뿐, 성공을 단정할 수는 없다.</a:t>
-            </a:r>
-          </a:p>
-        </p:txBody>
-      </p:sp>
-      <p:sp>
-        <p:nvSpPr>
-          <p:cNvPr id="4" name="TextBox 3"/>
-          <p:cNvSpPr txBox="1"/>
-          <p:nvPr/>
-        </p:nvSpPr>
-        <p:spPr>
-          <a:xfrm>
-            <a:off x="411480" y="6510528"/>
-            <a:ext cx="9875520" cy="201168"/>
-          </a:xfrm>
-          <a:prstGeom prst="rect">
-            <a:avLst/>
-          </a:prstGeom>
-          <a:noFill/>
-        </p:spPr>
-        <p:txBody>
-          <a:bodyPr wrap="square">
-            <a:spAutoFit/>
-          </a:bodyPr>
-          <a:lstStyle/>
-          <a:p>
-            <a:r>
-              <a:rPr sz="800" b="0" u="none">
-                <a:solidFill>
-                  <a:srgbClr val="566070"/>
-                </a:solidFill>
-                <a:latin typeface="맑은 고딕"/>
-              </a:rPr>
-              <a:t>needs_fact_check | before_broadcast</a:t>
-            </a:r>
-          </a:p>
-        </p:txBody>
-      </p:sp>
-      <p:sp>
-        <p:nvSpPr>
-          <p:cNvPr id="5" name="TextBox 4"/>
-          <p:cNvSpPr txBox="1"/>
-          <p:nvPr/>
-        </p:nvSpPr>
-        <p:spPr>
-          <a:xfrm>
-            <a:off x="10607040" y="6510528"/>
-            <a:ext cx="1143000" cy="201168"/>
-          </a:xfrm>
-          <a:prstGeom prst="rect">
-            <a:avLst/>
-          </a:prstGeom>
-          <a:noFill/>
-        </p:spPr>
-        <p:txBody>
-          <a:bodyPr wrap="square">
-            <a:spAutoFit/>
-          </a:bodyPr>
-          <a:lstStyle/>
-          <a:p>
-            <a:pPr algn="r"/>
-            <a:r>
-              <a:rPr sz="800" b="0" u="none">
-                <a:solidFill>
-                  <a:srgbClr val="566070"/>
-                </a:solidFill>
-                <a:latin typeface="맑은 고딕"/>
-              </a:rPr>
-              <a:t>24</a:t>
             </a:r>
           </a:p>
         </p:txBody>
@@ -13548,75 +12406,6 @@
           </a:p>
         </p:txBody>
       </p:sp>
-      <p:sp>
-        <p:nvSpPr>
-          <p:cNvPr id="4" name="TextBox 3"/>
-          <p:cNvSpPr txBox="1"/>
-          <p:nvPr/>
-        </p:nvSpPr>
-        <p:spPr>
-          <a:xfrm>
-            <a:off x="411480" y="6510528"/>
-            <a:ext cx="9875520" cy="201168"/>
-          </a:xfrm>
-          <a:prstGeom prst="rect">
-            <a:avLst/>
-          </a:prstGeom>
-          <a:noFill/>
-        </p:spPr>
-        <p:txBody>
-          <a:bodyPr wrap="square">
-            <a:spAutoFit/>
-          </a:bodyPr>
-          <a:lstStyle/>
-          <a:p>
-            <a:r>
-              <a:rPr sz="800" b="0" u="none">
-                <a:solidFill>
-                  <a:srgbClr val="566070"/>
-                </a:solidFill>
-                <a:latin typeface="맑은 고딕"/>
-              </a:rPr>
-              <a:t>needs_fact_check | before_broadcast</a:t>
-            </a:r>
-          </a:p>
-        </p:txBody>
-      </p:sp>
-      <p:sp>
-        <p:nvSpPr>
-          <p:cNvPr id="5" name="TextBox 4"/>
-          <p:cNvSpPr txBox="1"/>
-          <p:nvPr/>
-        </p:nvSpPr>
-        <p:spPr>
-          <a:xfrm>
-            <a:off x="10607040" y="6510528"/>
-            <a:ext cx="1143000" cy="201168"/>
-          </a:xfrm>
-          <a:prstGeom prst="rect">
-            <a:avLst/>
-          </a:prstGeom>
-          <a:noFill/>
-        </p:spPr>
-        <p:txBody>
-          <a:bodyPr wrap="square">
-            <a:spAutoFit/>
-          </a:bodyPr>
-          <a:lstStyle/>
-          <a:p>
-            <a:pPr algn="r"/>
-            <a:r>
-              <a:rPr sz="800" b="0" u="none">
-                <a:solidFill>
-                  <a:srgbClr val="566070"/>
-                </a:solidFill>
-                <a:latin typeface="맑은 고딕"/>
-              </a:rPr>
-              <a:t>21</a:t>
-            </a:r>
-          </a:p>
-        </p:txBody>
-      </p:sp>
     </p:spTree>
   </p:cSld>
   <p:clrMapOvr>
@@ -13732,75 +12521,6 @@
           </a:p>
         </p:txBody>
       </p:sp>
-      <p:sp>
-        <p:nvSpPr>
-          <p:cNvPr id="4" name="TextBox 3"/>
-          <p:cNvSpPr txBox="1"/>
-          <p:nvPr/>
-        </p:nvSpPr>
-        <p:spPr>
-          <a:xfrm>
-            <a:off x="411480" y="6510528"/>
-            <a:ext cx="9875520" cy="201168"/>
-          </a:xfrm>
-          <a:prstGeom prst="rect">
-            <a:avLst/>
-          </a:prstGeom>
-          <a:noFill/>
-        </p:spPr>
-        <p:txBody>
-          <a:bodyPr wrap="square">
-            <a:spAutoFit/>
-          </a:bodyPr>
-          <a:lstStyle/>
-          <a:p>
-            <a:r>
-              <a:rPr sz="800" b="0" u="none">
-                <a:solidFill>
-                  <a:srgbClr val="566070"/>
-                </a:solidFill>
-                <a:latin typeface="맑은 고딕"/>
-              </a:rPr>
-              <a:t>needs_source | needs_fact_check | before_broadcast</a:t>
-            </a:r>
-          </a:p>
-        </p:txBody>
-      </p:sp>
-      <p:sp>
-        <p:nvSpPr>
-          <p:cNvPr id="5" name="TextBox 4"/>
-          <p:cNvSpPr txBox="1"/>
-          <p:nvPr/>
-        </p:nvSpPr>
-        <p:spPr>
-          <a:xfrm>
-            <a:off x="10607040" y="6510528"/>
-            <a:ext cx="1143000" cy="201168"/>
-          </a:xfrm>
-          <a:prstGeom prst="rect">
-            <a:avLst/>
-          </a:prstGeom>
-          <a:noFill/>
-        </p:spPr>
-        <p:txBody>
-          <a:bodyPr wrap="square">
-            <a:spAutoFit/>
-          </a:bodyPr>
-          <a:lstStyle/>
-          <a:p>
-            <a:pPr algn="r"/>
-            <a:r>
-              <a:rPr sz="800" b="0" u="none">
-                <a:solidFill>
-                  <a:srgbClr val="566070"/>
-                </a:solidFill>
-                <a:latin typeface="맑은 고딕"/>
-              </a:rPr>
-              <a:t>23</a:t>
-            </a:r>
-          </a:p>
-        </p:txBody>
-      </p:sp>
     </p:spTree>
   </p:cSld>
   <p:clrMapOvr>
@@ -13835,8 +12555,8 @@
         </p:nvSpPr>
         <p:spPr>
           <a:xfrm>
-            <a:off x="572414" y="411480"/>
-            <a:ext cx="10972800" cy="685800"/>
+            <a:off x="572414" y="356616"/>
+            <a:ext cx="11192256" cy="521207"/>
           </a:xfrm>
           <a:prstGeom prst="rect">
             <a:avLst/>
@@ -13869,7 +12589,7 @@
         </p:nvSpPr>
         <p:spPr>
           <a:xfrm>
-            <a:off x="572414" y="1208836"/>
+            <a:off x="572414" y="1874519"/>
             <a:ext cx="11193170" cy="1302105"/>
           </a:xfrm>
           <a:prstGeom prst="rect">
@@ -13928,75 +12648,6 @@
                 <a:latin typeface="맑은 고딕"/>
               </a:rPr>
               <a:t>그래서 장기 위험자본 논의는 은행의 본능을 비난하는 문제가 아니라 금융 시스템의 설계 문제에 가깝다.</a:t>
-            </a:r>
-          </a:p>
-        </p:txBody>
-      </p:sp>
-      <p:sp>
-        <p:nvSpPr>
-          <p:cNvPr id="4" name="TextBox 3"/>
-          <p:cNvSpPr txBox="1"/>
-          <p:nvPr/>
-        </p:nvSpPr>
-        <p:spPr>
-          <a:xfrm>
-            <a:off x="411480" y="6510528"/>
-            <a:ext cx="9875520" cy="201168"/>
-          </a:xfrm>
-          <a:prstGeom prst="rect">
-            <a:avLst/>
-          </a:prstGeom>
-          <a:noFill/>
-        </p:spPr>
-        <p:txBody>
-          <a:bodyPr wrap="square">
-            <a:spAutoFit/>
-          </a:bodyPr>
-          <a:lstStyle/>
-          <a:p>
-            <a:r>
-              <a:rPr sz="800" b="0" u="none">
-                <a:solidFill>
-                  <a:srgbClr val="566070"/>
-                </a:solidFill>
-                <a:latin typeface="맑은 고딕"/>
-              </a:rPr>
-              <a:t>needs_fact_check | before_broadcast</a:t>
-            </a:r>
-          </a:p>
-        </p:txBody>
-      </p:sp>
-      <p:sp>
-        <p:nvSpPr>
-          <p:cNvPr id="5" name="TextBox 4"/>
-          <p:cNvSpPr txBox="1"/>
-          <p:nvPr/>
-        </p:nvSpPr>
-        <p:spPr>
-          <a:xfrm>
-            <a:off x="10607040" y="6510528"/>
-            <a:ext cx="1143000" cy="201168"/>
-          </a:xfrm>
-          <a:prstGeom prst="rect">
-            <a:avLst/>
-          </a:prstGeom>
-          <a:noFill/>
-        </p:spPr>
-        <p:txBody>
-          <a:bodyPr wrap="square">
-            <a:spAutoFit/>
-          </a:bodyPr>
-          <a:lstStyle/>
-          <a:p>
-            <a:pPr algn="r"/>
-            <a:r>
-              <a:rPr sz="800" b="0" u="none">
-                <a:solidFill>
-                  <a:srgbClr val="566070"/>
-                </a:solidFill>
-                <a:latin typeface="맑은 고딕"/>
-              </a:rPr>
-              <a:t>03</a:t>
             </a:r>
           </a:p>
         </p:txBody>
@@ -14035,8 +12686,8 @@
         </p:nvSpPr>
         <p:spPr>
           <a:xfrm>
-            <a:off x="914400" y="1234440"/>
-            <a:ext cx="10332720" cy="1280160"/>
+            <a:off x="572414" y="356616"/>
+            <a:ext cx="11192256" cy="521207"/>
           </a:xfrm>
           <a:prstGeom prst="rect">
             <a:avLst/>
@@ -14049,7 +12700,6 @@
           </a:bodyPr>
           <a:lstStyle/>
           <a:p>
-            <a:pPr algn="ctr"/>
             <a:r>
               <a:rPr sz="2800" b="1" u="none">
                 <a:solidFill>
@@ -14070,8 +12720,8 @@
         </p:nvSpPr>
         <p:spPr>
           <a:xfrm>
-            <a:off x="1417320" y="2926080"/>
-            <a:ext cx="9326880" cy="2011680"/>
+            <a:off x="713232" y="2103120"/>
+            <a:ext cx="10652760" cy="2926080"/>
           </a:xfrm>
           <a:prstGeom prst="rect">
             <a:avLst/>
@@ -14129,75 +12779,6 @@
                 <a:latin typeface="맑은 고딕"/>
               </a:rPr>
               <a:t>그래서 이 이야기는 “대출을 늘리자”보다 “누가 긴 위험을 나눌 것인가”에 가깝다.</a:t>
-            </a:r>
-          </a:p>
-        </p:txBody>
-      </p:sp>
-      <p:sp>
-        <p:nvSpPr>
-          <p:cNvPr id="4" name="TextBox 3"/>
-          <p:cNvSpPr txBox="1"/>
-          <p:nvPr/>
-        </p:nvSpPr>
-        <p:spPr>
-          <a:xfrm>
-            <a:off x="411480" y="6510528"/>
-            <a:ext cx="9875520" cy="201168"/>
-          </a:xfrm>
-          <a:prstGeom prst="rect">
-            <a:avLst/>
-          </a:prstGeom>
-          <a:noFill/>
-        </p:spPr>
-        <p:txBody>
-          <a:bodyPr wrap="square">
-            <a:spAutoFit/>
-          </a:bodyPr>
-          <a:lstStyle/>
-          <a:p>
-            <a:r>
-              <a:rPr sz="800" b="0" u="none">
-                <a:solidFill>
-                  <a:srgbClr val="566070"/>
-                </a:solidFill>
-                <a:latin typeface="맑은 고딕"/>
-              </a:rPr>
-              <a:t>needs_fact_check | before_broadcast</a:t>
-            </a:r>
-          </a:p>
-        </p:txBody>
-      </p:sp>
-      <p:sp>
-        <p:nvSpPr>
-          <p:cNvPr id="5" name="TextBox 4"/>
-          <p:cNvSpPr txBox="1"/>
-          <p:nvPr/>
-        </p:nvSpPr>
-        <p:spPr>
-          <a:xfrm>
-            <a:off x="10607040" y="6510528"/>
-            <a:ext cx="1143000" cy="201168"/>
-          </a:xfrm>
-          <a:prstGeom prst="rect">
-            <a:avLst/>
-          </a:prstGeom>
-          <a:noFill/>
-        </p:spPr>
-        <p:txBody>
-          <a:bodyPr wrap="square">
-            <a:spAutoFit/>
-          </a:bodyPr>
-          <a:lstStyle/>
-          <a:p>
-            <a:pPr algn="r"/>
-            <a:r>
-              <a:rPr sz="800" b="0" u="none">
-                <a:solidFill>
-                  <a:srgbClr val="566070"/>
-                </a:solidFill>
-                <a:latin typeface="맑은 고딕"/>
-              </a:rPr>
-              <a:t>04</a:t>
             </a:r>
           </a:p>
         </p:txBody>
@@ -14236,8 +12817,8 @@
         </p:nvSpPr>
         <p:spPr>
           <a:xfrm>
-            <a:off x="914400" y="1234440"/>
-            <a:ext cx="10332720" cy="1280160"/>
+            <a:off x="572414" y="356616"/>
+            <a:ext cx="11192256" cy="521207"/>
           </a:xfrm>
           <a:prstGeom prst="rect">
             <a:avLst/>
@@ -14250,7 +12831,6 @@
           </a:bodyPr>
           <a:lstStyle/>
           <a:p>
-            <a:pPr algn="ctr"/>
             <a:r>
               <a:rPr sz="2800" b="1" u="none">
                 <a:solidFill>
@@ -14271,8 +12851,8 @@
         </p:nvSpPr>
         <p:spPr>
           <a:xfrm>
-            <a:off x="1417320" y="2926080"/>
-            <a:ext cx="9326880" cy="2011680"/>
+            <a:off x="713232" y="2103120"/>
+            <a:ext cx="10652760" cy="2926080"/>
           </a:xfrm>
           <a:prstGeom prst="rect">
             <a:avLst/>
@@ -14330,75 +12910,6 @@
                 <a:latin typeface="맑은 고딕"/>
               </a:rPr>
               <a:t>이 사이의 균형이 정책금융 논쟁의 본론이다.</a:t>
-            </a:r>
-          </a:p>
-        </p:txBody>
-      </p:sp>
-      <p:sp>
-        <p:nvSpPr>
-          <p:cNvPr id="4" name="TextBox 3"/>
-          <p:cNvSpPr txBox="1"/>
-          <p:nvPr/>
-        </p:nvSpPr>
-        <p:spPr>
-          <a:xfrm>
-            <a:off x="411480" y="6510528"/>
-            <a:ext cx="9875520" cy="201168"/>
-          </a:xfrm>
-          <a:prstGeom prst="rect">
-            <a:avLst/>
-          </a:prstGeom>
-          <a:noFill/>
-        </p:spPr>
-        <p:txBody>
-          <a:bodyPr wrap="square">
-            <a:spAutoFit/>
-          </a:bodyPr>
-          <a:lstStyle/>
-          <a:p>
-            <a:r>
-              <a:rPr sz="800" b="0" u="none">
-                <a:solidFill>
-                  <a:srgbClr val="566070"/>
-                </a:solidFill>
-                <a:latin typeface="맑은 고딕"/>
-              </a:rPr>
-              <a:t>draft skeleton</a:t>
-            </a:r>
-          </a:p>
-        </p:txBody>
-      </p:sp>
-      <p:sp>
-        <p:nvSpPr>
-          <p:cNvPr id="5" name="TextBox 4"/>
-          <p:cNvSpPr txBox="1"/>
-          <p:nvPr/>
-        </p:nvSpPr>
-        <p:spPr>
-          <a:xfrm>
-            <a:off x="10607040" y="6510528"/>
-            <a:ext cx="1143000" cy="201168"/>
-          </a:xfrm>
-          <a:prstGeom prst="rect">
-            <a:avLst/>
-          </a:prstGeom>
-          <a:noFill/>
-        </p:spPr>
-        <p:txBody>
-          <a:bodyPr wrap="square">
-            <a:spAutoFit/>
-          </a:bodyPr>
-          <a:lstStyle/>
-          <a:p>
-            <a:pPr algn="r"/>
-            <a:r>
-              <a:rPr sz="800" b="0" u="none">
-                <a:solidFill>
-                  <a:srgbClr val="566070"/>
-                </a:solidFill>
-                <a:latin typeface="맑은 고딕"/>
-              </a:rPr>
-              <a:t>05</a:t>
             </a:r>
           </a:p>
         </p:txBody>
@@ -14463,99 +12974,6 @@
           </a:p>
         </p:txBody>
       </p:sp>
-      <p:sp>
-        <p:nvSpPr>
-          <p:cNvPr id="3" name="TextBox 2"/>
-          <p:cNvSpPr txBox="1"/>
-          <p:nvPr/>
-        </p:nvSpPr>
-        <p:spPr>
-          <a:xfrm>
-            <a:off x="843991" y="2508199"/>
-            <a:ext cx="9875520" cy="914400"/>
-          </a:xfrm>
-          <a:prstGeom prst="rect">
-            <a:avLst/>
-          </a:prstGeom>
-          <a:noFill/>
-        </p:spPr>
-        <p:txBody>
-          <a:bodyPr wrap="square">
-            <a:spAutoFit/>
-          </a:bodyPr>
-          <a:lstStyle/>
-          <a:p/>
-        </p:txBody>
-      </p:sp>
-      <p:sp>
-        <p:nvSpPr>
-          <p:cNvPr id="4" name="TextBox 3"/>
-          <p:cNvSpPr txBox="1"/>
-          <p:nvPr/>
-        </p:nvSpPr>
-        <p:spPr>
-          <a:xfrm>
-            <a:off x="411480" y="6510528"/>
-            <a:ext cx="9875520" cy="201168"/>
-          </a:xfrm>
-          <a:prstGeom prst="rect">
-            <a:avLst/>
-          </a:prstGeom>
-          <a:noFill/>
-        </p:spPr>
-        <p:txBody>
-          <a:bodyPr wrap="square">
-            <a:spAutoFit/>
-          </a:bodyPr>
-          <a:lstStyle/>
-          <a:p>
-            <a:r>
-              <a:rPr sz="800" b="0" u="none">
-                <a:solidFill>
-                  <a:srgbClr val="566070"/>
-                </a:solidFill>
-                <a:latin typeface="맑은 고딕"/>
-              </a:rPr>
-              <a:t>draft skeleton</a:t>
-            </a:r>
-          </a:p>
-        </p:txBody>
-      </p:sp>
-      <p:sp>
-        <p:nvSpPr>
-          <p:cNvPr id="5" name="TextBox 4"/>
-          <p:cNvSpPr txBox="1"/>
-          <p:nvPr/>
-        </p:nvSpPr>
-        <p:spPr>
-          <a:xfrm>
-            <a:off x="10607040" y="6510528"/>
-            <a:ext cx="1143000" cy="201168"/>
-          </a:xfrm>
-          <a:prstGeom prst="rect">
-            <a:avLst/>
-          </a:prstGeom>
-          <a:noFill/>
-        </p:spPr>
-        <p:txBody>
-          <a:bodyPr wrap="square">
-            <a:spAutoFit/>
-          </a:bodyPr>
-          <a:lstStyle/>
-          <a:p>
-            <a:pPr algn="r"/>
-            <a:r>
-              <a:rPr sz="800" b="0" u="none">
-                <a:solidFill>
-                  <a:srgbClr val="566070"/>
-                </a:solidFill>
-                <a:latin typeface="맑은 고딕"/>
-              </a:rPr>
-              <a:t>06</a:t>
-            </a:r>
-          </a:p>
-        </p:txBody>
-      </p:sp>
     </p:spTree>
   </p:cSld>
   <p:clrMapOvr>
@@ -14590,8 +13008,8 @@
         </p:nvSpPr>
         <p:spPr>
           <a:xfrm>
-            <a:off x="572414" y="411480"/>
-            <a:ext cx="10972800" cy="685800"/>
+            <a:off x="572414" y="356616"/>
+            <a:ext cx="11192256" cy="521207"/>
           </a:xfrm>
           <a:prstGeom prst="rect">
             <a:avLst/>
@@ -14624,7 +13042,7 @@
         </p:nvSpPr>
         <p:spPr>
           <a:xfrm>
-            <a:off x="572414" y="1208836"/>
+            <a:off x="572414" y="1874519"/>
             <a:ext cx="11193170" cy="1302105"/>
           </a:xfrm>
           <a:prstGeom prst="rect">
@@ -14683,75 +13101,6 @@
                 <a:latin typeface="맑은 고딕"/>
               </a:rPr>
               <a:t>공식자료가 “인내자본”을 말하는 이유도 이 산업이 긴 회수 기간과 대규모 선투자를 요구하기 때문이다.</a:t>
-            </a:r>
-          </a:p>
-        </p:txBody>
-      </p:sp>
-      <p:sp>
-        <p:nvSpPr>
-          <p:cNvPr id="4" name="TextBox 3"/>
-          <p:cNvSpPr txBox="1"/>
-          <p:nvPr/>
-        </p:nvSpPr>
-        <p:spPr>
-          <a:xfrm>
-            <a:off x="411480" y="6510528"/>
-            <a:ext cx="9875520" cy="201168"/>
-          </a:xfrm>
-          <a:prstGeom prst="rect">
-            <a:avLst/>
-          </a:prstGeom>
-          <a:noFill/>
-        </p:spPr>
-        <p:txBody>
-          <a:bodyPr wrap="square">
-            <a:spAutoFit/>
-          </a:bodyPr>
-          <a:lstStyle/>
-          <a:p>
-            <a:r>
-              <a:rPr sz="800" b="0" u="none">
-                <a:solidFill>
-                  <a:srgbClr val="566070"/>
-                </a:solidFill>
-                <a:latin typeface="맑은 고딕"/>
-              </a:rPr>
-              <a:t>needs_fact_check | before_broadcast</a:t>
-            </a:r>
-          </a:p>
-        </p:txBody>
-      </p:sp>
-      <p:sp>
-        <p:nvSpPr>
-          <p:cNvPr id="5" name="TextBox 4"/>
-          <p:cNvSpPr txBox="1"/>
-          <p:nvPr/>
-        </p:nvSpPr>
-        <p:spPr>
-          <a:xfrm>
-            <a:off x="10607040" y="6510528"/>
-            <a:ext cx="1143000" cy="201168"/>
-          </a:xfrm>
-          <a:prstGeom prst="rect">
-            <a:avLst/>
-          </a:prstGeom>
-          <a:noFill/>
-        </p:spPr>
-        <p:txBody>
-          <a:bodyPr wrap="square">
-            <a:spAutoFit/>
-          </a:bodyPr>
-          <a:lstStyle/>
-          <a:p>
-            <a:pPr algn="r"/>
-            <a:r>
-              <a:rPr sz="800" b="0" u="none">
-                <a:solidFill>
-                  <a:srgbClr val="566070"/>
-                </a:solidFill>
-                <a:latin typeface="맑은 고딕"/>
-              </a:rPr>
-              <a:t>07</a:t>
             </a:r>
           </a:p>
         </p:txBody>
@@ -14790,7 +13139,41 @@
         </p:nvSpPr>
         <p:spPr>
           <a:xfrm>
-            <a:off x="868680" y="502920"/>
+            <a:off x="572414" y="356616"/>
+            <a:ext cx="11192256" cy="521207"/>
+          </a:xfrm>
+          <a:prstGeom prst="rect">
+            <a:avLst/>
+          </a:prstGeom>
+          <a:noFill/>
+        </p:spPr>
+        <p:txBody>
+          <a:bodyPr wrap="square">
+            <a:spAutoFit/>
+          </a:bodyPr>
+          <a:lstStyle/>
+          <a:p>
+            <a:r>
+              <a:rPr sz="2800" b="1" u="none">
+                <a:solidFill>
+                  <a:srgbClr val="FF0000"/>
+                </a:solidFill>
+                <a:latin typeface="맑은 고딕"/>
+              </a:rPr>
+              <a:t>장기 투자에는 기다릴 수 있는 돈이 필요하다</a:t>
+            </a:r>
+          </a:p>
+        </p:txBody>
+      </p:sp>
+      <p:sp>
+        <p:nvSpPr>
+          <p:cNvPr id="3" name="TextBox 2"/>
+          <p:cNvSpPr txBox="1"/>
+          <p:nvPr/>
+        </p:nvSpPr>
+        <p:spPr>
+          <a:xfrm>
+            <a:off x="868680" y="1143000"/>
             <a:ext cx="10698480" cy="594360"/>
           </a:xfrm>
           <a:prstGeom prst="rect">
@@ -14812,21 +13195,21 @@
                 </a:solidFill>
                 <a:latin typeface="맑은 고딕"/>
               </a:rPr>
-              <a:t>장기 투자에는 기다릴 수 있는 돈이 필요하다</a:t>
-            </a:r>
-          </a:p>
-        </p:txBody>
-      </p:sp>
-      <p:sp>
-        <p:nvSpPr>
-          <p:cNvPr id="3" name="Rectangle 2"/>
+              <a:t>첨단산업 투자는 회수 기간이 길고 실패 가능성도 크다.</a:t>
+            </a:r>
+          </a:p>
+        </p:txBody>
+      </p:sp>
+      <p:sp>
+        <p:nvSpPr>
+          <p:cNvPr id="4" name="Rectangle 3"/>
           <p:cNvSpPr/>
           <p:nvPr/>
         </p:nvSpPr>
         <p:spPr>
           <a:xfrm>
-            <a:off x="914400" y="1234440"/>
-            <a:ext cx="10378440" cy="4434840"/>
+            <a:off x="914400" y="1828800"/>
+            <a:ext cx="10378440" cy="3840480"/>
           </a:xfrm>
           <a:prstGeom prst="rect">
             <a:avLst/>
@@ -14864,14 +13247,14 @@
       </p:sp>
       <p:sp>
         <p:nvSpPr>
-          <p:cNvPr id="4" name="TextBox 3"/>
+          <p:cNvPr id="5" name="TextBox 4"/>
           <p:cNvSpPr txBox="1"/>
           <p:nvPr/>
         </p:nvSpPr>
         <p:spPr>
           <a:xfrm>
-            <a:off x="1234440" y="1828800"/>
-            <a:ext cx="9692640" cy="2880360"/>
+            <a:off x="1234440" y="2423160"/>
+            <a:ext cx="9692640" cy="2514600"/>
           </a:xfrm>
           <a:prstGeom prst="rect">
             <a:avLst/>
@@ -14883,22 +13266,6 @@
             <a:spAutoFit/>
           </a:bodyPr>
           <a:lstStyle/>
-          <a:p>
-            <a:pPr>
-              <a:spcAft>
-                <a:spcPts val="800"/>
-              </a:spcAft>
-            </a:pPr>
-            <a:r>
-              <a:rPr sz="1800" b="1" u="none">
-                <a:solidFill>
-                  <a:srgbClr val="373737"/>
-                </a:solidFill>
-                <a:latin typeface="맑은 고딕"/>
-              </a:rPr>
-              <a:t>첨단산업 투자는 회수 기간이 길고 실패 가능성도 크다.</a:t>
-            </a:r>
-          </a:p>
           <a:p>
             <a:pPr>
               <a:spcAft>
@@ -14935,7 +13302,7 @@
       </p:sp>
       <p:sp>
         <p:nvSpPr>
-          <p:cNvPr id="5" name="TextBox 4"/>
+          <p:cNvPr id="6" name="TextBox 5"/>
           <p:cNvSpPr txBox="1"/>
           <p:nvPr/>
         </p:nvSpPr>
@@ -14964,75 +13331,6 @@
                 <a:latin typeface="맑은 고딕"/>
               </a:rPr>
               <a:t>(출처: www.korea.kr; speaker notes 참조)</a:t>
-            </a:r>
-          </a:p>
-        </p:txBody>
-      </p:sp>
-      <p:sp>
-        <p:nvSpPr>
-          <p:cNvPr id="6" name="TextBox 5"/>
-          <p:cNvSpPr txBox="1"/>
-          <p:nvPr/>
-        </p:nvSpPr>
-        <p:spPr>
-          <a:xfrm>
-            <a:off x="411480" y="6510528"/>
-            <a:ext cx="9875520" cy="201168"/>
-          </a:xfrm>
-          <a:prstGeom prst="rect">
-            <a:avLst/>
-          </a:prstGeom>
-          <a:noFill/>
-        </p:spPr>
-        <p:txBody>
-          <a:bodyPr wrap="square">
-            <a:spAutoFit/>
-          </a:bodyPr>
-          <a:lstStyle/>
-          <a:p>
-            <a:r>
-              <a:rPr sz="800" b="0" u="none">
-                <a:solidFill>
-                  <a:srgbClr val="566070"/>
-                </a:solidFill>
-                <a:latin typeface="맑은 고딕"/>
-              </a:rPr>
-              <a:t>needs_fact_check | before_broadcast</a:t>
-            </a:r>
-          </a:p>
-        </p:txBody>
-      </p:sp>
-      <p:sp>
-        <p:nvSpPr>
-          <p:cNvPr id="7" name="TextBox 6"/>
-          <p:cNvSpPr txBox="1"/>
-          <p:nvPr/>
-        </p:nvSpPr>
-        <p:spPr>
-          <a:xfrm>
-            <a:off x="10607040" y="6510528"/>
-            <a:ext cx="1143000" cy="201168"/>
-          </a:xfrm>
-          <a:prstGeom prst="rect">
-            <a:avLst/>
-          </a:prstGeom>
-          <a:noFill/>
-        </p:spPr>
-        <p:txBody>
-          <a:bodyPr wrap="square">
-            <a:spAutoFit/>
-          </a:bodyPr>
-          <a:lstStyle/>
-          <a:p>
-            <a:pPr algn="r"/>
-            <a:r>
-              <a:rPr sz="800" b="0" u="none">
-                <a:solidFill>
-                  <a:srgbClr val="566070"/>
-                </a:solidFill>
-                <a:latin typeface="맑은 고딕"/>
-              </a:rPr>
-              <a:t>08</a:t>
             </a:r>
           </a:p>
         </p:txBody>
@@ -15071,8 +13369,8 @@
         </p:nvSpPr>
         <p:spPr>
           <a:xfrm>
-            <a:off x="594360" y="502920"/>
-            <a:ext cx="10972800" cy="777240"/>
+            <a:off x="572414" y="356616"/>
+            <a:ext cx="11192256" cy="521207"/>
           </a:xfrm>
           <a:prstGeom prst="rect">
             <a:avLst/>
@@ -15105,7 +13403,7 @@
         </p:nvSpPr>
         <p:spPr>
           <a:xfrm>
-            <a:off x="731520" y="1600200"/>
+            <a:off x="731520" y="1417320"/>
             <a:ext cx="5257800" cy="4069080"/>
           </a:xfrm>
           <a:prstGeom prst="rect">
@@ -15150,7 +13448,7 @@
         </p:nvSpPr>
         <p:spPr>
           <a:xfrm>
-            <a:off x="6172200" y="1600200"/>
+            <a:off x="6172200" y="1417320"/>
             <a:ext cx="5257800" cy="4069080"/>
           </a:xfrm>
           <a:prstGeom prst="rect">
@@ -15195,7 +13493,7 @@
         </p:nvSpPr>
         <p:spPr>
           <a:xfrm>
-            <a:off x="960120" y="1874519"/>
+            <a:off x="960120" y="1691640"/>
             <a:ext cx="4800600" cy="3383280"/>
           </a:xfrm>
           <a:prstGeom prst="rect">
@@ -15250,7 +13548,7 @@
         </p:nvSpPr>
         <p:spPr>
           <a:xfrm>
-            <a:off x="6400800" y="1874519"/>
+            <a:off x="6400800" y="1691640"/>
             <a:ext cx="4800600" cy="3383280"/>
           </a:xfrm>
           <a:prstGeom prst="rect">
@@ -15277,75 +13575,6 @@
                 <a:latin typeface="맑은 고딕"/>
               </a:rPr>
               <a:t>위험가중자산과 자본규제가 있는 은행 입장에서는 이런 불확실성이 비용이 된다.</a:t>
-            </a:r>
-          </a:p>
-        </p:txBody>
-      </p:sp>
-      <p:sp>
-        <p:nvSpPr>
-          <p:cNvPr id="7" name="TextBox 6"/>
-          <p:cNvSpPr txBox="1"/>
-          <p:nvPr/>
-        </p:nvSpPr>
-        <p:spPr>
-          <a:xfrm>
-            <a:off x="411480" y="6510528"/>
-            <a:ext cx="9875520" cy="201168"/>
-          </a:xfrm>
-          <a:prstGeom prst="rect">
-            <a:avLst/>
-          </a:prstGeom>
-          <a:noFill/>
-        </p:spPr>
-        <p:txBody>
-          <a:bodyPr wrap="square">
-            <a:spAutoFit/>
-          </a:bodyPr>
-          <a:lstStyle/>
-          <a:p>
-            <a:r>
-              <a:rPr sz="800" b="0" u="none">
-                <a:solidFill>
-                  <a:srgbClr val="566070"/>
-                </a:solidFill>
-                <a:latin typeface="맑은 고딕"/>
-              </a:rPr>
-              <a:t>needs_fact_check | before_broadcast</a:t>
-            </a:r>
-          </a:p>
-        </p:txBody>
-      </p:sp>
-      <p:sp>
-        <p:nvSpPr>
-          <p:cNvPr id="8" name="TextBox 7"/>
-          <p:cNvSpPr txBox="1"/>
-          <p:nvPr/>
-        </p:nvSpPr>
-        <p:spPr>
-          <a:xfrm>
-            <a:off x="10607040" y="6510528"/>
-            <a:ext cx="1143000" cy="201168"/>
-          </a:xfrm>
-          <a:prstGeom prst="rect">
-            <a:avLst/>
-          </a:prstGeom>
-          <a:noFill/>
-        </p:spPr>
-        <p:txBody>
-          <a:bodyPr wrap="square">
-            <a:spAutoFit/>
-          </a:bodyPr>
-          <a:lstStyle/>
-          <a:p>
-            <a:pPr algn="r"/>
-            <a:r>
-              <a:rPr sz="800" b="0" u="none">
-                <a:solidFill>
-                  <a:srgbClr val="566070"/>
-                </a:solidFill>
-                <a:latin typeface="맑은 고딕"/>
-              </a:rPr>
-              <a:t>09</a:t>
             </a:r>
           </a:p>
         </p:txBody>

--- a/outputs/pptx/productive_finance_policy_styled_draft.pptx
+++ b/outputs/pptx/productive_finance_policy_styled_draft.pptx
@@ -570,6 +570,21 @@
           </a:p>
           <a:p>
             <a:r>
+              <a:t>proof_object_type: none</a:t>
+            </a:r>
+          </a:p>
+          <a:p>
+            <a:r>
+              <a:t>proof_object_required: False</a:t>
+            </a:r>
+          </a:p>
+          <a:p>
+            <a:r>
+              <a:t>proof_object_screen_position: none</a:t>
+            </a:r>
+          </a:p>
+          <a:p>
+            <a:r>
               <a:t>manual_placeholder_hidden: True</a:t>
             </a:r>
           </a:p>
@@ -685,6 +700,62 @@
           <a:p>
             <a:r>
               <a:t>  "prompt_if_ai_image": null</a:t>
+            </a:r>
+          </a:p>
+          <a:p>
+            <a:r>
+              <a:t>}</a:t>
+            </a:r>
+          </a:p>
+          <a:p/>
+          <a:p>
+            <a:r>
+              <a:t>proof_object:</a:t>
+            </a:r>
+          </a:p>
+          <a:p>
+            <a:r>
+              <a:t>{</a:t>
+            </a:r>
+          </a:p>
+          <a:p>
+            <a:r>
+              <a:t>  "type": "none",</a:t>
+            </a:r>
+          </a:p>
+          <a:p>
+            <a:r>
+              <a:t>  "required": false,</a:t>
+            </a:r>
+          </a:p>
+          <a:p>
+            <a:r>
+              <a:t>  "screen_position": "none",</a:t>
+            </a:r>
+          </a:p>
+          <a:p>
+            <a:r>
+              <a:t>  "display_label": "",</a:t>
+            </a:r>
+          </a:p>
+          <a:p>
+            <a:r>
+              <a:t>  "source_url": null,</a:t>
+            </a:r>
+          </a:p>
+          <a:p>
+            <a:r>
+              <a:t>  "image_url": null,</a:t>
+            </a:r>
+          </a:p>
+          <a:p>
+            <a:r>
+              <a:t>  "copyright_risk": false,</a:t>
+            </a:r>
+          </a:p>
+          <a:p>
+            <a:r>
+              <a:t>  "manual_insert_required": false</a:t>
             </a:r>
           </a:p>
           <a:p>
@@ -821,6 +892,21 @@
           </a:p>
           <a:p>
             <a:r>
+              <a:t>proof_object_type: diagram</a:t>
+            </a:r>
+          </a:p>
+          <a:p>
+            <a:r>
+              <a:t>proof_object_required: True</a:t>
+            </a:r>
+          </a:p>
+          <a:p>
+            <a:r>
+              <a:t>proof_object_screen_position: left_half</a:t>
+            </a:r>
+          </a:p>
+          <a:p>
+            <a:r>
               <a:t>manual_placeholder_hidden: False</a:t>
             </a:r>
           </a:p>
@@ -951,6 +1037,62 @@
           <a:p>
             <a:r>
               <a:t>  "prompt_if_ai_image": null</a:t>
+            </a:r>
+          </a:p>
+          <a:p>
+            <a:r>
+              <a:t>}</a:t>
+            </a:r>
+          </a:p>
+          <a:p/>
+          <a:p>
+            <a:r>
+              <a:t>proof_object:</a:t>
+            </a:r>
+          </a:p>
+          <a:p>
+            <a:r>
+              <a:t>{</a:t>
+            </a:r>
+          </a:p>
+          <a:p>
+            <a:r>
+              <a:t>  "type": "diagram",</a:t>
+            </a:r>
+          </a:p>
+          <a:p>
+            <a:r>
+              <a:t>  "required": true,</a:t>
+            </a:r>
+          </a:p>
+          <a:p>
+            <a:r>
+              <a:t>  "screen_position": "left_half",</a:t>
+            </a:r>
+          </a:p>
+          <a:p>
+            <a:r>
+              <a:t>  "display_label": "[도식]",</a:t>
+            </a:r>
+          </a:p>
+          <a:p>
+            <a:r>
+              <a:t>  "source_url": "https://www.fsc.go.kr/no010101/86834?curPage=2&amp;srchBeginDt=&amp;srchCtgry=&amp;srchEndDt=&amp;srchKey=&amp;srchText=",</a:t>
+            </a:r>
+          </a:p>
+          <a:p>
+            <a:r>
+              <a:t>  "image_url": null,</a:t>
+            </a:r>
+          </a:p>
+          <a:p>
+            <a:r>
+              <a:t>  "copyright_risk": false,</a:t>
+            </a:r>
+          </a:p>
+          <a:p>
+            <a:r>
+              <a:t>  "manual_insert_required": true</a:t>
             </a:r>
           </a:p>
           <a:p>
@@ -1102,6 +1244,21 @@
           </a:p>
           <a:p>
             <a:r>
+              <a:t>proof_object_type: diagram</a:t>
+            </a:r>
+          </a:p>
+          <a:p>
+            <a:r>
+              <a:t>proof_object_required: True</a:t>
+            </a:r>
+          </a:p>
+          <a:p>
+            <a:r>
+              <a:t>proof_object_screen_position: left_half</a:t>
+            </a:r>
+          </a:p>
+          <a:p>
+            <a:r>
               <a:t>manual_placeholder_hidden: False</a:t>
             </a:r>
           </a:p>
@@ -1232,6 +1389,62 @@
           <a:p>
             <a:r>
               <a:t>  "prompt_if_ai_image": null</a:t>
+            </a:r>
+          </a:p>
+          <a:p>
+            <a:r>
+              <a:t>}</a:t>
+            </a:r>
+          </a:p>
+          <a:p/>
+          <a:p>
+            <a:r>
+              <a:t>proof_object:</a:t>
+            </a:r>
+          </a:p>
+          <a:p>
+            <a:r>
+              <a:t>{</a:t>
+            </a:r>
+          </a:p>
+          <a:p>
+            <a:r>
+              <a:t>  "type": "diagram",</a:t>
+            </a:r>
+          </a:p>
+          <a:p>
+            <a:r>
+              <a:t>  "required": true,</a:t>
+            </a:r>
+          </a:p>
+          <a:p>
+            <a:r>
+              <a:t>  "screen_position": "left_half",</a:t>
+            </a:r>
+          </a:p>
+          <a:p>
+            <a:r>
+              <a:t>  "display_label": "[도식]",</a:t>
+            </a:r>
+          </a:p>
+          <a:p>
+            <a:r>
+              <a:t>  "source_url": null,</a:t>
+            </a:r>
+          </a:p>
+          <a:p>
+            <a:r>
+              <a:t>  "image_url": null,</a:t>
+            </a:r>
+          </a:p>
+          <a:p>
+            <a:r>
+              <a:t>  "copyright_risk": false,</a:t>
+            </a:r>
+          </a:p>
+          <a:p>
+            <a:r>
+              <a:t>  "manual_insert_required": true</a:t>
             </a:r>
           </a:p>
           <a:p>
@@ -1378,6 +1591,21 @@
           </a:p>
           <a:p>
             <a:r>
+              <a:t>proof_object_type: none</a:t>
+            </a:r>
+          </a:p>
+          <a:p>
+            <a:r>
+              <a:t>proof_object_required: False</a:t>
+            </a:r>
+          </a:p>
+          <a:p>
+            <a:r>
+              <a:t>proof_object_screen_position: none</a:t>
+            </a:r>
+          </a:p>
+          <a:p>
+            <a:r>
               <a:t>manual_placeholder_hidden: True</a:t>
             </a:r>
           </a:p>
@@ -1478,6 +1706,62 @@
           <a:p>
             <a:r>
               <a:t>  "prompt_if_ai_image": null</a:t>
+            </a:r>
+          </a:p>
+          <a:p>
+            <a:r>
+              <a:t>}</a:t>
+            </a:r>
+          </a:p>
+          <a:p/>
+          <a:p>
+            <a:r>
+              <a:t>proof_object:</a:t>
+            </a:r>
+          </a:p>
+          <a:p>
+            <a:r>
+              <a:t>{</a:t>
+            </a:r>
+          </a:p>
+          <a:p>
+            <a:r>
+              <a:t>  "type": "none",</a:t>
+            </a:r>
+          </a:p>
+          <a:p>
+            <a:r>
+              <a:t>  "required": false,</a:t>
+            </a:r>
+          </a:p>
+          <a:p>
+            <a:r>
+              <a:t>  "screen_position": "none",</a:t>
+            </a:r>
+          </a:p>
+          <a:p>
+            <a:r>
+              <a:t>  "display_label": "",</a:t>
+            </a:r>
+          </a:p>
+          <a:p>
+            <a:r>
+              <a:t>  "source_url": null,</a:t>
+            </a:r>
+          </a:p>
+          <a:p>
+            <a:r>
+              <a:t>  "image_url": null,</a:t>
+            </a:r>
+          </a:p>
+          <a:p>
+            <a:r>
+              <a:t>  "copyright_risk": false,</a:t>
+            </a:r>
+          </a:p>
+          <a:p>
+            <a:r>
+              <a:t>  "manual_insert_required": false</a:t>
             </a:r>
           </a:p>
           <a:p>
@@ -1614,6 +1898,21 @@
           </a:p>
           <a:p>
             <a:r>
+              <a:t>proof_object_type: none</a:t>
+            </a:r>
+          </a:p>
+          <a:p>
+            <a:r>
+              <a:t>proof_object_required: False</a:t>
+            </a:r>
+          </a:p>
+          <a:p>
+            <a:r>
+              <a:t>proof_object_screen_position: none</a:t>
+            </a:r>
+          </a:p>
+          <a:p>
+            <a:r>
               <a:t>manual_placeholder_hidden: True</a:t>
             </a:r>
           </a:p>
@@ -1749,6 +2048,62 @@
           <a:p>
             <a:r>
               <a:t>  "prompt_if_ai_image": null</a:t>
+            </a:r>
+          </a:p>
+          <a:p>
+            <a:r>
+              <a:t>}</a:t>
+            </a:r>
+          </a:p>
+          <a:p/>
+          <a:p>
+            <a:r>
+              <a:t>proof_object:</a:t>
+            </a:r>
+          </a:p>
+          <a:p>
+            <a:r>
+              <a:t>{</a:t>
+            </a:r>
+          </a:p>
+          <a:p>
+            <a:r>
+              <a:t>  "type": "none",</a:t>
+            </a:r>
+          </a:p>
+          <a:p>
+            <a:r>
+              <a:t>  "required": false,</a:t>
+            </a:r>
+          </a:p>
+          <a:p>
+            <a:r>
+              <a:t>  "screen_position": "none",</a:t>
+            </a:r>
+          </a:p>
+          <a:p>
+            <a:r>
+              <a:t>  "display_label": "",</a:t>
+            </a:r>
+          </a:p>
+          <a:p>
+            <a:r>
+              <a:t>  "source_url": "https://www.fsc.go.kr/no010101/86834?curPage=2&amp;srchBeginDt=&amp;srchCtgry=&amp;srchEndDt=&amp;srchKey=&amp;srchText=",</a:t>
+            </a:r>
+          </a:p>
+          <a:p>
+            <a:r>
+              <a:t>  "image_url": null,</a:t>
+            </a:r>
+          </a:p>
+          <a:p>
+            <a:r>
+              <a:t>  "copyright_risk": false,</a:t>
+            </a:r>
+          </a:p>
+          <a:p>
+            <a:r>
+              <a:t>  "manual_insert_required": false</a:t>
             </a:r>
           </a:p>
           <a:p>
@@ -1905,6 +2260,21 @@
           </a:p>
           <a:p>
             <a:r>
+              <a:t>proof_object_type: none</a:t>
+            </a:r>
+          </a:p>
+          <a:p>
+            <a:r>
+              <a:t>proof_object_required: False</a:t>
+            </a:r>
+          </a:p>
+          <a:p>
+            <a:r>
+              <a:t>proof_object_screen_position: none</a:t>
+            </a:r>
+          </a:p>
+          <a:p>
+            <a:r>
               <a:t>manual_placeholder_hidden: True</a:t>
             </a:r>
           </a:p>
@@ -2035,6 +2405,62 @@
           <a:p>
             <a:r>
               <a:t>  "prompt_if_ai_image": null</a:t>
+            </a:r>
+          </a:p>
+          <a:p>
+            <a:r>
+              <a:t>}</a:t>
+            </a:r>
+          </a:p>
+          <a:p/>
+          <a:p>
+            <a:r>
+              <a:t>proof_object:</a:t>
+            </a:r>
+          </a:p>
+          <a:p>
+            <a:r>
+              <a:t>{</a:t>
+            </a:r>
+          </a:p>
+          <a:p>
+            <a:r>
+              <a:t>  "type": "none",</a:t>
+            </a:r>
+          </a:p>
+          <a:p>
+            <a:r>
+              <a:t>  "required": false,</a:t>
+            </a:r>
+          </a:p>
+          <a:p>
+            <a:r>
+              <a:t>  "screen_position": "none",</a:t>
+            </a:r>
+          </a:p>
+          <a:p>
+            <a:r>
+              <a:t>  "display_label": "",</a:t>
+            </a:r>
+          </a:p>
+          <a:p>
+            <a:r>
+              <a:t>  "source_url": "https://www.korea.kr/news/policyNewsView.do?newsId=148963908&amp;pWise=main&amp;pWiseMain=R3",</a:t>
+            </a:r>
+          </a:p>
+          <a:p>
+            <a:r>
+              <a:t>  "image_url": null,</a:t>
+            </a:r>
+          </a:p>
+          <a:p>
+            <a:r>
+              <a:t>  "copyright_risk": false,</a:t>
+            </a:r>
+          </a:p>
+          <a:p>
+            <a:r>
+              <a:t>  "manual_insert_required": false</a:t>
             </a:r>
           </a:p>
           <a:p>
@@ -2186,6 +2612,21 @@
           </a:p>
           <a:p>
             <a:r>
+              <a:t>proof_object_type: article_quote</a:t>
+            </a:r>
+          </a:p>
+          <a:p>
+            <a:r>
+              <a:t>proof_object_required: True</a:t>
+            </a:r>
+          </a:p>
+          <a:p>
+            <a:r>
+              <a:t>proof_object_screen_position: left_half</a:t>
+            </a:r>
+          </a:p>
+          <a:p>
+            <a:r>
               <a:t>manual_placeholder_hidden: True</a:t>
             </a:r>
           </a:p>
@@ -2321,6 +2762,62 @@
           <a:p>
             <a:r>
               <a:t>  "prompt_if_ai_image": null</a:t>
+            </a:r>
+          </a:p>
+          <a:p>
+            <a:r>
+              <a:t>}</a:t>
+            </a:r>
+          </a:p>
+          <a:p/>
+          <a:p>
+            <a:r>
+              <a:t>proof_object:</a:t>
+            </a:r>
+          </a:p>
+          <a:p>
+            <a:r>
+              <a:t>{</a:t>
+            </a:r>
+          </a:p>
+          <a:p>
+            <a:r>
+              <a:t>  "type": "article_quote",</a:t>
+            </a:r>
+          </a:p>
+          <a:p>
+            <a:r>
+              <a:t>  "required": true,</a:t>
+            </a:r>
+          </a:p>
+          <a:p>
+            <a:r>
+              <a:t>  "screen_position": "left_half",</a:t>
+            </a:r>
+          </a:p>
+          <a:p>
+            <a:r>
+              <a:t>  "display_label": "[기사 인용]",</a:t>
+            </a:r>
+          </a:p>
+          <a:p>
+            <a:r>
+              <a:t>  "source_url": "https://www.korea.kr/news/policyNewsView.do?newsId=148963908&amp;pWise=main&amp;pWiseMain=R3",</a:t>
+            </a:r>
+          </a:p>
+          <a:p>
+            <a:r>
+              <a:t>  "image_url": null,</a:t>
+            </a:r>
+          </a:p>
+          <a:p>
+            <a:r>
+              <a:t>  "copyright_risk": false,</a:t>
+            </a:r>
+          </a:p>
+          <a:p>
+            <a:r>
+              <a:t>  "manual_insert_required": true</a:t>
             </a:r>
           </a:p>
           <a:p>
@@ -2477,6 +2974,21 @@
           </a:p>
           <a:p>
             <a:r>
+              <a:t>proof_object_type: diagram</a:t>
+            </a:r>
+          </a:p>
+          <a:p>
+            <a:r>
+              <a:t>proof_object_required: True</a:t>
+            </a:r>
+          </a:p>
+          <a:p>
+            <a:r>
+              <a:t>proof_object_screen_position: left_half</a:t>
+            </a:r>
+          </a:p>
+          <a:p>
+            <a:r>
               <a:t>manual_placeholder_hidden: False</a:t>
             </a:r>
           </a:p>
@@ -2612,6 +3124,62 @@
           <a:p>
             <a:r>
               <a:t>  "prompt_if_ai_image": null</a:t>
+            </a:r>
+          </a:p>
+          <a:p>
+            <a:r>
+              <a:t>}</a:t>
+            </a:r>
+          </a:p>
+          <a:p/>
+          <a:p>
+            <a:r>
+              <a:t>proof_object:</a:t>
+            </a:r>
+          </a:p>
+          <a:p>
+            <a:r>
+              <a:t>{</a:t>
+            </a:r>
+          </a:p>
+          <a:p>
+            <a:r>
+              <a:t>  "type": "diagram",</a:t>
+            </a:r>
+          </a:p>
+          <a:p>
+            <a:r>
+              <a:t>  "required": true,</a:t>
+            </a:r>
+          </a:p>
+          <a:p>
+            <a:r>
+              <a:t>  "screen_position": "left_half",</a:t>
+            </a:r>
+          </a:p>
+          <a:p>
+            <a:r>
+              <a:t>  "display_label": "[도식]",</a:t>
+            </a:r>
+          </a:p>
+          <a:p>
+            <a:r>
+              <a:t>  "source_url": "https://m.korea.kr/news/policyNewsView.do?newsId=148956795",</a:t>
+            </a:r>
+          </a:p>
+          <a:p>
+            <a:r>
+              <a:t>  "image_url": null,</a:t>
+            </a:r>
+          </a:p>
+          <a:p>
+            <a:r>
+              <a:t>  "copyright_risk": false,</a:t>
+            </a:r>
+          </a:p>
+          <a:p>
+            <a:r>
+              <a:t>  "manual_insert_required": true</a:t>
             </a:r>
           </a:p>
           <a:p>
@@ -2768,6 +3336,21 @@
           </a:p>
           <a:p>
             <a:r>
+              <a:t>proof_object_type: diagram</a:t>
+            </a:r>
+          </a:p>
+          <a:p>
+            <a:r>
+              <a:t>proof_object_required: True</a:t>
+            </a:r>
+          </a:p>
+          <a:p>
+            <a:r>
+              <a:t>proof_object_screen_position: left_half</a:t>
+            </a:r>
+          </a:p>
+          <a:p>
+            <a:r>
               <a:t>manual_placeholder_hidden: False</a:t>
             </a:r>
           </a:p>
@@ -2903,6 +3486,62 @@
           <a:p>
             <a:r>
               <a:t>  "prompt_if_ai_image": null</a:t>
+            </a:r>
+          </a:p>
+          <a:p>
+            <a:r>
+              <a:t>}</a:t>
+            </a:r>
+          </a:p>
+          <a:p/>
+          <a:p>
+            <a:r>
+              <a:t>proof_object:</a:t>
+            </a:r>
+          </a:p>
+          <a:p>
+            <a:r>
+              <a:t>{</a:t>
+            </a:r>
+          </a:p>
+          <a:p>
+            <a:r>
+              <a:t>  "type": "diagram",</a:t>
+            </a:r>
+          </a:p>
+          <a:p>
+            <a:r>
+              <a:t>  "required": true,</a:t>
+            </a:r>
+          </a:p>
+          <a:p>
+            <a:r>
+              <a:t>  "screen_position": "left_half",</a:t>
+            </a:r>
+          </a:p>
+          <a:p>
+            <a:r>
+              <a:t>  "display_label": "[도식]",</a:t>
+            </a:r>
+          </a:p>
+          <a:p>
+            <a:r>
+              <a:t>  "source_url": "https://www.investchosun.com/m/article.html?contid=2026042180102",</a:t>
+            </a:r>
+          </a:p>
+          <a:p>
+            <a:r>
+              <a:t>  "image_url": null,</a:t>
+            </a:r>
+          </a:p>
+          <a:p>
+            <a:r>
+              <a:t>  "copyright_risk": false,</a:t>
+            </a:r>
+          </a:p>
+          <a:p>
+            <a:r>
+              <a:t>  "manual_insert_required": true</a:t>
             </a:r>
           </a:p>
           <a:p>
@@ -3059,6 +3698,21 @@
           </a:p>
           <a:p>
             <a:r>
+              <a:t>proof_object_type: diagram</a:t>
+            </a:r>
+          </a:p>
+          <a:p>
+            <a:r>
+              <a:t>proof_object_required: True</a:t>
+            </a:r>
+          </a:p>
+          <a:p>
+            <a:r>
+              <a:t>proof_object_screen_position: left_half</a:t>
+            </a:r>
+          </a:p>
+          <a:p>
+            <a:r>
               <a:t>manual_placeholder_hidden: False</a:t>
             </a:r>
           </a:p>
@@ -3194,6 +3848,62 @@
           <a:p>
             <a:r>
               <a:t>  "prompt_if_ai_image": null</a:t>
+            </a:r>
+          </a:p>
+          <a:p>
+            <a:r>
+              <a:t>}</a:t>
+            </a:r>
+          </a:p>
+          <a:p/>
+          <a:p>
+            <a:r>
+              <a:t>proof_object:</a:t>
+            </a:r>
+          </a:p>
+          <a:p>
+            <a:r>
+              <a:t>{</a:t>
+            </a:r>
+          </a:p>
+          <a:p>
+            <a:r>
+              <a:t>  "type": "diagram",</a:t>
+            </a:r>
+          </a:p>
+          <a:p>
+            <a:r>
+              <a:t>  "required": true,</a:t>
+            </a:r>
+          </a:p>
+          <a:p>
+            <a:r>
+              <a:t>  "screen_position": "left_half",</a:t>
+            </a:r>
+          </a:p>
+          <a:p>
+            <a:r>
+              <a:t>  "display_label": "[도식]",</a:t>
+            </a:r>
+          </a:p>
+          <a:p>
+            <a:r>
+              <a:t>  "source_url": "https://www.korea.kr/news/policyNewsView.do?newsId=148963908&amp;pWise=main&amp;pWiseMain=R3",</a:t>
+            </a:r>
+          </a:p>
+          <a:p>
+            <a:r>
+              <a:t>  "image_url": null,</a:t>
+            </a:r>
+          </a:p>
+          <a:p>
+            <a:r>
+              <a:t>  "copyright_risk": false,</a:t>
+            </a:r>
+          </a:p>
+          <a:p>
+            <a:r>
+              <a:t>  "manual_insert_required": true</a:t>
             </a:r>
           </a:p>
           <a:p>
@@ -3350,6 +4060,21 @@
           </a:p>
           <a:p>
             <a:r>
+              <a:t>proof_object_type: none</a:t>
+            </a:r>
+          </a:p>
+          <a:p>
+            <a:r>
+              <a:t>proof_object_required: False</a:t>
+            </a:r>
+          </a:p>
+          <a:p>
+            <a:r>
+              <a:t>proof_object_screen_position: none</a:t>
+            </a:r>
+          </a:p>
+          <a:p>
+            <a:r>
               <a:t>manual_placeholder_hidden: True</a:t>
             </a:r>
           </a:p>
@@ -3450,6 +4175,62 @@
           <a:p>
             <a:r>
               <a:t>  "prompt_if_ai_image": null</a:t>
+            </a:r>
+          </a:p>
+          <a:p>
+            <a:r>
+              <a:t>}</a:t>
+            </a:r>
+          </a:p>
+          <a:p/>
+          <a:p>
+            <a:r>
+              <a:t>proof_object:</a:t>
+            </a:r>
+          </a:p>
+          <a:p>
+            <a:r>
+              <a:t>{</a:t>
+            </a:r>
+          </a:p>
+          <a:p>
+            <a:r>
+              <a:t>  "type": "none",</a:t>
+            </a:r>
+          </a:p>
+          <a:p>
+            <a:r>
+              <a:t>  "required": false,</a:t>
+            </a:r>
+          </a:p>
+          <a:p>
+            <a:r>
+              <a:t>  "screen_position": "none",</a:t>
+            </a:r>
+          </a:p>
+          <a:p>
+            <a:r>
+              <a:t>  "display_label": "",</a:t>
+            </a:r>
+          </a:p>
+          <a:p>
+            <a:r>
+              <a:t>  "source_url": null,</a:t>
+            </a:r>
+          </a:p>
+          <a:p>
+            <a:r>
+              <a:t>  "image_url": null,</a:t>
+            </a:r>
+          </a:p>
+          <a:p>
+            <a:r>
+              <a:t>  "copyright_risk": false,</a:t>
+            </a:r>
+          </a:p>
+          <a:p>
+            <a:r>
+              <a:t>  "manual_insert_required": false</a:t>
             </a:r>
           </a:p>
           <a:p>
@@ -3586,6 +4367,21 @@
           </a:p>
           <a:p>
             <a:r>
+              <a:t>proof_object_type: none</a:t>
+            </a:r>
+          </a:p>
+          <a:p>
+            <a:r>
+              <a:t>proof_object_required: False</a:t>
+            </a:r>
+          </a:p>
+          <a:p>
+            <a:r>
+              <a:t>proof_object_screen_position: none</a:t>
+            </a:r>
+          </a:p>
+          <a:p>
+            <a:r>
               <a:t>manual_placeholder_hidden: True</a:t>
             </a:r>
           </a:p>
@@ -3716,6 +4512,62 @@
           <a:p>
             <a:r>
               <a:t>  "prompt_if_ai_image": null</a:t>
+            </a:r>
+          </a:p>
+          <a:p>
+            <a:r>
+              <a:t>}</a:t>
+            </a:r>
+          </a:p>
+          <a:p/>
+          <a:p>
+            <a:r>
+              <a:t>proof_object:</a:t>
+            </a:r>
+          </a:p>
+          <a:p>
+            <a:r>
+              <a:t>{</a:t>
+            </a:r>
+          </a:p>
+          <a:p>
+            <a:r>
+              <a:t>  "type": "none",</a:t>
+            </a:r>
+          </a:p>
+          <a:p>
+            <a:r>
+              <a:t>  "required": false,</a:t>
+            </a:r>
+          </a:p>
+          <a:p>
+            <a:r>
+              <a:t>  "screen_position": "none",</a:t>
+            </a:r>
+          </a:p>
+          <a:p>
+            <a:r>
+              <a:t>  "display_label": "",</a:t>
+            </a:r>
+          </a:p>
+          <a:p>
+            <a:r>
+              <a:t>  "source_url": "https://news.einfomax.co.kr/news/articleView.html?idxno=4415444",</a:t>
+            </a:r>
+          </a:p>
+          <a:p>
+            <a:r>
+              <a:t>  "image_url": null,</a:t>
+            </a:r>
+          </a:p>
+          <a:p>
+            <a:r>
+              <a:t>  "copyright_risk": false,</a:t>
+            </a:r>
+          </a:p>
+          <a:p>
+            <a:r>
+              <a:t>  "manual_insert_required": false</a:t>
             </a:r>
           </a:p>
           <a:p>
@@ -3867,6 +4719,21 @@
           </a:p>
           <a:p>
             <a:r>
+              <a:t>proof_object_type: none</a:t>
+            </a:r>
+          </a:p>
+          <a:p>
+            <a:r>
+              <a:t>proof_object_required: False</a:t>
+            </a:r>
+          </a:p>
+          <a:p>
+            <a:r>
+              <a:t>proof_object_screen_position: none</a:t>
+            </a:r>
+          </a:p>
+          <a:p>
+            <a:r>
               <a:t>manual_placeholder_hidden: True</a:t>
             </a:r>
           </a:p>
@@ -3997,6 +4864,62 @@
           <a:p>
             <a:r>
               <a:t>  "prompt_if_ai_image": null</a:t>
+            </a:r>
+          </a:p>
+          <a:p>
+            <a:r>
+              <a:t>}</a:t>
+            </a:r>
+          </a:p>
+          <a:p/>
+          <a:p>
+            <a:r>
+              <a:t>proof_object:</a:t>
+            </a:r>
+          </a:p>
+          <a:p>
+            <a:r>
+              <a:t>{</a:t>
+            </a:r>
+          </a:p>
+          <a:p>
+            <a:r>
+              <a:t>  "type": "none",</a:t>
+            </a:r>
+          </a:p>
+          <a:p>
+            <a:r>
+              <a:t>  "required": false,</a:t>
+            </a:r>
+          </a:p>
+          <a:p>
+            <a:r>
+              <a:t>  "screen_position": "none",</a:t>
+            </a:r>
+          </a:p>
+          <a:p>
+            <a:r>
+              <a:t>  "display_label": "",</a:t>
+            </a:r>
+          </a:p>
+          <a:p>
+            <a:r>
+              <a:t>  "source_url": "https://www.bis.org/bcbs/basel3.htm",</a:t>
+            </a:r>
+          </a:p>
+          <a:p>
+            <a:r>
+              <a:t>  "image_url": null,</a:t>
+            </a:r>
+          </a:p>
+          <a:p>
+            <a:r>
+              <a:t>  "copyright_risk": false,</a:t>
+            </a:r>
+          </a:p>
+          <a:p>
+            <a:r>
+              <a:t>  "manual_insert_required": false</a:t>
             </a:r>
           </a:p>
           <a:p>
@@ -4148,6 +5071,21 @@
           </a:p>
           <a:p>
             <a:r>
+              <a:t>proof_object_type: diagram</a:t>
+            </a:r>
+          </a:p>
+          <a:p>
+            <a:r>
+              <a:t>proof_object_required: True</a:t>
+            </a:r>
+          </a:p>
+          <a:p>
+            <a:r>
+              <a:t>proof_object_screen_position: left_half</a:t>
+            </a:r>
+          </a:p>
+          <a:p>
+            <a:r>
               <a:t>manual_placeholder_hidden: False</a:t>
             </a:r>
           </a:p>
@@ -4268,6 +5206,62 @@
           <a:p>
             <a:r>
               <a:t>  "prompt_if_ai_image": null</a:t>
+            </a:r>
+          </a:p>
+          <a:p>
+            <a:r>
+              <a:t>}</a:t>
+            </a:r>
+          </a:p>
+          <a:p/>
+          <a:p>
+            <a:r>
+              <a:t>proof_object:</a:t>
+            </a:r>
+          </a:p>
+          <a:p>
+            <a:r>
+              <a:t>{</a:t>
+            </a:r>
+          </a:p>
+          <a:p>
+            <a:r>
+              <a:t>  "type": "diagram",</a:t>
+            </a:r>
+          </a:p>
+          <a:p>
+            <a:r>
+              <a:t>  "required": true,</a:t>
+            </a:r>
+          </a:p>
+          <a:p>
+            <a:r>
+              <a:t>  "screen_position": "left_half",</a:t>
+            </a:r>
+          </a:p>
+          <a:p>
+            <a:r>
+              <a:t>  "display_label": "[도식]",</a:t>
+            </a:r>
+          </a:p>
+          <a:p>
+            <a:r>
+              <a:t>  "source_url": null,</a:t>
+            </a:r>
+          </a:p>
+          <a:p>
+            <a:r>
+              <a:t>  "image_url": null,</a:t>
+            </a:r>
+          </a:p>
+          <a:p>
+            <a:r>
+              <a:t>  "copyright_risk": false,</a:t>
+            </a:r>
+          </a:p>
+          <a:p>
+            <a:r>
+              <a:t>  "manual_insert_required": true</a:t>
             </a:r>
           </a:p>
           <a:p>
@@ -4404,6 +5398,21 @@
           </a:p>
           <a:p>
             <a:r>
+              <a:t>proof_object_type: none</a:t>
+            </a:r>
+          </a:p>
+          <a:p>
+            <a:r>
+              <a:t>proof_object_required: False</a:t>
+            </a:r>
+          </a:p>
+          <a:p>
+            <a:r>
+              <a:t>proof_object_screen_position: none</a:t>
+            </a:r>
+          </a:p>
+          <a:p>
+            <a:r>
               <a:t>manual_placeholder_hidden: True</a:t>
             </a:r>
           </a:p>
@@ -4539,6 +5548,62 @@
           <a:p>
             <a:r>
               <a:t>  "prompt_if_ai_image": null</a:t>
+            </a:r>
+          </a:p>
+          <a:p>
+            <a:r>
+              <a:t>}</a:t>
+            </a:r>
+          </a:p>
+          <a:p/>
+          <a:p>
+            <a:r>
+              <a:t>proof_object:</a:t>
+            </a:r>
+          </a:p>
+          <a:p>
+            <a:r>
+              <a:t>{</a:t>
+            </a:r>
+          </a:p>
+          <a:p>
+            <a:r>
+              <a:t>  "type": "none",</a:t>
+            </a:r>
+          </a:p>
+          <a:p>
+            <a:r>
+              <a:t>  "required": false,</a:t>
+            </a:r>
+          </a:p>
+          <a:p>
+            <a:r>
+              <a:t>  "screen_position": "none",</a:t>
+            </a:r>
+          </a:p>
+          <a:p>
+            <a:r>
+              <a:t>  "display_label": "",</a:t>
+            </a:r>
+          </a:p>
+          <a:p>
+            <a:r>
+              <a:t>  "source_url": "https://www.fsc.go.kr/no010101/86834?curPage=2&amp;srchBeginDt=&amp;srchCtgry=&amp;srchEndDt=&amp;srchKey=&amp;srchText=",</a:t>
+            </a:r>
+          </a:p>
+          <a:p>
+            <a:r>
+              <a:t>  "image_url": null,</a:t>
+            </a:r>
+          </a:p>
+          <a:p>
+            <a:r>
+              <a:t>  "copyright_risk": false,</a:t>
+            </a:r>
+          </a:p>
+          <a:p>
+            <a:r>
+              <a:t>  "manual_insert_required": false</a:t>
             </a:r>
           </a:p>
           <a:p>
@@ -4695,6 +5760,21 @@
           </a:p>
           <a:p>
             <a:r>
+              <a:t>proof_object_type: none</a:t>
+            </a:r>
+          </a:p>
+          <a:p>
+            <a:r>
+              <a:t>proof_object_required: False</a:t>
+            </a:r>
+          </a:p>
+          <a:p>
+            <a:r>
+              <a:t>proof_object_screen_position: none</a:t>
+            </a:r>
+          </a:p>
+          <a:p>
+            <a:r>
               <a:t>manual_placeholder_hidden: False</a:t>
             </a:r>
           </a:p>
@@ -4840,6 +5920,62 @@
           <a:p>
             <a:r>
               <a:t>  "prompt_if_ai_image": null</a:t>
+            </a:r>
+          </a:p>
+          <a:p>
+            <a:r>
+              <a:t>}</a:t>
+            </a:r>
+          </a:p>
+          <a:p/>
+          <a:p>
+            <a:r>
+              <a:t>proof_object:</a:t>
+            </a:r>
+          </a:p>
+          <a:p>
+            <a:r>
+              <a:t>{</a:t>
+            </a:r>
+          </a:p>
+          <a:p>
+            <a:r>
+              <a:t>  "type": "none",</a:t>
+            </a:r>
+          </a:p>
+          <a:p>
+            <a:r>
+              <a:t>  "required": false,</a:t>
+            </a:r>
+          </a:p>
+          <a:p>
+            <a:r>
+              <a:t>  "screen_position": "none",</a:t>
+            </a:r>
+          </a:p>
+          <a:p>
+            <a:r>
+              <a:t>  "display_label": "",</a:t>
+            </a:r>
+          </a:p>
+          <a:p>
+            <a:r>
+              <a:t>  "source_url": "https://www.fsc.go.kr/no010101/86834?curPage=2&amp;srchBeginDt=&amp;srchCtgry=&amp;srchEndDt=&amp;srchKey=&amp;srchText=",</a:t>
+            </a:r>
+          </a:p>
+          <a:p>
+            <a:r>
+              <a:t>  "image_url": null,</a:t>
+            </a:r>
+          </a:p>
+          <a:p>
+            <a:r>
+              <a:t>  "copyright_risk": false,</a:t>
+            </a:r>
+          </a:p>
+          <a:p>
+            <a:r>
+              <a:t>  "manual_insert_required": false</a:t>
             </a:r>
           </a:p>
           <a:p>
@@ -5022,6 +6158,21 @@
           </a:p>
           <a:p>
             <a:r>
+              <a:t>proof_object_type: none</a:t>
+            </a:r>
+          </a:p>
+          <a:p>
+            <a:r>
+              <a:t>proof_object_required: False</a:t>
+            </a:r>
+          </a:p>
+          <a:p>
+            <a:r>
+              <a:t>proof_object_screen_position: none</a:t>
+            </a:r>
+          </a:p>
+          <a:p>
+            <a:r>
               <a:t>manual_placeholder_hidden: False</a:t>
             </a:r>
           </a:p>
@@ -5167,6 +6318,62 @@
           <a:p>
             <a:r>
               <a:t>  "prompt_if_ai_image": null</a:t>
+            </a:r>
+          </a:p>
+          <a:p>
+            <a:r>
+              <a:t>}</a:t>
+            </a:r>
+          </a:p>
+          <a:p/>
+          <a:p>
+            <a:r>
+              <a:t>proof_object:</a:t>
+            </a:r>
+          </a:p>
+          <a:p>
+            <a:r>
+              <a:t>{</a:t>
+            </a:r>
+          </a:p>
+          <a:p>
+            <a:r>
+              <a:t>  "type": "none",</a:t>
+            </a:r>
+          </a:p>
+          <a:p>
+            <a:r>
+              <a:t>  "required": false,</a:t>
+            </a:r>
+          </a:p>
+          <a:p>
+            <a:r>
+              <a:t>  "screen_position": "none",</a:t>
+            </a:r>
+          </a:p>
+          <a:p>
+            <a:r>
+              <a:t>  "display_label": "",</a:t>
+            </a:r>
+          </a:p>
+          <a:p>
+            <a:r>
+              <a:t>  "source_url": "https://www.fsc.go.kr/no010101/86834?curPage=2&amp;srchBeginDt=&amp;srchCtgry=&amp;srchEndDt=&amp;srchKey=&amp;srchText=",</a:t>
+            </a:r>
+          </a:p>
+          <a:p>
+            <a:r>
+              <a:t>  "image_url": null,</a:t>
+            </a:r>
+          </a:p>
+          <a:p>
+            <a:r>
+              <a:t>  "copyright_risk": false,</a:t>
+            </a:r>
+          </a:p>
+          <a:p>
+            <a:r>
+              <a:t>  "manual_insert_required": false</a:t>
             </a:r>
           </a:p>
           <a:p>
@@ -5359,6 +6566,21 @@
           </a:p>
           <a:p>
             <a:r>
+              <a:t>proof_object_type: none</a:t>
+            </a:r>
+          </a:p>
+          <a:p>
+            <a:r>
+              <a:t>proof_object_required: False</a:t>
+            </a:r>
+          </a:p>
+          <a:p>
+            <a:r>
+              <a:t>proof_object_screen_position: none</a:t>
+            </a:r>
+          </a:p>
+          <a:p>
+            <a:r>
               <a:t>manual_placeholder_hidden: True</a:t>
             </a:r>
           </a:p>
@@ -5489,6 +6711,62 @@
           <a:p>
             <a:r>
               <a:t>  "prompt_if_ai_image": null</a:t>
+            </a:r>
+          </a:p>
+          <a:p>
+            <a:r>
+              <a:t>}</a:t>
+            </a:r>
+          </a:p>
+          <a:p/>
+          <a:p>
+            <a:r>
+              <a:t>proof_object:</a:t>
+            </a:r>
+          </a:p>
+          <a:p>
+            <a:r>
+              <a:t>{</a:t>
+            </a:r>
+          </a:p>
+          <a:p>
+            <a:r>
+              <a:t>  "type": "none",</a:t>
+            </a:r>
+          </a:p>
+          <a:p>
+            <a:r>
+              <a:t>  "required": false,</a:t>
+            </a:r>
+          </a:p>
+          <a:p>
+            <a:r>
+              <a:t>  "screen_position": "none",</a:t>
+            </a:r>
+          </a:p>
+          <a:p>
+            <a:r>
+              <a:t>  "display_label": "",</a:t>
+            </a:r>
+          </a:p>
+          <a:p>
+            <a:r>
+              <a:t>  "source_url": "https://www.bis.org/bcbs/basel3.htm",</a:t>
+            </a:r>
+          </a:p>
+          <a:p>
+            <a:r>
+              <a:t>  "image_url": null,</a:t>
+            </a:r>
+          </a:p>
+          <a:p>
+            <a:r>
+              <a:t>  "copyright_risk": false,</a:t>
+            </a:r>
+          </a:p>
+          <a:p>
+            <a:r>
+              <a:t>  "manual_insert_required": false</a:t>
             </a:r>
           </a:p>
           <a:p>
@@ -5640,6 +6918,21 @@
           </a:p>
           <a:p>
             <a:r>
+              <a:t>proof_object_type: diagram</a:t>
+            </a:r>
+          </a:p>
+          <a:p>
+            <a:r>
+              <a:t>proof_object_required: True</a:t>
+            </a:r>
+          </a:p>
+          <a:p>
+            <a:r>
+              <a:t>proof_object_screen_position: left_half</a:t>
+            </a:r>
+          </a:p>
+          <a:p>
+            <a:r>
               <a:t>manual_placeholder_hidden: False</a:t>
             </a:r>
           </a:p>
@@ -5775,6 +7068,62 @@
           <a:p>
             <a:r>
               <a:t>  "prompt_if_ai_image": null</a:t>
+            </a:r>
+          </a:p>
+          <a:p>
+            <a:r>
+              <a:t>}</a:t>
+            </a:r>
+          </a:p>
+          <a:p/>
+          <a:p>
+            <a:r>
+              <a:t>proof_object:</a:t>
+            </a:r>
+          </a:p>
+          <a:p>
+            <a:r>
+              <a:t>{</a:t>
+            </a:r>
+          </a:p>
+          <a:p>
+            <a:r>
+              <a:t>  "type": "diagram",</a:t>
+            </a:r>
+          </a:p>
+          <a:p>
+            <a:r>
+              <a:t>  "required": true,</a:t>
+            </a:r>
+          </a:p>
+          <a:p>
+            <a:r>
+              <a:t>  "screen_position": "left_half",</a:t>
+            </a:r>
+          </a:p>
+          <a:p>
+            <a:r>
+              <a:t>  "display_label": "[도식]",</a:t>
+            </a:r>
+          </a:p>
+          <a:p>
+            <a:r>
+              <a:t>  "source_url": "https://www.korea.kr/news/policyNewsView.do?newsId=148961201&amp;pWise=main&amp;pWiseMain=A4",</a:t>
+            </a:r>
+          </a:p>
+          <a:p>
+            <a:r>
+              <a:t>  "image_url": null,</a:t>
+            </a:r>
+          </a:p>
+          <a:p>
+            <a:r>
+              <a:t>  "copyright_risk": false,</a:t>
+            </a:r>
+          </a:p>
+          <a:p>
+            <a:r>
+              <a:t>  "manual_insert_required": true</a:t>
             </a:r>
           </a:p>
           <a:p>
@@ -5931,6 +7280,21 @@
           </a:p>
           <a:p>
             <a:r>
+              <a:t>proof_object_type: diagram</a:t>
+            </a:r>
+          </a:p>
+          <a:p>
+            <a:r>
+              <a:t>proof_object_required: True</a:t>
+            </a:r>
+          </a:p>
+          <a:p>
+            <a:r>
+              <a:t>proof_object_screen_position: left_half</a:t>
+            </a:r>
+          </a:p>
+          <a:p>
+            <a:r>
               <a:t>manual_placeholder_hidden: False</a:t>
             </a:r>
           </a:p>
@@ -6051,6 +7415,62 @@
           <a:p>
             <a:r>
               <a:t>  "prompt_if_ai_image": null</a:t>
+            </a:r>
+          </a:p>
+          <a:p>
+            <a:r>
+              <a:t>}</a:t>
+            </a:r>
+          </a:p>
+          <a:p/>
+          <a:p>
+            <a:r>
+              <a:t>proof_object:</a:t>
+            </a:r>
+          </a:p>
+          <a:p>
+            <a:r>
+              <a:t>{</a:t>
+            </a:r>
+          </a:p>
+          <a:p>
+            <a:r>
+              <a:t>  "type": "diagram",</a:t>
+            </a:r>
+          </a:p>
+          <a:p>
+            <a:r>
+              <a:t>  "required": true,</a:t>
+            </a:r>
+          </a:p>
+          <a:p>
+            <a:r>
+              <a:t>  "screen_position": "left_half",</a:t>
+            </a:r>
+          </a:p>
+          <a:p>
+            <a:r>
+              <a:t>  "display_label": "[도식]",</a:t>
+            </a:r>
+          </a:p>
+          <a:p>
+            <a:r>
+              <a:t>  "source_url": null,</a:t>
+            </a:r>
+          </a:p>
+          <a:p>
+            <a:r>
+              <a:t>  "image_url": null,</a:t>
+            </a:r>
+          </a:p>
+          <a:p>
+            <a:r>
+              <a:t>  "copyright_risk": false,</a:t>
+            </a:r>
+          </a:p>
+          <a:p>
+            <a:r>
+              <a:t>  "manual_insert_required": true</a:t>
             </a:r>
           </a:p>
           <a:p>
@@ -6187,6 +7607,21 @@
           </a:p>
           <a:p>
             <a:r>
+              <a:t>proof_object_type: none</a:t>
+            </a:r>
+          </a:p>
+          <a:p>
+            <a:r>
+              <a:t>proof_object_required: False</a:t>
+            </a:r>
+          </a:p>
+          <a:p>
+            <a:r>
+              <a:t>proof_object_screen_position: none</a:t>
+            </a:r>
+          </a:p>
+          <a:p>
+            <a:r>
               <a:t>manual_placeholder_hidden: True</a:t>
             </a:r>
           </a:p>
@@ -6287,6 +7722,62 @@
           <a:p>
             <a:r>
               <a:t>  "prompt_if_ai_image": null</a:t>
+            </a:r>
+          </a:p>
+          <a:p>
+            <a:r>
+              <a:t>}</a:t>
+            </a:r>
+          </a:p>
+          <a:p/>
+          <a:p>
+            <a:r>
+              <a:t>proof_object:</a:t>
+            </a:r>
+          </a:p>
+          <a:p>
+            <a:r>
+              <a:t>{</a:t>
+            </a:r>
+          </a:p>
+          <a:p>
+            <a:r>
+              <a:t>  "type": "none",</a:t>
+            </a:r>
+          </a:p>
+          <a:p>
+            <a:r>
+              <a:t>  "required": false,</a:t>
+            </a:r>
+          </a:p>
+          <a:p>
+            <a:r>
+              <a:t>  "screen_position": "none",</a:t>
+            </a:r>
+          </a:p>
+          <a:p>
+            <a:r>
+              <a:t>  "display_label": "",</a:t>
+            </a:r>
+          </a:p>
+          <a:p>
+            <a:r>
+              <a:t>  "source_url": null,</a:t>
+            </a:r>
+          </a:p>
+          <a:p>
+            <a:r>
+              <a:t>  "image_url": null,</a:t>
+            </a:r>
+          </a:p>
+          <a:p>
+            <a:r>
+              <a:t>  "copyright_risk": false,</a:t>
+            </a:r>
+          </a:p>
+          <a:p>
+            <a:r>
+              <a:t>  "manual_insert_required": false</a:t>
             </a:r>
           </a:p>
           <a:p>
@@ -6423,6 +7914,21 @@
           </a:p>
           <a:p>
             <a:r>
+              <a:t>proof_object_type: none</a:t>
+            </a:r>
+          </a:p>
+          <a:p>
+            <a:r>
+              <a:t>proof_object_required: False</a:t>
+            </a:r>
+          </a:p>
+          <a:p>
+            <a:r>
+              <a:t>proof_object_screen_position: none</a:t>
+            </a:r>
+          </a:p>
+          <a:p>
+            <a:r>
               <a:t>manual_placeholder_hidden: True</a:t>
             </a:r>
           </a:p>
@@ -6553,6 +8059,62 @@
           <a:p>
             <a:r>
               <a:t>  "prompt_if_ai_image": null</a:t>
+            </a:r>
+          </a:p>
+          <a:p>
+            <a:r>
+              <a:t>}</a:t>
+            </a:r>
+          </a:p>
+          <a:p/>
+          <a:p>
+            <a:r>
+              <a:t>proof_object:</a:t>
+            </a:r>
+          </a:p>
+          <a:p>
+            <a:r>
+              <a:t>{</a:t>
+            </a:r>
+          </a:p>
+          <a:p>
+            <a:r>
+              <a:t>  "type": "none",</a:t>
+            </a:r>
+          </a:p>
+          <a:p>
+            <a:r>
+              <a:t>  "required": false,</a:t>
+            </a:r>
+          </a:p>
+          <a:p>
+            <a:r>
+              <a:t>  "screen_position": "none",</a:t>
+            </a:r>
+          </a:p>
+          <a:p>
+            <a:r>
+              <a:t>  "display_label": "",</a:t>
+            </a:r>
+          </a:p>
+          <a:p>
+            <a:r>
+              <a:t>  "source_url": "https://www.korea.kr/news/policyNewsView.do?newsId=148961201&amp;pWise=main&amp;pWiseMain=A4",</a:t>
+            </a:r>
+          </a:p>
+          <a:p>
+            <a:r>
+              <a:t>  "image_url": null,</a:t>
+            </a:r>
+          </a:p>
+          <a:p>
+            <a:r>
+              <a:t>  "copyright_risk": false,</a:t>
+            </a:r>
+          </a:p>
+          <a:p>
+            <a:r>
+              <a:t>  "manual_insert_required": false</a:t>
             </a:r>
           </a:p>
           <a:p>
@@ -6704,6 +8266,21 @@
           </a:p>
           <a:p>
             <a:r>
+              <a:t>proof_object_type: chart</a:t>
+            </a:r>
+          </a:p>
+          <a:p>
+            <a:r>
+              <a:t>proof_object_required: True</a:t>
+            </a:r>
+          </a:p>
+          <a:p>
+            <a:r>
+              <a:t>proof_object_screen_position: full_width_chart</a:t>
+            </a:r>
+          </a:p>
+          <a:p>
+            <a:r>
               <a:t>manual_placeholder_hidden: False</a:t>
             </a:r>
           </a:p>
@@ -6834,6 +8411,62 @@
           <a:p>
             <a:r>
               <a:t>  "prompt_if_ai_image": null</a:t>
+            </a:r>
+          </a:p>
+          <a:p>
+            <a:r>
+              <a:t>}</a:t>
+            </a:r>
+          </a:p>
+          <a:p/>
+          <a:p>
+            <a:r>
+              <a:t>proof_object:</a:t>
+            </a:r>
+          </a:p>
+          <a:p>
+            <a:r>
+              <a:t>{</a:t>
+            </a:r>
+          </a:p>
+          <a:p>
+            <a:r>
+              <a:t>  "type": "chart",</a:t>
+            </a:r>
+          </a:p>
+          <a:p>
+            <a:r>
+              <a:t>  "required": true,</a:t>
+            </a:r>
+          </a:p>
+          <a:p>
+            <a:r>
+              <a:t>  "screen_position": "full_width_chart",</a:t>
+            </a:r>
+          </a:p>
+          <a:p>
+            <a:r>
+              <a:t>  "display_label": "[차트]",</a:t>
+            </a:r>
+          </a:p>
+          <a:p>
+            <a:r>
+              <a:t>  "source_url": "https://www.korea.kr/news/policyNewsView.do?newsId=148961201&amp;pWise=main&amp;pWiseMain=A4",</a:t>
+            </a:r>
+          </a:p>
+          <a:p>
+            <a:r>
+              <a:t>  "image_url": null,</a:t>
+            </a:r>
+          </a:p>
+          <a:p>
+            <a:r>
+              <a:t>  "copyright_risk": false,</a:t>
+            </a:r>
+          </a:p>
+          <a:p>
+            <a:r>
+              <a:t>  "manual_insert_required": true</a:t>
             </a:r>
           </a:p>
           <a:p>
@@ -6985,6 +8618,21 @@
           </a:p>
           <a:p>
             <a:r>
+              <a:t>proof_object_type: diagram</a:t>
+            </a:r>
+          </a:p>
+          <a:p>
+            <a:r>
+              <a:t>proof_object_required: True</a:t>
+            </a:r>
+          </a:p>
+          <a:p>
+            <a:r>
+              <a:t>proof_object_screen_position: left_half</a:t>
+            </a:r>
+          </a:p>
+          <a:p>
+            <a:r>
               <a:t>manual_placeholder_hidden: False</a:t>
             </a:r>
           </a:p>
@@ -7115,6 +8763,62 @@
           <a:p>
             <a:r>
               <a:t>  "prompt_if_ai_image": null</a:t>
+            </a:r>
+          </a:p>
+          <a:p>
+            <a:r>
+              <a:t>}</a:t>
+            </a:r>
+          </a:p>
+          <a:p/>
+          <a:p>
+            <a:r>
+              <a:t>proof_object:</a:t>
+            </a:r>
+          </a:p>
+          <a:p>
+            <a:r>
+              <a:t>{</a:t>
+            </a:r>
+          </a:p>
+          <a:p>
+            <a:r>
+              <a:t>  "type": "diagram",</a:t>
+            </a:r>
+          </a:p>
+          <a:p>
+            <a:r>
+              <a:t>  "required": true,</a:t>
+            </a:r>
+          </a:p>
+          <a:p>
+            <a:r>
+              <a:t>  "screen_position": "left_half",</a:t>
+            </a:r>
+          </a:p>
+          <a:p>
+            <a:r>
+              <a:t>  "display_label": "[도식]",</a:t>
+            </a:r>
+          </a:p>
+          <a:p>
+            <a:r>
+              <a:t>  "source_url": "https://www.bis.org/bcbs/basel3.htm",</a:t>
+            </a:r>
+          </a:p>
+          <a:p>
+            <a:r>
+              <a:t>  "image_url": null,</a:t>
+            </a:r>
+          </a:p>
+          <a:p>
+            <a:r>
+              <a:t>  "copyright_risk": false,</a:t>
+            </a:r>
+          </a:p>
+          <a:p>
+            <a:r>
+              <a:t>  "manual_insert_required": true</a:t>
             </a:r>
           </a:p>
           <a:p>
@@ -10261,14 +11965,68 @@
       </p:sp>
       <p:sp>
         <p:nvSpPr>
-          <p:cNvPr id="3" name="TextBox 2"/>
+          <p:cNvPr id="3" name="Rectangle 2"/>
+          <p:cNvSpPr/>
+          <p:nvPr/>
+        </p:nvSpPr>
+        <p:spPr>
+          <a:xfrm>
+            <a:off x="713232" y="1417320"/>
+            <a:ext cx="4892040" cy="4114800"/>
+          </a:xfrm>
+          <a:prstGeom prst="rect">
+            <a:avLst/>
+          </a:prstGeom>
+          <a:solidFill>
+            <a:srgbClr val="F5F5F5"/>
+          </a:solidFill>
+          <a:ln w="12700">
+            <a:solidFill>
+              <a:srgbClr val="BEBEBE"/>
+            </a:solidFill>
+          </a:ln>
+        </p:spPr>
+        <p:style>
+          <a:lnRef idx="1">
+            <a:schemeClr val="accent1"/>
+          </a:lnRef>
+          <a:fillRef idx="3">
+            <a:schemeClr val="accent1"/>
+          </a:fillRef>
+          <a:effectRef idx="2">
+            <a:schemeClr val="accent1"/>
+          </a:effectRef>
+          <a:fontRef idx="minor">
+            <a:schemeClr val="lt1"/>
+          </a:fontRef>
+        </p:style>
+        <p:txBody>
+          <a:bodyPr rtlCol="0" anchor="ctr" wrap="square"/>
+          <a:lstStyle/>
+          <a:p>
+            <a:pPr algn="ctr"/>
+            <a:r>
+              <a:rPr sz="1300">
+                <a:solidFill>
+                  <a:srgbClr val="566070"/>
+                </a:solidFill>
+                <a:latin typeface="맑은 고딕"/>
+              </a:rPr>
+              <a:t>[도식]</a:t>
+            </a:r>
+          </a:p>
+        </p:txBody>
+      </p:sp>
+      <p:sp>
+        <p:nvSpPr>
+          <p:cNvPr id="4" name="TextBox 3"/>
           <p:cNvSpPr txBox="1"/>
           <p:nvPr/>
         </p:nvSpPr>
         <p:spPr>
           <a:xfrm>
-            <a:off x="713232" y="2103120"/>
-            <a:ext cx="10652760" cy="2926080"/>
+            <a:off x="5989320" y="2103120"/>
+            <a:ext cx="5303520" cy="2926080"/>
           </a:xfrm>
           <a:prstGeom prst="rect">
             <a:avLst/>
@@ -10287,7 +12045,7 @@
               </a:spcAft>
             </a:pPr>
             <a:r>
-              <a:rPr sz="2800" b="0" u="none">
+              <a:rPr sz="2400" b="0" u="none">
                 <a:solidFill>
                   <a:srgbClr val="000000"/>
                 </a:solidFill>
@@ -10303,7 +12061,7 @@
               </a:spcAft>
             </a:pPr>
             <a:r>
-              <a:rPr sz="2800" b="0" u="none">
+              <a:rPr sz="2400" b="0" u="none">
                 <a:solidFill>
                   <a:srgbClr val="000000"/>
                 </a:solidFill>
@@ -10319,7 +12077,7 @@
               </a:spcAft>
             </a:pPr>
             <a:r>
-              <a:rPr sz="2800" b="0" u="none">
+              <a:rPr sz="2400" b="0" u="none">
                 <a:solidFill>
                   <a:srgbClr val="000000"/>
                 </a:solidFill>
@@ -10392,14 +12150,68 @@
       </p:sp>
       <p:sp>
         <p:nvSpPr>
-          <p:cNvPr id="3" name="TextBox 2"/>
+          <p:cNvPr id="3" name="Rectangle 2"/>
+          <p:cNvSpPr/>
+          <p:nvPr/>
+        </p:nvSpPr>
+        <p:spPr>
+          <a:xfrm>
+            <a:off x="713232" y="1417320"/>
+            <a:ext cx="4892040" cy="4114800"/>
+          </a:xfrm>
+          <a:prstGeom prst="rect">
+            <a:avLst/>
+          </a:prstGeom>
+          <a:solidFill>
+            <a:srgbClr val="F5F5F5"/>
+          </a:solidFill>
+          <a:ln w="12700">
+            <a:solidFill>
+              <a:srgbClr val="BEBEBE"/>
+            </a:solidFill>
+          </a:ln>
+        </p:spPr>
+        <p:style>
+          <a:lnRef idx="1">
+            <a:schemeClr val="accent1"/>
+          </a:lnRef>
+          <a:fillRef idx="3">
+            <a:schemeClr val="accent1"/>
+          </a:fillRef>
+          <a:effectRef idx="2">
+            <a:schemeClr val="accent1"/>
+          </a:effectRef>
+          <a:fontRef idx="minor">
+            <a:schemeClr val="lt1"/>
+          </a:fontRef>
+        </p:style>
+        <p:txBody>
+          <a:bodyPr rtlCol="0" anchor="ctr" wrap="square"/>
+          <a:lstStyle/>
+          <a:p>
+            <a:pPr algn="ctr"/>
+            <a:r>
+              <a:rPr sz="1300">
+                <a:solidFill>
+                  <a:srgbClr val="566070"/>
+                </a:solidFill>
+                <a:latin typeface="맑은 고딕"/>
+              </a:rPr>
+              <a:t>[도식]</a:t>
+            </a:r>
+          </a:p>
+        </p:txBody>
+      </p:sp>
+      <p:sp>
+        <p:nvSpPr>
+          <p:cNvPr id="4" name="TextBox 3"/>
           <p:cNvSpPr txBox="1"/>
           <p:nvPr/>
         </p:nvSpPr>
         <p:spPr>
           <a:xfrm>
-            <a:off x="713232" y="2103120"/>
-            <a:ext cx="10652760" cy="2926080"/>
+            <a:off x="5989320" y="2103120"/>
+            <a:ext cx="5303520" cy="2926080"/>
           </a:xfrm>
           <a:prstGeom prst="rect">
             <a:avLst/>
@@ -10418,7 +12230,7 @@
               </a:spcAft>
             </a:pPr>
             <a:r>
-              <a:rPr sz="2800" b="0" u="none">
+              <a:rPr sz="2400" b="0" u="none">
                 <a:solidFill>
                   <a:srgbClr val="000000"/>
                 </a:solidFill>
@@ -10434,7 +12246,7 @@
               </a:spcAft>
             </a:pPr>
             <a:r>
-              <a:rPr sz="2800" b="0" u="none">
+              <a:rPr sz="2400" b="0" u="none">
                 <a:solidFill>
                   <a:srgbClr val="000000"/>
                 </a:solidFill>
@@ -10450,7 +12262,7 @@
               </a:spcAft>
             </a:pPr>
             <a:r>
-              <a:rPr sz="2800" b="0" u="none">
+              <a:rPr sz="2400" b="0" u="none">
                 <a:solidFill>
                   <a:srgbClr val="000000"/>
                 </a:solidFill>
@@ -10817,8 +12629,62 @@
         </p:nvSpPr>
         <p:spPr>
           <a:xfrm>
-            <a:off x="572414" y="757123"/>
-            <a:ext cx="7843723" cy="3108960"/>
+            <a:off x="685800" y="1508760"/>
+            <a:ext cx="4800600" cy="3794760"/>
+          </a:xfrm>
+          <a:prstGeom prst="rect">
+            <a:avLst/>
+          </a:prstGeom>
+          <a:solidFill>
+            <a:srgbClr val="F5F5F5"/>
+          </a:solidFill>
+          <a:ln w="12700">
+            <a:solidFill>
+              <a:srgbClr val="BEBEBE"/>
+            </a:solidFill>
+          </a:ln>
+        </p:spPr>
+        <p:style>
+          <a:lnRef idx="1">
+            <a:schemeClr val="accent1"/>
+          </a:lnRef>
+          <a:fillRef idx="3">
+            <a:schemeClr val="accent1"/>
+          </a:fillRef>
+          <a:effectRef idx="2">
+            <a:schemeClr val="accent1"/>
+          </a:effectRef>
+          <a:fontRef idx="minor">
+            <a:schemeClr val="lt1"/>
+          </a:fontRef>
+        </p:style>
+        <p:txBody>
+          <a:bodyPr rtlCol="0" anchor="ctr" wrap="square"/>
+          <a:lstStyle/>
+          <a:p>
+            <a:pPr algn="ctr"/>
+            <a:r>
+              <a:rPr sz="1300">
+                <a:solidFill>
+                  <a:srgbClr val="566070"/>
+                </a:solidFill>
+                <a:latin typeface="맑은 고딕"/>
+              </a:rPr>
+              <a:t>[기사 인용]</a:t>
+            </a:r>
+          </a:p>
+        </p:txBody>
+      </p:sp>
+      <p:sp>
+        <p:nvSpPr>
+          <p:cNvPr id="3" name="Rectangle 2"/>
+          <p:cNvSpPr/>
+          <p:nvPr/>
+        </p:nvSpPr>
+        <p:spPr>
+          <a:xfrm>
+            <a:off x="5806440" y="731520"/>
+            <a:ext cx="6126479" cy="6446520"/>
           </a:xfrm>
           <a:prstGeom prst="rect">
             <a:avLst/>
@@ -10856,7 +12722,7 @@
       </p:sp>
       <p:sp>
         <p:nvSpPr>
-          <p:cNvPr id="3" name="TextBox 2"/>
+          <p:cNvPr id="4" name="TextBox 3"/>
           <p:cNvSpPr txBox="1"/>
           <p:nvPr/>
         </p:nvSpPr>
@@ -10890,14 +12756,49 @@
       </p:sp>
       <p:sp>
         <p:nvSpPr>
-          <p:cNvPr id="4" name="TextBox 3"/>
+          <p:cNvPr id="5" name="TextBox 4"/>
           <p:cNvSpPr txBox="1"/>
           <p:nvPr/>
         </p:nvSpPr>
         <p:spPr>
           <a:xfrm>
-            <a:off x="572414" y="1874519"/>
-            <a:ext cx="7295083" cy="2468880"/>
+            <a:off x="8321040" y="621792"/>
+            <a:ext cx="2971800" cy="292608"/>
+          </a:xfrm>
+          <a:prstGeom prst="rect">
+            <a:avLst/>
+          </a:prstGeom>
+          <a:noFill/>
+        </p:spPr>
+        <p:txBody>
+          <a:bodyPr wrap="square">
+            <a:spAutoFit/>
+          </a:bodyPr>
+          <a:lstStyle/>
+          <a:p>
+            <a:pPr algn="r"/>
+            <a:r>
+              <a:rPr sz="1600" b="1" u="none">
+                <a:solidFill>
+                  <a:srgbClr val="000000"/>
+                </a:solidFill>
+                <a:latin typeface="맑은 고딕"/>
+              </a:rPr>
+              <a:t>www.korea.kr</a:t>
+            </a:r>
+          </a:p>
+        </p:txBody>
+      </p:sp>
+      <p:sp>
+        <p:nvSpPr>
+          <p:cNvPr id="6" name="TextBox 5"/>
+          <p:cNvSpPr txBox="1"/>
+          <p:nvPr/>
+        </p:nvSpPr>
+        <p:spPr>
+          <a:xfrm>
+            <a:off x="5806440" y="1965960"/>
+            <a:ext cx="5577840" cy="2468880"/>
           </a:xfrm>
           <a:prstGeom prst="rect">
             <a:avLst/>
@@ -11027,18 +12928,18 @@
         </p:nvSpPr>
         <p:spPr>
           <a:xfrm>
-            <a:off x="731520" y="1417320"/>
-            <a:ext cx="5257800" cy="4069080"/>
+            <a:off x="713232" y="1417320"/>
+            <a:ext cx="4892040" cy="4114800"/>
           </a:xfrm>
           <a:prstGeom prst="rect">
             <a:avLst/>
           </a:prstGeom>
           <a:solidFill>
-            <a:srgbClr val="FFFFFF"/>
+            <a:srgbClr val="F5F5F5"/>
           </a:solidFill>
           <a:ln w="12700">
             <a:solidFill>
-              <a:srgbClr val="D2D8E0"/>
+              <a:srgbClr val="BEBEBE"/>
             </a:solidFill>
           </a:ln>
         </p:spPr>
@@ -11057,68 +12958,32 @@
           </a:fontRef>
         </p:style>
         <p:txBody>
-          <a:bodyPr rtlCol="0" anchor="ctr"/>
+          <a:bodyPr rtlCol="0" anchor="ctr" wrap="square"/>
           <a:lstStyle/>
           <a:p>
             <a:pPr algn="ctr"/>
+            <a:r>
+              <a:rPr sz="1300">
+                <a:solidFill>
+                  <a:srgbClr val="566070"/>
+                </a:solidFill>
+                <a:latin typeface="맑은 고딕"/>
+              </a:rPr>
+              <a:t>[도식]</a:t>
+            </a:r>
           </a:p>
         </p:txBody>
       </p:sp>
       <p:sp>
         <p:nvSpPr>
-          <p:cNvPr id="4" name="Rectangle 3"/>
-          <p:cNvSpPr/>
+          <p:cNvPr id="4" name="TextBox 3"/>
+          <p:cNvSpPr txBox="1"/>
           <p:nvPr/>
         </p:nvSpPr>
         <p:spPr>
           <a:xfrm>
-            <a:off x="6172200" y="1417320"/>
-            <a:ext cx="5257800" cy="4069080"/>
-          </a:xfrm>
-          <a:prstGeom prst="rect">
-            <a:avLst/>
-          </a:prstGeom>
-          <a:solidFill>
-            <a:srgbClr val="EFF6F7"/>
-          </a:solidFill>
-          <a:ln w="12700">
-            <a:solidFill>
-              <a:srgbClr val="AACACE"/>
-            </a:solidFill>
-          </a:ln>
-        </p:spPr>
-        <p:style>
-          <a:lnRef idx="1">
-            <a:schemeClr val="accent1"/>
-          </a:lnRef>
-          <a:fillRef idx="3">
-            <a:schemeClr val="accent1"/>
-          </a:fillRef>
-          <a:effectRef idx="2">
-            <a:schemeClr val="accent1"/>
-          </a:effectRef>
-          <a:fontRef idx="minor">
-            <a:schemeClr val="lt1"/>
-          </a:fontRef>
-        </p:style>
-        <p:txBody>
-          <a:bodyPr rtlCol="0" anchor="ctr"/>
-          <a:lstStyle/>
-          <a:p>
-            <a:pPr algn="ctr"/>
-          </a:p>
-        </p:txBody>
-      </p:sp>
-      <p:sp>
-        <p:nvSpPr>
-          <p:cNvPr id="5" name="TextBox 4"/>
-          <p:cNvSpPr txBox="1"/>
-          <p:nvPr/>
-        </p:nvSpPr>
-        <p:spPr>
-          <a:xfrm>
-            <a:off x="960120" y="1691640"/>
-            <a:ext cx="4800600" cy="3383280"/>
+            <a:off x="5989320" y="1508760"/>
+            <a:ext cx="5303520" cy="3337560"/>
           </a:xfrm>
           <a:prstGeom prst="rect">
             <a:avLst/>
@@ -11137,7 +13002,7 @@
               </a:spcAft>
             </a:pPr>
             <a:r>
-              <a:rPr sz="2800" b="0" u="none">
+              <a:rPr sz="2400" b="0" u="none">
                 <a:solidFill>
                   <a:srgbClr val="000000"/>
                 </a:solidFill>
@@ -11153,7 +13018,7 @@
               </a:spcAft>
             </a:pPr>
             <a:r>
-              <a:rPr sz="2800" b="0" u="none">
+              <a:rPr sz="2400" b="0" u="none">
                 <a:solidFill>
                   <a:srgbClr val="000000"/>
                 </a:solidFill>
@@ -11162,29 +13027,6 @@
               <a:t>하지만 방송에서는 이것이 특정 기업 성공 보장이나 특정 상품 추천처럼 들리면 안 된다.</a:t>
             </a:r>
           </a:p>
-        </p:txBody>
-      </p:sp>
-      <p:sp>
-        <p:nvSpPr>
-          <p:cNvPr id="6" name="TextBox 5"/>
-          <p:cNvSpPr txBox="1"/>
-          <p:nvPr/>
-        </p:nvSpPr>
-        <p:spPr>
-          <a:xfrm>
-            <a:off x="6400800" y="1691640"/>
-            <a:ext cx="4800600" cy="3383280"/>
-          </a:xfrm>
-          <a:prstGeom prst="rect">
-            <a:avLst/>
-          </a:prstGeom>
-          <a:noFill/>
-        </p:spPr>
-        <p:txBody>
-          <a:bodyPr wrap="square">
-            <a:spAutoFit/>
-          </a:bodyPr>
-          <a:lstStyle/>
           <a:p>
             <a:pPr>
               <a:spcAft>
@@ -11192,7 +13034,7 @@
               </a:spcAft>
             </a:pPr>
             <a:r>
-              <a:rPr sz="2800" b="0" u="none">
+              <a:rPr sz="2400" b="0" u="none">
                 <a:solidFill>
                   <a:srgbClr val="000000"/>
                 </a:solidFill>
@@ -11271,18 +13113,18 @@
         </p:nvSpPr>
         <p:spPr>
           <a:xfrm>
-            <a:off x="731520" y="1417320"/>
-            <a:ext cx="5257800" cy="4069080"/>
+            <a:off x="713232" y="1417320"/>
+            <a:ext cx="4892040" cy="4114800"/>
           </a:xfrm>
           <a:prstGeom prst="rect">
             <a:avLst/>
           </a:prstGeom>
           <a:solidFill>
-            <a:srgbClr val="FFFFFF"/>
+            <a:srgbClr val="F5F5F5"/>
           </a:solidFill>
           <a:ln w="12700">
             <a:solidFill>
-              <a:srgbClr val="D2D8E0"/>
+              <a:srgbClr val="BEBEBE"/>
             </a:solidFill>
           </a:ln>
         </p:spPr>
@@ -11301,68 +13143,32 @@
           </a:fontRef>
         </p:style>
         <p:txBody>
-          <a:bodyPr rtlCol="0" anchor="ctr"/>
+          <a:bodyPr rtlCol="0" anchor="ctr" wrap="square"/>
           <a:lstStyle/>
           <a:p>
             <a:pPr algn="ctr"/>
+            <a:r>
+              <a:rPr sz="1300">
+                <a:solidFill>
+                  <a:srgbClr val="566070"/>
+                </a:solidFill>
+                <a:latin typeface="맑은 고딕"/>
+              </a:rPr>
+              <a:t>[도식]</a:t>
+            </a:r>
           </a:p>
         </p:txBody>
       </p:sp>
       <p:sp>
         <p:nvSpPr>
-          <p:cNvPr id="4" name="Rectangle 3"/>
-          <p:cNvSpPr/>
+          <p:cNvPr id="4" name="TextBox 3"/>
+          <p:cNvSpPr txBox="1"/>
           <p:nvPr/>
         </p:nvSpPr>
         <p:spPr>
           <a:xfrm>
-            <a:off x="6172200" y="1417320"/>
-            <a:ext cx="5257800" cy="4069080"/>
-          </a:xfrm>
-          <a:prstGeom prst="rect">
-            <a:avLst/>
-          </a:prstGeom>
-          <a:solidFill>
-            <a:srgbClr val="EFF6F7"/>
-          </a:solidFill>
-          <a:ln w="12700">
-            <a:solidFill>
-              <a:srgbClr val="AACACE"/>
-            </a:solidFill>
-          </a:ln>
-        </p:spPr>
-        <p:style>
-          <a:lnRef idx="1">
-            <a:schemeClr val="accent1"/>
-          </a:lnRef>
-          <a:fillRef idx="3">
-            <a:schemeClr val="accent1"/>
-          </a:fillRef>
-          <a:effectRef idx="2">
-            <a:schemeClr val="accent1"/>
-          </a:effectRef>
-          <a:fontRef idx="minor">
-            <a:schemeClr val="lt1"/>
-          </a:fontRef>
-        </p:style>
-        <p:txBody>
-          <a:bodyPr rtlCol="0" anchor="ctr"/>
-          <a:lstStyle/>
-          <a:p>
-            <a:pPr algn="ctr"/>
-          </a:p>
-        </p:txBody>
-      </p:sp>
-      <p:sp>
-        <p:nvSpPr>
-          <p:cNvPr id="5" name="TextBox 4"/>
-          <p:cNvSpPr txBox="1"/>
-          <p:nvPr/>
-        </p:nvSpPr>
-        <p:spPr>
-          <a:xfrm>
-            <a:off x="960120" y="1691640"/>
-            <a:ext cx="4800600" cy="3383280"/>
+            <a:off x="5989320" y="1508760"/>
+            <a:ext cx="5303520" cy="3337560"/>
           </a:xfrm>
           <a:prstGeom prst="rect">
             <a:avLst/>
@@ -11381,7 +13187,7 @@
               </a:spcAft>
             </a:pPr>
             <a:r>
-              <a:rPr sz="2800" b="0" u="none">
+              <a:rPr sz="2400" b="0" u="none">
                 <a:solidFill>
                   <a:srgbClr val="000000"/>
                 </a:solidFill>
@@ -11397,7 +13203,7 @@
               </a:spcAft>
             </a:pPr>
             <a:r>
-              <a:rPr sz="2800" b="0" u="none">
+              <a:rPr sz="2400" b="0" u="none">
                 <a:solidFill>
                   <a:srgbClr val="000000"/>
                 </a:solidFill>
@@ -11406,29 +13212,6 @@
               <a:t>또 은행과 금융회사는 건전성 규제, 위험가중자산, 예금자 보호 논리 안에서 움직인다.</a:t>
             </a:r>
           </a:p>
-        </p:txBody>
-      </p:sp>
-      <p:sp>
-        <p:nvSpPr>
-          <p:cNvPr id="6" name="TextBox 5"/>
-          <p:cNvSpPr txBox="1"/>
-          <p:nvPr/>
-        </p:nvSpPr>
-        <p:spPr>
-          <a:xfrm>
-            <a:off x="6400800" y="1691640"/>
-            <a:ext cx="4800600" cy="3383280"/>
-          </a:xfrm>
-          <a:prstGeom prst="rect">
-            <a:avLst/>
-          </a:prstGeom>
-          <a:noFill/>
-        </p:spPr>
-        <p:txBody>
-          <a:bodyPr wrap="square">
-            <a:spAutoFit/>
-          </a:bodyPr>
-          <a:lstStyle/>
           <a:p>
             <a:pPr>
               <a:spcAft>
@@ -11436,7 +13219,7 @@
               </a:spcAft>
             </a:pPr>
             <a:r>
-              <a:rPr sz="2800" b="0" u="none">
+              <a:rPr sz="2400" b="0" u="none">
                 <a:solidFill>
                   <a:srgbClr val="000000"/>
                 </a:solidFill>
@@ -11509,14 +13292,68 @@
       </p:sp>
       <p:sp>
         <p:nvSpPr>
-          <p:cNvPr id="3" name="TextBox 2"/>
+          <p:cNvPr id="3" name="Rectangle 2"/>
+          <p:cNvSpPr/>
+          <p:nvPr/>
+        </p:nvSpPr>
+        <p:spPr>
+          <a:xfrm>
+            <a:off x="713232" y="1417320"/>
+            <a:ext cx="4892040" cy="4114800"/>
+          </a:xfrm>
+          <a:prstGeom prst="rect">
+            <a:avLst/>
+          </a:prstGeom>
+          <a:solidFill>
+            <a:srgbClr val="F5F5F5"/>
+          </a:solidFill>
+          <a:ln w="12700">
+            <a:solidFill>
+              <a:srgbClr val="BEBEBE"/>
+            </a:solidFill>
+          </a:ln>
+        </p:spPr>
+        <p:style>
+          <a:lnRef idx="1">
+            <a:schemeClr val="accent1"/>
+          </a:lnRef>
+          <a:fillRef idx="3">
+            <a:schemeClr val="accent1"/>
+          </a:fillRef>
+          <a:effectRef idx="2">
+            <a:schemeClr val="accent1"/>
+          </a:effectRef>
+          <a:fontRef idx="minor">
+            <a:schemeClr val="lt1"/>
+          </a:fontRef>
+        </p:style>
+        <p:txBody>
+          <a:bodyPr rtlCol="0" anchor="ctr" wrap="square"/>
+          <a:lstStyle/>
+          <a:p>
+            <a:pPr algn="ctr"/>
+            <a:r>
+              <a:rPr sz="1300">
+                <a:solidFill>
+                  <a:srgbClr val="566070"/>
+                </a:solidFill>
+                <a:latin typeface="맑은 고딕"/>
+              </a:rPr>
+              <a:t>[도식]</a:t>
+            </a:r>
+          </a:p>
+        </p:txBody>
+      </p:sp>
+      <p:sp>
+        <p:nvSpPr>
+          <p:cNvPr id="4" name="TextBox 3"/>
           <p:cNvSpPr txBox="1"/>
           <p:nvPr/>
         </p:nvSpPr>
         <p:spPr>
           <a:xfrm>
-            <a:off x="713232" y="2103120"/>
-            <a:ext cx="10652760" cy="2926080"/>
+            <a:off x="5989320" y="2103120"/>
+            <a:ext cx="5303520" cy="2926080"/>
           </a:xfrm>
           <a:prstGeom prst="rect">
             <a:avLst/>
@@ -11535,7 +13372,7 @@
               </a:spcAft>
             </a:pPr>
             <a:r>
-              <a:rPr sz="2800" b="0" u="none">
+              <a:rPr sz="2400" b="0" u="none">
                 <a:solidFill>
                   <a:srgbClr val="000000"/>
                 </a:solidFill>
@@ -11551,7 +13388,7 @@
               </a:spcAft>
             </a:pPr>
             <a:r>
-              <a:rPr sz="2800" b="0" u="none">
+              <a:rPr sz="2400" b="0" u="none">
                 <a:solidFill>
                   <a:srgbClr val="000000"/>
                 </a:solidFill>
@@ -11567,7 +13404,7 @@
               </a:spcAft>
             </a:pPr>
             <a:r>
-              <a:rPr sz="2800" b="0" u="none">
+              <a:rPr sz="2400" b="0" u="none">
                 <a:solidFill>
                   <a:srgbClr val="000000"/>
                 </a:solidFill>
@@ -11968,18 +13805,18 @@
         </p:nvSpPr>
         <p:spPr>
           <a:xfrm>
-            <a:off x="731520" y="1417320"/>
-            <a:ext cx="5257800" cy="4069080"/>
+            <a:off x="713232" y="1417320"/>
+            <a:ext cx="4892040" cy="4114800"/>
           </a:xfrm>
           <a:prstGeom prst="rect">
             <a:avLst/>
           </a:prstGeom>
           <a:solidFill>
-            <a:srgbClr val="FFFFFF"/>
+            <a:srgbClr val="F5F5F5"/>
           </a:solidFill>
           <a:ln w="12700">
             <a:solidFill>
-              <a:srgbClr val="D2D8E0"/>
+              <a:srgbClr val="BEBEBE"/>
             </a:solidFill>
           </a:ln>
         </p:spPr>
@@ -11998,68 +13835,32 @@
           </a:fontRef>
         </p:style>
         <p:txBody>
-          <a:bodyPr rtlCol="0" anchor="ctr"/>
+          <a:bodyPr rtlCol="0" anchor="ctr" wrap="square"/>
           <a:lstStyle/>
           <a:p>
             <a:pPr algn="ctr"/>
+            <a:r>
+              <a:rPr sz="1300">
+                <a:solidFill>
+                  <a:srgbClr val="566070"/>
+                </a:solidFill>
+                <a:latin typeface="맑은 고딕"/>
+              </a:rPr>
+              <a:t>[도식]</a:t>
+            </a:r>
           </a:p>
         </p:txBody>
       </p:sp>
       <p:sp>
         <p:nvSpPr>
-          <p:cNvPr id="4" name="Rectangle 3"/>
-          <p:cNvSpPr/>
+          <p:cNvPr id="4" name="TextBox 3"/>
+          <p:cNvSpPr txBox="1"/>
           <p:nvPr/>
         </p:nvSpPr>
         <p:spPr>
           <a:xfrm>
-            <a:off x="6172200" y="1417320"/>
-            <a:ext cx="5257800" cy="4069080"/>
-          </a:xfrm>
-          <a:prstGeom prst="rect">
-            <a:avLst/>
-          </a:prstGeom>
-          <a:solidFill>
-            <a:srgbClr val="EFF6F7"/>
-          </a:solidFill>
-          <a:ln w="12700">
-            <a:solidFill>
-              <a:srgbClr val="AACACE"/>
-            </a:solidFill>
-          </a:ln>
-        </p:spPr>
-        <p:style>
-          <a:lnRef idx="1">
-            <a:schemeClr val="accent1"/>
-          </a:lnRef>
-          <a:fillRef idx="3">
-            <a:schemeClr val="accent1"/>
-          </a:fillRef>
-          <a:effectRef idx="2">
-            <a:schemeClr val="accent1"/>
-          </a:effectRef>
-          <a:fontRef idx="minor">
-            <a:schemeClr val="lt1"/>
-          </a:fontRef>
-        </p:style>
-        <p:txBody>
-          <a:bodyPr rtlCol="0" anchor="ctr"/>
-          <a:lstStyle/>
-          <a:p>
-            <a:pPr algn="ctr"/>
-          </a:p>
-        </p:txBody>
-      </p:sp>
-      <p:sp>
-        <p:nvSpPr>
-          <p:cNvPr id="5" name="TextBox 4"/>
-          <p:cNvSpPr txBox="1"/>
-          <p:nvPr/>
-        </p:nvSpPr>
-        <p:spPr>
-          <a:xfrm>
-            <a:off x="960120" y="1691640"/>
-            <a:ext cx="4800600" cy="3383280"/>
+            <a:off x="5989320" y="1508760"/>
+            <a:ext cx="5303520" cy="3337560"/>
           </a:xfrm>
           <a:prstGeom prst="rect">
             <a:avLst/>
@@ -12078,7 +13879,7 @@
               </a:spcAft>
             </a:pPr>
             <a:r>
-              <a:rPr sz="2800" b="0" u="none">
+              <a:rPr sz="2400" b="0" u="none">
                 <a:solidFill>
                   <a:srgbClr val="000000"/>
                 </a:solidFill>
@@ -12094,7 +13895,7 @@
               </a:spcAft>
             </a:pPr>
             <a:r>
-              <a:rPr sz="2800" b="0" u="none">
+              <a:rPr sz="2400" b="0" u="none">
                 <a:solidFill>
                   <a:srgbClr val="000000"/>
                 </a:solidFill>
@@ -12103,29 +13904,6 @@
               <a:t>그래서 수익률, 주가, 매수·매도, 유망종목식 표현은 피해야 한다.</a:t>
             </a:r>
           </a:p>
-        </p:txBody>
-      </p:sp>
-      <p:sp>
-        <p:nvSpPr>
-          <p:cNvPr id="6" name="TextBox 5"/>
-          <p:cNvSpPr txBox="1"/>
-          <p:nvPr/>
-        </p:nvSpPr>
-        <p:spPr>
-          <a:xfrm>
-            <a:off x="6400800" y="1691640"/>
-            <a:ext cx="4800600" cy="3383280"/>
-          </a:xfrm>
-          <a:prstGeom prst="rect">
-            <a:avLst/>
-          </a:prstGeom>
-          <a:noFill/>
-        </p:spPr>
-        <p:txBody>
-          <a:bodyPr wrap="square">
-            <a:spAutoFit/>
-          </a:bodyPr>
-          <a:lstStyle/>
           <a:p>
             <a:pPr>
               <a:spcAft>
@@ -12133,7 +13911,7 @@
               </a:spcAft>
             </a:pPr>
             <a:r>
-              <a:rPr sz="2800" b="0" u="none">
+              <a:rPr sz="2400" b="0" u="none">
                 <a:solidFill>
                   <a:srgbClr val="000000"/>
                 </a:solidFill>
@@ -12714,14 +14492,68 @@
       </p:sp>
       <p:sp>
         <p:nvSpPr>
-          <p:cNvPr id="3" name="TextBox 2"/>
+          <p:cNvPr id="3" name="Rectangle 2"/>
+          <p:cNvSpPr/>
+          <p:nvPr/>
+        </p:nvSpPr>
+        <p:spPr>
+          <a:xfrm>
+            <a:off x="713232" y="1417320"/>
+            <a:ext cx="4892040" cy="4114800"/>
+          </a:xfrm>
+          <a:prstGeom prst="rect">
+            <a:avLst/>
+          </a:prstGeom>
+          <a:solidFill>
+            <a:srgbClr val="F5F5F5"/>
+          </a:solidFill>
+          <a:ln w="12700">
+            <a:solidFill>
+              <a:srgbClr val="BEBEBE"/>
+            </a:solidFill>
+          </a:ln>
+        </p:spPr>
+        <p:style>
+          <a:lnRef idx="1">
+            <a:schemeClr val="accent1"/>
+          </a:lnRef>
+          <a:fillRef idx="3">
+            <a:schemeClr val="accent1"/>
+          </a:fillRef>
+          <a:effectRef idx="2">
+            <a:schemeClr val="accent1"/>
+          </a:effectRef>
+          <a:fontRef idx="minor">
+            <a:schemeClr val="lt1"/>
+          </a:fontRef>
+        </p:style>
+        <p:txBody>
+          <a:bodyPr rtlCol="0" anchor="ctr" wrap="square"/>
+          <a:lstStyle/>
+          <a:p>
+            <a:pPr algn="ctr"/>
+            <a:r>
+              <a:rPr sz="1300">
+                <a:solidFill>
+                  <a:srgbClr val="566070"/>
+                </a:solidFill>
+                <a:latin typeface="맑은 고딕"/>
+              </a:rPr>
+              <a:t>[도식]</a:t>
+            </a:r>
+          </a:p>
+        </p:txBody>
+      </p:sp>
+      <p:sp>
+        <p:nvSpPr>
+          <p:cNvPr id="4" name="TextBox 3"/>
           <p:cNvSpPr txBox="1"/>
           <p:nvPr/>
         </p:nvSpPr>
         <p:spPr>
           <a:xfrm>
-            <a:off x="713232" y="2103120"/>
-            <a:ext cx="10652760" cy="2926080"/>
+            <a:off x="5989320" y="2103120"/>
+            <a:ext cx="5303520" cy="2926080"/>
           </a:xfrm>
           <a:prstGeom prst="rect">
             <a:avLst/>
@@ -12740,7 +14572,7 @@
               </a:spcAft>
             </a:pPr>
             <a:r>
-              <a:rPr sz="2800" b="0" u="none">
+              <a:rPr sz="2400" b="0" u="none">
                 <a:solidFill>
                   <a:srgbClr val="000000"/>
                 </a:solidFill>
@@ -12756,7 +14588,7 @@
               </a:spcAft>
             </a:pPr>
             <a:r>
-              <a:rPr sz="2800" b="0" u="none">
+              <a:rPr sz="2400" b="0" u="none">
                 <a:solidFill>
                   <a:srgbClr val="000000"/>
                 </a:solidFill>
@@ -12772,7 +14604,7 @@
               </a:spcAft>
             </a:pPr>
             <a:r>
-              <a:rPr sz="2800" b="0" u="none">
+              <a:rPr sz="2400" b="0" u="none">
                 <a:solidFill>
                   <a:srgbClr val="000000"/>
                 </a:solidFill>
@@ -12845,14 +14677,68 @@
       </p:sp>
       <p:sp>
         <p:nvSpPr>
-          <p:cNvPr id="3" name="TextBox 2"/>
+          <p:cNvPr id="3" name="Rectangle 2"/>
+          <p:cNvSpPr/>
+          <p:nvPr/>
+        </p:nvSpPr>
+        <p:spPr>
+          <a:xfrm>
+            <a:off x="713232" y="1417320"/>
+            <a:ext cx="4892040" cy="4114800"/>
+          </a:xfrm>
+          <a:prstGeom prst="rect">
+            <a:avLst/>
+          </a:prstGeom>
+          <a:solidFill>
+            <a:srgbClr val="F5F5F5"/>
+          </a:solidFill>
+          <a:ln w="12700">
+            <a:solidFill>
+              <a:srgbClr val="BEBEBE"/>
+            </a:solidFill>
+          </a:ln>
+        </p:spPr>
+        <p:style>
+          <a:lnRef idx="1">
+            <a:schemeClr val="accent1"/>
+          </a:lnRef>
+          <a:fillRef idx="3">
+            <a:schemeClr val="accent1"/>
+          </a:fillRef>
+          <a:effectRef idx="2">
+            <a:schemeClr val="accent1"/>
+          </a:effectRef>
+          <a:fontRef idx="minor">
+            <a:schemeClr val="lt1"/>
+          </a:fontRef>
+        </p:style>
+        <p:txBody>
+          <a:bodyPr rtlCol="0" anchor="ctr" wrap="square"/>
+          <a:lstStyle/>
+          <a:p>
+            <a:pPr algn="ctr"/>
+            <a:r>
+              <a:rPr sz="1300">
+                <a:solidFill>
+                  <a:srgbClr val="566070"/>
+                </a:solidFill>
+                <a:latin typeface="맑은 고딕"/>
+              </a:rPr>
+              <a:t>[도식]</a:t>
+            </a:r>
+          </a:p>
+        </p:txBody>
+      </p:sp>
+      <p:sp>
+        <p:nvSpPr>
+          <p:cNvPr id="4" name="TextBox 3"/>
           <p:cNvSpPr txBox="1"/>
           <p:nvPr/>
         </p:nvSpPr>
         <p:spPr>
           <a:xfrm>
-            <a:off x="713232" y="2103120"/>
-            <a:ext cx="10652760" cy="2926080"/>
+            <a:off x="5989320" y="2103120"/>
+            <a:ext cx="5303520" cy="2926080"/>
           </a:xfrm>
           <a:prstGeom prst="rect">
             <a:avLst/>
@@ -12871,7 +14757,7 @@
               </a:spcAft>
             </a:pPr>
             <a:r>
-              <a:rPr sz="2800" b="0" u="none">
+              <a:rPr sz="2400" b="0" u="none">
                 <a:solidFill>
                   <a:srgbClr val="000000"/>
                 </a:solidFill>
@@ -12887,7 +14773,7 @@
               </a:spcAft>
             </a:pPr>
             <a:r>
-              <a:rPr sz="2800" b="0" u="none">
+              <a:rPr sz="2400" b="0" u="none">
                 <a:solidFill>
                   <a:srgbClr val="000000"/>
                 </a:solidFill>
@@ -12903,7 +14789,7 @@
               </a:spcAft>
             </a:pPr>
             <a:r>
-              <a:rPr sz="2800" b="0" u="none">
+              <a:rPr sz="2400" b="0" u="none">
                 <a:solidFill>
                   <a:srgbClr val="000000"/>
                 </a:solidFill>
@@ -13403,18 +15289,18 @@
         </p:nvSpPr>
         <p:spPr>
           <a:xfrm>
-            <a:off x="731520" y="1417320"/>
-            <a:ext cx="5257800" cy="4069080"/>
+            <a:off x="713232" y="1417320"/>
+            <a:ext cx="4892040" cy="4114800"/>
           </a:xfrm>
           <a:prstGeom prst="rect">
             <a:avLst/>
           </a:prstGeom>
           <a:solidFill>
-            <a:srgbClr val="FFFFFF"/>
+            <a:srgbClr val="F5F5F5"/>
           </a:solidFill>
           <a:ln w="12700">
             <a:solidFill>
-              <a:srgbClr val="D2D8E0"/>
+              <a:srgbClr val="BEBEBE"/>
             </a:solidFill>
           </a:ln>
         </p:spPr>
@@ -13433,68 +15319,32 @@
           </a:fontRef>
         </p:style>
         <p:txBody>
-          <a:bodyPr rtlCol="0" anchor="ctr"/>
+          <a:bodyPr rtlCol="0" anchor="ctr" wrap="square"/>
           <a:lstStyle/>
           <a:p>
             <a:pPr algn="ctr"/>
+            <a:r>
+              <a:rPr sz="1300">
+                <a:solidFill>
+                  <a:srgbClr val="566070"/>
+                </a:solidFill>
+                <a:latin typeface="맑은 고딕"/>
+              </a:rPr>
+              <a:t>[도식]</a:t>
+            </a:r>
           </a:p>
         </p:txBody>
       </p:sp>
       <p:sp>
         <p:nvSpPr>
-          <p:cNvPr id="4" name="Rectangle 3"/>
-          <p:cNvSpPr/>
+          <p:cNvPr id="4" name="TextBox 3"/>
+          <p:cNvSpPr txBox="1"/>
           <p:nvPr/>
         </p:nvSpPr>
         <p:spPr>
           <a:xfrm>
-            <a:off x="6172200" y="1417320"/>
-            <a:ext cx="5257800" cy="4069080"/>
-          </a:xfrm>
-          <a:prstGeom prst="rect">
-            <a:avLst/>
-          </a:prstGeom>
-          <a:solidFill>
-            <a:srgbClr val="EFF6F7"/>
-          </a:solidFill>
-          <a:ln w="12700">
-            <a:solidFill>
-              <a:srgbClr val="AACACE"/>
-            </a:solidFill>
-          </a:ln>
-        </p:spPr>
-        <p:style>
-          <a:lnRef idx="1">
-            <a:schemeClr val="accent1"/>
-          </a:lnRef>
-          <a:fillRef idx="3">
-            <a:schemeClr val="accent1"/>
-          </a:fillRef>
-          <a:effectRef idx="2">
-            <a:schemeClr val="accent1"/>
-          </a:effectRef>
-          <a:fontRef idx="minor">
-            <a:schemeClr val="lt1"/>
-          </a:fontRef>
-        </p:style>
-        <p:txBody>
-          <a:bodyPr rtlCol="0" anchor="ctr"/>
-          <a:lstStyle/>
-          <a:p>
-            <a:pPr algn="ctr"/>
-          </a:p>
-        </p:txBody>
-      </p:sp>
-      <p:sp>
-        <p:nvSpPr>
-          <p:cNvPr id="5" name="TextBox 4"/>
-          <p:cNvSpPr txBox="1"/>
-          <p:nvPr/>
-        </p:nvSpPr>
-        <p:spPr>
-          <a:xfrm>
-            <a:off x="960120" y="1691640"/>
-            <a:ext cx="4800600" cy="3383280"/>
+            <a:off x="5989320" y="1508760"/>
+            <a:ext cx="5303520" cy="3337560"/>
           </a:xfrm>
           <a:prstGeom prst="rect">
             <a:avLst/>
@@ -13513,7 +15363,7 @@
               </a:spcAft>
             </a:pPr>
             <a:r>
-              <a:rPr sz="2800" b="0" u="none">
+              <a:rPr sz="2400" b="0" u="none">
                 <a:solidFill>
                   <a:srgbClr val="000000"/>
                 </a:solidFill>
@@ -13529,7 +15379,7 @@
               </a:spcAft>
             </a:pPr>
             <a:r>
-              <a:rPr sz="2800" b="0" u="none">
+              <a:rPr sz="2400" b="0" u="none">
                 <a:solidFill>
                   <a:srgbClr val="000000"/>
                 </a:solidFill>
@@ -13538,29 +15388,6 @@
               <a:t>하지만 초기 기술, 인력, 데이터, 공정 노하우는 평가하기 어렵다.</a:t>
             </a:r>
           </a:p>
-        </p:txBody>
-      </p:sp>
-      <p:sp>
-        <p:nvSpPr>
-          <p:cNvPr id="6" name="TextBox 5"/>
-          <p:cNvSpPr txBox="1"/>
-          <p:nvPr/>
-        </p:nvSpPr>
-        <p:spPr>
-          <a:xfrm>
-            <a:off x="6400800" y="1691640"/>
-            <a:ext cx="4800600" cy="3383280"/>
-          </a:xfrm>
-          <a:prstGeom prst="rect">
-            <a:avLst/>
-          </a:prstGeom>
-          <a:noFill/>
-        </p:spPr>
-        <p:txBody>
-          <a:bodyPr wrap="square">
-            <a:spAutoFit/>
-          </a:bodyPr>
-          <a:lstStyle/>
           <a:p>
             <a:pPr>
               <a:spcAft>
@@ -13568,7 +15395,7 @@
               </a:spcAft>
             </a:pPr>
             <a:r>
-              <a:rPr sz="2800" b="0" u="none">
+              <a:rPr sz="2400" b="0" u="none">
                 <a:solidFill>
                   <a:srgbClr val="000000"/>
                 </a:solidFill>

--- a/outputs/pptx/productive_finance_policy_styled_draft.pptx
+++ b/outputs/pptx/productive_finance_policy_styled_draft.pptx
@@ -928,7 +928,22 @@
           </a:p>
           <a:p>
             <a:r>
-              <a:t>  "하지만 정책자금이 늘 좋은 결과를 만든다고 단정할 수는 없다.",</a:t>
+              <a:t>  "하지만 정책자금이 늘 좋은 결과를 만든다고 단정할 수는 없다."</a:t>
+            </a:r>
+          </a:p>
+          <a:p>
+            <a:r>
+              <a:t>]</a:t>
+            </a:r>
+          </a:p>
+          <a:p>
+            <a:r>
+              <a:t>overflow_body_lines:</a:t>
+            </a:r>
+          </a:p>
+          <a:p>
+            <a:r>
+              <a:t>[</a:t>
             </a:r>
           </a:p>
           <a:p>
@@ -939,16 +954,6 @@
           <a:p>
             <a:r>
               <a:t>]</a:t>
-            </a:r>
-          </a:p>
-          <a:p>
-            <a:r>
-              <a:t>overflow_body_lines:</a:t>
-            </a:r>
-          </a:p>
-          <a:p>
-            <a:r>
-              <a:t>[]</a:t>
             </a:r>
           </a:p>
           <a:p/>
@@ -1280,12 +1285,7 @@
           </a:p>
           <a:p>
             <a:r>
-              <a:t>  "기업은 긴 투자금을 원한다.",</a:t>
-            </a:r>
-          </a:p>
-          <a:p>
-            <a:r>
-              <a:t>  "국가는 전략산업을 키우고 싶다."</a:t>
+              <a:t>  "기업은 긴 투자금을 원한다."</a:t>
             </a:r>
           </a:p>
           <a:p>
@@ -1301,6 +1301,11 @@
           <a:p>
             <a:r>
               <a:t>[</a:t>
+            </a:r>
+          </a:p>
+          <a:p>
+            <a:r>
+              <a:t>  "국가는 전략산업을 키우고 싶다.",</a:t>
             </a:r>
           </a:p>
           <a:p>
@@ -1898,17 +1903,17 @@
           </a:p>
           <a:p>
             <a:r>
-              <a:t>proof_object_type: none</a:t>
-            </a:r>
-          </a:p>
-          <a:p>
-            <a:r>
-              <a:t>proof_object_required: False</a:t>
-            </a:r>
-          </a:p>
-          <a:p>
-            <a:r>
-              <a:t>proof_object_screen_position: none</a:t>
+              <a:t>proof_object_type: article_quote</a:t>
+            </a:r>
+          </a:p>
+          <a:p>
+            <a:r>
+              <a:t>proof_object_required: True</a:t>
+            </a:r>
+          </a:p>
+          <a:p>
+            <a:r>
+              <a:t>proof_object_screen_position: left_half</a:t>
             </a:r>
           </a:p>
           <a:p>
@@ -1934,7 +1939,22 @@
           </a:p>
           <a:p>
             <a:r>
-              <a:t>  "국민참여형 펀드는 일반 국민 자금도 일부 모아 자펀드에 투자하는 구조로 설계됐다.",</a:t>
+              <a:t>  "국민참여형 펀드는 일반 국민 자금도 일부 모아 자펀드에 투자하는 구조로 설계됐다."</a:t>
+            </a:r>
+          </a:p>
+          <a:p>
+            <a:r>
+              <a:t>]</a:t>
+            </a:r>
+          </a:p>
+          <a:p>
+            <a:r>
+              <a:t>overflow_body_lines:</a:t>
+            </a:r>
+          </a:p>
+          <a:p>
+            <a:r>
+              <a:t>[</a:t>
             </a:r>
           </a:p>
           <a:p>
@@ -1947,16 +1967,6 @@
               <a:t>]</a:t>
             </a:r>
           </a:p>
-          <a:p>
-            <a:r>
-              <a:t>overflow_body_lines:</a:t>
-            </a:r>
-          </a:p>
-          <a:p>
-            <a:r>
-              <a:t>[]</a:t>
-            </a:r>
-          </a:p>
           <a:p/>
           <a:p>
             <a:r>
@@ -2068,22 +2078,22 @@
           </a:p>
           <a:p>
             <a:r>
-              <a:t>  "type": "none",</a:t>
-            </a:r>
-          </a:p>
-          <a:p>
-            <a:r>
-              <a:t>  "required": false,</a:t>
-            </a:r>
-          </a:p>
-          <a:p>
-            <a:r>
-              <a:t>  "screen_position": "none",</a:t>
-            </a:r>
-          </a:p>
-          <a:p>
-            <a:r>
-              <a:t>  "display_label": "",</a:t>
+              <a:t>  "type": "article_quote",</a:t>
+            </a:r>
+          </a:p>
+          <a:p>
+            <a:r>
+              <a:t>  "required": true,</a:t>
+            </a:r>
+          </a:p>
+          <a:p>
+            <a:r>
+              <a:t>  "screen_position": "left_half",</a:t>
+            </a:r>
+          </a:p>
+          <a:p>
+            <a:r>
+              <a:t>  "display_label": "[기사 인용]",</a:t>
             </a:r>
           </a:p>
           <a:p>
@@ -2103,7 +2113,7 @@
           </a:p>
           <a:p>
             <a:r>
-              <a:t>  "manual_insert_required": false</a:t>
+              <a:t>  "manual_insert_required": true</a:t>
             </a:r>
           </a:p>
           <a:p>
@@ -2260,17 +2270,17 @@
           </a:p>
           <a:p>
             <a:r>
-              <a:t>proof_object_type: none</a:t>
-            </a:r>
-          </a:p>
-          <a:p>
-            <a:r>
-              <a:t>proof_object_required: False</a:t>
-            </a:r>
-          </a:p>
-          <a:p>
-            <a:r>
-              <a:t>proof_object_screen_position: none</a:t>
+              <a:t>proof_object_type: article_quote</a:t>
+            </a:r>
+          </a:p>
+          <a:p>
+            <a:r>
+              <a:t>proof_object_required: True</a:t>
+            </a:r>
+          </a:p>
+          <a:p>
+            <a:r>
+              <a:t>proof_object_screen_position: left_half</a:t>
             </a:r>
           </a:p>
           <a:p>
@@ -2296,7 +2306,22 @@
           </a:p>
           <a:p>
             <a:r>
-              <a:t>  "이 장치는 투자자의 위험을 낮추려는 설계지만, 원금 손실 가능성이 사라진다는 뜻은 아니다.",</a:t>
+              <a:t>  "이 장치는 투자자의 위험을 낮추려는 설계지만, 원금 손실 가능성이 사라진다는 뜻은 아니다."</a:t>
+            </a:r>
+          </a:p>
+          <a:p>
+            <a:r>
+              <a:t>]</a:t>
+            </a:r>
+          </a:p>
+          <a:p>
+            <a:r>
+              <a:t>overflow_body_lines:</a:t>
+            </a:r>
+          </a:p>
+          <a:p>
+            <a:r>
+              <a:t>[</a:t>
             </a:r>
           </a:p>
           <a:p>
@@ -2309,16 +2334,6 @@
               <a:t>]</a:t>
             </a:r>
           </a:p>
-          <a:p>
-            <a:r>
-              <a:t>overflow_body_lines:</a:t>
-            </a:r>
-          </a:p>
-          <a:p>
-            <a:r>
-              <a:t>[]</a:t>
-            </a:r>
-          </a:p>
           <a:p/>
           <a:p>
             <a:r>
@@ -2425,22 +2440,22 @@
           </a:p>
           <a:p>
             <a:r>
-              <a:t>  "type": "none",</a:t>
-            </a:r>
-          </a:p>
-          <a:p>
-            <a:r>
-              <a:t>  "required": false,</a:t>
-            </a:r>
-          </a:p>
-          <a:p>
-            <a:r>
-              <a:t>  "screen_position": "none",</a:t>
-            </a:r>
-          </a:p>
-          <a:p>
-            <a:r>
-              <a:t>  "display_label": "",</a:t>
+              <a:t>  "type": "article_quote",</a:t>
+            </a:r>
+          </a:p>
+          <a:p>
+            <a:r>
+              <a:t>  "required": true,</a:t>
+            </a:r>
+          </a:p>
+          <a:p>
+            <a:r>
+              <a:t>  "screen_position": "left_half",</a:t>
+            </a:r>
+          </a:p>
+          <a:p>
+            <a:r>
+              <a:t>  "display_label": "[기사 인용]",</a:t>
             </a:r>
           </a:p>
           <a:p>
@@ -2460,7 +2475,7 @@
           </a:p>
           <a:p>
             <a:r>
-              <a:t>  "manual_insert_required": false</a:t>
+              <a:t>  "manual_insert_required": true</a:t>
             </a:r>
           </a:p>
           <a:p>
@@ -3010,7 +3025,22 @@
           </a:p>
           <a:p>
             <a:r>
-              <a:t>  "하지만 방송에서는 이것이 특정 기업 성공 보장이나 특정 상품 추천처럼 들리면 안 된다.",</a:t>
+              <a:t>  "하지만 방송에서는 이것이 특정 기업 성공 보장이나 특정 상품 추천처럼 들리면 안 된다."</a:t>
+            </a:r>
+          </a:p>
+          <a:p>
+            <a:r>
+              <a:t>]</a:t>
+            </a:r>
+          </a:p>
+          <a:p>
+            <a:r>
+              <a:t>overflow_body_lines:</a:t>
+            </a:r>
+          </a:p>
+          <a:p>
+            <a:r>
+              <a:t>[</a:t>
             </a:r>
           </a:p>
           <a:p>
@@ -3021,16 +3051,6 @@
           <a:p>
             <a:r>
               <a:t>]</a:t>
-            </a:r>
-          </a:p>
-          <a:p>
-            <a:r>
-              <a:t>overflow_body_lines:</a:t>
-            </a:r>
-          </a:p>
-          <a:p>
-            <a:r>
-              <a:t>[]</a:t>
             </a:r>
           </a:p>
           <a:p/>
@@ -3372,7 +3392,22 @@
           </a:p>
           <a:p>
             <a:r>
-              <a:t>  "또 은행과 금융회사는 건전성 규제, 위험가중자산, 예금자 보호 논리 안에서 움직인다.",</a:t>
+              <a:t>  "또 은행과 금융회사는 건전성 규제, 위험가중자산, 예금자 보호 논리 안에서 움직인다."</a:t>
+            </a:r>
+          </a:p>
+          <a:p>
+            <a:r>
+              <a:t>]</a:t>
+            </a:r>
+          </a:p>
+          <a:p>
+            <a:r>
+              <a:t>overflow_body_lines:</a:t>
+            </a:r>
+          </a:p>
+          <a:p>
+            <a:r>
+              <a:t>[</a:t>
             </a:r>
           </a:p>
           <a:p>
@@ -3383,16 +3418,6 @@
           <a:p>
             <a:r>
               <a:t>]</a:t>
-            </a:r>
-          </a:p>
-          <a:p>
-            <a:r>
-              <a:t>overflow_body_lines:</a:t>
-            </a:r>
-          </a:p>
-          <a:p>
-            <a:r>
-              <a:t>[]</a:t>
             </a:r>
           </a:p>
           <a:p/>
@@ -3734,7 +3759,22 @@
           </a:p>
           <a:p>
             <a:r>
-              <a:t>  "하지만 위험도 함께 나눠야 한다면, 손실이 발생했을 때 재정·운용사·투자자·금융권의 책임선이 중요해진다.",</a:t>
+              <a:t>  "하지만 위험도 함께 나눠야 한다면, 손실이 발생했을 때 재정·운용사·투자자·금융권의 책임선이 중요해진다."</a:t>
+            </a:r>
+          </a:p>
+          <a:p>
+            <a:r>
+              <a:t>]</a:t>
+            </a:r>
+          </a:p>
+          <a:p>
+            <a:r>
+              <a:t>overflow_body_lines:</a:t>
+            </a:r>
+          </a:p>
+          <a:p>
+            <a:r>
+              <a:t>[</a:t>
             </a:r>
           </a:p>
           <a:p>
@@ -3745,16 +3785,6 @@
           <a:p>
             <a:r>
               <a:t>]</a:t>
-            </a:r>
-          </a:p>
-          <a:p>
-            <a:r>
-              <a:t>overflow_body_lines:</a:t>
-            </a:r>
-          </a:p>
-          <a:p>
-            <a:r>
-              <a:t>[]</a:t>
             </a:r>
           </a:p>
           <a:p/>
@@ -4367,17 +4397,17 @@
           </a:p>
           <a:p>
             <a:r>
-              <a:t>proof_object_type: none</a:t>
-            </a:r>
-          </a:p>
-          <a:p>
-            <a:r>
-              <a:t>proof_object_required: False</a:t>
-            </a:r>
-          </a:p>
-          <a:p>
-            <a:r>
-              <a:t>proof_object_screen_position: none</a:t>
+              <a:t>proof_object_type: article_quote</a:t>
+            </a:r>
+          </a:p>
+          <a:p>
+            <a:r>
+              <a:t>proof_object_required: True</a:t>
+            </a:r>
+          </a:p>
+          <a:p>
+            <a:r>
+              <a:t>proof_object_screen_position: left_half</a:t>
             </a:r>
           </a:p>
           <a:p>
@@ -4403,7 +4433,22 @@
           </a:p>
           <a:p>
             <a:r>
-              <a:t>  "금융위원회 공식자료는 국민성장펀드가 5년간 150조 원, 2026년 30조 원 규모로 첨단산업 생태계에 자금을 공급하는 틀이라고 설명한다.",</a:t>
+              <a:t>  "금융위원회 공식자료는 국민성장펀드가 5년간 150조 원, 2026년 30조 원 규모로 첨단산업 생태계에 자금을 공급하는 틀이라고 설명한다."</a:t>
+            </a:r>
+          </a:p>
+          <a:p>
+            <a:r>
+              <a:t>]</a:t>
+            </a:r>
+          </a:p>
+          <a:p>
+            <a:r>
+              <a:t>overflow_body_lines:</a:t>
+            </a:r>
+          </a:p>
+          <a:p>
+            <a:r>
+              <a:t>[</a:t>
             </a:r>
           </a:p>
           <a:p>
@@ -4416,16 +4461,6 @@
               <a:t>]</a:t>
             </a:r>
           </a:p>
-          <a:p>
-            <a:r>
-              <a:t>overflow_body_lines:</a:t>
-            </a:r>
-          </a:p>
-          <a:p>
-            <a:r>
-              <a:t>[]</a:t>
-            </a:r>
-          </a:p>
           <a:p/>
           <a:p>
             <a:r>
@@ -4532,22 +4567,22 @@
           </a:p>
           <a:p>
             <a:r>
-              <a:t>  "type": "none",</a:t>
-            </a:r>
-          </a:p>
-          <a:p>
-            <a:r>
-              <a:t>  "required": false,</a:t>
-            </a:r>
-          </a:p>
-          <a:p>
-            <a:r>
-              <a:t>  "screen_position": "none",</a:t>
-            </a:r>
-          </a:p>
-          <a:p>
-            <a:r>
-              <a:t>  "display_label": "",</a:t>
+              <a:t>  "type": "article_quote",</a:t>
+            </a:r>
+          </a:p>
+          <a:p>
+            <a:r>
+              <a:t>  "required": true,</a:t>
+            </a:r>
+          </a:p>
+          <a:p>
+            <a:r>
+              <a:t>  "screen_position": "left_half",</a:t>
+            </a:r>
+          </a:p>
+          <a:p>
+            <a:r>
+              <a:t>  "display_label": "[기사 인용]",</a:t>
             </a:r>
           </a:p>
           <a:p>
@@ -4567,7 +4602,7 @@
           </a:p>
           <a:p>
             <a:r>
-              <a:t>  "manual_insert_required": false</a:t>
+              <a:t>  "manual_insert_required": true</a:t>
             </a:r>
           </a:p>
           <a:p>
@@ -4719,17 +4754,17 @@
           </a:p>
           <a:p>
             <a:r>
-              <a:t>proof_object_type: none</a:t>
-            </a:r>
-          </a:p>
-          <a:p>
-            <a:r>
-              <a:t>proof_object_required: False</a:t>
-            </a:r>
-          </a:p>
-          <a:p>
-            <a:r>
-              <a:t>proof_object_screen_position: none</a:t>
+              <a:t>proof_object_type: article_quote</a:t>
+            </a:r>
+          </a:p>
+          <a:p>
+            <a:r>
+              <a:t>proof_object_required: True</a:t>
+            </a:r>
+          </a:p>
+          <a:p>
+            <a:r>
+              <a:t>proof_object_screen_position: left_half</a:t>
             </a:r>
           </a:p>
           <a:p>
@@ -4755,7 +4790,22 @@
           </a:p>
           <a:p>
             <a:r>
-              <a:t>  "위험가중자산이 커지면 자본 부담도 커질 수 있고, 예금자 보호 논리와도 충돌할 수 있다.",</a:t>
+              <a:t>  "위험가중자산이 커지면 자본 부담도 커질 수 있고, 예금자 보호 논리와도 충돌할 수 있다."</a:t>
+            </a:r>
+          </a:p>
+          <a:p>
+            <a:r>
+              <a:t>]</a:t>
+            </a:r>
+          </a:p>
+          <a:p>
+            <a:r>
+              <a:t>overflow_body_lines:</a:t>
+            </a:r>
+          </a:p>
+          <a:p>
+            <a:r>
+              <a:t>[</a:t>
             </a:r>
           </a:p>
           <a:p>
@@ -4768,16 +4818,6 @@
               <a:t>]</a:t>
             </a:r>
           </a:p>
-          <a:p>
-            <a:r>
-              <a:t>overflow_body_lines:</a:t>
-            </a:r>
-          </a:p>
-          <a:p>
-            <a:r>
-              <a:t>[]</a:t>
-            </a:r>
-          </a:p>
           <a:p/>
           <a:p>
             <a:r>
@@ -4884,22 +4924,22 @@
           </a:p>
           <a:p>
             <a:r>
-              <a:t>  "type": "none",</a:t>
-            </a:r>
-          </a:p>
-          <a:p>
-            <a:r>
-              <a:t>  "required": false,</a:t>
-            </a:r>
-          </a:p>
-          <a:p>
-            <a:r>
-              <a:t>  "screen_position": "none",</a:t>
-            </a:r>
-          </a:p>
-          <a:p>
-            <a:r>
-              <a:t>  "display_label": "",</a:t>
+              <a:t>  "type": "article_quote",</a:t>
+            </a:r>
+          </a:p>
+          <a:p>
+            <a:r>
+              <a:t>  "required": true,</a:t>
+            </a:r>
+          </a:p>
+          <a:p>
+            <a:r>
+              <a:t>  "screen_position": "left_half",</a:t>
+            </a:r>
+          </a:p>
+          <a:p>
+            <a:r>
+              <a:t>  "display_label": "[기사 인용]",</a:t>
             </a:r>
           </a:p>
           <a:p>
@@ -4919,7 +4959,7 @@
           </a:p>
           <a:p>
             <a:r>
-              <a:t>  "manual_insert_required": false</a:t>
+              <a:t>  "manual_insert_required": true</a:t>
             </a:r>
           </a:p>
           <a:p>
@@ -5107,7 +5147,22 @@
           </a:p>
           <a:p>
             <a:r>
-              <a:t>  "그래서 수익률, 주가, 매수·매도, 유망종목식 표현은 피해야 한다.",</a:t>
+              <a:t>  "그래서 수익률, 주가, 매수·매도, 유망종목식 표현은 피해야 한다."</a:t>
+            </a:r>
+          </a:p>
+          <a:p>
+            <a:r>
+              <a:t>]</a:t>
+            </a:r>
+          </a:p>
+          <a:p>
+            <a:r>
+              <a:t>overflow_body_lines:</a:t>
+            </a:r>
+          </a:p>
+          <a:p>
+            <a:r>
+              <a:t>[</a:t>
             </a:r>
           </a:p>
           <a:p>
@@ -5118,16 +5173,6 @@
           <a:p>
             <a:r>
               <a:t>]</a:t>
-            </a:r>
-          </a:p>
-          <a:p>
-            <a:r>
-              <a:t>overflow_body_lines:</a:t>
-            </a:r>
-          </a:p>
-          <a:p>
-            <a:r>
-              <a:t>[]</a:t>
             </a:r>
           </a:p>
           <a:p/>
@@ -5398,17 +5443,17 @@
           </a:p>
           <a:p>
             <a:r>
-              <a:t>proof_object_type: none</a:t>
-            </a:r>
-          </a:p>
-          <a:p>
-            <a:r>
-              <a:t>proof_object_required: False</a:t>
-            </a:r>
-          </a:p>
-          <a:p>
-            <a:r>
-              <a:t>proof_object_screen_position: none</a:t>
+              <a:t>proof_object_type: article_quote</a:t>
+            </a:r>
+          </a:p>
+          <a:p>
+            <a:r>
+              <a:t>proof_object_required: True</a:t>
+            </a:r>
+          </a:p>
+          <a:p>
+            <a:r>
+              <a:t>proof_object_screen_position: left_half</a:t>
             </a:r>
           </a:p>
           <a:p>
@@ -5434,7 +5479,22 @@
           </a:p>
           <a:p>
             <a:r>
-              <a:t>  "좋은 위험을 고르는 능력, 손실을 나누는 규칙, 금융권 건전성을 함께 설계할 수 있느냐는 질문이다.",</a:t>
+              <a:t>  "좋은 위험을 고르는 능력, 손실을 나누는 규칙, 금융권 건전성을 함께 설계할 수 있느냐는 질문이다."</a:t>
+            </a:r>
+          </a:p>
+          <a:p>
+            <a:r>
+              <a:t>]</a:t>
+            </a:r>
+          </a:p>
+          <a:p>
+            <a:r>
+              <a:t>overflow_body_lines:</a:t>
+            </a:r>
+          </a:p>
+          <a:p>
+            <a:r>
+              <a:t>[</a:t>
             </a:r>
           </a:p>
           <a:p>
@@ -5447,16 +5507,6 @@
               <a:t>]</a:t>
             </a:r>
           </a:p>
-          <a:p>
-            <a:r>
-              <a:t>overflow_body_lines:</a:t>
-            </a:r>
-          </a:p>
-          <a:p>
-            <a:r>
-              <a:t>[]</a:t>
-            </a:r>
-          </a:p>
           <a:p/>
           <a:p>
             <a:r>
@@ -5568,22 +5618,22 @@
           </a:p>
           <a:p>
             <a:r>
-              <a:t>  "type": "none",</a:t>
-            </a:r>
-          </a:p>
-          <a:p>
-            <a:r>
-              <a:t>  "required": false,</a:t>
-            </a:r>
-          </a:p>
-          <a:p>
-            <a:r>
-              <a:t>  "screen_position": "none",</a:t>
-            </a:r>
-          </a:p>
-          <a:p>
-            <a:r>
-              <a:t>  "display_label": "",</a:t>
+              <a:t>  "type": "article_quote",</a:t>
+            </a:r>
+          </a:p>
+          <a:p>
+            <a:r>
+              <a:t>  "required": true,</a:t>
+            </a:r>
+          </a:p>
+          <a:p>
+            <a:r>
+              <a:t>  "screen_position": "left_half",</a:t>
+            </a:r>
+          </a:p>
+          <a:p>
+            <a:r>
+              <a:t>  "display_label": "[기사 인용]",</a:t>
             </a:r>
           </a:p>
           <a:p>
@@ -5603,7 +5653,7 @@
           </a:p>
           <a:p>
             <a:r>
-              <a:t>  "manual_insert_required": false</a:t>
+              <a:t>  "manual_insert_required": true</a:t>
             </a:r>
           </a:p>
           <a:p>
@@ -6566,17 +6616,17 @@
           </a:p>
           <a:p>
             <a:r>
-              <a:t>proof_object_type: none</a:t>
-            </a:r>
-          </a:p>
-          <a:p>
-            <a:r>
-              <a:t>proof_object_required: False</a:t>
-            </a:r>
-          </a:p>
-          <a:p>
-            <a:r>
-              <a:t>proof_object_screen_position: none</a:t>
+              <a:t>proof_object_type: article_quote</a:t>
+            </a:r>
+          </a:p>
+          <a:p>
+            <a:r>
+              <a:t>proof_object_required: True</a:t>
+            </a:r>
+          </a:p>
+          <a:p>
+            <a:r>
+              <a:t>proof_object_screen_position: left_half</a:t>
             </a:r>
           </a:p>
           <a:p>
@@ -6602,7 +6652,22 @@
           </a:p>
           <a:p>
             <a:r>
-              <a:t>  "은행은 자본규제와 위험가중자산을 고려해야 하므로, 위험한 자산을 무한정 늘릴 수 없다.",</a:t>
+              <a:t>  "은행은 자본규제와 위험가중자산을 고려해야 하므로, 위험한 자산을 무한정 늘릴 수 없다."</a:t>
+            </a:r>
+          </a:p>
+          <a:p>
+            <a:r>
+              <a:t>]</a:t>
+            </a:r>
+          </a:p>
+          <a:p>
+            <a:r>
+              <a:t>overflow_body_lines:</a:t>
+            </a:r>
+          </a:p>
+          <a:p>
+            <a:r>
+              <a:t>[</a:t>
             </a:r>
           </a:p>
           <a:p>
@@ -6615,16 +6680,6 @@
               <a:t>]</a:t>
             </a:r>
           </a:p>
-          <a:p>
-            <a:r>
-              <a:t>overflow_body_lines:</a:t>
-            </a:r>
-          </a:p>
-          <a:p>
-            <a:r>
-              <a:t>[]</a:t>
-            </a:r>
-          </a:p>
           <a:p/>
           <a:p>
             <a:r>
@@ -6731,22 +6786,22 @@
           </a:p>
           <a:p>
             <a:r>
-              <a:t>  "type": "none",</a:t>
-            </a:r>
-          </a:p>
-          <a:p>
-            <a:r>
-              <a:t>  "required": false,</a:t>
-            </a:r>
-          </a:p>
-          <a:p>
-            <a:r>
-              <a:t>  "screen_position": "none",</a:t>
-            </a:r>
-          </a:p>
-          <a:p>
-            <a:r>
-              <a:t>  "display_label": "",</a:t>
+              <a:t>  "type": "article_quote",</a:t>
+            </a:r>
+          </a:p>
+          <a:p>
+            <a:r>
+              <a:t>  "required": true,</a:t>
+            </a:r>
+          </a:p>
+          <a:p>
+            <a:r>
+              <a:t>  "screen_position": "left_half",</a:t>
+            </a:r>
+          </a:p>
+          <a:p>
+            <a:r>
+              <a:t>  "display_label": "[기사 인용]",</a:t>
             </a:r>
           </a:p>
           <a:p>
@@ -6766,7 +6821,7 @@
           </a:p>
           <a:p>
             <a:r>
-              <a:t>  "manual_insert_required": false</a:t>
+              <a:t>  "manual_insert_required": true</a:t>
             </a:r>
           </a:p>
           <a:p>
@@ -6954,7 +7009,22 @@
           </a:p>
           <a:p>
             <a:r>
-              <a:t>  "정책자료는 국민성장펀드가 AI·반도체 같은 첨단전략산업에 장기 자금을 공급하려는 틀이라고 설명한다.",</a:t>
+              <a:t>  "정책자료는 국민성장펀드가 AI·반도체 같은 첨단전략산업에 장기 자금을 공급하려는 틀이라고 설명한다."</a:t>
+            </a:r>
+          </a:p>
+          <a:p>
+            <a:r>
+              <a:t>]</a:t>
+            </a:r>
+          </a:p>
+          <a:p>
+            <a:r>
+              <a:t>overflow_body_lines:</a:t>
+            </a:r>
+          </a:p>
+          <a:p>
+            <a:r>
+              <a:t>[</a:t>
             </a:r>
           </a:p>
           <a:p>
@@ -6965,16 +7035,6 @@
           <a:p>
             <a:r>
               <a:t>]</a:t>
-            </a:r>
-          </a:p>
-          <a:p>
-            <a:r>
-              <a:t>overflow_body_lines:</a:t>
-            </a:r>
-          </a:p>
-          <a:p>
-            <a:r>
-              <a:t>[]</a:t>
             </a:r>
           </a:p>
           <a:p/>
@@ -7316,7 +7376,22 @@
           </a:p>
           <a:p>
             <a:r>
-              <a:t>  "너무 위험하면 결국 손실을 누가 떠안느냐는 문제가 생긴다.",</a:t>
+              <a:t>  "너무 위험하면 결국 손실을 누가 떠안느냐는 문제가 생긴다."</a:t>
+            </a:r>
+          </a:p>
+          <a:p>
+            <a:r>
+              <a:t>]</a:t>
+            </a:r>
+          </a:p>
+          <a:p>
+            <a:r>
+              <a:t>overflow_body_lines:</a:t>
+            </a:r>
+          </a:p>
+          <a:p>
+            <a:r>
+              <a:t>[</a:t>
             </a:r>
           </a:p>
           <a:p>
@@ -7327,16 +7402,6 @@
           <a:p>
             <a:r>
               <a:t>]</a:t>
-            </a:r>
-          </a:p>
-          <a:p>
-            <a:r>
-              <a:t>overflow_body_lines:</a:t>
-            </a:r>
-          </a:p>
-          <a:p>
-            <a:r>
-              <a:t>[]</a:t>
             </a:r>
           </a:p>
           <a:p/>
@@ -7914,17 +7979,17 @@
           </a:p>
           <a:p>
             <a:r>
-              <a:t>proof_object_type: none</a:t>
-            </a:r>
-          </a:p>
-          <a:p>
-            <a:r>
-              <a:t>proof_object_required: False</a:t>
-            </a:r>
-          </a:p>
-          <a:p>
-            <a:r>
-              <a:t>proof_object_screen_position: none</a:t>
+              <a:t>proof_object_type: article_quote</a:t>
+            </a:r>
+          </a:p>
+          <a:p>
+            <a:r>
+              <a:t>proof_object_required: True</a:t>
+            </a:r>
+          </a:p>
+          <a:p>
+            <a:r>
+              <a:t>proof_object_screen_position: left_half</a:t>
             </a:r>
           </a:p>
           <a:p>
@@ -7950,7 +8015,22 @@
           </a:p>
           <a:p>
             <a:r>
-              <a:t>  "반도체, 전력망, 데이터센터, 장비, 소재가 함께 필요하다.",</a:t>
+              <a:t>  "반도체, 전력망, 데이터센터, 장비, 소재가 함께 필요하다."</a:t>
+            </a:r>
+          </a:p>
+          <a:p>
+            <a:r>
+              <a:t>]</a:t>
+            </a:r>
+          </a:p>
+          <a:p>
+            <a:r>
+              <a:t>overflow_body_lines:</a:t>
+            </a:r>
+          </a:p>
+          <a:p>
+            <a:r>
+              <a:t>[</a:t>
             </a:r>
           </a:p>
           <a:p>
@@ -7963,16 +8043,6 @@
               <a:t>]</a:t>
             </a:r>
           </a:p>
-          <a:p>
-            <a:r>
-              <a:t>overflow_body_lines:</a:t>
-            </a:r>
-          </a:p>
-          <a:p>
-            <a:r>
-              <a:t>[]</a:t>
-            </a:r>
-          </a:p>
           <a:p/>
           <a:p>
             <a:r>
@@ -8079,22 +8149,22 @@
           </a:p>
           <a:p>
             <a:r>
-              <a:t>  "type": "none",</a:t>
-            </a:r>
-          </a:p>
-          <a:p>
-            <a:r>
-              <a:t>  "required": false,</a:t>
-            </a:r>
-          </a:p>
-          <a:p>
-            <a:r>
-              <a:t>  "screen_position": "none",</a:t>
-            </a:r>
-          </a:p>
-          <a:p>
-            <a:r>
-              <a:t>  "display_label": "",</a:t>
+              <a:t>  "type": "article_quote",</a:t>
+            </a:r>
+          </a:p>
+          <a:p>
+            <a:r>
+              <a:t>  "required": true,</a:t>
+            </a:r>
+          </a:p>
+          <a:p>
+            <a:r>
+              <a:t>  "screen_position": "left_half",</a:t>
+            </a:r>
+          </a:p>
+          <a:p>
+            <a:r>
+              <a:t>  "display_label": "[기사 인용]",</a:t>
             </a:r>
           </a:p>
           <a:p>
@@ -8114,7 +8184,7 @@
           </a:p>
           <a:p>
             <a:r>
-              <a:t>  "manual_insert_required": false</a:t>
+              <a:t>  "manual_insert_required": true</a:t>
             </a:r>
           </a:p>
           <a:p>
@@ -8654,7 +8724,22 @@
           </a:p>
           <a:p>
             <a:r>
-              <a:t>  "하지만 초기 기술, 인력, 데이터, 공정 노하우는 평가하기 어렵다.",</a:t>
+              <a:t>  "하지만 초기 기술, 인력, 데이터, 공정 노하우는 평가하기 어렵다."</a:t>
+            </a:r>
+          </a:p>
+          <a:p>
+            <a:r>
+              <a:t>]</a:t>
+            </a:r>
+          </a:p>
+          <a:p>
+            <a:r>
+              <a:t>overflow_body_lines:</a:t>
+            </a:r>
+          </a:p>
+          <a:p>
+            <a:r>
+              <a:t>[</a:t>
             </a:r>
           </a:p>
           <a:p>
@@ -8665,16 +8750,6 @@
           <a:p>
             <a:r>
               <a:t>]</a:t>
-            </a:r>
-          </a:p>
-          <a:p>
-            <a:r>
-              <a:t>overflow_body_lines:</a:t>
-            </a:r>
-          </a:p>
-          <a:p>
-            <a:r>
-              <a:t>[]</a:t>
             </a:r>
           </a:p>
           <a:p/>
@@ -12006,7 +12081,7 @@
           <a:p>
             <a:pPr algn="ctr"/>
             <a:r>
-              <a:rPr sz="1300">
+              <a:rPr sz="1300" b="0">
                 <a:solidFill>
                   <a:srgbClr val="566070"/>
                 </a:solidFill>
@@ -12045,7 +12120,7 @@
               </a:spcAft>
             </a:pPr>
             <a:r>
-              <a:rPr sz="2400" b="0" u="none">
+              <a:rPr sz="2800" b="0" u="none">
                 <a:solidFill>
                   <a:srgbClr val="000000"/>
                 </a:solidFill>
@@ -12061,29 +12136,13 @@
               </a:spcAft>
             </a:pPr>
             <a:r>
-              <a:rPr sz="2400" b="0" u="none">
+              <a:rPr sz="2800" b="0" u="none">
                 <a:solidFill>
                   <a:srgbClr val="000000"/>
                 </a:solidFill>
                 <a:latin typeface="맑은 고딕"/>
               </a:rPr>
               <a:t>하지만 정책자금이 늘 좋은 결과를 만든다고 단정할 수는 없다.</a:t>
-            </a:r>
-          </a:p>
-          <a:p>
-            <a:pPr>
-              <a:spcAft>
-                <a:spcPts val="800"/>
-              </a:spcAft>
-            </a:pPr>
-            <a:r>
-              <a:rPr sz="2400" b="0" u="none">
-                <a:solidFill>
-                  <a:srgbClr val="000000"/>
-                </a:solidFill>
-                <a:latin typeface="맑은 고딕"/>
-              </a:rPr>
-              <a:t>정책금융은 성장의 마중물일 수도, 손실의 통로일 수도 있다.</a:t>
             </a:r>
           </a:p>
         </p:txBody>
@@ -12191,7 +12250,7 @@
           <a:p>
             <a:pPr algn="ctr"/>
             <a:r>
-              <a:rPr sz="1300">
+              <a:rPr sz="1300" b="0">
                 <a:solidFill>
                   <a:srgbClr val="566070"/>
                 </a:solidFill>
@@ -12230,7 +12289,7 @@
               </a:spcAft>
             </a:pPr>
             <a:r>
-              <a:rPr sz="2400" b="0" u="none">
+              <a:rPr sz="2800" b="0" u="none">
                 <a:solidFill>
                   <a:srgbClr val="000000"/>
                 </a:solidFill>
@@ -12246,29 +12305,13 @@
               </a:spcAft>
             </a:pPr>
             <a:r>
-              <a:rPr sz="2400" b="0" u="none">
+              <a:rPr sz="2800" b="0" u="none">
                 <a:solidFill>
                   <a:srgbClr val="000000"/>
                 </a:solidFill>
                 <a:latin typeface="맑은 고딕"/>
               </a:rPr>
               <a:t>기업은 긴 투자금을 원한다.</a:t>
-            </a:r>
-          </a:p>
-          <a:p>
-            <a:pPr>
-              <a:spcAft>
-                <a:spcPts val="800"/>
-              </a:spcAft>
-            </a:pPr>
-            <a:r>
-              <a:rPr sz="2400" b="0" u="none">
-                <a:solidFill>
-                  <a:srgbClr val="000000"/>
-                </a:solidFill>
-                <a:latin typeface="맑은 고딕"/>
-              </a:rPr>
-              <a:t>국가는 전략산업을 키우고 싶다.</a:t>
             </a:r>
           </a:p>
         </p:txBody>
@@ -12401,8 +12444,8 @@
         </p:nvSpPr>
         <p:spPr>
           <a:xfrm>
-            <a:off x="713232" y="1874519"/>
-            <a:ext cx="9875520" cy="2651760"/>
+            <a:off x="5989320" y="1874519"/>
+            <a:ext cx="5303520" cy="2651760"/>
           </a:xfrm>
           <a:prstGeom prst="rect">
             <a:avLst/>
@@ -12446,20 +12489,90 @@
               <a:t>국민참여형 펀드는 일반 국민 자금도 일부 모아 자펀드에 투자하는 구조로 설계됐다.</a:t>
             </a:r>
           </a:p>
-          <a:p>
-            <a:pPr>
-              <a:spcAft>
+        </p:txBody>
+      </p:sp>
+      <p:sp>
+        <p:nvSpPr>
+          <p:cNvPr id="4" name="Rectangle 3"/>
+          <p:cNvSpPr/>
+          <p:nvPr/>
+        </p:nvSpPr>
+        <p:spPr>
+          <a:xfrm>
+            <a:off x="713232" y="1417320"/>
+            <a:ext cx="4892040" cy="4114800"/>
+          </a:xfrm>
+          <a:prstGeom prst="rect">
+            <a:avLst/>
+          </a:prstGeom>
+          <a:solidFill>
+            <a:srgbClr val="F5F5F5"/>
+          </a:solidFill>
+          <a:ln w="12700">
+            <a:solidFill>
+              <a:srgbClr val="BEBEBE"/>
+            </a:solidFill>
+          </a:ln>
+        </p:spPr>
+        <p:style>
+          <a:lnRef idx="1">
+            <a:schemeClr val="accent1"/>
+          </a:lnRef>
+          <a:fillRef idx="3">
+            <a:schemeClr val="accent1"/>
+          </a:fillRef>
+          <a:effectRef idx="2">
+            <a:schemeClr val="accent1"/>
+          </a:effectRef>
+          <a:fontRef idx="minor">
+            <a:schemeClr val="lt1"/>
+          </a:fontRef>
+        </p:style>
+        <p:txBody>
+          <a:bodyPr rtlCol="0" anchor="ctr" wrap="square"/>
+          <a:lstStyle/>
+          <a:p>
+            <a:pPr algn="ctr"/>
+            <a:r>
+              <a:rPr sz="1300" b="1">
+                <a:solidFill>
+                  <a:srgbClr val="566070"/>
+                </a:solidFill>
+                <a:latin typeface="맑은 고딕"/>
+              </a:rPr>
+              <a:t>[기사 인용]</a:t>
+            </a:r>
+          </a:p>
+          <a:p>
+            <a:pPr algn="ctr">
+              <a:spcBef>
                 <a:spcPts val="800"/>
-              </a:spcAft>
+              </a:spcBef>
             </a:pPr>
             <a:r>
-              <a:rPr sz="2800" b="0" u="none">
+              <a:rPr sz="1800" b="1">
                 <a:solidFill>
                   <a:srgbClr val="000000"/>
                 </a:solidFill>
                 <a:latin typeface="맑은 고딕"/>
               </a:rPr>
-              <a:t>그래서 이름은 성장 이야기지만, 실제 방송에서는 투자자 리스크와 정책 책임을 함께 봐야 한다.</a:t>
+              <a:t>금융위원회</a:t>
+            </a:r>
+          </a:p>
+          <a:p>
+            <a:pPr algn="ctr">
+              <a:spcBef>
+                <a:spcPts val="400"/>
+              </a:spcBef>
+            </a:pPr>
+            <a:r>
+              <a:rPr sz="1400" b="0">
+                <a:solidFill>
+                  <a:srgbClr val="566070"/>
+                </a:solidFill>
+                <a:latin typeface="맑은 고딕"/>
+              </a:rPr>
+              <a:t>국민성장펀드라는 이름이 붙으면 이야기는 더 어려워진다</a:t>
             </a:r>
           </a:p>
         </p:txBody>
@@ -12532,8 +12645,8 @@
         </p:nvSpPr>
         <p:spPr>
           <a:xfrm>
-            <a:off x="572414" y="1874519"/>
-            <a:ext cx="11193170" cy="1302105"/>
+            <a:off x="5989320" y="1208836"/>
+            <a:ext cx="5394960" cy="1302105"/>
           </a:xfrm>
           <a:prstGeom prst="rect">
             <a:avLst/>
@@ -12577,20 +12690,90 @@
               <a:t>이 장치는 투자자의 위험을 낮추려는 설계지만, 원금 손실 가능성이 사라진다는 뜻은 아니다.</a:t>
             </a:r>
           </a:p>
-          <a:p>
-            <a:pPr>
-              <a:spcAft>
+        </p:txBody>
+      </p:sp>
+      <p:sp>
+        <p:nvSpPr>
+          <p:cNvPr id="4" name="Rectangle 3"/>
+          <p:cNvSpPr/>
+          <p:nvPr/>
+        </p:nvSpPr>
+        <p:spPr>
+          <a:xfrm>
+            <a:off x="713232" y="1417320"/>
+            <a:ext cx="4892040" cy="4114800"/>
+          </a:xfrm>
+          <a:prstGeom prst="rect">
+            <a:avLst/>
+          </a:prstGeom>
+          <a:solidFill>
+            <a:srgbClr val="F5F5F5"/>
+          </a:solidFill>
+          <a:ln w="12700">
+            <a:solidFill>
+              <a:srgbClr val="BEBEBE"/>
+            </a:solidFill>
+          </a:ln>
+        </p:spPr>
+        <p:style>
+          <a:lnRef idx="1">
+            <a:schemeClr val="accent1"/>
+          </a:lnRef>
+          <a:fillRef idx="3">
+            <a:schemeClr val="accent1"/>
+          </a:fillRef>
+          <a:effectRef idx="2">
+            <a:schemeClr val="accent1"/>
+          </a:effectRef>
+          <a:fontRef idx="minor">
+            <a:schemeClr val="lt1"/>
+          </a:fontRef>
+        </p:style>
+        <p:txBody>
+          <a:bodyPr rtlCol="0" anchor="ctr" wrap="square"/>
+          <a:lstStyle/>
+          <a:p>
+            <a:pPr algn="ctr"/>
+            <a:r>
+              <a:rPr sz="1300" b="1">
+                <a:solidFill>
+                  <a:srgbClr val="566070"/>
+                </a:solidFill>
+                <a:latin typeface="맑은 고딕"/>
+              </a:rPr>
+              <a:t>[기사 인용]</a:t>
+            </a:r>
+          </a:p>
+          <a:p>
+            <a:pPr algn="ctr">
+              <a:spcBef>
                 <a:spcPts val="800"/>
-              </a:spcAft>
+              </a:spcBef>
             </a:pPr>
             <a:r>
-              <a:rPr sz="2800" b="0" u="none">
+              <a:rPr sz="1800" b="1">
                 <a:solidFill>
                   <a:srgbClr val="000000"/>
                 </a:solidFill>
                 <a:latin typeface="맑은 고딕"/>
               </a:rPr>
-              <a:t>손실을 누가, 어떤 순서로, 어디까지 부담하는지가 핵심 질문이다.</a:t>
+              <a:t>정책브리핑</a:t>
+            </a:r>
+          </a:p>
+          <a:p>
+            <a:pPr algn="ctr">
+              <a:spcBef>
+                <a:spcPts val="400"/>
+              </a:spcBef>
+            </a:pPr>
+            <a:r>
+              <a:rPr sz="1400" b="0">
+                <a:solidFill>
+                  <a:srgbClr val="566070"/>
+                </a:solidFill>
+                <a:latin typeface="맑은 고딕"/>
+              </a:rPr>
+              <a:t>위험을 나눈다는 말은 손실 가능성도 나눈다는 뜻이다</a:t>
             </a:r>
           </a:p>
         </p:txBody>
@@ -12664,13 +12847,45 @@
           <a:p>
             <a:pPr algn="ctr"/>
             <a:r>
-              <a:rPr sz="1300">
+              <a:rPr sz="1300" b="1">
                 <a:solidFill>
                   <a:srgbClr val="566070"/>
                 </a:solidFill>
                 <a:latin typeface="맑은 고딕"/>
               </a:rPr>
               <a:t>[기사 인용]</a:t>
+            </a:r>
+          </a:p>
+          <a:p>
+            <a:pPr algn="ctr">
+              <a:spcBef>
+                <a:spcPts val="800"/>
+              </a:spcBef>
+            </a:pPr>
+            <a:r>
+              <a:rPr sz="1800" b="1">
+                <a:solidFill>
+                  <a:srgbClr val="000000"/>
+                </a:solidFill>
+                <a:latin typeface="맑은 고딕"/>
+              </a:rPr>
+              <a:t>정책브리핑</a:t>
+            </a:r>
+          </a:p>
+          <a:p>
+            <a:pPr algn="ctr">
+              <a:spcBef>
+                <a:spcPts val="400"/>
+              </a:spcBef>
+            </a:pPr>
+            <a:r>
+              <a:rPr sz="1400" b="0">
+                <a:solidFill>
+                  <a:srgbClr val="566070"/>
+                </a:solidFill>
+                <a:latin typeface="맑은 고딕"/>
+              </a:rPr>
+              <a:t>정책금융의 어려움은 “누가 먼저 잃을 것인가”다</a:t>
             </a:r>
           </a:p>
         </p:txBody>
@@ -12963,7 +13178,7 @@
           <a:p>
             <a:pPr algn="ctr"/>
             <a:r>
-              <a:rPr sz="1300">
+              <a:rPr sz="1300" b="0">
                 <a:solidFill>
                   <a:srgbClr val="566070"/>
                 </a:solidFill>
@@ -13002,7 +13217,7 @@
               </a:spcAft>
             </a:pPr>
             <a:r>
-              <a:rPr sz="2400" b="0" u="none">
+              <a:rPr sz="2800" b="0" u="none">
                 <a:solidFill>
                   <a:srgbClr val="000000"/>
                 </a:solidFill>
@@ -13018,29 +13233,13 @@
               </a:spcAft>
             </a:pPr>
             <a:r>
-              <a:rPr sz="2400" b="0" u="none">
+              <a:rPr sz="2800" b="0" u="none">
                 <a:solidFill>
                   <a:srgbClr val="000000"/>
                 </a:solidFill>
                 <a:latin typeface="맑은 고딕"/>
               </a:rPr>
               <a:t>하지만 방송에서는 이것이 특정 기업 성공 보장이나 특정 상품 추천처럼 들리면 안 된다.</a:t>
-            </a:r>
-          </a:p>
-          <a:p>
-            <a:pPr>
-              <a:spcAft>
-                <a:spcPts val="800"/>
-              </a:spcAft>
-            </a:pPr>
-            <a:r>
-              <a:rPr sz="2400" b="0" u="none">
-                <a:solidFill>
-                  <a:srgbClr val="000000"/>
-                </a:solidFill>
-                <a:latin typeface="맑은 고딕"/>
-              </a:rPr>
-              <a:t>성장산업 지원과 특정 기업 밀어주기는 구분해서 다뤄야 한다.</a:t>
             </a:r>
           </a:p>
         </p:txBody>
@@ -13148,7 +13347,7 @@
           <a:p>
             <a:pPr algn="ctr"/>
             <a:r>
-              <a:rPr sz="1300">
+              <a:rPr sz="1300" b="0">
                 <a:solidFill>
                   <a:srgbClr val="566070"/>
                 </a:solidFill>
@@ -13187,7 +13386,7 @@
               </a:spcAft>
             </a:pPr>
             <a:r>
-              <a:rPr sz="2400" b="0" u="none">
+              <a:rPr sz="2800" b="0" u="none">
                 <a:solidFill>
                   <a:srgbClr val="000000"/>
                 </a:solidFill>
@@ -13203,29 +13402,13 @@
               </a:spcAft>
             </a:pPr>
             <a:r>
-              <a:rPr sz="2400" b="0" u="none">
+              <a:rPr sz="2800" b="0" u="none">
                 <a:solidFill>
                   <a:srgbClr val="000000"/>
                 </a:solidFill>
                 <a:latin typeface="맑은 고딕"/>
               </a:rPr>
               <a:t>또 은행과 금융회사는 건전성 규제, 위험가중자산, 예금자 보호 논리 안에서 움직인다.</a:t>
-            </a:r>
-          </a:p>
-          <a:p>
-            <a:pPr>
-              <a:spcAft>
-                <a:spcPts val="800"/>
-              </a:spcAft>
-            </a:pPr>
-            <a:r>
-              <a:rPr sz="2400" b="0" u="none">
-                <a:solidFill>
-                  <a:srgbClr val="000000"/>
-                </a:solidFill>
-                <a:latin typeface="맑은 고딕"/>
-              </a:rPr>
-              <a:t>그래서 아무도 위험을 안 지는 문제와, 누군가에게 위험을 떠넘기는 문제를 동시에 봐야 한다.</a:t>
             </a:r>
           </a:p>
         </p:txBody>
@@ -13333,7 +13516,7 @@
           <a:p>
             <a:pPr algn="ctr"/>
             <a:r>
-              <a:rPr sz="1300">
+              <a:rPr sz="1300" b="0">
                 <a:solidFill>
                   <a:srgbClr val="566070"/>
                 </a:solidFill>
@@ -13372,7 +13555,7 @@
               </a:spcAft>
             </a:pPr>
             <a:r>
-              <a:rPr sz="2400" b="0" u="none">
+              <a:rPr sz="2800" b="0" u="none">
                 <a:solidFill>
                   <a:srgbClr val="000000"/>
                 </a:solidFill>
@@ -13388,29 +13571,13 @@
               </a:spcAft>
             </a:pPr>
             <a:r>
-              <a:rPr sz="2400" b="0" u="none">
+              <a:rPr sz="2800" b="0" u="none">
                 <a:solidFill>
                   <a:srgbClr val="000000"/>
                 </a:solidFill>
                 <a:latin typeface="맑은 고딕"/>
               </a:rPr>
               <a:t>하지만 위험도 함께 나눠야 한다면, 손실이 발생했을 때 재정·운용사·투자자·금융권의 책임선이 중요해진다.</a:t>
-            </a:r>
-          </a:p>
-          <a:p>
-            <a:pPr>
-              <a:spcAft>
-                <a:spcPts val="800"/>
-              </a:spcAft>
-            </a:pPr>
-            <a:r>
-              <a:rPr sz="2400" b="0" u="none">
-                <a:solidFill>
-                  <a:srgbClr val="000000"/>
-                </a:solidFill>
-                <a:latin typeface="맑은 고딕"/>
-              </a:rPr>
-              <a:t>국민성장펀드 이야기는 결국 수익보다 위험 배분의 설계로 읽어야 한다.</a:t>
             </a:r>
           </a:p>
         </p:txBody>
@@ -13543,8 +13710,8 @@
         </p:nvSpPr>
         <p:spPr>
           <a:xfrm>
-            <a:off x="713232" y="1874519"/>
-            <a:ext cx="9875520" cy="2651760"/>
+            <a:off x="5989320" y="1874519"/>
+            <a:ext cx="5303520" cy="2651760"/>
           </a:xfrm>
           <a:prstGeom prst="rect">
             <a:avLst/>
@@ -13563,7 +13730,7 @@
               </a:spcAft>
             </a:pPr>
             <a:r>
-              <a:rPr sz="2800" b="0" u="none">
+              <a:rPr sz="2400" b="0" u="none">
                 <a:solidFill>
                   <a:srgbClr val="000000"/>
                 </a:solidFill>
@@ -13579,7 +13746,7 @@
               </a:spcAft>
             </a:pPr>
             <a:r>
-              <a:rPr sz="2800" b="0" u="none">
+              <a:rPr sz="2400" b="0" u="none">
                 <a:solidFill>
                   <a:srgbClr val="000000"/>
                 </a:solidFill>
@@ -13588,218 +13755,11 @@
               <a:t>금융위원회 공식자료는 국민성장펀드가 5년간 150조 원, 2026년 30조 원 규모로 첨단산업 생태계에 자금을 공급하는 틀이라고 설명한다.</a:t>
             </a:r>
           </a:p>
-          <a:p>
-            <a:pPr>
-              <a:spcAft>
-                <a:spcPts val="800"/>
-              </a:spcAft>
-            </a:pPr>
-            <a:r>
-              <a:rPr sz="2800" b="0" u="none">
-                <a:solidFill>
-                  <a:srgbClr val="000000"/>
-                </a:solidFill>
-                <a:latin typeface="맑은 고딕"/>
-              </a:rPr>
-              <a:t>다만 이 발언과 정책 숫자가 곧 정책 성공을 뜻하는 것은 아니다.</a:t>
-            </a:r>
-          </a:p>
         </p:txBody>
       </p:sp>
-    </p:spTree>
-  </p:cSld>
-  <p:clrMapOvr>
-    <a:masterClrMapping/>
-  </p:clrMapOvr>
-</p:sld>
-</file>
-
-<file path=ppt/slides/slide20.xml><?xml version="1.0" encoding="utf-8"?>
-<p:sld xmlns:a="http://schemas.openxmlformats.org/drawingml/2006/main" xmlns:p="http://schemas.openxmlformats.org/presentationml/2006/main" xmlns:r="http://schemas.openxmlformats.org/officeDocument/2006/relationships">
-  <p:cSld>
-    <p:bg>
-      <p:bgPr>
-        <a:solidFill>
-          <a:srgbClr val="F8F9FA"/>
-        </a:solidFill>
-        <a:effectLst/>
-      </p:bgPr>
-    </p:bg>
-    <p:spTree>
-      <p:nvGrpSpPr>
-        <p:cNvPr id="1" name=""/>
-        <p:cNvGrpSpPr/>
-        <p:nvPr/>
-      </p:nvGrpSpPr>
-      <p:grpSpPr/>
-      <p:sp>
-        <p:nvSpPr>
-          <p:cNvPr id="2" name="TextBox 1"/>
-          <p:cNvSpPr txBox="1"/>
-          <p:nvPr/>
-        </p:nvSpPr>
-        <p:spPr>
-          <a:xfrm>
-            <a:off x="572414" y="356616"/>
-            <a:ext cx="11192256" cy="521207"/>
-          </a:xfrm>
-          <a:prstGeom prst="rect">
-            <a:avLst/>
-          </a:prstGeom>
-          <a:noFill/>
-        </p:spPr>
-        <p:txBody>
-          <a:bodyPr wrap="square">
-            <a:spAutoFit/>
-          </a:bodyPr>
-          <a:lstStyle/>
-          <a:p>
-            <a:r>
-              <a:rPr sz="2800" b="1" u="none">
-                <a:solidFill>
-                  <a:srgbClr val="FF0000"/>
-                </a:solidFill>
-                <a:latin typeface="맑은 고딕"/>
-              </a:rPr>
-              <a:t>금융권에 “성장에 베팅하라”고 말하는 순간 생기는 문제</a:t>
-            </a:r>
-          </a:p>
-        </p:txBody>
-      </p:sp>
-      <p:sp>
-        <p:nvSpPr>
-          <p:cNvPr id="3" name="TextBox 2"/>
-          <p:cNvSpPr txBox="1"/>
-          <p:nvPr/>
-        </p:nvSpPr>
-        <p:spPr>
-          <a:xfrm>
-            <a:off x="572414" y="1874519"/>
-            <a:ext cx="11193170" cy="1302105"/>
-          </a:xfrm>
-          <a:prstGeom prst="rect">
-            <a:avLst/>
-          </a:prstGeom>
-          <a:noFill/>
-        </p:spPr>
-        <p:txBody>
-          <a:bodyPr wrap="square">
-            <a:spAutoFit/>
-          </a:bodyPr>
-          <a:lstStyle/>
-          <a:p>
-            <a:pPr>
-              <a:spcAft>
-                <a:spcPts val="800"/>
-              </a:spcAft>
-            </a:pPr>
-            <a:r>
-              <a:rPr sz="2800" b="0" u="none">
-                <a:solidFill>
-                  <a:srgbClr val="000000"/>
-                </a:solidFill>
-                <a:latin typeface="맑은 고딕"/>
-              </a:rPr>
-              <a:t>금융권에 성장산업 투자를 요구하면 곧바로 건전성 문제가 따라온다.</a:t>
-            </a:r>
-          </a:p>
-          <a:p>
-            <a:pPr>
-              <a:spcAft>
-                <a:spcPts val="800"/>
-              </a:spcAft>
-            </a:pPr>
-            <a:r>
-              <a:rPr sz="2800" b="0" u="none">
-                <a:solidFill>
-                  <a:srgbClr val="000000"/>
-                </a:solidFill>
-                <a:latin typeface="맑은 고딕"/>
-              </a:rPr>
-              <a:t>위험가중자산이 커지면 자본 부담도 커질 수 있고, 예금자 보호 논리와도 충돌할 수 있다.</a:t>
-            </a:r>
-          </a:p>
-          <a:p>
-            <a:pPr>
-              <a:spcAft>
-                <a:spcPts val="800"/>
-              </a:spcAft>
-            </a:pPr>
-            <a:r>
-              <a:rPr sz="2800" b="0" u="none">
-                <a:solidFill>
-                  <a:srgbClr val="000000"/>
-                </a:solidFill>
-                <a:latin typeface="맑은 고딕"/>
-              </a:rPr>
-              <a:t>따라서 생산적 금융은 구호가 아니라 자본규제와 위험분담 설계의 문제다.</a:t>
-            </a:r>
-          </a:p>
-        </p:txBody>
-      </p:sp>
-    </p:spTree>
-  </p:cSld>
-  <p:clrMapOvr>
-    <a:masterClrMapping/>
-  </p:clrMapOvr>
-</p:sld>
-</file>
-
-<file path=ppt/slides/slide21.xml><?xml version="1.0" encoding="utf-8"?>
-<p:sld xmlns:a="http://schemas.openxmlformats.org/drawingml/2006/main" xmlns:p="http://schemas.openxmlformats.org/presentationml/2006/main" xmlns:r="http://schemas.openxmlformats.org/officeDocument/2006/relationships">
-  <p:cSld>
-    <p:bg>
-      <p:bgPr>
-        <a:solidFill>
-          <a:srgbClr val="F8F9FA"/>
-        </a:solidFill>
-        <a:effectLst/>
-      </p:bgPr>
-    </p:bg>
-    <p:spTree>
-      <p:nvGrpSpPr>
-        <p:cNvPr id="1" name=""/>
-        <p:cNvGrpSpPr/>
-        <p:nvPr/>
-      </p:nvGrpSpPr>
-      <p:grpSpPr/>
-      <p:sp>
-        <p:nvSpPr>
-          <p:cNvPr id="2" name="TextBox 1"/>
-          <p:cNvSpPr txBox="1"/>
-          <p:nvPr/>
-        </p:nvSpPr>
-        <p:spPr>
-          <a:xfrm>
-            <a:off x="572414" y="356616"/>
-            <a:ext cx="11192256" cy="521207"/>
-          </a:xfrm>
-          <a:prstGeom prst="rect">
-            <a:avLst/>
-          </a:prstGeom>
-          <a:noFill/>
-        </p:spPr>
-        <p:txBody>
-          <a:bodyPr wrap="square">
-            <a:spAutoFit/>
-          </a:bodyPr>
-          <a:lstStyle/>
-          <a:p>
-            <a:r>
-              <a:rPr sz="2800" b="1" u="none">
-                <a:solidFill>
-                  <a:srgbClr val="FF0000"/>
-                </a:solidFill>
-                <a:latin typeface="맑은 고딕"/>
-              </a:rPr>
-              <a:t>투자 이야기로 들리지 않게 조심해야 한다</a:t>
-            </a:r>
-          </a:p>
-        </p:txBody>
-      </p:sp>
-      <p:sp>
-        <p:nvSpPr>
-          <p:cNvPr id="3" name="Rectangle 2"/>
+      <p:sp>
+        <p:nvSpPr>
+          <p:cNvPr id="4" name="Rectangle 3"/>
           <p:cNvSpPr/>
           <p:nvPr/>
         </p:nvSpPr>
@@ -13840,84 +13800,45 @@
           <a:p>
             <a:pPr algn="ctr"/>
             <a:r>
-              <a:rPr sz="1300">
+              <a:rPr sz="1300" b="1">
                 <a:solidFill>
                   <a:srgbClr val="566070"/>
                 </a:solidFill>
                 <a:latin typeface="맑은 고딕"/>
               </a:rPr>
-              <a:t>[도식]</a:t>
-            </a:r>
-          </a:p>
-        </p:txBody>
-      </p:sp>
-      <p:sp>
-        <p:nvSpPr>
-          <p:cNvPr id="4" name="TextBox 3"/>
-          <p:cNvSpPr txBox="1"/>
-          <p:nvPr/>
-        </p:nvSpPr>
-        <p:spPr>
-          <a:xfrm>
-            <a:off x="5989320" y="1508760"/>
-            <a:ext cx="5303520" cy="3337560"/>
-          </a:xfrm>
-          <a:prstGeom prst="rect">
-            <a:avLst/>
-          </a:prstGeom>
-          <a:noFill/>
-        </p:spPr>
-        <p:txBody>
-          <a:bodyPr wrap="square">
-            <a:spAutoFit/>
-          </a:bodyPr>
-          <a:lstStyle/>
-          <a:p>
-            <a:pPr>
-              <a:spcAft>
+              <a:t>[기사 인용]</a:t>
+            </a:r>
+          </a:p>
+          <a:p>
+            <a:pPr algn="ctr">
+              <a:spcBef>
                 <a:spcPts val="800"/>
-              </a:spcAft>
+              </a:spcBef>
             </a:pPr>
             <a:r>
-              <a:rPr sz="2400" b="0" u="none">
+              <a:rPr sz="1800" b="1">
                 <a:solidFill>
                   <a:srgbClr val="000000"/>
                 </a:solidFill>
                 <a:latin typeface="맑은 고딕"/>
               </a:rPr>
-              <a:t>이 주제는 곧바로 특정 산업·기업·펀드 투자 판단처럼 보일 수 있다.</a:t>
-            </a:r>
-          </a:p>
-          <a:p>
-            <a:pPr>
-              <a:spcAft>
-                <a:spcPts val="800"/>
-              </a:spcAft>
+              <a:t>news.einfomax.co.kr</a:t>
+            </a:r>
+          </a:p>
+          <a:p>
+            <a:pPr algn="ctr">
+              <a:spcBef>
+                <a:spcPts val="400"/>
+              </a:spcBef>
             </a:pPr>
             <a:r>
-              <a:rPr sz="2400" b="0" u="none">
+              <a:rPr sz="1400" b="0">
                 <a:solidFill>
-                  <a:srgbClr val="000000"/>
+                  <a:srgbClr val="566070"/>
                 </a:solidFill>
                 <a:latin typeface="맑은 고딕"/>
               </a:rPr>
-              <a:t>그래서 수익률, 주가, 매수·매도, 유망종목식 표현은 피해야 한다.</a:t>
-            </a:r>
-          </a:p>
-          <a:p>
-            <a:pPr>
-              <a:spcAft>
-                <a:spcPts val="800"/>
-              </a:spcAft>
-            </a:pPr>
-            <a:r>
-              <a:rPr sz="2400" b="0" u="none">
-                <a:solidFill>
-                  <a:srgbClr val="000000"/>
-                </a:solidFill>
-                <a:latin typeface="맑은 고딕"/>
-              </a:rPr>
-              <a:t>핵심은 투자 추천이 아니라 위험을 누가 나누느냐는 제도 설계다.</a:t>
+              <a:t>금융위원장이 던진 질문 하나</a:t>
             </a:r>
           </a:p>
         </p:txBody>
@@ -13930,7 +13851,7 @@
 </p:sld>
 </file>
 
-<file path=ppt/slides/slide22.xml><?xml version="1.0" encoding="utf-8"?>
+<file path=ppt/slides/slide20.xml><?xml version="1.0" encoding="utf-8"?>
 <p:sld xmlns:a="http://schemas.openxmlformats.org/drawingml/2006/main" xmlns:p="http://schemas.openxmlformats.org/presentationml/2006/main" xmlns:r="http://schemas.openxmlformats.org/officeDocument/2006/relationships">
   <p:cSld>
     <p:bg>
@@ -13977,7 +13898,7 @@
                 </a:solidFill>
                 <a:latin typeface="맑은 고딕"/>
               </a:rPr>
-              <a:t>금융은 위험을 피하는 기술인가, 좋은 위험을 고르는 기술인가</a:t>
+              <a:t>금융권에 “성장에 베팅하라”고 말하는 순간 생기는 문제</a:t>
             </a:r>
           </a:p>
         </p:txBody>
@@ -13990,8 +13911,8 @@
         </p:nvSpPr>
         <p:spPr>
           <a:xfrm>
-            <a:off x="713232" y="2103120"/>
-            <a:ext cx="10652760" cy="2926080"/>
+            <a:off x="5989320" y="1208836"/>
+            <a:ext cx="5394960" cy="1302105"/>
           </a:xfrm>
           <a:prstGeom prst="rect">
             <a:avLst/>
@@ -14016,7 +13937,7 @@
                 </a:solidFill>
                 <a:latin typeface="맑은 고딕"/>
               </a:rPr>
-              <a:t>생산적 금융의 질문은 “정부 정책이 맞다/틀리다”가 아니다.</a:t>
+              <a:t>금융권에 성장산업 투자를 요구하면 곧바로 건전성 문제가 따라온다.</a:t>
             </a:r>
           </a:p>
           <a:p>
@@ -14032,467 +13953,14 @@
                 </a:solidFill>
                 <a:latin typeface="맑은 고딕"/>
               </a:rPr>
-              <a:t>좋은 위험을 고르는 능력, 손실을 나누는 규칙, 금융권 건전성을 함께 설계할 수 있느냐는 질문이다.</a:t>
-            </a:r>
-          </a:p>
-          <a:p>
-            <a:pPr>
-              <a:spcAft>
-                <a:spcPts val="800"/>
-              </a:spcAft>
-            </a:pPr>
-            <a:r>
-              <a:rPr sz="2800" b="0" u="none">
-                <a:solidFill>
-                  <a:srgbClr val="000000"/>
-                </a:solidFill>
-                <a:latin typeface="맑은 고딕"/>
-              </a:rPr>
-              <a:t>국민성장펀드는 그 질문을 보여주는 한 사례일 뿐, 성공을 단정할 수는 없다.</a:t>
+              <a:t>위험가중자산이 커지면 자본 부담도 커질 수 있고, 예금자 보호 논리와도 충돌할 수 있다.</a:t>
             </a:r>
           </a:p>
         </p:txBody>
       </p:sp>
-    </p:spTree>
-  </p:cSld>
-  <p:clrMapOvr>
-    <a:masterClrMapping/>
-  </p:clrMapOvr>
-</p:sld>
-</file>
-
-<file path=ppt/slides/slide23.xml><?xml version="1.0" encoding="utf-8"?>
-<p:sld xmlns:a="http://schemas.openxmlformats.org/drawingml/2006/main" xmlns:p="http://schemas.openxmlformats.org/presentationml/2006/main" xmlns:r="http://schemas.openxmlformats.org/officeDocument/2006/relationships">
-  <p:cSld>
-    <p:bg>
-      <p:bgPr>
-        <a:solidFill>
-          <a:srgbClr val="F8F9FA"/>
-        </a:solidFill>
-        <a:effectLst/>
-      </p:bgPr>
-    </p:bg>
-    <p:spTree>
-      <p:nvGrpSpPr>
-        <p:cNvPr id="1" name=""/>
-        <p:cNvGrpSpPr/>
-        <p:nvPr/>
-      </p:nvGrpSpPr>
-      <p:grpSpPr/>
-      <p:sp>
-        <p:nvSpPr>
-          <p:cNvPr id="2" name="TextBox 1"/>
-          <p:cNvSpPr txBox="1"/>
-          <p:nvPr/>
-        </p:nvSpPr>
-        <p:spPr>
-          <a:xfrm>
-            <a:off x="3495751" y="3058668"/>
-            <a:ext cx="3383280" cy="523036"/>
-          </a:xfrm>
-          <a:prstGeom prst="rect">
-            <a:avLst/>
-          </a:prstGeom>
-          <a:noFill/>
-        </p:spPr>
-        <p:txBody>
-          <a:bodyPr wrap="square">
-            <a:spAutoFit/>
-          </a:bodyPr>
-          <a:lstStyle/>
-          <a:p>
-            <a:r>
-              <a:rPr sz="2800" b="1" u="none">
-                <a:solidFill>
-                  <a:srgbClr val="BF6F24"/>
-                </a:solidFill>
-                <a:latin typeface="맑은 고딕"/>
-              </a:rPr>
-              <a:t>[내부 체크리스트] 이 부분은 아직 숫자가 필요하다</a:t>
-            </a:r>
-          </a:p>
-        </p:txBody>
-      </p:sp>
-      <p:sp>
-        <p:nvSpPr>
-          <p:cNvPr id="3" name="TextBox 2"/>
-          <p:cNvSpPr txBox="1"/>
-          <p:nvPr/>
-        </p:nvSpPr>
-        <p:spPr>
-          <a:xfrm>
-            <a:off x="822960" y="3810304"/>
-            <a:ext cx="10424160" cy="4480560"/>
-          </a:xfrm>
-          <a:prstGeom prst="rect">
-            <a:avLst/>
-          </a:prstGeom>
-          <a:noFill/>
-        </p:spPr>
-        <p:txBody>
-          <a:bodyPr wrap="square">
-            <a:spAutoFit/>
-          </a:bodyPr>
-          <a:lstStyle/>
-          <a:p>
-            <a:pPr>
-              <a:spcAft>
-                <a:spcPts val="800"/>
-              </a:spcAft>
-            </a:pPr>
-            <a:r>
-              <a:rPr sz="2400" b="0" u="none">
-                <a:solidFill>
-                  <a:srgbClr val="000000"/>
-                </a:solidFill>
-                <a:latin typeface="맑은 고딕"/>
-              </a:rPr>
-              <a:t>방송 전 숫자 체크리스트: 150조 원 전체 규모, 2026년 30조 원 운용, 국민참여형 6000억 원, 재정 1200억 원, 손실 우선 부담 20% 범위.</a:t>
-            </a:r>
-          </a:p>
-          <a:p>
-            <a:pPr>
-              <a:spcAft>
-                <a:spcPts val="800"/>
-              </a:spcAft>
-            </a:pPr>
-            <a:r>
-              <a:rPr sz="2400" b="0" u="none">
-                <a:solidFill>
-                  <a:srgbClr val="000000"/>
-                </a:solidFill>
-                <a:latin typeface="맑은 고딕"/>
-              </a:rPr>
-              <a:t>정책 효과가 아니라 구조를 설명하는 숫자로만 사용한다.</a:t>
-            </a:r>
-          </a:p>
-          <a:p>
-            <a:pPr>
-              <a:spcAft>
-                <a:spcPts val="800"/>
-              </a:spcAft>
-            </a:pPr>
-            <a:r>
-              <a:rPr sz="2400" b="0" u="none">
-                <a:solidFill>
-                  <a:srgbClr val="000000"/>
-                </a:solidFill>
-                <a:latin typeface="맑은 고딕"/>
-              </a:rPr>
-              <a:t>추가로 정책금융 실패 사례와 은행 건전성 자료를 더 확인하면 완성도가 올라간다.</a:t>
-            </a:r>
-          </a:p>
-        </p:txBody>
-      </p:sp>
-    </p:spTree>
-  </p:cSld>
-  <p:clrMapOvr>
-    <a:masterClrMapping/>
-  </p:clrMapOvr>
-</p:sld>
-</file>
-
-<file path=ppt/slides/slide24.xml><?xml version="1.0" encoding="utf-8"?>
-<p:sld xmlns:a="http://schemas.openxmlformats.org/drawingml/2006/main" xmlns:p="http://schemas.openxmlformats.org/presentationml/2006/main" xmlns:r="http://schemas.openxmlformats.org/officeDocument/2006/relationships">
-  <p:cSld>
-    <p:bg>
-      <p:bgPr>
-        <a:solidFill>
-          <a:srgbClr val="F8F9FA"/>
-        </a:solidFill>
-        <a:effectLst/>
-      </p:bgPr>
-    </p:bg>
-    <p:spTree>
-      <p:nvGrpSpPr>
-        <p:cNvPr id="1" name=""/>
-        <p:cNvGrpSpPr/>
-        <p:nvPr/>
-      </p:nvGrpSpPr>
-      <p:grpSpPr/>
-      <p:sp>
-        <p:nvSpPr>
-          <p:cNvPr id="2" name="TextBox 1"/>
-          <p:cNvSpPr txBox="1"/>
-          <p:nvPr/>
-        </p:nvSpPr>
-        <p:spPr>
-          <a:xfrm>
-            <a:off x="3495751" y="3058668"/>
-            <a:ext cx="3383280" cy="523036"/>
-          </a:xfrm>
-          <a:prstGeom prst="rect">
-            <a:avLst/>
-          </a:prstGeom>
-          <a:noFill/>
-        </p:spPr>
-        <p:txBody>
-          <a:bodyPr wrap="square">
-            <a:spAutoFit/>
-          </a:bodyPr>
-          <a:lstStyle/>
-          <a:p>
-            <a:r>
-              <a:rPr sz="2800" b="1" u="none">
-                <a:solidFill>
-                  <a:srgbClr val="BF6F24"/>
-                </a:solidFill>
-                <a:latin typeface="맑은 고딕"/>
-              </a:rPr>
-              <a:t>[내부 체크리스트] 방송 전 꼭 채워야 할 자료</a:t>
-            </a:r>
-          </a:p>
-        </p:txBody>
-      </p:sp>
-      <p:sp>
-        <p:nvSpPr>
-          <p:cNvPr id="3" name="TextBox 2"/>
-          <p:cNvSpPr txBox="1"/>
-          <p:nvPr/>
-        </p:nvSpPr>
-        <p:spPr>
-          <a:xfrm>
-            <a:off x="822960" y="3810304"/>
-            <a:ext cx="10424160" cy="4480560"/>
-          </a:xfrm>
-          <a:prstGeom prst="rect">
-            <a:avLst/>
-          </a:prstGeom>
-          <a:noFill/>
-        </p:spPr>
-        <p:txBody>
-          <a:bodyPr wrap="square">
-            <a:spAutoFit/>
-          </a:bodyPr>
-          <a:lstStyle/>
-          <a:p>
-            <a:pPr>
-              <a:spcAft>
-                <a:spcPts val="800"/>
-              </a:spcAft>
-            </a:pPr>
-            <a:r>
-              <a:rPr sz="2400" b="0" u="none">
-                <a:solidFill>
-                  <a:srgbClr val="000000"/>
-                </a:solidFill>
-                <a:latin typeface="맑은 고딕"/>
-              </a:rPr>
-              <a:t>방송 전 꼭 채워야 할 자료: 금융위/산은 공식 원문, 국민참여형 펀드 손실분담 구조, AI·반도체 장기 투자 규모, 관치금융/정책금융 실패 반론, 은행 건전성·위험가중자산 자료.</a:t>
-            </a:r>
-          </a:p>
-          <a:p>
-            <a:pPr>
-              <a:spcAft>
-                <a:spcPts val="800"/>
-              </a:spcAft>
-            </a:pPr>
-            <a:r>
-              <a:rPr sz="2400" b="0" u="none">
-                <a:solidFill>
-                  <a:srgbClr val="000000"/>
-                </a:solidFill>
-                <a:latin typeface="맑은 고딕"/>
-              </a:rPr>
-              <a:t>지금 evidence pack은 enriched dry run에는 충분하지만, 방송용 완성본에는 추가 counterpoint가 필요하다.</a:t>
-            </a:r>
-          </a:p>
-        </p:txBody>
-      </p:sp>
-    </p:spTree>
-  </p:cSld>
-  <p:clrMapOvr>
-    <a:masterClrMapping/>
-  </p:clrMapOvr>
-</p:sld>
-</file>
-
-<file path=ppt/slides/slide3.xml><?xml version="1.0" encoding="utf-8"?>
-<p:sld xmlns:a="http://schemas.openxmlformats.org/drawingml/2006/main" xmlns:p="http://schemas.openxmlformats.org/presentationml/2006/main" xmlns:r="http://schemas.openxmlformats.org/officeDocument/2006/relationships">
-  <p:cSld>
-    <p:bg>
-      <p:bgPr>
-        <a:solidFill>
-          <a:srgbClr val="F8F9FA"/>
-        </a:solidFill>
-        <a:effectLst/>
-      </p:bgPr>
-    </p:bg>
-    <p:spTree>
-      <p:nvGrpSpPr>
-        <p:cNvPr id="1" name=""/>
-        <p:cNvGrpSpPr/>
-        <p:nvPr/>
-      </p:nvGrpSpPr>
-      <p:grpSpPr/>
-      <p:sp>
-        <p:nvSpPr>
-          <p:cNvPr id="2" name="TextBox 1"/>
-          <p:cNvSpPr txBox="1"/>
-          <p:nvPr/>
-        </p:nvSpPr>
-        <p:spPr>
-          <a:xfrm>
-            <a:off x="572414" y="356616"/>
-            <a:ext cx="11192256" cy="521207"/>
-          </a:xfrm>
-          <a:prstGeom prst="rect">
-            <a:avLst/>
-          </a:prstGeom>
-          <a:noFill/>
-        </p:spPr>
-        <p:txBody>
-          <a:bodyPr wrap="square">
-            <a:spAutoFit/>
-          </a:bodyPr>
-          <a:lstStyle/>
-          <a:p>
-            <a:r>
-              <a:rPr sz="2800" b="1" u="none">
-                <a:solidFill>
-                  <a:srgbClr val="FF0000"/>
-                </a:solidFill>
-                <a:latin typeface="맑은 고딕"/>
-              </a:rPr>
-              <a:t>은행 입장에서는 담보가 제일 편하다</a:t>
-            </a:r>
-          </a:p>
-        </p:txBody>
-      </p:sp>
-      <p:sp>
-        <p:nvSpPr>
-          <p:cNvPr id="3" name="TextBox 2"/>
-          <p:cNvSpPr txBox="1"/>
-          <p:nvPr/>
-        </p:nvSpPr>
-        <p:spPr>
-          <a:xfrm>
-            <a:off x="572414" y="1874519"/>
-            <a:ext cx="11193170" cy="1302105"/>
-          </a:xfrm>
-          <a:prstGeom prst="rect">
-            <a:avLst/>
-          </a:prstGeom>
-          <a:noFill/>
-        </p:spPr>
-        <p:txBody>
-          <a:bodyPr wrap="square">
-            <a:spAutoFit/>
-          </a:bodyPr>
-          <a:lstStyle/>
-          <a:p>
-            <a:pPr>
-              <a:spcAft>
-                <a:spcPts val="800"/>
-              </a:spcAft>
-            </a:pPr>
-            <a:r>
-              <a:rPr sz="2800" b="0" u="none">
-                <a:solidFill>
-                  <a:srgbClr val="000000"/>
-                </a:solidFill>
-                <a:latin typeface="맑은 고딕"/>
-              </a:rPr>
-              <a:t>돈을 빌려줄 때 가장 쉬운 질문은 “담보가 있나?”다.</a:t>
-            </a:r>
-          </a:p>
-          <a:p>
-            <a:pPr>
-              <a:spcAft>
-                <a:spcPts val="800"/>
-              </a:spcAft>
-            </a:pPr>
-            <a:r>
-              <a:rPr sz="2800" b="0" u="none">
-                <a:solidFill>
-                  <a:srgbClr val="000000"/>
-                </a:solidFill>
-                <a:latin typeface="맑은 고딕"/>
-              </a:rPr>
-              <a:t>은행은 자본규제와 위험가중자산을 고려해야 하므로, 위험한 자산을 무한정 늘릴 수 없다.</a:t>
-            </a:r>
-          </a:p>
-          <a:p>
-            <a:pPr>
-              <a:spcAft>
-                <a:spcPts val="800"/>
-              </a:spcAft>
-            </a:pPr>
-            <a:r>
-              <a:rPr sz="2800" b="0" u="none">
-                <a:solidFill>
-                  <a:srgbClr val="000000"/>
-                </a:solidFill>
-                <a:latin typeface="맑은 고딕"/>
-              </a:rPr>
-              <a:t>그래서 장기 위험자본 논의는 은행의 본능을 비난하는 문제가 아니라 금융 시스템의 설계 문제에 가깝다.</a:t>
-            </a:r>
-          </a:p>
-        </p:txBody>
-      </p:sp>
-    </p:spTree>
-  </p:cSld>
-  <p:clrMapOvr>
-    <a:masterClrMapping/>
-  </p:clrMapOvr>
-</p:sld>
-</file>
-
-<file path=ppt/slides/slide4.xml><?xml version="1.0" encoding="utf-8"?>
-<p:sld xmlns:a="http://schemas.openxmlformats.org/drawingml/2006/main" xmlns:p="http://schemas.openxmlformats.org/presentationml/2006/main" xmlns:r="http://schemas.openxmlformats.org/officeDocument/2006/relationships">
-  <p:cSld>
-    <p:bg>
-      <p:bgPr>
-        <a:solidFill>
-          <a:srgbClr val="F8F9FA"/>
-        </a:solidFill>
-        <a:effectLst/>
-      </p:bgPr>
-    </p:bg>
-    <p:spTree>
-      <p:nvGrpSpPr>
-        <p:cNvPr id="1" name=""/>
-        <p:cNvGrpSpPr/>
-        <p:nvPr/>
-      </p:nvGrpSpPr>
-      <p:grpSpPr/>
-      <p:sp>
-        <p:nvSpPr>
-          <p:cNvPr id="2" name="TextBox 1"/>
-          <p:cNvSpPr txBox="1"/>
-          <p:nvPr/>
-        </p:nvSpPr>
-        <p:spPr>
-          <a:xfrm>
-            <a:off x="572414" y="356616"/>
-            <a:ext cx="11192256" cy="521207"/>
-          </a:xfrm>
-          <a:prstGeom prst="rect">
-            <a:avLst/>
-          </a:prstGeom>
-          <a:noFill/>
-        </p:spPr>
-        <p:txBody>
-          <a:bodyPr wrap="square">
-            <a:spAutoFit/>
-          </a:bodyPr>
-          <a:lstStyle/>
-          <a:p>
-            <a:r>
-              <a:rPr sz="2800" b="1" u="none">
-                <a:solidFill>
-                  <a:srgbClr val="FF0000"/>
-                </a:solidFill>
-                <a:latin typeface="맑은 고딕"/>
-              </a:rPr>
-              <a:t>그런데 AI 산업은 담보보다 시간이 먼저 필요하다</a:t>
-            </a:r>
-          </a:p>
-        </p:txBody>
-      </p:sp>
-      <p:sp>
-        <p:nvSpPr>
-          <p:cNvPr id="3" name="Rectangle 2"/>
+      <p:sp>
+        <p:nvSpPr>
+          <p:cNvPr id="4" name="Rectangle 3"/>
           <p:cNvSpPr/>
           <p:nvPr/>
         </p:nvSpPr>
@@ -14533,84 +14001,45 @@
           <a:p>
             <a:pPr algn="ctr"/>
             <a:r>
-              <a:rPr sz="1300">
+              <a:rPr sz="1300" b="1">
                 <a:solidFill>
                   <a:srgbClr val="566070"/>
                 </a:solidFill>
                 <a:latin typeface="맑은 고딕"/>
               </a:rPr>
-              <a:t>[도식]</a:t>
-            </a:r>
-          </a:p>
-        </p:txBody>
-      </p:sp>
-      <p:sp>
-        <p:nvSpPr>
-          <p:cNvPr id="4" name="TextBox 3"/>
-          <p:cNvSpPr txBox="1"/>
-          <p:nvPr/>
-        </p:nvSpPr>
-        <p:spPr>
-          <a:xfrm>
-            <a:off x="5989320" y="2103120"/>
-            <a:ext cx="5303520" cy="2926080"/>
-          </a:xfrm>
-          <a:prstGeom prst="rect">
-            <a:avLst/>
-          </a:prstGeom>
-          <a:noFill/>
-        </p:spPr>
-        <p:txBody>
-          <a:bodyPr wrap="square">
-            <a:spAutoFit/>
-          </a:bodyPr>
-          <a:lstStyle/>
-          <a:p>
-            <a:pPr>
-              <a:spcAft>
+              <a:t>[기사 인용]</a:t>
+            </a:r>
+          </a:p>
+          <a:p>
+            <a:pPr algn="ctr">
+              <a:spcBef>
                 <a:spcPts val="800"/>
-              </a:spcAft>
+              </a:spcBef>
             </a:pPr>
             <a:r>
-              <a:rPr sz="2400" b="0" u="none">
+              <a:rPr sz="1800" b="1">
                 <a:solidFill>
                   <a:srgbClr val="000000"/>
                 </a:solidFill>
                 <a:latin typeface="맑은 고딕"/>
               </a:rPr>
-              <a:t>AI와 반도체는 소프트웨어 개발비만의 문제가 아니라 설비, 전력, 공정, 인력, 공급망이 함께 필요한 산업이다.</a:t>
-            </a:r>
-          </a:p>
-          <a:p>
-            <a:pPr>
-              <a:spcAft>
-                <a:spcPts val="800"/>
-              </a:spcAft>
+              <a:t>BIS</a:t>
+            </a:r>
+          </a:p>
+          <a:p>
+            <a:pPr algn="ctr">
+              <a:spcBef>
+                <a:spcPts val="400"/>
+              </a:spcBef>
             </a:pPr>
             <a:r>
-              <a:rPr sz="2400" b="0" u="none">
+              <a:rPr sz="1400" b="0">
                 <a:solidFill>
-                  <a:srgbClr val="000000"/>
+                  <a:srgbClr val="566070"/>
                 </a:solidFill>
                 <a:latin typeface="맑은 고딕"/>
               </a:rPr>
-              <a:t>정책자료는 국민성장펀드가 AI·반도체 같은 첨단전략산업에 장기 자금을 공급하려는 틀이라고 설명한다.</a:t>
-            </a:r>
-          </a:p>
-          <a:p>
-            <a:pPr>
-              <a:spcAft>
-                <a:spcPts val="800"/>
-              </a:spcAft>
-            </a:pPr>
-            <a:r>
-              <a:rPr sz="2400" b="0" u="none">
-                <a:solidFill>
-                  <a:srgbClr val="000000"/>
-                </a:solidFill>
-                <a:latin typeface="맑은 고딕"/>
-              </a:rPr>
-              <a:t>그래서 이 이야기는 “대출을 늘리자”보다 “누가 긴 위험을 나눌 것인가”에 가깝다.</a:t>
+              <a:t>금융권에 “성장에 베팅하라”고 말하는 순간 생기는 문제</a:t>
             </a:r>
           </a:p>
         </p:txBody>
@@ -14623,7 +14052,7 @@
 </p:sld>
 </file>
 
-<file path=ppt/slides/slide5.xml><?xml version="1.0" encoding="utf-8"?>
+<file path=ppt/slides/slide21.xml><?xml version="1.0" encoding="utf-8"?>
 <p:sld xmlns:a="http://schemas.openxmlformats.org/drawingml/2006/main" xmlns:p="http://schemas.openxmlformats.org/presentationml/2006/main" xmlns:r="http://schemas.openxmlformats.org/officeDocument/2006/relationships">
   <p:cSld>
     <p:bg>
@@ -14670,7 +14099,7 @@
                 </a:solidFill>
                 <a:latin typeface="맑은 고딕"/>
               </a:rPr>
-              <a:t>금융은 원래 안전해야 하는가, 위험을 져야 하는가</a:t>
+              <a:t>투자 이야기로 들리지 않게 조심해야 한다</a:t>
             </a:r>
           </a:p>
         </p:txBody>
@@ -14718,13 +14147,214 @@
           <a:p>
             <a:pPr algn="ctr"/>
             <a:r>
-              <a:rPr sz="1300">
+              <a:rPr sz="1300" b="0">
                 <a:solidFill>
                   <a:srgbClr val="566070"/>
                 </a:solidFill>
                 <a:latin typeface="맑은 고딕"/>
               </a:rPr>
               <a:t>[도식]</a:t>
+            </a:r>
+          </a:p>
+        </p:txBody>
+      </p:sp>
+      <p:sp>
+        <p:nvSpPr>
+          <p:cNvPr id="4" name="TextBox 3"/>
+          <p:cNvSpPr txBox="1"/>
+          <p:nvPr/>
+        </p:nvSpPr>
+        <p:spPr>
+          <a:xfrm>
+            <a:off x="5989320" y="1508760"/>
+            <a:ext cx="5303520" cy="3337560"/>
+          </a:xfrm>
+          <a:prstGeom prst="rect">
+            <a:avLst/>
+          </a:prstGeom>
+          <a:noFill/>
+        </p:spPr>
+        <p:txBody>
+          <a:bodyPr wrap="square">
+            <a:spAutoFit/>
+          </a:bodyPr>
+          <a:lstStyle/>
+          <a:p>
+            <a:pPr>
+              <a:spcAft>
+                <a:spcPts val="800"/>
+              </a:spcAft>
+            </a:pPr>
+            <a:r>
+              <a:rPr sz="2800" b="0" u="none">
+                <a:solidFill>
+                  <a:srgbClr val="000000"/>
+                </a:solidFill>
+                <a:latin typeface="맑은 고딕"/>
+              </a:rPr>
+              <a:t>이 주제는 곧바로 특정 산업·기업·펀드 투자 판단처럼 보일 수 있다.</a:t>
+            </a:r>
+          </a:p>
+          <a:p>
+            <a:pPr>
+              <a:spcAft>
+                <a:spcPts val="800"/>
+              </a:spcAft>
+            </a:pPr>
+            <a:r>
+              <a:rPr sz="2800" b="0" u="none">
+                <a:solidFill>
+                  <a:srgbClr val="000000"/>
+                </a:solidFill>
+                <a:latin typeface="맑은 고딕"/>
+              </a:rPr>
+              <a:t>그래서 수익률, 주가, 매수·매도, 유망종목식 표현은 피해야 한다.</a:t>
+            </a:r>
+          </a:p>
+        </p:txBody>
+      </p:sp>
+    </p:spTree>
+  </p:cSld>
+  <p:clrMapOvr>
+    <a:masterClrMapping/>
+  </p:clrMapOvr>
+</p:sld>
+</file>
+
+<file path=ppt/slides/slide22.xml><?xml version="1.0" encoding="utf-8"?>
+<p:sld xmlns:a="http://schemas.openxmlformats.org/drawingml/2006/main" xmlns:p="http://schemas.openxmlformats.org/presentationml/2006/main" xmlns:r="http://schemas.openxmlformats.org/officeDocument/2006/relationships">
+  <p:cSld>
+    <p:bg>
+      <p:bgPr>
+        <a:solidFill>
+          <a:srgbClr val="F8F9FA"/>
+        </a:solidFill>
+        <a:effectLst/>
+      </p:bgPr>
+    </p:bg>
+    <p:spTree>
+      <p:nvGrpSpPr>
+        <p:cNvPr id="1" name=""/>
+        <p:cNvGrpSpPr/>
+        <p:nvPr/>
+      </p:nvGrpSpPr>
+      <p:grpSpPr/>
+      <p:sp>
+        <p:nvSpPr>
+          <p:cNvPr id="2" name="TextBox 1"/>
+          <p:cNvSpPr txBox="1"/>
+          <p:nvPr/>
+        </p:nvSpPr>
+        <p:spPr>
+          <a:xfrm>
+            <a:off x="572414" y="356616"/>
+            <a:ext cx="11192256" cy="521207"/>
+          </a:xfrm>
+          <a:prstGeom prst="rect">
+            <a:avLst/>
+          </a:prstGeom>
+          <a:noFill/>
+        </p:spPr>
+        <p:txBody>
+          <a:bodyPr wrap="square">
+            <a:spAutoFit/>
+          </a:bodyPr>
+          <a:lstStyle/>
+          <a:p>
+            <a:r>
+              <a:rPr sz="2800" b="1" u="none">
+                <a:solidFill>
+                  <a:srgbClr val="FF0000"/>
+                </a:solidFill>
+                <a:latin typeface="맑은 고딕"/>
+              </a:rPr>
+              <a:t>금융은 위험을 피하는 기술인가, 좋은 위험을 고르는 기술인가</a:t>
+            </a:r>
+          </a:p>
+        </p:txBody>
+      </p:sp>
+      <p:sp>
+        <p:nvSpPr>
+          <p:cNvPr id="3" name="Rectangle 2"/>
+          <p:cNvSpPr/>
+          <p:nvPr/>
+        </p:nvSpPr>
+        <p:spPr>
+          <a:xfrm>
+            <a:off x="713232" y="1417320"/>
+            <a:ext cx="4892040" cy="4114800"/>
+          </a:xfrm>
+          <a:prstGeom prst="rect">
+            <a:avLst/>
+          </a:prstGeom>
+          <a:solidFill>
+            <a:srgbClr val="F5F5F5"/>
+          </a:solidFill>
+          <a:ln w="12700">
+            <a:solidFill>
+              <a:srgbClr val="BEBEBE"/>
+            </a:solidFill>
+          </a:ln>
+        </p:spPr>
+        <p:style>
+          <a:lnRef idx="1">
+            <a:schemeClr val="accent1"/>
+          </a:lnRef>
+          <a:fillRef idx="3">
+            <a:schemeClr val="accent1"/>
+          </a:fillRef>
+          <a:effectRef idx="2">
+            <a:schemeClr val="accent1"/>
+          </a:effectRef>
+          <a:fontRef idx="minor">
+            <a:schemeClr val="lt1"/>
+          </a:fontRef>
+        </p:style>
+        <p:txBody>
+          <a:bodyPr rtlCol="0" anchor="ctr" wrap="square"/>
+          <a:lstStyle/>
+          <a:p>
+            <a:pPr algn="ctr"/>
+            <a:r>
+              <a:rPr sz="1300" b="1">
+                <a:solidFill>
+                  <a:srgbClr val="566070"/>
+                </a:solidFill>
+                <a:latin typeface="맑은 고딕"/>
+              </a:rPr>
+              <a:t>[기사 인용]</a:t>
+            </a:r>
+          </a:p>
+          <a:p>
+            <a:pPr algn="ctr">
+              <a:spcBef>
+                <a:spcPts val="800"/>
+              </a:spcBef>
+            </a:pPr>
+            <a:r>
+              <a:rPr sz="1800" b="1">
+                <a:solidFill>
+                  <a:srgbClr val="000000"/>
+                </a:solidFill>
+                <a:latin typeface="맑은 고딕"/>
+              </a:rPr>
+              <a:t>금융위원회</a:t>
+            </a:r>
+          </a:p>
+          <a:p>
+            <a:pPr algn="ctr">
+              <a:spcBef>
+                <a:spcPts val="400"/>
+              </a:spcBef>
+            </a:pPr>
+            <a:r>
+              <a:rPr sz="1400" b="0">
+                <a:solidFill>
+                  <a:srgbClr val="566070"/>
+                </a:solidFill>
+                <a:latin typeface="맑은 고딕"/>
+              </a:rPr>
+              <a:t>금융은 위험을 피하는 기술인가, 좋은 위험을 고르는 기술인가</a:t>
             </a:r>
           </a:p>
         </p:txBody>
@@ -14757,13 +14387,128 @@
               </a:spcAft>
             </a:pPr>
             <a:r>
+              <a:rPr sz="2800" b="0" u="none">
+                <a:solidFill>
+                  <a:srgbClr val="000000"/>
+                </a:solidFill>
+                <a:latin typeface="맑은 고딕"/>
+              </a:rPr>
+              <a:t>생산적 금융의 질문은 “정부 정책이 맞다/틀리다”가 아니다.</a:t>
+            </a:r>
+          </a:p>
+          <a:p>
+            <a:pPr>
+              <a:spcAft>
+                <a:spcPts val="800"/>
+              </a:spcAft>
+            </a:pPr>
+            <a:r>
+              <a:rPr sz="2800" b="0" u="none">
+                <a:solidFill>
+                  <a:srgbClr val="000000"/>
+                </a:solidFill>
+                <a:latin typeface="맑은 고딕"/>
+              </a:rPr>
+              <a:t>좋은 위험을 고르는 능력, 손실을 나누는 규칙, 금융권 건전성을 함께 설계할 수 있느냐는 질문이다.</a:t>
+            </a:r>
+          </a:p>
+        </p:txBody>
+      </p:sp>
+    </p:spTree>
+  </p:cSld>
+  <p:clrMapOvr>
+    <a:masterClrMapping/>
+  </p:clrMapOvr>
+</p:sld>
+</file>
+
+<file path=ppt/slides/slide23.xml><?xml version="1.0" encoding="utf-8"?>
+<p:sld xmlns:a="http://schemas.openxmlformats.org/drawingml/2006/main" xmlns:p="http://schemas.openxmlformats.org/presentationml/2006/main" xmlns:r="http://schemas.openxmlformats.org/officeDocument/2006/relationships">
+  <p:cSld>
+    <p:bg>
+      <p:bgPr>
+        <a:solidFill>
+          <a:srgbClr val="F8F9FA"/>
+        </a:solidFill>
+        <a:effectLst/>
+      </p:bgPr>
+    </p:bg>
+    <p:spTree>
+      <p:nvGrpSpPr>
+        <p:cNvPr id="1" name=""/>
+        <p:cNvGrpSpPr/>
+        <p:nvPr/>
+      </p:nvGrpSpPr>
+      <p:grpSpPr/>
+      <p:sp>
+        <p:nvSpPr>
+          <p:cNvPr id="2" name="TextBox 1"/>
+          <p:cNvSpPr txBox="1"/>
+          <p:nvPr/>
+        </p:nvSpPr>
+        <p:spPr>
+          <a:xfrm>
+            <a:off x="3495751" y="3058668"/>
+            <a:ext cx="3383280" cy="523036"/>
+          </a:xfrm>
+          <a:prstGeom prst="rect">
+            <a:avLst/>
+          </a:prstGeom>
+          <a:noFill/>
+        </p:spPr>
+        <p:txBody>
+          <a:bodyPr wrap="square">
+            <a:spAutoFit/>
+          </a:bodyPr>
+          <a:lstStyle/>
+          <a:p>
+            <a:r>
+              <a:rPr sz="2800" b="1" u="none">
+                <a:solidFill>
+                  <a:srgbClr val="BF6F24"/>
+                </a:solidFill>
+                <a:latin typeface="맑은 고딕"/>
+              </a:rPr>
+              <a:t>[내부 체크리스트] 이 부분은 아직 숫자가 필요하다</a:t>
+            </a:r>
+          </a:p>
+        </p:txBody>
+      </p:sp>
+      <p:sp>
+        <p:nvSpPr>
+          <p:cNvPr id="3" name="TextBox 2"/>
+          <p:cNvSpPr txBox="1"/>
+          <p:nvPr/>
+        </p:nvSpPr>
+        <p:spPr>
+          <a:xfrm>
+            <a:off x="822960" y="3810304"/>
+            <a:ext cx="10424160" cy="4480560"/>
+          </a:xfrm>
+          <a:prstGeom prst="rect">
+            <a:avLst/>
+          </a:prstGeom>
+          <a:noFill/>
+        </p:spPr>
+        <p:txBody>
+          <a:bodyPr wrap="square">
+            <a:spAutoFit/>
+          </a:bodyPr>
+          <a:lstStyle/>
+          <a:p>
+            <a:pPr>
+              <a:spcAft>
+                <a:spcPts val="800"/>
+              </a:spcAft>
+            </a:pPr>
+            <a:r>
               <a:rPr sz="2400" b="0" u="none">
                 <a:solidFill>
                   <a:srgbClr val="000000"/>
                 </a:solidFill>
                 <a:latin typeface="맑은 고딕"/>
               </a:rPr>
-              <a:t>너무 안전하면 성장산업이 돈을 못 받는다.</a:t>
+              <a:t>방송 전 숫자 체크리스트: 150조 원 전체 규모, 2026년 30조 원 운용, 국민참여형 6000억 원, 재정 1200억 원, 손실 우선 부담 20% 범위.</a:t>
             </a:r>
           </a:p>
           <a:p>
@@ -14779,7 +14524,7 @@
                 </a:solidFill>
                 <a:latin typeface="맑은 고딕"/>
               </a:rPr>
-              <a:t>너무 위험하면 결국 손실을 누가 떠안느냐는 문제가 생긴다.</a:t>
+              <a:t>정책 효과가 아니라 구조를 설명하는 숫자로만 사용한다.</a:t>
             </a:r>
           </a:p>
           <a:p>
@@ -14795,7 +14540,661 @@
                 </a:solidFill>
                 <a:latin typeface="맑은 고딕"/>
               </a:rPr>
-              <a:t>이 사이의 균형이 정책금융 논쟁의 본론이다.</a:t>
+              <a:t>추가로 정책금융 실패 사례와 은행 건전성 자료를 더 확인하면 완성도가 올라간다.</a:t>
+            </a:r>
+          </a:p>
+        </p:txBody>
+      </p:sp>
+    </p:spTree>
+  </p:cSld>
+  <p:clrMapOvr>
+    <a:masterClrMapping/>
+  </p:clrMapOvr>
+</p:sld>
+</file>
+
+<file path=ppt/slides/slide24.xml><?xml version="1.0" encoding="utf-8"?>
+<p:sld xmlns:a="http://schemas.openxmlformats.org/drawingml/2006/main" xmlns:p="http://schemas.openxmlformats.org/presentationml/2006/main" xmlns:r="http://schemas.openxmlformats.org/officeDocument/2006/relationships">
+  <p:cSld>
+    <p:bg>
+      <p:bgPr>
+        <a:solidFill>
+          <a:srgbClr val="F8F9FA"/>
+        </a:solidFill>
+        <a:effectLst/>
+      </p:bgPr>
+    </p:bg>
+    <p:spTree>
+      <p:nvGrpSpPr>
+        <p:cNvPr id="1" name=""/>
+        <p:cNvGrpSpPr/>
+        <p:nvPr/>
+      </p:nvGrpSpPr>
+      <p:grpSpPr/>
+      <p:sp>
+        <p:nvSpPr>
+          <p:cNvPr id="2" name="TextBox 1"/>
+          <p:cNvSpPr txBox="1"/>
+          <p:nvPr/>
+        </p:nvSpPr>
+        <p:spPr>
+          <a:xfrm>
+            <a:off x="3495751" y="3058668"/>
+            <a:ext cx="3383280" cy="523036"/>
+          </a:xfrm>
+          <a:prstGeom prst="rect">
+            <a:avLst/>
+          </a:prstGeom>
+          <a:noFill/>
+        </p:spPr>
+        <p:txBody>
+          <a:bodyPr wrap="square">
+            <a:spAutoFit/>
+          </a:bodyPr>
+          <a:lstStyle/>
+          <a:p>
+            <a:r>
+              <a:rPr sz="2800" b="1" u="none">
+                <a:solidFill>
+                  <a:srgbClr val="BF6F24"/>
+                </a:solidFill>
+                <a:latin typeface="맑은 고딕"/>
+              </a:rPr>
+              <a:t>[내부 체크리스트] 방송 전 꼭 채워야 할 자료</a:t>
+            </a:r>
+          </a:p>
+        </p:txBody>
+      </p:sp>
+      <p:sp>
+        <p:nvSpPr>
+          <p:cNvPr id="3" name="TextBox 2"/>
+          <p:cNvSpPr txBox="1"/>
+          <p:nvPr/>
+        </p:nvSpPr>
+        <p:spPr>
+          <a:xfrm>
+            <a:off x="822960" y="3810304"/>
+            <a:ext cx="10424160" cy="4480560"/>
+          </a:xfrm>
+          <a:prstGeom prst="rect">
+            <a:avLst/>
+          </a:prstGeom>
+          <a:noFill/>
+        </p:spPr>
+        <p:txBody>
+          <a:bodyPr wrap="square">
+            <a:spAutoFit/>
+          </a:bodyPr>
+          <a:lstStyle/>
+          <a:p>
+            <a:pPr>
+              <a:spcAft>
+                <a:spcPts val="800"/>
+              </a:spcAft>
+            </a:pPr>
+            <a:r>
+              <a:rPr sz="2400" b="0" u="none">
+                <a:solidFill>
+                  <a:srgbClr val="000000"/>
+                </a:solidFill>
+                <a:latin typeface="맑은 고딕"/>
+              </a:rPr>
+              <a:t>방송 전 꼭 채워야 할 자료: 금융위/산은 공식 원문, 국민참여형 펀드 손실분담 구조, AI·반도체 장기 투자 규모, 관치금융/정책금융 실패 반론, 은행 건전성·위험가중자산 자료.</a:t>
+            </a:r>
+          </a:p>
+          <a:p>
+            <a:pPr>
+              <a:spcAft>
+                <a:spcPts val="800"/>
+              </a:spcAft>
+            </a:pPr>
+            <a:r>
+              <a:rPr sz="2400" b="0" u="none">
+                <a:solidFill>
+                  <a:srgbClr val="000000"/>
+                </a:solidFill>
+                <a:latin typeface="맑은 고딕"/>
+              </a:rPr>
+              <a:t>지금 evidence pack은 enriched dry run에는 충분하지만, 방송용 완성본에는 추가 counterpoint가 필요하다.</a:t>
+            </a:r>
+          </a:p>
+        </p:txBody>
+      </p:sp>
+    </p:spTree>
+  </p:cSld>
+  <p:clrMapOvr>
+    <a:masterClrMapping/>
+  </p:clrMapOvr>
+</p:sld>
+</file>
+
+<file path=ppt/slides/slide3.xml><?xml version="1.0" encoding="utf-8"?>
+<p:sld xmlns:a="http://schemas.openxmlformats.org/drawingml/2006/main" xmlns:p="http://schemas.openxmlformats.org/presentationml/2006/main" xmlns:r="http://schemas.openxmlformats.org/officeDocument/2006/relationships">
+  <p:cSld>
+    <p:bg>
+      <p:bgPr>
+        <a:solidFill>
+          <a:srgbClr val="F8F9FA"/>
+        </a:solidFill>
+        <a:effectLst/>
+      </p:bgPr>
+    </p:bg>
+    <p:spTree>
+      <p:nvGrpSpPr>
+        <p:cNvPr id="1" name=""/>
+        <p:cNvGrpSpPr/>
+        <p:nvPr/>
+      </p:nvGrpSpPr>
+      <p:grpSpPr/>
+      <p:sp>
+        <p:nvSpPr>
+          <p:cNvPr id="2" name="TextBox 1"/>
+          <p:cNvSpPr txBox="1"/>
+          <p:nvPr/>
+        </p:nvSpPr>
+        <p:spPr>
+          <a:xfrm>
+            <a:off x="572414" y="356616"/>
+            <a:ext cx="11192256" cy="521207"/>
+          </a:xfrm>
+          <a:prstGeom prst="rect">
+            <a:avLst/>
+          </a:prstGeom>
+          <a:noFill/>
+        </p:spPr>
+        <p:txBody>
+          <a:bodyPr wrap="square">
+            <a:spAutoFit/>
+          </a:bodyPr>
+          <a:lstStyle/>
+          <a:p>
+            <a:r>
+              <a:rPr sz="2800" b="1" u="none">
+                <a:solidFill>
+                  <a:srgbClr val="FF0000"/>
+                </a:solidFill>
+                <a:latin typeface="맑은 고딕"/>
+              </a:rPr>
+              <a:t>은행 입장에서는 담보가 제일 편하다</a:t>
+            </a:r>
+          </a:p>
+        </p:txBody>
+      </p:sp>
+      <p:sp>
+        <p:nvSpPr>
+          <p:cNvPr id="3" name="TextBox 2"/>
+          <p:cNvSpPr txBox="1"/>
+          <p:nvPr/>
+        </p:nvSpPr>
+        <p:spPr>
+          <a:xfrm>
+            <a:off x="5989320" y="1208836"/>
+            <a:ext cx="5394960" cy="1302105"/>
+          </a:xfrm>
+          <a:prstGeom prst="rect">
+            <a:avLst/>
+          </a:prstGeom>
+          <a:noFill/>
+        </p:spPr>
+        <p:txBody>
+          <a:bodyPr wrap="square">
+            <a:spAutoFit/>
+          </a:bodyPr>
+          <a:lstStyle/>
+          <a:p>
+            <a:pPr>
+              <a:spcAft>
+                <a:spcPts val="800"/>
+              </a:spcAft>
+            </a:pPr>
+            <a:r>
+              <a:rPr sz="2800" b="0" u="none">
+                <a:solidFill>
+                  <a:srgbClr val="000000"/>
+                </a:solidFill>
+                <a:latin typeface="맑은 고딕"/>
+              </a:rPr>
+              <a:t>돈을 빌려줄 때 가장 쉬운 질문은 “담보가 있나?”다.</a:t>
+            </a:r>
+          </a:p>
+          <a:p>
+            <a:pPr>
+              <a:spcAft>
+                <a:spcPts val="800"/>
+              </a:spcAft>
+            </a:pPr>
+            <a:r>
+              <a:rPr sz="2800" b="0" u="none">
+                <a:solidFill>
+                  <a:srgbClr val="000000"/>
+                </a:solidFill>
+                <a:latin typeface="맑은 고딕"/>
+              </a:rPr>
+              <a:t>은행은 자본규제와 위험가중자산을 고려해야 하므로, 위험한 자산을 무한정 늘릴 수 없다.</a:t>
+            </a:r>
+          </a:p>
+        </p:txBody>
+      </p:sp>
+      <p:sp>
+        <p:nvSpPr>
+          <p:cNvPr id="4" name="Rectangle 3"/>
+          <p:cNvSpPr/>
+          <p:nvPr/>
+        </p:nvSpPr>
+        <p:spPr>
+          <a:xfrm>
+            <a:off x="713232" y="1417320"/>
+            <a:ext cx="4892040" cy="4114800"/>
+          </a:xfrm>
+          <a:prstGeom prst="rect">
+            <a:avLst/>
+          </a:prstGeom>
+          <a:solidFill>
+            <a:srgbClr val="F5F5F5"/>
+          </a:solidFill>
+          <a:ln w="12700">
+            <a:solidFill>
+              <a:srgbClr val="BEBEBE"/>
+            </a:solidFill>
+          </a:ln>
+        </p:spPr>
+        <p:style>
+          <a:lnRef idx="1">
+            <a:schemeClr val="accent1"/>
+          </a:lnRef>
+          <a:fillRef idx="3">
+            <a:schemeClr val="accent1"/>
+          </a:fillRef>
+          <a:effectRef idx="2">
+            <a:schemeClr val="accent1"/>
+          </a:effectRef>
+          <a:fontRef idx="minor">
+            <a:schemeClr val="lt1"/>
+          </a:fontRef>
+        </p:style>
+        <p:txBody>
+          <a:bodyPr rtlCol="0" anchor="ctr" wrap="square"/>
+          <a:lstStyle/>
+          <a:p>
+            <a:pPr algn="ctr"/>
+            <a:r>
+              <a:rPr sz="1300" b="1">
+                <a:solidFill>
+                  <a:srgbClr val="566070"/>
+                </a:solidFill>
+                <a:latin typeface="맑은 고딕"/>
+              </a:rPr>
+              <a:t>[기사 인용]</a:t>
+            </a:r>
+          </a:p>
+          <a:p>
+            <a:pPr algn="ctr">
+              <a:spcBef>
+                <a:spcPts val="800"/>
+              </a:spcBef>
+            </a:pPr>
+            <a:r>
+              <a:rPr sz="1800" b="1">
+                <a:solidFill>
+                  <a:srgbClr val="000000"/>
+                </a:solidFill>
+                <a:latin typeface="맑은 고딕"/>
+              </a:rPr>
+              <a:t>BIS</a:t>
+            </a:r>
+          </a:p>
+          <a:p>
+            <a:pPr algn="ctr">
+              <a:spcBef>
+                <a:spcPts val="400"/>
+              </a:spcBef>
+            </a:pPr>
+            <a:r>
+              <a:rPr sz="1400" b="0">
+                <a:solidFill>
+                  <a:srgbClr val="566070"/>
+                </a:solidFill>
+                <a:latin typeface="맑은 고딕"/>
+              </a:rPr>
+              <a:t>은행 입장에서는 담보가 제일 편하다</a:t>
+            </a:r>
+          </a:p>
+        </p:txBody>
+      </p:sp>
+    </p:spTree>
+  </p:cSld>
+  <p:clrMapOvr>
+    <a:masterClrMapping/>
+  </p:clrMapOvr>
+</p:sld>
+</file>
+
+<file path=ppt/slides/slide4.xml><?xml version="1.0" encoding="utf-8"?>
+<p:sld xmlns:a="http://schemas.openxmlformats.org/drawingml/2006/main" xmlns:p="http://schemas.openxmlformats.org/presentationml/2006/main" xmlns:r="http://schemas.openxmlformats.org/officeDocument/2006/relationships">
+  <p:cSld>
+    <p:bg>
+      <p:bgPr>
+        <a:solidFill>
+          <a:srgbClr val="F8F9FA"/>
+        </a:solidFill>
+        <a:effectLst/>
+      </p:bgPr>
+    </p:bg>
+    <p:spTree>
+      <p:nvGrpSpPr>
+        <p:cNvPr id="1" name=""/>
+        <p:cNvGrpSpPr/>
+        <p:nvPr/>
+      </p:nvGrpSpPr>
+      <p:grpSpPr/>
+      <p:sp>
+        <p:nvSpPr>
+          <p:cNvPr id="2" name="TextBox 1"/>
+          <p:cNvSpPr txBox="1"/>
+          <p:nvPr/>
+        </p:nvSpPr>
+        <p:spPr>
+          <a:xfrm>
+            <a:off x="572414" y="356616"/>
+            <a:ext cx="11192256" cy="521207"/>
+          </a:xfrm>
+          <a:prstGeom prst="rect">
+            <a:avLst/>
+          </a:prstGeom>
+          <a:noFill/>
+        </p:spPr>
+        <p:txBody>
+          <a:bodyPr wrap="square">
+            <a:spAutoFit/>
+          </a:bodyPr>
+          <a:lstStyle/>
+          <a:p>
+            <a:r>
+              <a:rPr sz="2800" b="1" u="none">
+                <a:solidFill>
+                  <a:srgbClr val="FF0000"/>
+                </a:solidFill>
+                <a:latin typeface="맑은 고딕"/>
+              </a:rPr>
+              <a:t>그런데 AI 산업은 담보보다 시간이 먼저 필요하다</a:t>
+            </a:r>
+          </a:p>
+        </p:txBody>
+      </p:sp>
+      <p:sp>
+        <p:nvSpPr>
+          <p:cNvPr id="3" name="Rectangle 2"/>
+          <p:cNvSpPr/>
+          <p:nvPr/>
+        </p:nvSpPr>
+        <p:spPr>
+          <a:xfrm>
+            <a:off x="713232" y="1417320"/>
+            <a:ext cx="4892040" cy="4114800"/>
+          </a:xfrm>
+          <a:prstGeom prst="rect">
+            <a:avLst/>
+          </a:prstGeom>
+          <a:solidFill>
+            <a:srgbClr val="F5F5F5"/>
+          </a:solidFill>
+          <a:ln w="12700">
+            <a:solidFill>
+              <a:srgbClr val="BEBEBE"/>
+            </a:solidFill>
+          </a:ln>
+        </p:spPr>
+        <p:style>
+          <a:lnRef idx="1">
+            <a:schemeClr val="accent1"/>
+          </a:lnRef>
+          <a:fillRef idx="3">
+            <a:schemeClr val="accent1"/>
+          </a:fillRef>
+          <a:effectRef idx="2">
+            <a:schemeClr val="accent1"/>
+          </a:effectRef>
+          <a:fontRef idx="minor">
+            <a:schemeClr val="lt1"/>
+          </a:fontRef>
+        </p:style>
+        <p:txBody>
+          <a:bodyPr rtlCol="0" anchor="ctr" wrap="square"/>
+          <a:lstStyle/>
+          <a:p>
+            <a:pPr algn="ctr"/>
+            <a:r>
+              <a:rPr sz="1300" b="0">
+                <a:solidFill>
+                  <a:srgbClr val="566070"/>
+                </a:solidFill>
+                <a:latin typeface="맑은 고딕"/>
+              </a:rPr>
+              <a:t>[도식]</a:t>
+            </a:r>
+          </a:p>
+        </p:txBody>
+      </p:sp>
+      <p:sp>
+        <p:nvSpPr>
+          <p:cNvPr id="4" name="TextBox 3"/>
+          <p:cNvSpPr txBox="1"/>
+          <p:nvPr/>
+        </p:nvSpPr>
+        <p:spPr>
+          <a:xfrm>
+            <a:off x="5989320" y="2103120"/>
+            <a:ext cx="5303520" cy="2926080"/>
+          </a:xfrm>
+          <a:prstGeom prst="rect">
+            <a:avLst/>
+          </a:prstGeom>
+          <a:noFill/>
+        </p:spPr>
+        <p:txBody>
+          <a:bodyPr wrap="square">
+            <a:spAutoFit/>
+          </a:bodyPr>
+          <a:lstStyle/>
+          <a:p>
+            <a:pPr>
+              <a:spcAft>
+                <a:spcPts val="800"/>
+              </a:spcAft>
+            </a:pPr>
+            <a:r>
+              <a:rPr sz="2800" b="0" u="none">
+                <a:solidFill>
+                  <a:srgbClr val="000000"/>
+                </a:solidFill>
+                <a:latin typeface="맑은 고딕"/>
+              </a:rPr>
+              <a:t>AI와 반도체는 소프트웨어 개발비만의 문제가 아니라 설비, 전력, 공정, 인력, 공급망이 함께 필요한 산업이다.</a:t>
+            </a:r>
+          </a:p>
+          <a:p>
+            <a:pPr>
+              <a:spcAft>
+                <a:spcPts val="800"/>
+              </a:spcAft>
+            </a:pPr>
+            <a:r>
+              <a:rPr sz="2800" b="0" u="none">
+                <a:solidFill>
+                  <a:srgbClr val="000000"/>
+                </a:solidFill>
+                <a:latin typeface="맑은 고딕"/>
+              </a:rPr>
+              <a:t>정책자료는 국민성장펀드가 AI·반도체 같은 첨단전략산업에 장기 자금을 공급하려는 틀이라고 설명한다.</a:t>
+            </a:r>
+          </a:p>
+        </p:txBody>
+      </p:sp>
+    </p:spTree>
+  </p:cSld>
+  <p:clrMapOvr>
+    <a:masterClrMapping/>
+  </p:clrMapOvr>
+</p:sld>
+</file>
+
+<file path=ppt/slides/slide5.xml><?xml version="1.0" encoding="utf-8"?>
+<p:sld xmlns:a="http://schemas.openxmlformats.org/drawingml/2006/main" xmlns:p="http://schemas.openxmlformats.org/presentationml/2006/main" xmlns:r="http://schemas.openxmlformats.org/officeDocument/2006/relationships">
+  <p:cSld>
+    <p:bg>
+      <p:bgPr>
+        <a:solidFill>
+          <a:srgbClr val="F8F9FA"/>
+        </a:solidFill>
+        <a:effectLst/>
+      </p:bgPr>
+    </p:bg>
+    <p:spTree>
+      <p:nvGrpSpPr>
+        <p:cNvPr id="1" name=""/>
+        <p:cNvGrpSpPr/>
+        <p:nvPr/>
+      </p:nvGrpSpPr>
+      <p:grpSpPr/>
+      <p:sp>
+        <p:nvSpPr>
+          <p:cNvPr id="2" name="TextBox 1"/>
+          <p:cNvSpPr txBox="1"/>
+          <p:nvPr/>
+        </p:nvSpPr>
+        <p:spPr>
+          <a:xfrm>
+            <a:off x="572414" y="356616"/>
+            <a:ext cx="11192256" cy="521207"/>
+          </a:xfrm>
+          <a:prstGeom prst="rect">
+            <a:avLst/>
+          </a:prstGeom>
+          <a:noFill/>
+        </p:spPr>
+        <p:txBody>
+          <a:bodyPr wrap="square">
+            <a:spAutoFit/>
+          </a:bodyPr>
+          <a:lstStyle/>
+          <a:p>
+            <a:r>
+              <a:rPr sz="2800" b="1" u="none">
+                <a:solidFill>
+                  <a:srgbClr val="FF0000"/>
+                </a:solidFill>
+                <a:latin typeface="맑은 고딕"/>
+              </a:rPr>
+              <a:t>금융은 원래 안전해야 하는가, 위험을 져야 하는가</a:t>
+            </a:r>
+          </a:p>
+        </p:txBody>
+      </p:sp>
+      <p:sp>
+        <p:nvSpPr>
+          <p:cNvPr id="3" name="Rectangle 2"/>
+          <p:cNvSpPr/>
+          <p:nvPr/>
+        </p:nvSpPr>
+        <p:spPr>
+          <a:xfrm>
+            <a:off x="713232" y="1417320"/>
+            <a:ext cx="4892040" cy="4114800"/>
+          </a:xfrm>
+          <a:prstGeom prst="rect">
+            <a:avLst/>
+          </a:prstGeom>
+          <a:solidFill>
+            <a:srgbClr val="F5F5F5"/>
+          </a:solidFill>
+          <a:ln w="12700">
+            <a:solidFill>
+              <a:srgbClr val="BEBEBE"/>
+            </a:solidFill>
+          </a:ln>
+        </p:spPr>
+        <p:style>
+          <a:lnRef idx="1">
+            <a:schemeClr val="accent1"/>
+          </a:lnRef>
+          <a:fillRef idx="3">
+            <a:schemeClr val="accent1"/>
+          </a:fillRef>
+          <a:effectRef idx="2">
+            <a:schemeClr val="accent1"/>
+          </a:effectRef>
+          <a:fontRef idx="minor">
+            <a:schemeClr val="lt1"/>
+          </a:fontRef>
+        </p:style>
+        <p:txBody>
+          <a:bodyPr rtlCol="0" anchor="ctr" wrap="square"/>
+          <a:lstStyle/>
+          <a:p>
+            <a:pPr algn="ctr"/>
+            <a:r>
+              <a:rPr sz="1300" b="0">
+                <a:solidFill>
+                  <a:srgbClr val="566070"/>
+                </a:solidFill>
+                <a:latin typeface="맑은 고딕"/>
+              </a:rPr>
+              <a:t>[도식]</a:t>
+            </a:r>
+          </a:p>
+        </p:txBody>
+      </p:sp>
+      <p:sp>
+        <p:nvSpPr>
+          <p:cNvPr id="4" name="TextBox 3"/>
+          <p:cNvSpPr txBox="1"/>
+          <p:nvPr/>
+        </p:nvSpPr>
+        <p:spPr>
+          <a:xfrm>
+            <a:off x="5989320" y="2103120"/>
+            <a:ext cx="5303520" cy="2926080"/>
+          </a:xfrm>
+          <a:prstGeom prst="rect">
+            <a:avLst/>
+          </a:prstGeom>
+          <a:noFill/>
+        </p:spPr>
+        <p:txBody>
+          <a:bodyPr wrap="square">
+            <a:spAutoFit/>
+          </a:bodyPr>
+          <a:lstStyle/>
+          <a:p>
+            <a:pPr>
+              <a:spcAft>
+                <a:spcPts val="800"/>
+              </a:spcAft>
+            </a:pPr>
+            <a:r>
+              <a:rPr sz="2800" b="0" u="none">
+                <a:solidFill>
+                  <a:srgbClr val="000000"/>
+                </a:solidFill>
+                <a:latin typeface="맑은 고딕"/>
+              </a:rPr>
+              <a:t>너무 안전하면 성장산업이 돈을 못 받는다.</a:t>
+            </a:r>
+          </a:p>
+          <a:p>
+            <a:pPr>
+              <a:spcAft>
+                <a:spcPts val="800"/>
+              </a:spcAft>
+            </a:pPr>
+            <a:r>
+              <a:rPr sz="2800" b="0" u="none">
+                <a:solidFill>
+                  <a:srgbClr val="000000"/>
+                </a:solidFill>
+                <a:latin typeface="맑은 고딕"/>
+              </a:rPr>
+              <a:t>너무 위험하면 결국 손실을 누가 떠안느냐는 문제가 생긴다.</a:t>
             </a:r>
           </a:p>
         </p:txBody>
@@ -14928,8 +15327,8 @@
         </p:nvSpPr>
         <p:spPr>
           <a:xfrm>
-            <a:off x="572414" y="1874519"/>
-            <a:ext cx="11193170" cy="1302105"/>
+            <a:off x="5989320" y="1208836"/>
+            <a:ext cx="5394960" cy="1302105"/>
           </a:xfrm>
           <a:prstGeom prst="rect">
             <a:avLst/>
@@ -14973,20 +15372,90 @@
               <a:t>반도체, 전력망, 데이터센터, 장비, 소재가 함께 필요하다.</a:t>
             </a:r>
           </a:p>
-          <a:p>
-            <a:pPr>
-              <a:spcAft>
+        </p:txBody>
+      </p:sp>
+      <p:sp>
+        <p:nvSpPr>
+          <p:cNvPr id="4" name="Rectangle 3"/>
+          <p:cNvSpPr/>
+          <p:nvPr/>
+        </p:nvSpPr>
+        <p:spPr>
+          <a:xfrm>
+            <a:off x="713232" y="1417320"/>
+            <a:ext cx="4892040" cy="4114800"/>
+          </a:xfrm>
+          <a:prstGeom prst="rect">
+            <a:avLst/>
+          </a:prstGeom>
+          <a:solidFill>
+            <a:srgbClr val="F5F5F5"/>
+          </a:solidFill>
+          <a:ln w="12700">
+            <a:solidFill>
+              <a:srgbClr val="BEBEBE"/>
+            </a:solidFill>
+          </a:ln>
+        </p:spPr>
+        <p:style>
+          <a:lnRef idx="1">
+            <a:schemeClr val="accent1"/>
+          </a:lnRef>
+          <a:fillRef idx="3">
+            <a:schemeClr val="accent1"/>
+          </a:fillRef>
+          <a:effectRef idx="2">
+            <a:schemeClr val="accent1"/>
+          </a:effectRef>
+          <a:fontRef idx="minor">
+            <a:schemeClr val="lt1"/>
+          </a:fontRef>
+        </p:style>
+        <p:txBody>
+          <a:bodyPr rtlCol="0" anchor="ctr" wrap="square"/>
+          <a:lstStyle/>
+          <a:p>
+            <a:pPr algn="ctr"/>
+            <a:r>
+              <a:rPr sz="1300" b="1">
+                <a:solidFill>
+                  <a:srgbClr val="566070"/>
+                </a:solidFill>
+                <a:latin typeface="맑은 고딕"/>
+              </a:rPr>
+              <a:t>[기사 인용]</a:t>
+            </a:r>
+          </a:p>
+          <a:p>
+            <a:pPr algn="ctr">
+              <a:spcBef>
                 <a:spcPts val="800"/>
-              </a:spcAft>
+              </a:spcBef>
             </a:pPr>
             <a:r>
-              <a:rPr sz="2800" b="0" u="none">
+              <a:rPr sz="1800" b="1">
                 <a:solidFill>
                   <a:srgbClr val="000000"/>
                 </a:solidFill>
                 <a:latin typeface="맑은 고딕"/>
               </a:rPr>
-              <a:t>공식자료가 “인내자본”을 말하는 이유도 이 산업이 긴 회수 기간과 대규모 선투자를 요구하기 때문이다.</a:t>
+              <a:t>정책브리핑</a:t>
+            </a:r>
+          </a:p>
+          <a:p>
+            <a:pPr algn="ctr">
+              <a:spcBef>
+                <a:spcPts val="400"/>
+              </a:spcBef>
+            </a:pPr>
+            <a:r>
+              <a:rPr sz="1400" b="0">
+                <a:solidFill>
+                  <a:srgbClr val="566070"/>
+                </a:solidFill>
+                <a:latin typeface="맑은 고딕"/>
+              </a:rPr>
+              <a:t>AI가 소프트웨어만의 문제가 아니게 된 순간</a:t>
             </a:r>
           </a:p>
         </p:txBody>
@@ -15133,14 +15602,143 @@
       </p:sp>
       <p:sp>
         <p:nvSpPr>
-          <p:cNvPr id="5" name="TextBox 4"/>
+          <p:cNvPr id="5" name="Rectangle 4"/>
+          <p:cNvSpPr/>
+          <p:nvPr/>
+        </p:nvSpPr>
+        <p:spPr>
+          <a:xfrm>
+            <a:off x="1572768" y="2304288"/>
+            <a:ext cx="16459" cy="2907792"/>
+          </a:xfrm>
+          <a:prstGeom prst="rect">
+            <a:avLst/>
+          </a:prstGeom>
+          <a:solidFill>
+            <a:srgbClr val="D2D2D2"/>
+          </a:solidFill>
+          <a:ln>
+            <a:noFill/>
+          </a:ln>
+        </p:spPr>
+        <p:style>
+          <a:lnRef idx="1">
+            <a:schemeClr val="accent1"/>
+          </a:lnRef>
+          <a:fillRef idx="3">
+            <a:schemeClr val="accent1"/>
+          </a:fillRef>
+          <a:effectRef idx="2">
+            <a:schemeClr val="accent1"/>
+          </a:effectRef>
+          <a:fontRef idx="minor">
+            <a:schemeClr val="lt1"/>
+          </a:fontRef>
+        </p:style>
+        <p:txBody>
+          <a:bodyPr rtlCol="0" anchor="ctr"/>
+          <a:lstStyle/>
+          <a:p>
+            <a:pPr algn="ctr"/>
+          </a:p>
+        </p:txBody>
+      </p:sp>
+      <p:sp>
+        <p:nvSpPr>
+          <p:cNvPr id="6" name="Rectangle 5"/>
+          <p:cNvSpPr/>
+          <p:nvPr/>
+        </p:nvSpPr>
+        <p:spPr>
+          <a:xfrm>
+            <a:off x="1572768" y="5138928"/>
+            <a:ext cx="9235440" cy="16459"/>
+          </a:xfrm>
+          <a:prstGeom prst="rect">
+            <a:avLst/>
+          </a:prstGeom>
+          <a:solidFill>
+            <a:srgbClr val="D2D2D2"/>
+          </a:solidFill>
+          <a:ln>
+            <a:noFill/>
+          </a:ln>
+        </p:spPr>
+        <p:style>
+          <a:lnRef idx="1">
+            <a:schemeClr val="accent1"/>
+          </a:lnRef>
+          <a:fillRef idx="3">
+            <a:schemeClr val="accent1"/>
+          </a:fillRef>
+          <a:effectRef idx="2">
+            <a:schemeClr val="accent1"/>
+          </a:effectRef>
+          <a:fontRef idx="minor">
+            <a:schemeClr val="lt1"/>
+          </a:fontRef>
+        </p:style>
+        <p:txBody>
+          <a:bodyPr rtlCol="0" anchor="ctr"/>
+          <a:lstStyle/>
+          <a:p>
+            <a:pPr algn="ctr"/>
+          </a:p>
+        </p:txBody>
+      </p:sp>
+      <p:sp>
+        <p:nvSpPr>
+          <p:cNvPr id="7" name="Rectangle 6"/>
+          <p:cNvSpPr/>
+          <p:nvPr/>
+        </p:nvSpPr>
+        <p:spPr>
+          <a:xfrm>
+            <a:off x="1901952" y="3776472"/>
+            <a:ext cx="658368" cy="1362456"/>
+          </a:xfrm>
+          <a:prstGeom prst="rect">
+            <a:avLst/>
+          </a:prstGeom>
+          <a:solidFill>
+            <a:srgbClr val="4872C4"/>
+          </a:solidFill>
+          <a:ln>
+            <a:noFill/>
+          </a:ln>
+        </p:spPr>
+        <p:style>
+          <a:lnRef idx="1">
+            <a:schemeClr val="accent1"/>
+          </a:lnRef>
+          <a:fillRef idx="3">
+            <a:schemeClr val="accent1"/>
+          </a:fillRef>
+          <a:effectRef idx="2">
+            <a:schemeClr val="accent1"/>
+          </a:effectRef>
+          <a:fontRef idx="minor">
+            <a:schemeClr val="lt1"/>
+          </a:fontRef>
+        </p:style>
+        <p:txBody>
+          <a:bodyPr rtlCol="0" anchor="ctr"/>
+          <a:lstStyle/>
+          <a:p>
+            <a:pPr algn="ctr"/>
+          </a:p>
+        </p:txBody>
+      </p:sp>
+      <p:sp>
+        <p:nvSpPr>
+          <p:cNvPr id="8" name="TextBox 7"/>
           <p:cNvSpPr txBox="1"/>
           <p:nvPr/>
         </p:nvSpPr>
         <p:spPr>
           <a:xfrm>
-            <a:off x="1234440" y="2423160"/>
-            <a:ext cx="9692640" cy="2514600"/>
+            <a:off x="1645920" y="3465576"/>
+            <a:ext cx="1170432" cy="237744"/>
           </a:xfrm>
           <a:prstGeom prst="rect">
             <a:avLst/>
@@ -15153,11 +15751,7 @@
           </a:bodyPr>
           <a:lstStyle/>
           <a:p>
-            <a:pPr>
-              <a:spcAft>
-                <a:spcPts val="800"/>
-              </a:spcAft>
-            </a:pPr>
+            <a:pPr algn="ctr"/>
             <a:r>
               <a:rPr sz="1800" b="1" u="none">
                 <a:solidFill>
@@ -15165,15 +15759,112 @@
                 </a:solidFill>
                 <a:latin typeface="맑은 고딕"/>
               </a:rPr>
-              <a:t>정부는 국민성장펀드를 통해 장기 자금을 공급하겠다고 설명하지만, 그 자체가 수익을 보장한다는 말은 아니다.</a:t>
-            </a:r>
-          </a:p>
-          <a:p>
-            <a:pPr>
-              <a:spcAft>
-                <a:spcPts val="800"/>
-              </a:spcAft>
-            </a:pPr>
+              <a:t>정부는 국민성장펀드를 통해 장기…</a:t>
+            </a:r>
+          </a:p>
+        </p:txBody>
+      </p:sp>
+      <p:sp>
+        <p:nvSpPr>
+          <p:cNvPr id="9" name="TextBox 8"/>
+          <p:cNvSpPr txBox="1"/>
+          <p:nvPr/>
+        </p:nvSpPr>
+        <p:spPr>
+          <a:xfrm>
+            <a:off x="1609344" y="5212080"/>
+            <a:ext cx="1243584" cy="301752"/>
+          </a:xfrm>
+          <a:prstGeom prst="rect">
+            <a:avLst/>
+          </a:prstGeom>
+          <a:noFill/>
+        </p:spPr>
+        <p:txBody>
+          <a:bodyPr wrap="square">
+            <a:spAutoFit/>
+          </a:bodyPr>
+          <a:lstStyle/>
+          <a:p>
+            <a:pPr algn="ctr"/>
+            <a:r>
+              <a:rPr sz="1400" b="1" u="none">
+                <a:solidFill>
+                  <a:srgbClr val="373737"/>
+                </a:solidFill>
+                <a:latin typeface="맑은 고딕"/>
+              </a:rPr>
+              <a:t>정부는</a:t>
+            </a:r>
+          </a:p>
+        </p:txBody>
+      </p:sp>
+      <p:sp>
+        <p:nvSpPr>
+          <p:cNvPr id="10" name="Rectangle 9"/>
+          <p:cNvSpPr/>
+          <p:nvPr/>
+        </p:nvSpPr>
+        <p:spPr>
+          <a:xfrm>
+            <a:off x="6268212" y="4069080"/>
+            <a:ext cx="658368" cy="1069848"/>
+          </a:xfrm>
+          <a:prstGeom prst="rect">
+            <a:avLst/>
+          </a:prstGeom>
+          <a:solidFill>
+            <a:srgbClr val="4872C4"/>
+          </a:solidFill>
+          <a:ln>
+            <a:noFill/>
+          </a:ln>
+        </p:spPr>
+        <p:style>
+          <a:lnRef idx="1">
+            <a:schemeClr val="accent1"/>
+          </a:lnRef>
+          <a:fillRef idx="3">
+            <a:schemeClr val="accent1"/>
+          </a:fillRef>
+          <a:effectRef idx="2">
+            <a:schemeClr val="accent1"/>
+          </a:effectRef>
+          <a:fontRef idx="minor">
+            <a:schemeClr val="lt1"/>
+          </a:fontRef>
+        </p:style>
+        <p:txBody>
+          <a:bodyPr rtlCol="0" anchor="ctr"/>
+          <a:lstStyle/>
+          <a:p>
+            <a:pPr algn="ctr"/>
+          </a:p>
+        </p:txBody>
+      </p:sp>
+      <p:sp>
+        <p:nvSpPr>
+          <p:cNvPr id="11" name="TextBox 10"/>
+          <p:cNvSpPr txBox="1"/>
+          <p:nvPr/>
+        </p:nvSpPr>
+        <p:spPr>
+          <a:xfrm>
+            <a:off x="6012179" y="3758184"/>
+            <a:ext cx="1170432" cy="237744"/>
+          </a:xfrm>
+          <a:prstGeom prst="rect">
+            <a:avLst/>
+          </a:prstGeom>
+          <a:noFill/>
+        </p:spPr>
+        <p:txBody>
+          <a:bodyPr wrap="square">
+            <a:spAutoFit/>
+          </a:bodyPr>
+          <a:lstStyle/>
+          <a:p>
+            <a:pPr algn="ctr"/>
             <a:r>
               <a:rPr sz="1800" b="1" u="none">
                 <a:solidFill>
@@ -15181,14 +15872,49 @@
                 </a:solidFill>
                 <a:latin typeface="맑은 고딕"/>
               </a:rPr>
-              <a:t>여기서 “장기 위험자본”이라는 말은 가능성과 손실 가능성을 함께 본다는 뜻이다.</a:t>
+              <a:t>여기서 “장기 위험자본”이라는…</a:t>
             </a:r>
           </a:p>
         </p:txBody>
       </p:sp>
       <p:sp>
         <p:nvSpPr>
-          <p:cNvPr id="6" name="TextBox 5"/>
+          <p:cNvPr id="12" name="TextBox 11"/>
+          <p:cNvSpPr txBox="1"/>
+          <p:nvPr/>
+        </p:nvSpPr>
+        <p:spPr>
+          <a:xfrm>
+            <a:off x="5975603" y="5212080"/>
+            <a:ext cx="1243584" cy="301752"/>
+          </a:xfrm>
+          <a:prstGeom prst="rect">
+            <a:avLst/>
+          </a:prstGeom>
+          <a:noFill/>
+        </p:spPr>
+        <p:txBody>
+          <a:bodyPr wrap="square">
+            <a:spAutoFit/>
+          </a:bodyPr>
+          <a:lstStyle/>
+          <a:p>
+            <a:pPr algn="ctr"/>
+            <a:r>
+              <a:rPr sz="1400" b="1" u="none">
+                <a:solidFill>
+                  <a:srgbClr val="373737"/>
+                </a:solidFill>
+                <a:latin typeface="맑은 고딕"/>
+              </a:rPr>
+              <a:t>여기서</a:t>
+            </a:r>
+          </a:p>
+        </p:txBody>
+      </p:sp>
+      <p:sp>
+        <p:nvSpPr>
+          <p:cNvPr id="13" name="TextBox 12"/>
           <p:cNvSpPr txBox="1"/>
           <p:nvPr/>
         </p:nvSpPr>
@@ -15324,7 +16050,7 @@
           <a:p>
             <a:pPr algn="ctr"/>
             <a:r>
-              <a:rPr sz="1300">
+              <a:rPr sz="1300" b="0">
                 <a:solidFill>
                   <a:srgbClr val="566070"/>
                 </a:solidFill>
@@ -15363,7 +16089,7 @@
               </a:spcAft>
             </a:pPr>
             <a:r>
-              <a:rPr sz="2400" b="0" u="none">
+              <a:rPr sz="2800" b="0" u="none">
                 <a:solidFill>
                   <a:srgbClr val="000000"/>
                 </a:solidFill>
@@ -15379,29 +16105,13 @@
               </a:spcAft>
             </a:pPr>
             <a:r>
-              <a:rPr sz="2400" b="0" u="none">
+              <a:rPr sz="2800" b="0" u="none">
                 <a:solidFill>
                   <a:srgbClr val="000000"/>
                 </a:solidFill>
                 <a:latin typeface="맑은 고딕"/>
               </a:rPr>
               <a:t>하지만 초기 기술, 인력, 데이터, 공정 노하우는 평가하기 어렵다.</a:t>
-            </a:r>
-          </a:p>
-          <a:p>
-            <a:pPr>
-              <a:spcAft>
-                <a:spcPts val="800"/>
-              </a:spcAft>
-            </a:pPr>
-            <a:r>
-              <a:rPr sz="2400" b="0" u="none">
-                <a:solidFill>
-                  <a:srgbClr val="000000"/>
-                </a:solidFill>
-                <a:latin typeface="맑은 고딕"/>
-              </a:rPr>
-              <a:t>위험가중자산과 자본규제가 있는 은행 입장에서는 이런 불확실성이 비용이 된다.</a:t>
             </a:r>
           </a:p>
         </p:txBody>

--- a/outputs/pptx/productive_finance_policy_styled_draft.pptx
+++ b/outputs/pptx/productive_finance_policy_styled_draft.pptx
@@ -12115,6 +12115,9 @@
           <a:lstStyle/>
           <a:p>
             <a:pPr>
+              <a:lnSpc>
+                <a:spcPct val="150000"/>
+              </a:lnSpc>
               <a:spcAft>
                 <a:spcPts val="800"/>
               </a:spcAft>
@@ -12131,6 +12134,9 @@
           </a:p>
           <a:p>
             <a:pPr>
+              <a:lnSpc>
+                <a:spcPct val="150000"/>
+              </a:lnSpc>
               <a:spcAft>
                 <a:spcPts val="800"/>
               </a:spcAft>
@@ -12284,6 +12290,9 @@
           <a:lstStyle/>
           <a:p>
             <a:pPr>
+              <a:lnSpc>
+                <a:spcPct val="150000"/>
+              </a:lnSpc>
               <a:spcAft>
                 <a:spcPts val="800"/>
               </a:spcAft>
@@ -12300,6 +12309,9 @@
           </a:p>
           <a:p>
             <a:pPr>
+              <a:lnSpc>
+                <a:spcPct val="150000"/>
+              </a:lnSpc>
               <a:spcAft>
                 <a:spcPts val="800"/>
               </a:spcAft>
@@ -12459,6 +12471,9 @@
           <a:lstStyle/>
           <a:p>
             <a:pPr>
+              <a:lnSpc>
+                <a:spcPct val="150000"/>
+              </a:lnSpc>
               <a:spcAft>
                 <a:spcPts val="800"/>
               </a:spcAft>
@@ -12475,6 +12490,9 @@
           </a:p>
           <a:p>
             <a:pPr>
+              <a:lnSpc>
+                <a:spcPct val="150000"/>
+              </a:lnSpc>
               <a:spcAft>
                 <a:spcPts val="800"/>
               </a:spcAft>
@@ -12660,6 +12678,9 @@
           <a:lstStyle/>
           <a:p>
             <a:pPr>
+              <a:lnSpc>
+                <a:spcPct val="150000"/>
+              </a:lnSpc>
               <a:spcAft>
                 <a:spcPts val="800"/>
               </a:spcAft>
@@ -12676,6 +12697,9 @@
           </a:p>
           <a:p>
             <a:pPr>
+              <a:lnSpc>
+                <a:spcPct val="150000"/>
+              </a:lnSpc>
               <a:spcAft>
                 <a:spcPts val="800"/>
               </a:spcAft>
@@ -13027,6 +13051,9 @@
           <a:lstStyle/>
           <a:p>
             <a:pPr>
+              <a:lnSpc>
+                <a:spcPct val="150000"/>
+              </a:lnSpc>
               <a:spcAft>
                 <a:spcPts val="800"/>
               </a:spcAft>
@@ -13043,6 +13070,9 @@
           </a:p>
           <a:p>
             <a:pPr>
+              <a:lnSpc>
+                <a:spcPct val="150000"/>
+              </a:lnSpc>
               <a:spcAft>
                 <a:spcPts val="800"/>
               </a:spcAft>
@@ -13059,6 +13089,9 @@
           </a:p>
           <a:p>
             <a:pPr>
+              <a:lnSpc>
+                <a:spcPct val="150000"/>
+              </a:lnSpc>
               <a:spcAft>
                 <a:spcPts val="800"/>
               </a:spcAft>
@@ -13212,6 +13245,9 @@
           <a:lstStyle/>
           <a:p>
             <a:pPr>
+              <a:lnSpc>
+                <a:spcPct val="150000"/>
+              </a:lnSpc>
               <a:spcAft>
                 <a:spcPts val="800"/>
               </a:spcAft>
@@ -13228,6 +13264,9 @@
           </a:p>
           <a:p>
             <a:pPr>
+              <a:lnSpc>
+                <a:spcPct val="150000"/>
+              </a:lnSpc>
               <a:spcAft>
                 <a:spcPts val="800"/>
               </a:spcAft>
@@ -13381,6 +13420,9 @@
           <a:lstStyle/>
           <a:p>
             <a:pPr>
+              <a:lnSpc>
+                <a:spcPct val="150000"/>
+              </a:lnSpc>
               <a:spcAft>
                 <a:spcPts val="800"/>
               </a:spcAft>
@@ -13397,6 +13439,9 @@
           </a:p>
           <a:p>
             <a:pPr>
+              <a:lnSpc>
+                <a:spcPct val="150000"/>
+              </a:lnSpc>
               <a:spcAft>
                 <a:spcPts val="800"/>
               </a:spcAft>
@@ -13550,6 +13595,9 @@
           <a:lstStyle/>
           <a:p>
             <a:pPr>
+              <a:lnSpc>
+                <a:spcPct val="150000"/>
+              </a:lnSpc>
               <a:spcAft>
                 <a:spcPts val="800"/>
               </a:spcAft>
@@ -13566,6 +13614,9 @@
           </a:p>
           <a:p>
             <a:pPr>
+              <a:lnSpc>
+                <a:spcPct val="150000"/>
+              </a:lnSpc>
               <a:spcAft>
                 <a:spcPts val="800"/>
               </a:spcAft>
@@ -13725,6 +13776,9 @@
           <a:lstStyle/>
           <a:p>
             <a:pPr>
+              <a:lnSpc>
+                <a:spcPct val="150000"/>
+              </a:lnSpc>
               <a:spcAft>
                 <a:spcPts val="800"/>
               </a:spcAft>
@@ -13741,6 +13795,9 @@
           </a:p>
           <a:p>
             <a:pPr>
+              <a:lnSpc>
+                <a:spcPct val="150000"/>
+              </a:lnSpc>
               <a:spcAft>
                 <a:spcPts val="800"/>
               </a:spcAft>
@@ -13926,6 +13983,9 @@
           <a:lstStyle/>
           <a:p>
             <a:pPr>
+              <a:lnSpc>
+                <a:spcPct val="150000"/>
+              </a:lnSpc>
               <a:spcAft>
                 <a:spcPts val="800"/>
               </a:spcAft>
@@ -13942,6 +14002,9 @@
           </a:p>
           <a:p>
             <a:pPr>
+              <a:lnSpc>
+                <a:spcPct val="150000"/>
+              </a:lnSpc>
               <a:spcAft>
                 <a:spcPts val="800"/>
               </a:spcAft>
@@ -14181,6 +14244,9 @@
           <a:lstStyle/>
           <a:p>
             <a:pPr>
+              <a:lnSpc>
+                <a:spcPct val="150000"/>
+              </a:lnSpc>
               <a:spcAft>
                 <a:spcPts val="800"/>
               </a:spcAft>
@@ -14197,6 +14263,9 @@
           </a:p>
           <a:p>
             <a:pPr>
+              <a:lnSpc>
+                <a:spcPct val="150000"/>
+              </a:lnSpc>
               <a:spcAft>
                 <a:spcPts val="800"/>
               </a:spcAft>
@@ -14382,6 +14451,9 @@
           <a:lstStyle/>
           <a:p>
             <a:pPr>
+              <a:lnSpc>
+                <a:spcPct val="150000"/>
+              </a:lnSpc>
               <a:spcAft>
                 <a:spcPts val="800"/>
               </a:spcAft>
@@ -14398,6 +14470,9 @@
           </a:p>
           <a:p>
             <a:pPr>
+              <a:lnSpc>
+                <a:spcPct val="150000"/>
+              </a:lnSpc>
               <a:spcAft>
                 <a:spcPts val="800"/>
               </a:spcAft>
@@ -14497,6 +14572,9 @@
           <a:lstStyle/>
           <a:p>
             <a:pPr>
+              <a:lnSpc>
+                <a:spcPct val="150000"/>
+              </a:lnSpc>
               <a:spcAft>
                 <a:spcPts val="800"/>
               </a:spcAft>
@@ -14513,6 +14591,9 @@
           </a:p>
           <a:p>
             <a:pPr>
+              <a:lnSpc>
+                <a:spcPct val="150000"/>
+              </a:lnSpc>
               <a:spcAft>
                 <a:spcPts val="800"/>
               </a:spcAft>
@@ -14529,6 +14610,9 @@
           </a:p>
           <a:p>
             <a:pPr>
+              <a:lnSpc>
+                <a:spcPct val="150000"/>
+              </a:lnSpc>
               <a:spcAft>
                 <a:spcPts val="800"/>
               </a:spcAft>
@@ -14628,6 +14712,9 @@
           <a:lstStyle/>
           <a:p>
             <a:pPr>
+              <a:lnSpc>
+                <a:spcPct val="150000"/>
+              </a:lnSpc>
               <a:spcAft>
                 <a:spcPts val="800"/>
               </a:spcAft>
@@ -14644,6 +14731,9 @@
           </a:p>
           <a:p>
             <a:pPr>
+              <a:lnSpc>
+                <a:spcPct val="150000"/>
+              </a:lnSpc>
               <a:spcAft>
                 <a:spcPts val="800"/>
               </a:spcAft>
@@ -14743,6 +14833,9 @@
           <a:lstStyle/>
           <a:p>
             <a:pPr>
+              <a:lnSpc>
+                <a:spcPct val="150000"/>
+              </a:lnSpc>
               <a:spcAft>
                 <a:spcPts val="800"/>
               </a:spcAft>
@@ -14759,6 +14852,9 @@
           </a:p>
           <a:p>
             <a:pPr>
+              <a:lnSpc>
+                <a:spcPct val="150000"/>
+              </a:lnSpc>
               <a:spcAft>
                 <a:spcPts val="800"/>
               </a:spcAft>
@@ -14998,6 +15094,9 @@
           <a:lstStyle/>
           <a:p>
             <a:pPr>
+              <a:lnSpc>
+                <a:spcPct val="150000"/>
+              </a:lnSpc>
               <a:spcAft>
                 <a:spcPts val="800"/>
               </a:spcAft>
@@ -15014,6 +15113,9 @@
           </a:p>
           <a:p>
             <a:pPr>
+              <a:lnSpc>
+                <a:spcPct val="150000"/>
+              </a:lnSpc>
               <a:spcAft>
                 <a:spcPts val="800"/>
               </a:spcAft>
@@ -15167,6 +15269,9 @@
           <a:lstStyle/>
           <a:p>
             <a:pPr>
+              <a:lnSpc>
+                <a:spcPct val="150000"/>
+              </a:lnSpc>
               <a:spcAft>
                 <a:spcPts val="800"/>
               </a:spcAft>
@@ -15183,6 +15288,9 @@
           </a:p>
           <a:p>
             <a:pPr>
+              <a:lnSpc>
+                <a:spcPct val="150000"/>
+              </a:lnSpc>
               <a:spcAft>
                 <a:spcPts val="800"/>
               </a:spcAft>
@@ -15342,6 +15450,9 @@
           <a:lstStyle/>
           <a:p>
             <a:pPr>
+              <a:lnSpc>
+                <a:spcPct val="150000"/>
+              </a:lnSpc>
               <a:spcAft>
                 <a:spcPts val="800"/>
               </a:spcAft>
@@ -15358,6 +15469,9 @@
           </a:p>
           <a:p>
             <a:pPr>
+              <a:lnSpc>
+                <a:spcPct val="150000"/>
+              </a:lnSpc>
               <a:spcAft>
                 <a:spcPts val="800"/>
               </a:spcAft>
@@ -16084,6 +16198,9 @@
           <a:lstStyle/>
           <a:p>
             <a:pPr>
+              <a:lnSpc>
+                <a:spcPct val="150000"/>
+              </a:lnSpc>
               <a:spcAft>
                 <a:spcPts val="800"/>
               </a:spcAft>
@@ -16100,6 +16217,9 @@
           </a:p>
           <a:p>
             <a:pPr>
+              <a:lnSpc>
+                <a:spcPct val="150000"/>
+              </a:lnSpc>
               <a:spcAft>
                 <a:spcPts val="800"/>
               </a:spcAft>

--- a/outputs/pptx/productive_finance_policy_styled_draft.pptx
+++ b/outputs/pptx/productive_finance_policy_styled_draft.pptx
@@ -12027,7 +12027,7 @@
           <a:lstStyle/>
           <a:p>
             <a:r>
-              <a:rPr sz="2800" b="1" u="none">
+              <a:rPr sz="2800" b="0" u="none">
                 <a:solidFill>
                   <a:srgbClr val="FF0000"/>
                 </a:solidFill>
@@ -12081,9 +12081,9 @@
           <a:p>
             <a:pPr algn="ctr"/>
             <a:r>
-              <a:rPr sz="1300" b="0">
+              <a:rPr sz="1800" b="0">
                 <a:solidFill>
-                  <a:srgbClr val="566070"/>
+                  <a:srgbClr val="0070C0"/>
                 </a:solidFill>
                 <a:latin typeface="맑은 고딕"/>
               </a:rPr>
@@ -12109,7 +12109,7 @@
           <a:noFill/>
         </p:spPr>
         <p:txBody>
-          <a:bodyPr wrap="square">
+          <a:bodyPr wrap="square" anchor="ctr">
             <a:spAutoFit/>
           </a:bodyPr>
           <a:lstStyle/>
@@ -12202,7 +12202,7 @@
           <a:lstStyle/>
           <a:p>
             <a:r>
-              <a:rPr sz="2800" b="1" u="none">
+              <a:rPr sz="2800" b="0" u="none">
                 <a:solidFill>
                   <a:srgbClr val="FF0000"/>
                 </a:solidFill>
@@ -12256,9 +12256,9 @@
           <a:p>
             <a:pPr algn="ctr"/>
             <a:r>
-              <a:rPr sz="1300" b="0">
+              <a:rPr sz="1800" b="0">
                 <a:solidFill>
-                  <a:srgbClr val="566070"/>
+                  <a:srgbClr val="0070C0"/>
                 </a:solidFill>
                 <a:latin typeface="맑은 고딕"/>
               </a:rPr>
@@ -12284,7 +12284,7 @@
           <a:noFill/>
         </p:spPr>
         <p:txBody>
-          <a:bodyPr wrap="square">
+          <a:bodyPr wrap="square" anchor="ctr">
             <a:spAutoFit/>
           </a:bodyPr>
           <a:lstStyle/>
@@ -12437,7 +12437,7 @@
           <a:lstStyle/>
           <a:p>
             <a:r>
-              <a:rPr sz="2800" b="1" u="none">
+              <a:rPr sz="2800" b="0" u="none">
                 <a:solidFill>
                   <a:srgbClr val="FF0000"/>
                 </a:solidFill>
@@ -12465,7 +12465,7 @@
           <a:noFill/>
         </p:spPr>
         <p:txBody>
-          <a:bodyPr wrap="square">
+          <a:bodyPr wrap="square" anchor="ctr">
             <a:spAutoFit/>
           </a:bodyPr>
           <a:lstStyle/>
@@ -12552,9 +12552,9 @@
           <a:p>
             <a:pPr algn="ctr"/>
             <a:r>
-              <a:rPr sz="1300" b="1">
+              <a:rPr sz="1800" b="0">
                 <a:solidFill>
-                  <a:srgbClr val="566070"/>
+                  <a:srgbClr val="0070C0"/>
                 </a:solidFill>
                 <a:latin typeface="맑은 고딕"/>
               </a:rPr>
@@ -12644,7 +12644,7 @@
           <a:lstStyle/>
           <a:p>
             <a:r>
-              <a:rPr sz="2800" b="1" u="none">
+              <a:rPr sz="2800" b="0" u="none">
                 <a:solidFill>
                   <a:srgbClr val="FF0000"/>
                 </a:solidFill>
@@ -12672,7 +12672,7 @@
           <a:noFill/>
         </p:spPr>
         <p:txBody>
-          <a:bodyPr wrap="square">
+          <a:bodyPr wrap="square" anchor="ctr">
             <a:spAutoFit/>
           </a:bodyPr>
           <a:lstStyle/>
@@ -12759,9 +12759,9 @@
           <a:p>
             <a:pPr algn="ctr"/>
             <a:r>
-              <a:rPr sz="1300" b="1">
+              <a:rPr sz="1800" b="0">
                 <a:solidFill>
-                  <a:srgbClr val="566070"/>
+                  <a:srgbClr val="0070C0"/>
                 </a:solidFill>
                 <a:latin typeface="맑은 고딕"/>
               </a:rPr>
@@ -12871,9 +12871,9 @@
           <a:p>
             <a:pPr algn="ctr"/>
             <a:r>
-              <a:rPr sz="1300" b="1">
+              <a:rPr sz="1800" b="0">
                 <a:solidFill>
-                  <a:srgbClr val="566070"/>
+                  <a:srgbClr val="0070C0"/>
                 </a:solidFill>
                 <a:latin typeface="맑은 고딕"/>
               </a:rPr>
@@ -12982,7 +12982,7 @@
           <a:lstStyle/>
           <a:p>
             <a:r>
-              <a:rPr sz="2800" b="1" u="none">
+              <a:rPr sz="2800" b="0" u="none">
                 <a:solidFill>
                   <a:srgbClr val="FF0000"/>
                 </a:solidFill>
@@ -13045,7 +13045,7 @@
           <a:noFill/>
         </p:spPr>
         <p:txBody>
-          <a:bodyPr wrap="square">
+          <a:bodyPr wrap="square" anchor="ctr">
             <a:spAutoFit/>
           </a:bodyPr>
           <a:lstStyle/>
@@ -13157,7 +13157,7 @@
           <a:lstStyle/>
           <a:p>
             <a:r>
-              <a:rPr sz="2800" b="1" u="none">
+              <a:rPr sz="2800" b="0" u="none">
                 <a:solidFill>
                   <a:srgbClr val="FF0000"/>
                 </a:solidFill>
@@ -13211,9 +13211,9 @@
           <a:p>
             <a:pPr algn="ctr"/>
             <a:r>
-              <a:rPr sz="1300" b="0">
+              <a:rPr sz="1800" b="0">
                 <a:solidFill>
-                  <a:srgbClr val="566070"/>
+                  <a:srgbClr val="0070C0"/>
                 </a:solidFill>
                 <a:latin typeface="맑은 고딕"/>
               </a:rPr>
@@ -13239,7 +13239,7 @@
           <a:noFill/>
         </p:spPr>
         <p:txBody>
-          <a:bodyPr wrap="square">
+          <a:bodyPr wrap="square" anchor="ctr">
             <a:spAutoFit/>
           </a:bodyPr>
           <a:lstStyle/>
@@ -13332,7 +13332,7 @@
           <a:lstStyle/>
           <a:p>
             <a:r>
-              <a:rPr sz="2800" b="1" u="none">
+              <a:rPr sz="2800" b="0" u="none">
                 <a:solidFill>
                   <a:srgbClr val="FF0000"/>
                 </a:solidFill>
@@ -13386,9 +13386,9 @@
           <a:p>
             <a:pPr algn="ctr"/>
             <a:r>
-              <a:rPr sz="1300" b="0">
+              <a:rPr sz="1800" b="0">
                 <a:solidFill>
-                  <a:srgbClr val="566070"/>
+                  <a:srgbClr val="0070C0"/>
                 </a:solidFill>
                 <a:latin typeface="맑은 고딕"/>
               </a:rPr>
@@ -13414,7 +13414,7 @@
           <a:noFill/>
         </p:spPr>
         <p:txBody>
-          <a:bodyPr wrap="square">
+          <a:bodyPr wrap="square" anchor="ctr">
             <a:spAutoFit/>
           </a:bodyPr>
           <a:lstStyle/>
@@ -13507,7 +13507,7 @@
           <a:lstStyle/>
           <a:p>
             <a:r>
-              <a:rPr sz="2800" b="1" u="none">
+              <a:rPr sz="2800" b="0" u="none">
                 <a:solidFill>
                   <a:srgbClr val="FF0000"/>
                 </a:solidFill>
@@ -13561,9 +13561,9 @@
           <a:p>
             <a:pPr algn="ctr"/>
             <a:r>
-              <a:rPr sz="1300" b="0">
+              <a:rPr sz="1800" b="0">
                 <a:solidFill>
-                  <a:srgbClr val="566070"/>
+                  <a:srgbClr val="0070C0"/>
                 </a:solidFill>
                 <a:latin typeface="맑은 고딕"/>
               </a:rPr>
@@ -13589,7 +13589,7 @@
           <a:noFill/>
         </p:spPr>
         <p:txBody>
-          <a:bodyPr wrap="square">
+          <a:bodyPr wrap="square" anchor="ctr">
             <a:spAutoFit/>
           </a:bodyPr>
           <a:lstStyle/>
@@ -13742,7 +13742,7 @@
           <a:lstStyle/>
           <a:p>
             <a:r>
-              <a:rPr sz="2800" b="1" u="none">
+              <a:rPr sz="2800" b="0" u="none">
                 <a:solidFill>
                   <a:srgbClr val="FF0000"/>
                 </a:solidFill>
@@ -13770,7 +13770,7 @@
           <a:noFill/>
         </p:spPr>
         <p:txBody>
-          <a:bodyPr wrap="square">
+          <a:bodyPr wrap="square" anchor="ctr">
             <a:spAutoFit/>
           </a:bodyPr>
           <a:lstStyle/>
@@ -13857,9 +13857,9 @@
           <a:p>
             <a:pPr algn="ctr"/>
             <a:r>
-              <a:rPr sz="1300" b="1">
+              <a:rPr sz="1800" b="0">
                 <a:solidFill>
-                  <a:srgbClr val="566070"/>
+                  <a:srgbClr val="0070C0"/>
                 </a:solidFill>
                 <a:latin typeface="맑은 고딕"/>
               </a:rPr>
@@ -13949,7 +13949,7 @@
           <a:lstStyle/>
           <a:p>
             <a:r>
-              <a:rPr sz="2800" b="1" u="none">
+              <a:rPr sz="2800" b="0" u="none">
                 <a:solidFill>
                   <a:srgbClr val="FF0000"/>
                 </a:solidFill>
@@ -13977,7 +13977,7 @@
           <a:noFill/>
         </p:spPr>
         <p:txBody>
-          <a:bodyPr wrap="square">
+          <a:bodyPr wrap="square" anchor="ctr">
             <a:spAutoFit/>
           </a:bodyPr>
           <a:lstStyle/>
@@ -14064,9 +14064,9 @@
           <a:p>
             <a:pPr algn="ctr"/>
             <a:r>
-              <a:rPr sz="1300" b="1">
+              <a:rPr sz="1800" b="0">
                 <a:solidFill>
-                  <a:srgbClr val="566070"/>
+                  <a:srgbClr val="0070C0"/>
                 </a:solidFill>
                 <a:latin typeface="맑은 고딕"/>
               </a:rPr>
@@ -14156,7 +14156,7 @@
           <a:lstStyle/>
           <a:p>
             <a:r>
-              <a:rPr sz="2800" b="1" u="none">
+              <a:rPr sz="2800" b="0" u="none">
                 <a:solidFill>
                   <a:srgbClr val="FF0000"/>
                 </a:solidFill>
@@ -14210,9 +14210,9 @@
           <a:p>
             <a:pPr algn="ctr"/>
             <a:r>
-              <a:rPr sz="1300" b="0">
+              <a:rPr sz="1800" b="0">
                 <a:solidFill>
-                  <a:srgbClr val="566070"/>
+                  <a:srgbClr val="0070C0"/>
                 </a:solidFill>
                 <a:latin typeface="맑은 고딕"/>
               </a:rPr>
@@ -14238,7 +14238,7 @@
           <a:noFill/>
         </p:spPr>
         <p:txBody>
-          <a:bodyPr wrap="square">
+          <a:bodyPr wrap="square" anchor="ctr">
             <a:spAutoFit/>
           </a:bodyPr>
           <a:lstStyle/>
@@ -14331,7 +14331,7 @@
           <a:lstStyle/>
           <a:p>
             <a:r>
-              <a:rPr sz="2800" b="1" u="none">
+              <a:rPr sz="2800" b="0" u="none">
                 <a:solidFill>
                   <a:srgbClr val="FF0000"/>
                 </a:solidFill>
@@ -14385,9 +14385,9 @@
           <a:p>
             <a:pPr algn="ctr"/>
             <a:r>
-              <a:rPr sz="1300" b="1">
+              <a:rPr sz="1800" b="0">
                 <a:solidFill>
-                  <a:srgbClr val="566070"/>
+                  <a:srgbClr val="0070C0"/>
                 </a:solidFill>
                 <a:latin typeface="맑은 고딕"/>
               </a:rPr>
@@ -14445,7 +14445,7 @@
           <a:noFill/>
         </p:spPr>
         <p:txBody>
-          <a:bodyPr wrap="square">
+          <a:bodyPr wrap="square" anchor="ctr">
             <a:spAutoFit/>
           </a:bodyPr>
           <a:lstStyle/>
@@ -14540,7 +14540,7 @@
             <a:r>
               <a:rPr sz="2800" b="1" u="none">
                 <a:solidFill>
-                  <a:srgbClr val="BF6F24"/>
+                  <a:srgbClr val="0070C0"/>
                 </a:solidFill>
                 <a:latin typeface="맑은 고딕"/>
               </a:rPr>
@@ -14566,7 +14566,7 @@
           <a:noFill/>
         </p:spPr>
         <p:txBody>
-          <a:bodyPr wrap="square">
+          <a:bodyPr wrap="square" anchor="ctr">
             <a:spAutoFit/>
           </a:bodyPr>
           <a:lstStyle/>
@@ -14582,7 +14582,7 @@
             <a:r>
               <a:rPr sz="2400" b="0" u="none">
                 <a:solidFill>
-                  <a:srgbClr val="000000"/>
+                  <a:srgbClr val="0070C0"/>
                 </a:solidFill>
                 <a:latin typeface="맑은 고딕"/>
               </a:rPr>
@@ -14601,7 +14601,7 @@
             <a:r>
               <a:rPr sz="2400" b="0" u="none">
                 <a:solidFill>
-                  <a:srgbClr val="000000"/>
+                  <a:srgbClr val="0070C0"/>
                 </a:solidFill>
                 <a:latin typeface="맑은 고딕"/>
               </a:rPr>
@@ -14620,7 +14620,7 @@
             <a:r>
               <a:rPr sz="2400" b="0" u="none">
                 <a:solidFill>
-                  <a:srgbClr val="000000"/>
+                  <a:srgbClr val="0070C0"/>
                 </a:solidFill>
                 <a:latin typeface="맑은 고딕"/>
               </a:rPr>
@@ -14680,7 +14680,7 @@
             <a:r>
               <a:rPr sz="2800" b="1" u="none">
                 <a:solidFill>
-                  <a:srgbClr val="BF6F24"/>
+                  <a:srgbClr val="0070C0"/>
                 </a:solidFill>
                 <a:latin typeface="맑은 고딕"/>
               </a:rPr>
@@ -14706,7 +14706,7 @@
           <a:noFill/>
         </p:spPr>
         <p:txBody>
-          <a:bodyPr wrap="square">
+          <a:bodyPr wrap="square" anchor="ctr">
             <a:spAutoFit/>
           </a:bodyPr>
           <a:lstStyle/>
@@ -14722,7 +14722,7 @@
             <a:r>
               <a:rPr sz="2400" b="0" u="none">
                 <a:solidFill>
-                  <a:srgbClr val="000000"/>
+                  <a:srgbClr val="0070C0"/>
                 </a:solidFill>
                 <a:latin typeface="맑은 고딕"/>
               </a:rPr>
@@ -14741,7 +14741,7 @@
             <a:r>
               <a:rPr sz="2400" b="0" u="none">
                 <a:solidFill>
-                  <a:srgbClr val="000000"/>
+                  <a:srgbClr val="0070C0"/>
                 </a:solidFill>
                 <a:latin typeface="맑은 고딕"/>
               </a:rPr>
@@ -14799,7 +14799,7 @@
           <a:lstStyle/>
           <a:p>
             <a:r>
-              <a:rPr sz="2800" b="1" u="none">
+              <a:rPr sz="2800" b="0" u="none">
                 <a:solidFill>
                   <a:srgbClr val="FF0000"/>
                 </a:solidFill>
@@ -14827,7 +14827,7 @@
           <a:noFill/>
         </p:spPr>
         <p:txBody>
-          <a:bodyPr wrap="square">
+          <a:bodyPr wrap="square" anchor="ctr">
             <a:spAutoFit/>
           </a:bodyPr>
           <a:lstStyle/>
@@ -14914,9 +14914,9 @@
           <a:p>
             <a:pPr algn="ctr"/>
             <a:r>
-              <a:rPr sz="1300" b="1">
+              <a:rPr sz="1800" b="0">
                 <a:solidFill>
-                  <a:srgbClr val="566070"/>
+                  <a:srgbClr val="0070C0"/>
                 </a:solidFill>
                 <a:latin typeface="맑은 고딕"/>
               </a:rPr>
@@ -15006,7 +15006,7 @@
           <a:lstStyle/>
           <a:p>
             <a:r>
-              <a:rPr sz="2800" b="1" u="none">
+              <a:rPr sz="2800" b="0" u="none">
                 <a:solidFill>
                   <a:srgbClr val="FF0000"/>
                 </a:solidFill>
@@ -15060,9 +15060,9 @@
           <a:p>
             <a:pPr algn="ctr"/>
             <a:r>
-              <a:rPr sz="1300" b="0">
+              <a:rPr sz="1800" b="0">
                 <a:solidFill>
-                  <a:srgbClr val="566070"/>
+                  <a:srgbClr val="0070C0"/>
                 </a:solidFill>
                 <a:latin typeface="맑은 고딕"/>
               </a:rPr>
@@ -15088,7 +15088,7 @@
           <a:noFill/>
         </p:spPr>
         <p:txBody>
-          <a:bodyPr wrap="square">
+          <a:bodyPr wrap="square" anchor="ctr">
             <a:spAutoFit/>
           </a:bodyPr>
           <a:lstStyle/>
@@ -15181,7 +15181,7 @@
           <a:lstStyle/>
           <a:p>
             <a:r>
-              <a:rPr sz="2800" b="1" u="none">
+              <a:rPr sz="2800" b="0" u="none">
                 <a:solidFill>
                   <a:srgbClr val="FF0000"/>
                 </a:solidFill>
@@ -15235,9 +15235,9 @@
           <a:p>
             <a:pPr algn="ctr"/>
             <a:r>
-              <a:rPr sz="1300" b="0">
+              <a:rPr sz="1800" b="0">
                 <a:solidFill>
-                  <a:srgbClr val="566070"/>
+                  <a:srgbClr val="0070C0"/>
                 </a:solidFill>
                 <a:latin typeface="맑은 고딕"/>
               </a:rPr>
@@ -15263,7 +15263,7 @@
           <a:noFill/>
         </p:spPr>
         <p:txBody>
-          <a:bodyPr wrap="square">
+          <a:bodyPr wrap="square" anchor="ctr">
             <a:spAutoFit/>
           </a:bodyPr>
           <a:lstStyle/>
@@ -15416,7 +15416,7 @@
           <a:lstStyle/>
           <a:p>
             <a:r>
-              <a:rPr sz="2800" b="1" u="none">
+              <a:rPr sz="2800" b="0" u="none">
                 <a:solidFill>
                   <a:srgbClr val="FF0000"/>
                 </a:solidFill>
@@ -15444,7 +15444,7 @@
           <a:noFill/>
         </p:spPr>
         <p:txBody>
-          <a:bodyPr wrap="square">
+          <a:bodyPr wrap="square" anchor="ctr">
             <a:spAutoFit/>
           </a:bodyPr>
           <a:lstStyle/>
@@ -15531,9 +15531,9 @@
           <a:p>
             <a:pPr algn="ctr"/>
             <a:r>
-              <a:rPr sz="1300" b="1">
+              <a:rPr sz="1800" b="0">
                 <a:solidFill>
-                  <a:srgbClr val="566070"/>
+                  <a:srgbClr val="0070C0"/>
                 </a:solidFill>
                 <a:latin typeface="맑은 고딕"/>
               </a:rPr>
@@ -15623,7 +15623,7 @@
           <a:lstStyle/>
           <a:p>
             <a:r>
-              <a:rPr sz="2800" b="1" u="none">
+              <a:rPr sz="2800" b="0" u="none">
                 <a:solidFill>
                   <a:srgbClr val="FF0000"/>
                 </a:solidFill>
@@ -16110,7 +16110,7 @@
           <a:lstStyle/>
           <a:p>
             <a:r>
-              <a:rPr sz="2800" b="1" u="none">
+              <a:rPr sz="2800" b="0" u="none">
                 <a:solidFill>
                   <a:srgbClr val="FF0000"/>
                 </a:solidFill>
@@ -16164,9 +16164,9 @@
           <a:p>
             <a:pPr algn="ctr"/>
             <a:r>
-              <a:rPr sz="1300" b="0">
+              <a:rPr sz="1800" b="0">
                 <a:solidFill>
-                  <a:srgbClr val="566070"/>
+                  <a:srgbClr val="0070C0"/>
                 </a:solidFill>
                 <a:latin typeface="맑은 고딕"/>
               </a:rPr>
@@ -16192,7 +16192,7 @@
           <a:noFill/>
         </p:spPr>
         <p:txBody>
-          <a:bodyPr wrap="square">
+          <a:bodyPr wrap="square" anchor="ctr">
             <a:spAutoFit/>
           </a:bodyPr>
           <a:lstStyle/>

--- a/outputs/pptx/productive_finance_policy_styled_draft.pptx
+++ b/outputs/pptx/productive_finance_policy_styled_draft.pptx
@@ -923,12 +923,12 @@
           </a:p>
           <a:p>
             <a:r>
-              <a:t>  "정책금융의 명분은 민간이 감당하기 어려운 초기 위험을 나눠지는 것이다.",</a:t>
-            </a:r>
-          </a:p>
-          <a:p>
-            <a:r>
-              <a:t>  "하지만 정책자금이 늘 좋은 결과를 만든다고 단정할 수는 없다."</a:t>
+              <a:t>  "정책금융의 명분은 민간이 감당하기 어려운 초기 위험을 나눠지는…",</a:t>
+            </a:r>
+          </a:p>
+          <a:p>
+            <a:r>
+              <a:t>  "정책금융은 성장의 마중물일 수도, 손실의 통로일 수도 있다."</a:t>
             </a:r>
           </a:p>
           <a:p>
@@ -1903,7 +1903,7 @@
           </a:p>
           <a:p>
             <a:r>
-              <a:t>proof_object_type: article_quote</a:t>
+              <a:t>proof_object_type: source_card</a:t>
             </a:r>
           </a:p>
           <a:p>
@@ -1934,12 +1934,12 @@
           </a:p>
           <a:p>
             <a:r>
-              <a:t>  "국민성장펀드는 민관합동 150조 원 규모로 첨단전략산업 생태계를 지원하겠다는 정책 틀이다.",</a:t>
-            </a:r>
-          </a:p>
-          <a:p>
-            <a:r>
-              <a:t>  "국민참여형 펀드는 일반 국민 자금도 일부 모아 자펀드에 투자하는 구조로 설계됐다."</a:t>
+              <a:t>  "국민성장펀드는 민관합동 150조 원 규모로 첨단전략산업 생태계를…",</a:t>
+            </a:r>
+          </a:p>
+          <a:p>
+            <a:r>
+              <a:t>  "국민참여형 펀드는 일반 국민 자금도 일부 모아 자펀드에 투자하는…"</a:t>
             </a:r>
           </a:p>
           <a:p>
@@ -2078,7 +2078,7 @@
           </a:p>
           <a:p>
             <a:r>
-              <a:t>  "type": "article_quote",</a:t>
+              <a:t>  "type": "source_card",</a:t>
             </a:r>
           </a:p>
           <a:p>
@@ -2093,7 +2093,7 @@
           </a:p>
           <a:p>
             <a:r>
-              <a:t>  "display_label": "[기사 인용]",</a:t>
+              <a:t>  "display_label": "[출처]",</a:t>
             </a:r>
           </a:p>
           <a:p>
@@ -2270,7 +2270,7 @@
           </a:p>
           <a:p>
             <a:r>
-              <a:t>proof_object_type: article_quote</a:t>
+              <a:t>proof_object_type: source_card</a:t>
             </a:r>
           </a:p>
           <a:p>
@@ -2301,12 +2301,12 @@
           </a:p>
           <a:p>
             <a:r>
-              <a:t>  "국민참여형 펀드 자료는 재정이 각 자펀드에서 20% 범위의 손실을 우선 부담하는 구조를 설명한다.",</a:t>
-            </a:r>
-          </a:p>
-          <a:p>
-            <a:r>
-              <a:t>  "이 장치는 투자자의 위험을 낮추려는 설계지만, 원금 손실 가능성이 사라진다는 뜻은 아니다."</a:t>
+              <a:t>  "이 장치는 투자자의 위험을 낮추려는 설계지만",</a:t>
+            </a:r>
+          </a:p>
+          <a:p>
+            <a:r>
+              <a:t>  "손실을 누가, 어떤 순서로, 어디까지 부담하는지가 핵심 질문이다."</a:t>
             </a:r>
           </a:p>
           <a:p>
@@ -2440,7 +2440,7 @@
           </a:p>
           <a:p>
             <a:r>
-              <a:t>  "type": "article_quote",</a:t>
+              <a:t>  "type": "source_card",</a:t>
             </a:r>
           </a:p>
           <a:p>
@@ -2455,7 +2455,7 @@
           </a:p>
           <a:p>
             <a:r>
-              <a:t>  "display_label": "[기사 인용]",</a:t>
+              <a:t>  "display_label": "[출처]",</a:t>
             </a:r>
           </a:p>
           <a:p>
@@ -2658,12 +2658,7 @@
           </a:p>
           <a:p>
             <a:r>
-              <a:t>  "정책금융의 어려움은 “돈을 넣을 것인가”보다 “손실이 나면 누가 먼저 감당할 것인가”다.",</a:t>
-            </a:r>
-          </a:p>
-          <a:p>
-            <a:r>
-              <a:t>  "공식자료는 후순위 재정 보강을 설명하지만, 반대 관점은 손실 보전과 관제상품화 논란을 제기한다.",</a:t>
+              <a:t>  "정책금융의 어려움은 “돈을 넣을 것인가”보다 “손실이 나면 누가…",</a:t>
             </a:r>
           </a:p>
           <a:p>
@@ -2683,7 +2678,17 @@
           </a:p>
           <a:p>
             <a:r>
-              <a:t>[]</a:t>
+              <a:t>[</a:t>
+            </a:r>
+          </a:p>
+          <a:p>
+            <a:r>
+              <a:t>  "이 둘을 같이 봐야 정책금융 논쟁이 단순 찬반으로 흐르지 않는다."</a:t>
+            </a:r>
+          </a:p>
+          <a:p>
+            <a:r>
+              <a:t>]</a:t>
             </a:r>
           </a:p>
           <a:p/>
@@ -2812,7 +2817,7 @@
           </a:p>
           <a:p>
             <a:r>
-              <a:t>  "display_label": "[기사 인용]",</a:t>
+              <a:t>  "display_label": "[인용]",</a:t>
             </a:r>
           </a:p>
           <a:p>
@@ -3020,12 +3025,12 @@
           </a:p>
           <a:p>
             <a:r>
-              <a:t>  "공식자료는 AI, 반도체, 이차전지 등 첨단전략산업을 넓은 지원 대상으로 제시한다.",</a:t>
-            </a:r>
-          </a:p>
-          <a:p>
-            <a:r>
-              <a:t>  "하지만 방송에서는 이것이 특정 기업 성공 보장이나 특정 상품 추천처럼 들리면 안 된다."</a:t>
+              <a:t>  "",</a:t>
+            </a:r>
+          </a:p>
+          <a:p>
+            <a:r>
+              <a:t>  "성장산업 지원과 특정 기업 밀어주기는 구분해서 다뤄야 한다."</a:t>
             </a:r>
           </a:p>
           <a:p>
@@ -3387,12 +3392,12 @@
           </a:p>
           <a:p>
             <a:r>
-              <a:t>  "반대쪽 질문도 있다. 재정이 위험을 먼저 떠안으면 민간은 얼마나 책임 있게 투자할까.",</a:t>
-            </a:r>
-          </a:p>
-          <a:p>
-            <a:r>
-              <a:t>  "또 은행과 금융회사는 건전성 규제, 위험가중자산, 예금자 보호 논리 안에서 움직인다."</a:t>
+              <a:t>  "반대쪽 질문도 있다",</a:t>
+            </a:r>
+          </a:p>
+          <a:p>
+            <a:r>
+              <a:t>  "또 은행과 금융회사는 건전성 규제"</a:t>
             </a:r>
           </a:p>
           <a:p>
@@ -3759,7 +3764,7 @@
           </a:p>
           <a:p>
             <a:r>
-              <a:t>  "하지만 위험도 함께 나눠야 한다면, 손실이 발생했을 때 재정·운용사·투자자·금융권의 책임선이 중요해진다."</a:t>
+              <a:t>  ""</a:t>
             </a:r>
           </a:p>
           <a:p>
@@ -4397,7 +4402,7 @@
           </a:p>
           <a:p>
             <a:r>
-              <a:t>proof_object_type: article_quote</a:t>
+              <a:t>proof_object_type: source_card</a:t>
             </a:r>
           </a:p>
           <a:p>
@@ -4428,12 +4433,7 @@
           </a:p>
           <a:p>
             <a:r>
-              <a:t>  "“담보 및 단기수익 중심 금융 경쟁은 앞서가기 어렵다”는 문제 제기가 나왔다.",</a:t>
-            </a:r>
-          </a:p>
-          <a:p>
-            <a:r>
-              <a:t>  "금융위원회 공식자료는 국민성장펀드가 5년간 150조 원, 2026년 30조 원 규모로 첨단산업 생태계에 자금을 공급하는 틀이라고 설명한다."</a:t>
+              <a:t>  "“담보 및 단기수익 중심 금융 경쟁은 앞서가기 어렵다”는 문제…"</a:t>
             </a:r>
           </a:p>
           <a:p>
@@ -4453,6 +4453,11 @@
           </a:p>
           <a:p>
             <a:r>
+              <a:t>  "금융위원회 공식자료는 국민성장펀드가 5년간 150조 원, 2026년 30조 원 규모로 첨단산업 생태계에 자금을 공급하는 틀이라고 설명한다.",</a:t>
+            </a:r>
+          </a:p>
+          <a:p>
+            <a:r>
               <a:t>  "다만 이 발언과 정책 숫자가 곧 정책 성공을 뜻하는 것은 아니다."</a:t>
             </a:r>
           </a:p>
@@ -4567,7 +4572,7 @@
           </a:p>
           <a:p>
             <a:r>
-              <a:t>  "type": "article_quote",</a:t>
+              <a:t>  "type": "source_card",</a:t>
             </a:r>
           </a:p>
           <a:p>
@@ -4582,7 +4587,7 @@
           </a:p>
           <a:p>
             <a:r>
-              <a:t>  "display_label": "[기사 인용]",</a:t>
+              <a:t>  "display_label": "[출처]",</a:t>
             </a:r>
           </a:p>
           <a:p>
@@ -4754,7 +4759,7 @@
           </a:p>
           <a:p>
             <a:r>
-              <a:t>proof_object_type: article_quote</a:t>
+              <a:t>proof_object_type: source_card</a:t>
             </a:r>
           </a:p>
           <a:p>
@@ -4790,7 +4795,7 @@
           </a:p>
           <a:p>
             <a:r>
-              <a:t>  "위험가중자산이 커지면 자본 부담도 커질 수 있고, 예금자 보호 논리와도 충돌할 수 있다."</a:t>
+              <a:t>  "위험가중자산이 커지면 자본 부담도 커질 수 있고"</a:t>
             </a:r>
           </a:p>
           <a:p>
@@ -4924,7 +4929,7 @@
           </a:p>
           <a:p>
             <a:r>
-              <a:t>  "type": "article_quote",</a:t>
+              <a:t>  "type": "source_card",</a:t>
             </a:r>
           </a:p>
           <a:p>
@@ -4939,7 +4944,7 @@
           </a:p>
           <a:p>
             <a:r>
-              <a:t>  "display_label": "[기사 인용]",</a:t>
+              <a:t>  "display_label": "[출처]",</a:t>
             </a:r>
           </a:p>
           <a:p>
@@ -5142,12 +5147,12 @@
           </a:p>
           <a:p>
             <a:r>
-              <a:t>  "이 주제는 곧바로 특정 산업·기업·펀드 투자 판단처럼 보일 수 있다.",</a:t>
-            </a:r>
-          </a:p>
-          <a:p>
-            <a:r>
-              <a:t>  "그래서 수익률, 주가, 매수·매도, 유망종목식 표현은 피해야 한다."</a:t>
+              <a:t>  "이 주제는 곧바로 특정 산업·기업·펀드 투자 판단처럼 보일 수…",</a:t>
+            </a:r>
+          </a:p>
+          <a:p>
+            <a:r>
+              <a:t>  "그래서 수익률"</a:t>
             </a:r>
           </a:p>
           <a:p>
@@ -5443,7 +5448,7 @@
           </a:p>
           <a:p>
             <a:r>
-              <a:t>proof_object_type: article_quote</a:t>
+              <a:t>proof_object_type: source_card</a:t>
             </a:r>
           </a:p>
           <a:p>
@@ -5479,7 +5484,7 @@
           </a:p>
           <a:p>
             <a:r>
-              <a:t>  "좋은 위험을 고르는 능력, 손실을 나누는 규칙, 금융권 건전성을 함께 설계할 수 있느냐는 질문이다."</a:t>
+              <a:t>  "좋은 위험을 고르는 능력"</a:t>
             </a:r>
           </a:p>
           <a:p>
@@ -5618,7 +5623,7 @@
           </a:p>
           <a:p>
             <a:r>
-              <a:t>  "type": "article_quote",</a:t>
+              <a:t>  "type": "source_card",</a:t>
             </a:r>
           </a:p>
           <a:p>
@@ -5633,7 +5638,7 @@
           </a:p>
           <a:p>
             <a:r>
-              <a:t>  "display_label": "[기사 인용]",</a:t>
+              <a:t>  "display_label": "[출처]",</a:t>
             </a:r>
           </a:p>
           <a:p>
@@ -5841,12 +5846,27 @@
           </a:p>
           <a:p>
             <a:r>
-              <a:t>  "방송 전 숫자 체크리스트: 150조 원 전체 규모, 2026년 30조 원 운용, 국민참여형 6000억 원, 재정 1200억 원, 손실 우선 부담 20% 범위.",</a:t>
-            </a:r>
-          </a:p>
-          <a:p>
-            <a:r>
-              <a:t>  "정책 효과가 아니라 구조를 설명하는 숫자로만 사용한다.",</a:t>
+              <a:t>  "방송 전 숫자 체크리스트: 150조 원 전체 규모",</a:t>
+            </a:r>
+          </a:p>
+          <a:p>
+            <a:r>
+              <a:t>  "정책 효과가 아니라 구조를 설명하는 숫자로만 사용한다."</a:t>
+            </a:r>
+          </a:p>
+          <a:p>
+            <a:r>
+              <a:t>]</a:t>
+            </a:r>
+          </a:p>
+          <a:p>
+            <a:r>
+              <a:t>overflow_body_lines:</a:t>
+            </a:r>
+          </a:p>
+          <a:p>
+            <a:r>
+              <a:t>[</a:t>
             </a:r>
           </a:p>
           <a:p>
@@ -5857,16 +5877,6 @@
           <a:p>
             <a:r>
               <a:t>]</a:t>
-            </a:r>
-          </a:p>
-          <a:p>
-            <a:r>
-              <a:t>overflow_body_lines:</a:t>
-            </a:r>
-          </a:p>
-          <a:p>
-            <a:r>
-              <a:t>[]</a:t>
             </a:r>
           </a:p>
           <a:p/>
@@ -6239,12 +6249,12 @@
           </a:p>
           <a:p>
             <a:r>
-              <a:t>  "방송 전 꼭 채워야 할 자료: 금융위/산은 공식 원문, 국민참여형 펀드 손실분담 구조, AI·반도체 장기 투자 규모, 관치금융/정책금융 실패 반론, 은행 건전성·위험가중자산 자료.",</a:t>
-            </a:r>
-          </a:p>
-          <a:p>
-            <a:r>
-              <a:t>  "지금 evidence pack은 enriched dry run에는 충분하지만, 방송용 완성본에는 추가 counterpoint가 필요하다."</a:t>
+              <a:t>  "방송 전 꼭 채워야 할 자료: 금융위/산은 공식 원문",</a:t>
+            </a:r>
+          </a:p>
+          <a:p>
+            <a:r>
+              <a:t>  "지금 evidence pack은 enriched dry run에는 충분"</a:t>
             </a:r>
           </a:p>
           <a:p>
@@ -6616,7 +6626,7 @@
           </a:p>
           <a:p>
             <a:r>
-              <a:t>proof_object_type: article_quote</a:t>
+              <a:t>proof_object_type: source_card</a:t>
             </a:r>
           </a:p>
           <a:p>
@@ -6652,7 +6662,7 @@
           </a:p>
           <a:p>
             <a:r>
-              <a:t>  "은행은 자본규제와 위험가중자산을 고려해야 하므로, 위험한 자산을 무한정 늘릴 수 없다."</a:t>
+              <a:t>  "은행은 자본규제와 위험가중자산을 고려해야 하므로"</a:t>
             </a:r>
           </a:p>
           <a:p>
@@ -6786,7 +6796,7 @@
           </a:p>
           <a:p>
             <a:r>
-              <a:t>  "type": "article_quote",</a:t>
+              <a:t>  "type": "source_card",</a:t>
             </a:r>
           </a:p>
           <a:p>
@@ -6801,7 +6811,7 @@
           </a:p>
           <a:p>
             <a:r>
-              <a:t>  "display_label": "[기사 인용]",</a:t>
+              <a:t>  "display_label": "[출처]",</a:t>
             </a:r>
           </a:p>
           <a:p>
@@ -7004,12 +7014,12 @@
           </a:p>
           <a:p>
             <a:r>
-              <a:t>  "AI와 반도체는 소프트웨어 개발비만의 문제가 아니라 설비, 전력, 공정, 인력, 공급망이 함께 필요한 산업이다.",</a:t>
-            </a:r>
-          </a:p>
-          <a:p>
-            <a:r>
-              <a:t>  "정책자료는 국민성장펀드가 AI·반도체 같은 첨단전략산업에 장기 자금을 공급하려는 틀이라고 설명한다."</a:t>
+              <a:t>  "AI와 반도체는 소프트웨어 개발비만의 문제가 아니라 설비",</a:t>
+            </a:r>
+          </a:p>
+          <a:p>
+            <a:r>
+              <a:t>  "그래서 이 이야기는 “대출을 늘리자”보다 “누가 긴 위험을 나눌…"</a:t>
             </a:r>
           </a:p>
           <a:p>
@@ -7979,7 +7989,7 @@
           </a:p>
           <a:p>
             <a:r>
-              <a:t>proof_object_type: article_quote</a:t>
+              <a:t>proof_object_type: source_card</a:t>
             </a:r>
           </a:p>
           <a:p>
@@ -8149,7 +8159,7 @@
           </a:p>
           <a:p>
             <a:r>
-              <a:t>  "type": "article_quote",</a:t>
+              <a:t>  "type": "source_card",</a:t>
             </a:r>
           </a:p>
           <a:p>
@@ -8164,7 +8174,7 @@
           </a:p>
           <a:p>
             <a:r>
-              <a:t>  "display_label": "[기사 인용]",</a:t>
+              <a:t>  "display_label": "[출처]",</a:t>
             </a:r>
           </a:p>
           <a:p>
@@ -8362,6 +8372,16 @@
           </a:p>
           <a:p>
             <a:r>
+              <a:t>[]</a:t>
+            </a:r>
+          </a:p>
+          <a:p>
+            <a:r>
+              <a:t>overflow_body_lines:</a:t>
+            </a:r>
+          </a:p>
+          <a:p>
+            <a:r>
               <a:t>[</a:t>
             </a:r>
           </a:p>
@@ -8383,16 +8403,6 @@
           <a:p>
             <a:r>
               <a:t>]</a:t>
-            </a:r>
-          </a:p>
-          <a:p>
-            <a:r>
-              <a:t>overflow_body_lines:</a:t>
-            </a:r>
-          </a:p>
-          <a:p>
-            <a:r>
-              <a:t>[]</a:t>
             </a:r>
           </a:p>
           <a:p/>
@@ -8724,7 +8734,7 @@
           </a:p>
           <a:p>
             <a:r>
-              <a:t>  "하지만 초기 기술, 인력, 데이터, 공정 노하우는 평가하기 어렵다."</a:t>
+              <a:t>  ""</a:t>
             </a:r>
           </a:p>
           <a:p>
@@ -12053,7 +12063,7 @@
             <a:avLst/>
           </a:prstGeom>
           <a:solidFill>
-            <a:srgbClr val="F5F5F5"/>
+            <a:srgbClr val="F8F8F8"/>
           </a:solidFill>
           <a:ln w="12700">
             <a:solidFill>
@@ -12076,12 +12086,37 @@
           </a:fontRef>
         </p:style>
         <p:txBody>
-          <a:bodyPr rtlCol="0" anchor="ctr" wrap="square"/>
+          <a:bodyPr rtlCol="0" anchor="ctr"/>
           <a:lstStyle/>
           <a:p>
             <a:pPr algn="ctr"/>
-            <a:r>
-              <a:rPr sz="1800" b="0">
+          </a:p>
+        </p:txBody>
+      </p:sp>
+      <p:sp>
+        <p:nvSpPr>
+          <p:cNvPr id="4" name="TextBox 3"/>
+          <p:cNvSpPr txBox="1"/>
+          <p:nvPr/>
+        </p:nvSpPr>
+        <p:spPr>
+          <a:xfrm>
+            <a:off x="822960" y="1527048"/>
+            <a:ext cx="914400" cy="201168"/>
+          </a:xfrm>
+          <a:prstGeom prst="rect">
+            <a:avLst/>
+          </a:prstGeom>
+          <a:noFill/>
+        </p:spPr>
+        <p:txBody>
+          <a:bodyPr wrap="square">
+            <a:spAutoFit/>
+          </a:bodyPr>
+          <a:lstStyle/>
+          <a:p>
+            <a:r>
+              <a:rPr sz="1200" b="0" u="none">
                 <a:solidFill>
                   <a:srgbClr val="0070C0"/>
                 </a:solidFill>
@@ -12094,7 +12129,272 @@
       </p:sp>
       <p:sp>
         <p:nvSpPr>
-          <p:cNvPr id="4" name="TextBox 3"/>
+          <p:cNvPr id="5" name="Rectangle 4"/>
+          <p:cNvSpPr/>
+          <p:nvPr/>
+        </p:nvSpPr>
+        <p:spPr>
+          <a:xfrm>
+            <a:off x="1033271" y="3040380"/>
+            <a:ext cx="1828799" cy="1143000"/>
+          </a:xfrm>
+          <a:prstGeom prst="rect">
+            <a:avLst/>
+          </a:prstGeom>
+          <a:solidFill>
+            <a:srgbClr val="FFFFFF"/>
+          </a:solidFill>
+          <a:ln w="12700">
+            <a:solidFill>
+              <a:srgbClr val="A0A0A0"/>
+            </a:solidFill>
+          </a:ln>
+        </p:spPr>
+        <p:style>
+          <a:lnRef idx="1">
+            <a:schemeClr val="accent1"/>
+          </a:lnRef>
+          <a:fillRef idx="3">
+            <a:schemeClr val="accent1"/>
+          </a:fillRef>
+          <a:effectRef idx="2">
+            <a:schemeClr val="accent1"/>
+          </a:effectRef>
+          <a:fontRef idx="minor">
+            <a:schemeClr val="lt1"/>
+          </a:fontRef>
+        </p:style>
+        <p:txBody>
+          <a:bodyPr rtlCol="0" anchor="ctr"/>
+          <a:lstStyle/>
+          <a:p>
+            <a:pPr algn="ctr"/>
+          </a:p>
+        </p:txBody>
+      </p:sp>
+      <p:sp>
+        <p:nvSpPr>
+          <p:cNvPr id="6" name="Rectangle 5"/>
+          <p:cNvSpPr/>
+          <p:nvPr/>
+        </p:nvSpPr>
+        <p:spPr>
+          <a:xfrm>
+            <a:off x="3456432" y="3040380"/>
+            <a:ext cx="1828799" cy="1143000"/>
+          </a:xfrm>
+          <a:prstGeom prst="rect">
+            <a:avLst/>
+          </a:prstGeom>
+          <a:solidFill>
+            <a:srgbClr val="FFFFFF"/>
+          </a:solidFill>
+          <a:ln w="12700">
+            <a:solidFill>
+              <a:srgbClr val="A0A0A0"/>
+            </a:solidFill>
+          </a:ln>
+        </p:spPr>
+        <p:style>
+          <a:lnRef idx="1">
+            <a:schemeClr val="accent1"/>
+          </a:lnRef>
+          <a:fillRef idx="3">
+            <a:schemeClr val="accent1"/>
+          </a:fillRef>
+          <a:effectRef idx="2">
+            <a:schemeClr val="accent1"/>
+          </a:effectRef>
+          <a:fontRef idx="minor">
+            <a:schemeClr val="lt1"/>
+          </a:fontRef>
+        </p:style>
+        <p:txBody>
+          <a:bodyPr rtlCol="0" anchor="ctr"/>
+          <a:lstStyle/>
+          <a:p>
+            <a:pPr algn="ctr"/>
+          </a:p>
+        </p:txBody>
+      </p:sp>
+      <p:sp>
+        <p:nvSpPr>
+          <p:cNvPr id="7" name="TextBox 6"/>
+          <p:cNvSpPr txBox="1"/>
+          <p:nvPr/>
+        </p:nvSpPr>
+        <p:spPr>
+          <a:xfrm>
+            <a:off x="1124712" y="3204972"/>
+            <a:ext cx="1645919" cy="320040"/>
+          </a:xfrm>
+          <a:prstGeom prst="rect">
+            <a:avLst/>
+          </a:prstGeom>
+          <a:noFill/>
+        </p:spPr>
+        <p:txBody>
+          <a:bodyPr wrap="square">
+            <a:spAutoFit/>
+          </a:bodyPr>
+          <a:lstStyle/>
+          <a:p>
+            <a:pPr algn="ctr"/>
+            <a:r>
+              <a:rPr sz="1800" b="1" u="none">
+                <a:solidFill>
+                  <a:srgbClr val="000000"/>
+                </a:solidFill>
+                <a:latin typeface="맑은 고딕"/>
+              </a:rPr>
+              <a:t>안전한 금융</a:t>
+            </a:r>
+          </a:p>
+        </p:txBody>
+      </p:sp>
+      <p:sp>
+        <p:nvSpPr>
+          <p:cNvPr id="8" name="TextBox 7"/>
+          <p:cNvSpPr txBox="1"/>
+          <p:nvPr/>
+        </p:nvSpPr>
+        <p:spPr>
+          <a:xfrm>
+            <a:off x="1124712" y="3607308"/>
+            <a:ext cx="1645919" cy="274320"/>
+          </a:xfrm>
+          <a:prstGeom prst="rect">
+            <a:avLst/>
+          </a:prstGeom>
+          <a:noFill/>
+        </p:spPr>
+        <p:txBody>
+          <a:bodyPr wrap="square">
+            <a:spAutoFit/>
+          </a:bodyPr>
+          <a:lstStyle/>
+          <a:p>
+            <a:pPr algn="ctr"/>
+            <a:r>
+              <a:rPr sz="1500" b="0" u="none">
+                <a:solidFill>
+                  <a:srgbClr val="373737"/>
+                </a:solidFill>
+                <a:latin typeface="맑은 고딕"/>
+              </a:rPr>
+              <a:t>담보 / 단기</a:t>
+            </a:r>
+          </a:p>
+        </p:txBody>
+      </p:sp>
+      <p:sp>
+        <p:nvSpPr>
+          <p:cNvPr id="9" name="TextBox 8"/>
+          <p:cNvSpPr txBox="1"/>
+          <p:nvPr/>
+        </p:nvSpPr>
+        <p:spPr>
+          <a:xfrm>
+            <a:off x="3547872" y="3204972"/>
+            <a:ext cx="1645919" cy="320040"/>
+          </a:xfrm>
+          <a:prstGeom prst="rect">
+            <a:avLst/>
+          </a:prstGeom>
+          <a:noFill/>
+        </p:spPr>
+        <p:txBody>
+          <a:bodyPr wrap="square">
+            <a:spAutoFit/>
+          </a:bodyPr>
+          <a:lstStyle/>
+          <a:p>
+            <a:pPr algn="ctr"/>
+            <a:r>
+              <a:rPr sz="1800" b="1" u="none">
+                <a:solidFill>
+                  <a:srgbClr val="000000"/>
+                </a:solidFill>
+                <a:latin typeface="맑은 고딕"/>
+              </a:rPr>
+              <a:t>성장 금융</a:t>
+            </a:r>
+          </a:p>
+        </p:txBody>
+      </p:sp>
+      <p:sp>
+        <p:nvSpPr>
+          <p:cNvPr id="10" name="TextBox 9"/>
+          <p:cNvSpPr txBox="1"/>
+          <p:nvPr/>
+        </p:nvSpPr>
+        <p:spPr>
+          <a:xfrm>
+            <a:off x="3547872" y="3607308"/>
+            <a:ext cx="1645919" cy="274320"/>
+          </a:xfrm>
+          <a:prstGeom prst="rect">
+            <a:avLst/>
+          </a:prstGeom>
+          <a:noFill/>
+        </p:spPr>
+        <p:txBody>
+          <a:bodyPr wrap="square">
+            <a:spAutoFit/>
+          </a:bodyPr>
+          <a:lstStyle/>
+          <a:p>
+            <a:pPr algn="ctr"/>
+            <a:r>
+              <a:rPr sz="1500" b="0" u="none">
+                <a:solidFill>
+                  <a:srgbClr val="373737"/>
+                </a:solidFill>
+                <a:latin typeface="맑은 고딕"/>
+              </a:rPr>
+              <a:t>장기 / 위험분담</a:t>
+            </a:r>
+          </a:p>
+        </p:txBody>
+      </p:sp>
+      <p:sp>
+        <p:nvSpPr>
+          <p:cNvPr id="11" name="TextBox 10"/>
+          <p:cNvSpPr txBox="1"/>
+          <p:nvPr/>
+        </p:nvSpPr>
+        <p:spPr>
+          <a:xfrm>
+            <a:off x="2930652" y="3387852"/>
+            <a:ext cx="457200" cy="347472"/>
+          </a:xfrm>
+          <a:prstGeom prst="rect">
+            <a:avLst/>
+          </a:prstGeom>
+          <a:noFill/>
+        </p:spPr>
+        <p:txBody>
+          <a:bodyPr wrap="square">
+            <a:spAutoFit/>
+          </a:bodyPr>
+          <a:lstStyle/>
+          <a:p>
+            <a:pPr algn="ctr"/>
+            <a:r>
+              <a:rPr sz="2200" b="1" u="none">
+                <a:solidFill>
+                  <a:srgbClr val="373737"/>
+                </a:solidFill>
+                <a:latin typeface="맑은 고딕"/>
+              </a:rPr>
+              <a:t>→</a:t>
+            </a:r>
+          </a:p>
+        </p:txBody>
+      </p:sp>
+      <p:sp>
+        <p:nvSpPr>
+          <p:cNvPr id="12" name="TextBox 11"/>
           <p:cNvSpPr txBox="1"/>
           <p:nvPr/>
         </p:nvSpPr>
@@ -12129,7 +12429,7 @@
                 </a:solidFill>
                 <a:latin typeface="맑은 고딕"/>
               </a:rPr>
-              <a:t>정책금융의 명분은 민간이 감당하기 어려운 초기 위험을 나눠지는 것이다.</a:t>
+              <a:t>정책금융의 명분은 민간이 감당하기 어려운 초기 위험을 나눠지는…</a:t>
             </a:r>
           </a:p>
           <a:p>
@@ -12148,7 +12448,7 @@
                 </a:solidFill>
                 <a:latin typeface="맑은 고딕"/>
               </a:rPr>
-              <a:t>하지만 정책자금이 늘 좋은 결과를 만든다고 단정할 수는 없다.</a:t>
+              <a:t>정책금융은 성장의 마중물일 수도, 손실의 통로일 수도 있다.</a:t>
             </a:r>
           </a:p>
         </p:txBody>
@@ -12216,6 +12516,592 @@
       <p:sp>
         <p:nvSpPr>
           <p:cNvPr id="3" name="Rectangle 2"/>
+          <p:cNvSpPr/>
+          <p:nvPr/>
+        </p:nvSpPr>
+        <p:spPr>
+          <a:xfrm>
+            <a:off x="713232" y="1417320"/>
+            <a:ext cx="4892040" cy="4114800"/>
+          </a:xfrm>
+          <a:prstGeom prst="rect">
+            <a:avLst/>
+          </a:prstGeom>
+          <a:solidFill>
+            <a:srgbClr val="F8F8F8"/>
+          </a:solidFill>
+          <a:ln w="12700">
+            <a:solidFill>
+              <a:srgbClr val="BEBEBE"/>
+            </a:solidFill>
+          </a:ln>
+        </p:spPr>
+        <p:style>
+          <a:lnRef idx="1">
+            <a:schemeClr val="accent1"/>
+          </a:lnRef>
+          <a:fillRef idx="3">
+            <a:schemeClr val="accent1"/>
+          </a:fillRef>
+          <a:effectRef idx="2">
+            <a:schemeClr val="accent1"/>
+          </a:effectRef>
+          <a:fontRef idx="minor">
+            <a:schemeClr val="lt1"/>
+          </a:fontRef>
+        </p:style>
+        <p:txBody>
+          <a:bodyPr rtlCol="0" anchor="ctr"/>
+          <a:lstStyle/>
+          <a:p>
+            <a:pPr algn="ctr"/>
+          </a:p>
+        </p:txBody>
+      </p:sp>
+      <p:sp>
+        <p:nvSpPr>
+          <p:cNvPr id="4" name="TextBox 3"/>
+          <p:cNvSpPr txBox="1"/>
+          <p:nvPr/>
+        </p:nvSpPr>
+        <p:spPr>
+          <a:xfrm>
+            <a:off x="822960" y="1527048"/>
+            <a:ext cx="914400" cy="201168"/>
+          </a:xfrm>
+          <a:prstGeom prst="rect">
+            <a:avLst/>
+          </a:prstGeom>
+          <a:noFill/>
+        </p:spPr>
+        <p:txBody>
+          <a:bodyPr wrap="square">
+            <a:spAutoFit/>
+          </a:bodyPr>
+          <a:lstStyle/>
+          <a:p>
+            <a:r>
+              <a:rPr sz="1200" b="0" u="none">
+                <a:solidFill>
+                  <a:srgbClr val="0070C0"/>
+                </a:solidFill>
+                <a:latin typeface="맑은 고딕"/>
+              </a:rPr>
+              <a:t>[도식]</a:t>
+            </a:r>
+          </a:p>
+        </p:txBody>
+      </p:sp>
+      <p:sp>
+        <p:nvSpPr>
+          <p:cNvPr id="5" name="Rectangle 4"/>
+          <p:cNvSpPr/>
+          <p:nvPr/>
+        </p:nvSpPr>
+        <p:spPr>
+          <a:xfrm>
+            <a:off x="1033271" y="3040380"/>
+            <a:ext cx="1828799" cy="1143000"/>
+          </a:xfrm>
+          <a:prstGeom prst="rect">
+            <a:avLst/>
+          </a:prstGeom>
+          <a:solidFill>
+            <a:srgbClr val="FFFFFF"/>
+          </a:solidFill>
+          <a:ln w="12700">
+            <a:solidFill>
+              <a:srgbClr val="A0A0A0"/>
+            </a:solidFill>
+          </a:ln>
+        </p:spPr>
+        <p:style>
+          <a:lnRef idx="1">
+            <a:schemeClr val="accent1"/>
+          </a:lnRef>
+          <a:fillRef idx="3">
+            <a:schemeClr val="accent1"/>
+          </a:fillRef>
+          <a:effectRef idx="2">
+            <a:schemeClr val="accent1"/>
+          </a:effectRef>
+          <a:fontRef idx="minor">
+            <a:schemeClr val="lt1"/>
+          </a:fontRef>
+        </p:style>
+        <p:txBody>
+          <a:bodyPr rtlCol="0" anchor="ctr"/>
+          <a:lstStyle/>
+          <a:p>
+            <a:pPr algn="ctr"/>
+          </a:p>
+        </p:txBody>
+      </p:sp>
+      <p:sp>
+        <p:nvSpPr>
+          <p:cNvPr id="6" name="Rectangle 5"/>
+          <p:cNvSpPr/>
+          <p:nvPr/>
+        </p:nvSpPr>
+        <p:spPr>
+          <a:xfrm>
+            <a:off x="3456432" y="3040380"/>
+            <a:ext cx="1828799" cy="1143000"/>
+          </a:xfrm>
+          <a:prstGeom prst="rect">
+            <a:avLst/>
+          </a:prstGeom>
+          <a:solidFill>
+            <a:srgbClr val="FFFFFF"/>
+          </a:solidFill>
+          <a:ln w="12700">
+            <a:solidFill>
+              <a:srgbClr val="A0A0A0"/>
+            </a:solidFill>
+          </a:ln>
+        </p:spPr>
+        <p:style>
+          <a:lnRef idx="1">
+            <a:schemeClr val="accent1"/>
+          </a:lnRef>
+          <a:fillRef idx="3">
+            <a:schemeClr val="accent1"/>
+          </a:fillRef>
+          <a:effectRef idx="2">
+            <a:schemeClr val="accent1"/>
+          </a:effectRef>
+          <a:fontRef idx="minor">
+            <a:schemeClr val="lt1"/>
+          </a:fontRef>
+        </p:style>
+        <p:txBody>
+          <a:bodyPr rtlCol="0" anchor="ctr"/>
+          <a:lstStyle/>
+          <a:p>
+            <a:pPr algn="ctr"/>
+          </a:p>
+        </p:txBody>
+      </p:sp>
+      <p:sp>
+        <p:nvSpPr>
+          <p:cNvPr id="7" name="TextBox 6"/>
+          <p:cNvSpPr txBox="1"/>
+          <p:nvPr/>
+        </p:nvSpPr>
+        <p:spPr>
+          <a:xfrm>
+            <a:off x="1124712" y="3204972"/>
+            <a:ext cx="1645919" cy="320040"/>
+          </a:xfrm>
+          <a:prstGeom prst="rect">
+            <a:avLst/>
+          </a:prstGeom>
+          <a:noFill/>
+        </p:spPr>
+        <p:txBody>
+          <a:bodyPr wrap="square">
+            <a:spAutoFit/>
+          </a:bodyPr>
+          <a:lstStyle/>
+          <a:p>
+            <a:pPr algn="ctr"/>
+            <a:r>
+              <a:rPr sz="1800" b="1" u="none">
+                <a:solidFill>
+                  <a:srgbClr val="000000"/>
+                </a:solidFill>
+                <a:latin typeface="맑은 고딕"/>
+              </a:rPr>
+              <a:t>기존 방식</a:t>
+            </a:r>
+          </a:p>
+        </p:txBody>
+      </p:sp>
+      <p:sp>
+        <p:nvSpPr>
+          <p:cNvPr id="8" name="TextBox 7"/>
+          <p:cNvSpPr txBox="1"/>
+          <p:nvPr/>
+        </p:nvSpPr>
+        <p:spPr>
+          <a:xfrm>
+            <a:off x="1124712" y="3607308"/>
+            <a:ext cx="1645919" cy="274320"/>
+          </a:xfrm>
+          <a:prstGeom prst="rect">
+            <a:avLst/>
+          </a:prstGeom>
+          <a:noFill/>
+        </p:spPr>
+        <p:txBody>
+          <a:bodyPr wrap="square">
+            <a:spAutoFit/>
+          </a:bodyPr>
+          <a:lstStyle/>
+          <a:p>
+            <a:pPr algn="ctr"/>
+            <a:r>
+              <a:rPr sz="1500" b="0" u="none">
+                <a:solidFill>
+                  <a:srgbClr val="373737"/>
+                </a:solidFill>
+                <a:latin typeface="맑은 고딕"/>
+              </a:rPr>
+              <a:t>검색 / 비교</a:t>
+            </a:r>
+          </a:p>
+        </p:txBody>
+      </p:sp>
+      <p:sp>
+        <p:nvSpPr>
+          <p:cNvPr id="9" name="TextBox 8"/>
+          <p:cNvSpPr txBox="1"/>
+          <p:nvPr/>
+        </p:nvSpPr>
+        <p:spPr>
+          <a:xfrm>
+            <a:off x="3547872" y="3204972"/>
+            <a:ext cx="1645919" cy="320040"/>
+          </a:xfrm>
+          <a:prstGeom prst="rect">
+            <a:avLst/>
+          </a:prstGeom>
+          <a:noFill/>
+        </p:spPr>
+        <p:txBody>
+          <a:bodyPr wrap="square">
+            <a:spAutoFit/>
+          </a:bodyPr>
+          <a:lstStyle/>
+          <a:p>
+            <a:pPr algn="ctr"/>
+            <a:r>
+              <a:rPr sz="1800" b="1" u="none">
+                <a:solidFill>
+                  <a:srgbClr val="000000"/>
+                </a:solidFill>
+                <a:latin typeface="맑은 고딕"/>
+              </a:rPr>
+              <a:t>AI 즉답</a:t>
+            </a:r>
+          </a:p>
+        </p:txBody>
+      </p:sp>
+      <p:sp>
+        <p:nvSpPr>
+          <p:cNvPr id="10" name="TextBox 9"/>
+          <p:cNvSpPr txBox="1"/>
+          <p:nvPr/>
+        </p:nvSpPr>
+        <p:spPr>
+          <a:xfrm>
+            <a:off x="3547872" y="3607308"/>
+            <a:ext cx="1645919" cy="274320"/>
+          </a:xfrm>
+          <a:prstGeom prst="rect">
+            <a:avLst/>
+          </a:prstGeom>
+          <a:noFill/>
+        </p:spPr>
+        <p:txBody>
+          <a:bodyPr wrap="square">
+            <a:spAutoFit/>
+          </a:bodyPr>
+          <a:lstStyle/>
+          <a:p>
+            <a:pPr algn="ctr"/>
+            <a:r>
+              <a:rPr sz="1500" b="0" u="none">
+                <a:solidFill>
+                  <a:srgbClr val="373737"/>
+                </a:solidFill>
+                <a:latin typeface="맑은 고딕"/>
+              </a:rPr>
+              <a:t>요약 / 검증</a:t>
+            </a:r>
+          </a:p>
+        </p:txBody>
+      </p:sp>
+      <p:sp>
+        <p:nvSpPr>
+          <p:cNvPr id="11" name="TextBox 10"/>
+          <p:cNvSpPr txBox="1"/>
+          <p:nvPr/>
+        </p:nvSpPr>
+        <p:spPr>
+          <a:xfrm>
+            <a:off x="2930652" y="3387852"/>
+            <a:ext cx="457200" cy="347472"/>
+          </a:xfrm>
+          <a:prstGeom prst="rect">
+            <a:avLst/>
+          </a:prstGeom>
+          <a:noFill/>
+        </p:spPr>
+        <p:txBody>
+          <a:bodyPr wrap="square">
+            <a:spAutoFit/>
+          </a:bodyPr>
+          <a:lstStyle/>
+          <a:p>
+            <a:pPr algn="ctr"/>
+            <a:r>
+              <a:rPr sz="2200" b="1" u="none">
+                <a:solidFill>
+                  <a:srgbClr val="373737"/>
+                </a:solidFill>
+                <a:latin typeface="맑은 고딕"/>
+              </a:rPr>
+              <a:t>→</a:t>
+            </a:r>
+          </a:p>
+        </p:txBody>
+      </p:sp>
+      <p:sp>
+        <p:nvSpPr>
+          <p:cNvPr id="12" name="TextBox 11"/>
+          <p:cNvSpPr txBox="1"/>
+          <p:nvPr/>
+        </p:nvSpPr>
+        <p:spPr>
+          <a:xfrm>
+            <a:off x="5989320" y="2103120"/>
+            <a:ext cx="5303520" cy="2926080"/>
+          </a:xfrm>
+          <a:prstGeom prst="rect">
+            <a:avLst/>
+          </a:prstGeom>
+          <a:noFill/>
+        </p:spPr>
+        <p:txBody>
+          <a:bodyPr wrap="square" anchor="ctr">
+            <a:spAutoFit/>
+          </a:bodyPr>
+          <a:lstStyle/>
+          <a:p>
+            <a:pPr>
+              <a:lnSpc>
+                <a:spcPct val="150000"/>
+              </a:lnSpc>
+              <a:spcAft>
+                <a:spcPts val="800"/>
+              </a:spcAft>
+            </a:pPr>
+            <a:r>
+              <a:rPr sz="2800" b="0" u="none">
+                <a:solidFill>
+                  <a:srgbClr val="000000"/>
+                </a:solidFill>
+                <a:latin typeface="맑은 고딕"/>
+              </a:rPr>
+              <a:t>은행은 예금자의 돈을 지켜야 한다.</a:t>
+            </a:r>
+          </a:p>
+          <a:p>
+            <a:pPr>
+              <a:lnSpc>
+                <a:spcPct val="150000"/>
+              </a:lnSpc>
+              <a:spcAft>
+                <a:spcPts val="800"/>
+              </a:spcAft>
+            </a:pPr>
+            <a:r>
+              <a:rPr sz="2800" b="0" u="none">
+                <a:solidFill>
+                  <a:srgbClr val="000000"/>
+                </a:solidFill>
+                <a:latin typeface="맑은 고딕"/>
+              </a:rPr>
+              <a:t>기업은 긴 투자금을 원한다.</a:t>
+            </a:r>
+          </a:p>
+        </p:txBody>
+      </p:sp>
+    </p:spTree>
+  </p:cSld>
+  <p:clrMapOvr>
+    <a:masterClrMapping/>
+  </p:clrMapOvr>
+</p:sld>
+</file>
+
+<file path=ppt/slides/slide12.xml><?xml version="1.0" encoding="utf-8"?>
+<p:sld xmlns:a="http://schemas.openxmlformats.org/drawingml/2006/main" xmlns:p="http://schemas.openxmlformats.org/presentationml/2006/main" xmlns:r="http://schemas.openxmlformats.org/officeDocument/2006/relationships">
+  <p:cSld>
+    <p:bg>
+      <p:bgPr>
+        <a:solidFill>
+          <a:srgbClr val="F8F9FA"/>
+        </a:solidFill>
+        <a:effectLst/>
+      </p:bgPr>
+    </p:bg>
+    <p:spTree>
+      <p:nvGrpSpPr>
+        <p:cNvPr id="1" name=""/>
+        <p:cNvGrpSpPr/>
+        <p:nvPr/>
+      </p:nvGrpSpPr>
+      <p:grpSpPr/>
+      <p:sp>
+        <p:nvSpPr>
+          <p:cNvPr id="2" name="TextBox 1"/>
+          <p:cNvSpPr txBox="1"/>
+          <p:nvPr/>
+        </p:nvSpPr>
+        <p:spPr>
+          <a:xfrm>
+            <a:off x="843991" y="1273759"/>
+            <a:ext cx="10752429" cy="2424988"/>
+          </a:xfrm>
+          <a:prstGeom prst="rect">
+            <a:avLst/>
+          </a:prstGeom>
+          <a:noFill/>
+        </p:spPr>
+        <p:txBody>
+          <a:bodyPr wrap="square">
+            <a:spAutoFit/>
+          </a:bodyPr>
+          <a:lstStyle/>
+          <a:p>
+            <a:r>
+              <a:rPr sz="5400" b="1" u="none">
+                <a:solidFill>
+                  <a:srgbClr val="181C23"/>
+                </a:solidFill>
+                <a:latin typeface="맑은 고딕"/>
+              </a:rPr>
+              <a:t>국민성장펀드와 정책금융 논쟁</a:t>
+            </a:r>
+          </a:p>
+        </p:txBody>
+      </p:sp>
+    </p:spTree>
+  </p:cSld>
+  <p:clrMapOvr>
+    <a:masterClrMapping/>
+  </p:clrMapOvr>
+</p:sld>
+</file>
+
+<file path=ppt/slides/slide13.xml><?xml version="1.0" encoding="utf-8"?>
+<p:sld xmlns:a="http://schemas.openxmlformats.org/drawingml/2006/main" xmlns:p="http://schemas.openxmlformats.org/presentationml/2006/main" xmlns:r="http://schemas.openxmlformats.org/officeDocument/2006/relationships">
+  <p:cSld>
+    <p:bg>
+      <p:bgPr>
+        <a:solidFill>
+          <a:srgbClr val="F8F9FA"/>
+        </a:solidFill>
+        <a:effectLst/>
+      </p:bgPr>
+    </p:bg>
+    <p:spTree>
+      <p:nvGrpSpPr>
+        <p:cNvPr id="1" name=""/>
+        <p:cNvGrpSpPr/>
+        <p:nvPr/>
+      </p:nvGrpSpPr>
+      <p:grpSpPr/>
+      <p:sp>
+        <p:nvSpPr>
+          <p:cNvPr id="2" name="TextBox 1"/>
+          <p:cNvSpPr txBox="1"/>
+          <p:nvPr/>
+        </p:nvSpPr>
+        <p:spPr>
+          <a:xfrm>
+            <a:off x="572414" y="356616"/>
+            <a:ext cx="11192256" cy="521207"/>
+          </a:xfrm>
+          <a:prstGeom prst="rect">
+            <a:avLst/>
+          </a:prstGeom>
+          <a:noFill/>
+        </p:spPr>
+        <p:txBody>
+          <a:bodyPr wrap="square">
+            <a:spAutoFit/>
+          </a:bodyPr>
+          <a:lstStyle/>
+          <a:p>
+            <a:r>
+              <a:rPr sz="2800" b="0" u="none">
+                <a:solidFill>
+                  <a:srgbClr val="FF0000"/>
+                </a:solidFill>
+                <a:latin typeface="맑은 고딕"/>
+              </a:rPr>
+              <a:t>국민성장펀드라는 이름이 붙으면 이야기는 더 어려워진다</a:t>
+            </a:r>
+          </a:p>
+        </p:txBody>
+      </p:sp>
+      <p:sp>
+        <p:nvSpPr>
+          <p:cNvPr id="3" name="TextBox 2"/>
+          <p:cNvSpPr txBox="1"/>
+          <p:nvPr/>
+        </p:nvSpPr>
+        <p:spPr>
+          <a:xfrm>
+            <a:off x="5989320" y="1874519"/>
+            <a:ext cx="5303520" cy="2651760"/>
+          </a:xfrm>
+          <a:prstGeom prst="rect">
+            <a:avLst/>
+          </a:prstGeom>
+          <a:noFill/>
+        </p:spPr>
+        <p:txBody>
+          <a:bodyPr wrap="square" anchor="ctr">
+            <a:spAutoFit/>
+          </a:bodyPr>
+          <a:lstStyle/>
+          <a:p>
+            <a:pPr>
+              <a:lnSpc>
+                <a:spcPct val="150000"/>
+              </a:lnSpc>
+              <a:spcAft>
+                <a:spcPts val="800"/>
+              </a:spcAft>
+            </a:pPr>
+            <a:r>
+              <a:rPr sz="2800" b="0" u="none">
+                <a:solidFill>
+                  <a:srgbClr val="000000"/>
+                </a:solidFill>
+                <a:latin typeface="맑은 고딕"/>
+              </a:rPr>
+              <a:t>국민성장펀드는 민관합동 150조 원 규모로 첨단전략산업 생태계를…</a:t>
+            </a:r>
+          </a:p>
+          <a:p>
+            <a:pPr>
+              <a:lnSpc>
+                <a:spcPct val="150000"/>
+              </a:lnSpc>
+              <a:spcAft>
+                <a:spcPts val="800"/>
+              </a:spcAft>
+            </a:pPr>
+            <a:r>
+              <a:rPr sz="2800" b="0" u="none">
+                <a:solidFill>
+                  <a:srgbClr val="000000"/>
+                </a:solidFill>
+                <a:latin typeface="맑은 고딕"/>
+              </a:rPr>
+              <a:t>국민참여형 펀드는 일반 국민 자금도 일부 모아 자펀드에 투자하는…</a:t>
+            </a:r>
+          </a:p>
+        </p:txBody>
+      </p:sp>
+      <p:sp>
+        <p:nvSpPr>
+          <p:cNvPr id="4" name="Rectangle 3"/>
           <p:cNvSpPr/>
           <p:nvPr/>
         </p:nvSpPr>
@@ -12256,74 +13142,45 @@
           <a:p>
             <a:pPr algn="ctr"/>
             <a:r>
-              <a:rPr sz="1800" b="0">
+              <a:rPr sz="1200" b="0">
                 <a:solidFill>
                   <a:srgbClr val="0070C0"/>
                 </a:solidFill>
                 <a:latin typeface="맑은 고딕"/>
               </a:rPr>
-              <a:t>[도식]</a:t>
-            </a:r>
-          </a:p>
-        </p:txBody>
-      </p:sp>
-      <p:sp>
-        <p:nvSpPr>
-          <p:cNvPr id="4" name="TextBox 3"/>
-          <p:cNvSpPr txBox="1"/>
-          <p:nvPr/>
-        </p:nvSpPr>
-        <p:spPr>
-          <a:xfrm>
-            <a:off x="5989320" y="2103120"/>
-            <a:ext cx="5303520" cy="2926080"/>
-          </a:xfrm>
-          <a:prstGeom prst="rect">
-            <a:avLst/>
-          </a:prstGeom>
-          <a:noFill/>
-        </p:spPr>
-        <p:txBody>
-          <a:bodyPr wrap="square" anchor="ctr">
-            <a:spAutoFit/>
-          </a:bodyPr>
-          <a:lstStyle/>
-          <a:p>
-            <a:pPr>
-              <a:lnSpc>
-                <a:spcPct val="150000"/>
-              </a:lnSpc>
-              <a:spcAft>
+              <a:t>[출처]</a:t>
+            </a:r>
+          </a:p>
+          <a:p>
+            <a:pPr algn="ctr">
+              <a:spcBef>
                 <a:spcPts val="800"/>
-              </a:spcAft>
+              </a:spcBef>
             </a:pPr>
             <a:r>
-              <a:rPr sz="2800" b="0" u="none">
+              <a:rPr sz="2100" b="1">
                 <a:solidFill>
                   <a:srgbClr val="000000"/>
                 </a:solidFill>
                 <a:latin typeface="맑은 고딕"/>
               </a:rPr>
-              <a:t>은행은 예금자의 돈을 지켜야 한다.</a:t>
-            </a:r>
-          </a:p>
-          <a:p>
-            <a:pPr>
-              <a:lnSpc>
-                <a:spcPct val="150000"/>
-              </a:lnSpc>
-              <a:spcAft>
-                <a:spcPts val="800"/>
-              </a:spcAft>
+              <a:t>금융위원회</a:t>
+            </a:r>
+          </a:p>
+          <a:p>
+            <a:pPr algn="ctr">
+              <a:spcBef>
+                <a:spcPts val="400"/>
+              </a:spcBef>
             </a:pPr>
             <a:r>
-              <a:rPr sz="2800" b="0" u="none">
+              <a:rPr sz="1400" b="0">
                 <a:solidFill>
-                  <a:srgbClr val="000000"/>
+                  <a:srgbClr val="373737"/>
                 </a:solidFill>
                 <a:latin typeface="맑은 고딕"/>
               </a:rPr>
-              <a:t>기업은 긴 투자금을 원한다.</a:t>
+              <a:t>needs_fact_check=true: claim must be manu…</a:t>
             </a:r>
           </a:p>
         </p:txBody>
@@ -12336,7 +13193,7 @@
 </p:sld>
 </file>
 
-<file path=ppt/slides/slide12.xml><?xml version="1.0" encoding="utf-8"?>
+<file path=ppt/slides/slide14.xml><?xml version="1.0" encoding="utf-8"?>
 <p:sld xmlns:a="http://schemas.openxmlformats.org/drawingml/2006/main" xmlns:p="http://schemas.openxmlformats.org/presentationml/2006/main" xmlns:r="http://schemas.openxmlformats.org/officeDocument/2006/relationships">
   <p:cSld>
     <p:bg>
@@ -12362,66 +13219,6 @@
         </p:nvSpPr>
         <p:spPr>
           <a:xfrm>
-            <a:off x="843991" y="1273759"/>
-            <a:ext cx="10752429" cy="2424988"/>
-          </a:xfrm>
-          <a:prstGeom prst="rect">
-            <a:avLst/>
-          </a:prstGeom>
-          <a:noFill/>
-        </p:spPr>
-        <p:txBody>
-          <a:bodyPr wrap="square">
-            <a:spAutoFit/>
-          </a:bodyPr>
-          <a:lstStyle/>
-          <a:p>
-            <a:r>
-              <a:rPr sz="5400" b="1" u="none">
-                <a:solidFill>
-                  <a:srgbClr val="181C23"/>
-                </a:solidFill>
-                <a:latin typeface="맑은 고딕"/>
-              </a:rPr>
-              <a:t>국민성장펀드와 정책금융 논쟁</a:t>
-            </a:r>
-          </a:p>
-        </p:txBody>
-      </p:sp>
-    </p:spTree>
-  </p:cSld>
-  <p:clrMapOvr>
-    <a:masterClrMapping/>
-  </p:clrMapOvr>
-</p:sld>
-</file>
-
-<file path=ppt/slides/slide13.xml><?xml version="1.0" encoding="utf-8"?>
-<p:sld xmlns:a="http://schemas.openxmlformats.org/drawingml/2006/main" xmlns:p="http://schemas.openxmlformats.org/presentationml/2006/main" xmlns:r="http://schemas.openxmlformats.org/officeDocument/2006/relationships">
-  <p:cSld>
-    <p:bg>
-      <p:bgPr>
-        <a:solidFill>
-          <a:srgbClr val="F8F9FA"/>
-        </a:solidFill>
-        <a:effectLst/>
-      </p:bgPr>
-    </p:bg>
-    <p:spTree>
-      <p:nvGrpSpPr>
-        <p:cNvPr id="1" name=""/>
-        <p:cNvGrpSpPr/>
-        <p:nvPr/>
-      </p:nvGrpSpPr>
-      <p:grpSpPr/>
-      <p:sp>
-        <p:nvSpPr>
-          <p:cNvPr id="2" name="TextBox 1"/>
-          <p:cNvSpPr txBox="1"/>
-          <p:nvPr/>
-        </p:nvSpPr>
-        <p:spPr>
-          <a:xfrm>
             <a:off x="572414" y="356616"/>
             <a:ext cx="11192256" cy="521207"/>
           </a:xfrm>
@@ -12443,7 +13240,7 @@
                 </a:solidFill>
                 <a:latin typeface="맑은 고딕"/>
               </a:rPr>
-              <a:t>국민성장펀드라는 이름이 붙으면 이야기는 더 어려워진다</a:t>
+              <a:t>위험을 나눈다는 말은 손실 가능성도 나눈다는 뜻이다</a:t>
             </a:r>
           </a:p>
         </p:txBody>
@@ -12456,8 +13253,8 @@
         </p:nvSpPr>
         <p:spPr>
           <a:xfrm>
-            <a:off x="5989320" y="1874519"/>
-            <a:ext cx="5303520" cy="2651760"/>
+            <a:off x="5989320" y="1208836"/>
+            <a:ext cx="5394960" cy="1302105"/>
           </a:xfrm>
           <a:prstGeom prst="rect">
             <a:avLst/>
@@ -12485,7 +13282,7 @@
                 </a:solidFill>
                 <a:latin typeface="맑은 고딕"/>
               </a:rPr>
-              <a:t>국민성장펀드는 민관합동 150조 원 규모로 첨단전략산업 생태계를 지원하겠다는 정책 틀이다.</a:t>
+              <a:t>이 장치는 투자자의 위험을 낮추려는 설계지만</a:t>
             </a:r>
           </a:p>
           <a:p>
@@ -12504,7 +13301,7 @@
                 </a:solidFill>
                 <a:latin typeface="맑은 고딕"/>
               </a:rPr>
-              <a:t>국민참여형 펀드는 일반 국민 자금도 일부 모아 자펀드에 투자하는 구조로 설계됐다.</a:t>
+              <a:t>손실을 누가, 어떤 순서로, 어디까지 부담하는지가 핵심 질문이다.</a:t>
             </a:r>
           </a:p>
         </p:txBody>
@@ -12552,13 +13349,13 @@
           <a:p>
             <a:pPr algn="ctr"/>
             <a:r>
-              <a:rPr sz="1800" b="0">
+              <a:rPr sz="1200" b="0">
                 <a:solidFill>
                   <a:srgbClr val="0070C0"/>
                 </a:solidFill>
                 <a:latin typeface="맑은 고딕"/>
               </a:rPr>
-              <a:t>[기사 인용]</a:t>
+              <a:t>[출처]</a:t>
             </a:r>
           </a:p>
           <a:p>
@@ -12568,13 +13365,13 @@
               </a:spcBef>
             </a:pPr>
             <a:r>
-              <a:rPr sz="1800" b="1">
+              <a:rPr sz="2100" b="1">
                 <a:solidFill>
                   <a:srgbClr val="000000"/>
                 </a:solidFill>
                 <a:latin typeface="맑은 고딕"/>
               </a:rPr>
-              <a:t>금융위원회</a:t>
+              <a:t>정책브리핑</a:t>
             </a:r>
           </a:p>
           <a:p>
@@ -12586,11 +13383,11 @@
             <a:r>
               <a:rPr sz="1400" b="0">
                 <a:solidFill>
-                  <a:srgbClr val="566070"/>
+                  <a:srgbClr val="373737"/>
                 </a:solidFill>
                 <a:latin typeface="맑은 고딕"/>
               </a:rPr>
-              <a:t>국민성장펀드라는 이름이 붙으면 이야기는 더 어려워진다</a:t>
+              <a:t>판매 구조와 카드뉴스. 투자 위험 표현은 반드시 보수적으로 유지</a:t>
             </a:r>
           </a:p>
         </p:txBody>
@@ -12603,7 +13400,7 @@
 </p:sld>
 </file>
 
-<file path=ppt/slides/slide14.xml><?xml version="1.0" encoding="utf-8"?>
+<file path=ppt/slides/slide15.xml><?xml version="1.0" encoding="utf-8"?>
 <p:sld xmlns:a="http://schemas.openxmlformats.org/drawingml/2006/main" xmlns:p="http://schemas.openxmlformats.org/presentationml/2006/main" xmlns:r="http://schemas.openxmlformats.org/officeDocument/2006/relationships">
   <p:cSld>
     <p:bg>
@@ -12623,7 +13420,138 @@
       <p:grpSpPr/>
       <p:sp>
         <p:nvSpPr>
-          <p:cNvPr id="2" name="TextBox 1"/>
+          <p:cNvPr id="2" name="Rectangle 1"/>
+          <p:cNvSpPr/>
+          <p:nvPr/>
+        </p:nvSpPr>
+        <p:spPr>
+          <a:xfrm>
+            <a:off x="685800" y="1508760"/>
+            <a:ext cx="4800600" cy="3794760"/>
+          </a:xfrm>
+          <a:prstGeom prst="rect">
+            <a:avLst/>
+          </a:prstGeom>
+          <a:solidFill>
+            <a:srgbClr val="F5F5F5"/>
+          </a:solidFill>
+          <a:ln w="12700">
+            <a:solidFill>
+              <a:srgbClr val="BEBEBE"/>
+            </a:solidFill>
+          </a:ln>
+        </p:spPr>
+        <p:style>
+          <a:lnRef idx="1">
+            <a:schemeClr val="accent1"/>
+          </a:lnRef>
+          <a:fillRef idx="3">
+            <a:schemeClr val="accent1"/>
+          </a:fillRef>
+          <a:effectRef idx="2">
+            <a:schemeClr val="accent1"/>
+          </a:effectRef>
+          <a:fontRef idx="minor">
+            <a:schemeClr val="lt1"/>
+          </a:fontRef>
+        </p:style>
+        <p:txBody>
+          <a:bodyPr rtlCol="0" anchor="ctr" wrap="square"/>
+          <a:lstStyle/>
+          <a:p>
+            <a:pPr algn="ctr"/>
+            <a:r>
+              <a:rPr sz="1200" b="0">
+                <a:solidFill>
+                  <a:srgbClr val="0070C0"/>
+                </a:solidFill>
+                <a:latin typeface="맑은 고딕"/>
+              </a:rPr>
+              <a:t>[인용]</a:t>
+            </a:r>
+          </a:p>
+          <a:p>
+            <a:pPr algn="ctr">
+              <a:spcBef>
+                <a:spcPts val="800"/>
+              </a:spcBef>
+            </a:pPr>
+            <a:r>
+              <a:rPr sz="1800" b="1">
+                <a:solidFill>
+                  <a:srgbClr val="000000"/>
+                </a:solidFill>
+                <a:latin typeface="맑은 고딕"/>
+              </a:rPr>
+              <a:t>정책브리핑</a:t>
+            </a:r>
+          </a:p>
+          <a:p>
+            <a:pPr algn="ctr">
+              <a:spcBef>
+                <a:spcPts val="400"/>
+              </a:spcBef>
+            </a:pPr>
+            <a:r>
+              <a:rPr sz="1400" b="0">
+                <a:solidFill>
+                  <a:srgbClr val="373737"/>
+                </a:solidFill>
+                <a:latin typeface="맑은 고딕"/>
+              </a:rPr>
+              <a:t>정책 mechanism + counterpoint. 손실분담 수치와 구조는…</a:t>
+            </a:r>
+          </a:p>
+        </p:txBody>
+      </p:sp>
+      <p:sp>
+        <p:nvSpPr>
+          <p:cNvPr id="3" name="Rectangle 2"/>
+          <p:cNvSpPr/>
+          <p:nvPr/>
+        </p:nvSpPr>
+        <p:spPr>
+          <a:xfrm>
+            <a:off x="5806440" y="731520"/>
+            <a:ext cx="6126479" cy="6446520"/>
+          </a:xfrm>
+          <a:prstGeom prst="rect">
+            <a:avLst/>
+          </a:prstGeom>
+          <a:solidFill>
+            <a:srgbClr val="FFFFFF"/>
+          </a:solidFill>
+          <a:ln w="15240">
+            <a:solidFill>
+              <a:srgbClr val="D2D8E0"/>
+            </a:solidFill>
+          </a:ln>
+        </p:spPr>
+        <p:style>
+          <a:lnRef idx="1">
+            <a:schemeClr val="accent1"/>
+          </a:lnRef>
+          <a:fillRef idx="3">
+            <a:schemeClr val="accent1"/>
+          </a:fillRef>
+          <a:effectRef idx="2">
+            <a:schemeClr val="accent1"/>
+          </a:effectRef>
+          <a:fontRef idx="minor">
+            <a:schemeClr val="lt1"/>
+          </a:fontRef>
+        </p:style>
+        <p:txBody>
+          <a:bodyPr rtlCol="0" anchor="ctr"/>
+          <a:lstStyle/>
+          <a:p>
+            <a:pPr algn="ctr"/>
+          </a:p>
+        </p:txBody>
+      </p:sp>
+      <p:sp>
+        <p:nvSpPr>
+          <p:cNvPr id="4" name="TextBox 3"/>
           <p:cNvSpPr txBox="1"/>
           <p:nvPr/>
         </p:nvSpPr>
@@ -12650,21 +13578,56 @@
                 </a:solidFill>
                 <a:latin typeface="맑은 고딕"/>
               </a:rPr>
-              <a:t>위험을 나눈다는 말은 손실 가능성도 나눈다는 뜻이다</a:t>
-            </a:r>
-          </a:p>
-        </p:txBody>
-      </p:sp>
-      <p:sp>
-        <p:nvSpPr>
-          <p:cNvPr id="3" name="TextBox 2"/>
+              <a:t>정책금융의 어려움은 “누가 먼저 잃을 것인가”다</a:t>
+            </a:r>
+          </a:p>
+        </p:txBody>
+      </p:sp>
+      <p:sp>
+        <p:nvSpPr>
+          <p:cNvPr id="5" name="TextBox 4"/>
           <p:cNvSpPr txBox="1"/>
           <p:nvPr/>
         </p:nvSpPr>
         <p:spPr>
           <a:xfrm>
-            <a:off x="5989320" y="1208836"/>
-            <a:ext cx="5394960" cy="1302105"/>
+            <a:off x="8321040" y="621792"/>
+            <a:ext cx="2971800" cy="292608"/>
+          </a:xfrm>
+          <a:prstGeom prst="rect">
+            <a:avLst/>
+          </a:prstGeom>
+          <a:noFill/>
+        </p:spPr>
+        <p:txBody>
+          <a:bodyPr wrap="square">
+            <a:spAutoFit/>
+          </a:bodyPr>
+          <a:lstStyle/>
+          <a:p>
+            <a:pPr algn="r"/>
+            <a:r>
+              <a:rPr sz="1600" b="1" u="none">
+                <a:solidFill>
+                  <a:srgbClr val="000000"/>
+                </a:solidFill>
+                <a:latin typeface="맑은 고딕"/>
+              </a:rPr>
+              <a:t>정책브리핑</a:t>
+            </a:r>
+          </a:p>
+        </p:txBody>
+      </p:sp>
+      <p:sp>
+        <p:nvSpPr>
+          <p:cNvPr id="6" name="TextBox 5"/>
+          <p:cNvSpPr txBox="1"/>
+          <p:nvPr/>
+        </p:nvSpPr>
+        <p:spPr>
+          <a:xfrm>
+            <a:off x="5806440" y="1965960"/>
+            <a:ext cx="5577840" cy="2468880"/>
           </a:xfrm>
           <a:prstGeom prst="rect">
             <a:avLst/>
@@ -12692,7 +13655,7 @@
                 </a:solidFill>
                 <a:latin typeface="맑은 고딕"/>
               </a:rPr>
-              <a:t>국민참여형 펀드 자료는 재정이 각 자펀드에서 20% 범위의 손실을 우선 부담하는 구조를 설명한다.</a:t>
+              <a:t>정책금융의 어려움은 “돈을 넣을 것인가”보다 “손실이 나면 누가…</a:t>
             </a:r>
           </a:p>
           <a:p>
@@ -12711,7 +13674,1546 @@
                 </a:solidFill>
                 <a:latin typeface="맑은 고딕"/>
               </a:rPr>
-              <a:t>이 장치는 투자자의 위험을 낮추려는 설계지만, 원금 손실 가능성이 사라진다는 뜻은 아니다.</a:t>
+              <a:t>이 둘을 같이 봐야 정책금융 논쟁이 단순 찬반으로 흐르지 않는다.</a:t>
+            </a:r>
+          </a:p>
+        </p:txBody>
+      </p:sp>
+    </p:spTree>
+  </p:cSld>
+  <p:clrMapOvr>
+    <a:masterClrMapping/>
+  </p:clrMapOvr>
+</p:sld>
+</file>
+
+<file path=ppt/slides/slide16.xml><?xml version="1.0" encoding="utf-8"?>
+<p:sld xmlns:a="http://schemas.openxmlformats.org/drawingml/2006/main" xmlns:p="http://schemas.openxmlformats.org/presentationml/2006/main" xmlns:r="http://schemas.openxmlformats.org/officeDocument/2006/relationships">
+  <p:cSld>
+    <p:bg>
+      <p:bgPr>
+        <a:solidFill>
+          <a:srgbClr val="F8F9FA"/>
+        </a:solidFill>
+        <a:effectLst/>
+      </p:bgPr>
+    </p:bg>
+    <p:spTree>
+      <p:nvGrpSpPr>
+        <p:cNvPr id="1" name=""/>
+        <p:cNvGrpSpPr/>
+        <p:nvPr/>
+      </p:nvGrpSpPr>
+      <p:grpSpPr/>
+      <p:sp>
+        <p:nvSpPr>
+          <p:cNvPr id="2" name="TextBox 1"/>
+          <p:cNvSpPr txBox="1"/>
+          <p:nvPr/>
+        </p:nvSpPr>
+        <p:spPr>
+          <a:xfrm>
+            <a:off x="572414" y="356616"/>
+            <a:ext cx="11192256" cy="521207"/>
+          </a:xfrm>
+          <a:prstGeom prst="rect">
+            <a:avLst/>
+          </a:prstGeom>
+          <a:noFill/>
+        </p:spPr>
+        <p:txBody>
+          <a:bodyPr wrap="square">
+            <a:spAutoFit/>
+          </a:bodyPr>
+          <a:lstStyle/>
+          <a:p>
+            <a:r>
+              <a:rPr sz="2800" b="0" u="none">
+                <a:solidFill>
+                  <a:srgbClr val="FF0000"/>
+                </a:solidFill>
+                <a:latin typeface="맑은 고딕"/>
+              </a:rPr>
+              <a:t>성장산업을 돕는 것과 특정 기업을 밀어주는 것은 다르다</a:t>
+            </a:r>
+          </a:p>
+        </p:txBody>
+      </p:sp>
+      <p:sp>
+        <p:nvSpPr>
+          <p:cNvPr id="3" name="Rectangle 2"/>
+          <p:cNvSpPr/>
+          <p:nvPr/>
+        </p:nvSpPr>
+        <p:spPr>
+          <a:xfrm>
+            <a:off x="713232" y="1417320"/>
+            <a:ext cx="4892040" cy="4114800"/>
+          </a:xfrm>
+          <a:prstGeom prst="rect">
+            <a:avLst/>
+          </a:prstGeom>
+          <a:solidFill>
+            <a:srgbClr val="F8F8F8"/>
+          </a:solidFill>
+          <a:ln w="12700">
+            <a:solidFill>
+              <a:srgbClr val="BEBEBE"/>
+            </a:solidFill>
+          </a:ln>
+        </p:spPr>
+        <p:style>
+          <a:lnRef idx="1">
+            <a:schemeClr val="accent1"/>
+          </a:lnRef>
+          <a:fillRef idx="3">
+            <a:schemeClr val="accent1"/>
+          </a:fillRef>
+          <a:effectRef idx="2">
+            <a:schemeClr val="accent1"/>
+          </a:effectRef>
+          <a:fontRef idx="minor">
+            <a:schemeClr val="lt1"/>
+          </a:fontRef>
+        </p:style>
+        <p:txBody>
+          <a:bodyPr rtlCol="0" anchor="ctr"/>
+          <a:lstStyle/>
+          <a:p>
+            <a:pPr algn="ctr"/>
+          </a:p>
+        </p:txBody>
+      </p:sp>
+      <p:sp>
+        <p:nvSpPr>
+          <p:cNvPr id="4" name="TextBox 3"/>
+          <p:cNvSpPr txBox="1"/>
+          <p:nvPr/>
+        </p:nvSpPr>
+        <p:spPr>
+          <a:xfrm>
+            <a:off x="822960" y="1527048"/>
+            <a:ext cx="914400" cy="201168"/>
+          </a:xfrm>
+          <a:prstGeom prst="rect">
+            <a:avLst/>
+          </a:prstGeom>
+          <a:noFill/>
+        </p:spPr>
+        <p:txBody>
+          <a:bodyPr wrap="square">
+            <a:spAutoFit/>
+          </a:bodyPr>
+          <a:lstStyle/>
+          <a:p>
+            <a:r>
+              <a:rPr sz="1200" b="0" u="none">
+                <a:solidFill>
+                  <a:srgbClr val="0070C0"/>
+                </a:solidFill>
+                <a:latin typeface="맑은 고딕"/>
+              </a:rPr>
+              <a:t>[도식]</a:t>
+            </a:r>
+          </a:p>
+        </p:txBody>
+      </p:sp>
+      <p:sp>
+        <p:nvSpPr>
+          <p:cNvPr id="5" name="Rectangle 4"/>
+          <p:cNvSpPr/>
+          <p:nvPr/>
+        </p:nvSpPr>
+        <p:spPr>
+          <a:xfrm>
+            <a:off x="1033271" y="3040380"/>
+            <a:ext cx="1828799" cy="1143000"/>
+          </a:xfrm>
+          <a:prstGeom prst="rect">
+            <a:avLst/>
+          </a:prstGeom>
+          <a:solidFill>
+            <a:srgbClr val="FFFFFF"/>
+          </a:solidFill>
+          <a:ln w="12700">
+            <a:solidFill>
+              <a:srgbClr val="A0A0A0"/>
+            </a:solidFill>
+          </a:ln>
+        </p:spPr>
+        <p:style>
+          <a:lnRef idx="1">
+            <a:schemeClr val="accent1"/>
+          </a:lnRef>
+          <a:fillRef idx="3">
+            <a:schemeClr val="accent1"/>
+          </a:fillRef>
+          <a:effectRef idx="2">
+            <a:schemeClr val="accent1"/>
+          </a:effectRef>
+          <a:fontRef idx="minor">
+            <a:schemeClr val="lt1"/>
+          </a:fontRef>
+        </p:style>
+        <p:txBody>
+          <a:bodyPr rtlCol="0" anchor="ctr"/>
+          <a:lstStyle/>
+          <a:p>
+            <a:pPr algn="ctr"/>
+          </a:p>
+        </p:txBody>
+      </p:sp>
+      <p:sp>
+        <p:nvSpPr>
+          <p:cNvPr id="6" name="Rectangle 5"/>
+          <p:cNvSpPr/>
+          <p:nvPr/>
+        </p:nvSpPr>
+        <p:spPr>
+          <a:xfrm>
+            <a:off x="3456432" y="3040380"/>
+            <a:ext cx="1828799" cy="1143000"/>
+          </a:xfrm>
+          <a:prstGeom prst="rect">
+            <a:avLst/>
+          </a:prstGeom>
+          <a:solidFill>
+            <a:srgbClr val="FFFFFF"/>
+          </a:solidFill>
+          <a:ln w="12700">
+            <a:solidFill>
+              <a:srgbClr val="A0A0A0"/>
+            </a:solidFill>
+          </a:ln>
+        </p:spPr>
+        <p:style>
+          <a:lnRef idx="1">
+            <a:schemeClr val="accent1"/>
+          </a:lnRef>
+          <a:fillRef idx="3">
+            <a:schemeClr val="accent1"/>
+          </a:fillRef>
+          <a:effectRef idx="2">
+            <a:schemeClr val="accent1"/>
+          </a:effectRef>
+          <a:fontRef idx="minor">
+            <a:schemeClr val="lt1"/>
+          </a:fontRef>
+        </p:style>
+        <p:txBody>
+          <a:bodyPr rtlCol="0" anchor="ctr"/>
+          <a:lstStyle/>
+          <a:p>
+            <a:pPr algn="ctr"/>
+          </a:p>
+        </p:txBody>
+      </p:sp>
+      <p:sp>
+        <p:nvSpPr>
+          <p:cNvPr id="7" name="TextBox 6"/>
+          <p:cNvSpPr txBox="1"/>
+          <p:nvPr/>
+        </p:nvSpPr>
+        <p:spPr>
+          <a:xfrm>
+            <a:off x="1124712" y="3204972"/>
+            <a:ext cx="1645919" cy="320040"/>
+          </a:xfrm>
+          <a:prstGeom prst="rect">
+            <a:avLst/>
+          </a:prstGeom>
+          <a:noFill/>
+        </p:spPr>
+        <p:txBody>
+          <a:bodyPr wrap="square">
+            <a:spAutoFit/>
+          </a:bodyPr>
+          <a:lstStyle/>
+          <a:p>
+            <a:pPr algn="ctr"/>
+            <a:r>
+              <a:rPr sz="1800" b="1" u="none">
+                <a:solidFill>
+                  <a:srgbClr val="000000"/>
+                </a:solidFill>
+                <a:latin typeface="맑은 고딕"/>
+              </a:rPr>
+              <a:t>기존 방식</a:t>
+            </a:r>
+          </a:p>
+        </p:txBody>
+      </p:sp>
+      <p:sp>
+        <p:nvSpPr>
+          <p:cNvPr id="8" name="TextBox 7"/>
+          <p:cNvSpPr txBox="1"/>
+          <p:nvPr/>
+        </p:nvSpPr>
+        <p:spPr>
+          <a:xfrm>
+            <a:off x="1124712" y="3607308"/>
+            <a:ext cx="1645919" cy="274320"/>
+          </a:xfrm>
+          <a:prstGeom prst="rect">
+            <a:avLst/>
+          </a:prstGeom>
+          <a:noFill/>
+        </p:spPr>
+        <p:txBody>
+          <a:bodyPr wrap="square">
+            <a:spAutoFit/>
+          </a:bodyPr>
+          <a:lstStyle/>
+          <a:p>
+            <a:pPr algn="ctr"/>
+            <a:r>
+              <a:rPr sz="1500" b="0" u="none">
+                <a:solidFill>
+                  <a:srgbClr val="373737"/>
+                </a:solidFill>
+                <a:latin typeface="맑은 고딕"/>
+              </a:rPr>
+              <a:t>검색 / 비교</a:t>
+            </a:r>
+          </a:p>
+        </p:txBody>
+      </p:sp>
+      <p:sp>
+        <p:nvSpPr>
+          <p:cNvPr id="9" name="TextBox 8"/>
+          <p:cNvSpPr txBox="1"/>
+          <p:nvPr/>
+        </p:nvSpPr>
+        <p:spPr>
+          <a:xfrm>
+            <a:off x="3547872" y="3204972"/>
+            <a:ext cx="1645919" cy="320040"/>
+          </a:xfrm>
+          <a:prstGeom prst="rect">
+            <a:avLst/>
+          </a:prstGeom>
+          <a:noFill/>
+        </p:spPr>
+        <p:txBody>
+          <a:bodyPr wrap="square">
+            <a:spAutoFit/>
+          </a:bodyPr>
+          <a:lstStyle/>
+          <a:p>
+            <a:pPr algn="ctr"/>
+            <a:r>
+              <a:rPr sz="1800" b="1" u="none">
+                <a:solidFill>
+                  <a:srgbClr val="000000"/>
+                </a:solidFill>
+                <a:latin typeface="맑은 고딕"/>
+              </a:rPr>
+              <a:t>AI 즉답</a:t>
+            </a:r>
+          </a:p>
+        </p:txBody>
+      </p:sp>
+      <p:sp>
+        <p:nvSpPr>
+          <p:cNvPr id="10" name="TextBox 9"/>
+          <p:cNvSpPr txBox="1"/>
+          <p:nvPr/>
+        </p:nvSpPr>
+        <p:spPr>
+          <a:xfrm>
+            <a:off x="3547872" y="3607308"/>
+            <a:ext cx="1645919" cy="274320"/>
+          </a:xfrm>
+          <a:prstGeom prst="rect">
+            <a:avLst/>
+          </a:prstGeom>
+          <a:noFill/>
+        </p:spPr>
+        <p:txBody>
+          <a:bodyPr wrap="square">
+            <a:spAutoFit/>
+          </a:bodyPr>
+          <a:lstStyle/>
+          <a:p>
+            <a:pPr algn="ctr"/>
+            <a:r>
+              <a:rPr sz="1500" b="0" u="none">
+                <a:solidFill>
+                  <a:srgbClr val="373737"/>
+                </a:solidFill>
+                <a:latin typeface="맑은 고딕"/>
+              </a:rPr>
+              <a:t>요약 / 검증</a:t>
+            </a:r>
+          </a:p>
+        </p:txBody>
+      </p:sp>
+      <p:sp>
+        <p:nvSpPr>
+          <p:cNvPr id="11" name="TextBox 10"/>
+          <p:cNvSpPr txBox="1"/>
+          <p:nvPr/>
+        </p:nvSpPr>
+        <p:spPr>
+          <a:xfrm>
+            <a:off x="2930652" y="3387852"/>
+            <a:ext cx="457200" cy="347472"/>
+          </a:xfrm>
+          <a:prstGeom prst="rect">
+            <a:avLst/>
+          </a:prstGeom>
+          <a:noFill/>
+        </p:spPr>
+        <p:txBody>
+          <a:bodyPr wrap="square">
+            <a:spAutoFit/>
+          </a:bodyPr>
+          <a:lstStyle/>
+          <a:p>
+            <a:pPr algn="ctr"/>
+            <a:r>
+              <a:rPr sz="2200" b="1" u="none">
+                <a:solidFill>
+                  <a:srgbClr val="373737"/>
+                </a:solidFill>
+                <a:latin typeface="맑은 고딕"/>
+              </a:rPr>
+              <a:t>→</a:t>
+            </a:r>
+          </a:p>
+        </p:txBody>
+      </p:sp>
+      <p:sp>
+        <p:nvSpPr>
+          <p:cNvPr id="12" name="TextBox 11"/>
+          <p:cNvSpPr txBox="1"/>
+          <p:nvPr/>
+        </p:nvSpPr>
+        <p:spPr>
+          <a:xfrm>
+            <a:off x="5989320" y="1508760"/>
+            <a:ext cx="5303520" cy="3337560"/>
+          </a:xfrm>
+          <a:prstGeom prst="rect">
+            <a:avLst/>
+          </a:prstGeom>
+          <a:noFill/>
+        </p:spPr>
+        <p:txBody>
+          <a:bodyPr wrap="square" anchor="ctr">
+            <a:spAutoFit/>
+          </a:bodyPr>
+          <a:lstStyle/>
+          <a:p>
+            <a:pPr>
+              <a:lnSpc>
+                <a:spcPct val="150000"/>
+              </a:lnSpc>
+              <a:spcAft>
+                <a:spcPts val="800"/>
+              </a:spcAft>
+            </a:pPr>
+          </a:p>
+          <a:p>
+            <a:pPr>
+              <a:lnSpc>
+                <a:spcPct val="150000"/>
+              </a:lnSpc>
+              <a:spcAft>
+                <a:spcPts val="800"/>
+              </a:spcAft>
+            </a:pPr>
+            <a:r>
+              <a:rPr sz="2800" b="0" u="none">
+                <a:solidFill>
+                  <a:srgbClr val="000000"/>
+                </a:solidFill>
+                <a:latin typeface="맑은 고딕"/>
+              </a:rPr>
+              <a:t>성장산업 지원과 특정 기업 밀어주기는 구분해서 다뤄야 한다.</a:t>
+            </a:r>
+          </a:p>
+        </p:txBody>
+      </p:sp>
+    </p:spTree>
+  </p:cSld>
+  <p:clrMapOvr>
+    <a:masterClrMapping/>
+  </p:clrMapOvr>
+</p:sld>
+</file>
+
+<file path=ppt/slides/slide17.xml><?xml version="1.0" encoding="utf-8"?>
+<p:sld xmlns:a="http://schemas.openxmlformats.org/drawingml/2006/main" xmlns:p="http://schemas.openxmlformats.org/presentationml/2006/main" xmlns:r="http://schemas.openxmlformats.org/officeDocument/2006/relationships">
+  <p:cSld>
+    <p:bg>
+      <p:bgPr>
+        <a:solidFill>
+          <a:srgbClr val="F8F9FA"/>
+        </a:solidFill>
+        <a:effectLst/>
+      </p:bgPr>
+    </p:bg>
+    <p:spTree>
+      <p:nvGrpSpPr>
+        <p:cNvPr id="1" name=""/>
+        <p:cNvGrpSpPr/>
+        <p:nvPr/>
+      </p:nvGrpSpPr>
+      <p:grpSpPr/>
+      <p:sp>
+        <p:nvSpPr>
+          <p:cNvPr id="2" name="TextBox 1"/>
+          <p:cNvSpPr txBox="1"/>
+          <p:nvPr/>
+        </p:nvSpPr>
+        <p:spPr>
+          <a:xfrm>
+            <a:off x="572414" y="356616"/>
+            <a:ext cx="11192256" cy="521207"/>
+          </a:xfrm>
+          <a:prstGeom prst="rect">
+            <a:avLst/>
+          </a:prstGeom>
+          <a:noFill/>
+        </p:spPr>
+        <p:txBody>
+          <a:bodyPr wrap="square">
+            <a:spAutoFit/>
+          </a:bodyPr>
+          <a:lstStyle/>
+          <a:p>
+            <a:r>
+              <a:rPr sz="2800" b="0" u="none">
+                <a:solidFill>
+                  <a:srgbClr val="FF0000"/>
+                </a:solidFill>
+                <a:latin typeface="맑은 고딕"/>
+              </a:rPr>
+              <a:t>반대쪽 질문도 있다: 그럼 아무도 위험을 안 지면 어떻게 하나</a:t>
+            </a:r>
+          </a:p>
+        </p:txBody>
+      </p:sp>
+      <p:sp>
+        <p:nvSpPr>
+          <p:cNvPr id="3" name="Rectangle 2"/>
+          <p:cNvSpPr/>
+          <p:nvPr/>
+        </p:nvSpPr>
+        <p:spPr>
+          <a:xfrm>
+            <a:off x="713232" y="1417320"/>
+            <a:ext cx="4892040" cy="4114800"/>
+          </a:xfrm>
+          <a:prstGeom prst="rect">
+            <a:avLst/>
+          </a:prstGeom>
+          <a:solidFill>
+            <a:srgbClr val="F8F8F8"/>
+          </a:solidFill>
+          <a:ln w="12700">
+            <a:solidFill>
+              <a:srgbClr val="BEBEBE"/>
+            </a:solidFill>
+          </a:ln>
+        </p:spPr>
+        <p:style>
+          <a:lnRef idx="1">
+            <a:schemeClr val="accent1"/>
+          </a:lnRef>
+          <a:fillRef idx="3">
+            <a:schemeClr val="accent1"/>
+          </a:fillRef>
+          <a:effectRef idx="2">
+            <a:schemeClr val="accent1"/>
+          </a:effectRef>
+          <a:fontRef idx="minor">
+            <a:schemeClr val="lt1"/>
+          </a:fontRef>
+        </p:style>
+        <p:txBody>
+          <a:bodyPr rtlCol="0" anchor="ctr"/>
+          <a:lstStyle/>
+          <a:p>
+            <a:pPr algn="ctr"/>
+          </a:p>
+        </p:txBody>
+      </p:sp>
+      <p:sp>
+        <p:nvSpPr>
+          <p:cNvPr id="4" name="TextBox 3"/>
+          <p:cNvSpPr txBox="1"/>
+          <p:nvPr/>
+        </p:nvSpPr>
+        <p:spPr>
+          <a:xfrm>
+            <a:off x="822960" y="1527048"/>
+            <a:ext cx="914400" cy="201168"/>
+          </a:xfrm>
+          <a:prstGeom prst="rect">
+            <a:avLst/>
+          </a:prstGeom>
+          <a:noFill/>
+        </p:spPr>
+        <p:txBody>
+          <a:bodyPr wrap="square">
+            <a:spAutoFit/>
+          </a:bodyPr>
+          <a:lstStyle/>
+          <a:p>
+            <a:r>
+              <a:rPr sz="1200" b="0" u="none">
+                <a:solidFill>
+                  <a:srgbClr val="0070C0"/>
+                </a:solidFill>
+                <a:latin typeface="맑은 고딕"/>
+              </a:rPr>
+              <a:t>[도식]</a:t>
+            </a:r>
+          </a:p>
+        </p:txBody>
+      </p:sp>
+      <p:sp>
+        <p:nvSpPr>
+          <p:cNvPr id="5" name="Rectangle 4"/>
+          <p:cNvSpPr/>
+          <p:nvPr/>
+        </p:nvSpPr>
+        <p:spPr>
+          <a:xfrm>
+            <a:off x="1033271" y="3040380"/>
+            <a:ext cx="1828799" cy="1143000"/>
+          </a:xfrm>
+          <a:prstGeom prst="rect">
+            <a:avLst/>
+          </a:prstGeom>
+          <a:solidFill>
+            <a:srgbClr val="FFFFFF"/>
+          </a:solidFill>
+          <a:ln w="12700">
+            <a:solidFill>
+              <a:srgbClr val="A0A0A0"/>
+            </a:solidFill>
+          </a:ln>
+        </p:spPr>
+        <p:style>
+          <a:lnRef idx="1">
+            <a:schemeClr val="accent1"/>
+          </a:lnRef>
+          <a:fillRef idx="3">
+            <a:schemeClr val="accent1"/>
+          </a:fillRef>
+          <a:effectRef idx="2">
+            <a:schemeClr val="accent1"/>
+          </a:effectRef>
+          <a:fontRef idx="minor">
+            <a:schemeClr val="lt1"/>
+          </a:fontRef>
+        </p:style>
+        <p:txBody>
+          <a:bodyPr rtlCol="0" anchor="ctr"/>
+          <a:lstStyle/>
+          <a:p>
+            <a:pPr algn="ctr"/>
+          </a:p>
+        </p:txBody>
+      </p:sp>
+      <p:sp>
+        <p:nvSpPr>
+          <p:cNvPr id="6" name="Rectangle 5"/>
+          <p:cNvSpPr/>
+          <p:nvPr/>
+        </p:nvSpPr>
+        <p:spPr>
+          <a:xfrm>
+            <a:off x="3456432" y="3040380"/>
+            <a:ext cx="1828799" cy="1143000"/>
+          </a:xfrm>
+          <a:prstGeom prst="rect">
+            <a:avLst/>
+          </a:prstGeom>
+          <a:solidFill>
+            <a:srgbClr val="FFFFFF"/>
+          </a:solidFill>
+          <a:ln w="12700">
+            <a:solidFill>
+              <a:srgbClr val="A0A0A0"/>
+            </a:solidFill>
+          </a:ln>
+        </p:spPr>
+        <p:style>
+          <a:lnRef idx="1">
+            <a:schemeClr val="accent1"/>
+          </a:lnRef>
+          <a:fillRef idx="3">
+            <a:schemeClr val="accent1"/>
+          </a:fillRef>
+          <a:effectRef idx="2">
+            <a:schemeClr val="accent1"/>
+          </a:effectRef>
+          <a:fontRef idx="minor">
+            <a:schemeClr val="lt1"/>
+          </a:fontRef>
+        </p:style>
+        <p:txBody>
+          <a:bodyPr rtlCol="0" anchor="ctr"/>
+          <a:lstStyle/>
+          <a:p>
+            <a:pPr algn="ctr"/>
+          </a:p>
+        </p:txBody>
+      </p:sp>
+      <p:sp>
+        <p:nvSpPr>
+          <p:cNvPr id="7" name="TextBox 6"/>
+          <p:cNvSpPr txBox="1"/>
+          <p:nvPr/>
+        </p:nvSpPr>
+        <p:spPr>
+          <a:xfrm>
+            <a:off x="1124712" y="3204972"/>
+            <a:ext cx="1645919" cy="320040"/>
+          </a:xfrm>
+          <a:prstGeom prst="rect">
+            <a:avLst/>
+          </a:prstGeom>
+          <a:noFill/>
+        </p:spPr>
+        <p:txBody>
+          <a:bodyPr wrap="square">
+            <a:spAutoFit/>
+          </a:bodyPr>
+          <a:lstStyle/>
+          <a:p>
+            <a:pPr algn="ctr"/>
+            <a:r>
+              <a:rPr sz="1800" b="1" u="none">
+                <a:solidFill>
+                  <a:srgbClr val="000000"/>
+                </a:solidFill>
+                <a:latin typeface="맑은 고딕"/>
+              </a:rPr>
+              <a:t>안전한 금융</a:t>
+            </a:r>
+          </a:p>
+        </p:txBody>
+      </p:sp>
+      <p:sp>
+        <p:nvSpPr>
+          <p:cNvPr id="8" name="TextBox 7"/>
+          <p:cNvSpPr txBox="1"/>
+          <p:nvPr/>
+        </p:nvSpPr>
+        <p:spPr>
+          <a:xfrm>
+            <a:off x="1124712" y="3607308"/>
+            <a:ext cx="1645919" cy="274320"/>
+          </a:xfrm>
+          <a:prstGeom prst="rect">
+            <a:avLst/>
+          </a:prstGeom>
+          <a:noFill/>
+        </p:spPr>
+        <p:txBody>
+          <a:bodyPr wrap="square">
+            <a:spAutoFit/>
+          </a:bodyPr>
+          <a:lstStyle/>
+          <a:p>
+            <a:pPr algn="ctr"/>
+            <a:r>
+              <a:rPr sz="1500" b="0" u="none">
+                <a:solidFill>
+                  <a:srgbClr val="373737"/>
+                </a:solidFill>
+                <a:latin typeface="맑은 고딕"/>
+              </a:rPr>
+              <a:t>담보 / 단기</a:t>
+            </a:r>
+          </a:p>
+        </p:txBody>
+      </p:sp>
+      <p:sp>
+        <p:nvSpPr>
+          <p:cNvPr id="9" name="TextBox 8"/>
+          <p:cNvSpPr txBox="1"/>
+          <p:nvPr/>
+        </p:nvSpPr>
+        <p:spPr>
+          <a:xfrm>
+            <a:off x="3547872" y="3204972"/>
+            <a:ext cx="1645919" cy="320040"/>
+          </a:xfrm>
+          <a:prstGeom prst="rect">
+            <a:avLst/>
+          </a:prstGeom>
+          <a:noFill/>
+        </p:spPr>
+        <p:txBody>
+          <a:bodyPr wrap="square">
+            <a:spAutoFit/>
+          </a:bodyPr>
+          <a:lstStyle/>
+          <a:p>
+            <a:pPr algn="ctr"/>
+            <a:r>
+              <a:rPr sz="1800" b="1" u="none">
+                <a:solidFill>
+                  <a:srgbClr val="000000"/>
+                </a:solidFill>
+                <a:latin typeface="맑은 고딕"/>
+              </a:rPr>
+              <a:t>성장 금융</a:t>
+            </a:r>
+          </a:p>
+        </p:txBody>
+      </p:sp>
+      <p:sp>
+        <p:nvSpPr>
+          <p:cNvPr id="10" name="TextBox 9"/>
+          <p:cNvSpPr txBox="1"/>
+          <p:nvPr/>
+        </p:nvSpPr>
+        <p:spPr>
+          <a:xfrm>
+            <a:off x="3547872" y="3607308"/>
+            <a:ext cx="1645919" cy="274320"/>
+          </a:xfrm>
+          <a:prstGeom prst="rect">
+            <a:avLst/>
+          </a:prstGeom>
+          <a:noFill/>
+        </p:spPr>
+        <p:txBody>
+          <a:bodyPr wrap="square">
+            <a:spAutoFit/>
+          </a:bodyPr>
+          <a:lstStyle/>
+          <a:p>
+            <a:pPr algn="ctr"/>
+            <a:r>
+              <a:rPr sz="1500" b="0" u="none">
+                <a:solidFill>
+                  <a:srgbClr val="373737"/>
+                </a:solidFill>
+                <a:latin typeface="맑은 고딕"/>
+              </a:rPr>
+              <a:t>장기 / 위험분담</a:t>
+            </a:r>
+          </a:p>
+        </p:txBody>
+      </p:sp>
+      <p:sp>
+        <p:nvSpPr>
+          <p:cNvPr id="11" name="TextBox 10"/>
+          <p:cNvSpPr txBox="1"/>
+          <p:nvPr/>
+        </p:nvSpPr>
+        <p:spPr>
+          <a:xfrm>
+            <a:off x="2930652" y="3387852"/>
+            <a:ext cx="457200" cy="347472"/>
+          </a:xfrm>
+          <a:prstGeom prst="rect">
+            <a:avLst/>
+          </a:prstGeom>
+          <a:noFill/>
+        </p:spPr>
+        <p:txBody>
+          <a:bodyPr wrap="square">
+            <a:spAutoFit/>
+          </a:bodyPr>
+          <a:lstStyle/>
+          <a:p>
+            <a:pPr algn="ctr"/>
+            <a:r>
+              <a:rPr sz="2200" b="1" u="none">
+                <a:solidFill>
+                  <a:srgbClr val="373737"/>
+                </a:solidFill>
+                <a:latin typeface="맑은 고딕"/>
+              </a:rPr>
+              <a:t>→</a:t>
+            </a:r>
+          </a:p>
+        </p:txBody>
+      </p:sp>
+      <p:sp>
+        <p:nvSpPr>
+          <p:cNvPr id="12" name="TextBox 11"/>
+          <p:cNvSpPr txBox="1"/>
+          <p:nvPr/>
+        </p:nvSpPr>
+        <p:spPr>
+          <a:xfrm>
+            <a:off x="5989320" y="1508760"/>
+            <a:ext cx="5303520" cy="3337560"/>
+          </a:xfrm>
+          <a:prstGeom prst="rect">
+            <a:avLst/>
+          </a:prstGeom>
+          <a:noFill/>
+        </p:spPr>
+        <p:txBody>
+          <a:bodyPr wrap="square" anchor="ctr">
+            <a:spAutoFit/>
+          </a:bodyPr>
+          <a:lstStyle/>
+          <a:p>
+            <a:pPr>
+              <a:lnSpc>
+                <a:spcPct val="150000"/>
+              </a:lnSpc>
+              <a:spcAft>
+                <a:spcPts val="800"/>
+              </a:spcAft>
+            </a:pPr>
+            <a:r>
+              <a:rPr sz="2800" b="0" u="none">
+                <a:solidFill>
+                  <a:srgbClr val="000000"/>
+                </a:solidFill>
+                <a:latin typeface="맑은 고딕"/>
+              </a:rPr>
+              <a:t>반대쪽 질문도 있다</a:t>
+            </a:r>
+          </a:p>
+          <a:p>
+            <a:pPr>
+              <a:lnSpc>
+                <a:spcPct val="150000"/>
+              </a:lnSpc>
+              <a:spcAft>
+                <a:spcPts val="800"/>
+              </a:spcAft>
+            </a:pPr>
+            <a:r>
+              <a:rPr sz="2800" b="0" u="none">
+                <a:solidFill>
+                  <a:srgbClr val="000000"/>
+                </a:solidFill>
+                <a:latin typeface="맑은 고딕"/>
+              </a:rPr>
+              <a:t>또 은행과 금융회사는 건전성 규제</a:t>
+            </a:r>
+          </a:p>
+        </p:txBody>
+      </p:sp>
+    </p:spTree>
+  </p:cSld>
+  <p:clrMapOvr>
+    <a:masterClrMapping/>
+  </p:clrMapOvr>
+</p:sld>
+</file>
+
+<file path=ppt/slides/slide18.xml><?xml version="1.0" encoding="utf-8"?>
+<p:sld xmlns:a="http://schemas.openxmlformats.org/drawingml/2006/main" xmlns:p="http://schemas.openxmlformats.org/presentationml/2006/main" xmlns:r="http://schemas.openxmlformats.org/officeDocument/2006/relationships">
+  <p:cSld>
+    <p:bg>
+      <p:bgPr>
+        <a:solidFill>
+          <a:srgbClr val="F8F9FA"/>
+        </a:solidFill>
+        <a:effectLst/>
+      </p:bgPr>
+    </p:bg>
+    <p:spTree>
+      <p:nvGrpSpPr>
+        <p:cNvPr id="1" name=""/>
+        <p:cNvGrpSpPr/>
+        <p:nvPr/>
+      </p:nvGrpSpPr>
+      <p:grpSpPr/>
+      <p:sp>
+        <p:nvSpPr>
+          <p:cNvPr id="2" name="TextBox 1"/>
+          <p:cNvSpPr txBox="1"/>
+          <p:nvPr/>
+        </p:nvSpPr>
+        <p:spPr>
+          <a:xfrm>
+            <a:off x="572414" y="356616"/>
+            <a:ext cx="11192256" cy="521207"/>
+          </a:xfrm>
+          <a:prstGeom prst="rect">
+            <a:avLst/>
+          </a:prstGeom>
+          <a:noFill/>
+        </p:spPr>
+        <p:txBody>
+          <a:bodyPr wrap="square">
+            <a:spAutoFit/>
+          </a:bodyPr>
+          <a:lstStyle/>
+          <a:p>
+            <a:r>
+              <a:rPr sz="2800" b="0" u="none">
+                <a:solidFill>
+                  <a:srgbClr val="FF0000"/>
+                </a:solidFill>
+                <a:latin typeface="맑은 고딕"/>
+              </a:rPr>
+              <a:t>결국 질문은 성장의 과실보다 위험의 배분이다</a:t>
+            </a:r>
+          </a:p>
+        </p:txBody>
+      </p:sp>
+      <p:sp>
+        <p:nvSpPr>
+          <p:cNvPr id="3" name="Rectangle 2"/>
+          <p:cNvSpPr/>
+          <p:nvPr/>
+        </p:nvSpPr>
+        <p:spPr>
+          <a:xfrm>
+            <a:off x="713232" y="1417320"/>
+            <a:ext cx="4892040" cy="4114800"/>
+          </a:xfrm>
+          <a:prstGeom prst="rect">
+            <a:avLst/>
+          </a:prstGeom>
+          <a:solidFill>
+            <a:srgbClr val="F8F8F8"/>
+          </a:solidFill>
+          <a:ln w="12700">
+            <a:solidFill>
+              <a:srgbClr val="BEBEBE"/>
+            </a:solidFill>
+          </a:ln>
+        </p:spPr>
+        <p:style>
+          <a:lnRef idx="1">
+            <a:schemeClr val="accent1"/>
+          </a:lnRef>
+          <a:fillRef idx="3">
+            <a:schemeClr val="accent1"/>
+          </a:fillRef>
+          <a:effectRef idx="2">
+            <a:schemeClr val="accent1"/>
+          </a:effectRef>
+          <a:fontRef idx="minor">
+            <a:schemeClr val="lt1"/>
+          </a:fontRef>
+        </p:style>
+        <p:txBody>
+          <a:bodyPr rtlCol="0" anchor="ctr"/>
+          <a:lstStyle/>
+          <a:p>
+            <a:pPr algn="ctr"/>
+          </a:p>
+        </p:txBody>
+      </p:sp>
+      <p:sp>
+        <p:nvSpPr>
+          <p:cNvPr id="4" name="TextBox 3"/>
+          <p:cNvSpPr txBox="1"/>
+          <p:nvPr/>
+        </p:nvSpPr>
+        <p:spPr>
+          <a:xfrm>
+            <a:off x="822960" y="1527048"/>
+            <a:ext cx="914400" cy="201168"/>
+          </a:xfrm>
+          <a:prstGeom prst="rect">
+            <a:avLst/>
+          </a:prstGeom>
+          <a:noFill/>
+        </p:spPr>
+        <p:txBody>
+          <a:bodyPr wrap="square">
+            <a:spAutoFit/>
+          </a:bodyPr>
+          <a:lstStyle/>
+          <a:p>
+            <a:r>
+              <a:rPr sz="1200" b="0" u="none">
+                <a:solidFill>
+                  <a:srgbClr val="0070C0"/>
+                </a:solidFill>
+                <a:latin typeface="맑은 고딕"/>
+              </a:rPr>
+              <a:t>[도식]</a:t>
+            </a:r>
+          </a:p>
+        </p:txBody>
+      </p:sp>
+      <p:sp>
+        <p:nvSpPr>
+          <p:cNvPr id="5" name="Rectangle 4"/>
+          <p:cNvSpPr/>
+          <p:nvPr/>
+        </p:nvSpPr>
+        <p:spPr>
+          <a:xfrm>
+            <a:off x="1033271" y="3040380"/>
+            <a:ext cx="1828799" cy="1143000"/>
+          </a:xfrm>
+          <a:prstGeom prst="rect">
+            <a:avLst/>
+          </a:prstGeom>
+          <a:solidFill>
+            <a:srgbClr val="FFFFFF"/>
+          </a:solidFill>
+          <a:ln w="12700">
+            <a:solidFill>
+              <a:srgbClr val="A0A0A0"/>
+            </a:solidFill>
+          </a:ln>
+        </p:spPr>
+        <p:style>
+          <a:lnRef idx="1">
+            <a:schemeClr val="accent1"/>
+          </a:lnRef>
+          <a:fillRef idx="3">
+            <a:schemeClr val="accent1"/>
+          </a:fillRef>
+          <a:effectRef idx="2">
+            <a:schemeClr val="accent1"/>
+          </a:effectRef>
+          <a:fontRef idx="minor">
+            <a:schemeClr val="lt1"/>
+          </a:fontRef>
+        </p:style>
+        <p:txBody>
+          <a:bodyPr rtlCol="0" anchor="ctr"/>
+          <a:lstStyle/>
+          <a:p>
+            <a:pPr algn="ctr"/>
+          </a:p>
+        </p:txBody>
+      </p:sp>
+      <p:sp>
+        <p:nvSpPr>
+          <p:cNvPr id="6" name="Rectangle 5"/>
+          <p:cNvSpPr/>
+          <p:nvPr/>
+        </p:nvSpPr>
+        <p:spPr>
+          <a:xfrm>
+            <a:off x="3456432" y="3040380"/>
+            <a:ext cx="1828799" cy="1143000"/>
+          </a:xfrm>
+          <a:prstGeom prst="rect">
+            <a:avLst/>
+          </a:prstGeom>
+          <a:solidFill>
+            <a:srgbClr val="FFFFFF"/>
+          </a:solidFill>
+          <a:ln w="12700">
+            <a:solidFill>
+              <a:srgbClr val="A0A0A0"/>
+            </a:solidFill>
+          </a:ln>
+        </p:spPr>
+        <p:style>
+          <a:lnRef idx="1">
+            <a:schemeClr val="accent1"/>
+          </a:lnRef>
+          <a:fillRef idx="3">
+            <a:schemeClr val="accent1"/>
+          </a:fillRef>
+          <a:effectRef idx="2">
+            <a:schemeClr val="accent1"/>
+          </a:effectRef>
+          <a:fontRef idx="minor">
+            <a:schemeClr val="lt1"/>
+          </a:fontRef>
+        </p:style>
+        <p:txBody>
+          <a:bodyPr rtlCol="0" anchor="ctr"/>
+          <a:lstStyle/>
+          <a:p>
+            <a:pPr algn="ctr"/>
+          </a:p>
+        </p:txBody>
+      </p:sp>
+      <p:sp>
+        <p:nvSpPr>
+          <p:cNvPr id="7" name="TextBox 6"/>
+          <p:cNvSpPr txBox="1"/>
+          <p:nvPr/>
+        </p:nvSpPr>
+        <p:spPr>
+          <a:xfrm>
+            <a:off x="1124712" y="3204972"/>
+            <a:ext cx="1645919" cy="320040"/>
+          </a:xfrm>
+          <a:prstGeom prst="rect">
+            <a:avLst/>
+          </a:prstGeom>
+          <a:noFill/>
+        </p:spPr>
+        <p:txBody>
+          <a:bodyPr wrap="square">
+            <a:spAutoFit/>
+          </a:bodyPr>
+          <a:lstStyle/>
+          <a:p>
+            <a:pPr algn="ctr"/>
+            <a:r>
+              <a:rPr sz="1800" b="1" u="none">
+                <a:solidFill>
+                  <a:srgbClr val="000000"/>
+                </a:solidFill>
+                <a:latin typeface="맑은 고딕"/>
+              </a:rPr>
+              <a:t>안전한 금융</a:t>
+            </a:r>
+          </a:p>
+        </p:txBody>
+      </p:sp>
+      <p:sp>
+        <p:nvSpPr>
+          <p:cNvPr id="8" name="TextBox 7"/>
+          <p:cNvSpPr txBox="1"/>
+          <p:nvPr/>
+        </p:nvSpPr>
+        <p:spPr>
+          <a:xfrm>
+            <a:off x="1124712" y="3607308"/>
+            <a:ext cx="1645919" cy="274320"/>
+          </a:xfrm>
+          <a:prstGeom prst="rect">
+            <a:avLst/>
+          </a:prstGeom>
+          <a:noFill/>
+        </p:spPr>
+        <p:txBody>
+          <a:bodyPr wrap="square">
+            <a:spAutoFit/>
+          </a:bodyPr>
+          <a:lstStyle/>
+          <a:p>
+            <a:pPr algn="ctr"/>
+            <a:r>
+              <a:rPr sz="1500" b="0" u="none">
+                <a:solidFill>
+                  <a:srgbClr val="373737"/>
+                </a:solidFill>
+                <a:latin typeface="맑은 고딕"/>
+              </a:rPr>
+              <a:t>담보 / 단기</a:t>
+            </a:r>
+          </a:p>
+        </p:txBody>
+      </p:sp>
+      <p:sp>
+        <p:nvSpPr>
+          <p:cNvPr id="9" name="TextBox 8"/>
+          <p:cNvSpPr txBox="1"/>
+          <p:nvPr/>
+        </p:nvSpPr>
+        <p:spPr>
+          <a:xfrm>
+            <a:off x="3547872" y="3204972"/>
+            <a:ext cx="1645919" cy="320040"/>
+          </a:xfrm>
+          <a:prstGeom prst="rect">
+            <a:avLst/>
+          </a:prstGeom>
+          <a:noFill/>
+        </p:spPr>
+        <p:txBody>
+          <a:bodyPr wrap="square">
+            <a:spAutoFit/>
+          </a:bodyPr>
+          <a:lstStyle/>
+          <a:p>
+            <a:pPr algn="ctr"/>
+            <a:r>
+              <a:rPr sz="1800" b="1" u="none">
+                <a:solidFill>
+                  <a:srgbClr val="000000"/>
+                </a:solidFill>
+                <a:latin typeface="맑은 고딕"/>
+              </a:rPr>
+              <a:t>성장 금융</a:t>
+            </a:r>
+          </a:p>
+        </p:txBody>
+      </p:sp>
+      <p:sp>
+        <p:nvSpPr>
+          <p:cNvPr id="10" name="TextBox 9"/>
+          <p:cNvSpPr txBox="1"/>
+          <p:nvPr/>
+        </p:nvSpPr>
+        <p:spPr>
+          <a:xfrm>
+            <a:off x="3547872" y="3607308"/>
+            <a:ext cx="1645919" cy="274320"/>
+          </a:xfrm>
+          <a:prstGeom prst="rect">
+            <a:avLst/>
+          </a:prstGeom>
+          <a:noFill/>
+        </p:spPr>
+        <p:txBody>
+          <a:bodyPr wrap="square">
+            <a:spAutoFit/>
+          </a:bodyPr>
+          <a:lstStyle/>
+          <a:p>
+            <a:pPr algn="ctr"/>
+            <a:r>
+              <a:rPr sz="1500" b="0" u="none">
+                <a:solidFill>
+                  <a:srgbClr val="373737"/>
+                </a:solidFill>
+                <a:latin typeface="맑은 고딕"/>
+              </a:rPr>
+              <a:t>장기 / 위험분담</a:t>
+            </a:r>
+          </a:p>
+        </p:txBody>
+      </p:sp>
+      <p:sp>
+        <p:nvSpPr>
+          <p:cNvPr id="11" name="TextBox 10"/>
+          <p:cNvSpPr txBox="1"/>
+          <p:nvPr/>
+        </p:nvSpPr>
+        <p:spPr>
+          <a:xfrm>
+            <a:off x="2930652" y="3387852"/>
+            <a:ext cx="457200" cy="347472"/>
+          </a:xfrm>
+          <a:prstGeom prst="rect">
+            <a:avLst/>
+          </a:prstGeom>
+          <a:noFill/>
+        </p:spPr>
+        <p:txBody>
+          <a:bodyPr wrap="square">
+            <a:spAutoFit/>
+          </a:bodyPr>
+          <a:lstStyle/>
+          <a:p>
+            <a:pPr algn="ctr"/>
+            <a:r>
+              <a:rPr sz="2200" b="1" u="none">
+                <a:solidFill>
+                  <a:srgbClr val="373737"/>
+                </a:solidFill>
+                <a:latin typeface="맑은 고딕"/>
+              </a:rPr>
+              <a:t>→</a:t>
+            </a:r>
+          </a:p>
+        </p:txBody>
+      </p:sp>
+      <p:sp>
+        <p:nvSpPr>
+          <p:cNvPr id="12" name="TextBox 11"/>
+          <p:cNvSpPr txBox="1"/>
+          <p:nvPr/>
+        </p:nvSpPr>
+        <p:spPr>
+          <a:xfrm>
+            <a:off x="5989320" y="2103120"/>
+            <a:ext cx="5303520" cy="2926080"/>
+          </a:xfrm>
+          <a:prstGeom prst="rect">
+            <a:avLst/>
+          </a:prstGeom>
+          <a:noFill/>
+        </p:spPr>
+        <p:txBody>
+          <a:bodyPr wrap="square" anchor="ctr">
+            <a:spAutoFit/>
+          </a:bodyPr>
+          <a:lstStyle/>
+          <a:p>
+            <a:pPr>
+              <a:lnSpc>
+                <a:spcPct val="150000"/>
+              </a:lnSpc>
+              <a:spcAft>
+                <a:spcPts val="800"/>
+              </a:spcAft>
+            </a:pPr>
+            <a:r>
+              <a:rPr sz="2800" b="0" u="none">
+                <a:solidFill>
+                  <a:srgbClr val="000000"/>
+                </a:solidFill>
+                <a:latin typeface="맑은 고딕"/>
+              </a:rPr>
+              <a:t>성장의 과실을 함께 나누자는 말은 듣기 좋다.</a:t>
+            </a:r>
+          </a:p>
+          <a:p>
+            <a:pPr>
+              <a:lnSpc>
+                <a:spcPct val="150000"/>
+              </a:lnSpc>
+              <a:spcAft>
+                <a:spcPts val="800"/>
+              </a:spcAft>
+            </a:pPr>
+          </a:p>
+        </p:txBody>
+      </p:sp>
+    </p:spTree>
+  </p:cSld>
+  <p:clrMapOvr>
+    <a:masterClrMapping/>
+  </p:clrMapOvr>
+</p:sld>
+</file>
+
+<file path=ppt/slides/slide19.xml><?xml version="1.0" encoding="utf-8"?>
+<p:sld xmlns:a="http://schemas.openxmlformats.org/drawingml/2006/main" xmlns:p="http://schemas.openxmlformats.org/presentationml/2006/main" xmlns:r="http://schemas.openxmlformats.org/officeDocument/2006/relationships">
+  <p:cSld>
+    <p:bg>
+      <p:bgPr>
+        <a:solidFill>
+          <a:srgbClr val="F8F9FA"/>
+        </a:solidFill>
+        <a:effectLst/>
+      </p:bgPr>
+    </p:bg>
+    <p:spTree>
+      <p:nvGrpSpPr>
+        <p:cNvPr id="1" name=""/>
+        <p:cNvGrpSpPr/>
+        <p:nvPr/>
+      </p:nvGrpSpPr>
+      <p:grpSpPr/>
+      <p:sp>
+        <p:nvSpPr>
+          <p:cNvPr id="2" name="TextBox 1"/>
+          <p:cNvSpPr txBox="1"/>
+          <p:nvPr/>
+        </p:nvSpPr>
+        <p:spPr>
+          <a:xfrm>
+            <a:off x="843991" y="1273759"/>
+            <a:ext cx="10752429" cy="2424988"/>
+          </a:xfrm>
+          <a:prstGeom prst="rect">
+            <a:avLst/>
+          </a:prstGeom>
+          <a:noFill/>
+        </p:spPr>
+        <p:txBody>
+          <a:bodyPr wrap="square">
+            <a:spAutoFit/>
+          </a:bodyPr>
+          <a:lstStyle/>
+          <a:p>
+            <a:r>
+              <a:rPr sz="5400" b="1" u="none">
+                <a:solidFill>
+                  <a:srgbClr val="181C23"/>
+                </a:solidFill>
+                <a:latin typeface="맑은 고딕"/>
+              </a:rPr>
+              <a:t>금융권은 어디까지 위험을 나눌 수 있는가</a:t>
+            </a:r>
+          </a:p>
+        </p:txBody>
+      </p:sp>
+    </p:spTree>
+  </p:cSld>
+  <p:clrMapOvr>
+    <a:masterClrMapping/>
+  </p:clrMapOvr>
+</p:sld>
+</file>
+
+<file path=ppt/slides/slide2.xml><?xml version="1.0" encoding="utf-8"?>
+<p:sld xmlns:a="http://schemas.openxmlformats.org/drawingml/2006/main" xmlns:p="http://schemas.openxmlformats.org/presentationml/2006/main" xmlns:r="http://schemas.openxmlformats.org/officeDocument/2006/relationships">
+  <p:cSld>
+    <p:bg>
+      <p:bgPr>
+        <a:solidFill>
+          <a:srgbClr val="F8F9FA"/>
+        </a:solidFill>
+        <a:effectLst/>
+      </p:bgPr>
+    </p:bg>
+    <p:spTree>
+      <p:nvGrpSpPr>
+        <p:cNvPr id="1" name=""/>
+        <p:cNvGrpSpPr/>
+        <p:nvPr/>
+      </p:nvGrpSpPr>
+      <p:grpSpPr/>
+      <p:sp>
+        <p:nvSpPr>
+          <p:cNvPr id="2" name="TextBox 1"/>
+          <p:cNvSpPr txBox="1"/>
+          <p:nvPr/>
+        </p:nvSpPr>
+        <p:spPr>
+          <a:xfrm>
+            <a:off x="572414" y="356616"/>
+            <a:ext cx="11192256" cy="521207"/>
+          </a:xfrm>
+          <a:prstGeom prst="rect">
+            <a:avLst/>
+          </a:prstGeom>
+          <a:noFill/>
+        </p:spPr>
+        <p:txBody>
+          <a:bodyPr wrap="square">
+            <a:spAutoFit/>
+          </a:bodyPr>
+          <a:lstStyle/>
+          <a:p>
+            <a:r>
+              <a:rPr sz="2800" b="0" u="none">
+                <a:solidFill>
+                  <a:srgbClr val="FF0000"/>
+                </a:solidFill>
+                <a:latin typeface="맑은 고딕"/>
+              </a:rPr>
+              <a:t>금융위원장이 던진 질문 하나</a:t>
+            </a:r>
+          </a:p>
+        </p:txBody>
+      </p:sp>
+      <p:sp>
+        <p:nvSpPr>
+          <p:cNvPr id="3" name="TextBox 2"/>
+          <p:cNvSpPr txBox="1"/>
+          <p:nvPr/>
+        </p:nvSpPr>
+        <p:spPr>
+          <a:xfrm>
+            <a:off x="5989320" y="1874519"/>
+            <a:ext cx="5303520" cy="2651760"/>
+          </a:xfrm>
+          <a:prstGeom prst="rect">
+            <a:avLst/>
+          </a:prstGeom>
+          <a:noFill/>
+        </p:spPr>
+        <p:txBody>
+          <a:bodyPr wrap="square" anchor="ctr">
+            <a:spAutoFit/>
+          </a:bodyPr>
+          <a:lstStyle/>
+          <a:p>
+            <a:pPr>
+              <a:lnSpc>
+                <a:spcPct val="150000"/>
+              </a:lnSpc>
+              <a:spcAft>
+                <a:spcPts val="800"/>
+              </a:spcAft>
+            </a:pPr>
+            <a:r>
+              <a:rPr sz="2800" b="0" u="none">
+                <a:solidFill>
+                  <a:srgbClr val="000000"/>
+                </a:solidFill>
+                <a:latin typeface="맑은 고딕"/>
+              </a:rPr>
+              <a:t>“담보 및 단기수익 중심 금융 경쟁은 앞서가기 어렵다”는 문제…</a:t>
             </a:r>
           </a:p>
         </p:txBody>
@@ -12759,13 +15261,13 @@
           <a:p>
             <a:pPr algn="ctr"/>
             <a:r>
-              <a:rPr sz="1800" b="0">
+              <a:rPr sz="1200" b="0">
                 <a:solidFill>
                   <a:srgbClr val="0070C0"/>
                 </a:solidFill>
                 <a:latin typeface="맑은 고딕"/>
               </a:rPr>
-              <a:t>[기사 인용]</a:t>
+              <a:t>[출처]</a:t>
             </a:r>
           </a:p>
           <a:p>
@@ -12775,13 +15277,13 @@
               </a:spcBef>
             </a:pPr>
             <a:r>
-              <a:rPr sz="1800" b="1">
+              <a:rPr sz="2100" b="1">
                 <a:solidFill>
                   <a:srgbClr val="000000"/>
                 </a:solidFill>
                 <a:latin typeface="맑은 고딕"/>
               </a:rPr>
-              <a:t>정책브리핑</a:t>
+              <a:t>News</a:t>
             </a:r>
           </a:p>
           <a:p>
@@ -12793,11 +15295,11 @@
             <a:r>
               <a:rPr sz="1400" b="0">
                 <a:solidFill>
-                  <a:srgbClr val="566070"/>
+                  <a:srgbClr val="373737"/>
                 </a:solidFill>
                 <a:latin typeface="맑은 고딕"/>
               </a:rPr>
-              <a:t>위험을 나눈다는 말은 손실 가능성도 나눈다는 뜻이다</a:t>
+              <a:t>연합인포맥스 후보 기사 + 금융위원회 공식자료. 발언 원문 맥락은 방송 전…</a:t>
             </a:r>
           </a:p>
         </p:txBody>
@@ -12810,7 +15312,7 @@
 </p:sld>
 </file>
 
-<file path=ppt/slides/slide15.xml><?xml version="1.0" encoding="utf-8"?>
+<file path=ppt/slides/slide20.xml><?xml version="1.0" encoding="utf-8"?>
 <p:sld xmlns:a="http://schemas.openxmlformats.org/drawingml/2006/main" xmlns:p="http://schemas.openxmlformats.org/presentationml/2006/main" xmlns:r="http://schemas.openxmlformats.org/officeDocument/2006/relationships">
   <p:cSld>
     <p:bg>
@@ -12830,138 +15332,7 @@
       <p:grpSpPr/>
       <p:sp>
         <p:nvSpPr>
-          <p:cNvPr id="2" name="Rectangle 1"/>
-          <p:cNvSpPr/>
-          <p:nvPr/>
-        </p:nvSpPr>
-        <p:spPr>
-          <a:xfrm>
-            <a:off x="685800" y="1508760"/>
-            <a:ext cx="4800600" cy="3794760"/>
-          </a:xfrm>
-          <a:prstGeom prst="rect">
-            <a:avLst/>
-          </a:prstGeom>
-          <a:solidFill>
-            <a:srgbClr val="F5F5F5"/>
-          </a:solidFill>
-          <a:ln w="12700">
-            <a:solidFill>
-              <a:srgbClr val="BEBEBE"/>
-            </a:solidFill>
-          </a:ln>
-        </p:spPr>
-        <p:style>
-          <a:lnRef idx="1">
-            <a:schemeClr val="accent1"/>
-          </a:lnRef>
-          <a:fillRef idx="3">
-            <a:schemeClr val="accent1"/>
-          </a:fillRef>
-          <a:effectRef idx="2">
-            <a:schemeClr val="accent1"/>
-          </a:effectRef>
-          <a:fontRef idx="minor">
-            <a:schemeClr val="lt1"/>
-          </a:fontRef>
-        </p:style>
-        <p:txBody>
-          <a:bodyPr rtlCol="0" anchor="ctr" wrap="square"/>
-          <a:lstStyle/>
-          <a:p>
-            <a:pPr algn="ctr"/>
-            <a:r>
-              <a:rPr sz="1800" b="0">
-                <a:solidFill>
-                  <a:srgbClr val="0070C0"/>
-                </a:solidFill>
-                <a:latin typeface="맑은 고딕"/>
-              </a:rPr>
-              <a:t>[기사 인용]</a:t>
-            </a:r>
-          </a:p>
-          <a:p>
-            <a:pPr algn="ctr">
-              <a:spcBef>
-                <a:spcPts val="800"/>
-              </a:spcBef>
-            </a:pPr>
-            <a:r>
-              <a:rPr sz="1800" b="1">
-                <a:solidFill>
-                  <a:srgbClr val="000000"/>
-                </a:solidFill>
-                <a:latin typeface="맑은 고딕"/>
-              </a:rPr>
-              <a:t>정책브리핑</a:t>
-            </a:r>
-          </a:p>
-          <a:p>
-            <a:pPr algn="ctr">
-              <a:spcBef>
-                <a:spcPts val="400"/>
-              </a:spcBef>
-            </a:pPr>
-            <a:r>
-              <a:rPr sz="1400" b="0">
-                <a:solidFill>
-                  <a:srgbClr val="566070"/>
-                </a:solidFill>
-                <a:latin typeface="맑은 고딕"/>
-              </a:rPr>
-              <a:t>정책금융의 어려움은 “누가 먼저 잃을 것인가”다</a:t>
-            </a:r>
-          </a:p>
-        </p:txBody>
-      </p:sp>
-      <p:sp>
-        <p:nvSpPr>
-          <p:cNvPr id="3" name="Rectangle 2"/>
-          <p:cNvSpPr/>
-          <p:nvPr/>
-        </p:nvSpPr>
-        <p:spPr>
-          <a:xfrm>
-            <a:off x="5806440" y="731520"/>
-            <a:ext cx="6126479" cy="6446520"/>
-          </a:xfrm>
-          <a:prstGeom prst="rect">
-            <a:avLst/>
-          </a:prstGeom>
-          <a:solidFill>
-            <a:srgbClr val="FFFFFF"/>
-          </a:solidFill>
-          <a:ln w="15240">
-            <a:solidFill>
-              <a:srgbClr val="D2D8E0"/>
-            </a:solidFill>
-          </a:ln>
-        </p:spPr>
-        <p:style>
-          <a:lnRef idx="1">
-            <a:schemeClr val="accent1"/>
-          </a:lnRef>
-          <a:fillRef idx="3">
-            <a:schemeClr val="accent1"/>
-          </a:fillRef>
-          <a:effectRef idx="2">
-            <a:schemeClr val="accent1"/>
-          </a:effectRef>
-          <a:fontRef idx="minor">
-            <a:schemeClr val="lt1"/>
-          </a:fontRef>
-        </p:style>
-        <p:txBody>
-          <a:bodyPr rtlCol="0" anchor="ctr"/>
-          <a:lstStyle/>
-          <a:p>
-            <a:pPr algn="ctr"/>
-          </a:p>
-        </p:txBody>
-      </p:sp>
-      <p:sp>
-        <p:nvSpPr>
-          <p:cNvPr id="4" name="TextBox 3"/>
+          <p:cNvPr id="2" name="TextBox 1"/>
           <p:cNvSpPr txBox="1"/>
           <p:nvPr/>
         </p:nvSpPr>
@@ -12988,56 +15359,21 @@
                 </a:solidFill>
                 <a:latin typeface="맑은 고딕"/>
               </a:rPr>
-              <a:t>정책금융의 어려움은 “누가 먼저 잃을 것인가”다</a:t>
-            </a:r>
-          </a:p>
-        </p:txBody>
-      </p:sp>
-      <p:sp>
-        <p:nvSpPr>
-          <p:cNvPr id="5" name="TextBox 4"/>
+              <a:t>금융권에 “성장에 베팅하라”고 말하는 순간 생기는 문제</a:t>
+            </a:r>
+          </a:p>
+        </p:txBody>
+      </p:sp>
+      <p:sp>
+        <p:nvSpPr>
+          <p:cNvPr id="3" name="TextBox 2"/>
           <p:cNvSpPr txBox="1"/>
           <p:nvPr/>
         </p:nvSpPr>
         <p:spPr>
           <a:xfrm>
-            <a:off x="8321040" y="621792"/>
-            <a:ext cx="2971800" cy="292608"/>
-          </a:xfrm>
-          <a:prstGeom prst="rect">
-            <a:avLst/>
-          </a:prstGeom>
-          <a:noFill/>
-        </p:spPr>
-        <p:txBody>
-          <a:bodyPr wrap="square">
-            <a:spAutoFit/>
-          </a:bodyPr>
-          <a:lstStyle/>
-          <a:p>
-            <a:pPr algn="r"/>
-            <a:r>
-              <a:rPr sz="1600" b="1" u="none">
-                <a:solidFill>
-                  <a:srgbClr val="000000"/>
-                </a:solidFill>
-                <a:latin typeface="맑은 고딕"/>
-              </a:rPr>
-              <a:t>www.korea.kr</a:t>
-            </a:r>
-          </a:p>
-        </p:txBody>
-      </p:sp>
-      <p:sp>
-        <p:nvSpPr>
-          <p:cNvPr id="6" name="TextBox 5"/>
-          <p:cNvSpPr txBox="1"/>
-          <p:nvPr/>
-        </p:nvSpPr>
-        <p:spPr>
-          <a:xfrm>
-            <a:off x="5806440" y="1965960"/>
-            <a:ext cx="5577840" cy="2468880"/>
+            <a:off x="5989320" y="1208836"/>
+            <a:ext cx="5394960" cy="1302105"/>
           </a:xfrm>
           <a:prstGeom prst="rect">
             <a:avLst/>
@@ -13065,7 +15401,7 @@
                 </a:solidFill>
                 <a:latin typeface="맑은 고딕"/>
               </a:rPr>
-              <a:t>정책금융의 어려움은 “돈을 넣을 것인가”보다 “손실이 나면 누가 먼저 감당할 것인가”다.</a:t>
+              <a:t>금융권에 성장산업 투자를 요구하면 곧바로 건전성 문제가 따라온다.</a:t>
             </a:r>
           </a:p>
           <a:p>
@@ -13084,93 +15420,14 @@
                 </a:solidFill>
                 <a:latin typeface="맑은 고딕"/>
               </a:rPr>
-              <a:t>공식자료는 후순위 재정 보강을 설명하지만, 반대 관점은 손실 보전과 관제상품화 논란을 제기한다.</a:t>
-            </a:r>
-          </a:p>
-          <a:p>
-            <a:pPr>
-              <a:lnSpc>
-                <a:spcPct val="150000"/>
-              </a:lnSpc>
-              <a:spcAft>
-                <a:spcPts val="800"/>
-              </a:spcAft>
-            </a:pPr>
-            <a:r>
-              <a:rPr sz="2800" b="0" u="none">
-                <a:solidFill>
-                  <a:srgbClr val="000000"/>
-                </a:solidFill>
-                <a:latin typeface="맑은 고딕"/>
-              </a:rPr>
-              <a:t>이 둘을 같이 봐야 정책금융 논쟁이 단순 찬반으로 흐르지 않는다.</a:t>
-            </a:r>
-          </a:p>
-        </p:txBody>
-      </p:sp>
-    </p:spTree>
-  </p:cSld>
-  <p:clrMapOvr>
-    <a:masterClrMapping/>
-  </p:clrMapOvr>
-</p:sld>
-</file>
-
-<file path=ppt/slides/slide16.xml><?xml version="1.0" encoding="utf-8"?>
-<p:sld xmlns:a="http://schemas.openxmlformats.org/drawingml/2006/main" xmlns:p="http://schemas.openxmlformats.org/presentationml/2006/main" xmlns:r="http://schemas.openxmlformats.org/officeDocument/2006/relationships">
-  <p:cSld>
-    <p:bg>
-      <p:bgPr>
-        <a:solidFill>
-          <a:srgbClr val="F8F9FA"/>
-        </a:solidFill>
-        <a:effectLst/>
-      </p:bgPr>
-    </p:bg>
-    <p:spTree>
-      <p:nvGrpSpPr>
-        <p:cNvPr id="1" name=""/>
-        <p:cNvGrpSpPr/>
-        <p:nvPr/>
-      </p:nvGrpSpPr>
-      <p:grpSpPr/>
-      <p:sp>
-        <p:nvSpPr>
-          <p:cNvPr id="2" name="TextBox 1"/>
-          <p:cNvSpPr txBox="1"/>
-          <p:nvPr/>
-        </p:nvSpPr>
-        <p:spPr>
-          <a:xfrm>
-            <a:off x="572414" y="356616"/>
-            <a:ext cx="11192256" cy="521207"/>
-          </a:xfrm>
-          <a:prstGeom prst="rect">
-            <a:avLst/>
-          </a:prstGeom>
-          <a:noFill/>
-        </p:spPr>
-        <p:txBody>
-          <a:bodyPr wrap="square">
-            <a:spAutoFit/>
-          </a:bodyPr>
-          <a:lstStyle/>
-          <a:p>
-            <a:r>
-              <a:rPr sz="2800" b="0" u="none">
-                <a:solidFill>
-                  <a:srgbClr val="FF0000"/>
-                </a:solidFill>
-                <a:latin typeface="맑은 고딕"/>
-              </a:rPr>
-              <a:t>성장산업을 돕는 것과 특정 기업을 밀어주는 것은 다르다</a:t>
-            </a:r>
-          </a:p>
-        </p:txBody>
-      </p:sp>
-      <p:sp>
-        <p:nvSpPr>
-          <p:cNvPr id="3" name="Rectangle 2"/>
+              <a:t>위험가중자산이 커지면 자본 부담도 커질 수 있고</a:t>
+            </a:r>
+          </a:p>
+        </p:txBody>
+      </p:sp>
+      <p:sp>
+        <p:nvSpPr>
+          <p:cNvPr id="4" name="Rectangle 3"/>
           <p:cNvSpPr/>
           <p:nvPr/>
         </p:nvSpPr>
@@ -13211,74 +15468,45 @@
           <a:p>
             <a:pPr algn="ctr"/>
             <a:r>
-              <a:rPr sz="1800" b="0">
+              <a:rPr sz="1200" b="0">
                 <a:solidFill>
                   <a:srgbClr val="0070C0"/>
                 </a:solidFill>
                 <a:latin typeface="맑은 고딕"/>
               </a:rPr>
-              <a:t>[도식]</a:t>
-            </a:r>
-          </a:p>
-        </p:txBody>
-      </p:sp>
-      <p:sp>
-        <p:nvSpPr>
-          <p:cNvPr id="4" name="TextBox 3"/>
-          <p:cNvSpPr txBox="1"/>
-          <p:nvPr/>
-        </p:nvSpPr>
-        <p:spPr>
-          <a:xfrm>
-            <a:off x="5989320" y="1508760"/>
-            <a:ext cx="5303520" cy="3337560"/>
-          </a:xfrm>
-          <a:prstGeom prst="rect">
-            <a:avLst/>
-          </a:prstGeom>
-          <a:noFill/>
-        </p:spPr>
-        <p:txBody>
-          <a:bodyPr wrap="square" anchor="ctr">
-            <a:spAutoFit/>
-          </a:bodyPr>
-          <a:lstStyle/>
-          <a:p>
-            <a:pPr>
-              <a:lnSpc>
-                <a:spcPct val="150000"/>
-              </a:lnSpc>
-              <a:spcAft>
+              <a:t>[출처]</a:t>
+            </a:r>
+          </a:p>
+          <a:p>
+            <a:pPr algn="ctr">
+              <a:spcBef>
                 <a:spcPts val="800"/>
-              </a:spcAft>
+              </a:spcBef>
             </a:pPr>
             <a:r>
-              <a:rPr sz="2800" b="0" u="none">
+              <a:rPr sz="2100" b="1">
                 <a:solidFill>
                   <a:srgbClr val="000000"/>
                 </a:solidFill>
                 <a:latin typeface="맑은 고딕"/>
               </a:rPr>
-              <a:t>공식자료는 AI, 반도체, 이차전지 등 첨단전략산업을 넓은 지원 대상으로 제시한다.</a:t>
-            </a:r>
-          </a:p>
-          <a:p>
-            <a:pPr>
-              <a:lnSpc>
-                <a:spcPct val="150000"/>
-              </a:lnSpc>
-              <a:spcAft>
-                <a:spcPts val="800"/>
-              </a:spcAft>
+              <a:t>BIS</a:t>
+            </a:r>
+          </a:p>
+          <a:p>
+            <a:pPr algn="ctr">
+              <a:spcBef>
+                <a:spcPts val="400"/>
+              </a:spcBef>
             </a:pPr>
             <a:r>
-              <a:rPr sz="2800" b="0" u="none">
+              <a:rPr sz="1400" b="0">
                 <a:solidFill>
-                  <a:srgbClr val="000000"/>
+                  <a:srgbClr val="373737"/>
                 </a:solidFill>
                 <a:latin typeface="맑은 고딕"/>
               </a:rPr>
-              <a:t>하지만 방송에서는 이것이 특정 기업 성공 보장이나 특정 상품 추천처럼 들리면 안 된다.</a:t>
+              <a:t>Basel III + 국내 인내자본 논의. 국내 감독자료 추가 확인 필요</a:t>
             </a:r>
           </a:p>
         </p:txBody>
@@ -13291,7 +15519,7 @@
 </p:sld>
 </file>
 
-<file path=ppt/slides/slide17.xml><?xml version="1.0" encoding="utf-8"?>
+<file path=ppt/slides/slide21.xml><?xml version="1.0" encoding="utf-8"?>
 <p:sld xmlns:a="http://schemas.openxmlformats.org/drawingml/2006/main" xmlns:p="http://schemas.openxmlformats.org/presentationml/2006/main" xmlns:r="http://schemas.openxmlformats.org/officeDocument/2006/relationships">
   <p:cSld>
     <p:bg>
@@ -13338,7 +15566,472 @@
                 </a:solidFill>
                 <a:latin typeface="맑은 고딕"/>
               </a:rPr>
-              <a:t>반대쪽 질문도 있다: 그럼 아무도 위험을 안 지면 어떻게 하나</a:t>
+              <a:t>투자 이야기로 들리지 않게 조심해야 한다</a:t>
+            </a:r>
+          </a:p>
+        </p:txBody>
+      </p:sp>
+      <p:sp>
+        <p:nvSpPr>
+          <p:cNvPr id="3" name="Rectangle 2"/>
+          <p:cNvSpPr/>
+          <p:nvPr/>
+        </p:nvSpPr>
+        <p:spPr>
+          <a:xfrm>
+            <a:off x="713232" y="1417320"/>
+            <a:ext cx="4892040" cy="4114800"/>
+          </a:xfrm>
+          <a:prstGeom prst="rect">
+            <a:avLst/>
+          </a:prstGeom>
+          <a:solidFill>
+            <a:srgbClr val="F8F8F8"/>
+          </a:solidFill>
+          <a:ln w="12700">
+            <a:solidFill>
+              <a:srgbClr val="BEBEBE"/>
+            </a:solidFill>
+          </a:ln>
+        </p:spPr>
+        <p:style>
+          <a:lnRef idx="1">
+            <a:schemeClr val="accent1"/>
+          </a:lnRef>
+          <a:fillRef idx="3">
+            <a:schemeClr val="accent1"/>
+          </a:fillRef>
+          <a:effectRef idx="2">
+            <a:schemeClr val="accent1"/>
+          </a:effectRef>
+          <a:fontRef idx="minor">
+            <a:schemeClr val="lt1"/>
+          </a:fontRef>
+        </p:style>
+        <p:txBody>
+          <a:bodyPr rtlCol="0" anchor="ctr"/>
+          <a:lstStyle/>
+          <a:p>
+            <a:pPr algn="ctr"/>
+          </a:p>
+        </p:txBody>
+      </p:sp>
+      <p:sp>
+        <p:nvSpPr>
+          <p:cNvPr id="4" name="TextBox 3"/>
+          <p:cNvSpPr txBox="1"/>
+          <p:nvPr/>
+        </p:nvSpPr>
+        <p:spPr>
+          <a:xfrm>
+            <a:off x="822960" y="1527048"/>
+            <a:ext cx="914400" cy="201168"/>
+          </a:xfrm>
+          <a:prstGeom prst="rect">
+            <a:avLst/>
+          </a:prstGeom>
+          <a:noFill/>
+        </p:spPr>
+        <p:txBody>
+          <a:bodyPr wrap="square">
+            <a:spAutoFit/>
+          </a:bodyPr>
+          <a:lstStyle/>
+          <a:p>
+            <a:r>
+              <a:rPr sz="1200" b="0" u="none">
+                <a:solidFill>
+                  <a:srgbClr val="0070C0"/>
+                </a:solidFill>
+                <a:latin typeface="맑은 고딕"/>
+              </a:rPr>
+              <a:t>[도식]</a:t>
+            </a:r>
+          </a:p>
+        </p:txBody>
+      </p:sp>
+      <p:sp>
+        <p:nvSpPr>
+          <p:cNvPr id="5" name="Rectangle 4"/>
+          <p:cNvSpPr/>
+          <p:nvPr/>
+        </p:nvSpPr>
+        <p:spPr>
+          <a:xfrm>
+            <a:off x="1033271" y="3040380"/>
+            <a:ext cx="1828799" cy="1143000"/>
+          </a:xfrm>
+          <a:prstGeom prst="rect">
+            <a:avLst/>
+          </a:prstGeom>
+          <a:solidFill>
+            <a:srgbClr val="FFFFFF"/>
+          </a:solidFill>
+          <a:ln w="12700">
+            <a:solidFill>
+              <a:srgbClr val="A0A0A0"/>
+            </a:solidFill>
+          </a:ln>
+        </p:spPr>
+        <p:style>
+          <a:lnRef idx="1">
+            <a:schemeClr val="accent1"/>
+          </a:lnRef>
+          <a:fillRef idx="3">
+            <a:schemeClr val="accent1"/>
+          </a:fillRef>
+          <a:effectRef idx="2">
+            <a:schemeClr val="accent1"/>
+          </a:effectRef>
+          <a:fontRef idx="minor">
+            <a:schemeClr val="lt1"/>
+          </a:fontRef>
+        </p:style>
+        <p:txBody>
+          <a:bodyPr rtlCol="0" anchor="ctr"/>
+          <a:lstStyle/>
+          <a:p>
+            <a:pPr algn="ctr"/>
+          </a:p>
+        </p:txBody>
+      </p:sp>
+      <p:sp>
+        <p:nvSpPr>
+          <p:cNvPr id="6" name="Rectangle 5"/>
+          <p:cNvSpPr/>
+          <p:nvPr/>
+        </p:nvSpPr>
+        <p:spPr>
+          <a:xfrm>
+            <a:off x="3456432" y="3040380"/>
+            <a:ext cx="1828799" cy="1143000"/>
+          </a:xfrm>
+          <a:prstGeom prst="rect">
+            <a:avLst/>
+          </a:prstGeom>
+          <a:solidFill>
+            <a:srgbClr val="FFFFFF"/>
+          </a:solidFill>
+          <a:ln w="12700">
+            <a:solidFill>
+              <a:srgbClr val="A0A0A0"/>
+            </a:solidFill>
+          </a:ln>
+        </p:spPr>
+        <p:style>
+          <a:lnRef idx="1">
+            <a:schemeClr val="accent1"/>
+          </a:lnRef>
+          <a:fillRef idx="3">
+            <a:schemeClr val="accent1"/>
+          </a:fillRef>
+          <a:effectRef idx="2">
+            <a:schemeClr val="accent1"/>
+          </a:effectRef>
+          <a:fontRef idx="minor">
+            <a:schemeClr val="lt1"/>
+          </a:fontRef>
+        </p:style>
+        <p:txBody>
+          <a:bodyPr rtlCol="0" anchor="ctr"/>
+          <a:lstStyle/>
+          <a:p>
+            <a:pPr algn="ctr"/>
+          </a:p>
+        </p:txBody>
+      </p:sp>
+      <p:sp>
+        <p:nvSpPr>
+          <p:cNvPr id="7" name="TextBox 6"/>
+          <p:cNvSpPr txBox="1"/>
+          <p:nvPr/>
+        </p:nvSpPr>
+        <p:spPr>
+          <a:xfrm>
+            <a:off x="1124712" y="3204972"/>
+            <a:ext cx="1645919" cy="320040"/>
+          </a:xfrm>
+          <a:prstGeom prst="rect">
+            <a:avLst/>
+          </a:prstGeom>
+          <a:noFill/>
+        </p:spPr>
+        <p:txBody>
+          <a:bodyPr wrap="square">
+            <a:spAutoFit/>
+          </a:bodyPr>
+          <a:lstStyle/>
+          <a:p>
+            <a:pPr algn="ctr"/>
+            <a:r>
+              <a:rPr sz="1800" b="1" u="none">
+                <a:solidFill>
+                  <a:srgbClr val="000000"/>
+                </a:solidFill>
+                <a:latin typeface="맑은 고딕"/>
+              </a:rPr>
+              <a:t>안전한 금융</a:t>
+            </a:r>
+          </a:p>
+        </p:txBody>
+      </p:sp>
+      <p:sp>
+        <p:nvSpPr>
+          <p:cNvPr id="8" name="TextBox 7"/>
+          <p:cNvSpPr txBox="1"/>
+          <p:nvPr/>
+        </p:nvSpPr>
+        <p:spPr>
+          <a:xfrm>
+            <a:off x="1124712" y="3607308"/>
+            <a:ext cx="1645919" cy="274320"/>
+          </a:xfrm>
+          <a:prstGeom prst="rect">
+            <a:avLst/>
+          </a:prstGeom>
+          <a:noFill/>
+        </p:spPr>
+        <p:txBody>
+          <a:bodyPr wrap="square">
+            <a:spAutoFit/>
+          </a:bodyPr>
+          <a:lstStyle/>
+          <a:p>
+            <a:pPr algn="ctr"/>
+            <a:r>
+              <a:rPr sz="1500" b="0" u="none">
+                <a:solidFill>
+                  <a:srgbClr val="373737"/>
+                </a:solidFill>
+                <a:latin typeface="맑은 고딕"/>
+              </a:rPr>
+              <a:t>담보 / 단기</a:t>
+            </a:r>
+          </a:p>
+        </p:txBody>
+      </p:sp>
+      <p:sp>
+        <p:nvSpPr>
+          <p:cNvPr id="9" name="TextBox 8"/>
+          <p:cNvSpPr txBox="1"/>
+          <p:nvPr/>
+        </p:nvSpPr>
+        <p:spPr>
+          <a:xfrm>
+            <a:off x="3547872" y="3204972"/>
+            <a:ext cx="1645919" cy="320040"/>
+          </a:xfrm>
+          <a:prstGeom prst="rect">
+            <a:avLst/>
+          </a:prstGeom>
+          <a:noFill/>
+        </p:spPr>
+        <p:txBody>
+          <a:bodyPr wrap="square">
+            <a:spAutoFit/>
+          </a:bodyPr>
+          <a:lstStyle/>
+          <a:p>
+            <a:pPr algn="ctr"/>
+            <a:r>
+              <a:rPr sz="1800" b="1" u="none">
+                <a:solidFill>
+                  <a:srgbClr val="000000"/>
+                </a:solidFill>
+                <a:latin typeface="맑은 고딕"/>
+              </a:rPr>
+              <a:t>성장 금융</a:t>
+            </a:r>
+          </a:p>
+        </p:txBody>
+      </p:sp>
+      <p:sp>
+        <p:nvSpPr>
+          <p:cNvPr id="10" name="TextBox 9"/>
+          <p:cNvSpPr txBox="1"/>
+          <p:nvPr/>
+        </p:nvSpPr>
+        <p:spPr>
+          <a:xfrm>
+            <a:off x="3547872" y="3607308"/>
+            <a:ext cx="1645919" cy="274320"/>
+          </a:xfrm>
+          <a:prstGeom prst="rect">
+            <a:avLst/>
+          </a:prstGeom>
+          <a:noFill/>
+        </p:spPr>
+        <p:txBody>
+          <a:bodyPr wrap="square">
+            <a:spAutoFit/>
+          </a:bodyPr>
+          <a:lstStyle/>
+          <a:p>
+            <a:pPr algn="ctr"/>
+            <a:r>
+              <a:rPr sz="1500" b="0" u="none">
+                <a:solidFill>
+                  <a:srgbClr val="373737"/>
+                </a:solidFill>
+                <a:latin typeface="맑은 고딕"/>
+              </a:rPr>
+              <a:t>장기 / 위험분담</a:t>
+            </a:r>
+          </a:p>
+        </p:txBody>
+      </p:sp>
+      <p:sp>
+        <p:nvSpPr>
+          <p:cNvPr id="11" name="TextBox 10"/>
+          <p:cNvSpPr txBox="1"/>
+          <p:nvPr/>
+        </p:nvSpPr>
+        <p:spPr>
+          <a:xfrm>
+            <a:off x="2930652" y="3387852"/>
+            <a:ext cx="457200" cy="347472"/>
+          </a:xfrm>
+          <a:prstGeom prst="rect">
+            <a:avLst/>
+          </a:prstGeom>
+          <a:noFill/>
+        </p:spPr>
+        <p:txBody>
+          <a:bodyPr wrap="square">
+            <a:spAutoFit/>
+          </a:bodyPr>
+          <a:lstStyle/>
+          <a:p>
+            <a:pPr algn="ctr"/>
+            <a:r>
+              <a:rPr sz="2200" b="1" u="none">
+                <a:solidFill>
+                  <a:srgbClr val="373737"/>
+                </a:solidFill>
+                <a:latin typeface="맑은 고딕"/>
+              </a:rPr>
+              <a:t>→</a:t>
+            </a:r>
+          </a:p>
+        </p:txBody>
+      </p:sp>
+      <p:sp>
+        <p:nvSpPr>
+          <p:cNvPr id="12" name="TextBox 11"/>
+          <p:cNvSpPr txBox="1"/>
+          <p:nvPr/>
+        </p:nvSpPr>
+        <p:spPr>
+          <a:xfrm>
+            <a:off x="5989320" y="1508760"/>
+            <a:ext cx="5303520" cy="3337560"/>
+          </a:xfrm>
+          <a:prstGeom prst="rect">
+            <a:avLst/>
+          </a:prstGeom>
+          <a:noFill/>
+        </p:spPr>
+        <p:txBody>
+          <a:bodyPr wrap="square" anchor="ctr">
+            <a:spAutoFit/>
+          </a:bodyPr>
+          <a:lstStyle/>
+          <a:p>
+            <a:pPr>
+              <a:lnSpc>
+                <a:spcPct val="150000"/>
+              </a:lnSpc>
+              <a:spcAft>
+                <a:spcPts val="800"/>
+              </a:spcAft>
+            </a:pPr>
+            <a:r>
+              <a:rPr sz="2800" b="0" u="none">
+                <a:solidFill>
+                  <a:srgbClr val="000000"/>
+                </a:solidFill>
+                <a:latin typeface="맑은 고딕"/>
+              </a:rPr>
+              <a:t>이 주제는 곧바로 특정 산업·기업·펀드 투자 판단처럼 보일 수…</a:t>
+            </a:r>
+          </a:p>
+          <a:p>
+            <a:pPr>
+              <a:lnSpc>
+                <a:spcPct val="150000"/>
+              </a:lnSpc>
+              <a:spcAft>
+                <a:spcPts val="800"/>
+              </a:spcAft>
+            </a:pPr>
+            <a:r>
+              <a:rPr sz="2800" b="0" u="none">
+                <a:solidFill>
+                  <a:srgbClr val="000000"/>
+                </a:solidFill>
+                <a:latin typeface="맑은 고딕"/>
+              </a:rPr>
+              <a:t>그래서 수익률</a:t>
+            </a:r>
+          </a:p>
+        </p:txBody>
+      </p:sp>
+    </p:spTree>
+  </p:cSld>
+  <p:clrMapOvr>
+    <a:masterClrMapping/>
+  </p:clrMapOvr>
+</p:sld>
+</file>
+
+<file path=ppt/slides/slide22.xml><?xml version="1.0" encoding="utf-8"?>
+<p:sld xmlns:a="http://schemas.openxmlformats.org/drawingml/2006/main" xmlns:p="http://schemas.openxmlformats.org/presentationml/2006/main" xmlns:r="http://schemas.openxmlformats.org/officeDocument/2006/relationships">
+  <p:cSld>
+    <p:bg>
+      <p:bgPr>
+        <a:solidFill>
+          <a:srgbClr val="F8F9FA"/>
+        </a:solidFill>
+        <a:effectLst/>
+      </p:bgPr>
+    </p:bg>
+    <p:spTree>
+      <p:nvGrpSpPr>
+        <p:cNvPr id="1" name=""/>
+        <p:cNvGrpSpPr/>
+        <p:nvPr/>
+      </p:nvGrpSpPr>
+      <p:grpSpPr/>
+      <p:sp>
+        <p:nvSpPr>
+          <p:cNvPr id="2" name="TextBox 1"/>
+          <p:cNvSpPr txBox="1"/>
+          <p:nvPr/>
+        </p:nvSpPr>
+        <p:spPr>
+          <a:xfrm>
+            <a:off x="572414" y="356616"/>
+            <a:ext cx="11192256" cy="521207"/>
+          </a:xfrm>
+          <a:prstGeom prst="rect">
+            <a:avLst/>
+          </a:prstGeom>
+          <a:noFill/>
+        </p:spPr>
+        <p:txBody>
+          <a:bodyPr wrap="square">
+            <a:spAutoFit/>
+          </a:bodyPr>
+          <a:lstStyle/>
+          <a:p>
+            <a:r>
+              <a:rPr sz="2800" b="0" u="none">
+                <a:solidFill>
+                  <a:srgbClr val="FF0000"/>
+                </a:solidFill>
+                <a:latin typeface="맑은 고딕"/>
+              </a:rPr>
+              <a:t>금융은 위험을 피하는 기술인가, 좋은 위험을 고르는 기술인가</a:t>
             </a:r>
           </a:p>
         </p:txBody>
@@ -13386,13 +16079,45 @@
           <a:p>
             <a:pPr algn="ctr"/>
             <a:r>
-              <a:rPr sz="1800" b="0">
+              <a:rPr sz="1200" b="0">
                 <a:solidFill>
                   <a:srgbClr val="0070C0"/>
                 </a:solidFill>
                 <a:latin typeface="맑은 고딕"/>
               </a:rPr>
-              <a:t>[도식]</a:t>
+              <a:t>[출처]</a:t>
+            </a:r>
+          </a:p>
+          <a:p>
+            <a:pPr algn="ctr">
+              <a:spcBef>
+                <a:spcPts val="800"/>
+              </a:spcBef>
+            </a:pPr>
+            <a:r>
+              <a:rPr sz="2100" b="1">
+                <a:solidFill>
+                  <a:srgbClr val="000000"/>
+                </a:solidFill>
+                <a:latin typeface="맑은 고딕"/>
+              </a:rPr>
+              <a:t>금융위원회</a:t>
+            </a:r>
+          </a:p>
+          <a:p>
+            <a:pPr algn="ctr">
+              <a:spcBef>
+                <a:spcPts val="400"/>
+              </a:spcBef>
+            </a:pPr>
+            <a:r>
+              <a:rPr sz="1400" b="0">
+                <a:solidFill>
+                  <a:srgbClr val="373737"/>
+                </a:solidFill>
+                <a:latin typeface="맑은 고딕"/>
+              </a:rPr>
+              <a:t>정책 찬반이 아니라 위험분담 설계의 질문으로 닫기</a:t>
             </a:r>
           </a:p>
         </p:txBody>
@@ -13405,8 +16130,8 @@
         </p:nvSpPr>
         <p:spPr>
           <a:xfrm>
-            <a:off x="5989320" y="1508760"/>
-            <a:ext cx="5303520" cy="3337560"/>
+            <a:off x="5989320" y="2103120"/>
+            <a:ext cx="5303520" cy="2926080"/>
           </a:xfrm>
           <a:prstGeom prst="rect">
             <a:avLst/>
@@ -13434,7 +16159,7 @@
                 </a:solidFill>
                 <a:latin typeface="맑은 고딕"/>
               </a:rPr>
-              <a:t>반대쪽 질문도 있다. 재정이 위험을 먼저 떠안으면 민간은 얼마나 책임 있게 투자할까.</a:t>
+              <a:t>생산적 금융의 질문은 “정부 정책이 맞다/틀리다”가 아니다.</a:t>
             </a:r>
           </a:p>
           <a:p>
@@ -13453,7 +16178,7 @@
                 </a:solidFill>
                 <a:latin typeface="맑은 고딕"/>
               </a:rPr>
-              <a:t>또 은행과 금융회사는 건전성 규제, 위험가중자산, 예금자 보호 논리 안에서 움직인다.</a:t>
+              <a:t>좋은 위험을 고르는 능력</a:t>
             </a:r>
           </a:p>
         </p:txBody>
@@ -13466,7 +16191,7 @@
 </p:sld>
 </file>
 
-<file path=ppt/slides/slide18.xml><?xml version="1.0" encoding="utf-8"?>
+<file path=ppt/slides/slide23.xml><?xml version="1.0" encoding="utf-8"?>
 <p:sld xmlns:a="http://schemas.openxmlformats.org/drawingml/2006/main" xmlns:p="http://schemas.openxmlformats.org/presentationml/2006/main" xmlns:r="http://schemas.openxmlformats.org/officeDocument/2006/relationships">
   <p:cSld>
     <p:bg>
@@ -13492,6 +16217,248 @@
         </p:nvSpPr>
         <p:spPr>
           <a:xfrm>
+            <a:off x="3495751" y="3058668"/>
+            <a:ext cx="3383280" cy="523036"/>
+          </a:xfrm>
+          <a:prstGeom prst="rect">
+            <a:avLst/>
+          </a:prstGeom>
+          <a:noFill/>
+        </p:spPr>
+        <p:txBody>
+          <a:bodyPr wrap="square">
+            <a:spAutoFit/>
+          </a:bodyPr>
+          <a:lstStyle/>
+          <a:p>
+            <a:r>
+              <a:rPr sz="2800" b="1" u="none">
+                <a:solidFill>
+                  <a:srgbClr val="0070C0"/>
+                </a:solidFill>
+                <a:latin typeface="맑은 고딕"/>
+              </a:rPr>
+              <a:t>[내부 체크리스트] 이 부분은 아직 숫자가 필요하다</a:t>
+            </a:r>
+          </a:p>
+        </p:txBody>
+      </p:sp>
+      <p:sp>
+        <p:nvSpPr>
+          <p:cNvPr id="3" name="TextBox 2"/>
+          <p:cNvSpPr txBox="1"/>
+          <p:nvPr/>
+        </p:nvSpPr>
+        <p:spPr>
+          <a:xfrm>
+            <a:off x="822960" y="3810304"/>
+            <a:ext cx="10424160" cy="4480560"/>
+          </a:xfrm>
+          <a:prstGeom prst="rect">
+            <a:avLst/>
+          </a:prstGeom>
+          <a:noFill/>
+        </p:spPr>
+        <p:txBody>
+          <a:bodyPr wrap="square" anchor="ctr">
+            <a:spAutoFit/>
+          </a:bodyPr>
+          <a:lstStyle/>
+          <a:p>
+            <a:pPr>
+              <a:lnSpc>
+                <a:spcPct val="150000"/>
+              </a:lnSpc>
+              <a:spcAft>
+                <a:spcPts val="800"/>
+              </a:spcAft>
+            </a:pPr>
+            <a:r>
+              <a:rPr sz="2800" b="0" u="none">
+                <a:solidFill>
+                  <a:srgbClr val="0070C0"/>
+                </a:solidFill>
+                <a:latin typeface="맑은 고딕"/>
+              </a:rPr>
+              <a:t>방송 전 숫자 체크리스트: 150조 원 전체 규모</a:t>
+            </a:r>
+          </a:p>
+          <a:p>
+            <a:pPr>
+              <a:lnSpc>
+                <a:spcPct val="150000"/>
+              </a:lnSpc>
+              <a:spcAft>
+                <a:spcPts val="800"/>
+              </a:spcAft>
+            </a:pPr>
+            <a:r>
+              <a:rPr sz="2800" b="0" u="none">
+                <a:solidFill>
+                  <a:srgbClr val="0070C0"/>
+                </a:solidFill>
+                <a:latin typeface="맑은 고딕"/>
+              </a:rPr>
+              <a:t>정책 효과가 아니라 구조를 설명하는 숫자로만 사용한다.</a:t>
+            </a:r>
+          </a:p>
+        </p:txBody>
+      </p:sp>
+    </p:spTree>
+  </p:cSld>
+  <p:clrMapOvr>
+    <a:masterClrMapping/>
+  </p:clrMapOvr>
+</p:sld>
+</file>
+
+<file path=ppt/slides/slide24.xml><?xml version="1.0" encoding="utf-8"?>
+<p:sld xmlns:a="http://schemas.openxmlformats.org/drawingml/2006/main" xmlns:p="http://schemas.openxmlformats.org/presentationml/2006/main" xmlns:r="http://schemas.openxmlformats.org/officeDocument/2006/relationships">
+  <p:cSld>
+    <p:bg>
+      <p:bgPr>
+        <a:solidFill>
+          <a:srgbClr val="F8F9FA"/>
+        </a:solidFill>
+        <a:effectLst/>
+      </p:bgPr>
+    </p:bg>
+    <p:spTree>
+      <p:nvGrpSpPr>
+        <p:cNvPr id="1" name=""/>
+        <p:cNvGrpSpPr/>
+        <p:nvPr/>
+      </p:nvGrpSpPr>
+      <p:grpSpPr/>
+      <p:sp>
+        <p:nvSpPr>
+          <p:cNvPr id="2" name="TextBox 1"/>
+          <p:cNvSpPr txBox="1"/>
+          <p:nvPr/>
+        </p:nvSpPr>
+        <p:spPr>
+          <a:xfrm>
+            <a:off x="3495751" y="3058668"/>
+            <a:ext cx="3383280" cy="523036"/>
+          </a:xfrm>
+          <a:prstGeom prst="rect">
+            <a:avLst/>
+          </a:prstGeom>
+          <a:noFill/>
+        </p:spPr>
+        <p:txBody>
+          <a:bodyPr wrap="square">
+            <a:spAutoFit/>
+          </a:bodyPr>
+          <a:lstStyle/>
+          <a:p>
+            <a:r>
+              <a:rPr sz="2800" b="1" u="none">
+                <a:solidFill>
+                  <a:srgbClr val="0070C0"/>
+                </a:solidFill>
+                <a:latin typeface="맑은 고딕"/>
+              </a:rPr>
+              <a:t>[내부 체크리스트] 방송 전 꼭 채워야 할 자료</a:t>
+            </a:r>
+          </a:p>
+        </p:txBody>
+      </p:sp>
+      <p:sp>
+        <p:nvSpPr>
+          <p:cNvPr id="3" name="TextBox 2"/>
+          <p:cNvSpPr txBox="1"/>
+          <p:nvPr/>
+        </p:nvSpPr>
+        <p:spPr>
+          <a:xfrm>
+            <a:off x="822960" y="3810304"/>
+            <a:ext cx="10424160" cy="4480560"/>
+          </a:xfrm>
+          <a:prstGeom prst="rect">
+            <a:avLst/>
+          </a:prstGeom>
+          <a:noFill/>
+        </p:spPr>
+        <p:txBody>
+          <a:bodyPr wrap="square" anchor="ctr">
+            <a:spAutoFit/>
+          </a:bodyPr>
+          <a:lstStyle/>
+          <a:p>
+            <a:pPr>
+              <a:lnSpc>
+                <a:spcPct val="150000"/>
+              </a:lnSpc>
+              <a:spcAft>
+                <a:spcPts val="800"/>
+              </a:spcAft>
+            </a:pPr>
+            <a:r>
+              <a:rPr sz="2800" b="0" u="none">
+                <a:solidFill>
+                  <a:srgbClr val="0070C0"/>
+                </a:solidFill>
+                <a:latin typeface="맑은 고딕"/>
+              </a:rPr>
+              <a:t>방송 전 꼭 채워야 할 자료: 금융위/산은 공식 원문</a:t>
+            </a:r>
+          </a:p>
+          <a:p>
+            <a:pPr>
+              <a:lnSpc>
+                <a:spcPct val="150000"/>
+              </a:lnSpc>
+              <a:spcAft>
+                <a:spcPts val="800"/>
+              </a:spcAft>
+            </a:pPr>
+            <a:r>
+              <a:rPr sz="2800" b="0" u="none">
+                <a:solidFill>
+                  <a:srgbClr val="0070C0"/>
+                </a:solidFill>
+                <a:latin typeface="맑은 고딕"/>
+              </a:rPr>
+              <a:t>지금 evidence pack은 enriched dry run에는 충분</a:t>
+            </a:r>
+          </a:p>
+        </p:txBody>
+      </p:sp>
+    </p:spTree>
+  </p:cSld>
+  <p:clrMapOvr>
+    <a:masterClrMapping/>
+  </p:clrMapOvr>
+</p:sld>
+</file>
+
+<file path=ppt/slides/slide3.xml><?xml version="1.0" encoding="utf-8"?>
+<p:sld xmlns:a="http://schemas.openxmlformats.org/drawingml/2006/main" xmlns:p="http://schemas.openxmlformats.org/presentationml/2006/main" xmlns:r="http://schemas.openxmlformats.org/officeDocument/2006/relationships">
+  <p:cSld>
+    <p:bg>
+      <p:bgPr>
+        <a:solidFill>
+          <a:srgbClr val="F8F9FA"/>
+        </a:solidFill>
+        <a:effectLst/>
+      </p:bgPr>
+    </p:bg>
+    <p:spTree>
+      <p:nvGrpSpPr>
+        <p:cNvPr id="1" name=""/>
+        <p:cNvGrpSpPr/>
+        <p:nvPr/>
+      </p:nvGrpSpPr>
+      <p:grpSpPr/>
+      <p:sp>
+        <p:nvSpPr>
+          <p:cNvPr id="2" name="TextBox 1"/>
+          <p:cNvSpPr txBox="1"/>
+          <p:nvPr/>
+        </p:nvSpPr>
+        <p:spPr>
+          <a:xfrm>
             <a:off x="572414" y="356616"/>
             <a:ext cx="11192256" cy="521207"/>
           </a:xfrm>
@@ -13513,14 +16480,75 @@
                 </a:solidFill>
                 <a:latin typeface="맑은 고딕"/>
               </a:rPr>
-              <a:t>결국 질문은 성장의 과실보다 위험의 배분이다</a:t>
-            </a:r>
-          </a:p>
-        </p:txBody>
-      </p:sp>
-      <p:sp>
-        <p:nvSpPr>
-          <p:cNvPr id="3" name="Rectangle 2"/>
+              <a:t>은행 입장에서는 담보가 제일 편하다</a:t>
+            </a:r>
+          </a:p>
+        </p:txBody>
+      </p:sp>
+      <p:sp>
+        <p:nvSpPr>
+          <p:cNvPr id="3" name="TextBox 2"/>
+          <p:cNvSpPr txBox="1"/>
+          <p:nvPr/>
+        </p:nvSpPr>
+        <p:spPr>
+          <a:xfrm>
+            <a:off x="5989320" y="1208836"/>
+            <a:ext cx="5394960" cy="1302105"/>
+          </a:xfrm>
+          <a:prstGeom prst="rect">
+            <a:avLst/>
+          </a:prstGeom>
+          <a:noFill/>
+        </p:spPr>
+        <p:txBody>
+          <a:bodyPr wrap="square" anchor="ctr">
+            <a:spAutoFit/>
+          </a:bodyPr>
+          <a:lstStyle/>
+          <a:p>
+            <a:pPr>
+              <a:lnSpc>
+                <a:spcPct val="150000"/>
+              </a:lnSpc>
+              <a:spcAft>
+                <a:spcPts val="800"/>
+              </a:spcAft>
+            </a:pPr>
+            <a:r>
+              <a:rPr sz="2800" b="0" u="none">
+                <a:solidFill>
+                  <a:srgbClr val="000000"/>
+                </a:solidFill>
+                <a:latin typeface="맑은 고딕"/>
+              </a:rPr>
+              <a:t>돈을 빌려줄 때 가장 쉬운 질문은 “담보가 있나?”다.</a:t>
+            </a:r>
+          </a:p>
+          <a:p>
+            <a:pPr>
+              <a:lnSpc>
+                <a:spcPct val="150000"/>
+              </a:lnSpc>
+              <a:spcAft>
+                <a:spcPts val="800"/>
+              </a:spcAft>
+            </a:pPr>
+            <a:r>
+              <a:rPr sz="2800" b="0" u="none">
+                <a:solidFill>
+                  <a:srgbClr val="000000"/>
+                </a:solidFill>
+                <a:latin typeface="맑은 고딕"/>
+              </a:rPr>
+              <a:t>은행은 자본규제와 위험가중자산을 고려해야 하므로</a:t>
+            </a:r>
+          </a:p>
+        </p:txBody>
+      </p:sp>
+      <p:sp>
+        <p:nvSpPr>
+          <p:cNvPr id="4" name="Rectangle 3"/>
           <p:cNvSpPr/>
           <p:nvPr/>
         </p:nvSpPr>
@@ -13561,74 +16589,45 @@
           <a:p>
             <a:pPr algn="ctr"/>
             <a:r>
-              <a:rPr sz="1800" b="0">
+              <a:rPr sz="1200" b="0">
                 <a:solidFill>
                   <a:srgbClr val="0070C0"/>
                 </a:solidFill>
                 <a:latin typeface="맑은 고딕"/>
               </a:rPr>
-              <a:t>[도식]</a:t>
-            </a:r>
-          </a:p>
-        </p:txBody>
-      </p:sp>
-      <p:sp>
-        <p:nvSpPr>
-          <p:cNvPr id="4" name="TextBox 3"/>
-          <p:cNvSpPr txBox="1"/>
-          <p:nvPr/>
-        </p:nvSpPr>
-        <p:spPr>
-          <a:xfrm>
-            <a:off x="5989320" y="2103120"/>
-            <a:ext cx="5303520" cy="2926080"/>
-          </a:xfrm>
-          <a:prstGeom prst="rect">
-            <a:avLst/>
-          </a:prstGeom>
-          <a:noFill/>
-        </p:spPr>
-        <p:txBody>
-          <a:bodyPr wrap="square" anchor="ctr">
-            <a:spAutoFit/>
-          </a:bodyPr>
-          <a:lstStyle/>
-          <a:p>
-            <a:pPr>
-              <a:lnSpc>
-                <a:spcPct val="150000"/>
-              </a:lnSpc>
-              <a:spcAft>
+              <a:t>[출처]</a:t>
+            </a:r>
+          </a:p>
+          <a:p>
+            <a:pPr algn="ctr">
+              <a:spcBef>
                 <a:spcPts val="800"/>
-              </a:spcAft>
+              </a:spcBef>
             </a:pPr>
             <a:r>
-              <a:rPr sz="2800" b="0" u="none">
+              <a:rPr sz="2100" b="1">
                 <a:solidFill>
                   <a:srgbClr val="000000"/>
                 </a:solidFill>
                 <a:latin typeface="맑은 고딕"/>
               </a:rPr>
-              <a:t>성장의 과실을 함께 나누자는 말은 듣기 좋다.</a:t>
-            </a:r>
-          </a:p>
-          <a:p>
-            <a:pPr>
-              <a:lnSpc>
-                <a:spcPct val="150000"/>
-              </a:lnSpc>
-              <a:spcAft>
-                <a:spcPts val="800"/>
-              </a:spcAft>
+              <a:t>BIS</a:t>
+            </a:r>
+          </a:p>
+          <a:p>
+            <a:pPr algn="ctr">
+              <a:spcBef>
+                <a:spcPts val="400"/>
+              </a:spcBef>
             </a:pPr>
             <a:r>
-              <a:rPr sz="2800" b="0" u="none">
+              <a:rPr sz="1400" b="0">
                 <a:solidFill>
-                  <a:srgbClr val="000000"/>
+                  <a:srgbClr val="373737"/>
                 </a:solidFill>
                 <a:latin typeface="맑은 고딕"/>
               </a:rPr>
-              <a:t>하지만 위험도 함께 나눠야 한다면, 손실이 발생했을 때 재정·운용사·투자자·금융권의 책임선이 중요해진다.</a:t>
+              <a:t>Basel III 프레임워크 + 국내 인내자본/건전성 규제 논의. 국내 감…</a:t>
             </a:r>
           </a:p>
         </p:txBody>
@@ -13641,7 +16640,7 @@
 </p:sld>
 </file>
 
-<file path=ppt/slides/slide19.xml><?xml version="1.0" encoding="utf-8"?>
+<file path=ppt/slides/slide4.xml><?xml version="1.0" encoding="utf-8"?>
 <p:sld xmlns:a="http://schemas.openxmlformats.org/drawingml/2006/main" xmlns:p="http://schemas.openxmlformats.org/presentationml/2006/main" xmlns:r="http://schemas.openxmlformats.org/officeDocument/2006/relationships">
   <p:cSld>
     <p:bg>
@@ -13667,8 +16666,8 @@
         </p:nvSpPr>
         <p:spPr>
           <a:xfrm>
-            <a:off x="843991" y="1273759"/>
-            <a:ext cx="10752429" cy="2424988"/>
+            <a:off x="572414" y="356616"/>
+            <a:ext cx="11192256" cy="521207"/>
           </a:xfrm>
           <a:prstGeom prst="rect">
             <a:avLst/>
@@ -13682,13 +16681,418 @@
           <a:lstStyle/>
           <a:p>
             <a:r>
-              <a:rPr sz="5400" b="1" u="none">
+              <a:rPr sz="2800" b="0" u="none">
                 <a:solidFill>
-                  <a:srgbClr val="181C23"/>
+                  <a:srgbClr val="FF0000"/>
                 </a:solidFill>
                 <a:latin typeface="맑은 고딕"/>
               </a:rPr>
-              <a:t>금융권은 어디까지 위험을 나눌 수 있는가</a:t>
+              <a:t>그런데 AI 산업은 담보보다 시간이 먼저 필요하다</a:t>
+            </a:r>
+          </a:p>
+        </p:txBody>
+      </p:sp>
+      <p:sp>
+        <p:nvSpPr>
+          <p:cNvPr id="3" name="Rectangle 2"/>
+          <p:cNvSpPr/>
+          <p:nvPr/>
+        </p:nvSpPr>
+        <p:spPr>
+          <a:xfrm>
+            <a:off x="713232" y="1417320"/>
+            <a:ext cx="4892040" cy="4114800"/>
+          </a:xfrm>
+          <a:prstGeom prst="rect">
+            <a:avLst/>
+          </a:prstGeom>
+          <a:solidFill>
+            <a:srgbClr val="F8F8F8"/>
+          </a:solidFill>
+          <a:ln w="12700">
+            <a:solidFill>
+              <a:srgbClr val="BEBEBE"/>
+            </a:solidFill>
+          </a:ln>
+        </p:spPr>
+        <p:style>
+          <a:lnRef idx="1">
+            <a:schemeClr val="accent1"/>
+          </a:lnRef>
+          <a:fillRef idx="3">
+            <a:schemeClr val="accent1"/>
+          </a:fillRef>
+          <a:effectRef idx="2">
+            <a:schemeClr val="accent1"/>
+          </a:effectRef>
+          <a:fontRef idx="minor">
+            <a:schemeClr val="lt1"/>
+          </a:fontRef>
+        </p:style>
+        <p:txBody>
+          <a:bodyPr rtlCol="0" anchor="ctr"/>
+          <a:lstStyle/>
+          <a:p>
+            <a:pPr algn="ctr"/>
+          </a:p>
+        </p:txBody>
+      </p:sp>
+      <p:sp>
+        <p:nvSpPr>
+          <p:cNvPr id="4" name="TextBox 3"/>
+          <p:cNvSpPr txBox="1"/>
+          <p:nvPr/>
+        </p:nvSpPr>
+        <p:spPr>
+          <a:xfrm>
+            <a:off x="822960" y="1527048"/>
+            <a:ext cx="914400" cy="201168"/>
+          </a:xfrm>
+          <a:prstGeom prst="rect">
+            <a:avLst/>
+          </a:prstGeom>
+          <a:noFill/>
+        </p:spPr>
+        <p:txBody>
+          <a:bodyPr wrap="square">
+            <a:spAutoFit/>
+          </a:bodyPr>
+          <a:lstStyle/>
+          <a:p>
+            <a:r>
+              <a:rPr sz="1200" b="0" u="none">
+                <a:solidFill>
+                  <a:srgbClr val="0070C0"/>
+                </a:solidFill>
+                <a:latin typeface="맑은 고딕"/>
+              </a:rPr>
+              <a:t>[도식]</a:t>
+            </a:r>
+          </a:p>
+        </p:txBody>
+      </p:sp>
+      <p:sp>
+        <p:nvSpPr>
+          <p:cNvPr id="5" name="Rectangle 4"/>
+          <p:cNvSpPr/>
+          <p:nvPr/>
+        </p:nvSpPr>
+        <p:spPr>
+          <a:xfrm>
+            <a:off x="1033271" y="3040380"/>
+            <a:ext cx="1828799" cy="1143000"/>
+          </a:xfrm>
+          <a:prstGeom prst="rect">
+            <a:avLst/>
+          </a:prstGeom>
+          <a:solidFill>
+            <a:srgbClr val="FFFFFF"/>
+          </a:solidFill>
+          <a:ln w="12700">
+            <a:solidFill>
+              <a:srgbClr val="A0A0A0"/>
+            </a:solidFill>
+          </a:ln>
+        </p:spPr>
+        <p:style>
+          <a:lnRef idx="1">
+            <a:schemeClr val="accent1"/>
+          </a:lnRef>
+          <a:fillRef idx="3">
+            <a:schemeClr val="accent1"/>
+          </a:fillRef>
+          <a:effectRef idx="2">
+            <a:schemeClr val="accent1"/>
+          </a:effectRef>
+          <a:fontRef idx="minor">
+            <a:schemeClr val="lt1"/>
+          </a:fontRef>
+        </p:style>
+        <p:txBody>
+          <a:bodyPr rtlCol="0" anchor="ctr"/>
+          <a:lstStyle/>
+          <a:p>
+            <a:pPr algn="ctr"/>
+          </a:p>
+        </p:txBody>
+      </p:sp>
+      <p:sp>
+        <p:nvSpPr>
+          <p:cNvPr id="6" name="Rectangle 5"/>
+          <p:cNvSpPr/>
+          <p:nvPr/>
+        </p:nvSpPr>
+        <p:spPr>
+          <a:xfrm>
+            <a:off x="3456432" y="3040380"/>
+            <a:ext cx="1828799" cy="1143000"/>
+          </a:xfrm>
+          <a:prstGeom prst="rect">
+            <a:avLst/>
+          </a:prstGeom>
+          <a:solidFill>
+            <a:srgbClr val="FFFFFF"/>
+          </a:solidFill>
+          <a:ln w="12700">
+            <a:solidFill>
+              <a:srgbClr val="A0A0A0"/>
+            </a:solidFill>
+          </a:ln>
+        </p:spPr>
+        <p:style>
+          <a:lnRef idx="1">
+            <a:schemeClr val="accent1"/>
+          </a:lnRef>
+          <a:fillRef idx="3">
+            <a:schemeClr val="accent1"/>
+          </a:fillRef>
+          <a:effectRef idx="2">
+            <a:schemeClr val="accent1"/>
+          </a:effectRef>
+          <a:fontRef idx="minor">
+            <a:schemeClr val="lt1"/>
+          </a:fontRef>
+        </p:style>
+        <p:txBody>
+          <a:bodyPr rtlCol="0" anchor="ctr"/>
+          <a:lstStyle/>
+          <a:p>
+            <a:pPr algn="ctr"/>
+          </a:p>
+        </p:txBody>
+      </p:sp>
+      <p:sp>
+        <p:nvSpPr>
+          <p:cNvPr id="7" name="TextBox 6"/>
+          <p:cNvSpPr txBox="1"/>
+          <p:nvPr/>
+        </p:nvSpPr>
+        <p:spPr>
+          <a:xfrm>
+            <a:off x="1124712" y="3204972"/>
+            <a:ext cx="1645919" cy="320040"/>
+          </a:xfrm>
+          <a:prstGeom prst="rect">
+            <a:avLst/>
+          </a:prstGeom>
+          <a:noFill/>
+        </p:spPr>
+        <p:txBody>
+          <a:bodyPr wrap="square">
+            <a:spAutoFit/>
+          </a:bodyPr>
+          <a:lstStyle/>
+          <a:p>
+            <a:pPr algn="ctr"/>
+            <a:r>
+              <a:rPr sz="1800" b="1" u="none">
+                <a:solidFill>
+                  <a:srgbClr val="000000"/>
+                </a:solidFill>
+                <a:latin typeface="맑은 고딕"/>
+              </a:rPr>
+              <a:t>안전한 금융</a:t>
+            </a:r>
+          </a:p>
+        </p:txBody>
+      </p:sp>
+      <p:sp>
+        <p:nvSpPr>
+          <p:cNvPr id="8" name="TextBox 7"/>
+          <p:cNvSpPr txBox="1"/>
+          <p:nvPr/>
+        </p:nvSpPr>
+        <p:spPr>
+          <a:xfrm>
+            <a:off x="1124712" y="3607308"/>
+            <a:ext cx="1645919" cy="274320"/>
+          </a:xfrm>
+          <a:prstGeom prst="rect">
+            <a:avLst/>
+          </a:prstGeom>
+          <a:noFill/>
+        </p:spPr>
+        <p:txBody>
+          <a:bodyPr wrap="square">
+            <a:spAutoFit/>
+          </a:bodyPr>
+          <a:lstStyle/>
+          <a:p>
+            <a:pPr algn="ctr"/>
+            <a:r>
+              <a:rPr sz="1500" b="0" u="none">
+                <a:solidFill>
+                  <a:srgbClr val="373737"/>
+                </a:solidFill>
+                <a:latin typeface="맑은 고딕"/>
+              </a:rPr>
+              <a:t>담보 / 단기</a:t>
+            </a:r>
+          </a:p>
+        </p:txBody>
+      </p:sp>
+      <p:sp>
+        <p:nvSpPr>
+          <p:cNvPr id="9" name="TextBox 8"/>
+          <p:cNvSpPr txBox="1"/>
+          <p:nvPr/>
+        </p:nvSpPr>
+        <p:spPr>
+          <a:xfrm>
+            <a:off x="3547872" y="3204972"/>
+            <a:ext cx="1645919" cy="320040"/>
+          </a:xfrm>
+          <a:prstGeom prst="rect">
+            <a:avLst/>
+          </a:prstGeom>
+          <a:noFill/>
+        </p:spPr>
+        <p:txBody>
+          <a:bodyPr wrap="square">
+            <a:spAutoFit/>
+          </a:bodyPr>
+          <a:lstStyle/>
+          <a:p>
+            <a:pPr algn="ctr"/>
+            <a:r>
+              <a:rPr sz="1800" b="1" u="none">
+                <a:solidFill>
+                  <a:srgbClr val="000000"/>
+                </a:solidFill>
+                <a:latin typeface="맑은 고딕"/>
+              </a:rPr>
+              <a:t>성장 금융</a:t>
+            </a:r>
+          </a:p>
+        </p:txBody>
+      </p:sp>
+      <p:sp>
+        <p:nvSpPr>
+          <p:cNvPr id="10" name="TextBox 9"/>
+          <p:cNvSpPr txBox="1"/>
+          <p:nvPr/>
+        </p:nvSpPr>
+        <p:spPr>
+          <a:xfrm>
+            <a:off x="3547872" y="3607308"/>
+            <a:ext cx="1645919" cy="274320"/>
+          </a:xfrm>
+          <a:prstGeom prst="rect">
+            <a:avLst/>
+          </a:prstGeom>
+          <a:noFill/>
+        </p:spPr>
+        <p:txBody>
+          <a:bodyPr wrap="square">
+            <a:spAutoFit/>
+          </a:bodyPr>
+          <a:lstStyle/>
+          <a:p>
+            <a:pPr algn="ctr"/>
+            <a:r>
+              <a:rPr sz="1500" b="0" u="none">
+                <a:solidFill>
+                  <a:srgbClr val="373737"/>
+                </a:solidFill>
+                <a:latin typeface="맑은 고딕"/>
+              </a:rPr>
+              <a:t>장기 / 위험분담</a:t>
+            </a:r>
+          </a:p>
+        </p:txBody>
+      </p:sp>
+      <p:sp>
+        <p:nvSpPr>
+          <p:cNvPr id="11" name="TextBox 10"/>
+          <p:cNvSpPr txBox="1"/>
+          <p:nvPr/>
+        </p:nvSpPr>
+        <p:spPr>
+          <a:xfrm>
+            <a:off x="2930652" y="3387852"/>
+            <a:ext cx="457200" cy="347472"/>
+          </a:xfrm>
+          <a:prstGeom prst="rect">
+            <a:avLst/>
+          </a:prstGeom>
+          <a:noFill/>
+        </p:spPr>
+        <p:txBody>
+          <a:bodyPr wrap="square">
+            <a:spAutoFit/>
+          </a:bodyPr>
+          <a:lstStyle/>
+          <a:p>
+            <a:pPr algn="ctr"/>
+            <a:r>
+              <a:rPr sz="2200" b="1" u="none">
+                <a:solidFill>
+                  <a:srgbClr val="373737"/>
+                </a:solidFill>
+                <a:latin typeface="맑은 고딕"/>
+              </a:rPr>
+              <a:t>→</a:t>
+            </a:r>
+          </a:p>
+        </p:txBody>
+      </p:sp>
+      <p:sp>
+        <p:nvSpPr>
+          <p:cNvPr id="12" name="TextBox 11"/>
+          <p:cNvSpPr txBox="1"/>
+          <p:nvPr/>
+        </p:nvSpPr>
+        <p:spPr>
+          <a:xfrm>
+            <a:off x="5989320" y="2103120"/>
+            <a:ext cx="5303520" cy="2926080"/>
+          </a:xfrm>
+          <a:prstGeom prst="rect">
+            <a:avLst/>
+          </a:prstGeom>
+          <a:noFill/>
+        </p:spPr>
+        <p:txBody>
+          <a:bodyPr wrap="square" anchor="ctr">
+            <a:spAutoFit/>
+          </a:bodyPr>
+          <a:lstStyle/>
+          <a:p>
+            <a:pPr>
+              <a:lnSpc>
+                <a:spcPct val="150000"/>
+              </a:lnSpc>
+              <a:spcAft>
+                <a:spcPts val="800"/>
+              </a:spcAft>
+            </a:pPr>
+            <a:r>
+              <a:rPr sz="2800" b="0" u="none">
+                <a:solidFill>
+                  <a:srgbClr val="000000"/>
+                </a:solidFill>
+                <a:latin typeface="맑은 고딕"/>
+              </a:rPr>
+              <a:t>AI와 반도체는 소프트웨어 개발비만의 문제가 아니라 설비</a:t>
+            </a:r>
+          </a:p>
+          <a:p>
+            <a:pPr>
+              <a:lnSpc>
+                <a:spcPct val="150000"/>
+              </a:lnSpc>
+              <a:spcAft>
+                <a:spcPts val="800"/>
+              </a:spcAft>
+            </a:pPr>
+            <a:r>
+              <a:rPr sz="2800" b="0" u="none">
+                <a:solidFill>
+                  <a:srgbClr val="000000"/>
+                </a:solidFill>
+                <a:latin typeface="맑은 고딕"/>
+              </a:rPr>
+              <a:t>그래서 이 이야기는 “대출을 늘리자”보다 “누가 긴 위험을 나눌…</a:t>
             </a:r>
           </a:p>
         </p:txBody>
@@ -13701,7 +17105,7 @@
 </p:sld>
 </file>
 
-<file path=ppt/slides/slide2.xml><?xml version="1.0" encoding="utf-8"?>
+<file path=ppt/slides/slide5.xml><?xml version="1.0" encoding="utf-8"?>
 <p:sld xmlns:a="http://schemas.openxmlformats.org/drawingml/2006/main" xmlns:p="http://schemas.openxmlformats.org/presentationml/2006/main" xmlns:r="http://schemas.openxmlformats.org/officeDocument/2006/relationships">
   <p:cSld>
     <p:bg>
@@ -13748,21 +17152,365 @@
                 </a:solidFill>
                 <a:latin typeface="맑은 고딕"/>
               </a:rPr>
-              <a:t>금융위원장이 던진 질문 하나</a:t>
-            </a:r>
-          </a:p>
-        </p:txBody>
-      </p:sp>
-      <p:sp>
-        <p:nvSpPr>
-          <p:cNvPr id="3" name="TextBox 2"/>
+              <a:t>금융은 원래 안전해야 하는가, 위험을 져야 하는가</a:t>
+            </a:r>
+          </a:p>
+        </p:txBody>
+      </p:sp>
+      <p:sp>
+        <p:nvSpPr>
+          <p:cNvPr id="3" name="Rectangle 2"/>
+          <p:cNvSpPr/>
+          <p:nvPr/>
+        </p:nvSpPr>
+        <p:spPr>
+          <a:xfrm>
+            <a:off x="713232" y="1417320"/>
+            <a:ext cx="4892040" cy="4114800"/>
+          </a:xfrm>
+          <a:prstGeom prst="rect">
+            <a:avLst/>
+          </a:prstGeom>
+          <a:solidFill>
+            <a:srgbClr val="F8F8F8"/>
+          </a:solidFill>
+          <a:ln w="12700">
+            <a:solidFill>
+              <a:srgbClr val="BEBEBE"/>
+            </a:solidFill>
+          </a:ln>
+        </p:spPr>
+        <p:style>
+          <a:lnRef idx="1">
+            <a:schemeClr val="accent1"/>
+          </a:lnRef>
+          <a:fillRef idx="3">
+            <a:schemeClr val="accent1"/>
+          </a:fillRef>
+          <a:effectRef idx="2">
+            <a:schemeClr val="accent1"/>
+          </a:effectRef>
+          <a:fontRef idx="minor">
+            <a:schemeClr val="lt1"/>
+          </a:fontRef>
+        </p:style>
+        <p:txBody>
+          <a:bodyPr rtlCol="0" anchor="ctr"/>
+          <a:lstStyle/>
+          <a:p>
+            <a:pPr algn="ctr"/>
+          </a:p>
+        </p:txBody>
+      </p:sp>
+      <p:sp>
+        <p:nvSpPr>
+          <p:cNvPr id="4" name="TextBox 3"/>
           <p:cNvSpPr txBox="1"/>
           <p:nvPr/>
         </p:nvSpPr>
         <p:spPr>
           <a:xfrm>
-            <a:off x="5989320" y="1874519"/>
-            <a:ext cx="5303520" cy="2651760"/>
+            <a:off x="822960" y="1527048"/>
+            <a:ext cx="914400" cy="201168"/>
+          </a:xfrm>
+          <a:prstGeom prst="rect">
+            <a:avLst/>
+          </a:prstGeom>
+          <a:noFill/>
+        </p:spPr>
+        <p:txBody>
+          <a:bodyPr wrap="square">
+            <a:spAutoFit/>
+          </a:bodyPr>
+          <a:lstStyle/>
+          <a:p>
+            <a:r>
+              <a:rPr sz="1200" b="0" u="none">
+                <a:solidFill>
+                  <a:srgbClr val="0070C0"/>
+                </a:solidFill>
+                <a:latin typeface="맑은 고딕"/>
+              </a:rPr>
+              <a:t>[도식]</a:t>
+            </a:r>
+          </a:p>
+        </p:txBody>
+      </p:sp>
+      <p:sp>
+        <p:nvSpPr>
+          <p:cNvPr id="5" name="Rectangle 4"/>
+          <p:cNvSpPr/>
+          <p:nvPr/>
+        </p:nvSpPr>
+        <p:spPr>
+          <a:xfrm>
+            <a:off x="1033271" y="3040380"/>
+            <a:ext cx="1828799" cy="1143000"/>
+          </a:xfrm>
+          <a:prstGeom prst="rect">
+            <a:avLst/>
+          </a:prstGeom>
+          <a:solidFill>
+            <a:srgbClr val="FFFFFF"/>
+          </a:solidFill>
+          <a:ln w="12700">
+            <a:solidFill>
+              <a:srgbClr val="A0A0A0"/>
+            </a:solidFill>
+          </a:ln>
+        </p:spPr>
+        <p:style>
+          <a:lnRef idx="1">
+            <a:schemeClr val="accent1"/>
+          </a:lnRef>
+          <a:fillRef idx="3">
+            <a:schemeClr val="accent1"/>
+          </a:fillRef>
+          <a:effectRef idx="2">
+            <a:schemeClr val="accent1"/>
+          </a:effectRef>
+          <a:fontRef idx="minor">
+            <a:schemeClr val="lt1"/>
+          </a:fontRef>
+        </p:style>
+        <p:txBody>
+          <a:bodyPr rtlCol="0" anchor="ctr"/>
+          <a:lstStyle/>
+          <a:p>
+            <a:pPr algn="ctr"/>
+          </a:p>
+        </p:txBody>
+      </p:sp>
+      <p:sp>
+        <p:nvSpPr>
+          <p:cNvPr id="6" name="Rectangle 5"/>
+          <p:cNvSpPr/>
+          <p:nvPr/>
+        </p:nvSpPr>
+        <p:spPr>
+          <a:xfrm>
+            <a:off x="3456432" y="3040380"/>
+            <a:ext cx="1828799" cy="1143000"/>
+          </a:xfrm>
+          <a:prstGeom prst="rect">
+            <a:avLst/>
+          </a:prstGeom>
+          <a:solidFill>
+            <a:srgbClr val="FFFFFF"/>
+          </a:solidFill>
+          <a:ln w="12700">
+            <a:solidFill>
+              <a:srgbClr val="A0A0A0"/>
+            </a:solidFill>
+          </a:ln>
+        </p:spPr>
+        <p:style>
+          <a:lnRef idx="1">
+            <a:schemeClr val="accent1"/>
+          </a:lnRef>
+          <a:fillRef idx="3">
+            <a:schemeClr val="accent1"/>
+          </a:fillRef>
+          <a:effectRef idx="2">
+            <a:schemeClr val="accent1"/>
+          </a:effectRef>
+          <a:fontRef idx="minor">
+            <a:schemeClr val="lt1"/>
+          </a:fontRef>
+        </p:style>
+        <p:txBody>
+          <a:bodyPr rtlCol="0" anchor="ctr"/>
+          <a:lstStyle/>
+          <a:p>
+            <a:pPr algn="ctr"/>
+          </a:p>
+        </p:txBody>
+      </p:sp>
+      <p:sp>
+        <p:nvSpPr>
+          <p:cNvPr id="7" name="TextBox 6"/>
+          <p:cNvSpPr txBox="1"/>
+          <p:nvPr/>
+        </p:nvSpPr>
+        <p:spPr>
+          <a:xfrm>
+            <a:off x="1124712" y="3204972"/>
+            <a:ext cx="1645919" cy="320040"/>
+          </a:xfrm>
+          <a:prstGeom prst="rect">
+            <a:avLst/>
+          </a:prstGeom>
+          <a:noFill/>
+        </p:spPr>
+        <p:txBody>
+          <a:bodyPr wrap="square">
+            <a:spAutoFit/>
+          </a:bodyPr>
+          <a:lstStyle/>
+          <a:p>
+            <a:pPr algn="ctr"/>
+            <a:r>
+              <a:rPr sz="1800" b="1" u="none">
+                <a:solidFill>
+                  <a:srgbClr val="000000"/>
+                </a:solidFill>
+                <a:latin typeface="맑은 고딕"/>
+              </a:rPr>
+              <a:t>안전한 금융</a:t>
+            </a:r>
+          </a:p>
+        </p:txBody>
+      </p:sp>
+      <p:sp>
+        <p:nvSpPr>
+          <p:cNvPr id="8" name="TextBox 7"/>
+          <p:cNvSpPr txBox="1"/>
+          <p:nvPr/>
+        </p:nvSpPr>
+        <p:spPr>
+          <a:xfrm>
+            <a:off x="1124712" y="3607308"/>
+            <a:ext cx="1645919" cy="274320"/>
+          </a:xfrm>
+          <a:prstGeom prst="rect">
+            <a:avLst/>
+          </a:prstGeom>
+          <a:noFill/>
+        </p:spPr>
+        <p:txBody>
+          <a:bodyPr wrap="square">
+            <a:spAutoFit/>
+          </a:bodyPr>
+          <a:lstStyle/>
+          <a:p>
+            <a:pPr algn="ctr"/>
+            <a:r>
+              <a:rPr sz="1500" b="0" u="none">
+                <a:solidFill>
+                  <a:srgbClr val="373737"/>
+                </a:solidFill>
+                <a:latin typeface="맑은 고딕"/>
+              </a:rPr>
+              <a:t>담보 / 단기</a:t>
+            </a:r>
+          </a:p>
+        </p:txBody>
+      </p:sp>
+      <p:sp>
+        <p:nvSpPr>
+          <p:cNvPr id="9" name="TextBox 8"/>
+          <p:cNvSpPr txBox="1"/>
+          <p:nvPr/>
+        </p:nvSpPr>
+        <p:spPr>
+          <a:xfrm>
+            <a:off x="3547872" y="3204972"/>
+            <a:ext cx="1645919" cy="320040"/>
+          </a:xfrm>
+          <a:prstGeom prst="rect">
+            <a:avLst/>
+          </a:prstGeom>
+          <a:noFill/>
+        </p:spPr>
+        <p:txBody>
+          <a:bodyPr wrap="square">
+            <a:spAutoFit/>
+          </a:bodyPr>
+          <a:lstStyle/>
+          <a:p>
+            <a:pPr algn="ctr"/>
+            <a:r>
+              <a:rPr sz="1800" b="1" u="none">
+                <a:solidFill>
+                  <a:srgbClr val="000000"/>
+                </a:solidFill>
+                <a:latin typeface="맑은 고딕"/>
+              </a:rPr>
+              <a:t>성장 금융</a:t>
+            </a:r>
+          </a:p>
+        </p:txBody>
+      </p:sp>
+      <p:sp>
+        <p:nvSpPr>
+          <p:cNvPr id="10" name="TextBox 9"/>
+          <p:cNvSpPr txBox="1"/>
+          <p:nvPr/>
+        </p:nvSpPr>
+        <p:spPr>
+          <a:xfrm>
+            <a:off x="3547872" y="3607308"/>
+            <a:ext cx="1645919" cy="274320"/>
+          </a:xfrm>
+          <a:prstGeom prst="rect">
+            <a:avLst/>
+          </a:prstGeom>
+          <a:noFill/>
+        </p:spPr>
+        <p:txBody>
+          <a:bodyPr wrap="square">
+            <a:spAutoFit/>
+          </a:bodyPr>
+          <a:lstStyle/>
+          <a:p>
+            <a:pPr algn="ctr"/>
+            <a:r>
+              <a:rPr sz="1500" b="0" u="none">
+                <a:solidFill>
+                  <a:srgbClr val="373737"/>
+                </a:solidFill>
+                <a:latin typeface="맑은 고딕"/>
+              </a:rPr>
+              <a:t>장기 / 위험분담</a:t>
+            </a:r>
+          </a:p>
+        </p:txBody>
+      </p:sp>
+      <p:sp>
+        <p:nvSpPr>
+          <p:cNvPr id="11" name="TextBox 10"/>
+          <p:cNvSpPr txBox="1"/>
+          <p:nvPr/>
+        </p:nvSpPr>
+        <p:spPr>
+          <a:xfrm>
+            <a:off x="2930652" y="3387852"/>
+            <a:ext cx="457200" cy="347472"/>
+          </a:xfrm>
+          <a:prstGeom prst="rect">
+            <a:avLst/>
+          </a:prstGeom>
+          <a:noFill/>
+        </p:spPr>
+        <p:txBody>
+          <a:bodyPr wrap="square">
+            <a:spAutoFit/>
+          </a:bodyPr>
+          <a:lstStyle/>
+          <a:p>
+            <a:pPr algn="ctr"/>
+            <a:r>
+              <a:rPr sz="2200" b="1" u="none">
+                <a:solidFill>
+                  <a:srgbClr val="373737"/>
+                </a:solidFill>
+                <a:latin typeface="맑은 고딕"/>
+              </a:rPr>
+              <a:t>→</a:t>
+            </a:r>
+          </a:p>
+        </p:txBody>
+      </p:sp>
+      <p:sp>
+        <p:nvSpPr>
+          <p:cNvPr id="12" name="TextBox 11"/>
+          <p:cNvSpPr txBox="1"/>
+          <p:nvPr/>
+        </p:nvSpPr>
+        <p:spPr>
+          <a:xfrm>
+            <a:off x="5989320" y="2103120"/>
+            <a:ext cx="5303520" cy="2926080"/>
           </a:xfrm>
           <a:prstGeom prst="rect">
             <a:avLst/>
@@ -13784,13 +17532,13 @@
               </a:spcAft>
             </a:pPr>
             <a:r>
-              <a:rPr sz="2400" b="0" u="none">
+              <a:rPr sz="2800" b="0" u="none">
                 <a:solidFill>
                   <a:srgbClr val="000000"/>
                 </a:solidFill>
                 <a:latin typeface="맑은 고딕"/>
               </a:rPr>
-              <a:t>“담보 및 단기수익 중심 금융 경쟁은 앞서가기 어렵다”는 문제 제기가 나왔다.</a:t>
+              <a:t>너무 안전하면 성장산업이 돈을 못 받는다.</a:t>
             </a:r>
           </a:p>
           <a:p>
@@ -13803,13 +17551,194 @@
               </a:spcAft>
             </a:pPr>
             <a:r>
-              <a:rPr sz="2400" b="0" u="none">
+              <a:rPr sz="2800" b="0" u="none">
                 <a:solidFill>
                   <a:srgbClr val="000000"/>
                 </a:solidFill>
                 <a:latin typeface="맑은 고딕"/>
               </a:rPr>
-              <a:t>금융위원회 공식자료는 국민성장펀드가 5년간 150조 원, 2026년 30조 원 규모로 첨단산업 생태계에 자금을 공급하는 틀이라고 설명한다.</a:t>
+              <a:t>너무 위험하면 결국 손실을 누가 떠안느냐는 문제가 생긴다.</a:t>
+            </a:r>
+          </a:p>
+        </p:txBody>
+      </p:sp>
+    </p:spTree>
+  </p:cSld>
+  <p:clrMapOvr>
+    <a:masterClrMapping/>
+  </p:clrMapOvr>
+</p:sld>
+</file>
+
+<file path=ppt/slides/slide6.xml><?xml version="1.0" encoding="utf-8"?>
+<p:sld xmlns:a="http://schemas.openxmlformats.org/drawingml/2006/main" xmlns:p="http://schemas.openxmlformats.org/presentationml/2006/main" xmlns:r="http://schemas.openxmlformats.org/officeDocument/2006/relationships">
+  <p:cSld>
+    <p:bg>
+      <p:bgPr>
+        <a:solidFill>
+          <a:srgbClr val="F8F9FA"/>
+        </a:solidFill>
+        <a:effectLst/>
+      </p:bgPr>
+    </p:bg>
+    <p:spTree>
+      <p:nvGrpSpPr>
+        <p:cNvPr id="1" name=""/>
+        <p:cNvGrpSpPr/>
+        <p:nvPr/>
+      </p:nvGrpSpPr>
+      <p:grpSpPr/>
+      <p:sp>
+        <p:nvSpPr>
+          <p:cNvPr id="2" name="TextBox 1"/>
+          <p:cNvSpPr txBox="1"/>
+          <p:nvPr/>
+        </p:nvSpPr>
+        <p:spPr>
+          <a:xfrm>
+            <a:off x="843991" y="1273759"/>
+            <a:ext cx="10752429" cy="2424988"/>
+          </a:xfrm>
+          <a:prstGeom prst="rect">
+            <a:avLst/>
+          </a:prstGeom>
+          <a:noFill/>
+        </p:spPr>
+        <p:txBody>
+          <a:bodyPr wrap="square">
+            <a:spAutoFit/>
+          </a:bodyPr>
+          <a:lstStyle/>
+          <a:p>
+            <a:r>
+              <a:rPr sz="5400" b="1" u="none">
+                <a:solidFill>
+                  <a:srgbClr val="181C23"/>
+                </a:solidFill>
+                <a:latin typeface="맑은 고딕"/>
+              </a:rPr>
+              <a:t>AI·반도체 투자와 장기 위험자본</a:t>
+            </a:r>
+          </a:p>
+        </p:txBody>
+      </p:sp>
+    </p:spTree>
+  </p:cSld>
+  <p:clrMapOvr>
+    <a:masterClrMapping/>
+  </p:clrMapOvr>
+</p:sld>
+</file>
+
+<file path=ppt/slides/slide7.xml><?xml version="1.0" encoding="utf-8"?>
+<p:sld xmlns:a="http://schemas.openxmlformats.org/drawingml/2006/main" xmlns:p="http://schemas.openxmlformats.org/presentationml/2006/main" xmlns:r="http://schemas.openxmlformats.org/officeDocument/2006/relationships">
+  <p:cSld>
+    <p:bg>
+      <p:bgPr>
+        <a:solidFill>
+          <a:srgbClr val="F8F9FA"/>
+        </a:solidFill>
+        <a:effectLst/>
+      </p:bgPr>
+    </p:bg>
+    <p:spTree>
+      <p:nvGrpSpPr>
+        <p:cNvPr id="1" name=""/>
+        <p:cNvGrpSpPr/>
+        <p:nvPr/>
+      </p:nvGrpSpPr>
+      <p:grpSpPr/>
+      <p:sp>
+        <p:nvSpPr>
+          <p:cNvPr id="2" name="TextBox 1"/>
+          <p:cNvSpPr txBox="1"/>
+          <p:nvPr/>
+        </p:nvSpPr>
+        <p:spPr>
+          <a:xfrm>
+            <a:off x="572414" y="356616"/>
+            <a:ext cx="11192256" cy="521207"/>
+          </a:xfrm>
+          <a:prstGeom prst="rect">
+            <a:avLst/>
+          </a:prstGeom>
+          <a:noFill/>
+        </p:spPr>
+        <p:txBody>
+          <a:bodyPr wrap="square">
+            <a:spAutoFit/>
+          </a:bodyPr>
+          <a:lstStyle/>
+          <a:p>
+            <a:r>
+              <a:rPr sz="2800" b="0" u="none">
+                <a:solidFill>
+                  <a:srgbClr val="FF0000"/>
+                </a:solidFill>
+                <a:latin typeface="맑은 고딕"/>
+              </a:rPr>
+              <a:t>AI가 소프트웨어만의 문제가 아니게 된 순간</a:t>
+            </a:r>
+          </a:p>
+        </p:txBody>
+      </p:sp>
+      <p:sp>
+        <p:nvSpPr>
+          <p:cNvPr id="3" name="TextBox 2"/>
+          <p:cNvSpPr txBox="1"/>
+          <p:nvPr/>
+        </p:nvSpPr>
+        <p:spPr>
+          <a:xfrm>
+            <a:off x="5989320" y="1208836"/>
+            <a:ext cx="5394960" cy="1302105"/>
+          </a:xfrm>
+          <a:prstGeom prst="rect">
+            <a:avLst/>
+          </a:prstGeom>
+          <a:noFill/>
+        </p:spPr>
+        <p:txBody>
+          <a:bodyPr wrap="square" anchor="ctr">
+            <a:spAutoFit/>
+          </a:bodyPr>
+          <a:lstStyle/>
+          <a:p>
+            <a:pPr>
+              <a:lnSpc>
+                <a:spcPct val="150000"/>
+              </a:lnSpc>
+              <a:spcAft>
+                <a:spcPts val="800"/>
+              </a:spcAft>
+            </a:pPr>
+            <a:r>
+              <a:rPr sz="2800" b="0" u="none">
+                <a:solidFill>
+                  <a:srgbClr val="000000"/>
+                </a:solidFill>
+                <a:latin typeface="맑은 고딕"/>
+              </a:rPr>
+              <a:t>AI는 모델만으로 돌아가지 않는다.</a:t>
+            </a:r>
+          </a:p>
+          <a:p>
+            <a:pPr>
+              <a:lnSpc>
+                <a:spcPct val="150000"/>
+              </a:lnSpc>
+              <a:spcAft>
+                <a:spcPts val="800"/>
+              </a:spcAft>
+            </a:pPr>
+            <a:r>
+              <a:rPr sz="2800" b="0" u="none">
+                <a:solidFill>
+                  <a:srgbClr val="000000"/>
+                </a:solidFill>
+                <a:latin typeface="맑은 고딕"/>
+              </a:rPr>
+              <a:t>반도체, 전력망, 데이터센터, 장비, 소재가 함께 필요하다.</a:t>
             </a:r>
           </a:p>
         </p:txBody>
@@ -13857,13 +17786,13 @@
           <a:p>
             <a:pPr algn="ctr"/>
             <a:r>
-              <a:rPr sz="1800" b="0">
+              <a:rPr sz="1200" b="0">
                 <a:solidFill>
                   <a:srgbClr val="0070C0"/>
                 </a:solidFill>
                 <a:latin typeface="맑은 고딕"/>
               </a:rPr>
-              <a:t>[기사 인용]</a:t>
+              <a:t>[출처]</a:t>
             </a:r>
           </a:p>
           <a:p>
@@ -13873,1681 +17802,7 @@
               </a:spcBef>
             </a:pPr>
             <a:r>
-              <a:rPr sz="1800" b="1">
-                <a:solidFill>
-                  <a:srgbClr val="000000"/>
-                </a:solidFill>
-                <a:latin typeface="맑은 고딕"/>
-              </a:rPr>
-              <a:t>news.einfomax.co.kr</a:t>
-            </a:r>
-          </a:p>
-          <a:p>
-            <a:pPr algn="ctr">
-              <a:spcBef>
-                <a:spcPts val="400"/>
-              </a:spcBef>
-            </a:pPr>
-            <a:r>
-              <a:rPr sz="1400" b="0">
-                <a:solidFill>
-                  <a:srgbClr val="566070"/>
-                </a:solidFill>
-                <a:latin typeface="맑은 고딕"/>
-              </a:rPr>
-              <a:t>금융위원장이 던진 질문 하나</a:t>
-            </a:r>
-          </a:p>
-        </p:txBody>
-      </p:sp>
-    </p:spTree>
-  </p:cSld>
-  <p:clrMapOvr>
-    <a:masterClrMapping/>
-  </p:clrMapOvr>
-</p:sld>
-</file>
-
-<file path=ppt/slides/slide20.xml><?xml version="1.0" encoding="utf-8"?>
-<p:sld xmlns:a="http://schemas.openxmlformats.org/drawingml/2006/main" xmlns:p="http://schemas.openxmlformats.org/presentationml/2006/main" xmlns:r="http://schemas.openxmlformats.org/officeDocument/2006/relationships">
-  <p:cSld>
-    <p:bg>
-      <p:bgPr>
-        <a:solidFill>
-          <a:srgbClr val="F8F9FA"/>
-        </a:solidFill>
-        <a:effectLst/>
-      </p:bgPr>
-    </p:bg>
-    <p:spTree>
-      <p:nvGrpSpPr>
-        <p:cNvPr id="1" name=""/>
-        <p:cNvGrpSpPr/>
-        <p:nvPr/>
-      </p:nvGrpSpPr>
-      <p:grpSpPr/>
-      <p:sp>
-        <p:nvSpPr>
-          <p:cNvPr id="2" name="TextBox 1"/>
-          <p:cNvSpPr txBox="1"/>
-          <p:nvPr/>
-        </p:nvSpPr>
-        <p:spPr>
-          <a:xfrm>
-            <a:off x="572414" y="356616"/>
-            <a:ext cx="11192256" cy="521207"/>
-          </a:xfrm>
-          <a:prstGeom prst="rect">
-            <a:avLst/>
-          </a:prstGeom>
-          <a:noFill/>
-        </p:spPr>
-        <p:txBody>
-          <a:bodyPr wrap="square">
-            <a:spAutoFit/>
-          </a:bodyPr>
-          <a:lstStyle/>
-          <a:p>
-            <a:r>
-              <a:rPr sz="2800" b="0" u="none">
-                <a:solidFill>
-                  <a:srgbClr val="FF0000"/>
-                </a:solidFill>
-                <a:latin typeface="맑은 고딕"/>
-              </a:rPr>
-              <a:t>금융권에 “성장에 베팅하라”고 말하는 순간 생기는 문제</a:t>
-            </a:r>
-          </a:p>
-        </p:txBody>
-      </p:sp>
-      <p:sp>
-        <p:nvSpPr>
-          <p:cNvPr id="3" name="TextBox 2"/>
-          <p:cNvSpPr txBox="1"/>
-          <p:nvPr/>
-        </p:nvSpPr>
-        <p:spPr>
-          <a:xfrm>
-            <a:off x="5989320" y="1208836"/>
-            <a:ext cx="5394960" cy="1302105"/>
-          </a:xfrm>
-          <a:prstGeom prst="rect">
-            <a:avLst/>
-          </a:prstGeom>
-          <a:noFill/>
-        </p:spPr>
-        <p:txBody>
-          <a:bodyPr wrap="square" anchor="ctr">
-            <a:spAutoFit/>
-          </a:bodyPr>
-          <a:lstStyle/>
-          <a:p>
-            <a:pPr>
-              <a:lnSpc>
-                <a:spcPct val="150000"/>
-              </a:lnSpc>
-              <a:spcAft>
-                <a:spcPts val="800"/>
-              </a:spcAft>
-            </a:pPr>
-            <a:r>
-              <a:rPr sz="2800" b="0" u="none">
-                <a:solidFill>
-                  <a:srgbClr val="000000"/>
-                </a:solidFill>
-                <a:latin typeface="맑은 고딕"/>
-              </a:rPr>
-              <a:t>금융권에 성장산업 투자를 요구하면 곧바로 건전성 문제가 따라온다.</a:t>
-            </a:r>
-          </a:p>
-          <a:p>
-            <a:pPr>
-              <a:lnSpc>
-                <a:spcPct val="150000"/>
-              </a:lnSpc>
-              <a:spcAft>
-                <a:spcPts val="800"/>
-              </a:spcAft>
-            </a:pPr>
-            <a:r>
-              <a:rPr sz="2800" b="0" u="none">
-                <a:solidFill>
-                  <a:srgbClr val="000000"/>
-                </a:solidFill>
-                <a:latin typeface="맑은 고딕"/>
-              </a:rPr>
-              <a:t>위험가중자산이 커지면 자본 부담도 커질 수 있고, 예금자 보호 논리와도 충돌할 수 있다.</a:t>
-            </a:r>
-          </a:p>
-        </p:txBody>
-      </p:sp>
-      <p:sp>
-        <p:nvSpPr>
-          <p:cNvPr id="4" name="Rectangle 3"/>
-          <p:cNvSpPr/>
-          <p:nvPr/>
-        </p:nvSpPr>
-        <p:spPr>
-          <a:xfrm>
-            <a:off x="713232" y="1417320"/>
-            <a:ext cx="4892040" cy="4114800"/>
-          </a:xfrm>
-          <a:prstGeom prst="rect">
-            <a:avLst/>
-          </a:prstGeom>
-          <a:solidFill>
-            <a:srgbClr val="F5F5F5"/>
-          </a:solidFill>
-          <a:ln w="12700">
-            <a:solidFill>
-              <a:srgbClr val="BEBEBE"/>
-            </a:solidFill>
-          </a:ln>
-        </p:spPr>
-        <p:style>
-          <a:lnRef idx="1">
-            <a:schemeClr val="accent1"/>
-          </a:lnRef>
-          <a:fillRef idx="3">
-            <a:schemeClr val="accent1"/>
-          </a:fillRef>
-          <a:effectRef idx="2">
-            <a:schemeClr val="accent1"/>
-          </a:effectRef>
-          <a:fontRef idx="minor">
-            <a:schemeClr val="lt1"/>
-          </a:fontRef>
-        </p:style>
-        <p:txBody>
-          <a:bodyPr rtlCol="0" anchor="ctr" wrap="square"/>
-          <a:lstStyle/>
-          <a:p>
-            <a:pPr algn="ctr"/>
-            <a:r>
-              <a:rPr sz="1800" b="0">
-                <a:solidFill>
-                  <a:srgbClr val="0070C0"/>
-                </a:solidFill>
-                <a:latin typeface="맑은 고딕"/>
-              </a:rPr>
-              <a:t>[기사 인용]</a:t>
-            </a:r>
-          </a:p>
-          <a:p>
-            <a:pPr algn="ctr">
-              <a:spcBef>
-                <a:spcPts val="800"/>
-              </a:spcBef>
-            </a:pPr>
-            <a:r>
-              <a:rPr sz="1800" b="1">
-                <a:solidFill>
-                  <a:srgbClr val="000000"/>
-                </a:solidFill>
-                <a:latin typeface="맑은 고딕"/>
-              </a:rPr>
-              <a:t>BIS</a:t>
-            </a:r>
-          </a:p>
-          <a:p>
-            <a:pPr algn="ctr">
-              <a:spcBef>
-                <a:spcPts val="400"/>
-              </a:spcBef>
-            </a:pPr>
-            <a:r>
-              <a:rPr sz="1400" b="0">
-                <a:solidFill>
-                  <a:srgbClr val="566070"/>
-                </a:solidFill>
-                <a:latin typeface="맑은 고딕"/>
-              </a:rPr>
-              <a:t>금융권에 “성장에 베팅하라”고 말하는 순간 생기는 문제</a:t>
-            </a:r>
-          </a:p>
-        </p:txBody>
-      </p:sp>
-    </p:spTree>
-  </p:cSld>
-  <p:clrMapOvr>
-    <a:masterClrMapping/>
-  </p:clrMapOvr>
-</p:sld>
-</file>
-
-<file path=ppt/slides/slide21.xml><?xml version="1.0" encoding="utf-8"?>
-<p:sld xmlns:a="http://schemas.openxmlformats.org/drawingml/2006/main" xmlns:p="http://schemas.openxmlformats.org/presentationml/2006/main" xmlns:r="http://schemas.openxmlformats.org/officeDocument/2006/relationships">
-  <p:cSld>
-    <p:bg>
-      <p:bgPr>
-        <a:solidFill>
-          <a:srgbClr val="F8F9FA"/>
-        </a:solidFill>
-        <a:effectLst/>
-      </p:bgPr>
-    </p:bg>
-    <p:spTree>
-      <p:nvGrpSpPr>
-        <p:cNvPr id="1" name=""/>
-        <p:cNvGrpSpPr/>
-        <p:nvPr/>
-      </p:nvGrpSpPr>
-      <p:grpSpPr/>
-      <p:sp>
-        <p:nvSpPr>
-          <p:cNvPr id="2" name="TextBox 1"/>
-          <p:cNvSpPr txBox="1"/>
-          <p:nvPr/>
-        </p:nvSpPr>
-        <p:spPr>
-          <a:xfrm>
-            <a:off x="572414" y="356616"/>
-            <a:ext cx="11192256" cy="521207"/>
-          </a:xfrm>
-          <a:prstGeom prst="rect">
-            <a:avLst/>
-          </a:prstGeom>
-          <a:noFill/>
-        </p:spPr>
-        <p:txBody>
-          <a:bodyPr wrap="square">
-            <a:spAutoFit/>
-          </a:bodyPr>
-          <a:lstStyle/>
-          <a:p>
-            <a:r>
-              <a:rPr sz="2800" b="0" u="none">
-                <a:solidFill>
-                  <a:srgbClr val="FF0000"/>
-                </a:solidFill>
-                <a:latin typeface="맑은 고딕"/>
-              </a:rPr>
-              <a:t>투자 이야기로 들리지 않게 조심해야 한다</a:t>
-            </a:r>
-          </a:p>
-        </p:txBody>
-      </p:sp>
-      <p:sp>
-        <p:nvSpPr>
-          <p:cNvPr id="3" name="Rectangle 2"/>
-          <p:cNvSpPr/>
-          <p:nvPr/>
-        </p:nvSpPr>
-        <p:spPr>
-          <a:xfrm>
-            <a:off x="713232" y="1417320"/>
-            <a:ext cx="4892040" cy="4114800"/>
-          </a:xfrm>
-          <a:prstGeom prst="rect">
-            <a:avLst/>
-          </a:prstGeom>
-          <a:solidFill>
-            <a:srgbClr val="F5F5F5"/>
-          </a:solidFill>
-          <a:ln w="12700">
-            <a:solidFill>
-              <a:srgbClr val="BEBEBE"/>
-            </a:solidFill>
-          </a:ln>
-        </p:spPr>
-        <p:style>
-          <a:lnRef idx="1">
-            <a:schemeClr val="accent1"/>
-          </a:lnRef>
-          <a:fillRef idx="3">
-            <a:schemeClr val="accent1"/>
-          </a:fillRef>
-          <a:effectRef idx="2">
-            <a:schemeClr val="accent1"/>
-          </a:effectRef>
-          <a:fontRef idx="minor">
-            <a:schemeClr val="lt1"/>
-          </a:fontRef>
-        </p:style>
-        <p:txBody>
-          <a:bodyPr rtlCol="0" anchor="ctr" wrap="square"/>
-          <a:lstStyle/>
-          <a:p>
-            <a:pPr algn="ctr"/>
-            <a:r>
-              <a:rPr sz="1800" b="0">
-                <a:solidFill>
-                  <a:srgbClr val="0070C0"/>
-                </a:solidFill>
-                <a:latin typeface="맑은 고딕"/>
-              </a:rPr>
-              <a:t>[도식]</a:t>
-            </a:r>
-          </a:p>
-        </p:txBody>
-      </p:sp>
-      <p:sp>
-        <p:nvSpPr>
-          <p:cNvPr id="4" name="TextBox 3"/>
-          <p:cNvSpPr txBox="1"/>
-          <p:nvPr/>
-        </p:nvSpPr>
-        <p:spPr>
-          <a:xfrm>
-            <a:off x="5989320" y="1508760"/>
-            <a:ext cx="5303520" cy="3337560"/>
-          </a:xfrm>
-          <a:prstGeom prst="rect">
-            <a:avLst/>
-          </a:prstGeom>
-          <a:noFill/>
-        </p:spPr>
-        <p:txBody>
-          <a:bodyPr wrap="square" anchor="ctr">
-            <a:spAutoFit/>
-          </a:bodyPr>
-          <a:lstStyle/>
-          <a:p>
-            <a:pPr>
-              <a:lnSpc>
-                <a:spcPct val="150000"/>
-              </a:lnSpc>
-              <a:spcAft>
-                <a:spcPts val="800"/>
-              </a:spcAft>
-            </a:pPr>
-            <a:r>
-              <a:rPr sz="2800" b="0" u="none">
-                <a:solidFill>
-                  <a:srgbClr val="000000"/>
-                </a:solidFill>
-                <a:latin typeface="맑은 고딕"/>
-              </a:rPr>
-              <a:t>이 주제는 곧바로 특정 산업·기업·펀드 투자 판단처럼 보일 수 있다.</a:t>
-            </a:r>
-          </a:p>
-          <a:p>
-            <a:pPr>
-              <a:lnSpc>
-                <a:spcPct val="150000"/>
-              </a:lnSpc>
-              <a:spcAft>
-                <a:spcPts val="800"/>
-              </a:spcAft>
-            </a:pPr>
-            <a:r>
-              <a:rPr sz="2800" b="0" u="none">
-                <a:solidFill>
-                  <a:srgbClr val="000000"/>
-                </a:solidFill>
-                <a:latin typeface="맑은 고딕"/>
-              </a:rPr>
-              <a:t>그래서 수익률, 주가, 매수·매도, 유망종목식 표현은 피해야 한다.</a:t>
-            </a:r>
-          </a:p>
-        </p:txBody>
-      </p:sp>
-    </p:spTree>
-  </p:cSld>
-  <p:clrMapOvr>
-    <a:masterClrMapping/>
-  </p:clrMapOvr>
-</p:sld>
-</file>
-
-<file path=ppt/slides/slide22.xml><?xml version="1.0" encoding="utf-8"?>
-<p:sld xmlns:a="http://schemas.openxmlformats.org/drawingml/2006/main" xmlns:p="http://schemas.openxmlformats.org/presentationml/2006/main" xmlns:r="http://schemas.openxmlformats.org/officeDocument/2006/relationships">
-  <p:cSld>
-    <p:bg>
-      <p:bgPr>
-        <a:solidFill>
-          <a:srgbClr val="F8F9FA"/>
-        </a:solidFill>
-        <a:effectLst/>
-      </p:bgPr>
-    </p:bg>
-    <p:spTree>
-      <p:nvGrpSpPr>
-        <p:cNvPr id="1" name=""/>
-        <p:cNvGrpSpPr/>
-        <p:nvPr/>
-      </p:nvGrpSpPr>
-      <p:grpSpPr/>
-      <p:sp>
-        <p:nvSpPr>
-          <p:cNvPr id="2" name="TextBox 1"/>
-          <p:cNvSpPr txBox="1"/>
-          <p:nvPr/>
-        </p:nvSpPr>
-        <p:spPr>
-          <a:xfrm>
-            <a:off x="572414" y="356616"/>
-            <a:ext cx="11192256" cy="521207"/>
-          </a:xfrm>
-          <a:prstGeom prst="rect">
-            <a:avLst/>
-          </a:prstGeom>
-          <a:noFill/>
-        </p:spPr>
-        <p:txBody>
-          <a:bodyPr wrap="square">
-            <a:spAutoFit/>
-          </a:bodyPr>
-          <a:lstStyle/>
-          <a:p>
-            <a:r>
-              <a:rPr sz="2800" b="0" u="none">
-                <a:solidFill>
-                  <a:srgbClr val="FF0000"/>
-                </a:solidFill>
-                <a:latin typeface="맑은 고딕"/>
-              </a:rPr>
-              <a:t>금융은 위험을 피하는 기술인가, 좋은 위험을 고르는 기술인가</a:t>
-            </a:r>
-          </a:p>
-        </p:txBody>
-      </p:sp>
-      <p:sp>
-        <p:nvSpPr>
-          <p:cNvPr id="3" name="Rectangle 2"/>
-          <p:cNvSpPr/>
-          <p:nvPr/>
-        </p:nvSpPr>
-        <p:spPr>
-          <a:xfrm>
-            <a:off x="713232" y="1417320"/>
-            <a:ext cx="4892040" cy="4114800"/>
-          </a:xfrm>
-          <a:prstGeom prst="rect">
-            <a:avLst/>
-          </a:prstGeom>
-          <a:solidFill>
-            <a:srgbClr val="F5F5F5"/>
-          </a:solidFill>
-          <a:ln w="12700">
-            <a:solidFill>
-              <a:srgbClr val="BEBEBE"/>
-            </a:solidFill>
-          </a:ln>
-        </p:spPr>
-        <p:style>
-          <a:lnRef idx="1">
-            <a:schemeClr val="accent1"/>
-          </a:lnRef>
-          <a:fillRef idx="3">
-            <a:schemeClr val="accent1"/>
-          </a:fillRef>
-          <a:effectRef idx="2">
-            <a:schemeClr val="accent1"/>
-          </a:effectRef>
-          <a:fontRef idx="minor">
-            <a:schemeClr val="lt1"/>
-          </a:fontRef>
-        </p:style>
-        <p:txBody>
-          <a:bodyPr rtlCol="0" anchor="ctr" wrap="square"/>
-          <a:lstStyle/>
-          <a:p>
-            <a:pPr algn="ctr"/>
-            <a:r>
-              <a:rPr sz="1800" b="0">
-                <a:solidFill>
-                  <a:srgbClr val="0070C0"/>
-                </a:solidFill>
-                <a:latin typeface="맑은 고딕"/>
-              </a:rPr>
-              <a:t>[기사 인용]</a:t>
-            </a:r>
-          </a:p>
-          <a:p>
-            <a:pPr algn="ctr">
-              <a:spcBef>
-                <a:spcPts val="800"/>
-              </a:spcBef>
-            </a:pPr>
-            <a:r>
-              <a:rPr sz="1800" b="1">
-                <a:solidFill>
-                  <a:srgbClr val="000000"/>
-                </a:solidFill>
-                <a:latin typeface="맑은 고딕"/>
-              </a:rPr>
-              <a:t>금융위원회</a:t>
-            </a:r>
-          </a:p>
-          <a:p>
-            <a:pPr algn="ctr">
-              <a:spcBef>
-                <a:spcPts val="400"/>
-              </a:spcBef>
-            </a:pPr>
-            <a:r>
-              <a:rPr sz="1400" b="0">
-                <a:solidFill>
-                  <a:srgbClr val="566070"/>
-                </a:solidFill>
-                <a:latin typeface="맑은 고딕"/>
-              </a:rPr>
-              <a:t>금융은 위험을 피하는 기술인가, 좋은 위험을 고르는 기술인가</a:t>
-            </a:r>
-          </a:p>
-        </p:txBody>
-      </p:sp>
-      <p:sp>
-        <p:nvSpPr>
-          <p:cNvPr id="4" name="TextBox 3"/>
-          <p:cNvSpPr txBox="1"/>
-          <p:nvPr/>
-        </p:nvSpPr>
-        <p:spPr>
-          <a:xfrm>
-            <a:off x="5989320" y="2103120"/>
-            <a:ext cx="5303520" cy="2926080"/>
-          </a:xfrm>
-          <a:prstGeom prst="rect">
-            <a:avLst/>
-          </a:prstGeom>
-          <a:noFill/>
-        </p:spPr>
-        <p:txBody>
-          <a:bodyPr wrap="square" anchor="ctr">
-            <a:spAutoFit/>
-          </a:bodyPr>
-          <a:lstStyle/>
-          <a:p>
-            <a:pPr>
-              <a:lnSpc>
-                <a:spcPct val="150000"/>
-              </a:lnSpc>
-              <a:spcAft>
-                <a:spcPts val="800"/>
-              </a:spcAft>
-            </a:pPr>
-            <a:r>
-              <a:rPr sz="2800" b="0" u="none">
-                <a:solidFill>
-                  <a:srgbClr val="000000"/>
-                </a:solidFill>
-                <a:latin typeface="맑은 고딕"/>
-              </a:rPr>
-              <a:t>생산적 금융의 질문은 “정부 정책이 맞다/틀리다”가 아니다.</a:t>
-            </a:r>
-          </a:p>
-          <a:p>
-            <a:pPr>
-              <a:lnSpc>
-                <a:spcPct val="150000"/>
-              </a:lnSpc>
-              <a:spcAft>
-                <a:spcPts val="800"/>
-              </a:spcAft>
-            </a:pPr>
-            <a:r>
-              <a:rPr sz="2800" b="0" u="none">
-                <a:solidFill>
-                  <a:srgbClr val="000000"/>
-                </a:solidFill>
-                <a:latin typeface="맑은 고딕"/>
-              </a:rPr>
-              <a:t>좋은 위험을 고르는 능력, 손실을 나누는 규칙, 금융권 건전성을 함께 설계할 수 있느냐는 질문이다.</a:t>
-            </a:r>
-          </a:p>
-        </p:txBody>
-      </p:sp>
-    </p:spTree>
-  </p:cSld>
-  <p:clrMapOvr>
-    <a:masterClrMapping/>
-  </p:clrMapOvr>
-</p:sld>
-</file>
-
-<file path=ppt/slides/slide23.xml><?xml version="1.0" encoding="utf-8"?>
-<p:sld xmlns:a="http://schemas.openxmlformats.org/drawingml/2006/main" xmlns:p="http://schemas.openxmlformats.org/presentationml/2006/main" xmlns:r="http://schemas.openxmlformats.org/officeDocument/2006/relationships">
-  <p:cSld>
-    <p:bg>
-      <p:bgPr>
-        <a:solidFill>
-          <a:srgbClr val="F8F9FA"/>
-        </a:solidFill>
-        <a:effectLst/>
-      </p:bgPr>
-    </p:bg>
-    <p:spTree>
-      <p:nvGrpSpPr>
-        <p:cNvPr id="1" name=""/>
-        <p:cNvGrpSpPr/>
-        <p:nvPr/>
-      </p:nvGrpSpPr>
-      <p:grpSpPr/>
-      <p:sp>
-        <p:nvSpPr>
-          <p:cNvPr id="2" name="TextBox 1"/>
-          <p:cNvSpPr txBox="1"/>
-          <p:nvPr/>
-        </p:nvSpPr>
-        <p:spPr>
-          <a:xfrm>
-            <a:off x="3495751" y="3058668"/>
-            <a:ext cx="3383280" cy="523036"/>
-          </a:xfrm>
-          <a:prstGeom prst="rect">
-            <a:avLst/>
-          </a:prstGeom>
-          <a:noFill/>
-        </p:spPr>
-        <p:txBody>
-          <a:bodyPr wrap="square">
-            <a:spAutoFit/>
-          </a:bodyPr>
-          <a:lstStyle/>
-          <a:p>
-            <a:r>
-              <a:rPr sz="2800" b="1" u="none">
-                <a:solidFill>
-                  <a:srgbClr val="0070C0"/>
-                </a:solidFill>
-                <a:latin typeface="맑은 고딕"/>
-              </a:rPr>
-              <a:t>[내부 체크리스트] 이 부분은 아직 숫자가 필요하다</a:t>
-            </a:r>
-          </a:p>
-        </p:txBody>
-      </p:sp>
-      <p:sp>
-        <p:nvSpPr>
-          <p:cNvPr id="3" name="TextBox 2"/>
-          <p:cNvSpPr txBox="1"/>
-          <p:nvPr/>
-        </p:nvSpPr>
-        <p:spPr>
-          <a:xfrm>
-            <a:off x="822960" y="3810304"/>
-            <a:ext cx="10424160" cy="4480560"/>
-          </a:xfrm>
-          <a:prstGeom prst="rect">
-            <a:avLst/>
-          </a:prstGeom>
-          <a:noFill/>
-        </p:spPr>
-        <p:txBody>
-          <a:bodyPr wrap="square" anchor="ctr">
-            <a:spAutoFit/>
-          </a:bodyPr>
-          <a:lstStyle/>
-          <a:p>
-            <a:pPr>
-              <a:lnSpc>
-                <a:spcPct val="150000"/>
-              </a:lnSpc>
-              <a:spcAft>
-                <a:spcPts val="800"/>
-              </a:spcAft>
-            </a:pPr>
-            <a:r>
-              <a:rPr sz="2400" b="0" u="none">
-                <a:solidFill>
-                  <a:srgbClr val="0070C0"/>
-                </a:solidFill>
-                <a:latin typeface="맑은 고딕"/>
-              </a:rPr>
-              <a:t>방송 전 숫자 체크리스트: 150조 원 전체 규모, 2026년 30조 원 운용, 국민참여형 6000억 원, 재정 1200억 원, 손실 우선 부담 20% 범위.</a:t>
-            </a:r>
-          </a:p>
-          <a:p>
-            <a:pPr>
-              <a:lnSpc>
-                <a:spcPct val="150000"/>
-              </a:lnSpc>
-              <a:spcAft>
-                <a:spcPts val="800"/>
-              </a:spcAft>
-            </a:pPr>
-            <a:r>
-              <a:rPr sz="2400" b="0" u="none">
-                <a:solidFill>
-                  <a:srgbClr val="0070C0"/>
-                </a:solidFill>
-                <a:latin typeface="맑은 고딕"/>
-              </a:rPr>
-              <a:t>정책 효과가 아니라 구조를 설명하는 숫자로만 사용한다.</a:t>
-            </a:r>
-          </a:p>
-          <a:p>
-            <a:pPr>
-              <a:lnSpc>
-                <a:spcPct val="150000"/>
-              </a:lnSpc>
-              <a:spcAft>
-                <a:spcPts val="800"/>
-              </a:spcAft>
-            </a:pPr>
-            <a:r>
-              <a:rPr sz="2400" b="0" u="none">
-                <a:solidFill>
-                  <a:srgbClr val="0070C0"/>
-                </a:solidFill>
-                <a:latin typeface="맑은 고딕"/>
-              </a:rPr>
-              <a:t>추가로 정책금융 실패 사례와 은행 건전성 자료를 더 확인하면 완성도가 올라간다.</a:t>
-            </a:r>
-          </a:p>
-        </p:txBody>
-      </p:sp>
-    </p:spTree>
-  </p:cSld>
-  <p:clrMapOvr>
-    <a:masterClrMapping/>
-  </p:clrMapOvr>
-</p:sld>
-</file>
-
-<file path=ppt/slides/slide24.xml><?xml version="1.0" encoding="utf-8"?>
-<p:sld xmlns:a="http://schemas.openxmlformats.org/drawingml/2006/main" xmlns:p="http://schemas.openxmlformats.org/presentationml/2006/main" xmlns:r="http://schemas.openxmlformats.org/officeDocument/2006/relationships">
-  <p:cSld>
-    <p:bg>
-      <p:bgPr>
-        <a:solidFill>
-          <a:srgbClr val="F8F9FA"/>
-        </a:solidFill>
-        <a:effectLst/>
-      </p:bgPr>
-    </p:bg>
-    <p:spTree>
-      <p:nvGrpSpPr>
-        <p:cNvPr id="1" name=""/>
-        <p:cNvGrpSpPr/>
-        <p:nvPr/>
-      </p:nvGrpSpPr>
-      <p:grpSpPr/>
-      <p:sp>
-        <p:nvSpPr>
-          <p:cNvPr id="2" name="TextBox 1"/>
-          <p:cNvSpPr txBox="1"/>
-          <p:nvPr/>
-        </p:nvSpPr>
-        <p:spPr>
-          <a:xfrm>
-            <a:off x="3495751" y="3058668"/>
-            <a:ext cx="3383280" cy="523036"/>
-          </a:xfrm>
-          <a:prstGeom prst="rect">
-            <a:avLst/>
-          </a:prstGeom>
-          <a:noFill/>
-        </p:spPr>
-        <p:txBody>
-          <a:bodyPr wrap="square">
-            <a:spAutoFit/>
-          </a:bodyPr>
-          <a:lstStyle/>
-          <a:p>
-            <a:r>
-              <a:rPr sz="2800" b="1" u="none">
-                <a:solidFill>
-                  <a:srgbClr val="0070C0"/>
-                </a:solidFill>
-                <a:latin typeface="맑은 고딕"/>
-              </a:rPr>
-              <a:t>[내부 체크리스트] 방송 전 꼭 채워야 할 자료</a:t>
-            </a:r>
-          </a:p>
-        </p:txBody>
-      </p:sp>
-      <p:sp>
-        <p:nvSpPr>
-          <p:cNvPr id="3" name="TextBox 2"/>
-          <p:cNvSpPr txBox="1"/>
-          <p:nvPr/>
-        </p:nvSpPr>
-        <p:spPr>
-          <a:xfrm>
-            <a:off x="822960" y="3810304"/>
-            <a:ext cx="10424160" cy="4480560"/>
-          </a:xfrm>
-          <a:prstGeom prst="rect">
-            <a:avLst/>
-          </a:prstGeom>
-          <a:noFill/>
-        </p:spPr>
-        <p:txBody>
-          <a:bodyPr wrap="square" anchor="ctr">
-            <a:spAutoFit/>
-          </a:bodyPr>
-          <a:lstStyle/>
-          <a:p>
-            <a:pPr>
-              <a:lnSpc>
-                <a:spcPct val="150000"/>
-              </a:lnSpc>
-              <a:spcAft>
-                <a:spcPts val="800"/>
-              </a:spcAft>
-            </a:pPr>
-            <a:r>
-              <a:rPr sz="2400" b="0" u="none">
-                <a:solidFill>
-                  <a:srgbClr val="0070C0"/>
-                </a:solidFill>
-                <a:latin typeface="맑은 고딕"/>
-              </a:rPr>
-              <a:t>방송 전 꼭 채워야 할 자료: 금융위/산은 공식 원문, 국민참여형 펀드 손실분담 구조, AI·반도체 장기 투자 규모, 관치금융/정책금융 실패 반론, 은행 건전성·위험가중자산 자료.</a:t>
-            </a:r>
-          </a:p>
-          <a:p>
-            <a:pPr>
-              <a:lnSpc>
-                <a:spcPct val="150000"/>
-              </a:lnSpc>
-              <a:spcAft>
-                <a:spcPts val="800"/>
-              </a:spcAft>
-            </a:pPr>
-            <a:r>
-              <a:rPr sz="2400" b="0" u="none">
-                <a:solidFill>
-                  <a:srgbClr val="0070C0"/>
-                </a:solidFill>
-                <a:latin typeface="맑은 고딕"/>
-              </a:rPr>
-              <a:t>지금 evidence pack은 enriched dry run에는 충분하지만, 방송용 완성본에는 추가 counterpoint가 필요하다.</a:t>
-            </a:r>
-          </a:p>
-        </p:txBody>
-      </p:sp>
-    </p:spTree>
-  </p:cSld>
-  <p:clrMapOvr>
-    <a:masterClrMapping/>
-  </p:clrMapOvr>
-</p:sld>
-</file>
-
-<file path=ppt/slides/slide3.xml><?xml version="1.0" encoding="utf-8"?>
-<p:sld xmlns:a="http://schemas.openxmlformats.org/drawingml/2006/main" xmlns:p="http://schemas.openxmlformats.org/presentationml/2006/main" xmlns:r="http://schemas.openxmlformats.org/officeDocument/2006/relationships">
-  <p:cSld>
-    <p:bg>
-      <p:bgPr>
-        <a:solidFill>
-          <a:srgbClr val="F8F9FA"/>
-        </a:solidFill>
-        <a:effectLst/>
-      </p:bgPr>
-    </p:bg>
-    <p:spTree>
-      <p:nvGrpSpPr>
-        <p:cNvPr id="1" name=""/>
-        <p:cNvGrpSpPr/>
-        <p:nvPr/>
-      </p:nvGrpSpPr>
-      <p:grpSpPr/>
-      <p:sp>
-        <p:nvSpPr>
-          <p:cNvPr id="2" name="TextBox 1"/>
-          <p:cNvSpPr txBox="1"/>
-          <p:nvPr/>
-        </p:nvSpPr>
-        <p:spPr>
-          <a:xfrm>
-            <a:off x="572414" y="356616"/>
-            <a:ext cx="11192256" cy="521207"/>
-          </a:xfrm>
-          <a:prstGeom prst="rect">
-            <a:avLst/>
-          </a:prstGeom>
-          <a:noFill/>
-        </p:spPr>
-        <p:txBody>
-          <a:bodyPr wrap="square">
-            <a:spAutoFit/>
-          </a:bodyPr>
-          <a:lstStyle/>
-          <a:p>
-            <a:r>
-              <a:rPr sz="2800" b="0" u="none">
-                <a:solidFill>
-                  <a:srgbClr val="FF0000"/>
-                </a:solidFill>
-                <a:latin typeface="맑은 고딕"/>
-              </a:rPr>
-              <a:t>은행 입장에서는 담보가 제일 편하다</a:t>
-            </a:r>
-          </a:p>
-        </p:txBody>
-      </p:sp>
-      <p:sp>
-        <p:nvSpPr>
-          <p:cNvPr id="3" name="TextBox 2"/>
-          <p:cNvSpPr txBox="1"/>
-          <p:nvPr/>
-        </p:nvSpPr>
-        <p:spPr>
-          <a:xfrm>
-            <a:off x="5989320" y="1208836"/>
-            <a:ext cx="5394960" cy="1302105"/>
-          </a:xfrm>
-          <a:prstGeom prst="rect">
-            <a:avLst/>
-          </a:prstGeom>
-          <a:noFill/>
-        </p:spPr>
-        <p:txBody>
-          <a:bodyPr wrap="square" anchor="ctr">
-            <a:spAutoFit/>
-          </a:bodyPr>
-          <a:lstStyle/>
-          <a:p>
-            <a:pPr>
-              <a:lnSpc>
-                <a:spcPct val="150000"/>
-              </a:lnSpc>
-              <a:spcAft>
-                <a:spcPts val="800"/>
-              </a:spcAft>
-            </a:pPr>
-            <a:r>
-              <a:rPr sz="2800" b="0" u="none">
-                <a:solidFill>
-                  <a:srgbClr val="000000"/>
-                </a:solidFill>
-                <a:latin typeface="맑은 고딕"/>
-              </a:rPr>
-              <a:t>돈을 빌려줄 때 가장 쉬운 질문은 “담보가 있나?”다.</a:t>
-            </a:r>
-          </a:p>
-          <a:p>
-            <a:pPr>
-              <a:lnSpc>
-                <a:spcPct val="150000"/>
-              </a:lnSpc>
-              <a:spcAft>
-                <a:spcPts val="800"/>
-              </a:spcAft>
-            </a:pPr>
-            <a:r>
-              <a:rPr sz="2800" b="0" u="none">
-                <a:solidFill>
-                  <a:srgbClr val="000000"/>
-                </a:solidFill>
-                <a:latin typeface="맑은 고딕"/>
-              </a:rPr>
-              <a:t>은행은 자본규제와 위험가중자산을 고려해야 하므로, 위험한 자산을 무한정 늘릴 수 없다.</a:t>
-            </a:r>
-          </a:p>
-        </p:txBody>
-      </p:sp>
-      <p:sp>
-        <p:nvSpPr>
-          <p:cNvPr id="4" name="Rectangle 3"/>
-          <p:cNvSpPr/>
-          <p:nvPr/>
-        </p:nvSpPr>
-        <p:spPr>
-          <a:xfrm>
-            <a:off x="713232" y="1417320"/>
-            <a:ext cx="4892040" cy="4114800"/>
-          </a:xfrm>
-          <a:prstGeom prst="rect">
-            <a:avLst/>
-          </a:prstGeom>
-          <a:solidFill>
-            <a:srgbClr val="F5F5F5"/>
-          </a:solidFill>
-          <a:ln w="12700">
-            <a:solidFill>
-              <a:srgbClr val="BEBEBE"/>
-            </a:solidFill>
-          </a:ln>
-        </p:spPr>
-        <p:style>
-          <a:lnRef idx="1">
-            <a:schemeClr val="accent1"/>
-          </a:lnRef>
-          <a:fillRef idx="3">
-            <a:schemeClr val="accent1"/>
-          </a:fillRef>
-          <a:effectRef idx="2">
-            <a:schemeClr val="accent1"/>
-          </a:effectRef>
-          <a:fontRef idx="minor">
-            <a:schemeClr val="lt1"/>
-          </a:fontRef>
-        </p:style>
-        <p:txBody>
-          <a:bodyPr rtlCol="0" anchor="ctr" wrap="square"/>
-          <a:lstStyle/>
-          <a:p>
-            <a:pPr algn="ctr"/>
-            <a:r>
-              <a:rPr sz="1800" b="0">
-                <a:solidFill>
-                  <a:srgbClr val="0070C0"/>
-                </a:solidFill>
-                <a:latin typeface="맑은 고딕"/>
-              </a:rPr>
-              <a:t>[기사 인용]</a:t>
-            </a:r>
-          </a:p>
-          <a:p>
-            <a:pPr algn="ctr">
-              <a:spcBef>
-                <a:spcPts val="800"/>
-              </a:spcBef>
-            </a:pPr>
-            <a:r>
-              <a:rPr sz="1800" b="1">
-                <a:solidFill>
-                  <a:srgbClr val="000000"/>
-                </a:solidFill>
-                <a:latin typeface="맑은 고딕"/>
-              </a:rPr>
-              <a:t>BIS</a:t>
-            </a:r>
-          </a:p>
-          <a:p>
-            <a:pPr algn="ctr">
-              <a:spcBef>
-                <a:spcPts val="400"/>
-              </a:spcBef>
-            </a:pPr>
-            <a:r>
-              <a:rPr sz="1400" b="0">
-                <a:solidFill>
-                  <a:srgbClr val="566070"/>
-                </a:solidFill>
-                <a:latin typeface="맑은 고딕"/>
-              </a:rPr>
-              <a:t>은행 입장에서는 담보가 제일 편하다</a:t>
-            </a:r>
-          </a:p>
-        </p:txBody>
-      </p:sp>
-    </p:spTree>
-  </p:cSld>
-  <p:clrMapOvr>
-    <a:masterClrMapping/>
-  </p:clrMapOvr>
-</p:sld>
-</file>
-
-<file path=ppt/slides/slide4.xml><?xml version="1.0" encoding="utf-8"?>
-<p:sld xmlns:a="http://schemas.openxmlformats.org/drawingml/2006/main" xmlns:p="http://schemas.openxmlformats.org/presentationml/2006/main" xmlns:r="http://schemas.openxmlformats.org/officeDocument/2006/relationships">
-  <p:cSld>
-    <p:bg>
-      <p:bgPr>
-        <a:solidFill>
-          <a:srgbClr val="F8F9FA"/>
-        </a:solidFill>
-        <a:effectLst/>
-      </p:bgPr>
-    </p:bg>
-    <p:spTree>
-      <p:nvGrpSpPr>
-        <p:cNvPr id="1" name=""/>
-        <p:cNvGrpSpPr/>
-        <p:nvPr/>
-      </p:nvGrpSpPr>
-      <p:grpSpPr/>
-      <p:sp>
-        <p:nvSpPr>
-          <p:cNvPr id="2" name="TextBox 1"/>
-          <p:cNvSpPr txBox="1"/>
-          <p:nvPr/>
-        </p:nvSpPr>
-        <p:spPr>
-          <a:xfrm>
-            <a:off x="572414" y="356616"/>
-            <a:ext cx="11192256" cy="521207"/>
-          </a:xfrm>
-          <a:prstGeom prst="rect">
-            <a:avLst/>
-          </a:prstGeom>
-          <a:noFill/>
-        </p:spPr>
-        <p:txBody>
-          <a:bodyPr wrap="square">
-            <a:spAutoFit/>
-          </a:bodyPr>
-          <a:lstStyle/>
-          <a:p>
-            <a:r>
-              <a:rPr sz="2800" b="0" u="none">
-                <a:solidFill>
-                  <a:srgbClr val="FF0000"/>
-                </a:solidFill>
-                <a:latin typeface="맑은 고딕"/>
-              </a:rPr>
-              <a:t>그런데 AI 산업은 담보보다 시간이 먼저 필요하다</a:t>
-            </a:r>
-          </a:p>
-        </p:txBody>
-      </p:sp>
-      <p:sp>
-        <p:nvSpPr>
-          <p:cNvPr id="3" name="Rectangle 2"/>
-          <p:cNvSpPr/>
-          <p:nvPr/>
-        </p:nvSpPr>
-        <p:spPr>
-          <a:xfrm>
-            <a:off x="713232" y="1417320"/>
-            <a:ext cx="4892040" cy="4114800"/>
-          </a:xfrm>
-          <a:prstGeom prst="rect">
-            <a:avLst/>
-          </a:prstGeom>
-          <a:solidFill>
-            <a:srgbClr val="F5F5F5"/>
-          </a:solidFill>
-          <a:ln w="12700">
-            <a:solidFill>
-              <a:srgbClr val="BEBEBE"/>
-            </a:solidFill>
-          </a:ln>
-        </p:spPr>
-        <p:style>
-          <a:lnRef idx="1">
-            <a:schemeClr val="accent1"/>
-          </a:lnRef>
-          <a:fillRef idx="3">
-            <a:schemeClr val="accent1"/>
-          </a:fillRef>
-          <a:effectRef idx="2">
-            <a:schemeClr val="accent1"/>
-          </a:effectRef>
-          <a:fontRef idx="minor">
-            <a:schemeClr val="lt1"/>
-          </a:fontRef>
-        </p:style>
-        <p:txBody>
-          <a:bodyPr rtlCol="0" anchor="ctr" wrap="square"/>
-          <a:lstStyle/>
-          <a:p>
-            <a:pPr algn="ctr"/>
-            <a:r>
-              <a:rPr sz="1800" b="0">
-                <a:solidFill>
-                  <a:srgbClr val="0070C0"/>
-                </a:solidFill>
-                <a:latin typeface="맑은 고딕"/>
-              </a:rPr>
-              <a:t>[도식]</a:t>
-            </a:r>
-          </a:p>
-        </p:txBody>
-      </p:sp>
-      <p:sp>
-        <p:nvSpPr>
-          <p:cNvPr id="4" name="TextBox 3"/>
-          <p:cNvSpPr txBox="1"/>
-          <p:nvPr/>
-        </p:nvSpPr>
-        <p:spPr>
-          <a:xfrm>
-            <a:off x="5989320" y="2103120"/>
-            <a:ext cx="5303520" cy="2926080"/>
-          </a:xfrm>
-          <a:prstGeom prst="rect">
-            <a:avLst/>
-          </a:prstGeom>
-          <a:noFill/>
-        </p:spPr>
-        <p:txBody>
-          <a:bodyPr wrap="square" anchor="ctr">
-            <a:spAutoFit/>
-          </a:bodyPr>
-          <a:lstStyle/>
-          <a:p>
-            <a:pPr>
-              <a:lnSpc>
-                <a:spcPct val="150000"/>
-              </a:lnSpc>
-              <a:spcAft>
-                <a:spcPts val="800"/>
-              </a:spcAft>
-            </a:pPr>
-            <a:r>
-              <a:rPr sz="2800" b="0" u="none">
-                <a:solidFill>
-                  <a:srgbClr val="000000"/>
-                </a:solidFill>
-                <a:latin typeface="맑은 고딕"/>
-              </a:rPr>
-              <a:t>AI와 반도체는 소프트웨어 개발비만의 문제가 아니라 설비, 전력, 공정, 인력, 공급망이 함께 필요한 산업이다.</a:t>
-            </a:r>
-          </a:p>
-          <a:p>
-            <a:pPr>
-              <a:lnSpc>
-                <a:spcPct val="150000"/>
-              </a:lnSpc>
-              <a:spcAft>
-                <a:spcPts val="800"/>
-              </a:spcAft>
-            </a:pPr>
-            <a:r>
-              <a:rPr sz="2800" b="0" u="none">
-                <a:solidFill>
-                  <a:srgbClr val="000000"/>
-                </a:solidFill>
-                <a:latin typeface="맑은 고딕"/>
-              </a:rPr>
-              <a:t>정책자료는 국민성장펀드가 AI·반도체 같은 첨단전략산업에 장기 자금을 공급하려는 틀이라고 설명한다.</a:t>
-            </a:r>
-          </a:p>
-        </p:txBody>
-      </p:sp>
-    </p:spTree>
-  </p:cSld>
-  <p:clrMapOvr>
-    <a:masterClrMapping/>
-  </p:clrMapOvr>
-</p:sld>
-</file>
-
-<file path=ppt/slides/slide5.xml><?xml version="1.0" encoding="utf-8"?>
-<p:sld xmlns:a="http://schemas.openxmlformats.org/drawingml/2006/main" xmlns:p="http://schemas.openxmlformats.org/presentationml/2006/main" xmlns:r="http://schemas.openxmlformats.org/officeDocument/2006/relationships">
-  <p:cSld>
-    <p:bg>
-      <p:bgPr>
-        <a:solidFill>
-          <a:srgbClr val="F8F9FA"/>
-        </a:solidFill>
-        <a:effectLst/>
-      </p:bgPr>
-    </p:bg>
-    <p:spTree>
-      <p:nvGrpSpPr>
-        <p:cNvPr id="1" name=""/>
-        <p:cNvGrpSpPr/>
-        <p:nvPr/>
-      </p:nvGrpSpPr>
-      <p:grpSpPr/>
-      <p:sp>
-        <p:nvSpPr>
-          <p:cNvPr id="2" name="TextBox 1"/>
-          <p:cNvSpPr txBox="1"/>
-          <p:nvPr/>
-        </p:nvSpPr>
-        <p:spPr>
-          <a:xfrm>
-            <a:off x="572414" y="356616"/>
-            <a:ext cx="11192256" cy="521207"/>
-          </a:xfrm>
-          <a:prstGeom prst="rect">
-            <a:avLst/>
-          </a:prstGeom>
-          <a:noFill/>
-        </p:spPr>
-        <p:txBody>
-          <a:bodyPr wrap="square">
-            <a:spAutoFit/>
-          </a:bodyPr>
-          <a:lstStyle/>
-          <a:p>
-            <a:r>
-              <a:rPr sz="2800" b="0" u="none">
-                <a:solidFill>
-                  <a:srgbClr val="FF0000"/>
-                </a:solidFill>
-                <a:latin typeface="맑은 고딕"/>
-              </a:rPr>
-              <a:t>금융은 원래 안전해야 하는가, 위험을 져야 하는가</a:t>
-            </a:r>
-          </a:p>
-        </p:txBody>
-      </p:sp>
-      <p:sp>
-        <p:nvSpPr>
-          <p:cNvPr id="3" name="Rectangle 2"/>
-          <p:cNvSpPr/>
-          <p:nvPr/>
-        </p:nvSpPr>
-        <p:spPr>
-          <a:xfrm>
-            <a:off x="713232" y="1417320"/>
-            <a:ext cx="4892040" cy="4114800"/>
-          </a:xfrm>
-          <a:prstGeom prst="rect">
-            <a:avLst/>
-          </a:prstGeom>
-          <a:solidFill>
-            <a:srgbClr val="F5F5F5"/>
-          </a:solidFill>
-          <a:ln w="12700">
-            <a:solidFill>
-              <a:srgbClr val="BEBEBE"/>
-            </a:solidFill>
-          </a:ln>
-        </p:spPr>
-        <p:style>
-          <a:lnRef idx="1">
-            <a:schemeClr val="accent1"/>
-          </a:lnRef>
-          <a:fillRef idx="3">
-            <a:schemeClr val="accent1"/>
-          </a:fillRef>
-          <a:effectRef idx="2">
-            <a:schemeClr val="accent1"/>
-          </a:effectRef>
-          <a:fontRef idx="minor">
-            <a:schemeClr val="lt1"/>
-          </a:fontRef>
-        </p:style>
-        <p:txBody>
-          <a:bodyPr rtlCol="0" anchor="ctr" wrap="square"/>
-          <a:lstStyle/>
-          <a:p>
-            <a:pPr algn="ctr"/>
-            <a:r>
-              <a:rPr sz="1800" b="0">
-                <a:solidFill>
-                  <a:srgbClr val="0070C0"/>
-                </a:solidFill>
-                <a:latin typeface="맑은 고딕"/>
-              </a:rPr>
-              <a:t>[도식]</a:t>
-            </a:r>
-          </a:p>
-        </p:txBody>
-      </p:sp>
-      <p:sp>
-        <p:nvSpPr>
-          <p:cNvPr id="4" name="TextBox 3"/>
-          <p:cNvSpPr txBox="1"/>
-          <p:nvPr/>
-        </p:nvSpPr>
-        <p:spPr>
-          <a:xfrm>
-            <a:off x="5989320" y="2103120"/>
-            <a:ext cx="5303520" cy="2926080"/>
-          </a:xfrm>
-          <a:prstGeom prst="rect">
-            <a:avLst/>
-          </a:prstGeom>
-          <a:noFill/>
-        </p:spPr>
-        <p:txBody>
-          <a:bodyPr wrap="square" anchor="ctr">
-            <a:spAutoFit/>
-          </a:bodyPr>
-          <a:lstStyle/>
-          <a:p>
-            <a:pPr>
-              <a:lnSpc>
-                <a:spcPct val="150000"/>
-              </a:lnSpc>
-              <a:spcAft>
-                <a:spcPts val="800"/>
-              </a:spcAft>
-            </a:pPr>
-            <a:r>
-              <a:rPr sz="2800" b="0" u="none">
-                <a:solidFill>
-                  <a:srgbClr val="000000"/>
-                </a:solidFill>
-                <a:latin typeface="맑은 고딕"/>
-              </a:rPr>
-              <a:t>너무 안전하면 성장산업이 돈을 못 받는다.</a:t>
-            </a:r>
-          </a:p>
-          <a:p>
-            <a:pPr>
-              <a:lnSpc>
-                <a:spcPct val="150000"/>
-              </a:lnSpc>
-              <a:spcAft>
-                <a:spcPts val="800"/>
-              </a:spcAft>
-            </a:pPr>
-            <a:r>
-              <a:rPr sz="2800" b="0" u="none">
-                <a:solidFill>
-                  <a:srgbClr val="000000"/>
-                </a:solidFill>
-                <a:latin typeface="맑은 고딕"/>
-              </a:rPr>
-              <a:t>너무 위험하면 결국 손실을 누가 떠안느냐는 문제가 생긴다.</a:t>
-            </a:r>
-          </a:p>
-        </p:txBody>
-      </p:sp>
-    </p:spTree>
-  </p:cSld>
-  <p:clrMapOvr>
-    <a:masterClrMapping/>
-  </p:clrMapOvr>
-</p:sld>
-</file>
-
-<file path=ppt/slides/slide6.xml><?xml version="1.0" encoding="utf-8"?>
-<p:sld xmlns:a="http://schemas.openxmlformats.org/drawingml/2006/main" xmlns:p="http://schemas.openxmlformats.org/presentationml/2006/main" xmlns:r="http://schemas.openxmlformats.org/officeDocument/2006/relationships">
-  <p:cSld>
-    <p:bg>
-      <p:bgPr>
-        <a:solidFill>
-          <a:srgbClr val="F8F9FA"/>
-        </a:solidFill>
-        <a:effectLst/>
-      </p:bgPr>
-    </p:bg>
-    <p:spTree>
-      <p:nvGrpSpPr>
-        <p:cNvPr id="1" name=""/>
-        <p:cNvGrpSpPr/>
-        <p:nvPr/>
-      </p:nvGrpSpPr>
-      <p:grpSpPr/>
-      <p:sp>
-        <p:nvSpPr>
-          <p:cNvPr id="2" name="TextBox 1"/>
-          <p:cNvSpPr txBox="1"/>
-          <p:nvPr/>
-        </p:nvSpPr>
-        <p:spPr>
-          <a:xfrm>
-            <a:off x="843991" y="1273759"/>
-            <a:ext cx="10752429" cy="2424988"/>
-          </a:xfrm>
-          <a:prstGeom prst="rect">
-            <a:avLst/>
-          </a:prstGeom>
-          <a:noFill/>
-        </p:spPr>
-        <p:txBody>
-          <a:bodyPr wrap="square">
-            <a:spAutoFit/>
-          </a:bodyPr>
-          <a:lstStyle/>
-          <a:p>
-            <a:r>
-              <a:rPr sz="5400" b="1" u="none">
-                <a:solidFill>
-                  <a:srgbClr val="181C23"/>
-                </a:solidFill>
-                <a:latin typeface="맑은 고딕"/>
-              </a:rPr>
-              <a:t>AI·반도체 투자와 장기 위험자본</a:t>
-            </a:r>
-          </a:p>
-        </p:txBody>
-      </p:sp>
-    </p:spTree>
-  </p:cSld>
-  <p:clrMapOvr>
-    <a:masterClrMapping/>
-  </p:clrMapOvr>
-</p:sld>
-</file>
-
-<file path=ppt/slides/slide7.xml><?xml version="1.0" encoding="utf-8"?>
-<p:sld xmlns:a="http://schemas.openxmlformats.org/drawingml/2006/main" xmlns:p="http://schemas.openxmlformats.org/presentationml/2006/main" xmlns:r="http://schemas.openxmlformats.org/officeDocument/2006/relationships">
-  <p:cSld>
-    <p:bg>
-      <p:bgPr>
-        <a:solidFill>
-          <a:srgbClr val="F8F9FA"/>
-        </a:solidFill>
-        <a:effectLst/>
-      </p:bgPr>
-    </p:bg>
-    <p:spTree>
-      <p:nvGrpSpPr>
-        <p:cNvPr id="1" name=""/>
-        <p:cNvGrpSpPr/>
-        <p:nvPr/>
-      </p:nvGrpSpPr>
-      <p:grpSpPr/>
-      <p:sp>
-        <p:nvSpPr>
-          <p:cNvPr id="2" name="TextBox 1"/>
-          <p:cNvSpPr txBox="1"/>
-          <p:nvPr/>
-        </p:nvSpPr>
-        <p:spPr>
-          <a:xfrm>
-            <a:off x="572414" y="356616"/>
-            <a:ext cx="11192256" cy="521207"/>
-          </a:xfrm>
-          <a:prstGeom prst="rect">
-            <a:avLst/>
-          </a:prstGeom>
-          <a:noFill/>
-        </p:spPr>
-        <p:txBody>
-          <a:bodyPr wrap="square">
-            <a:spAutoFit/>
-          </a:bodyPr>
-          <a:lstStyle/>
-          <a:p>
-            <a:r>
-              <a:rPr sz="2800" b="0" u="none">
-                <a:solidFill>
-                  <a:srgbClr val="FF0000"/>
-                </a:solidFill>
-                <a:latin typeface="맑은 고딕"/>
-              </a:rPr>
-              <a:t>AI가 소프트웨어만의 문제가 아니게 된 순간</a:t>
-            </a:r>
-          </a:p>
-        </p:txBody>
-      </p:sp>
-      <p:sp>
-        <p:nvSpPr>
-          <p:cNvPr id="3" name="TextBox 2"/>
-          <p:cNvSpPr txBox="1"/>
-          <p:nvPr/>
-        </p:nvSpPr>
-        <p:spPr>
-          <a:xfrm>
-            <a:off x="5989320" y="1208836"/>
-            <a:ext cx="5394960" cy="1302105"/>
-          </a:xfrm>
-          <a:prstGeom prst="rect">
-            <a:avLst/>
-          </a:prstGeom>
-          <a:noFill/>
-        </p:spPr>
-        <p:txBody>
-          <a:bodyPr wrap="square" anchor="ctr">
-            <a:spAutoFit/>
-          </a:bodyPr>
-          <a:lstStyle/>
-          <a:p>
-            <a:pPr>
-              <a:lnSpc>
-                <a:spcPct val="150000"/>
-              </a:lnSpc>
-              <a:spcAft>
-                <a:spcPts val="800"/>
-              </a:spcAft>
-            </a:pPr>
-            <a:r>
-              <a:rPr sz="2800" b="0" u="none">
-                <a:solidFill>
-                  <a:srgbClr val="000000"/>
-                </a:solidFill>
-                <a:latin typeface="맑은 고딕"/>
-              </a:rPr>
-              <a:t>AI는 모델만으로 돌아가지 않는다.</a:t>
-            </a:r>
-          </a:p>
-          <a:p>
-            <a:pPr>
-              <a:lnSpc>
-                <a:spcPct val="150000"/>
-              </a:lnSpc>
-              <a:spcAft>
-                <a:spcPts val="800"/>
-              </a:spcAft>
-            </a:pPr>
-            <a:r>
-              <a:rPr sz="2800" b="0" u="none">
-                <a:solidFill>
-                  <a:srgbClr val="000000"/>
-                </a:solidFill>
-                <a:latin typeface="맑은 고딕"/>
-              </a:rPr>
-              <a:t>반도체, 전력망, 데이터센터, 장비, 소재가 함께 필요하다.</a:t>
-            </a:r>
-          </a:p>
-        </p:txBody>
-      </p:sp>
-      <p:sp>
-        <p:nvSpPr>
-          <p:cNvPr id="4" name="Rectangle 3"/>
-          <p:cNvSpPr/>
-          <p:nvPr/>
-        </p:nvSpPr>
-        <p:spPr>
-          <a:xfrm>
-            <a:off x="713232" y="1417320"/>
-            <a:ext cx="4892040" cy="4114800"/>
-          </a:xfrm>
-          <a:prstGeom prst="rect">
-            <a:avLst/>
-          </a:prstGeom>
-          <a:solidFill>
-            <a:srgbClr val="F5F5F5"/>
-          </a:solidFill>
-          <a:ln w="12700">
-            <a:solidFill>
-              <a:srgbClr val="BEBEBE"/>
-            </a:solidFill>
-          </a:ln>
-        </p:spPr>
-        <p:style>
-          <a:lnRef idx="1">
-            <a:schemeClr val="accent1"/>
-          </a:lnRef>
-          <a:fillRef idx="3">
-            <a:schemeClr val="accent1"/>
-          </a:fillRef>
-          <a:effectRef idx="2">
-            <a:schemeClr val="accent1"/>
-          </a:effectRef>
-          <a:fontRef idx="minor">
-            <a:schemeClr val="lt1"/>
-          </a:fontRef>
-        </p:style>
-        <p:txBody>
-          <a:bodyPr rtlCol="0" anchor="ctr" wrap="square"/>
-          <a:lstStyle/>
-          <a:p>
-            <a:pPr algn="ctr"/>
-            <a:r>
-              <a:rPr sz="1800" b="0">
-                <a:solidFill>
-                  <a:srgbClr val="0070C0"/>
-                </a:solidFill>
-                <a:latin typeface="맑은 고딕"/>
-              </a:rPr>
-              <a:t>[기사 인용]</a:t>
-            </a:r>
-          </a:p>
-          <a:p>
-            <a:pPr algn="ctr">
-              <a:spcBef>
-                <a:spcPts val="800"/>
-              </a:spcBef>
-            </a:pPr>
-            <a:r>
-              <a:rPr sz="1800" b="1">
+              <a:rPr sz="2100" b="1">
                 <a:solidFill>
                   <a:srgbClr val="000000"/>
                 </a:solidFill>
@@ -15565,11 +17820,11 @@
             <a:r>
               <a:rPr sz="1400" b="0">
                 <a:solidFill>
-                  <a:srgbClr val="566070"/>
+                  <a:srgbClr val="373737"/>
                 </a:solidFill>
                 <a:latin typeface="맑은 고딕"/>
               </a:rPr>
-              <a:t>AI가 소프트웨어만의 문제가 아니게 된 순간</a:t>
+              <a:t>AI·반도체 장기 투자와 1차 메가프로젝트 자료. 세부 투자 규모는 방송…</a:t>
             </a:r>
           </a:p>
         </p:txBody>
@@ -15808,7 +18063,120 @@
         </p:nvSpPr>
         <p:spPr>
           <a:xfrm>
-            <a:off x="1901952" y="3776472"/>
+            <a:off x="1901952" y="3483864"/>
+            <a:ext cx="658368" cy="1655064"/>
+          </a:xfrm>
+          <a:prstGeom prst="rect">
+            <a:avLst/>
+          </a:prstGeom>
+          <a:solidFill>
+            <a:srgbClr val="4872C4"/>
+          </a:solidFill>
+          <a:ln>
+            <a:noFill/>
+          </a:ln>
+        </p:spPr>
+        <p:style>
+          <a:lnRef idx="1">
+            <a:schemeClr val="accent1"/>
+          </a:lnRef>
+          <a:fillRef idx="3">
+            <a:schemeClr val="accent1"/>
+          </a:fillRef>
+          <a:effectRef idx="2">
+            <a:schemeClr val="accent1"/>
+          </a:effectRef>
+          <a:fontRef idx="minor">
+            <a:schemeClr val="lt1"/>
+          </a:fontRef>
+        </p:style>
+        <p:txBody>
+          <a:bodyPr rtlCol="0" anchor="ctr"/>
+          <a:lstStyle/>
+          <a:p>
+            <a:pPr algn="ctr"/>
+          </a:p>
+        </p:txBody>
+      </p:sp>
+      <p:sp>
+        <p:nvSpPr>
+          <p:cNvPr id="8" name="TextBox 7"/>
+          <p:cNvSpPr txBox="1"/>
+          <p:nvPr/>
+        </p:nvSpPr>
+        <p:spPr>
+          <a:xfrm>
+            <a:off x="1645920" y="3172968"/>
+            <a:ext cx="1170432" cy="237744"/>
+          </a:xfrm>
+          <a:prstGeom prst="rect">
+            <a:avLst/>
+          </a:prstGeom>
+          <a:noFill/>
+        </p:spPr>
+        <p:txBody>
+          <a:bodyPr wrap="square">
+            <a:spAutoFit/>
+          </a:bodyPr>
+          <a:lstStyle/>
+          <a:p>
+            <a:pPr algn="ctr"/>
+            <a:r>
+              <a:rPr sz="1800" b="1" u="none">
+                <a:solidFill>
+                  <a:srgbClr val="373737"/>
+                </a:solidFill>
+                <a:latin typeface="맑은 고딕"/>
+              </a:rPr>
+              <a:t>데이터 라벨</a:t>
+            </a:r>
+          </a:p>
+        </p:txBody>
+      </p:sp>
+      <p:sp>
+        <p:nvSpPr>
+          <p:cNvPr id="9" name="TextBox 8"/>
+          <p:cNvSpPr txBox="1"/>
+          <p:nvPr/>
+        </p:nvSpPr>
+        <p:spPr>
+          <a:xfrm>
+            <a:off x="1609344" y="5212080"/>
+            <a:ext cx="1243584" cy="301752"/>
+          </a:xfrm>
+          <a:prstGeom prst="rect">
+            <a:avLst/>
+          </a:prstGeom>
+          <a:noFill/>
+        </p:spPr>
+        <p:txBody>
+          <a:bodyPr wrap="square">
+            <a:spAutoFit/>
+          </a:bodyPr>
+          <a:lstStyle/>
+          <a:p>
+            <a:pPr algn="ctr"/>
+            <a:r>
+              <a:rPr sz="1400" b="1" u="none">
+                <a:solidFill>
+                  <a:srgbClr val="373737"/>
+                </a:solidFill>
+                <a:latin typeface="맑은 고딕"/>
+              </a:rPr>
+              <a:t>데이터</a:t>
+            </a:r>
+          </a:p>
+        </p:txBody>
+      </p:sp>
+      <p:sp>
+        <p:nvSpPr>
+          <p:cNvPr id="10" name="Rectangle 9"/>
+          <p:cNvSpPr/>
+          <p:nvPr/>
+        </p:nvSpPr>
+        <p:spPr>
+          <a:xfrm>
+            <a:off x="4812792" y="3776472"/>
             <a:ext cx="658368" cy="1362456"/>
           </a:xfrm>
           <a:prstGeom prst="rect">
@@ -15845,13 +18213,13 @@
       </p:sp>
       <p:sp>
         <p:nvSpPr>
-          <p:cNvPr id="8" name="TextBox 7"/>
+          <p:cNvPr id="11" name="TextBox 10"/>
           <p:cNvSpPr txBox="1"/>
           <p:nvPr/>
         </p:nvSpPr>
         <p:spPr>
           <a:xfrm>
-            <a:off x="1645920" y="3465576"/>
+            <a:off x="4556760" y="3465576"/>
             <a:ext cx="1170432" cy="237744"/>
           </a:xfrm>
           <a:prstGeom prst="rect">
@@ -15873,20 +18241,20 @@
                 </a:solidFill>
                 <a:latin typeface="맑은 고딕"/>
               </a:rPr>
-              <a:t>정부는 국민성장펀드를 통해 장기…</a:t>
-            </a:r>
-          </a:p>
-        </p:txBody>
-      </p:sp>
-      <p:sp>
-        <p:nvSpPr>
-          <p:cNvPr id="9" name="TextBox 8"/>
+              <a:t>비교값</a:t>
+            </a:r>
+          </a:p>
+        </p:txBody>
+      </p:sp>
+      <p:sp>
+        <p:nvSpPr>
+          <p:cNvPr id="12" name="TextBox 11"/>
           <p:cNvSpPr txBox="1"/>
           <p:nvPr/>
         </p:nvSpPr>
         <p:spPr>
           <a:xfrm>
-            <a:off x="1609344" y="5212080"/>
+            <a:off x="4520184" y="5212080"/>
             <a:ext cx="1243584" cy="301752"/>
           </a:xfrm>
           <a:prstGeom prst="rect">
@@ -15908,20 +18276,20 @@
                 </a:solidFill>
                 <a:latin typeface="맑은 고딕"/>
               </a:rPr>
-              <a:t>정부는</a:t>
-            </a:r>
-          </a:p>
-        </p:txBody>
-      </p:sp>
-      <p:sp>
-        <p:nvSpPr>
-          <p:cNvPr id="10" name="Rectangle 9"/>
+              <a:t>비교값</a:t>
+            </a:r>
+          </a:p>
+        </p:txBody>
+      </p:sp>
+      <p:sp>
+        <p:nvSpPr>
+          <p:cNvPr id="13" name="Rectangle 12"/>
           <p:cNvSpPr/>
           <p:nvPr/>
         </p:nvSpPr>
         <p:spPr>
           <a:xfrm>
-            <a:off x="6268212" y="4069080"/>
+            <a:off x="7723631" y="4069080"/>
             <a:ext cx="658368" cy="1069848"/>
           </a:xfrm>
           <a:prstGeom prst="rect">
@@ -15958,13 +18326,13 @@
       </p:sp>
       <p:sp>
         <p:nvSpPr>
-          <p:cNvPr id="11" name="TextBox 10"/>
+          <p:cNvPr id="14" name="TextBox 13"/>
           <p:cNvSpPr txBox="1"/>
           <p:nvPr/>
         </p:nvSpPr>
         <p:spPr>
           <a:xfrm>
-            <a:off x="6012179" y="3758184"/>
+            <a:off x="7467599" y="3758184"/>
             <a:ext cx="1170432" cy="237744"/>
           </a:xfrm>
           <a:prstGeom prst="rect">
@@ -15986,20 +18354,20 @@
                 </a:solidFill>
                 <a:latin typeface="맑은 고딕"/>
               </a:rPr>
-              <a:t>여기서 “장기 위험자본”이라는…</a:t>
-            </a:r>
-          </a:p>
-        </p:txBody>
-      </p:sp>
-      <p:sp>
-        <p:nvSpPr>
-          <p:cNvPr id="12" name="TextBox 11"/>
+              <a:t>확인 필요</a:t>
+            </a:r>
+          </a:p>
+        </p:txBody>
+      </p:sp>
+      <p:sp>
+        <p:nvSpPr>
+          <p:cNvPr id="15" name="TextBox 14"/>
           <p:cNvSpPr txBox="1"/>
           <p:nvPr/>
         </p:nvSpPr>
         <p:spPr>
           <a:xfrm>
-            <a:off x="5975603" y="5212080"/>
+            <a:off x="7431023" y="5212080"/>
             <a:ext cx="1243584" cy="301752"/>
           </a:xfrm>
           <a:prstGeom prst="rect">
@@ -16021,14 +18389,14 @@
                 </a:solidFill>
                 <a:latin typeface="맑은 고딕"/>
               </a:rPr>
-              <a:t>여기서</a:t>
-            </a:r>
-          </a:p>
-        </p:txBody>
-      </p:sp>
-      <p:sp>
-        <p:nvSpPr>
-          <p:cNvPr id="13" name="TextBox 12"/>
+              <a:t>확인</a:t>
+            </a:r>
+          </a:p>
+        </p:txBody>
+      </p:sp>
+      <p:sp>
+        <p:nvSpPr>
+          <p:cNvPr id="16" name="TextBox 15"/>
           <p:cNvSpPr txBox="1"/>
           <p:nvPr/>
         </p:nvSpPr>
@@ -16056,7 +18424,7 @@
                 </a:solidFill>
                 <a:latin typeface="맑은 고딕"/>
               </a:rPr>
-              <a:t>(출처: www.korea.kr; speaker notes 참조)</a:t>
+              <a:t>(출처: 정책브리핑; speaker notes 참조)</a:t>
             </a:r>
           </a:p>
         </p:txBody>
@@ -16136,7 +18504,7 @@
             <a:avLst/>
           </a:prstGeom>
           <a:solidFill>
-            <a:srgbClr val="F5F5F5"/>
+            <a:srgbClr val="F8F8F8"/>
           </a:solidFill>
           <a:ln w="12700">
             <a:solidFill>
@@ -16159,12 +18527,37 @@
           </a:fontRef>
         </p:style>
         <p:txBody>
-          <a:bodyPr rtlCol="0" anchor="ctr" wrap="square"/>
+          <a:bodyPr rtlCol="0" anchor="ctr"/>
           <a:lstStyle/>
           <a:p>
             <a:pPr algn="ctr"/>
-            <a:r>
-              <a:rPr sz="1800" b="0">
+          </a:p>
+        </p:txBody>
+      </p:sp>
+      <p:sp>
+        <p:nvSpPr>
+          <p:cNvPr id="4" name="TextBox 3"/>
+          <p:cNvSpPr txBox="1"/>
+          <p:nvPr/>
+        </p:nvSpPr>
+        <p:spPr>
+          <a:xfrm>
+            <a:off x="822960" y="1527048"/>
+            <a:ext cx="914400" cy="201168"/>
+          </a:xfrm>
+          <a:prstGeom prst="rect">
+            <a:avLst/>
+          </a:prstGeom>
+          <a:noFill/>
+        </p:spPr>
+        <p:txBody>
+          <a:bodyPr wrap="square">
+            <a:spAutoFit/>
+          </a:bodyPr>
+          <a:lstStyle/>
+          <a:p>
+            <a:r>
+              <a:rPr sz="1200" b="0" u="none">
                 <a:solidFill>
                   <a:srgbClr val="0070C0"/>
                 </a:solidFill>
@@ -16177,7 +18570,272 @@
       </p:sp>
       <p:sp>
         <p:nvSpPr>
-          <p:cNvPr id="4" name="TextBox 3"/>
+          <p:cNvPr id="5" name="Rectangle 4"/>
+          <p:cNvSpPr/>
+          <p:nvPr/>
+        </p:nvSpPr>
+        <p:spPr>
+          <a:xfrm>
+            <a:off x="1033271" y="3040380"/>
+            <a:ext cx="1828799" cy="1143000"/>
+          </a:xfrm>
+          <a:prstGeom prst="rect">
+            <a:avLst/>
+          </a:prstGeom>
+          <a:solidFill>
+            <a:srgbClr val="FFFFFF"/>
+          </a:solidFill>
+          <a:ln w="12700">
+            <a:solidFill>
+              <a:srgbClr val="A0A0A0"/>
+            </a:solidFill>
+          </a:ln>
+        </p:spPr>
+        <p:style>
+          <a:lnRef idx="1">
+            <a:schemeClr val="accent1"/>
+          </a:lnRef>
+          <a:fillRef idx="3">
+            <a:schemeClr val="accent1"/>
+          </a:fillRef>
+          <a:effectRef idx="2">
+            <a:schemeClr val="accent1"/>
+          </a:effectRef>
+          <a:fontRef idx="minor">
+            <a:schemeClr val="lt1"/>
+          </a:fontRef>
+        </p:style>
+        <p:txBody>
+          <a:bodyPr rtlCol="0" anchor="ctr"/>
+          <a:lstStyle/>
+          <a:p>
+            <a:pPr algn="ctr"/>
+          </a:p>
+        </p:txBody>
+      </p:sp>
+      <p:sp>
+        <p:nvSpPr>
+          <p:cNvPr id="6" name="Rectangle 5"/>
+          <p:cNvSpPr/>
+          <p:nvPr/>
+        </p:nvSpPr>
+        <p:spPr>
+          <a:xfrm>
+            <a:off x="3456432" y="3040380"/>
+            <a:ext cx="1828799" cy="1143000"/>
+          </a:xfrm>
+          <a:prstGeom prst="rect">
+            <a:avLst/>
+          </a:prstGeom>
+          <a:solidFill>
+            <a:srgbClr val="FFFFFF"/>
+          </a:solidFill>
+          <a:ln w="12700">
+            <a:solidFill>
+              <a:srgbClr val="A0A0A0"/>
+            </a:solidFill>
+          </a:ln>
+        </p:spPr>
+        <p:style>
+          <a:lnRef idx="1">
+            <a:schemeClr val="accent1"/>
+          </a:lnRef>
+          <a:fillRef idx="3">
+            <a:schemeClr val="accent1"/>
+          </a:fillRef>
+          <a:effectRef idx="2">
+            <a:schemeClr val="accent1"/>
+          </a:effectRef>
+          <a:fontRef idx="minor">
+            <a:schemeClr val="lt1"/>
+          </a:fontRef>
+        </p:style>
+        <p:txBody>
+          <a:bodyPr rtlCol="0" anchor="ctr"/>
+          <a:lstStyle/>
+          <a:p>
+            <a:pPr algn="ctr"/>
+          </a:p>
+        </p:txBody>
+      </p:sp>
+      <p:sp>
+        <p:nvSpPr>
+          <p:cNvPr id="7" name="TextBox 6"/>
+          <p:cNvSpPr txBox="1"/>
+          <p:nvPr/>
+        </p:nvSpPr>
+        <p:spPr>
+          <a:xfrm>
+            <a:off x="1124712" y="3204972"/>
+            <a:ext cx="1645919" cy="320040"/>
+          </a:xfrm>
+          <a:prstGeom prst="rect">
+            <a:avLst/>
+          </a:prstGeom>
+          <a:noFill/>
+        </p:spPr>
+        <p:txBody>
+          <a:bodyPr wrap="square">
+            <a:spAutoFit/>
+          </a:bodyPr>
+          <a:lstStyle/>
+          <a:p>
+            <a:pPr algn="ctr"/>
+            <a:r>
+              <a:rPr sz="1800" b="1" u="none">
+                <a:solidFill>
+                  <a:srgbClr val="000000"/>
+                </a:solidFill>
+                <a:latin typeface="맑은 고딕"/>
+              </a:rPr>
+              <a:t>안전한 금융</a:t>
+            </a:r>
+          </a:p>
+        </p:txBody>
+      </p:sp>
+      <p:sp>
+        <p:nvSpPr>
+          <p:cNvPr id="8" name="TextBox 7"/>
+          <p:cNvSpPr txBox="1"/>
+          <p:nvPr/>
+        </p:nvSpPr>
+        <p:spPr>
+          <a:xfrm>
+            <a:off x="1124712" y="3607308"/>
+            <a:ext cx="1645919" cy="274320"/>
+          </a:xfrm>
+          <a:prstGeom prst="rect">
+            <a:avLst/>
+          </a:prstGeom>
+          <a:noFill/>
+        </p:spPr>
+        <p:txBody>
+          <a:bodyPr wrap="square">
+            <a:spAutoFit/>
+          </a:bodyPr>
+          <a:lstStyle/>
+          <a:p>
+            <a:pPr algn="ctr"/>
+            <a:r>
+              <a:rPr sz="1500" b="0" u="none">
+                <a:solidFill>
+                  <a:srgbClr val="373737"/>
+                </a:solidFill>
+                <a:latin typeface="맑은 고딕"/>
+              </a:rPr>
+              <a:t>담보 / 단기</a:t>
+            </a:r>
+          </a:p>
+        </p:txBody>
+      </p:sp>
+      <p:sp>
+        <p:nvSpPr>
+          <p:cNvPr id="9" name="TextBox 8"/>
+          <p:cNvSpPr txBox="1"/>
+          <p:nvPr/>
+        </p:nvSpPr>
+        <p:spPr>
+          <a:xfrm>
+            <a:off x="3547872" y="3204972"/>
+            <a:ext cx="1645919" cy="320040"/>
+          </a:xfrm>
+          <a:prstGeom prst="rect">
+            <a:avLst/>
+          </a:prstGeom>
+          <a:noFill/>
+        </p:spPr>
+        <p:txBody>
+          <a:bodyPr wrap="square">
+            <a:spAutoFit/>
+          </a:bodyPr>
+          <a:lstStyle/>
+          <a:p>
+            <a:pPr algn="ctr"/>
+            <a:r>
+              <a:rPr sz="1800" b="1" u="none">
+                <a:solidFill>
+                  <a:srgbClr val="000000"/>
+                </a:solidFill>
+                <a:latin typeface="맑은 고딕"/>
+              </a:rPr>
+              <a:t>성장 금융</a:t>
+            </a:r>
+          </a:p>
+        </p:txBody>
+      </p:sp>
+      <p:sp>
+        <p:nvSpPr>
+          <p:cNvPr id="10" name="TextBox 9"/>
+          <p:cNvSpPr txBox="1"/>
+          <p:nvPr/>
+        </p:nvSpPr>
+        <p:spPr>
+          <a:xfrm>
+            <a:off x="3547872" y="3607308"/>
+            <a:ext cx="1645919" cy="274320"/>
+          </a:xfrm>
+          <a:prstGeom prst="rect">
+            <a:avLst/>
+          </a:prstGeom>
+          <a:noFill/>
+        </p:spPr>
+        <p:txBody>
+          <a:bodyPr wrap="square">
+            <a:spAutoFit/>
+          </a:bodyPr>
+          <a:lstStyle/>
+          <a:p>
+            <a:pPr algn="ctr"/>
+            <a:r>
+              <a:rPr sz="1500" b="0" u="none">
+                <a:solidFill>
+                  <a:srgbClr val="373737"/>
+                </a:solidFill>
+                <a:latin typeface="맑은 고딕"/>
+              </a:rPr>
+              <a:t>장기 / 위험분담</a:t>
+            </a:r>
+          </a:p>
+        </p:txBody>
+      </p:sp>
+      <p:sp>
+        <p:nvSpPr>
+          <p:cNvPr id="11" name="TextBox 10"/>
+          <p:cNvSpPr txBox="1"/>
+          <p:nvPr/>
+        </p:nvSpPr>
+        <p:spPr>
+          <a:xfrm>
+            <a:off x="2930652" y="3387852"/>
+            <a:ext cx="457200" cy="347472"/>
+          </a:xfrm>
+          <a:prstGeom prst="rect">
+            <a:avLst/>
+          </a:prstGeom>
+          <a:noFill/>
+        </p:spPr>
+        <p:txBody>
+          <a:bodyPr wrap="square">
+            <a:spAutoFit/>
+          </a:bodyPr>
+          <a:lstStyle/>
+          <a:p>
+            <a:pPr algn="ctr"/>
+            <a:r>
+              <a:rPr sz="2200" b="1" u="none">
+                <a:solidFill>
+                  <a:srgbClr val="373737"/>
+                </a:solidFill>
+                <a:latin typeface="맑은 고딕"/>
+              </a:rPr>
+              <a:t>→</a:t>
+            </a:r>
+          </a:p>
+        </p:txBody>
+      </p:sp>
+      <p:sp>
+        <p:nvSpPr>
+          <p:cNvPr id="12" name="TextBox 11"/>
           <p:cNvSpPr txBox="1"/>
           <p:nvPr/>
         </p:nvSpPr>
@@ -16224,15 +18882,6 @@
                 <a:spcPts val="800"/>
               </a:spcAft>
             </a:pPr>
-            <a:r>
-              <a:rPr sz="2800" b="0" u="none">
-                <a:solidFill>
-                  <a:srgbClr val="000000"/>
-                </a:solidFill>
-                <a:latin typeface="맑은 고딕"/>
-              </a:rPr>
-              <a:t>하지만 초기 기술, 인력, 데이터, 공정 노하우는 평가하기 어렵다.</a:t>
-            </a:r>
           </a:p>
         </p:txBody>
       </p:sp>

--- a/outputs/pptx/productive_finance_policy_styled_draft.pptx
+++ b/outputs/pptx/productive_finance_policy_styled_draft.pptx
@@ -918,32 +918,27 @@
           </a:p>
           <a:p>
             <a:r>
+              <a:t>[]</a:t>
+            </a:r>
+          </a:p>
+          <a:p>
+            <a:r>
+              <a:t>overflow_body_lines:</a:t>
+            </a:r>
+          </a:p>
+          <a:p>
+            <a:r>
               <a:t>[</a:t>
             </a:r>
           </a:p>
           <a:p>
             <a:r>
-              <a:t>  "정책금융의 명분은 민간이 감당하기 어려운 초기 위험을 나눠지는…",</a:t>
-            </a:r>
-          </a:p>
-          <a:p>
-            <a:r>
-              <a:t>  "정책금융은 성장의 마중물일 수도, 손실의 통로일 수도 있다."</a:t>
-            </a:r>
-          </a:p>
-          <a:p>
-            <a:r>
-              <a:t>]</a:t>
-            </a:r>
-          </a:p>
-          <a:p>
-            <a:r>
-              <a:t>overflow_body_lines:</a:t>
-            </a:r>
-          </a:p>
-          <a:p>
-            <a:r>
-              <a:t>[</a:t>
+              <a:t>  "정책금융의 명분은 민간이 감당하기 어려운 초기 위험을 나눠지는 것이다.",</a:t>
+            </a:r>
+          </a:p>
+          <a:p>
+            <a:r>
+              <a:t>  "하지만 정책자금이 늘 좋은 결과를 만든다고 단정할 수는 없다.",</a:t>
             </a:r>
           </a:p>
           <a:p>
@@ -1275,6 +1270,16 @@
           </a:p>
           <a:p>
             <a:r>
+              <a:t>[]</a:t>
+            </a:r>
+          </a:p>
+          <a:p>
+            <a:r>
+              <a:t>overflow_body_lines:</a:t>
+            </a:r>
+          </a:p>
+          <a:p>
+            <a:r>
               <a:t>[</a:t>
             </a:r>
           </a:p>
@@ -1285,22 +1290,7 @@
           </a:p>
           <a:p>
             <a:r>
-              <a:t>  "기업은 긴 투자금을 원한다."</a:t>
-            </a:r>
-          </a:p>
-          <a:p>
-            <a:r>
-              <a:t>]</a:t>
-            </a:r>
-          </a:p>
-          <a:p>
-            <a:r>
-              <a:t>overflow_body_lines:</a:t>
-            </a:r>
-          </a:p>
-          <a:p>
-            <a:r>
-              <a:t>[</a:t>
+              <a:t>  "기업은 긴 투자금을 원한다.",</a:t>
             </a:r>
           </a:p>
           <a:p>
@@ -1934,12 +1924,7 @@
           </a:p>
           <a:p>
             <a:r>
-              <a:t>  "국민성장펀드는 민관합동 150조 원 규모로 첨단전략산업 생태계를…",</a:t>
-            </a:r>
-          </a:p>
-          <a:p>
-            <a:r>
-              <a:t>  "국민참여형 펀드는 일반 국민 자금도 일부 모아 자펀드에 투자하는…"</a:t>
+              <a:t>  "국민성장펀드는 민관합동 150조 원 규모로 첨단전략산업 생태계를…"</a:t>
             </a:r>
           </a:p>
           <a:p>
@@ -1955,6 +1940,11 @@
           <a:p>
             <a:r>
               <a:t>[</a:t>
+            </a:r>
+          </a:p>
+          <a:p>
+            <a:r>
+              <a:t>  "국민참여형 펀드는 일반 국민 자금도 일부 모아 자펀드에 투자하는 구조로 설계됐다.",</a:t>
             </a:r>
           </a:p>
           <a:p>
@@ -2301,12 +2291,12 @@
           </a:p>
           <a:p>
             <a:r>
-              <a:t>  "이 장치는 투자자의 위험을 낮추려는 설계지만",</a:t>
-            </a:r>
-          </a:p>
-          <a:p>
-            <a:r>
-              <a:t>  "손실을 누가, 어떤 순서로, 어디까지 부담하는지가 핵심 질문이다."</a:t>
+              <a:t>  "돈이 필요한 곳은 길고",</a:t>
+            </a:r>
+          </a:p>
+          <a:p>
+            <a:r>
+              <a:t>  "위험은 누가 나눌 것인가"</a:t>
             </a:r>
           </a:p>
           <a:p>
@@ -3020,32 +3010,27 @@
           </a:p>
           <a:p>
             <a:r>
+              <a:t>[]</a:t>
+            </a:r>
+          </a:p>
+          <a:p>
+            <a:r>
+              <a:t>overflow_body_lines:</a:t>
+            </a:r>
+          </a:p>
+          <a:p>
+            <a:r>
               <a:t>[</a:t>
             </a:r>
           </a:p>
           <a:p>
             <a:r>
-              <a:t>  "",</a:t>
-            </a:r>
-          </a:p>
-          <a:p>
-            <a:r>
-              <a:t>  "성장산업 지원과 특정 기업 밀어주기는 구분해서 다뤄야 한다."</a:t>
-            </a:r>
-          </a:p>
-          <a:p>
-            <a:r>
-              <a:t>]</a:t>
-            </a:r>
-          </a:p>
-          <a:p>
-            <a:r>
-              <a:t>overflow_body_lines:</a:t>
-            </a:r>
-          </a:p>
-          <a:p>
-            <a:r>
-              <a:t>[</a:t>
+              <a:t>  "공식자료는 AI, 반도체, 이차전지 등 첨단전략산업을 넓은 지원 대상으로 제시한다.",</a:t>
+            </a:r>
+          </a:p>
+          <a:p>
+            <a:r>
+              <a:t>  "하지만 방송에서는 이것이 특정 기업 성공 보장이나 특정 상품 추천처럼 들리면 안 된다.",</a:t>
             </a:r>
           </a:p>
           <a:p>
@@ -3387,32 +3372,27 @@
           </a:p>
           <a:p>
             <a:r>
+              <a:t>[]</a:t>
+            </a:r>
+          </a:p>
+          <a:p>
+            <a:r>
+              <a:t>overflow_body_lines:</a:t>
+            </a:r>
+          </a:p>
+          <a:p>
+            <a:r>
               <a:t>[</a:t>
             </a:r>
           </a:p>
           <a:p>
             <a:r>
-              <a:t>  "반대쪽 질문도 있다",</a:t>
-            </a:r>
-          </a:p>
-          <a:p>
-            <a:r>
-              <a:t>  "또 은행과 금융회사는 건전성 규제"</a:t>
-            </a:r>
-          </a:p>
-          <a:p>
-            <a:r>
-              <a:t>]</a:t>
-            </a:r>
-          </a:p>
-          <a:p>
-            <a:r>
-              <a:t>overflow_body_lines:</a:t>
-            </a:r>
-          </a:p>
-          <a:p>
-            <a:r>
-              <a:t>[</a:t>
+              <a:t>  "반대쪽 질문도 있다. 재정이 위험을 먼저 떠안으면 민간은 얼마나 책임 있게 투자할까.",</a:t>
+            </a:r>
+          </a:p>
+          <a:p>
+            <a:r>
+              <a:t>  "또 은행과 금융회사는 건전성 규제, 위험가중자산, 예금자 보호 논리 안에서 움직인다.",</a:t>
             </a:r>
           </a:p>
           <a:p>
@@ -3754,6 +3734,16 @@
           </a:p>
           <a:p>
             <a:r>
+              <a:t>[]</a:t>
+            </a:r>
+          </a:p>
+          <a:p>
+            <a:r>
+              <a:t>overflow_body_lines:</a:t>
+            </a:r>
+          </a:p>
+          <a:p>
+            <a:r>
               <a:t>[</a:t>
             </a:r>
           </a:p>
@@ -3764,22 +3754,7 @@
           </a:p>
           <a:p>
             <a:r>
-              <a:t>  ""</a:t>
-            </a:r>
-          </a:p>
-          <a:p>
-            <a:r>
-              <a:t>]</a:t>
-            </a:r>
-          </a:p>
-          <a:p>
-            <a:r>
-              <a:t>overflow_body_lines:</a:t>
-            </a:r>
-          </a:p>
-          <a:p>
-            <a:r>
-              <a:t>[</a:t>
+              <a:t>  "하지만 위험도 함께 나눠야 한다면, 손실이 발생했을 때 재정·운용사·투자자·금융권의 책임선이 중요해진다.",</a:t>
             </a:r>
           </a:p>
           <a:p>
@@ -4433,7 +4408,12 @@
           </a:p>
           <a:p>
             <a:r>
-              <a:t>  "“담보 및 단기수익 중심 금융 경쟁은 앞서가기 어렵다”는 문제…"</a:t>
+              <a:t>  "안전한 대출은 쉽지만",</a:t>
+            </a:r>
+          </a:p>
+          <a:p>
+            <a:r>
+              <a:t>  "긴 위험은 잘 담기 어렵다"</a:t>
             </a:r>
           </a:p>
           <a:p>
@@ -4449,11 +4429,6 @@
           <a:p>
             <a:r>
               <a:t>[</a:t>
-            </a:r>
-          </a:p>
-          <a:p>
-            <a:r>
-              <a:t>  "금융위원회 공식자료는 국민성장펀드가 5년간 150조 원, 2026년 30조 원 규모로 첨단산업 생태계에 자금을 공급하는 틀이라고 설명한다.",</a:t>
             </a:r>
           </a:p>
           <a:p>
@@ -4790,12 +4765,12 @@
           </a:p>
           <a:p>
             <a:r>
-              <a:t>  "금융권에 성장산업 투자를 요구하면 곧바로 건전성 문제가 따라온다.",</a:t>
-            </a:r>
-          </a:p>
-          <a:p>
-            <a:r>
-              <a:t>  "위험가중자산이 커지면 자본 부담도 커질 수 있고"</a:t>
+              <a:t>  "돈이 필요한 곳은 길고",</a:t>
+            </a:r>
+          </a:p>
+          <a:p>
+            <a:r>
+              <a:t>  "위험은 누가 나눌 것인가"</a:t>
             </a:r>
           </a:p>
           <a:p>
@@ -5142,32 +5117,27 @@
           </a:p>
           <a:p>
             <a:r>
+              <a:t>[]</a:t>
+            </a:r>
+          </a:p>
+          <a:p>
+            <a:r>
+              <a:t>overflow_body_lines:</a:t>
+            </a:r>
+          </a:p>
+          <a:p>
+            <a:r>
               <a:t>[</a:t>
             </a:r>
           </a:p>
           <a:p>
             <a:r>
-              <a:t>  "이 주제는 곧바로 특정 산업·기업·펀드 투자 판단처럼 보일 수…",</a:t>
-            </a:r>
-          </a:p>
-          <a:p>
-            <a:r>
-              <a:t>  "그래서 수익률"</a:t>
-            </a:r>
-          </a:p>
-          <a:p>
-            <a:r>
-              <a:t>]</a:t>
-            </a:r>
-          </a:p>
-          <a:p>
-            <a:r>
-              <a:t>overflow_body_lines:</a:t>
-            </a:r>
-          </a:p>
-          <a:p>
-            <a:r>
-              <a:t>[</a:t>
+              <a:t>  "이 주제는 곧바로 특정 산업·기업·펀드 투자 판단처럼 보일 수 있다.",</a:t>
+            </a:r>
+          </a:p>
+          <a:p>
+            <a:r>
+              <a:t>  "그래서 수익률, 주가, 매수·매도, 유망종목식 표현은 피해야 한다.",</a:t>
             </a:r>
           </a:p>
           <a:p>
@@ -5479,12 +5449,12 @@
           </a:p>
           <a:p>
             <a:r>
-              <a:t>  "생산적 금융의 질문은 “정부 정책이 맞다/틀리다”가 아니다.",</a:t>
-            </a:r>
-          </a:p>
-          <a:p>
-            <a:r>
-              <a:t>  "좋은 위험을 고르는 능력"</a:t>
+              <a:t>  "돈이 필요한 곳은 길고",</a:t>
+            </a:r>
+          </a:p>
+          <a:p>
+            <a:r>
+              <a:t>  "위험은 누가 나눌 것인가"</a:t>
             </a:r>
           </a:p>
           <a:p>
@@ -6249,12 +6219,12 @@
           </a:p>
           <a:p>
             <a:r>
-              <a:t>  "방송 전 꼭 채워야 할 자료: 금융위/산은 공식 원문",</a:t>
-            </a:r>
-          </a:p>
-          <a:p>
-            <a:r>
-              <a:t>  "지금 evidence pack은 enriched dry run에는 충분"</a:t>
+              <a:t>  "돈이 필요한 곳은 길고",</a:t>
+            </a:r>
+          </a:p>
+          <a:p>
+            <a:r>
+              <a:t>  "위험은 누가 나눌 것인가"</a:t>
             </a:r>
           </a:p>
           <a:p>
@@ -6657,12 +6627,7 @@
           </a:p>
           <a:p>
             <a:r>
-              <a:t>  "돈을 빌려줄 때 가장 쉬운 질문은 “담보가 있나?”다.",</a:t>
-            </a:r>
-          </a:p>
-          <a:p>
-            <a:r>
-              <a:t>  "은행은 자본규제와 위험가중자산을 고려해야 하므로"</a:t>
+              <a:t>  "돈을 빌려줄 때 가장 쉬운 질문은 “담보가 있나?”다."</a:t>
             </a:r>
           </a:p>
           <a:p>
@@ -6678,6 +6643,11 @@
           <a:p>
             <a:r>
               <a:t>[</a:t>
+            </a:r>
+          </a:p>
+          <a:p>
+            <a:r>
+              <a:t>  "은행은 자본규제와 위험가중자산을 고려해야 하므로, 위험한 자산을 무한정 늘릴 수 없다.",</a:t>
             </a:r>
           </a:p>
           <a:p>
@@ -7009,32 +6979,27 @@
           </a:p>
           <a:p>
             <a:r>
+              <a:t>[]</a:t>
+            </a:r>
+          </a:p>
+          <a:p>
+            <a:r>
+              <a:t>overflow_body_lines:</a:t>
+            </a:r>
+          </a:p>
+          <a:p>
+            <a:r>
               <a:t>[</a:t>
             </a:r>
           </a:p>
           <a:p>
             <a:r>
-              <a:t>  "AI와 반도체는 소프트웨어 개발비만의 문제가 아니라 설비",</a:t>
-            </a:r>
-          </a:p>
-          <a:p>
-            <a:r>
-              <a:t>  "그래서 이 이야기는 “대출을 늘리자”보다 “누가 긴 위험을 나눌…"</a:t>
-            </a:r>
-          </a:p>
-          <a:p>
-            <a:r>
-              <a:t>]</a:t>
-            </a:r>
-          </a:p>
-          <a:p>
-            <a:r>
-              <a:t>overflow_body_lines:</a:t>
-            </a:r>
-          </a:p>
-          <a:p>
-            <a:r>
-              <a:t>[</a:t>
+              <a:t>  "AI와 반도체는 소프트웨어 개발비만의 문제가 아니라 설비, 전력, 공정, 인력, 공급망이 함께 필요한 산업이다.",</a:t>
+            </a:r>
+          </a:p>
+          <a:p>
+            <a:r>
+              <a:t>  "정책자료는 국민성장펀드가 AI·반도체 같은 첨단전략산업에 장기 자금을 공급하려는 틀이라고 설명한다.",</a:t>
             </a:r>
           </a:p>
           <a:p>
@@ -7376,6 +7341,16 @@
           </a:p>
           <a:p>
             <a:r>
+              <a:t>[]</a:t>
+            </a:r>
+          </a:p>
+          <a:p>
+            <a:r>
+              <a:t>overflow_body_lines:</a:t>
+            </a:r>
+          </a:p>
+          <a:p>
+            <a:r>
               <a:t>[</a:t>
             </a:r>
           </a:p>
@@ -7386,22 +7361,7 @@
           </a:p>
           <a:p>
             <a:r>
-              <a:t>  "너무 위험하면 결국 손실을 누가 떠안느냐는 문제가 생긴다."</a:t>
-            </a:r>
-          </a:p>
-          <a:p>
-            <a:r>
-              <a:t>]</a:t>
-            </a:r>
-          </a:p>
-          <a:p>
-            <a:r>
-              <a:t>overflow_body_lines:</a:t>
-            </a:r>
-          </a:p>
-          <a:p>
-            <a:r>
-              <a:t>[</a:t>
+              <a:t>  "너무 위험하면 결국 손실을 누가 떠안느냐는 문제가 생긴다.",</a:t>
             </a:r>
           </a:p>
           <a:p>
@@ -8020,12 +7980,7 @@
           </a:p>
           <a:p>
             <a:r>
-              <a:t>  "AI는 모델만으로 돌아가지 않는다.",</a:t>
-            </a:r>
-          </a:p>
-          <a:p>
-            <a:r>
-              <a:t>  "반도체, 전력망, 데이터센터, 장비, 소재가 함께 필요하다."</a:t>
+              <a:t>  "AI는 모델만으로 돌아가지 않는다."</a:t>
             </a:r>
           </a:p>
           <a:p>
@@ -8041,6 +7996,11 @@
           <a:p>
             <a:r>
               <a:t>[</a:t>
+            </a:r>
+          </a:p>
+          <a:p>
+            <a:r>
+              <a:t>  "반도체, 전력망, 데이터센터, 장비, 소재가 함께 필요하다.",</a:t>
             </a:r>
           </a:p>
           <a:p>
@@ -8724,6 +8684,16 @@
           </a:p>
           <a:p>
             <a:r>
+              <a:t>[]</a:t>
+            </a:r>
+          </a:p>
+          <a:p>
+            <a:r>
+              <a:t>overflow_body_lines:</a:t>
+            </a:r>
+          </a:p>
+          <a:p>
+            <a:r>
               <a:t>[</a:t>
             </a:r>
           </a:p>
@@ -8734,22 +8704,7 @@
           </a:p>
           <a:p>
             <a:r>
-              <a:t>  ""</a:t>
-            </a:r>
-          </a:p>
-          <a:p>
-            <a:r>
-              <a:t>]</a:t>
-            </a:r>
-          </a:p>
-          <a:p>
-            <a:r>
-              <a:t>overflow_body_lines:</a:t>
-            </a:r>
-          </a:p>
-          <a:p>
-            <a:r>
-              <a:t>[</a:t>
+              <a:t>  "하지만 초기 기술, 인력, 데이터, 공정 노하우는 평가하기 어렵다.",</a:t>
             </a:r>
           </a:p>
           <a:p>
@@ -12095,41 +12050,7 @@
       </p:sp>
       <p:sp>
         <p:nvSpPr>
-          <p:cNvPr id="4" name="TextBox 3"/>
-          <p:cNvSpPr txBox="1"/>
-          <p:nvPr/>
-        </p:nvSpPr>
-        <p:spPr>
-          <a:xfrm>
-            <a:off x="822960" y="1527048"/>
-            <a:ext cx="914400" cy="201168"/>
-          </a:xfrm>
-          <a:prstGeom prst="rect">
-            <a:avLst/>
-          </a:prstGeom>
-          <a:noFill/>
-        </p:spPr>
-        <p:txBody>
-          <a:bodyPr wrap="square">
-            <a:spAutoFit/>
-          </a:bodyPr>
-          <a:lstStyle/>
-          <a:p>
-            <a:r>
-              <a:rPr sz="1200" b="0" u="none">
-                <a:solidFill>
-                  <a:srgbClr val="0070C0"/>
-                </a:solidFill>
-                <a:latin typeface="맑은 고딕"/>
-              </a:rPr>
-              <a:t>[도식]</a:t>
-            </a:r>
-          </a:p>
-        </p:txBody>
-      </p:sp>
-      <p:sp>
-        <p:nvSpPr>
-          <p:cNvPr id="5" name="Rectangle 4"/>
+          <p:cNvPr id="4" name="Rectangle 3"/>
           <p:cNvSpPr/>
           <p:nvPr/>
         </p:nvSpPr>
@@ -12174,7 +12095,7 @@
       </p:sp>
       <p:sp>
         <p:nvSpPr>
-          <p:cNvPr id="6" name="Rectangle 5"/>
+          <p:cNvPr id="5" name="Rectangle 4"/>
           <p:cNvSpPr/>
           <p:nvPr/>
         </p:nvSpPr>
@@ -12219,7 +12140,7 @@
       </p:sp>
       <p:sp>
         <p:nvSpPr>
-          <p:cNvPr id="7" name="TextBox 6"/>
+          <p:cNvPr id="6" name="TextBox 5"/>
           <p:cNvSpPr txBox="1"/>
           <p:nvPr/>
         </p:nvSpPr>
@@ -12254,7 +12175,7 @@
       </p:sp>
       <p:sp>
         <p:nvSpPr>
-          <p:cNvPr id="8" name="TextBox 7"/>
+          <p:cNvPr id="7" name="TextBox 6"/>
           <p:cNvSpPr txBox="1"/>
           <p:nvPr/>
         </p:nvSpPr>
@@ -12289,7 +12210,7 @@
       </p:sp>
       <p:sp>
         <p:nvSpPr>
-          <p:cNvPr id="9" name="TextBox 8"/>
+          <p:cNvPr id="8" name="TextBox 7"/>
           <p:cNvSpPr txBox="1"/>
           <p:nvPr/>
         </p:nvSpPr>
@@ -12324,7 +12245,7 @@
       </p:sp>
       <p:sp>
         <p:nvSpPr>
-          <p:cNvPr id="10" name="TextBox 9"/>
+          <p:cNvPr id="9" name="TextBox 8"/>
           <p:cNvSpPr txBox="1"/>
           <p:nvPr/>
         </p:nvSpPr>
@@ -12359,7 +12280,7 @@
       </p:sp>
       <p:sp>
         <p:nvSpPr>
-          <p:cNvPr id="11" name="TextBox 10"/>
+          <p:cNvPr id="10" name="TextBox 9"/>
           <p:cNvSpPr txBox="1"/>
           <p:nvPr/>
         </p:nvSpPr>
@@ -12394,7 +12315,7 @@
       </p:sp>
       <p:sp>
         <p:nvSpPr>
-          <p:cNvPr id="12" name="TextBox 11"/>
+          <p:cNvPr id="11" name="TextBox 10"/>
           <p:cNvSpPr txBox="1"/>
           <p:nvPr/>
         </p:nvSpPr>
@@ -12418,38 +12339,7 @@
               <a:lnSpc>
                 <a:spcPct val="150000"/>
               </a:lnSpc>
-              <a:spcAft>
-                <a:spcPts val="800"/>
-              </a:spcAft>
             </a:pPr>
-            <a:r>
-              <a:rPr sz="2800" b="0" u="none">
-                <a:solidFill>
-                  <a:srgbClr val="000000"/>
-                </a:solidFill>
-                <a:latin typeface="맑은 고딕"/>
-              </a:rPr>
-              <a:t>정책금융의 명분은 민간이 감당하기 어려운 초기 위험을 나눠지는…</a:t>
-            </a:r>
-          </a:p>
-          <a:p>
-            <a:pPr>
-              <a:lnSpc>
-                <a:spcPct val="150000"/>
-              </a:lnSpc>
-              <a:spcAft>
-                <a:spcPts val="800"/>
-              </a:spcAft>
-            </a:pPr>
-            <a:r>
-              <a:rPr sz="2800" b="0" u="none">
-                <a:solidFill>
-                  <a:srgbClr val="000000"/>
-                </a:solidFill>
-                <a:latin typeface="맑은 고딕"/>
-              </a:rPr>
-              <a:t>정책금융은 성장의 마중물일 수도, 손실의 통로일 수도 있다.</a:t>
-            </a:r>
           </a:p>
         </p:txBody>
       </p:sp>
@@ -12560,41 +12450,7 @@
       </p:sp>
       <p:sp>
         <p:nvSpPr>
-          <p:cNvPr id="4" name="TextBox 3"/>
-          <p:cNvSpPr txBox="1"/>
-          <p:nvPr/>
-        </p:nvSpPr>
-        <p:spPr>
-          <a:xfrm>
-            <a:off x="822960" y="1527048"/>
-            <a:ext cx="914400" cy="201168"/>
-          </a:xfrm>
-          <a:prstGeom prst="rect">
-            <a:avLst/>
-          </a:prstGeom>
-          <a:noFill/>
-        </p:spPr>
-        <p:txBody>
-          <a:bodyPr wrap="square">
-            <a:spAutoFit/>
-          </a:bodyPr>
-          <a:lstStyle/>
-          <a:p>
-            <a:r>
-              <a:rPr sz="1200" b="0" u="none">
-                <a:solidFill>
-                  <a:srgbClr val="0070C0"/>
-                </a:solidFill>
-                <a:latin typeface="맑은 고딕"/>
-              </a:rPr>
-              <a:t>[도식]</a:t>
-            </a:r>
-          </a:p>
-        </p:txBody>
-      </p:sp>
-      <p:sp>
-        <p:nvSpPr>
-          <p:cNvPr id="5" name="Rectangle 4"/>
+          <p:cNvPr id="4" name="Rectangle 3"/>
           <p:cNvSpPr/>
           <p:nvPr/>
         </p:nvSpPr>
@@ -12639,7 +12495,7 @@
       </p:sp>
       <p:sp>
         <p:nvSpPr>
-          <p:cNvPr id="6" name="Rectangle 5"/>
+          <p:cNvPr id="5" name="Rectangle 4"/>
           <p:cNvSpPr/>
           <p:nvPr/>
         </p:nvSpPr>
@@ -12684,7 +12540,7 @@
       </p:sp>
       <p:sp>
         <p:nvSpPr>
-          <p:cNvPr id="7" name="TextBox 6"/>
+          <p:cNvPr id="6" name="TextBox 5"/>
           <p:cNvSpPr txBox="1"/>
           <p:nvPr/>
         </p:nvSpPr>
@@ -12719,7 +12575,7 @@
       </p:sp>
       <p:sp>
         <p:nvSpPr>
-          <p:cNvPr id="8" name="TextBox 7"/>
+          <p:cNvPr id="7" name="TextBox 6"/>
           <p:cNvSpPr txBox="1"/>
           <p:nvPr/>
         </p:nvSpPr>
@@ -12754,7 +12610,7 @@
       </p:sp>
       <p:sp>
         <p:nvSpPr>
-          <p:cNvPr id="9" name="TextBox 8"/>
+          <p:cNvPr id="8" name="TextBox 7"/>
           <p:cNvSpPr txBox="1"/>
           <p:nvPr/>
         </p:nvSpPr>
@@ -12789,7 +12645,7 @@
       </p:sp>
       <p:sp>
         <p:nvSpPr>
-          <p:cNvPr id="10" name="TextBox 9"/>
+          <p:cNvPr id="9" name="TextBox 8"/>
           <p:cNvSpPr txBox="1"/>
           <p:nvPr/>
         </p:nvSpPr>
@@ -12824,7 +12680,7 @@
       </p:sp>
       <p:sp>
         <p:nvSpPr>
-          <p:cNvPr id="11" name="TextBox 10"/>
+          <p:cNvPr id="10" name="TextBox 9"/>
           <p:cNvSpPr txBox="1"/>
           <p:nvPr/>
         </p:nvSpPr>
@@ -12859,7 +12715,7 @@
       </p:sp>
       <p:sp>
         <p:nvSpPr>
-          <p:cNvPr id="12" name="TextBox 11"/>
+          <p:cNvPr id="11" name="TextBox 10"/>
           <p:cNvSpPr txBox="1"/>
           <p:nvPr/>
         </p:nvSpPr>
@@ -12883,38 +12739,7 @@
               <a:lnSpc>
                 <a:spcPct val="150000"/>
               </a:lnSpc>
-              <a:spcAft>
-                <a:spcPts val="800"/>
-              </a:spcAft>
             </a:pPr>
-            <a:r>
-              <a:rPr sz="2800" b="0" u="none">
-                <a:solidFill>
-                  <a:srgbClr val="000000"/>
-                </a:solidFill>
-                <a:latin typeface="맑은 고딕"/>
-              </a:rPr>
-              <a:t>은행은 예금자의 돈을 지켜야 한다.</a:t>
-            </a:r>
-          </a:p>
-          <a:p>
-            <a:pPr>
-              <a:lnSpc>
-                <a:spcPct val="150000"/>
-              </a:lnSpc>
-              <a:spcAft>
-                <a:spcPts val="800"/>
-              </a:spcAft>
-            </a:pPr>
-            <a:r>
-              <a:rPr sz="2800" b="0" u="none">
-                <a:solidFill>
-                  <a:srgbClr val="000000"/>
-                </a:solidFill>
-                <a:latin typeface="맑은 고딕"/>
-              </a:rPr>
-              <a:t>기업은 긴 투자금을 원한다.</a:t>
-            </a:r>
           </a:p>
         </p:txBody>
       </p:sp>
@@ -13076,25 +12901,6 @@
                 <a:latin typeface="맑은 고딕"/>
               </a:rPr>
               <a:t>국민성장펀드는 민관합동 150조 원 규모로 첨단전략산업 생태계를…</a:t>
-            </a:r>
-          </a:p>
-          <a:p>
-            <a:pPr>
-              <a:lnSpc>
-                <a:spcPct val="150000"/>
-              </a:lnSpc>
-              <a:spcAft>
-                <a:spcPts val="800"/>
-              </a:spcAft>
-            </a:pPr>
-            <a:r>
-              <a:rPr sz="2800" b="0" u="none">
-                <a:solidFill>
-                  <a:srgbClr val="000000"/>
-                </a:solidFill>
-                <a:latin typeface="맑은 고딕"/>
-              </a:rPr>
-              <a:t>국민참여형 펀드는 일반 국민 자금도 일부 모아 자펀드에 투자하는…</a:t>
             </a:r>
           </a:p>
         </p:txBody>
@@ -13142,22 +12948,6 @@
           <a:p>
             <a:pPr algn="ctr"/>
             <a:r>
-              <a:rPr sz="1200" b="0">
-                <a:solidFill>
-                  <a:srgbClr val="0070C0"/>
-                </a:solidFill>
-                <a:latin typeface="맑은 고딕"/>
-              </a:rPr>
-              <a:t>[출처]</a:t>
-            </a:r>
-          </a:p>
-          <a:p>
-            <a:pPr algn="ctr">
-              <a:spcBef>
-                <a:spcPts val="800"/>
-              </a:spcBef>
-            </a:pPr>
-            <a:r>
               <a:rPr sz="2100" b="1">
                 <a:solidFill>
                   <a:srgbClr val="000000"/>
@@ -13282,7 +13072,7 @@
                 </a:solidFill>
                 <a:latin typeface="맑은 고딕"/>
               </a:rPr>
-              <a:t>이 장치는 투자자의 위험을 낮추려는 설계지만</a:t>
+              <a:t>돈이 필요한 곳은 길고</a:t>
             </a:r>
           </a:p>
           <a:p>
@@ -13301,7 +13091,7 @@
                 </a:solidFill>
                 <a:latin typeface="맑은 고딕"/>
               </a:rPr>
-              <a:t>손실을 누가, 어떤 순서로, 어디까지 부담하는지가 핵심 질문이다.</a:t>
+              <a:t>위험은 누가 나눌 것인가</a:t>
             </a:r>
           </a:p>
         </p:txBody>
@@ -13349,22 +13139,6 @@
           <a:p>
             <a:pPr algn="ctr"/>
             <a:r>
-              <a:rPr sz="1200" b="0">
-                <a:solidFill>
-                  <a:srgbClr val="0070C0"/>
-                </a:solidFill>
-                <a:latin typeface="맑은 고딕"/>
-              </a:rPr>
-              <a:t>[출처]</a:t>
-            </a:r>
-          </a:p>
-          <a:p>
-            <a:pPr algn="ctr">
-              <a:spcBef>
-                <a:spcPts val="800"/>
-              </a:spcBef>
-            </a:pPr>
-            <a:r>
               <a:rPr sz="2100" b="1">
                 <a:solidFill>
                   <a:srgbClr val="000000"/>
@@ -13461,22 +13235,6 @@
           <a:p>
             <a:pPr algn="ctr"/>
             <a:r>
-              <a:rPr sz="1200" b="0">
-                <a:solidFill>
-                  <a:srgbClr val="0070C0"/>
-                </a:solidFill>
-                <a:latin typeface="맑은 고딕"/>
-              </a:rPr>
-              <a:t>[인용]</a:t>
-            </a:r>
-          </a:p>
-          <a:p>
-            <a:pPr algn="ctr">
-              <a:spcBef>
-                <a:spcPts val="800"/>
-              </a:spcBef>
-            </a:pPr>
-            <a:r>
               <a:rPr sz="1800" b="1">
                 <a:solidFill>
                   <a:srgbClr val="000000"/>
@@ -13786,41 +13544,7 @@
       </p:sp>
       <p:sp>
         <p:nvSpPr>
-          <p:cNvPr id="4" name="TextBox 3"/>
-          <p:cNvSpPr txBox="1"/>
-          <p:nvPr/>
-        </p:nvSpPr>
-        <p:spPr>
-          <a:xfrm>
-            <a:off x="822960" y="1527048"/>
-            <a:ext cx="914400" cy="201168"/>
-          </a:xfrm>
-          <a:prstGeom prst="rect">
-            <a:avLst/>
-          </a:prstGeom>
-          <a:noFill/>
-        </p:spPr>
-        <p:txBody>
-          <a:bodyPr wrap="square">
-            <a:spAutoFit/>
-          </a:bodyPr>
-          <a:lstStyle/>
-          <a:p>
-            <a:r>
-              <a:rPr sz="1200" b="0" u="none">
-                <a:solidFill>
-                  <a:srgbClr val="0070C0"/>
-                </a:solidFill>
-                <a:latin typeface="맑은 고딕"/>
-              </a:rPr>
-              <a:t>[도식]</a:t>
-            </a:r>
-          </a:p>
-        </p:txBody>
-      </p:sp>
-      <p:sp>
-        <p:nvSpPr>
-          <p:cNvPr id="5" name="Rectangle 4"/>
+          <p:cNvPr id="4" name="Rectangle 3"/>
           <p:cNvSpPr/>
           <p:nvPr/>
         </p:nvSpPr>
@@ -13865,7 +13589,7 @@
       </p:sp>
       <p:sp>
         <p:nvSpPr>
-          <p:cNvPr id="6" name="Rectangle 5"/>
+          <p:cNvPr id="5" name="Rectangle 4"/>
           <p:cNvSpPr/>
           <p:nvPr/>
         </p:nvSpPr>
@@ -13910,7 +13634,7 @@
       </p:sp>
       <p:sp>
         <p:nvSpPr>
-          <p:cNvPr id="7" name="TextBox 6"/>
+          <p:cNvPr id="6" name="TextBox 5"/>
           <p:cNvSpPr txBox="1"/>
           <p:nvPr/>
         </p:nvSpPr>
@@ -13945,7 +13669,7 @@
       </p:sp>
       <p:sp>
         <p:nvSpPr>
-          <p:cNvPr id="8" name="TextBox 7"/>
+          <p:cNvPr id="7" name="TextBox 6"/>
           <p:cNvSpPr txBox="1"/>
           <p:nvPr/>
         </p:nvSpPr>
@@ -13980,7 +13704,7 @@
       </p:sp>
       <p:sp>
         <p:nvSpPr>
-          <p:cNvPr id="9" name="TextBox 8"/>
+          <p:cNvPr id="8" name="TextBox 7"/>
           <p:cNvSpPr txBox="1"/>
           <p:nvPr/>
         </p:nvSpPr>
@@ -14015,7 +13739,7 @@
       </p:sp>
       <p:sp>
         <p:nvSpPr>
-          <p:cNvPr id="10" name="TextBox 9"/>
+          <p:cNvPr id="9" name="TextBox 8"/>
           <p:cNvSpPr txBox="1"/>
           <p:nvPr/>
         </p:nvSpPr>
@@ -14050,7 +13774,7 @@
       </p:sp>
       <p:sp>
         <p:nvSpPr>
-          <p:cNvPr id="11" name="TextBox 10"/>
+          <p:cNvPr id="10" name="TextBox 9"/>
           <p:cNvSpPr txBox="1"/>
           <p:nvPr/>
         </p:nvSpPr>
@@ -14085,7 +13809,7 @@
       </p:sp>
       <p:sp>
         <p:nvSpPr>
-          <p:cNvPr id="12" name="TextBox 11"/>
+          <p:cNvPr id="11" name="TextBox 10"/>
           <p:cNvSpPr txBox="1"/>
           <p:nvPr/>
         </p:nvSpPr>
@@ -14109,29 +13833,7 @@
               <a:lnSpc>
                 <a:spcPct val="150000"/>
               </a:lnSpc>
-              <a:spcAft>
-                <a:spcPts val="800"/>
-              </a:spcAft>
             </a:pPr>
-          </a:p>
-          <a:p>
-            <a:pPr>
-              <a:lnSpc>
-                <a:spcPct val="150000"/>
-              </a:lnSpc>
-              <a:spcAft>
-                <a:spcPts val="800"/>
-              </a:spcAft>
-            </a:pPr>
-            <a:r>
-              <a:rPr sz="2800" b="0" u="none">
-                <a:solidFill>
-                  <a:srgbClr val="000000"/>
-                </a:solidFill>
-                <a:latin typeface="맑은 고딕"/>
-              </a:rPr>
-              <a:t>성장산업 지원과 특정 기업 밀어주기는 구분해서 다뤄야 한다.</a:t>
-            </a:r>
           </a:p>
         </p:txBody>
       </p:sp>
@@ -14242,41 +13944,7 @@
       </p:sp>
       <p:sp>
         <p:nvSpPr>
-          <p:cNvPr id="4" name="TextBox 3"/>
-          <p:cNvSpPr txBox="1"/>
-          <p:nvPr/>
-        </p:nvSpPr>
-        <p:spPr>
-          <a:xfrm>
-            <a:off x="822960" y="1527048"/>
-            <a:ext cx="914400" cy="201168"/>
-          </a:xfrm>
-          <a:prstGeom prst="rect">
-            <a:avLst/>
-          </a:prstGeom>
-          <a:noFill/>
-        </p:spPr>
-        <p:txBody>
-          <a:bodyPr wrap="square">
-            <a:spAutoFit/>
-          </a:bodyPr>
-          <a:lstStyle/>
-          <a:p>
-            <a:r>
-              <a:rPr sz="1200" b="0" u="none">
-                <a:solidFill>
-                  <a:srgbClr val="0070C0"/>
-                </a:solidFill>
-                <a:latin typeface="맑은 고딕"/>
-              </a:rPr>
-              <a:t>[도식]</a:t>
-            </a:r>
-          </a:p>
-        </p:txBody>
-      </p:sp>
-      <p:sp>
-        <p:nvSpPr>
-          <p:cNvPr id="5" name="Rectangle 4"/>
+          <p:cNvPr id="4" name="Rectangle 3"/>
           <p:cNvSpPr/>
           <p:nvPr/>
         </p:nvSpPr>
@@ -14321,7 +13989,7 @@
       </p:sp>
       <p:sp>
         <p:nvSpPr>
-          <p:cNvPr id="6" name="Rectangle 5"/>
+          <p:cNvPr id="5" name="Rectangle 4"/>
           <p:cNvSpPr/>
           <p:nvPr/>
         </p:nvSpPr>
@@ -14366,7 +14034,7 @@
       </p:sp>
       <p:sp>
         <p:nvSpPr>
-          <p:cNvPr id="7" name="TextBox 6"/>
+          <p:cNvPr id="6" name="TextBox 5"/>
           <p:cNvSpPr txBox="1"/>
           <p:nvPr/>
         </p:nvSpPr>
@@ -14401,7 +14069,7 @@
       </p:sp>
       <p:sp>
         <p:nvSpPr>
-          <p:cNvPr id="8" name="TextBox 7"/>
+          <p:cNvPr id="7" name="TextBox 6"/>
           <p:cNvSpPr txBox="1"/>
           <p:nvPr/>
         </p:nvSpPr>
@@ -14436,7 +14104,7 @@
       </p:sp>
       <p:sp>
         <p:nvSpPr>
-          <p:cNvPr id="9" name="TextBox 8"/>
+          <p:cNvPr id="8" name="TextBox 7"/>
           <p:cNvSpPr txBox="1"/>
           <p:nvPr/>
         </p:nvSpPr>
@@ -14471,7 +14139,7 @@
       </p:sp>
       <p:sp>
         <p:nvSpPr>
-          <p:cNvPr id="10" name="TextBox 9"/>
+          <p:cNvPr id="9" name="TextBox 8"/>
           <p:cNvSpPr txBox="1"/>
           <p:nvPr/>
         </p:nvSpPr>
@@ -14506,7 +14174,7 @@
       </p:sp>
       <p:sp>
         <p:nvSpPr>
-          <p:cNvPr id="11" name="TextBox 10"/>
+          <p:cNvPr id="10" name="TextBox 9"/>
           <p:cNvSpPr txBox="1"/>
           <p:nvPr/>
         </p:nvSpPr>
@@ -14541,7 +14209,7 @@
       </p:sp>
       <p:sp>
         <p:nvSpPr>
-          <p:cNvPr id="12" name="TextBox 11"/>
+          <p:cNvPr id="11" name="TextBox 10"/>
           <p:cNvSpPr txBox="1"/>
           <p:nvPr/>
         </p:nvSpPr>
@@ -14565,38 +14233,7 @@
               <a:lnSpc>
                 <a:spcPct val="150000"/>
               </a:lnSpc>
-              <a:spcAft>
-                <a:spcPts val="800"/>
-              </a:spcAft>
             </a:pPr>
-            <a:r>
-              <a:rPr sz="2800" b="0" u="none">
-                <a:solidFill>
-                  <a:srgbClr val="000000"/>
-                </a:solidFill>
-                <a:latin typeface="맑은 고딕"/>
-              </a:rPr>
-              <a:t>반대쪽 질문도 있다</a:t>
-            </a:r>
-          </a:p>
-          <a:p>
-            <a:pPr>
-              <a:lnSpc>
-                <a:spcPct val="150000"/>
-              </a:lnSpc>
-              <a:spcAft>
-                <a:spcPts val="800"/>
-              </a:spcAft>
-            </a:pPr>
-            <a:r>
-              <a:rPr sz="2800" b="0" u="none">
-                <a:solidFill>
-                  <a:srgbClr val="000000"/>
-                </a:solidFill>
-                <a:latin typeface="맑은 고딕"/>
-              </a:rPr>
-              <a:t>또 은행과 금융회사는 건전성 규제</a:t>
-            </a:r>
           </a:p>
         </p:txBody>
       </p:sp>
@@ -14707,41 +14344,7 @@
       </p:sp>
       <p:sp>
         <p:nvSpPr>
-          <p:cNvPr id="4" name="TextBox 3"/>
-          <p:cNvSpPr txBox="1"/>
-          <p:nvPr/>
-        </p:nvSpPr>
-        <p:spPr>
-          <a:xfrm>
-            <a:off x="822960" y="1527048"/>
-            <a:ext cx="914400" cy="201168"/>
-          </a:xfrm>
-          <a:prstGeom prst="rect">
-            <a:avLst/>
-          </a:prstGeom>
-          <a:noFill/>
-        </p:spPr>
-        <p:txBody>
-          <a:bodyPr wrap="square">
-            <a:spAutoFit/>
-          </a:bodyPr>
-          <a:lstStyle/>
-          <a:p>
-            <a:r>
-              <a:rPr sz="1200" b="0" u="none">
-                <a:solidFill>
-                  <a:srgbClr val="0070C0"/>
-                </a:solidFill>
-                <a:latin typeface="맑은 고딕"/>
-              </a:rPr>
-              <a:t>[도식]</a:t>
-            </a:r>
-          </a:p>
-        </p:txBody>
-      </p:sp>
-      <p:sp>
-        <p:nvSpPr>
-          <p:cNvPr id="5" name="Rectangle 4"/>
+          <p:cNvPr id="4" name="Rectangle 3"/>
           <p:cNvSpPr/>
           <p:nvPr/>
         </p:nvSpPr>
@@ -14786,7 +14389,7 @@
       </p:sp>
       <p:sp>
         <p:nvSpPr>
-          <p:cNvPr id="6" name="Rectangle 5"/>
+          <p:cNvPr id="5" name="Rectangle 4"/>
           <p:cNvSpPr/>
           <p:nvPr/>
         </p:nvSpPr>
@@ -14831,7 +14434,7 @@
       </p:sp>
       <p:sp>
         <p:nvSpPr>
-          <p:cNvPr id="7" name="TextBox 6"/>
+          <p:cNvPr id="6" name="TextBox 5"/>
           <p:cNvSpPr txBox="1"/>
           <p:nvPr/>
         </p:nvSpPr>
@@ -14866,7 +14469,7 @@
       </p:sp>
       <p:sp>
         <p:nvSpPr>
-          <p:cNvPr id="8" name="TextBox 7"/>
+          <p:cNvPr id="7" name="TextBox 6"/>
           <p:cNvSpPr txBox="1"/>
           <p:nvPr/>
         </p:nvSpPr>
@@ -14901,7 +14504,7 @@
       </p:sp>
       <p:sp>
         <p:nvSpPr>
-          <p:cNvPr id="9" name="TextBox 8"/>
+          <p:cNvPr id="8" name="TextBox 7"/>
           <p:cNvSpPr txBox="1"/>
           <p:nvPr/>
         </p:nvSpPr>
@@ -14936,7 +14539,7 @@
       </p:sp>
       <p:sp>
         <p:nvSpPr>
-          <p:cNvPr id="10" name="TextBox 9"/>
+          <p:cNvPr id="9" name="TextBox 8"/>
           <p:cNvSpPr txBox="1"/>
           <p:nvPr/>
         </p:nvSpPr>
@@ -14971,7 +14574,7 @@
       </p:sp>
       <p:sp>
         <p:nvSpPr>
-          <p:cNvPr id="11" name="TextBox 10"/>
+          <p:cNvPr id="10" name="TextBox 9"/>
           <p:cNvSpPr txBox="1"/>
           <p:nvPr/>
         </p:nvSpPr>
@@ -15006,7 +14609,7 @@
       </p:sp>
       <p:sp>
         <p:nvSpPr>
-          <p:cNvPr id="12" name="TextBox 11"/>
+          <p:cNvPr id="11" name="TextBox 10"/>
           <p:cNvSpPr txBox="1"/>
           <p:nvPr/>
         </p:nvSpPr>
@@ -15030,28 +14633,6 @@
               <a:lnSpc>
                 <a:spcPct val="150000"/>
               </a:lnSpc>
-              <a:spcAft>
-                <a:spcPts val="800"/>
-              </a:spcAft>
-            </a:pPr>
-            <a:r>
-              <a:rPr sz="2800" b="0" u="none">
-                <a:solidFill>
-                  <a:srgbClr val="000000"/>
-                </a:solidFill>
-                <a:latin typeface="맑은 고딕"/>
-              </a:rPr>
-              <a:t>성장의 과실을 함께 나누자는 말은 듣기 좋다.</a:t>
-            </a:r>
-          </a:p>
-          <a:p>
-            <a:pPr>
-              <a:lnSpc>
-                <a:spcPct val="150000"/>
-              </a:lnSpc>
-              <a:spcAft>
-                <a:spcPts val="800"/>
-              </a:spcAft>
             </a:pPr>
           </a:p>
         </p:txBody>
@@ -15213,7 +14794,26 @@
                 </a:solidFill>
                 <a:latin typeface="맑은 고딕"/>
               </a:rPr>
-              <a:t>“담보 및 단기수익 중심 금융 경쟁은 앞서가기 어렵다”는 문제…</a:t>
+              <a:t>안전한 대출은 쉽지만</a:t>
+            </a:r>
+          </a:p>
+          <a:p>
+            <a:pPr>
+              <a:lnSpc>
+                <a:spcPct val="150000"/>
+              </a:lnSpc>
+              <a:spcAft>
+                <a:spcPts val="800"/>
+              </a:spcAft>
+            </a:pPr>
+            <a:r>
+              <a:rPr sz="2800" b="0" u="none">
+                <a:solidFill>
+                  <a:srgbClr val="000000"/>
+                </a:solidFill>
+                <a:latin typeface="맑은 고딕"/>
+              </a:rPr>
+              <a:t>긴 위험은 잘 담기 어렵다</a:t>
             </a:r>
           </a:p>
         </p:txBody>
@@ -15261,22 +14861,6 @@
           <a:p>
             <a:pPr algn="ctr"/>
             <a:r>
-              <a:rPr sz="1200" b="0">
-                <a:solidFill>
-                  <a:srgbClr val="0070C0"/>
-                </a:solidFill>
-                <a:latin typeface="맑은 고딕"/>
-              </a:rPr>
-              <a:t>[출처]</a:t>
-            </a:r>
-          </a:p>
-          <a:p>
-            <a:pPr algn="ctr">
-              <a:spcBef>
-                <a:spcPts val="800"/>
-              </a:spcBef>
-            </a:pPr>
-            <a:r>
               <a:rPr sz="2100" b="1">
                 <a:solidFill>
                   <a:srgbClr val="000000"/>
@@ -15401,7 +14985,7 @@
                 </a:solidFill>
                 <a:latin typeface="맑은 고딕"/>
               </a:rPr>
-              <a:t>금융권에 성장산업 투자를 요구하면 곧바로 건전성 문제가 따라온다.</a:t>
+              <a:t>돈이 필요한 곳은 길고</a:t>
             </a:r>
           </a:p>
           <a:p>
@@ -15420,7 +15004,7 @@
                 </a:solidFill>
                 <a:latin typeface="맑은 고딕"/>
               </a:rPr>
-              <a:t>위험가중자산이 커지면 자본 부담도 커질 수 있고</a:t>
+              <a:t>위험은 누가 나눌 것인가</a:t>
             </a:r>
           </a:p>
         </p:txBody>
@@ -15468,22 +15052,6 @@
           <a:p>
             <a:pPr algn="ctr"/>
             <a:r>
-              <a:rPr sz="1200" b="0">
-                <a:solidFill>
-                  <a:srgbClr val="0070C0"/>
-                </a:solidFill>
-                <a:latin typeface="맑은 고딕"/>
-              </a:rPr>
-              <a:t>[출처]</a:t>
-            </a:r>
-          </a:p>
-          <a:p>
-            <a:pPr algn="ctr">
-              <a:spcBef>
-                <a:spcPts val="800"/>
-              </a:spcBef>
-            </a:pPr>
-            <a:r>
               <a:rPr sz="2100" b="1">
                 <a:solidFill>
                   <a:srgbClr val="000000"/>
@@ -15618,41 +15186,7 @@
       </p:sp>
       <p:sp>
         <p:nvSpPr>
-          <p:cNvPr id="4" name="TextBox 3"/>
-          <p:cNvSpPr txBox="1"/>
-          <p:nvPr/>
-        </p:nvSpPr>
-        <p:spPr>
-          <a:xfrm>
-            <a:off x="822960" y="1527048"/>
-            <a:ext cx="914400" cy="201168"/>
-          </a:xfrm>
-          <a:prstGeom prst="rect">
-            <a:avLst/>
-          </a:prstGeom>
-          <a:noFill/>
-        </p:spPr>
-        <p:txBody>
-          <a:bodyPr wrap="square">
-            <a:spAutoFit/>
-          </a:bodyPr>
-          <a:lstStyle/>
-          <a:p>
-            <a:r>
-              <a:rPr sz="1200" b="0" u="none">
-                <a:solidFill>
-                  <a:srgbClr val="0070C0"/>
-                </a:solidFill>
-                <a:latin typeface="맑은 고딕"/>
-              </a:rPr>
-              <a:t>[도식]</a:t>
-            </a:r>
-          </a:p>
-        </p:txBody>
-      </p:sp>
-      <p:sp>
-        <p:nvSpPr>
-          <p:cNvPr id="5" name="Rectangle 4"/>
+          <p:cNvPr id="4" name="Rectangle 3"/>
           <p:cNvSpPr/>
           <p:nvPr/>
         </p:nvSpPr>
@@ -15697,7 +15231,7 @@
       </p:sp>
       <p:sp>
         <p:nvSpPr>
-          <p:cNvPr id="6" name="Rectangle 5"/>
+          <p:cNvPr id="5" name="Rectangle 4"/>
           <p:cNvSpPr/>
           <p:nvPr/>
         </p:nvSpPr>
@@ -15742,7 +15276,7 @@
       </p:sp>
       <p:sp>
         <p:nvSpPr>
-          <p:cNvPr id="7" name="TextBox 6"/>
+          <p:cNvPr id="6" name="TextBox 5"/>
           <p:cNvSpPr txBox="1"/>
           <p:nvPr/>
         </p:nvSpPr>
@@ -15777,7 +15311,7 @@
       </p:sp>
       <p:sp>
         <p:nvSpPr>
-          <p:cNvPr id="8" name="TextBox 7"/>
+          <p:cNvPr id="7" name="TextBox 6"/>
           <p:cNvSpPr txBox="1"/>
           <p:nvPr/>
         </p:nvSpPr>
@@ -15812,7 +15346,7 @@
       </p:sp>
       <p:sp>
         <p:nvSpPr>
-          <p:cNvPr id="9" name="TextBox 8"/>
+          <p:cNvPr id="8" name="TextBox 7"/>
           <p:cNvSpPr txBox="1"/>
           <p:nvPr/>
         </p:nvSpPr>
@@ -15847,7 +15381,7 @@
       </p:sp>
       <p:sp>
         <p:nvSpPr>
-          <p:cNvPr id="10" name="TextBox 9"/>
+          <p:cNvPr id="9" name="TextBox 8"/>
           <p:cNvSpPr txBox="1"/>
           <p:nvPr/>
         </p:nvSpPr>
@@ -15882,7 +15416,7 @@
       </p:sp>
       <p:sp>
         <p:nvSpPr>
-          <p:cNvPr id="11" name="TextBox 10"/>
+          <p:cNvPr id="10" name="TextBox 9"/>
           <p:cNvSpPr txBox="1"/>
           <p:nvPr/>
         </p:nvSpPr>
@@ -15917,7 +15451,7 @@
       </p:sp>
       <p:sp>
         <p:nvSpPr>
-          <p:cNvPr id="12" name="TextBox 11"/>
+          <p:cNvPr id="11" name="TextBox 10"/>
           <p:cNvSpPr txBox="1"/>
           <p:nvPr/>
         </p:nvSpPr>
@@ -15941,38 +15475,7 @@
               <a:lnSpc>
                 <a:spcPct val="150000"/>
               </a:lnSpc>
-              <a:spcAft>
-                <a:spcPts val="800"/>
-              </a:spcAft>
             </a:pPr>
-            <a:r>
-              <a:rPr sz="2800" b="0" u="none">
-                <a:solidFill>
-                  <a:srgbClr val="000000"/>
-                </a:solidFill>
-                <a:latin typeface="맑은 고딕"/>
-              </a:rPr>
-              <a:t>이 주제는 곧바로 특정 산업·기업·펀드 투자 판단처럼 보일 수…</a:t>
-            </a:r>
-          </a:p>
-          <a:p>
-            <a:pPr>
-              <a:lnSpc>
-                <a:spcPct val="150000"/>
-              </a:lnSpc>
-              <a:spcAft>
-                <a:spcPts val="800"/>
-              </a:spcAft>
-            </a:pPr>
-            <a:r>
-              <a:rPr sz="2800" b="0" u="none">
-                <a:solidFill>
-                  <a:srgbClr val="000000"/>
-                </a:solidFill>
-                <a:latin typeface="맑은 고딕"/>
-              </a:rPr>
-              <a:t>그래서 수익률</a:t>
-            </a:r>
           </a:p>
         </p:txBody>
       </p:sp>
@@ -16079,22 +15582,6 @@
           <a:p>
             <a:pPr algn="ctr"/>
             <a:r>
-              <a:rPr sz="1200" b="0">
-                <a:solidFill>
-                  <a:srgbClr val="0070C0"/>
-                </a:solidFill>
-                <a:latin typeface="맑은 고딕"/>
-              </a:rPr>
-              <a:t>[출처]</a:t>
-            </a:r>
-          </a:p>
-          <a:p>
-            <a:pPr algn="ctr">
-              <a:spcBef>
-                <a:spcPts val="800"/>
-              </a:spcBef>
-            </a:pPr>
-            <a:r>
               <a:rPr sz="2100" b="1">
                 <a:solidFill>
                   <a:srgbClr val="000000"/>
@@ -16159,7 +15646,7 @@
                 </a:solidFill>
                 <a:latin typeface="맑은 고딕"/>
               </a:rPr>
-              <a:t>생산적 금융의 질문은 “정부 정책이 맞다/틀리다”가 아니다.</a:t>
+              <a:t>돈이 필요한 곳은 길고</a:t>
             </a:r>
           </a:p>
           <a:p>
@@ -16178,7 +15665,7 @@
                 </a:solidFill>
                 <a:latin typeface="맑은 고딕"/>
               </a:rPr>
-              <a:t>좋은 위험을 고르는 능력</a:t>
+              <a:t>위험은 누가 나눌 것인가</a:t>
             </a:r>
           </a:p>
         </p:txBody>
@@ -16401,7 +15888,7 @@
                 </a:solidFill>
                 <a:latin typeface="맑은 고딕"/>
               </a:rPr>
-              <a:t>방송 전 꼭 채워야 할 자료: 금융위/산은 공식 원문</a:t>
+              <a:t>돈이 필요한 곳은 길고</a:t>
             </a:r>
           </a:p>
           <a:p>
@@ -16420,7 +15907,7 @@
                 </a:solidFill>
                 <a:latin typeface="맑은 고딕"/>
               </a:rPr>
-              <a:t>지금 evidence pack은 enriched dry run에는 충분</a:t>
+              <a:t>위험은 누가 나눌 것인가</a:t>
             </a:r>
           </a:p>
         </p:txBody>
@@ -16523,25 +16010,6 @@
                 <a:latin typeface="맑은 고딕"/>
               </a:rPr>
               <a:t>돈을 빌려줄 때 가장 쉬운 질문은 “담보가 있나?”다.</a:t>
-            </a:r>
-          </a:p>
-          <a:p>
-            <a:pPr>
-              <a:lnSpc>
-                <a:spcPct val="150000"/>
-              </a:lnSpc>
-              <a:spcAft>
-                <a:spcPts val="800"/>
-              </a:spcAft>
-            </a:pPr>
-            <a:r>
-              <a:rPr sz="2800" b="0" u="none">
-                <a:solidFill>
-                  <a:srgbClr val="000000"/>
-                </a:solidFill>
-                <a:latin typeface="맑은 고딕"/>
-              </a:rPr>
-              <a:t>은행은 자본규제와 위험가중자산을 고려해야 하므로</a:t>
             </a:r>
           </a:p>
         </p:txBody>
@@ -16589,22 +16057,6 @@
           <a:p>
             <a:pPr algn="ctr"/>
             <a:r>
-              <a:rPr sz="1200" b="0">
-                <a:solidFill>
-                  <a:srgbClr val="0070C0"/>
-                </a:solidFill>
-                <a:latin typeface="맑은 고딕"/>
-              </a:rPr>
-              <a:t>[출처]</a:t>
-            </a:r>
-          </a:p>
-          <a:p>
-            <a:pPr algn="ctr">
-              <a:spcBef>
-                <a:spcPts val="800"/>
-              </a:spcBef>
-            </a:pPr>
-            <a:r>
               <a:rPr sz="2100" b="1">
                 <a:solidFill>
                   <a:srgbClr val="000000"/>
@@ -16739,41 +16191,7 @@
       </p:sp>
       <p:sp>
         <p:nvSpPr>
-          <p:cNvPr id="4" name="TextBox 3"/>
-          <p:cNvSpPr txBox="1"/>
-          <p:nvPr/>
-        </p:nvSpPr>
-        <p:spPr>
-          <a:xfrm>
-            <a:off x="822960" y="1527048"/>
-            <a:ext cx="914400" cy="201168"/>
-          </a:xfrm>
-          <a:prstGeom prst="rect">
-            <a:avLst/>
-          </a:prstGeom>
-          <a:noFill/>
-        </p:spPr>
-        <p:txBody>
-          <a:bodyPr wrap="square">
-            <a:spAutoFit/>
-          </a:bodyPr>
-          <a:lstStyle/>
-          <a:p>
-            <a:r>
-              <a:rPr sz="1200" b="0" u="none">
-                <a:solidFill>
-                  <a:srgbClr val="0070C0"/>
-                </a:solidFill>
-                <a:latin typeface="맑은 고딕"/>
-              </a:rPr>
-              <a:t>[도식]</a:t>
-            </a:r>
-          </a:p>
-        </p:txBody>
-      </p:sp>
-      <p:sp>
-        <p:nvSpPr>
-          <p:cNvPr id="5" name="Rectangle 4"/>
+          <p:cNvPr id="4" name="Rectangle 3"/>
           <p:cNvSpPr/>
           <p:nvPr/>
         </p:nvSpPr>
@@ -16818,7 +16236,7 @@
       </p:sp>
       <p:sp>
         <p:nvSpPr>
-          <p:cNvPr id="6" name="Rectangle 5"/>
+          <p:cNvPr id="5" name="Rectangle 4"/>
           <p:cNvSpPr/>
           <p:nvPr/>
         </p:nvSpPr>
@@ -16863,7 +16281,7 @@
       </p:sp>
       <p:sp>
         <p:nvSpPr>
-          <p:cNvPr id="7" name="TextBox 6"/>
+          <p:cNvPr id="6" name="TextBox 5"/>
           <p:cNvSpPr txBox="1"/>
           <p:nvPr/>
         </p:nvSpPr>
@@ -16898,7 +16316,7 @@
       </p:sp>
       <p:sp>
         <p:nvSpPr>
-          <p:cNvPr id="8" name="TextBox 7"/>
+          <p:cNvPr id="7" name="TextBox 6"/>
           <p:cNvSpPr txBox="1"/>
           <p:nvPr/>
         </p:nvSpPr>
@@ -16933,7 +16351,7 @@
       </p:sp>
       <p:sp>
         <p:nvSpPr>
-          <p:cNvPr id="9" name="TextBox 8"/>
+          <p:cNvPr id="8" name="TextBox 7"/>
           <p:cNvSpPr txBox="1"/>
           <p:nvPr/>
         </p:nvSpPr>
@@ -16968,7 +16386,7 @@
       </p:sp>
       <p:sp>
         <p:nvSpPr>
-          <p:cNvPr id="10" name="TextBox 9"/>
+          <p:cNvPr id="9" name="TextBox 8"/>
           <p:cNvSpPr txBox="1"/>
           <p:nvPr/>
         </p:nvSpPr>
@@ -17003,7 +16421,7 @@
       </p:sp>
       <p:sp>
         <p:nvSpPr>
-          <p:cNvPr id="11" name="TextBox 10"/>
+          <p:cNvPr id="10" name="TextBox 9"/>
           <p:cNvSpPr txBox="1"/>
           <p:nvPr/>
         </p:nvSpPr>
@@ -17038,7 +16456,7 @@
       </p:sp>
       <p:sp>
         <p:nvSpPr>
-          <p:cNvPr id="12" name="TextBox 11"/>
+          <p:cNvPr id="11" name="TextBox 10"/>
           <p:cNvSpPr txBox="1"/>
           <p:nvPr/>
         </p:nvSpPr>
@@ -17062,38 +16480,7 @@
               <a:lnSpc>
                 <a:spcPct val="150000"/>
               </a:lnSpc>
-              <a:spcAft>
-                <a:spcPts val="800"/>
-              </a:spcAft>
             </a:pPr>
-            <a:r>
-              <a:rPr sz="2800" b="0" u="none">
-                <a:solidFill>
-                  <a:srgbClr val="000000"/>
-                </a:solidFill>
-                <a:latin typeface="맑은 고딕"/>
-              </a:rPr>
-              <a:t>AI와 반도체는 소프트웨어 개발비만의 문제가 아니라 설비</a:t>
-            </a:r>
-          </a:p>
-          <a:p>
-            <a:pPr>
-              <a:lnSpc>
-                <a:spcPct val="150000"/>
-              </a:lnSpc>
-              <a:spcAft>
-                <a:spcPts val="800"/>
-              </a:spcAft>
-            </a:pPr>
-            <a:r>
-              <a:rPr sz="2800" b="0" u="none">
-                <a:solidFill>
-                  <a:srgbClr val="000000"/>
-                </a:solidFill>
-                <a:latin typeface="맑은 고딕"/>
-              </a:rPr>
-              <a:t>그래서 이 이야기는 “대출을 늘리자”보다 “누가 긴 위험을 나눌…</a:t>
-            </a:r>
           </a:p>
         </p:txBody>
       </p:sp>
@@ -17204,41 +16591,7 @@
       </p:sp>
       <p:sp>
         <p:nvSpPr>
-          <p:cNvPr id="4" name="TextBox 3"/>
-          <p:cNvSpPr txBox="1"/>
-          <p:nvPr/>
-        </p:nvSpPr>
-        <p:spPr>
-          <a:xfrm>
-            <a:off x="822960" y="1527048"/>
-            <a:ext cx="914400" cy="201168"/>
-          </a:xfrm>
-          <a:prstGeom prst="rect">
-            <a:avLst/>
-          </a:prstGeom>
-          <a:noFill/>
-        </p:spPr>
-        <p:txBody>
-          <a:bodyPr wrap="square">
-            <a:spAutoFit/>
-          </a:bodyPr>
-          <a:lstStyle/>
-          <a:p>
-            <a:r>
-              <a:rPr sz="1200" b="0" u="none">
-                <a:solidFill>
-                  <a:srgbClr val="0070C0"/>
-                </a:solidFill>
-                <a:latin typeface="맑은 고딕"/>
-              </a:rPr>
-              <a:t>[도식]</a:t>
-            </a:r>
-          </a:p>
-        </p:txBody>
-      </p:sp>
-      <p:sp>
-        <p:nvSpPr>
-          <p:cNvPr id="5" name="Rectangle 4"/>
+          <p:cNvPr id="4" name="Rectangle 3"/>
           <p:cNvSpPr/>
           <p:nvPr/>
         </p:nvSpPr>
@@ -17283,7 +16636,7 @@
       </p:sp>
       <p:sp>
         <p:nvSpPr>
-          <p:cNvPr id="6" name="Rectangle 5"/>
+          <p:cNvPr id="5" name="Rectangle 4"/>
           <p:cNvSpPr/>
           <p:nvPr/>
         </p:nvSpPr>
@@ -17328,7 +16681,7 @@
       </p:sp>
       <p:sp>
         <p:nvSpPr>
-          <p:cNvPr id="7" name="TextBox 6"/>
+          <p:cNvPr id="6" name="TextBox 5"/>
           <p:cNvSpPr txBox="1"/>
           <p:nvPr/>
         </p:nvSpPr>
@@ -17363,7 +16716,7 @@
       </p:sp>
       <p:sp>
         <p:nvSpPr>
-          <p:cNvPr id="8" name="TextBox 7"/>
+          <p:cNvPr id="7" name="TextBox 6"/>
           <p:cNvSpPr txBox="1"/>
           <p:nvPr/>
         </p:nvSpPr>
@@ -17398,7 +16751,7 @@
       </p:sp>
       <p:sp>
         <p:nvSpPr>
-          <p:cNvPr id="9" name="TextBox 8"/>
+          <p:cNvPr id="8" name="TextBox 7"/>
           <p:cNvSpPr txBox="1"/>
           <p:nvPr/>
         </p:nvSpPr>
@@ -17433,7 +16786,7 @@
       </p:sp>
       <p:sp>
         <p:nvSpPr>
-          <p:cNvPr id="10" name="TextBox 9"/>
+          <p:cNvPr id="9" name="TextBox 8"/>
           <p:cNvSpPr txBox="1"/>
           <p:nvPr/>
         </p:nvSpPr>
@@ -17468,7 +16821,7 @@
       </p:sp>
       <p:sp>
         <p:nvSpPr>
-          <p:cNvPr id="11" name="TextBox 10"/>
+          <p:cNvPr id="10" name="TextBox 9"/>
           <p:cNvSpPr txBox="1"/>
           <p:nvPr/>
         </p:nvSpPr>
@@ -17503,7 +16856,7 @@
       </p:sp>
       <p:sp>
         <p:nvSpPr>
-          <p:cNvPr id="12" name="TextBox 11"/>
+          <p:cNvPr id="11" name="TextBox 10"/>
           <p:cNvSpPr txBox="1"/>
           <p:nvPr/>
         </p:nvSpPr>
@@ -17527,38 +16880,7 @@
               <a:lnSpc>
                 <a:spcPct val="150000"/>
               </a:lnSpc>
-              <a:spcAft>
-                <a:spcPts val="800"/>
-              </a:spcAft>
             </a:pPr>
-            <a:r>
-              <a:rPr sz="2800" b="0" u="none">
-                <a:solidFill>
-                  <a:srgbClr val="000000"/>
-                </a:solidFill>
-                <a:latin typeface="맑은 고딕"/>
-              </a:rPr>
-              <a:t>너무 안전하면 성장산업이 돈을 못 받는다.</a:t>
-            </a:r>
-          </a:p>
-          <a:p>
-            <a:pPr>
-              <a:lnSpc>
-                <a:spcPct val="150000"/>
-              </a:lnSpc>
-              <a:spcAft>
-                <a:spcPts val="800"/>
-              </a:spcAft>
-            </a:pPr>
-            <a:r>
-              <a:rPr sz="2800" b="0" u="none">
-                <a:solidFill>
-                  <a:srgbClr val="000000"/>
-                </a:solidFill>
-                <a:latin typeface="맑은 고딕"/>
-              </a:rPr>
-              <a:t>너무 위험하면 결국 손실을 누가 떠안느냐는 문제가 생긴다.</a:t>
-            </a:r>
           </a:p>
         </p:txBody>
       </p:sp>
@@ -17720,25 +17042,6 @@
                 <a:latin typeface="맑은 고딕"/>
               </a:rPr>
               <a:t>AI는 모델만으로 돌아가지 않는다.</a:t>
-            </a:r>
-          </a:p>
-          <a:p>
-            <a:pPr>
-              <a:lnSpc>
-                <a:spcPct val="150000"/>
-              </a:lnSpc>
-              <a:spcAft>
-                <a:spcPts val="800"/>
-              </a:spcAft>
-            </a:pPr>
-            <a:r>
-              <a:rPr sz="2800" b="0" u="none">
-                <a:solidFill>
-                  <a:srgbClr val="000000"/>
-                </a:solidFill>
-                <a:latin typeface="맑은 고딕"/>
-              </a:rPr>
-              <a:t>반도체, 전력망, 데이터센터, 장비, 소재가 함께 필요하다.</a:t>
             </a:r>
           </a:p>
         </p:txBody>
@@ -17786,22 +17089,6 @@
           <a:p>
             <a:pPr algn="ctr"/>
             <a:r>
-              <a:rPr sz="1200" b="0">
-                <a:solidFill>
-                  <a:srgbClr val="0070C0"/>
-                </a:solidFill>
-                <a:latin typeface="맑은 고딕"/>
-              </a:rPr>
-              <a:t>[출처]</a:t>
-            </a:r>
-          </a:p>
-          <a:p>
-            <a:pPr algn="ctr">
-              <a:spcBef>
-                <a:spcPts val="800"/>
-              </a:spcBef>
-            </a:pPr>
-            <a:r>
               <a:rPr sz="2100" b="1">
                 <a:solidFill>
                   <a:srgbClr val="000000"/>
@@ -18536,41 +17823,7 @@
       </p:sp>
       <p:sp>
         <p:nvSpPr>
-          <p:cNvPr id="4" name="TextBox 3"/>
-          <p:cNvSpPr txBox="1"/>
-          <p:nvPr/>
-        </p:nvSpPr>
-        <p:spPr>
-          <a:xfrm>
-            <a:off x="822960" y="1527048"/>
-            <a:ext cx="914400" cy="201168"/>
-          </a:xfrm>
-          <a:prstGeom prst="rect">
-            <a:avLst/>
-          </a:prstGeom>
-          <a:noFill/>
-        </p:spPr>
-        <p:txBody>
-          <a:bodyPr wrap="square">
-            <a:spAutoFit/>
-          </a:bodyPr>
-          <a:lstStyle/>
-          <a:p>
-            <a:r>
-              <a:rPr sz="1200" b="0" u="none">
-                <a:solidFill>
-                  <a:srgbClr val="0070C0"/>
-                </a:solidFill>
-                <a:latin typeface="맑은 고딕"/>
-              </a:rPr>
-              <a:t>[도식]</a:t>
-            </a:r>
-          </a:p>
-        </p:txBody>
-      </p:sp>
-      <p:sp>
-        <p:nvSpPr>
-          <p:cNvPr id="5" name="Rectangle 4"/>
+          <p:cNvPr id="4" name="Rectangle 3"/>
           <p:cNvSpPr/>
           <p:nvPr/>
         </p:nvSpPr>
@@ -18615,7 +17868,7 @@
       </p:sp>
       <p:sp>
         <p:nvSpPr>
-          <p:cNvPr id="6" name="Rectangle 5"/>
+          <p:cNvPr id="5" name="Rectangle 4"/>
           <p:cNvSpPr/>
           <p:nvPr/>
         </p:nvSpPr>
@@ -18660,7 +17913,7 @@
       </p:sp>
       <p:sp>
         <p:nvSpPr>
-          <p:cNvPr id="7" name="TextBox 6"/>
+          <p:cNvPr id="6" name="TextBox 5"/>
           <p:cNvSpPr txBox="1"/>
           <p:nvPr/>
         </p:nvSpPr>
@@ -18695,7 +17948,7 @@
       </p:sp>
       <p:sp>
         <p:nvSpPr>
-          <p:cNvPr id="8" name="TextBox 7"/>
+          <p:cNvPr id="7" name="TextBox 6"/>
           <p:cNvSpPr txBox="1"/>
           <p:nvPr/>
         </p:nvSpPr>
@@ -18730,7 +17983,7 @@
       </p:sp>
       <p:sp>
         <p:nvSpPr>
-          <p:cNvPr id="9" name="TextBox 8"/>
+          <p:cNvPr id="8" name="TextBox 7"/>
           <p:cNvSpPr txBox="1"/>
           <p:nvPr/>
         </p:nvSpPr>
@@ -18765,7 +18018,7 @@
       </p:sp>
       <p:sp>
         <p:nvSpPr>
-          <p:cNvPr id="10" name="TextBox 9"/>
+          <p:cNvPr id="9" name="TextBox 8"/>
           <p:cNvSpPr txBox="1"/>
           <p:nvPr/>
         </p:nvSpPr>
@@ -18800,7 +18053,7 @@
       </p:sp>
       <p:sp>
         <p:nvSpPr>
-          <p:cNvPr id="11" name="TextBox 10"/>
+          <p:cNvPr id="10" name="TextBox 9"/>
           <p:cNvSpPr txBox="1"/>
           <p:nvPr/>
         </p:nvSpPr>
@@ -18835,7 +18088,7 @@
       </p:sp>
       <p:sp>
         <p:nvSpPr>
-          <p:cNvPr id="12" name="TextBox 11"/>
+          <p:cNvPr id="11" name="TextBox 10"/>
           <p:cNvSpPr txBox="1"/>
           <p:nvPr/>
         </p:nvSpPr>
@@ -18859,28 +18112,6 @@
               <a:lnSpc>
                 <a:spcPct val="150000"/>
               </a:lnSpc>
-              <a:spcAft>
-                <a:spcPts val="800"/>
-              </a:spcAft>
-            </a:pPr>
-            <a:r>
-              <a:rPr sz="2800" b="0" u="none">
-                <a:solidFill>
-                  <a:srgbClr val="000000"/>
-                </a:solidFill>
-                <a:latin typeface="맑은 고딕"/>
-              </a:rPr>
-              <a:t>공장, 토지, 건물은 담보로 잡기 쉽다.</a:t>
-            </a:r>
-          </a:p>
-          <a:p>
-            <a:pPr>
-              <a:lnSpc>
-                <a:spcPct val="150000"/>
-              </a:lnSpc>
-              <a:spcAft>
-                <a:spcPts val="800"/>
-              </a:spcAft>
             </a:pPr>
           </a:p>
         </p:txBody>
